--- a/Renewals.pptx
+++ b/Renewals.pptx
@@ -2659,620 +2659,379 @@
           </a:p>
         </p:txBody>
       </p:sp>
-      <p:grpSp>
-        <p:nvGrpSpPr>
-          <p:cNvPr id="41" name="Group 40">
+      <p:sp>
+        <p:nvSpPr>
+          <p:cNvPr id="30" name="Shape 28"/>
+          <p:cNvSpPr/>
+          <p:nvPr/>
+        </p:nvSpPr>
+        <p:spPr>
+          <a:xfrm>
+            <a:off x="12995755" y="3880287"/>
+            <a:ext cx="4703047" cy="1182447"/>
+          </a:xfrm>
+          <a:prstGeom prst="roundRect">
+            <a:avLst>
+              <a:gd name="adj" fmla="val 14191"/>
+            </a:avLst>
+          </a:prstGeom>
+          <a:solidFill>
+            <a:srgbClr val="643791">
+              <a:alpha val="8000"/>
+            </a:srgbClr>
+          </a:solidFill>
+          <a:ln/>
+        </p:spPr>
+        <p:txBody>
+          <a:bodyPr/>
+          <a:lstStyle/>
+          <a:p>
+            <a:r>
+              <a:rPr lang="en-US" sz="1400" dirty="0">
+                <a:solidFill>
+                  <a:srgbClr val="643791"/>
+                </a:solidFill>
+                <a:latin typeface="DM Sans 14pt" pitchFamily="2" charset="77"/>
+                <a:ea typeface="Arial" pitchFamily="34" charset="-122"/>
+                <a:cs typeface="Arial" pitchFamily="34" charset="-120"/>
+              </a:rPr>
+              <a:t>{{</a:t>
+            </a:r>
+            <a:r>
+              <a:rPr lang="en-US" sz="1400" dirty="0" err="1">
+                <a:solidFill>
+                  <a:srgbClr val="643791"/>
+                </a:solidFill>
+                <a:latin typeface="DM Sans 14pt" pitchFamily="2" charset="77"/>
+                <a:ea typeface="Arial" pitchFamily="34" charset="-122"/>
+                <a:cs typeface="Arial" pitchFamily="34" charset="-120"/>
+              </a:rPr>
+              <a:t>commentary_benchmark_intro</a:t>
+            </a:r>
+            <a:r>
+              <a:rPr lang="en-US" sz="1400" dirty="0">
+                <a:solidFill>
+                  <a:srgbClr val="643791"/>
+                </a:solidFill>
+                <a:latin typeface="DM Sans 14pt" pitchFamily="2" charset="77"/>
+                <a:ea typeface="Arial" pitchFamily="34" charset="-122"/>
+                <a:cs typeface="Arial" pitchFamily="34" charset="-120"/>
+              </a:rPr>
+              <a:t>}}</a:t>
+            </a:r>
+            <a:endParaRPr lang="en-US" sz="1400" dirty="0">
+              <a:latin typeface="DM Sans 14pt" pitchFamily="2" charset="77"/>
+            </a:endParaRPr>
+          </a:p>
+        </p:txBody>
+      </p:sp>
+      <p:sp>
+        <p:nvSpPr>
+          <p:cNvPr id="32" name="Shape 30"/>
+          <p:cNvSpPr/>
+          <p:nvPr/>
+        </p:nvSpPr>
+        <p:spPr>
+          <a:xfrm>
+            <a:off x="12995755" y="5271442"/>
+            <a:ext cx="4707474" cy="1174800"/>
+          </a:xfrm>
+          <a:prstGeom prst="roundRect">
+            <a:avLst>
+              <a:gd name="adj" fmla="val 15385"/>
+            </a:avLst>
+          </a:prstGeom>
+          <a:solidFill>
+            <a:srgbClr val="643791">
+              <a:alpha val="8000"/>
+            </a:srgbClr>
+          </a:solidFill>
+          <a:ln/>
+        </p:spPr>
+        <p:txBody>
+          <a:bodyPr/>
+          <a:lstStyle/>
+          <a:p>
+            <a:pPr>
+              <a:lnSpc>
+                <a:spcPct val="110000"/>
+              </a:lnSpc>
+            </a:pPr>
+            <a:r>
+              <a:rPr lang="en-US" sz="1400" dirty="0">
+                <a:solidFill>
+                  <a:srgbClr val="643791"/>
+                </a:solidFill>
+                <a:latin typeface="DM Sans 14pt" pitchFamily="2" charset="77"/>
+                <a:ea typeface="Arial" pitchFamily="34" charset="-122"/>
+                <a:cs typeface="Arial" pitchFamily="34" charset="-120"/>
+              </a:rPr>
+              <a:t>{{commentary_benchmark_point_1}}</a:t>
+            </a:r>
+            <a:endParaRPr lang="en-US" sz="1400" dirty="0">
+              <a:latin typeface="DM Sans 14pt" pitchFamily="2" charset="77"/>
+            </a:endParaRPr>
+          </a:p>
+        </p:txBody>
+      </p:sp>
+      <p:sp>
+        <p:nvSpPr>
+          <p:cNvPr id="34" name="Shape 32"/>
+          <p:cNvSpPr/>
+          <p:nvPr/>
+        </p:nvSpPr>
+        <p:spPr>
+          <a:xfrm>
+            <a:off x="12995755" y="6662597"/>
+            <a:ext cx="4707474" cy="1174410"/>
+          </a:xfrm>
+          <a:prstGeom prst="roundRect">
+            <a:avLst>
+              <a:gd name="adj" fmla="val 15385"/>
+            </a:avLst>
+          </a:prstGeom>
+          <a:solidFill>
+            <a:srgbClr val="643791">
+              <a:alpha val="8000"/>
+            </a:srgbClr>
+          </a:solidFill>
+          <a:ln/>
+        </p:spPr>
+        <p:txBody>
+          <a:bodyPr/>
+          <a:lstStyle/>
+          <a:p>
+            <a:pPr>
+              <a:lnSpc>
+                <a:spcPct val="110000"/>
+              </a:lnSpc>
+            </a:pPr>
+            <a:r>
+              <a:rPr lang="en-US" sz="1400" dirty="0">
+                <a:solidFill>
+                  <a:srgbClr val="643791"/>
+                </a:solidFill>
+                <a:latin typeface="DM Sans 14pt" pitchFamily="2" charset="77"/>
+                <a:ea typeface="Arial" pitchFamily="34" charset="-122"/>
+                <a:cs typeface="Arial" pitchFamily="34" charset="-120"/>
+              </a:rPr>
+              <a:t>{{commentary_benchmark_point_2}}</a:t>
+            </a:r>
+            <a:endParaRPr lang="en-US" sz="1400" dirty="0">
+              <a:latin typeface="DM Sans 14pt" pitchFamily="2" charset="77"/>
+            </a:endParaRPr>
+          </a:p>
+        </p:txBody>
+      </p:sp>
+      <p:sp>
+        <p:nvSpPr>
+          <p:cNvPr id="38" name="Text 36"/>
+          <p:cNvSpPr/>
+          <p:nvPr/>
+        </p:nvSpPr>
+        <p:spPr>
+          <a:xfrm>
+            <a:off x="609600" y="9753600"/>
+            <a:ext cx="2373511" cy="190500"/>
+          </a:xfrm>
+          <a:prstGeom prst="rect">
+            <a:avLst/>
+          </a:prstGeom>
+          <a:noFill/>
+          <a:ln/>
+        </p:spPr>
+        <p:txBody>
+          <a:bodyPr wrap="square" lIns="25400" tIns="25400" rIns="25400" bIns="25400" rtlCol="0" anchor="t">
+            <a:normAutofit fontScale="85000" lnSpcReduction="10000"/>
+          </a:bodyPr>
+          <a:lstStyle/>
+          <a:p>
+            <a:pPr marL="0" indent="0" algn="l">
+              <a:buNone/>
+            </a:pPr>
+            <a:r>
+              <a:rPr lang="en-US" sz="1050" kern="0" spc="42" dirty="0">
+                <a:solidFill>
+                  <a:srgbClr val="111111">
+                    <a:alpha val="63000"/>
+                  </a:srgbClr>
+                </a:solidFill>
+                <a:latin typeface="DM Sans 14pt" pitchFamily="2" charset="77"/>
+                <a:ea typeface="Arial" pitchFamily="34" charset="-122"/>
+                <a:cs typeface="Arial" pitchFamily="34" charset="-120"/>
+              </a:rPr>
+              <a:t>{{client_name}} · Advertising Report</a:t>
+            </a:r>
+            <a:endParaRPr lang="en-US" sz="1050" dirty="0">
+              <a:latin typeface="DM Sans 14pt" pitchFamily="2" charset="77"/>
+            </a:endParaRPr>
+          </a:p>
+        </p:txBody>
+      </p:sp>
+      <p:sp>
+        <p:nvSpPr>
+          <p:cNvPr id="39" name="Text 37"/>
+          <p:cNvSpPr/>
+          <p:nvPr/>
+        </p:nvSpPr>
+        <p:spPr>
+          <a:xfrm>
+            <a:off x="17233255" y="9753600"/>
+            <a:ext cx="521345" cy="190500"/>
+          </a:xfrm>
+          <a:prstGeom prst="rect">
+            <a:avLst/>
+          </a:prstGeom>
+          <a:noFill/>
+          <a:ln/>
+        </p:spPr>
+        <p:txBody>
+          <a:bodyPr wrap="square" lIns="25400" tIns="25400" rIns="25400" bIns="25400" rtlCol="0" anchor="t">
+            <a:normAutofit fontScale="92500" lnSpcReduction="10000"/>
+          </a:bodyPr>
+          <a:lstStyle/>
+          <a:p>
+            <a:pPr marL="0" indent="0" algn="l">
+              <a:buNone/>
+            </a:pPr>
+            <a:r>
+              <a:rPr lang="en-US" sz="1050" kern="0" spc="42" dirty="0">
+                <a:solidFill>
+                  <a:srgbClr val="111111">
+                    <a:alpha val="63000"/>
+                  </a:srgbClr>
+                </a:solidFill>
+                <a:latin typeface="DM Sans 14pt" pitchFamily="2" charset="77"/>
+                <a:ea typeface="Arial" pitchFamily="34" charset="-122"/>
+                <a:cs typeface="Arial" pitchFamily="34" charset="-120"/>
+              </a:rPr>
+              <a:t>02 / 07</a:t>
+            </a:r>
+            <a:endParaRPr lang="en-US" sz="1050" dirty="0">
+              <a:latin typeface="DM Sans 14pt" pitchFamily="2" charset="77"/>
+            </a:endParaRPr>
+          </a:p>
+        </p:txBody>
+      </p:sp>
+      <p:sp>
+        <p:nvSpPr>
+          <p:cNvPr id="46" name="Shape 28">
             <a:extLst>
               <a:ext uri="{FF2B5EF4-FFF2-40B4-BE49-F238E27FC236}">
-                <a16:creationId xmlns:a16="http://schemas.microsoft.com/office/drawing/2014/main" id="{A5A8AF6A-1C11-B3D3-016E-8B056473E7B8}"/>
+                <a16:creationId xmlns:a16="http://schemas.microsoft.com/office/drawing/2014/main" id="{6BF6FE9E-6B60-55B6-FFB2-3A3997294303}"/>
               </a:ext>
             </a:extLst>
           </p:cNvPr>
-          <p:cNvGrpSpPr/>
-          <p:nvPr/>
-        </p:nvGrpSpPr>
-        <p:grpSpPr>
-          <a:xfrm>
-            <a:off x="12995755" y="3880287"/>
-            <a:ext cx="4741200" cy="1281600"/>
-            <a:chOff x="13090029" y="4818473"/>
-            <a:chExt cx="4532760" cy="246230"/>
-          </a:xfrm>
-        </p:grpSpPr>
-        <p:sp>
-          <p:nvSpPr>
-            <p:cNvPr id="30" name="Shape 28"/>
-            <p:cNvSpPr/>
-            <p:nvPr/>
-          </p:nvSpPr>
-          <p:spPr>
-            <a:xfrm>
-              <a:off x="13090029" y="4818473"/>
-              <a:ext cx="4496284" cy="227180"/>
-            </a:xfrm>
-            <a:prstGeom prst="roundRect">
-              <a:avLst>
-                <a:gd name="adj" fmla="val 14191"/>
-              </a:avLst>
-            </a:prstGeom>
-            <a:solidFill>
-              <a:srgbClr val="643791">
-                <a:alpha val="8000"/>
-              </a:srgbClr>
-            </a:solidFill>
-            <a:ln/>
-          </p:spPr>
-          <p:txBody>
-            <a:bodyPr/>
-            <a:lstStyle/>
-            <a:p>
-              <a:endParaRPr lang="en-GB">
-                <a:latin typeface="DM Sans 14pt" pitchFamily="2" charset="77"/>
-              </a:endParaRPr>
-            </a:p>
-          </p:txBody>
-        </p:sp>
-        <p:sp>
-          <p:nvSpPr>
-            <p:cNvPr id="31" name="Text 29"/>
-            <p:cNvSpPr/>
-            <p:nvPr/>
-          </p:nvSpPr>
-          <p:spPr>
-            <a:xfrm>
-              <a:off x="13166229" y="4837523"/>
-              <a:ext cx="4456560" cy="227180"/>
-            </a:xfrm>
-            <a:prstGeom prst="rect">
-              <a:avLst/>
-            </a:prstGeom>
-            <a:noFill/>
-            <a:ln/>
-          </p:spPr>
-          <p:txBody>
-            <a:bodyPr wrap="square" lIns="25400" tIns="25400" rIns="25400" bIns="25400" rtlCol="0" anchor="t">
-              <a:normAutofit/>
-            </a:bodyPr>
-            <a:lstStyle/>
-            <a:p>
-              <a:pPr marL="0" indent="0" algn="l">
-                <a:lnSpc>
-                  <a:spcPct val="110000"/>
-                </a:lnSpc>
-                <a:buNone/>
-              </a:pPr>
-              <a:r>
-                <a:rPr lang="en-US" sz="1650" dirty="0">
-                  <a:solidFill>
-                    <a:srgbClr val="643791"/>
-                  </a:solidFill>
-                  <a:latin typeface="DM Sans 14pt" pitchFamily="2" charset="77"/>
-                  <a:ea typeface="Arial" pitchFamily="34" charset="-122"/>
-                  <a:cs typeface="Arial" pitchFamily="34" charset="-120"/>
-                </a:rPr>
-                <a:t>{{commentary_benchmark_intro}}</a:t>
-              </a:r>
-              <a:endParaRPr lang="en-US" sz="1650" dirty="0">
-                <a:latin typeface="DM Sans 14pt" pitchFamily="2" charset="77"/>
-              </a:endParaRPr>
-            </a:p>
-          </p:txBody>
-        </p:sp>
-      </p:grpSp>
-      <p:grpSp>
-        <p:nvGrpSpPr>
-          <p:cNvPr id="40" name="Group 39">
+          <p:cNvSpPr/>
+          <p:nvPr/>
+        </p:nvSpPr>
+        <p:spPr>
+          <a:xfrm>
+            <a:off x="12995755" y="1890712"/>
+            <a:ext cx="4703047" cy="1182447"/>
+          </a:xfrm>
+          <a:prstGeom prst="roundRect">
+            <a:avLst>
+              <a:gd name="adj" fmla="val 14191"/>
+            </a:avLst>
+          </a:prstGeom>
+          <a:solidFill>
+            <a:srgbClr val="643791">
+              <a:alpha val="8000"/>
+            </a:srgbClr>
+          </a:solidFill>
+          <a:ln/>
+        </p:spPr>
+        <p:txBody>
+          <a:bodyPr/>
+          <a:lstStyle/>
+          <a:p>
+            <a:r>
+              <a:rPr lang="en-GB" sz="1400" dirty="0">
+                <a:solidFill>
+                  <a:srgbClr val="643791"/>
+                </a:solidFill>
+                <a:latin typeface="DM Sans 14pt" pitchFamily="2" charset="77"/>
+              </a:rPr>
+              <a:t>{{</a:t>
+            </a:r>
+            <a:r>
+              <a:rPr lang="en-GB" sz="1400" dirty="0" err="1">
+                <a:solidFill>
+                  <a:srgbClr val="643791"/>
+                </a:solidFill>
+                <a:latin typeface="DM Sans 14pt" pitchFamily="2" charset="77"/>
+              </a:rPr>
+              <a:t>chart_explainer_benchmark_scatter</a:t>
+            </a:r>
+            <a:r>
+              <a:rPr lang="en-GB" sz="1400" dirty="0">
+                <a:solidFill>
+                  <a:srgbClr val="643791"/>
+                </a:solidFill>
+                <a:latin typeface="DM Sans 14pt" pitchFamily="2" charset="77"/>
+              </a:rPr>
+              <a:t>}}</a:t>
+            </a:r>
+            <a:endParaRPr lang="en-US" sz="1400" dirty="0">
+              <a:solidFill>
+                <a:srgbClr val="643791"/>
+              </a:solidFill>
+              <a:latin typeface="DM Sans 14pt" pitchFamily="2" charset="77"/>
+            </a:endParaRPr>
+          </a:p>
+        </p:txBody>
+      </p:sp>
+      <p:sp>
+        <p:nvSpPr>
+          <p:cNvPr id="49" name="Shape 32">
             <a:extLst>
               <a:ext uri="{FF2B5EF4-FFF2-40B4-BE49-F238E27FC236}">
-                <a16:creationId xmlns:a16="http://schemas.microsoft.com/office/drawing/2014/main" id="{9CA7AA5C-B876-B179-12DB-BD2856699852}"/>
+                <a16:creationId xmlns:a16="http://schemas.microsoft.com/office/drawing/2014/main" id="{49E04A68-847E-82E3-4038-6247474AA428}"/>
               </a:ext>
             </a:extLst>
           </p:cNvPr>
-          <p:cNvGrpSpPr/>
-          <p:nvPr/>
-        </p:nvGrpSpPr>
-        <p:grpSpPr>
-          <a:xfrm>
-            <a:off x="12995755" y="5271442"/>
-            <a:ext cx="4742571" cy="1281600"/>
-            <a:chOff x="13356729" y="5341306"/>
-            <a:chExt cx="4397870" cy="228600"/>
-          </a:xfrm>
-        </p:grpSpPr>
-        <p:sp>
-          <p:nvSpPr>
-            <p:cNvPr id="32" name="Shape 30"/>
-            <p:cNvSpPr/>
-            <p:nvPr/>
-          </p:nvSpPr>
-          <p:spPr>
-            <a:xfrm>
-              <a:off x="13356729" y="5341306"/>
-              <a:ext cx="4365324" cy="209550"/>
-            </a:xfrm>
-            <a:prstGeom prst="roundRect">
-              <a:avLst>
-                <a:gd name="adj" fmla="val 15385"/>
-              </a:avLst>
-            </a:prstGeom>
-            <a:solidFill>
-              <a:srgbClr val="643791">
-                <a:alpha val="8000"/>
-              </a:srgbClr>
-            </a:solidFill>
-            <a:ln/>
-          </p:spPr>
-          <p:txBody>
-            <a:bodyPr/>
-            <a:lstStyle/>
-            <a:p>
-              <a:endParaRPr lang="en-GB">
-                <a:latin typeface="DM Sans 14pt" pitchFamily="2" charset="77"/>
-              </a:endParaRPr>
-            </a:p>
-          </p:txBody>
-        </p:sp>
-        <p:sp>
-          <p:nvSpPr>
-            <p:cNvPr id="33" name="Text 31"/>
-            <p:cNvSpPr/>
-            <p:nvPr/>
-          </p:nvSpPr>
-          <p:spPr>
-            <a:xfrm>
-              <a:off x="13432928" y="5360356"/>
-              <a:ext cx="4321671" cy="209550"/>
-            </a:xfrm>
-            <a:prstGeom prst="rect">
-              <a:avLst/>
-            </a:prstGeom>
-            <a:noFill/>
-            <a:ln/>
-          </p:spPr>
-          <p:txBody>
-            <a:bodyPr wrap="square" lIns="25400" tIns="25400" rIns="25400" bIns="25400" rtlCol="0" anchor="t">
-              <a:normAutofit/>
-            </a:bodyPr>
-            <a:lstStyle/>
-            <a:p>
-              <a:pPr marL="0" indent="0" algn="l">
-                <a:lnSpc>
-                  <a:spcPct val="110000"/>
-                </a:lnSpc>
-                <a:buNone/>
-              </a:pPr>
-              <a:r>
-                <a:rPr lang="en-US" sz="1500" dirty="0">
-                  <a:solidFill>
-                    <a:srgbClr val="643791"/>
-                  </a:solidFill>
-                  <a:latin typeface="DM Sans 14pt" pitchFamily="2" charset="77"/>
-                  <a:ea typeface="Arial" pitchFamily="34" charset="-122"/>
-                  <a:cs typeface="Arial" pitchFamily="34" charset="-120"/>
-                </a:rPr>
-                <a:t>{{commentary_benchmark_point_1}}</a:t>
-              </a:r>
-              <a:endParaRPr lang="en-US" sz="1500" dirty="0">
-                <a:latin typeface="DM Sans 14pt" pitchFamily="2" charset="77"/>
-              </a:endParaRPr>
-            </a:p>
-          </p:txBody>
-        </p:sp>
-      </p:grpSp>
-      <p:grpSp>
-        <p:nvGrpSpPr>
-          <p:cNvPr id="5" name="Group 4">
-            <a:extLst>
-              <a:ext uri="{FF2B5EF4-FFF2-40B4-BE49-F238E27FC236}">
-                <a16:creationId xmlns:a16="http://schemas.microsoft.com/office/drawing/2014/main" id="{7C989DEF-8595-A89E-8F2A-C63EF0684A13}"/>
-              </a:ext>
-            </a:extLst>
-          </p:cNvPr>
-          <p:cNvGrpSpPr/>
-          <p:nvPr/>
-        </p:nvGrpSpPr>
-        <p:grpSpPr>
-          <a:xfrm>
-            <a:off x="12995755" y="6662597"/>
-            <a:ext cx="4742571" cy="1281174"/>
-            <a:chOff x="13356729" y="7948173"/>
-            <a:chExt cx="4397870" cy="228600"/>
-          </a:xfrm>
-        </p:grpSpPr>
-        <p:sp>
-          <p:nvSpPr>
-            <p:cNvPr id="34" name="Shape 32"/>
-            <p:cNvSpPr/>
-            <p:nvPr/>
-          </p:nvSpPr>
-          <p:spPr>
-            <a:xfrm>
-              <a:off x="13356729" y="7948173"/>
-              <a:ext cx="4365324" cy="209550"/>
-            </a:xfrm>
-            <a:prstGeom prst="roundRect">
-              <a:avLst>
-                <a:gd name="adj" fmla="val 15385"/>
-              </a:avLst>
-            </a:prstGeom>
-            <a:solidFill>
-              <a:srgbClr val="643791">
-                <a:alpha val="8000"/>
-              </a:srgbClr>
-            </a:solidFill>
-            <a:ln/>
-          </p:spPr>
-          <p:txBody>
-            <a:bodyPr/>
-            <a:lstStyle/>
-            <a:p>
-              <a:endParaRPr lang="en-GB">
-                <a:latin typeface="DM Sans 14pt" pitchFamily="2" charset="77"/>
-              </a:endParaRPr>
-            </a:p>
-          </p:txBody>
-        </p:sp>
-        <p:sp>
-          <p:nvSpPr>
-            <p:cNvPr id="35" name="Text 33"/>
-            <p:cNvSpPr/>
-            <p:nvPr/>
-          </p:nvSpPr>
-          <p:spPr>
-            <a:xfrm>
-              <a:off x="13432928" y="7967223"/>
-              <a:ext cx="4321671" cy="209550"/>
-            </a:xfrm>
-            <a:prstGeom prst="rect">
-              <a:avLst/>
-            </a:prstGeom>
-            <a:noFill/>
-            <a:ln/>
-          </p:spPr>
-          <p:txBody>
-            <a:bodyPr wrap="square" lIns="25400" tIns="25400" rIns="25400" bIns="25400" rtlCol="0" anchor="t">
-              <a:normAutofit/>
-            </a:bodyPr>
-            <a:lstStyle/>
-            <a:p>
-              <a:pPr marL="0" indent="0" algn="l">
-                <a:lnSpc>
-                  <a:spcPct val="110000"/>
-                </a:lnSpc>
-                <a:buNone/>
-              </a:pPr>
-              <a:r>
-                <a:rPr lang="en-US" sz="1500" dirty="0">
-                  <a:solidFill>
-                    <a:srgbClr val="643791"/>
-                  </a:solidFill>
-                  <a:latin typeface="DM Sans 14pt" pitchFamily="2" charset="77"/>
-                  <a:ea typeface="Arial" pitchFamily="34" charset="-122"/>
-                  <a:cs typeface="Arial" pitchFamily="34" charset="-120"/>
-                </a:rPr>
-                <a:t>{{commentary_benchmark_point_2}}</a:t>
-              </a:r>
-              <a:endParaRPr lang="en-US" sz="1500" dirty="0">
-                <a:latin typeface="DM Sans 14pt" pitchFamily="2" charset="77"/>
-              </a:endParaRPr>
-            </a:p>
-          </p:txBody>
-        </p:sp>
-      </p:grpSp>
-      <p:sp>
-        <p:nvSpPr>
-          <p:cNvPr id="38" name="Text 36"/>
-          <p:cNvSpPr/>
-          <p:nvPr/>
-        </p:nvSpPr>
-        <p:spPr>
-          <a:xfrm>
-            <a:off x="609600" y="9753600"/>
-            <a:ext cx="2373511" cy="190500"/>
-          </a:xfrm>
-          <a:prstGeom prst="rect">
-            <a:avLst/>
-          </a:prstGeom>
-          <a:noFill/>
-          <a:ln/>
-        </p:spPr>
-        <p:txBody>
-          <a:bodyPr wrap="square" lIns="25400" tIns="25400" rIns="25400" bIns="25400" rtlCol="0" anchor="t">
-            <a:normAutofit fontScale="85000" lnSpcReduction="10000"/>
-          </a:bodyPr>
-          <a:lstStyle/>
-          <a:p>
-            <a:pPr marL="0" indent="0" algn="l">
-              <a:buNone/>
-            </a:pPr>
-            <a:r>
-              <a:rPr lang="en-US" sz="1050" kern="0" spc="42" dirty="0">
-                <a:solidFill>
-                  <a:srgbClr val="111111">
-                    <a:alpha val="63000"/>
-                  </a:srgbClr>
-                </a:solidFill>
-                <a:latin typeface="DM Sans 14pt" pitchFamily="2" charset="77"/>
-                <a:ea typeface="Arial" pitchFamily="34" charset="-122"/>
-                <a:cs typeface="Arial" pitchFamily="34" charset="-120"/>
-              </a:rPr>
-              <a:t>{{client_name}} · Advertising Report</a:t>
-            </a:r>
-            <a:endParaRPr lang="en-US" sz="1050" dirty="0">
-              <a:latin typeface="DM Sans 14pt" pitchFamily="2" charset="77"/>
-            </a:endParaRPr>
-          </a:p>
-        </p:txBody>
-      </p:sp>
-      <p:sp>
-        <p:nvSpPr>
-          <p:cNvPr id="39" name="Text 37"/>
-          <p:cNvSpPr/>
-          <p:nvPr/>
-        </p:nvSpPr>
-        <p:spPr>
-          <a:xfrm>
-            <a:off x="17233255" y="9753600"/>
-            <a:ext cx="521345" cy="190500"/>
-          </a:xfrm>
-          <a:prstGeom prst="rect">
-            <a:avLst/>
-          </a:prstGeom>
-          <a:noFill/>
-          <a:ln/>
-        </p:spPr>
-        <p:txBody>
-          <a:bodyPr wrap="square" lIns="25400" tIns="25400" rIns="25400" bIns="25400" rtlCol="0" anchor="t">
-            <a:normAutofit fontScale="92500" lnSpcReduction="10000"/>
-          </a:bodyPr>
-          <a:lstStyle/>
-          <a:p>
-            <a:pPr marL="0" indent="0" algn="l">
-              <a:buNone/>
-            </a:pPr>
-            <a:r>
-              <a:rPr lang="en-US" sz="1050" kern="0" spc="42" dirty="0">
-                <a:solidFill>
-                  <a:srgbClr val="111111">
-                    <a:alpha val="63000"/>
-                  </a:srgbClr>
-                </a:solidFill>
-                <a:latin typeface="DM Sans 14pt" pitchFamily="2" charset="77"/>
-                <a:ea typeface="Arial" pitchFamily="34" charset="-122"/>
-                <a:cs typeface="Arial" pitchFamily="34" charset="-120"/>
-              </a:rPr>
-              <a:t>02 / 07</a:t>
-            </a:r>
-            <a:endParaRPr lang="en-US" sz="1050" dirty="0">
-              <a:latin typeface="DM Sans 14pt" pitchFamily="2" charset="77"/>
-            </a:endParaRPr>
-          </a:p>
-        </p:txBody>
-      </p:sp>
-      <p:grpSp>
-        <p:nvGrpSpPr>
-          <p:cNvPr id="57" name="Group 56">
-            <a:extLst>
-              <a:ext uri="{FF2B5EF4-FFF2-40B4-BE49-F238E27FC236}">
-                <a16:creationId xmlns:a16="http://schemas.microsoft.com/office/drawing/2014/main" id="{9C526401-7597-287A-785C-993BBDBA92B4}"/>
-              </a:ext>
-            </a:extLst>
-          </p:cNvPr>
-          <p:cNvGrpSpPr/>
-          <p:nvPr/>
-        </p:nvGrpSpPr>
-        <p:grpSpPr>
-          <a:xfrm>
-            <a:off x="12995755" y="1890712"/>
-            <a:ext cx="4741200" cy="1281600"/>
-            <a:chOff x="13090027" y="1890712"/>
-            <a:chExt cx="4741200" cy="1281600"/>
-          </a:xfrm>
-        </p:grpSpPr>
-        <p:sp>
-          <p:nvSpPr>
-            <p:cNvPr id="46" name="Shape 28">
-              <a:extLst>
-                <a:ext uri="{FF2B5EF4-FFF2-40B4-BE49-F238E27FC236}">
-                  <a16:creationId xmlns:a16="http://schemas.microsoft.com/office/drawing/2014/main" id="{6BF6FE9E-6B60-55B6-FFB2-3A3997294303}"/>
-                </a:ext>
-              </a:extLst>
-            </p:cNvPr>
-            <p:cNvSpPr/>
-            <p:nvPr/>
-          </p:nvSpPr>
-          <p:spPr>
-            <a:xfrm>
-              <a:off x="13090027" y="1890712"/>
-              <a:ext cx="4703047" cy="1182447"/>
-            </a:xfrm>
-            <a:prstGeom prst="roundRect">
-              <a:avLst>
-                <a:gd name="adj" fmla="val 14191"/>
-              </a:avLst>
-            </a:prstGeom>
-            <a:solidFill>
-              <a:srgbClr val="643791">
-                <a:alpha val="8000"/>
-              </a:srgbClr>
-            </a:solidFill>
-            <a:ln/>
-          </p:spPr>
-          <p:txBody>
-            <a:bodyPr/>
-            <a:lstStyle/>
-            <a:p>
-              <a:endParaRPr lang="en-GB">
-                <a:latin typeface="DM Sans 14pt" pitchFamily="2" charset="77"/>
-              </a:endParaRPr>
-            </a:p>
-          </p:txBody>
-        </p:sp>
-        <p:sp>
-          <p:nvSpPr>
-            <p:cNvPr id="47" name="Text 29">
-              <a:extLst>
-                <a:ext uri="{FF2B5EF4-FFF2-40B4-BE49-F238E27FC236}">
-                  <a16:creationId xmlns:a16="http://schemas.microsoft.com/office/drawing/2014/main" id="{313D0CCB-9CD2-6E9A-2AFB-FC3B14CBD94E}"/>
-                </a:ext>
-              </a:extLst>
-            </p:cNvPr>
-            <p:cNvSpPr/>
-            <p:nvPr/>
-          </p:nvSpPr>
-          <p:spPr>
-            <a:xfrm>
-              <a:off x="13169731" y="1989865"/>
-              <a:ext cx="4661496" cy="1182447"/>
-            </a:xfrm>
-            <a:prstGeom prst="rect">
-              <a:avLst/>
-            </a:prstGeom>
-            <a:noFill/>
-            <a:ln/>
-          </p:spPr>
-          <p:txBody>
-            <a:bodyPr wrap="square" lIns="25400" tIns="25400" rIns="25400" bIns="25400" rtlCol="0" anchor="t">
-              <a:normAutofit/>
-            </a:bodyPr>
-            <a:lstStyle/>
-            <a:p>
-              <a:pPr>
-                <a:lnSpc>
-                  <a:spcPct val="110000"/>
-                </a:lnSpc>
-              </a:pPr>
-              <a:r>
-                <a:rPr lang="en-GB" sz="1650" dirty="0">
-                  <a:solidFill>
-                    <a:srgbClr val="643791"/>
-                  </a:solidFill>
-                  <a:latin typeface="DM Sans 14pt" pitchFamily="2" charset="77"/>
-                </a:rPr>
-                <a:t>{{chart_explainer_benchmark_scatter}}</a:t>
-              </a:r>
-              <a:endParaRPr lang="en-US" sz="1650" dirty="0">
+          <p:cNvSpPr/>
+          <p:nvPr/>
+        </p:nvSpPr>
+        <p:spPr>
+          <a:xfrm>
+            <a:off x="12995755" y="8053326"/>
+            <a:ext cx="4707474" cy="1174410"/>
+          </a:xfrm>
+          <a:prstGeom prst="roundRect">
+            <a:avLst>
+              <a:gd name="adj" fmla="val 15385"/>
+            </a:avLst>
+          </a:prstGeom>
+          <a:solidFill>
+            <a:srgbClr val="643791">
+              <a:alpha val="8000"/>
+            </a:srgbClr>
+          </a:solidFill>
+          <a:ln/>
+        </p:spPr>
+        <p:txBody>
+          <a:bodyPr/>
+          <a:lstStyle/>
+          <a:p>
+            <a:r>
+              <a:rPr lang="en-US" sz="1400" dirty="0">
                 <a:solidFill>
                   <a:srgbClr val="643791"/>
                 </a:solidFill>
                 <a:latin typeface="DM Sans 14pt" pitchFamily="2" charset="77"/>
-              </a:endParaRPr>
-            </a:p>
-          </p:txBody>
-        </p:sp>
-      </p:grpSp>
-      <p:grpSp>
-        <p:nvGrpSpPr>
-          <p:cNvPr id="48" name="Group 47">
-            <a:extLst>
-              <a:ext uri="{FF2B5EF4-FFF2-40B4-BE49-F238E27FC236}">
-                <a16:creationId xmlns:a16="http://schemas.microsoft.com/office/drawing/2014/main" id="{0E49E83F-CAAF-A706-10B5-6255C904E75B}"/>
-              </a:ext>
-            </a:extLst>
-          </p:cNvPr>
-          <p:cNvGrpSpPr/>
-          <p:nvPr/>
-        </p:nvGrpSpPr>
-        <p:grpSpPr>
-          <a:xfrm>
-            <a:off x="12995755" y="8053326"/>
-            <a:ext cx="4742571" cy="1281174"/>
-            <a:chOff x="13356729" y="7948173"/>
-            <a:chExt cx="4397870" cy="228600"/>
-          </a:xfrm>
-        </p:grpSpPr>
-        <p:sp>
-          <p:nvSpPr>
-            <p:cNvPr id="49" name="Shape 32">
-              <a:extLst>
-                <a:ext uri="{FF2B5EF4-FFF2-40B4-BE49-F238E27FC236}">
-                  <a16:creationId xmlns:a16="http://schemas.microsoft.com/office/drawing/2014/main" id="{49E04A68-847E-82E3-4038-6247474AA428}"/>
-                </a:ext>
-              </a:extLst>
-            </p:cNvPr>
-            <p:cNvSpPr/>
-            <p:nvPr/>
-          </p:nvSpPr>
-          <p:spPr>
-            <a:xfrm>
-              <a:off x="13356729" y="7948173"/>
-              <a:ext cx="4365324" cy="209550"/>
-            </a:xfrm>
-            <a:prstGeom prst="roundRect">
-              <a:avLst>
-                <a:gd name="adj" fmla="val 15385"/>
-              </a:avLst>
-            </a:prstGeom>
-            <a:solidFill>
-              <a:srgbClr val="643791">
-                <a:alpha val="8000"/>
-              </a:srgbClr>
-            </a:solidFill>
-            <a:ln/>
-          </p:spPr>
-          <p:txBody>
-            <a:bodyPr/>
-            <a:lstStyle/>
-            <a:p>
-              <a:endParaRPr lang="en-GB">
-                <a:latin typeface="DM Sans 14pt" pitchFamily="2" charset="77"/>
-              </a:endParaRPr>
-            </a:p>
-          </p:txBody>
-        </p:sp>
-        <p:sp>
-          <p:nvSpPr>
-            <p:cNvPr id="50" name="Text 33">
-              <a:extLst>
-                <a:ext uri="{FF2B5EF4-FFF2-40B4-BE49-F238E27FC236}">
-                  <a16:creationId xmlns:a16="http://schemas.microsoft.com/office/drawing/2014/main" id="{8E8A4A80-3943-C51D-2C19-45F174D4192A}"/>
-                </a:ext>
-              </a:extLst>
-            </p:cNvPr>
-            <p:cNvSpPr/>
-            <p:nvPr/>
-          </p:nvSpPr>
-          <p:spPr>
-            <a:xfrm>
-              <a:off x="13432928" y="7967223"/>
-              <a:ext cx="4321671" cy="209550"/>
-            </a:xfrm>
-            <a:prstGeom prst="rect">
-              <a:avLst/>
-            </a:prstGeom>
-            <a:noFill/>
-            <a:ln/>
-          </p:spPr>
-          <p:txBody>
-            <a:bodyPr wrap="square" lIns="25400" tIns="25400" rIns="25400" bIns="25400" rtlCol="0" anchor="t">
-              <a:normAutofit/>
-            </a:bodyPr>
-            <a:lstStyle/>
-            <a:p>
-              <a:pPr marL="0" indent="0" algn="l">
-                <a:lnSpc>
-                  <a:spcPct val="110000"/>
-                </a:lnSpc>
-                <a:buNone/>
-              </a:pPr>
-              <a:r>
-                <a:rPr lang="en-US" sz="1500" dirty="0">
-                  <a:solidFill>
-                    <a:srgbClr val="643791"/>
-                  </a:solidFill>
-                  <a:latin typeface="DM Sans 14pt" pitchFamily="2" charset="77"/>
-                  <a:ea typeface="Arial" pitchFamily="34" charset="-122"/>
-                  <a:cs typeface="Arial" pitchFamily="34" charset="-120"/>
-                </a:rPr>
-                <a:t>{{commentary_benchmark_point_3}}</a:t>
-              </a:r>
-              <a:endParaRPr lang="en-US" sz="1500" dirty="0">
-                <a:latin typeface="DM Sans 14pt" pitchFamily="2" charset="77"/>
-              </a:endParaRPr>
-            </a:p>
-          </p:txBody>
-        </p:sp>
-      </p:grpSp>
+                <a:ea typeface="Arial" pitchFamily="34" charset="-122"/>
+                <a:cs typeface="Arial" pitchFamily="34" charset="-120"/>
+              </a:rPr>
+              <a:t>{{commentary_benchmark_point_3}}</a:t>
+            </a:r>
+            <a:endParaRPr lang="en-US" sz="1400" dirty="0">
+              <a:latin typeface="DM Sans 14pt" pitchFamily="2" charset="77"/>
+            </a:endParaRPr>
+          </a:p>
+        </p:txBody>
+      </p:sp>
       <p:grpSp>
         <p:nvGrpSpPr>
           <p:cNvPr id="61" name="Group 60">
@@ -4660,361 +4419,183 @@
           </a:p>
         </p:txBody>
       </p:sp>
-      <p:grpSp>
-        <p:nvGrpSpPr>
-          <p:cNvPr id="13" name="Group 12">
+      <p:sp>
+        <p:nvSpPr>
+          <p:cNvPr id="21" name="Shape 28">
             <a:extLst>
               <a:ext uri="{FF2B5EF4-FFF2-40B4-BE49-F238E27FC236}">
-                <a16:creationId xmlns:a16="http://schemas.microsoft.com/office/drawing/2014/main" id="{0035AAF3-E00E-04BE-28D1-194C5DF4FE5E}"/>
+                <a16:creationId xmlns:a16="http://schemas.microsoft.com/office/drawing/2014/main" id="{AD11CE6B-1F35-10CA-93D1-DC7E7FEBDD35}"/>
               </a:ext>
             </a:extLst>
           </p:cNvPr>
-          <p:cNvGrpSpPr/>
-          <p:nvPr/>
-        </p:nvGrpSpPr>
-        <p:grpSpPr>
+          <p:cNvSpPr/>
+          <p:nvPr/>
+        </p:nvSpPr>
+        <p:spPr>
           <a:xfrm>
             <a:off x="12995755" y="3880287"/>
-            <a:ext cx="4741200" cy="1281600"/>
-            <a:chOff x="13090029" y="4818473"/>
-            <a:chExt cx="4532760" cy="246230"/>
-          </a:xfrm>
-        </p:grpSpPr>
-        <p:sp>
-          <p:nvSpPr>
-            <p:cNvPr id="21" name="Shape 28">
-              <a:extLst>
-                <a:ext uri="{FF2B5EF4-FFF2-40B4-BE49-F238E27FC236}">
-                  <a16:creationId xmlns:a16="http://schemas.microsoft.com/office/drawing/2014/main" id="{AD11CE6B-1F35-10CA-93D1-DC7E7FEBDD35}"/>
-                </a:ext>
-              </a:extLst>
-            </p:cNvPr>
-            <p:cNvSpPr/>
-            <p:nvPr/>
-          </p:nvSpPr>
-          <p:spPr>
-            <a:xfrm>
-              <a:off x="13090029" y="4818473"/>
-              <a:ext cx="4496284" cy="227180"/>
-            </a:xfrm>
-            <a:prstGeom prst="roundRect">
-              <a:avLst>
-                <a:gd name="adj" fmla="val 14191"/>
-              </a:avLst>
-            </a:prstGeom>
-            <a:solidFill>
-              <a:srgbClr val="643791">
-                <a:alpha val="8000"/>
-              </a:srgbClr>
-            </a:solidFill>
-            <a:ln/>
-          </p:spPr>
-          <p:txBody>
-            <a:bodyPr/>
-            <a:lstStyle/>
-            <a:p>
-              <a:endParaRPr lang="en-GB">
-                <a:latin typeface="DM Sans 14pt" pitchFamily="2" charset="77"/>
-              </a:endParaRPr>
-            </a:p>
-          </p:txBody>
-        </p:sp>
-        <p:sp>
-          <p:nvSpPr>
-            <p:cNvPr id="41" name="Text 29">
-              <a:extLst>
-                <a:ext uri="{FF2B5EF4-FFF2-40B4-BE49-F238E27FC236}">
-                  <a16:creationId xmlns:a16="http://schemas.microsoft.com/office/drawing/2014/main" id="{1571D92E-A5D5-72CC-AF6C-D9475E19AC82}"/>
-                </a:ext>
-              </a:extLst>
-            </p:cNvPr>
-            <p:cNvSpPr/>
-            <p:nvPr/>
-          </p:nvSpPr>
-          <p:spPr>
-            <a:xfrm>
-              <a:off x="13166229" y="4837523"/>
-              <a:ext cx="4456560" cy="227180"/>
-            </a:xfrm>
-            <a:prstGeom prst="rect">
-              <a:avLst/>
-            </a:prstGeom>
-            <a:noFill/>
-            <a:ln/>
-          </p:spPr>
-          <p:txBody>
-            <a:bodyPr wrap="square" lIns="25400" tIns="25400" rIns="25400" bIns="25400" rtlCol="0" anchor="t">
-              <a:normAutofit/>
-            </a:bodyPr>
-            <a:lstStyle/>
-            <a:p>
-              <a:pPr>
-                <a:lnSpc>
-                  <a:spcPct val="110000"/>
-                </a:lnSpc>
-              </a:pPr>
-              <a:r>
-                <a:rPr lang="en-US" sz="1650" dirty="0">
-                  <a:solidFill>
-                    <a:srgbClr val="643791"/>
-                  </a:solidFill>
-                  <a:latin typeface="DM Sans 14pt" pitchFamily="2" charset="77"/>
-                  <a:ea typeface="Arial" pitchFamily="34" charset="-122"/>
-                  <a:cs typeface="Arial" pitchFamily="34" charset="-120"/>
-                </a:rPr>
-                <a:t>{{</a:t>
-              </a:r>
-              <a:r>
-                <a:rPr lang="en-US" sz="1650" dirty="0" err="1">
-                  <a:solidFill>
-                    <a:srgbClr val="643791"/>
-                  </a:solidFill>
-                  <a:latin typeface="DM Sans 14pt" pitchFamily="2" charset="77"/>
-                  <a:ea typeface="Arial" pitchFamily="34" charset="-122"/>
-                  <a:cs typeface="Arial" pitchFamily="34" charset="-120"/>
-                </a:rPr>
-                <a:t>commentary_average_intro</a:t>
-              </a:r>
-              <a:r>
-                <a:rPr lang="en-US" sz="1650" dirty="0">
-                  <a:solidFill>
-                    <a:srgbClr val="643791"/>
-                  </a:solidFill>
-                  <a:latin typeface="DM Sans 14pt" pitchFamily="2" charset="77"/>
-                  <a:ea typeface="Arial" pitchFamily="34" charset="-122"/>
-                  <a:cs typeface="Arial" pitchFamily="34" charset="-120"/>
-                </a:rPr>
-                <a:t>}}</a:t>
-              </a:r>
-              <a:endParaRPr lang="en-US" sz="1650" dirty="0">
-                <a:latin typeface="DM Sans 14pt" pitchFamily="2" charset="77"/>
-              </a:endParaRPr>
-            </a:p>
-          </p:txBody>
-        </p:sp>
-      </p:grpSp>
-      <p:grpSp>
-        <p:nvGrpSpPr>
-          <p:cNvPr id="44" name="Group 43">
+            <a:ext cx="4703047" cy="1182447"/>
+          </a:xfrm>
+          <a:prstGeom prst="roundRect">
+            <a:avLst>
+              <a:gd name="adj" fmla="val 14191"/>
+            </a:avLst>
+          </a:prstGeom>
+          <a:solidFill>
+            <a:srgbClr val="643791">
+              <a:alpha val="8000"/>
+            </a:srgbClr>
+          </a:solidFill>
+          <a:ln/>
+        </p:spPr>
+        <p:txBody>
+          <a:bodyPr/>
+          <a:lstStyle/>
+          <a:p>
+            <a:pPr>
+              <a:lnSpc>
+                <a:spcPct val="110000"/>
+              </a:lnSpc>
+            </a:pPr>
+            <a:r>
+              <a:rPr lang="en-US" sz="1400" dirty="0">
+                <a:solidFill>
+                  <a:srgbClr val="643791"/>
+                </a:solidFill>
+                <a:latin typeface="DM Sans 14pt" pitchFamily="2" charset="77"/>
+                <a:ea typeface="Arial" pitchFamily="34" charset="-122"/>
+                <a:cs typeface="Arial" pitchFamily="34" charset="-120"/>
+              </a:rPr>
+              <a:t>{{</a:t>
+            </a:r>
+            <a:r>
+              <a:rPr lang="en-US" sz="1400" dirty="0" err="1">
+                <a:solidFill>
+                  <a:srgbClr val="643791"/>
+                </a:solidFill>
+                <a:latin typeface="DM Sans 14pt" pitchFamily="2" charset="77"/>
+                <a:ea typeface="Arial" pitchFamily="34" charset="-122"/>
+                <a:cs typeface="Arial" pitchFamily="34" charset="-120"/>
+              </a:rPr>
+              <a:t>commentary_average_intro</a:t>
+            </a:r>
+            <a:r>
+              <a:rPr lang="en-US" sz="1400" dirty="0">
+                <a:solidFill>
+                  <a:srgbClr val="643791"/>
+                </a:solidFill>
+                <a:latin typeface="DM Sans 14pt" pitchFamily="2" charset="77"/>
+                <a:ea typeface="Arial" pitchFamily="34" charset="-122"/>
+                <a:cs typeface="Arial" pitchFamily="34" charset="-120"/>
+              </a:rPr>
+              <a:t>}}</a:t>
+            </a:r>
+            <a:endParaRPr lang="en-US" sz="1400" dirty="0">
+              <a:latin typeface="DM Sans 14pt" pitchFamily="2" charset="77"/>
+            </a:endParaRPr>
+          </a:p>
+        </p:txBody>
+      </p:sp>
+      <p:sp>
+        <p:nvSpPr>
+          <p:cNvPr id="46" name="Shape 30">
             <a:extLst>
               <a:ext uri="{FF2B5EF4-FFF2-40B4-BE49-F238E27FC236}">
-                <a16:creationId xmlns:a16="http://schemas.microsoft.com/office/drawing/2014/main" id="{908F6264-FBAD-54CE-52EB-0A0362E58E2C}"/>
+                <a16:creationId xmlns:a16="http://schemas.microsoft.com/office/drawing/2014/main" id="{BC486ACB-7DD7-21F6-B0FC-03635C87339A}"/>
               </a:ext>
             </a:extLst>
           </p:cNvPr>
-          <p:cNvGrpSpPr/>
-          <p:nvPr/>
-        </p:nvGrpSpPr>
-        <p:grpSpPr>
+          <p:cNvSpPr/>
+          <p:nvPr/>
+        </p:nvSpPr>
+        <p:spPr>
           <a:xfrm>
             <a:off x="12995755" y="5271442"/>
-            <a:ext cx="4742571" cy="1281600"/>
-            <a:chOff x="13356729" y="5341306"/>
-            <a:chExt cx="4397870" cy="228600"/>
-          </a:xfrm>
-        </p:grpSpPr>
-        <p:sp>
-          <p:nvSpPr>
-            <p:cNvPr id="46" name="Shape 30">
-              <a:extLst>
-                <a:ext uri="{FF2B5EF4-FFF2-40B4-BE49-F238E27FC236}">
-                  <a16:creationId xmlns:a16="http://schemas.microsoft.com/office/drawing/2014/main" id="{BC486ACB-7DD7-21F6-B0FC-03635C87339A}"/>
-                </a:ext>
-              </a:extLst>
-            </p:cNvPr>
-            <p:cNvSpPr/>
-            <p:nvPr/>
-          </p:nvSpPr>
-          <p:spPr>
-            <a:xfrm>
-              <a:off x="13356729" y="5341306"/>
-              <a:ext cx="4365324" cy="209550"/>
-            </a:xfrm>
-            <a:prstGeom prst="roundRect">
-              <a:avLst>
-                <a:gd name="adj" fmla="val 15385"/>
-              </a:avLst>
-            </a:prstGeom>
-            <a:solidFill>
-              <a:srgbClr val="643791">
-                <a:alpha val="8000"/>
-              </a:srgbClr>
-            </a:solidFill>
-            <a:ln/>
-          </p:spPr>
-          <p:txBody>
-            <a:bodyPr/>
-            <a:lstStyle/>
-            <a:p>
-              <a:endParaRPr lang="en-GB">
-                <a:latin typeface="DM Sans 14pt" pitchFamily="2" charset="77"/>
-              </a:endParaRPr>
-            </a:p>
-          </p:txBody>
-        </p:sp>
-        <p:sp>
-          <p:nvSpPr>
-            <p:cNvPr id="47" name="Text 31">
-              <a:extLst>
-                <a:ext uri="{FF2B5EF4-FFF2-40B4-BE49-F238E27FC236}">
-                  <a16:creationId xmlns:a16="http://schemas.microsoft.com/office/drawing/2014/main" id="{0A27667C-AE1A-C941-C77C-D48D2F6A7F1B}"/>
-                </a:ext>
-              </a:extLst>
-            </p:cNvPr>
-            <p:cNvSpPr/>
-            <p:nvPr/>
-          </p:nvSpPr>
-          <p:spPr>
-            <a:xfrm>
-              <a:off x="13432928" y="5360356"/>
-              <a:ext cx="4321671" cy="209550"/>
-            </a:xfrm>
-            <a:prstGeom prst="rect">
-              <a:avLst/>
-            </a:prstGeom>
-            <a:noFill/>
-            <a:ln/>
-          </p:spPr>
-          <p:txBody>
-            <a:bodyPr wrap="square" lIns="25400" tIns="25400" rIns="25400" bIns="25400" rtlCol="0" anchor="t">
-              <a:normAutofit/>
-            </a:bodyPr>
-            <a:lstStyle/>
-            <a:p>
-              <a:pPr>
-                <a:lnSpc>
-                  <a:spcPct val="110000"/>
-                </a:lnSpc>
-              </a:pPr>
-              <a:r>
-                <a:rPr lang="en-US" sz="1500" dirty="0">
-                  <a:solidFill>
-                    <a:srgbClr val="643791"/>
-                  </a:solidFill>
-                  <a:latin typeface="DM Sans 14pt" pitchFamily="2" charset="77"/>
-                  <a:ea typeface="Arial" pitchFamily="34" charset="-122"/>
-                  <a:cs typeface="Arial" pitchFamily="34" charset="-120"/>
-                </a:rPr>
-                <a:t>{{commentary_average_point_1}}</a:t>
-              </a:r>
-              <a:endParaRPr lang="en-US" sz="1500" dirty="0">
-                <a:latin typeface="DM Sans 14pt" pitchFamily="2" charset="77"/>
-              </a:endParaRPr>
-            </a:p>
-          </p:txBody>
-        </p:sp>
-      </p:grpSp>
-      <p:grpSp>
-        <p:nvGrpSpPr>
-          <p:cNvPr id="48" name="Group 47">
+            <a:ext cx="4707474" cy="1174800"/>
+          </a:xfrm>
+          <a:prstGeom prst="roundRect">
+            <a:avLst>
+              <a:gd name="adj" fmla="val 15385"/>
+            </a:avLst>
+          </a:prstGeom>
+          <a:solidFill>
+            <a:srgbClr val="643791">
+              <a:alpha val="8000"/>
+            </a:srgbClr>
+          </a:solidFill>
+          <a:ln/>
+        </p:spPr>
+        <p:txBody>
+          <a:bodyPr/>
+          <a:lstStyle/>
+          <a:p>
+            <a:r>
+              <a:rPr lang="en-US" sz="1400" dirty="0">
+                <a:solidFill>
+                  <a:srgbClr val="643791"/>
+                </a:solidFill>
+                <a:latin typeface="DM Sans 14pt" pitchFamily="2" charset="77"/>
+                <a:ea typeface="Arial" pitchFamily="34" charset="-122"/>
+                <a:cs typeface="Arial" pitchFamily="34" charset="-120"/>
+              </a:rPr>
+              <a:t>{{commentary_average_point_1}}</a:t>
+            </a:r>
+            <a:endParaRPr lang="en-US" sz="1400" dirty="0">
+              <a:latin typeface="DM Sans 14pt" pitchFamily="2" charset="77"/>
+            </a:endParaRPr>
+          </a:p>
+        </p:txBody>
+      </p:sp>
+      <p:sp>
+        <p:nvSpPr>
+          <p:cNvPr id="49" name="Shape 32">
             <a:extLst>
               <a:ext uri="{FF2B5EF4-FFF2-40B4-BE49-F238E27FC236}">
-                <a16:creationId xmlns:a16="http://schemas.microsoft.com/office/drawing/2014/main" id="{003F13EB-9A41-8B39-948C-4018EC1E8FD1}"/>
+                <a16:creationId xmlns:a16="http://schemas.microsoft.com/office/drawing/2014/main" id="{FDEF387C-5013-25D7-982E-02BE79CD5688}"/>
               </a:ext>
             </a:extLst>
           </p:cNvPr>
-          <p:cNvGrpSpPr/>
-          <p:nvPr/>
-        </p:nvGrpSpPr>
-        <p:grpSpPr>
+          <p:cNvSpPr/>
+          <p:nvPr/>
+        </p:nvSpPr>
+        <p:spPr>
           <a:xfrm>
             <a:off x="12995755" y="6662597"/>
-            <a:ext cx="4742571" cy="1281174"/>
-            <a:chOff x="13356729" y="7948173"/>
-            <a:chExt cx="4397870" cy="228600"/>
-          </a:xfrm>
-        </p:grpSpPr>
-        <p:sp>
-          <p:nvSpPr>
-            <p:cNvPr id="49" name="Shape 32">
-              <a:extLst>
-                <a:ext uri="{FF2B5EF4-FFF2-40B4-BE49-F238E27FC236}">
-                  <a16:creationId xmlns:a16="http://schemas.microsoft.com/office/drawing/2014/main" id="{FDEF387C-5013-25D7-982E-02BE79CD5688}"/>
-                </a:ext>
-              </a:extLst>
-            </p:cNvPr>
-            <p:cNvSpPr/>
-            <p:nvPr/>
-          </p:nvSpPr>
-          <p:spPr>
-            <a:xfrm>
-              <a:off x="13356729" y="7948173"/>
-              <a:ext cx="4365324" cy="209550"/>
-            </a:xfrm>
-            <a:prstGeom prst="roundRect">
-              <a:avLst>
-                <a:gd name="adj" fmla="val 15385"/>
-              </a:avLst>
-            </a:prstGeom>
-            <a:solidFill>
-              <a:srgbClr val="643791">
-                <a:alpha val="8000"/>
-              </a:srgbClr>
-            </a:solidFill>
-            <a:ln/>
-          </p:spPr>
-          <p:txBody>
-            <a:bodyPr/>
-            <a:lstStyle/>
-            <a:p>
-              <a:endParaRPr lang="en-GB">
-                <a:latin typeface="DM Sans 14pt" pitchFamily="2" charset="77"/>
-              </a:endParaRPr>
-            </a:p>
-          </p:txBody>
-        </p:sp>
-        <p:sp>
-          <p:nvSpPr>
-            <p:cNvPr id="50" name="Text 33">
-              <a:extLst>
-                <a:ext uri="{FF2B5EF4-FFF2-40B4-BE49-F238E27FC236}">
-                  <a16:creationId xmlns:a16="http://schemas.microsoft.com/office/drawing/2014/main" id="{53EF3706-9DC4-A227-B649-4B649FA27816}"/>
-                </a:ext>
-              </a:extLst>
-            </p:cNvPr>
-            <p:cNvSpPr/>
-            <p:nvPr/>
-          </p:nvSpPr>
-          <p:spPr>
-            <a:xfrm>
-              <a:off x="13432928" y="7967223"/>
-              <a:ext cx="4321671" cy="209550"/>
-            </a:xfrm>
-            <a:prstGeom prst="rect">
-              <a:avLst/>
-            </a:prstGeom>
-            <a:noFill/>
-            <a:ln/>
-          </p:spPr>
-          <p:txBody>
-            <a:bodyPr wrap="square" lIns="25400" tIns="25400" rIns="25400" bIns="25400" rtlCol="0" anchor="t">
-              <a:normAutofit/>
-            </a:bodyPr>
-            <a:lstStyle/>
-            <a:p>
-              <a:pPr>
-                <a:lnSpc>
-                  <a:spcPct val="110000"/>
-                </a:lnSpc>
-              </a:pPr>
-              <a:r>
-                <a:rPr lang="en-US" sz="1500" dirty="0">
-                  <a:solidFill>
-                    <a:srgbClr val="643791"/>
-                  </a:solidFill>
-                  <a:latin typeface="DM Sans 14pt" pitchFamily="2" charset="77"/>
-                  <a:ea typeface="Arial" pitchFamily="34" charset="-122"/>
-                  <a:cs typeface="Arial" pitchFamily="34" charset="-120"/>
-                </a:rPr>
-                <a:t>{{commentary_average_point_2}}</a:t>
-              </a:r>
-              <a:endParaRPr lang="en-US" sz="1500" dirty="0">
-                <a:latin typeface="DM Sans 14pt" pitchFamily="2" charset="77"/>
-              </a:endParaRPr>
-            </a:p>
-          </p:txBody>
-        </p:sp>
-      </p:grpSp>
+            <a:ext cx="4707474" cy="1174410"/>
+          </a:xfrm>
+          <a:prstGeom prst="roundRect">
+            <a:avLst>
+              <a:gd name="adj" fmla="val 15385"/>
+            </a:avLst>
+          </a:prstGeom>
+          <a:solidFill>
+            <a:srgbClr val="643791">
+              <a:alpha val="8000"/>
+            </a:srgbClr>
+          </a:solidFill>
+          <a:ln/>
+        </p:spPr>
+        <p:txBody>
+          <a:bodyPr/>
+          <a:lstStyle/>
+          <a:p>
+            <a:r>
+              <a:rPr lang="en-US" sz="1400" dirty="0">
+                <a:solidFill>
+                  <a:srgbClr val="643791"/>
+                </a:solidFill>
+                <a:latin typeface="DM Sans 14pt" pitchFamily="2" charset="77"/>
+                <a:ea typeface="Arial" pitchFamily="34" charset="-122"/>
+                <a:cs typeface="Arial" pitchFamily="34" charset="-120"/>
+              </a:rPr>
+              <a:t>{{commentary_average_point_2}}</a:t>
+            </a:r>
+            <a:endParaRPr lang="en-US" sz="1400" dirty="0">
+              <a:latin typeface="DM Sans 14pt" pitchFamily="2" charset="77"/>
+            </a:endParaRPr>
+          </a:p>
+        </p:txBody>
+      </p:sp>
       <p:sp>
         <p:nvSpPr>
           <p:cNvPr id="52" name="Shape 28">
@@ -5048,80 +4629,34 @@
           <a:bodyPr/>
           <a:lstStyle/>
           <a:p>
-            <a:endParaRPr lang="en-GB">
-              <a:solidFill>
-                <a:srgbClr val="643791"/>
-              </a:solidFill>
-              <a:latin typeface="DM Sans 14pt" pitchFamily="2" charset="77"/>
-            </a:endParaRPr>
-          </a:p>
-        </p:txBody>
-      </p:sp>
-      <p:sp>
-        <p:nvSpPr>
-          <p:cNvPr id="53" name="Text 29">
-            <a:extLst>
-              <a:ext uri="{FF2B5EF4-FFF2-40B4-BE49-F238E27FC236}">
-                <a16:creationId xmlns:a16="http://schemas.microsoft.com/office/drawing/2014/main" id="{C5B7EE4E-BC74-A82F-654D-A92ECF80A6A6}"/>
-              </a:ext>
-            </a:extLst>
-          </p:cNvPr>
-          <p:cNvSpPr/>
-          <p:nvPr/>
-        </p:nvSpPr>
-        <p:spPr>
-          <a:xfrm>
-            <a:off x="13075459" y="1989865"/>
-            <a:ext cx="4661496" cy="1182447"/>
-          </a:xfrm>
-          <a:prstGeom prst="rect">
-            <a:avLst/>
-          </a:prstGeom>
-          <a:noFill/>
-          <a:ln/>
-        </p:spPr>
-        <p:txBody>
-          <a:bodyPr wrap="square" lIns="25400" tIns="25400" rIns="25400" bIns="25400" rtlCol="0" anchor="t">
-            <a:normAutofit/>
-          </a:bodyPr>
-          <a:lstStyle/>
-          <a:p>
-            <a:pPr>
-              <a:lnSpc>
-                <a:spcPct val="110000"/>
-              </a:lnSpc>
-            </a:pPr>
-            <a:r>
-              <a:rPr lang="en-GB" sz="1650" b="0" i="0" dirty="0">
+            <a:r>
+              <a:rPr lang="en-GB" sz="1400" dirty="0">
                 <a:solidFill>
                   <a:srgbClr val="643791"/>
                 </a:solidFill>
-                <a:effectLst/>
                 <a:latin typeface="DM Sans 14pt" pitchFamily="2" charset="77"/>
               </a:rPr>
               <a:t>{{</a:t>
             </a:r>
             <a:r>
-              <a:rPr lang="en-GB" sz="1650" b="0" i="0" dirty="0" err="1">
+              <a:rPr lang="en-GB" sz="1400" dirty="0" err="1">
                 <a:solidFill>
                   <a:srgbClr val="643791"/>
                 </a:solidFill>
-                <a:effectLst/>
                 <a:latin typeface="DM Sans 14pt" pitchFamily="2" charset="77"/>
               </a:rPr>
               <a:t>chart_explainer_benchmark_average</a:t>
             </a:r>
             <a:r>
-              <a:rPr lang="en-GB" sz="1650" b="0" i="0" dirty="0">
+              <a:rPr lang="en-GB" sz="1400" dirty="0">
                 <a:solidFill>
                   <a:srgbClr val="643791"/>
                 </a:solidFill>
-                <a:effectLst/>
                 <a:latin typeface="DM Sans 14pt" pitchFamily="2" charset="77"/>
               </a:rPr>
               <a:t>}}</a:t>
             </a:r>
-            <a:endParaRPr lang="en-US" sz="1650" dirty="0">
+            <a:endParaRPr lang="en-US" sz="1400" dirty="0">
               <a:solidFill>
                 <a:srgbClr val="643791"/>
               </a:solidFill>
@@ -5920,480 +5455,256 @@
           </a:p>
         </p:txBody>
       </p:sp>
-      <p:grpSp>
-        <p:nvGrpSpPr>
-          <p:cNvPr id="8" name="Group 7">
+      <p:sp>
+        <p:nvSpPr>
+          <p:cNvPr id="9" name="Shape 28">
             <a:extLst>
               <a:ext uri="{FF2B5EF4-FFF2-40B4-BE49-F238E27FC236}">
-                <a16:creationId xmlns:a16="http://schemas.microsoft.com/office/drawing/2014/main" id="{DF13A345-0054-39A4-0C63-98B25C9A5BD1}"/>
+                <a16:creationId xmlns:a16="http://schemas.microsoft.com/office/drawing/2014/main" id="{CD38405B-7A80-D9F5-43F9-EF7730151C46}"/>
               </a:ext>
             </a:extLst>
           </p:cNvPr>
-          <p:cNvGrpSpPr/>
-          <p:nvPr/>
-        </p:nvGrpSpPr>
-        <p:grpSpPr>
+          <p:cNvSpPr/>
+          <p:nvPr/>
+        </p:nvSpPr>
+        <p:spPr>
           <a:xfrm>
             <a:off x="12995755" y="3880287"/>
-            <a:ext cx="4741200" cy="1281600"/>
-            <a:chOff x="13090029" y="4818473"/>
-            <a:chExt cx="4532760" cy="246230"/>
-          </a:xfrm>
-        </p:grpSpPr>
-        <p:sp>
-          <p:nvSpPr>
-            <p:cNvPr id="9" name="Shape 28">
-              <a:extLst>
-                <a:ext uri="{FF2B5EF4-FFF2-40B4-BE49-F238E27FC236}">
-                  <a16:creationId xmlns:a16="http://schemas.microsoft.com/office/drawing/2014/main" id="{CD38405B-7A80-D9F5-43F9-EF7730151C46}"/>
-                </a:ext>
-              </a:extLst>
-            </p:cNvPr>
-            <p:cNvSpPr/>
-            <p:nvPr/>
-          </p:nvSpPr>
-          <p:spPr>
-            <a:xfrm>
-              <a:off x="13090029" y="4818473"/>
-              <a:ext cx="4496284" cy="227180"/>
-            </a:xfrm>
-            <a:prstGeom prst="roundRect">
-              <a:avLst>
-                <a:gd name="adj" fmla="val 14191"/>
-              </a:avLst>
-            </a:prstGeom>
-            <a:solidFill>
-              <a:srgbClr val="643791">
-                <a:alpha val="8000"/>
-              </a:srgbClr>
-            </a:solidFill>
-            <a:ln/>
-          </p:spPr>
-          <p:txBody>
-            <a:bodyPr/>
-            <a:lstStyle/>
-            <a:p>
-              <a:endParaRPr lang="en-GB">
-                <a:latin typeface="DM Sans 14pt" pitchFamily="2" charset="77"/>
-              </a:endParaRPr>
-            </a:p>
-          </p:txBody>
-        </p:sp>
-        <p:sp>
-          <p:nvSpPr>
-            <p:cNvPr id="10" name="Text 29">
-              <a:extLst>
-                <a:ext uri="{FF2B5EF4-FFF2-40B4-BE49-F238E27FC236}">
-                  <a16:creationId xmlns:a16="http://schemas.microsoft.com/office/drawing/2014/main" id="{B56B315A-F187-F7ED-885B-B8D508C7BE98}"/>
-                </a:ext>
-              </a:extLst>
-            </p:cNvPr>
-            <p:cNvSpPr/>
-            <p:nvPr/>
-          </p:nvSpPr>
-          <p:spPr>
-            <a:xfrm>
-              <a:off x="13166229" y="4837523"/>
-              <a:ext cx="4456560" cy="227180"/>
-            </a:xfrm>
-            <a:prstGeom prst="rect">
-              <a:avLst/>
-            </a:prstGeom>
-            <a:noFill/>
-            <a:ln/>
-          </p:spPr>
-          <p:txBody>
-            <a:bodyPr wrap="square" lIns="25400" tIns="25400" rIns="25400" bIns="25400" rtlCol="0" anchor="t">
-              <a:normAutofit/>
-            </a:bodyPr>
-            <a:lstStyle/>
-            <a:p>
-              <a:pPr>
-                <a:lnSpc>
-                  <a:spcPct val="110000"/>
-                </a:lnSpc>
-              </a:pPr>
-              <a:r>
-                <a:rPr lang="en-US" sz="1650" dirty="0">
-                  <a:solidFill>
-                    <a:srgbClr val="643791"/>
-                  </a:solidFill>
-                  <a:latin typeface="DM Sans 14pt" pitchFamily="2" charset="77"/>
-                  <a:ea typeface="Arial" pitchFamily="34" charset="-122"/>
-                  <a:cs typeface="Arial" pitchFamily="34" charset="-120"/>
-                </a:rPr>
-                <a:t>{{</a:t>
-              </a:r>
-              <a:r>
-                <a:rPr lang="en-US" sz="1650" dirty="0" err="1">
-                  <a:solidFill>
-                    <a:srgbClr val="643791"/>
-                  </a:solidFill>
-                  <a:latin typeface="DM Sans 14pt" pitchFamily="2" charset="77"/>
-                  <a:ea typeface="Arial" pitchFamily="34" charset="-122"/>
-                  <a:cs typeface="Arial" pitchFamily="34" charset="-120"/>
-                </a:rPr>
-                <a:t>commentary_postings_intro</a:t>
-              </a:r>
-              <a:r>
-                <a:rPr lang="en-US" sz="1650" dirty="0">
-                  <a:solidFill>
-                    <a:srgbClr val="643791"/>
-                  </a:solidFill>
-                  <a:latin typeface="DM Sans 14pt" pitchFamily="2" charset="77"/>
-                  <a:ea typeface="Arial" pitchFamily="34" charset="-122"/>
-                  <a:cs typeface="Arial" pitchFamily="34" charset="-120"/>
-                </a:rPr>
-                <a:t>}}</a:t>
-              </a:r>
-              <a:endParaRPr lang="en-US" sz="1650" dirty="0">
-                <a:latin typeface="DM Sans 14pt" pitchFamily="2" charset="77"/>
-              </a:endParaRPr>
-            </a:p>
-          </p:txBody>
-        </p:sp>
-      </p:grpSp>
-      <p:grpSp>
-        <p:nvGrpSpPr>
-          <p:cNvPr id="11" name="Group 10">
+            <a:ext cx="4703047" cy="1182447"/>
+          </a:xfrm>
+          <a:prstGeom prst="roundRect">
+            <a:avLst>
+              <a:gd name="adj" fmla="val 14191"/>
+            </a:avLst>
+          </a:prstGeom>
+          <a:solidFill>
+            <a:srgbClr val="643791">
+              <a:alpha val="8000"/>
+            </a:srgbClr>
+          </a:solidFill>
+          <a:ln/>
+        </p:spPr>
+        <p:txBody>
+          <a:bodyPr/>
+          <a:lstStyle/>
+          <a:p>
+            <a:pPr>
+              <a:lnSpc>
+                <a:spcPct val="110000"/>
+              </a:lnSpc>
+            </a:pPr>
+            <a:r>
+              <a:rPr lang="en-US" sz="1400" dirty="0">
+                <a:solidFill>
+                  <a:srgbClr val="643791"/>
+                </a:solidFill>
+                <a:latin typeface="DM Sans 14pt" pitchFamily="2" charset="77"/>
+                <a:ea typeface="Arial" pitchFamily="34" charset="-122"/>
+                <a:cs typeface="Arial" pitchFamily="34" charset="-120"/>
+              </a:rPr>
+              <a:t>{{</a:t>
+            </a:r>
+            <a:r>
+              <a:rPr lang="en-US" sz="1400" dirty="0" err="1">
+                <a:solidFill>
+                  <a:srgbClr val="643791"/>
+                </a:solidFill>
+                <a:latin typeface="DM Sans 14pt" pitchFamily="2" charset="77"/>
+                <a:ea typeface="Arial" pitchFamily="34" charset="-122"/>
+                <a:cs typeface="Arial" pitchFamily="34" charset="-120"/>
+              </a:rPr>
+              <a:t>commentary_postings_intro</a:t>
+            </a:r>
+            <a:r>
+              <a:rPr lang="en-US" sz="1400" dirty="0">
+                <a:solidFill>
+                  <a:srgbClr val="643791"/>
+                </a:solidFill>
+                <a:latin typeface="DM Sans 14pt" pitchFamily="2" charset="77"/>
+                <a:ea typeface="Arial" pitchFamily="34" charset="-122"/>
+                <a:cs typeface="Arial" pitchFamily="34" charset="-120"/>
+              </a:rPr>
+              <a:t>}}</a:t>
+            </a:r>
+            <a:endParaRPr lang="en-US" sz="1400" dirty="0">
+              <a:latin typeface="DM Sans 14pt" pitchFamily="2" charset="77"/>
+            </a:endParaRPr>
+          </a:p>
+        </p:txBody>
+      </p:sp>
+      <p:sp>
+        <p:nvSpPr>
+          <p:cNvPr id="12" name="Shape 30">
             <a:extLst>
               <a:ext uri="{FF2B5EF4-FFF2-40B4-BE49-F238E27FC236}">
-                <a16:creationId xmlns:a16="http://schemas.microsoft.com/office/drawing/2014/main" id="{6CC261BB-E0D7-9DE1-7D20-5A5E1BB2D6D6}"/>
+                <a16:creationId xmlns:a16="http://schemas.microsoft.com/office/drawing/2014/main" id="{36B729F7-3A69-5881-97D9-C59766E932D7}"/>
               </a:ext>
             </a:extLst>
           </p:cNvPr>
-          <p:cNvGrpSpPr/>
-          <p:nvPr/>
-        </p:nvGrpSpPr>
-        <p:grpSpPr>
+          <p:cNvSpPr/>
+          <p:nvPr/>
+        </p:nvSpPr>
+        <p:spPr>
           <a:xfrm>
             <a:off x="12995755" y="5271442"/>
-            <a:ext cx="4742571" cy="1281600"/>
-            <a:chOff x="13356729" y="5341306"/>
-            <a:chExt cx="4397870" cy="228600"/>
-          </a:xfrm>
-        </p:grpSpPr>
-        <p:sp>
-          <p:nvSpPr>
-            <p:cNvPr id="12" name="Shape 30">
-              <a:extLst>
-                <a:ext uri="{FF2B5EF4-FFF2-40B4-BE49-F238E27FC236}">
-                  <a16:creationId xmlns:a16="http://schemas.microsoft.com/office/drawing/2014/main" id="{36B729F7-3A69-5881-97D9-C59766E932D7}"/>
-                </a:ext>
-              </a:extLst>
-            </p:cNvPr>
-            <p:cNvSpPr/>
-            <p:nvPr/>
-          </p:nvSpPr>
-          <p:spPr>
-            <a:xfrm>
-              <a:off x="13356729" y="5341306"/>
-              <a:ext cx="4365324" cy="209550"/>
-            </a:xfrm>
-            <a:prstGeom prst="roundRect">
-              <a:avLst>
-                <a:gd name="adj" fmla="val 15385"/>
-              </a:avLst>
-            </a:prstGeom>
-            <a:solidFill>
-              <a:srgbClr val="643791">
-                <a:alpha val="8000"/>
-              </a:srgbClr>
-            </a:solidFill>
-            <a:ln/>
-          </p:spPr>
-          <p:txBody>
-            <a:bodyPr/>
-            <a:lstStyle/>
-            <a:p>
-              <a:endParaRPr lang="en-GB">
-                <a:latin typeface="DM Sans 14pt" pitchFamily="2" charset="77"/>
-              </a:endParaRPr>
-            </a:p>
-          </p:txBody>
-        </p:sp>
-        <p:sp>
-          <p:nvSpPr>
-            <p:cNvPr id="13" name="Text 31">
-              <a:extLst>
-                <a:ext uri="{FF2B5EF4-FFF2-40B4-BE49-F238E27FC236}">
-                  <a16:creationId xmlns:a16="http://schemas.microsoft.com/office/drawing/2014/main" id="{9E590A64-0645-AD99-A7B4-FA8D9F387C0D}"/>
-                </a:ext>
-              </a:extLst>
-            </p:cNvPr>
-            <p:cNvSpPr/>
-            <p:nvPr/>
-          </p:nvSpPr>
-          <p:spPr>
-            <a:xfrm>
-              <a:off x="13432928" y="5360356"/>
-              <a:ext cx="4321671" cy="209550"/>
-            </a:xfrm>
-            <a:prstGeom prst="rect">
-              <a:avLst/>
-            </a:prstGeom>
-            <a:noFill/>
-            <a:ln/>
-          </p:spPr>
-          <p:txBody>
-            <a:bodyPr wrap="square" lIns="25400" tIns="25400" rIns="25400" bIns="25400" rtlCol="0" anchor="t">
-              <a:normAutofit/>
-            </a:bodyPr>
-            <a:lstStyle/>
-            <a:p>
-              <a:pPr>
-                <a:lnSpc>
-                  <a:spcPct val="110000"/>
-                </a:lnSpc>
-              </a:pPr>
-              <a:r>
-                <a:rPr lang="en-US" sz="1500" dirty="0">
-                  <a:solidFill>
-                    <a:srgbClr val="643791"/>
-                  </a:solidFill>
-                  <a:latin typeface="DM Sans 14pt" pitchFamily="2" charset="77"/>
-                  <a:ea typeface="Arial" pitchFamily="34" charset="-122"/>
-                  <a:cs typeface="Arial" pitchFamily="34" charset="-120"/>
-                </a:rPr>
-                <a:t>{{commentary_postings_point_1}}</a:t>
-              </a:r>
-              <a:endParaRPr lang="en-US" sz="1500" dirty="0">
-                <a:latin typeface="DM Sans 14pt" pitchFamily="2" charset="77"/>
-              </a:endParaRPr>
-            </a:p>
-          </p:txBody>
-        </p:sp>
-      </p:grpSp>
-      <p:grpSp>
-        <p:nvGrpSpPr>
-          <p:cNvPr id="14" name="Group 13">
+            <a:ext cx="4707474" cy="1174800"/>
+          </a:xfrm>
+          <a:prstGeom prst="roundRect">
+            <a:avLst>
+              <a:gd name="adj" fmla="val 15385"/>
+            </a:avLst>
+          </a:prstGeom>
+          <a:solidFill>
+            <a:srgbClr val="643791">
+              <a:alpha val="8000"/>
+            </a:srgbClr>
+          </a:solidFill>
+          <a:ln/>
+        </p:spPr>
+        <p:txBody>
+          <a:bodyPr/>
+          <a:lstStyle/>
+          <a:p>
+            <a:pPr>
+              <a:lnSpc>
+                <a:spcPct val="110000"/>
+              </a:lnSpc>
+            </a:pPr>
+            <a:r>
+              <a:rPr lang="en-US" sz="1400" dirty="0">
+                <a:solidFill>
+                  <a:srgbClr val="643791"/>
+                </a:solidFill>
+                <a:latin typeface="DM Sans 14pt" pitchFamily="2" charset="77"/>
+                <a:ea typeface="Arial" pitchFamily="34" charset="-122"/>
+                <a:cs typeface="Arial" pitchFamily="34" charset="-120"/>
+              </a:rPr>
+              <a:t>{{commentary_postings_point_1}}</a:t>
+            </a:r>
+            <a:endParaRPr lang="en-US" sz="1400" dirty="0">
+              <a:latin typeface="DM Sans 14pt" pitchFamily="2" charset="77"/>
+            </a:endParaRPr>
+          </a:p>
+        </p:txBody>
+      </p:sp>
+      <p:sp>
+        <p:nvSpPr>
+          <p:cNvPr id="15" name="Shape 32">
             <a:extLst>
               <a:ext uri="{FF2B5EF4-FFF2-40B4-BE49-F238E27FC236}">
-                <a16:creationId xmlns:a16="http://schemas.microsoft.com/office/drawing/2014/main" id="{6968A50F-C795-8A7F-35AC-B2F2AC664027}"/>
+                <a16:creationId xmlns:a16="http://schemas.microsoft.com/office/drawing/2014/main" id="{62C2C6E1-4CAF-1AA6-2366-B71F536E616E}"/>
               </a:ext>
             </a:extLst>
           </p:cNvPr>
-          <p:cNvGrpSpPr/>
-          <p:nvPr/>
-        </p:nvGrpSpPr>
-        <p:grpSpPr>
+          <p:cNvSpPr/>
+          <p:nvPr/>
+        </p:nvSpPr>
+        <p:spPr>
           <a:xfrm>
             <a:off x="12995755" y="6662597"/>
-            <a:ext cx="4742571" cy="1281174"/>
-            <a:chOff x="13356729" y="7948173"/>
-            <a:chExt cx="4397870" cy="228600"/>
-          </a:xfrm>
-        </p:grpSpPr>
-        <p:sp>
-          <p:nvSpPr>
-            <p:cNvPr id="15" name="Shape 32">
-              <a:extLst>
-                <a:ext uri="{FF2B5EF4-FFF2-40B4-BE49-F238E27FC236}">
-                  <a16:creationId xmlns:a16="http://schemas.microsoft.com/office/drawing/2014/main" id="{62C2C6E1-4CAF-1AA6-2366-B71F536E616E}"/>
-                </a:ext>
-              </a:extLst>
-            </p:cNvPr>
-            <p:cNvSpPr/>
-            <p:nvPr/>
-          </p:nvSpPr>
-          <p:spPr>
-            <a:xfrm>
-              <a:off x="13356729" y="7948173"/>
-              <a:ext cx="4365324" cy="209550"/>
-            </a:xfrm>
-            <a:prstGeom prst="roundRect">
-              <a:avLst>
-                <a:gd name="adj" fmla="val 15385"/>
-              </a:avLst>
-            </a:prstGeom>
-            <a:solidFill>
-              <a:srgbClr val="643791">
-                <a:alpha val="8000"/>
-              </a:srgbClr>
-            </a:solidFill>
-            <a:ln/>
-          </p:spPr>
-          <p:txBody>
-            <a:bodyPr/>
-            <a:lstStyle/>
-            <a:p>
-              <a:endParaRPr lang="en-GB">
-                <a:latin typeface="DM Sans 14pt" pitchFamily="2" charset="77"/>
-              </a:endParaRPr>
-            </a:p>
-          </p:txBody>
-        </p:sp>
-        <p:sp>
-          <p:nvSpPr>
-            <p:cNvPr id="16" name="Text 33">
-              <a:extLst>
-                <a:ext uri="{FF2B5EF4-FFF2-40B4-BE49-F238E27FC236}">
-                  <a16:creationId xmlns:a16="http://schemas.microsoft.com/office/drawing/2014/main" id="{71C20AF3-3640-6A1F-60D5-DC7DB56D2307}"/>
-                </a:ext>
-              </a:extLst>
-            </p:cNvPr>
-            <p:cNvSpPr/>
-            <p:nvPr/>
-          </p:nvSpPr>
-          <p:spPr>
-            <a:xfrm>
-              <a:off x="13432928" y="7967223"/>
-              <a:ext cx="4321671" cy="209550"/>
-            </a:xfrm>
-            <a:prstGeom prst="rect">
-              <a:avLst/>
-            </a:prstGeom>
-            <a:noFill/>
-            <a:ln/>
-          </p:spPr>
-          <p:txBody>
-            <a:bodyPr wrap="square" lIns="25400" tIns="25400" rIns="25400" bIns="25400" rtlCol="0" anchor="t">
-              <a:normAutofit/>
-            </a:bodyPr>
-            <a:lstStyle/>
-            <a:p>
-              <a:pPr>
-                <a:lnSpc>
-                  <a:spcPct val="110000"/>
-                </a:lnSpc>
-              </a:pPr>
-              <a:r>
-                <a:rPr lang="en-US" sz="1500" dirty="0">
-                  <a:solidFill>
-                    <a:srgbClr val="643791"/>
-                  </a:solidFill>
-                  <a:latin typeface="DM Sans 14pt" pitchFamily="2" charset="77"/>
-                  <a:ea typeface="Arial" pitchFamily="34" charset="-122"/>
-                  <a:cs typeface="Arial" pitchFamily="34" charset="-120"/>
-                </a:rPr>
-                <a:t>{{commentary_postings_point_2}}</a:t>
-              </a:r>
-              <a:endParaRPr lang="en-US" sz="1500" dirty="0">
-                <a:latin typeface="DM Sans 14pt" pitchFamily="2" charset="77"/>
-              </a:endParaRPr>
-            </a:p>
-          </p:txBody>
-        </p:sp>
-      </p:grpSp>
-      <p:grpSp>
-        <p:nvGrpSpPr>
-          <p:cNvPr id="17" name="Group 16">
+            <a:ext cx="4707474" cy="1174410"/>
+          </a:xfrm>
+          <a:prstGeom prst="roundRect">
+            <a:avLst>
+              <a:gd name="adj" fmla="val 15385"/>
+            </a:avLst>
+          </a:prstGeom>
+          <a:solidFill>
+            <a:srgbClr val="643791">
+              <a:alpha val="8000"/>
+            </a:srgbClr>
+          </a:solidFill>
+          <a:ln/>
+        </p:spPr>
+        <p:txBody>
+          <a:bodyPr/>
+          <a:lstStyle/>
+          <a:p>
+            <a:pPr>
+              <a:lnSpc>
+                <a:spcPct val="110000"/>
+              </a:lnSpc>
+            </a:pPr>
+            <a:r>
+              <a:rPr lang="en-US" sz="1400" dirty="0">
+                <a:solidFill>
+                  <a:srgbClr val="643791"/>
+                </a:solidFill>
+                <a:latin typeface="DM Sans 14pt" pitchFamily="2" charset="77"/>
+                <a:ea typeface="Arial" pitchFamily="34" charset="-122"/>
+                <a:cs typeface="Arial" pitchFamily="34" charset="-120"/>
+              </a:rPr>
+              <a:t>{{commentary_postings_point_2}}</a:t>
+            </a:r>
+            <a:endParaRPr lang="en-US" sz="1400" dirty="0">
+              <a:latin typeface="DM Sans 14pt" pitchFamily="2" charset="77"/>
+            </a:endParaRPr>
+          </a:p>
+        </p:txBody>
+      </p:sp>
+      <p:sp>
+        <p:nvSpPr>
+          <p:cNvPr id="18" name="Shape 28">
             <a:extLst>
               <a:ext uri="{FF2B5EF4-FFF2-40B4-BE49-F238E27FC236}">
-                <a16:creationId xmlns:a16="http://schemas.microsoft.com/office/drawing/2014/main" id="{E1B04E4F-B16F-8C28-63EE-F8117AC549F7}"/>
+                <a16:creationId xmlns:a16="http://schemas.microsoft.com/office/drawing/2014/main" id="{B062927B-9F35-2BF4-1AC4-64F9583E72B9}"/>
               </a:ext>
             </a:extLst>
           </p:cNvPr>
-          <p:cNvGrpSpPr/>
-          <p:nvPr/>
-        </p:nvGrpSpPr>
-        <p:grpSpPr>
+          <p:cNvSpPr/>
+          <p:nvPr/>
+        </p:nvSpPr>
+        <p:spPr>
           <a:xfrm>
             <a:off x="12995755" y="1890712"/>
-            <a:ext cx="4741200" cy="1281600"/>
-            <a:chOff x="13090027" y="1890712"/>
-            <a:chExt cx="4741200" cy="1281600"/>
-          </a:xfrm>
-        </p:grpSpPr>
-        <p:sp>
-          <p:nvSpPr>
-            <p:cNvPr id="18" name="Shape 28">
-              <a:extLst>
-                <a:ext uri="{FF2B5EF4-FFF2-40B4-BE49-F238E27FC236}">
-                  <a16:creationId xmlns:a16="http://schemas.microsoft.com/office/drawing/2014/main" id="{B062927B-9F35-2BF4-1AC4-64F9583E72B9}"/>
-                </a:ext>
-              </a:extLst>
-            </p:cNvPr>
-            <p:cNvSpPr/>
-            <p:nvPr/>
-          </p:nvSpPr>
-          <p:spPr>
-            <a:xfrm>
-              <a:off x="13090027" y="1890712"/>
-              <a:ext cx="4703047" cy="1182447"/>
-            </a:xfrm>
-            <a:prstGeom prst="roundRect">
-              <a:avLst>
-                <a:gd name="adj" fmla="val 14191"/>
-              </a:avLst>
-            </a:prstGeom>
-            <a:solidFill>
-              <a:srgbClr val="643791">
-                <a:alpha val="8000"/>
-              </a:srgbClr>
-            </a:solidFill>
-            <a:ln/>
-          </p:spPr>
-          <p:txBody>
-            <a:bodyPr/>
-            <a:lstStyle/>
-            <a:p>
-              <a:endParaRPr lang="en-GB">
-                <a:latin typeface="DM Sans 14pt" pitchFamily="2" charset="77"/>
-              </a:endParaRPr>
-            </a:p>
-          </p:txBody>
-        </p:sp>
-        <p:sp>
-          <p:nvSpPr>
-            <p:cNvPr id="19" name="Text 29">
-              <a:extLst>
-                <a:ext uri="{FF2B5EF4-FFF2-40B4-BE49-F238E27FC236}">
-                  <a16:creationId xmlns:a16="http://schemas.microsoft.com/office/drawing/2014/main" id="{F0A9717D-6108-FE6E-8D5C-6389EABDE4A9}"/>
-                </a:ext>
-              </a:extLst>
-            </p:cNvPr>
-            <p:cNvSpPr/>
-            <p:nvPr/>
-          </p:nvSpPr>
-          <p:spPr>
-            <a:xfrm>
-              <a:off x="13169731" y="1989865"/>
-              <a:ext cx="4661496" cy="1182447"/>
-            </a:xfrm>
-            <a:prstGeom prst="rect">
-              <a:avLst/>
-            </a:prstGeom>
-            <a:noFill/>
-            <a:ln/>
-          </p:spPr>
-          <p:txBody>
-            <a:bodyPr wrap="square" lIns="25400" tIns="25400" rIns="25400" bIns="25400" rtlCol="0" anchor="t">
-              <a:normAutofit/>
-            </a:bodyPr>
-            <a:lstStyle/>
-            <a:p>
-              <a:r>
-                <a:rPr lang="en-GB" sz="1650" dirty="0">
-                  <a:solidFill>
-                    <a:srgbClr val="643791"/>
-                  </a:solidFill>
-                  <a:latin typeface="DM Sans 14pt" pitchFamily="2" charset="77"/>
-                </a:rPr>
-                <a:t>{{</a:t>
-              </a:r>
-              <a:r>
-                <a:rPr lang="en-GB" sz="1650" dirty="0" err="1">
-                  <a:solidFill>
-                    <a:srgbClr val="643791"/>
-                  </a:solidFill>
-                  <a:latin typeface="DM Sans 14pt" pitchFamily="2" charset="77"/>
-                </a:rPr>
-                <a:t>chart_explainer_postings_by_type</a:t>
-              </a:r>
-              <a:r>
-                <a:rPr lang="en-GB" sz="1650" dirty="0">
-                  <a:solidFill>
-                    <a:srgbClr val="643791"/>
-                  </a:solidFill>
-                  <a:latin typeface="DM Sans 14pt" pitchFamily="2" charset="77"/>
-                </a:rPr>
-                <a:t>}}</a:t>
-              </a:r>
-            </a:p>
-          </p:txBody>
-        </p:sp>
-      </p:grpSp>
+            <a:ext cx="4703047" cy="1182447"/>
+          </a:xfrm>
+          <a:prstGeom prst="roundRect">
+            <a:avLst>
+              <a:gd name="adj" fmla="val 14191"/>
+            </a:avLst>
+          </a:prstGeom>
+          <a:solidFill>
+            <a:srgbClr val="643791">
+              <a:alpha val="8000"/>
+            </a:srgbClr>
+          </a:solidFill>
+          <a:ln/>
+        </p:spPr>
+        <p:txBody>
+          <a:bodyPr/>
+          <a:lstStyle/>
+          <a:p>
+            <a:r>
+              <a:rPr lang="en-GB" sz="1400" dirty="0">
+                <a:solidFill>
+                  <a:srgbClr val="643791"/>
+                </a:solidFill>
+                <a:latin typeface="DM Sans 14pt" pitchFamily="2" charset="77"/>
+              </a:rPr>
+              <a:t>{{</a:t>
+            </a:r>
+            <a:r>
+              <a:rPr lang="en-GB" sz="1400" dirty="0" err="1">
+                <a:solidFill>
+                  <a:srgbClr val="643791"/>
+                </a:solidFill>
+                <a:latin typeface="DM Sans 14pt" pitchFamily="2" charset="77"/>
+              </a:rPr>
+              <a:t>chart_explainer_postings_by_type</a:t>
+            </a:r>
+            <a:r>
+              <a:rPr lang="en-GB" sz="1400" dirty="0">
+                <a:solidFill>
+                  <a:srgbClr val="643791"/>
+                </a:solidFill>
+                <a:latin typeface="DM Sans 14pt" pitchFamily="2" charset="77"/>
+              </a:rPr>
+              <a:t>}}</a:t>
+            </a:r>
+          </a:p>
+        </p:txBody>
+      </p:sp>
       <p:grpSp>
         <p:nvGrpSpPr>
           <p:cNvPr id="45" name="Group 44">
@@ -8150,669 +7461,358 @@
           </a:p>
         </p:txBody>
       </p:sp>
-      <p:grpSp>
-        <p:nvGrpSpPr>
-          <p:cNvPr id="63" name="Group 62">
+      <p:sp>
+        <p:nvSpPr>
+          <p:cNvPr id="10" name="Text 27">
             <a:extLst>
               <a:ext uri="{FF2B5EF4-FFF2-40B4-BE49-F238E27FC236}">
-                <a16:creationId xmlns:a16="http://schemas.microsoft.com/office/drawing/2014/main" id="{C5552833-C70E-BB8F-DB30-8A47BE513C6D}"/>
+                <a16:creationId xmlns:a16="http://schemas.microsoft.com/office/drawing/2014/main" id="{C5697E3F-850F-2F5E-151D-312EC56A7E9F}"/>
               </a:ext>
             </a:extLst>
           </p:cNvPr>
-          <p:cNvGrpSpPr/>
-          <p:nvPr/>
-        </p:nvGrpSpPr>
-        <p:grpSpPr>
+          <p:cNvSpPr/>
+          <p:nvPr/>
+        </p:nvSpPr>
+        <p:spPr>
           <a:xfrm>
             <a:off x="12995755" y="4782151"/>
-            <a:ext cx="4742571" cy="4552349"/>
-            <a:chOff x="12995755" y="4899067"/>
-            <a:chExt cx="4742571" cy="4552349"/>
-          </a:xfrm>
-        </p:grpSpPr>
-        <p:sp>
-          <p:nvSpPr>
-            <p:cNvPr id="10" name="Text 27">
-              <a:extLst>
-                <a:ext uri="{FF2B5EF4-FFF2-40B4-BE49-F238E27FC236}">
-                  <a16:creationId xmlns:a16="http://schemas.microsoft.com/office/drawing/2014/main" id="{C5697E3F-850F-2F5E-151D-312EC56A7E9F}"/>
-                </a:ext>
-              </a:extLst>
-            </p:cNvPr>
-            <p:cNvSpPr/>
-            <p:nvPr/>
-          </p:nvSpPr>
-          <p:spPr>
-            <a:xfrm>
-              <a:off x="12995755" y="4899067"/>
-              <a:ext cx="4741200" cy="488865"/>
-            </a:xfrm>
-            <a:prstGeom prst="rect">
-              <a:avLst/>
-            </a:prstGeom>
-            <a:noFill/>
-            <a:ln/>
-          </p:spPr>
-          <p:txBody>
-            <a:bodyPr wrap="square" lIns="25400" tIns="25400" rIns="25400" bIns="25400" rtlCol="0" anchor="t">
-              <a:normAutofit/>
-            </a:bodyPr>
-            <a:lstStyle/>
-            <a:p>
-              <a:pPr marL="0" indent="0" algn="l">
-                <a:buNone/>
-              </a:pPr>
-              <a:r>
-                <a:rPr lang="en-US" sz="2400" b="1" kern="0" spc="368" dirty="0">
-                  <a:solidFill>
-                    <a:srgbClr val="643791"/>
-                  </a:solidFill>
-                  <a:latin typeface="DM Sans 14pt" pitchFamily="2" charset="77"/>
-                  <a:ea typeface="Arial" pitchFamily="34" charset="-122"/>
-                  <a:cs typeface="Arial" pitchFamily="34" charset="-120"/>
-                </a:rPr>
-                <a:t>COMMENTARY</a:t>
-              </a:r>
-              <a:endParaRPr lang="en-US" sz="2400" b="1" dirty="0">
-                <a:latin typeface="DM Sans 14pt" pitchFamily="2" charset="77"/>
-              </a:endParaRPr>
-            </a:p>
-          </p:txBody>
-        </p:sp>
-        <p:grpSp>
-          <p:nvGrpSpPr>
-            <p:cNvPr id="11" name="Group 10">
-              <a:extLst>
-                <a:ext uri="{FF2B5EF4-FFF2-40B4-BE49-F238E27FC236}">
-                  <a16:creationId xmlns:a16="http://schemas.microsoft.com/office/drawing/2014/main" id="{A59D761A-CD04-CAA1-20E9-4AF75B79DE68}"/>
-                </a:ext>
-              </a:extLst>
-            </p:cNvPr>
-            <p:cNvGrpSpPr/>
-            <p:nvPr/>
-          </p:nvGrpSpPr>
-          <p:grpSpPr>
-            <a:xfrm>
-              <a:off x="12995755" y="5387932"/>
-              <a:ext cx="4741200" cy="1281600"/>
-              <a:chOff x="13090029" y="4818473"/>
-              <a:chExt cx="4532760" cy="246230"/>
-            </a:xfrm>
-          </p:grpSpPr>
-          <p:sp>
-            <p:nvSpPr>
-              <p:cNvPr id="12" name="Shape 28">
-                <a:extLst>
-                  <a:ext uri="{FF2B5EF4-FFF2-40B4-BE49-F238E27FC236}">
-                    <a16:creationId xmlns:a16="http://schemas.microsoft.com/office/drawing/2014/main" id="{83F6394D-8B8D-2F71-BE18-2B217EA0B79E}"/>
-                  </a:ext>
-                </a:extLst>
-              </p:cNvPr>
-              <p:cNvSpPr/>
-              <p:nvPr/>
-            </p:nvSpPr>
-            <p:spPr>
-              <a:xfrm>
-                <a:off x="13090029" y="4818473"/>
-                <a:ext cx="4496284" cy="227180"/>
-              </a:xfrm>
-              <a:prstGeom prst="roundRect">
-                <a:avLst>
-                  <a:gd name="adj" fmla="val 14191"/>
-                </a:avLst>
-              </a:prstGeom>
-              <a:solidFill>
-                <a:srgbClr val="643791">
-                  <a:alpha val="8000"/>
-                </a:srgbClr>
-              </a:solidFill>
-              <a:ln/>
-            </p:spPr>
-            <p:txBody>
-              <a:bodyPr/>
-              <a:lstStyle/>
-              <a:p>
-                <a:endParaRPr lang="en-GB">
-                  <a:latin typeface="DM Sans 14pt" pitchFamily="2" charset="77"/>
-                </a:endParaRPr>
-              </a:p>
-            </p:txBody>
-          </p:sp>
-          <p:sp>
-            <p:nvSpPr>
-              <p:cNvPr id="13" name="Text 29">
-                <a:extLst>
-                  <a:ext uri="{FF2B5EF4-FFF2-40B4-BE49-F238E27FC236}">
-                    <a16:creationId xmlns:a16="http://schemas.microsoft.com/office/drawing/2014/main" id="{DA1137CA-0FDE-1DC4-3AAF-5CC3AD6C4C4B}"/>
-                  </a:ext>
-                </a:extLst>
-              </p:cNvPr>
-              <p:cNvSpPr/>
-              <p:nvPr/>
-            </p:nvSpPr>
-            <p:spPr>
-              <a:xfrm>
-                <a:off x="13166229" y="4837523"/>
-                <a:ext cx="4456560" cy="227180"/>
-              </a:xfrm>
-              <a:prstGeom prst="rect">
-                <a:avLst/>
-              </a:prstGeom>
-              <a:noFill/>
-              <a:ln/>
-            </p:spPr>
-            <p:txBody>
-              <a:bodyPr wrap="square" lIns="25400" tIns="25400" rIns="25400" bIns="25400" rtlCol="0" anchor="t">
-                <a:normAutofit/>
-              </a:bodyPr>
-              <a:lstStyle/>
-              <a:p>
-                <a:pPr>
-                  <a:lnSpc>
-                    <a:spcPct val="110000"/>
-                  </a:lnSpc>
-                </a:pPr>
-                <a:r>
-                  <a:rPr lang="en-US" sz="1650" dirty="0">
-                    <a:solidFill>
-                      <a:srgbClr val="643791"/>
-                    </a:solidFill>
-                    <a:latin typeface="DM Sans 14pt" pitchFamily="2" charset="77"/>
-                    <a:ea typeface="Arial" pitchFamily="34" charset="-122"/>
-                    <a:cs typeface="Arial" pitchFamily="34" charset="-120"/>
-                  </a:rPr>
-                  <a:t>{{</a:t>
-                </a:r>
-                <a:r>
-                  <a:rPr lang="en-US" sz="1650" dirty="0" err="1">
-                    <a:solidFill>
-                      <a:srgbClr val="643791"/>
-                    </a:solidFill>
-                    <a:latin typeface="DM Sans 14pt" pitchFamily="2" charset="77"/>
-                    <a:ea typeface="Arial" pitchFamily="34" charset="-122"/>
-                    <a:cs typeface="Arial" pitchFamily="34" charset="-120"/>
-                  </a:rPr>
-                  <a:t>commentary_roi_intro</a:t>
-                </a:r>
-                <a:r>
-                  <a:rPr lang="en-US" sz="1650" dirty="0">
-                    <a:solidFill>
-                      <a:srgbClr val="643791"/>
-                    </a:solidFill>
-                    <a:latin typeface="DM Sans 14pt" pitchFamily="2" charset="77"/>
-                    <a:ea typeface="Arial" pitchFamily="34" charset="-122"/>
-                    <a:cs typeface="Arial" pitchFamily="34" charset="-120"/>
-                  </a:rPr>
-                  <a:t>}}</a:t>
-                </a:r>
-                <a:endParaRPr lang="en-US" sz="1650" dirty="0">
-                  <a:latin typeface="DM Sans 14pt" pitchFamily="2" charset="77"/>
-                </a:endParaRPr>
-              </a:p>
-            </p:txBody>
-          </p:sp>
-        </p:grpSp>
-        <p:grpSp>
-          <p:nvGrpSpPr>
-            <p:cNvPr id="14" name="Group 13">
-              <a:extLst>
-                <a:ext uri="{FF2B5EF4-FFF2-40B4-BE49-F238E27FC236}">
-                  <a16:creationId xmlns:a16="http://schemas.microsoft.com/office/drawing/2014/main" id="{D14F9F58-79D2-B499-FCE2-A4758366A753}"/>
-                </a:ext>
-              </a:extLst>
-            </p:cNvPr>
-            <p:cNvGrpSpPr/>
-            <p:nvPr/>
-          </p:nvGrpSpPr>
-          <p:grpSpPr>
-            <a:xfrm>
-              <a:off x="12995755" y="6779087"/>
-              <a:ext cx="4742571" cy="1281600"/>
-              <a:chOff x="13356729" y="5341306"/>
-              <a:chExt cx="4397870" cy="228600"/>
-            </a:xfrm>
-          </p:grpSpPr>
-          <p:sp>
-            <p:nvSpPr>
-              <p:cNvPr id="15" name="Shape 30">
-                <a:extLst>
-                  <a:ext uri="{FF2B5EF4-FFF2-40B4-BE49-F238E27FC236}">
-                    <a16:creationId xmlns:a16="http://schemas.microsoft.com/office/drawing/2014/main" id="{E4C5A338-6F10-3BF6-0BBD-F2AF144F8E1C}"/>
-                  </a:ext>
-                </a:extLst>
-              </p:cNvPr>
-              <p:cNvSpPr/>
-              <p:nvPr/>
-            </p:nvSpPr>
-            <p:spPr>
-              <a:xfrm>
-                <a:off x="13356729" y="5341306"/>
-                <a:ext cx="4365324" cy="209550"/>
-              </a:xfrm>
-              <a:prstGeom prst="roundRect">
-                <a:avLst>
-                  <a:gd name="adj" fmla="val 15385"/>
-                </a:avLst>
-              </a:prstGeom>
-              <a:solidFill>
-                <a:srgbClr val="643791">
-                  <a:alpha val="8000"/>
-                </a:srgbClr>
-              </a:solidFill>
-              <a:ln/>
-            </p:spPr>
-            <p:txBody>
-              <a:bodyPr/>
-              <a:lstStyle/>
-              <a:p>
-                <a:endParaRPr lang="en-GB">
-                  <a:latin typeface="DM Sans 14pt" pitchFamily="2" charset="77"/>
-                </a:endParaRPr>
-              </a:p>
-            </p:txBody>
-          </p:sp>
-          <p:sp>
-            <p:nvSpPr>
-              <p:cNvPr id="16" name="Text 31">
-                <a:extLst>
-                  <a:ext uri="{FF2B5EF4-FFF2-40B4-BE49-F238E27FC236}">
-                    <a16:creationId xmlns:a16="http://schemas.microsoft.com/office/drawing/2014/main" id="{A840C745-C345-7CFB-048E-925F87EF0CA0}"/>
-                  </a:ext>
-                </a:extLst>
-              </p:cNvPr>
-              <p:cNvSpPr/>
-              <p:nvPr/>
-            </p:nvSpPr>
-            <p:spPr>
-              <a:xfrm>
-                <a:off x="13432928" y="5360356"/>
-                <a:ext cx="4321671" cy="209550"/>
-              </a:xfrm>
-              <a:prstGeom prst="rect">
-                <a:avLst/>
-              </a:prstGeom>
-              <a:noFill/>
-              <a:ln/>
-            </p:spPr>
-            <p:txBody>
-              <a:bodyPr wrap="square" lIns="25400" tIns="25400" rIns="25400" bIns="25400" rtlCol="0" anchor="t">
-                <a:normAutofit/>
-              </a:bodyPr>
-              <a:lstStyle/>
-              <a:p>
-                <a:pPr>
-                  <a:lnSpc>
-                    <a:spcPct val="110000"/>
-                  </a:lnSpc>
-                </a:pPr>
-                <a:r>
-                  <a:rPr lang="en-US" sz="1500" dirty="0">
-                    <a:solidFill>
-                      <a:srgbClr val="643791"/>
-                    </a:solidFill>
-                    <a:latin typeface="DM Sans 14pt" pitchFamily="2" charset="77"/>
-                    <a:ea typeface="Arial" pitchFamily="34" charset="-122"/>
-                    <a:cs typeface="Arial" pitchFamily="34" charset="-120"/>
-                  </a:rPr>
-                  <a:t>{{commentary_roi_point_1}}</a:t>
-                </a:r>
-                <a:endParaRPr lang="en-US" sz="1500" dirty="0">
-                  <a:latin typeface="DM Sans 14pt" pitchFamily="2" charset="77"/>
-                </a:endParaRPr>
-              </a:p>
-            </p:txBody>
-          </p:sp>
-        </p:grpSp>
-        <p:grpSp>
-          <p:nvGrpSpPr>
-            <p:cNvPr id="17" name="Group 16">
-              <a:extLst>
-                <a:ext uri="{FF2B5EF4-FFF2-40B4-BE49-F238E27FC236}">
-                  <a16:creationId xmlns:a16="http://schemas.microsoft.com/office/drawing/2014/main" id="{9F1FD0BC-0B4A-AC73-2ED2-E85F1C460F39}"/>
-                </a:ext>
-              </a:extLst>
-            </p:cNvPr>
-            <p:cNvGrpSpPr/>
-            <p:nvPr/>
-          </p:nvGrpSpPr>
-          <p:grpSpPr>
-            <a:xfrm>
-              <a:off x="12995755" y="8170242"/>
-              <a:ext cx="4742571" cy="1281174"/>
-              <a:chOff x="13356729" y="7948173"/>
-              <a:chExt cx="4397870" cy="228600"/>
-            </a:xfrm>
-          </p:grpSpPr>
-          <p:sp>
-            <p:nvSpPr>
-              <p:cNvPr id="18" name="Shape 32">
-                <a:extLst>
-                  <a:ext uri="{FF2B5EF4-FFF2-40B4-BE49-F238E27FC236}">
-                    <a16:creationId xmlns:a16="http://schemas.microsoft.com/office/drawing/2014/main" id="{BB3BE6E6-00CA-127E-5168-8756B094DDF2}"/>
-                  </a:ext>
-                </a:extLst>
-              </p:cNvPr>
-              <p:cNvSpPr/>
-              <p:nvPr/>
-            </p:nvSpPr>
-            <p:spPr>
-              <a:xfrm>
-                <a:off x="13356729" y="7948173"/>
-                <a:ext cx="4365324" cy="209550"/>
-              </a:xfrm>
-              <a:prstGeom prst="roundRect">
-                <a:avLst>
-                  <a:gd name="adj" fmla="val 15385"/>
-                </a:avLst>
-              </a:prstGeom>
-              <a:solidFill>
-                <a:srgbClr val="643791">
-                  <a:alpha val="8000"/>
-                </a:srgbClr>
-              </a:solidFill>
-              <a:ln/>
-            </p:spPr>
-            <p:txBody>
-              <a:bodyPr/>
-              <a:lstStyle/>
-              <a:p>
-                <a:endParaRPr lang="en-GB">
-                  <a:latin typeface="DM Sans 14pt" pitchFamily="2" charset="77"/>
-                </a:endParaRPr>
-              </a:p>
-            </p:txBody>
-          </p:sp>
-          <p:sp>
-            <p:nvSpPr>
-              <p:cNvPr id="19" name="Text 33">
-                <a:extLst>
-                  <a:ext uri="{FF2B5EF4-FFF2-40B4-BE49-F238E27FC236}">
-                    <a16:creationId xmlns:a16="http://schemas.microsoft.com/office/drawing/2014/main" id="{9ECC8CE5-9239-82CF-4395-E8DE7B9A0029}"/>
-                  </a:ext>
-                </a:extLst>
-              </p:cNvPr>
-              <p:cNvSpPr/>
-              <p:nvPr/>
-            </p:nvSpPr>
-            <p:spPr>
-              <a:xfrm>
-                <a:off x="13432928" y="7967223"/>
-                <a:ext cx="4321671" cy="209550"/>
-              </a:xfrm>
-              <a:prstGeom prst="rect">
-                <a:avLst/>
-              </a:prstGeom>
-              <a:noFill/>
-              <a:ln/>
-            </p:spPr>
-            <p:txBody>
-              <a:bodyPr wrap="square" lIns="25400" tIns="25400" rIns="25400" bIns="25400" rtlCol="0" anchor="t">
-                <a:normAutofit/>
-              </a:bodyPr>
-              <a:lstStyle/>
-              <a:p>
-                <a:pPr>
-                  <a:lnSpc>
-                    <a:spcPct val="110000"/>
-                  </a:lnSpc>
-                </a:pPr>
-                <a:r>
-                  <a:rPr lang="en-US" sz="1500" dirty="0">
-                    <a:solidFill>
-                      <a:srgbClr val="643791"/>
-                    </a:solidFill>
-                    <a:latin typeface="DM Sans 14pt" pitchFamily="2" charset="77"/>
-                    <a:ea typeface="Arial" pitchFamily="34" charset="-122"/>
-                    <a:cs typeface="Arial" pitchFamily="34" charset="-120"/>
-                  </a:rPr>
-                  <a:t>{{commentary_roi_point_2}}</a:t>
-                </a:r>
-                <a:endParaRPr lang="en-US" sz="1500" dirty="0">
-                  <a:latin typeface="DM Sans 14pt" pitchFamily="2" charset="77"/>
-                </a:endParaRPr>
-              </a:p>
-            </p:txBody>
-          </p:sp>
-        </p:grpSp>
-      </p:grpSp>
-      <p:grpSp>
-        <p:nvGrpSpPr>
-          <p:cNvPr id="20" name="Group 19">
+            <a:ext cx="4741200" cy="488865"/>
+          </a:xfrm>
+          <a:prstGeom prst="rect">
+            <a:avLst/>
+          </a:prstGeom>
+          <a:noFill/>
+          <a:ln/>
+        </p:spPr>
+        <p:txBody>
+          <a:bodyPr wrap="square" lIns="25400" tIns="25400" rIns="25400" bIns="25400" rtlCol="0" anchor="t">
+            <a:normAutofit/>
+          </a:bodyPr>
+          <a:lstStyle/>
+          <a:p>
+            <a:pPr marL="0" indent="0" algn="l">
+              <a:buNone/>
+            </a:pPr>
+            <a:r>
+              <a:rPr lang="en-US" sz="2400" b="1" kern="0" spc="368" dirty="0">
+                <a:solidFill>
+                  <a:srgbClr val="643791"/>
+                </a:solidFill>
+                <a:latin typeface="DM Sans 14pt" pitchFamily="2" charset="77"/>
+                <a:ea typeface="Arial" pitchFamily="34" charset="-122"/>
+                <a:cs typeface="Arial" pitchFamily="34" charset="-120"/>
+              </a:rPr>
+              <a:t>COMMENTARY</a:t>
+            </a:r>
+            <a:endParaRPr lang="en-US" sz="2400" b="1" dirty="0">
+              <a:latin typeface="DM Sans 14pt" pitchFamily="2" charset="77"/>
+            </a:endParaRPr>
+          </a:p>
+        </p:txBody>
+      </p:sp>
+      <p:sp>
+        <p:nvSpPr>
+          <p:cNvPr id="12" name="Shape 28">
             <a:extLst>
               <a:ext uri="{FF2B5EF4-FFF2-40B4-BE49-F238E27FC236}">
-                <a16:creationId xmlns:a16="http://schemas.microsoft.com/office/drawing/2014/main" id="{C1693A41-39C2-A8B5-8F1F-F42DA3FBA399}"/>
+                <a16:creationId xmlns:a16="http://schemas.microsoft.com/office/drawing/2014/main" id="{83F6394D-8B8D-2F71-BE18-2B217EA0B79E}"/>
               </a:ext>
             </a:extLst>
           </p:cNvPr>
-          <p:cNvGrpSpPr/>
-          <p:nvPr/>
-        </p:nvGrpSpPr>
-        <p:grpSpPr>
-          <a:xfrm>
-            <a:off x="12995755" y="1890712"/>
-            <a:ext cx="4741200" cy="1281600"/>
-            <a:chOff x="13090027" y="1890712"/>
-            <a:chExt cx="4741200" cy="1281600"/>
-          </a:xfrm>
-        </p:grpSpPr>
-        <p:sp>
-          <p:nvSpPr>
-            <p:cNvPr id="21" name="Shape 28">
-              <a:extLst>
-                <a:ext uri="{FF2B5EF4-FFF2-40B4-BE49-F238E27FC236}">
-                  <a16:creationId xmlns:a16="http://schemas.microsoft.com/office/drawing/2014/main" id="{6D0424A9-E958-5944-C203-BF2D77DEB55E}"/>
-                </a:ext>
-              </a:extLst>
-            </p:cNvPr>
-            <p:cNvSpPr/>
-            <p:nvPr/>
-          </p:nvSpPr>
-          <p:spPr>
-            <a:xfrm>
-              <a:off x="13090027" y="1890712"/>
-              <a:ext cx="4703047" cy="1182447"/>
-            </a:xfrm>
-            <a:prstGeom prst="roundRect">
-              <a:avLst>
-                <a:gd name="adj" fmla="val 14191"/>
-              </a:avLst>
-            </a:prstGeom>
-            <a:solidFill>
-              <a:srgbClr val="643791">
-                <a:alpha val="8000"/>
-              </a:srgbClr>
-            </a:solidFill>
-            <a:ln/>
-          </p:spPr>
-          <p:txBody>
-            <a:bodyPr/>
-            <a:lstStyle/>
-            <a:p>
-              <a:endParaRPr lang="en-GB">
-                <a:latin typeface="DM Sans 14pt" pitchFamily="2" charset="77"/>
-              </a:endParaRPr>
-            </a:p>
-          </p:txBody>
-        </p:sp>
-        <p:sp>
-          <p:nvSpPr>
-            <p:cNvPr id="22" name="Text 29">
-              <a:extLst>
-                <a:ext uri="{FF2B5EF4-FFF2-40B4-BE49-F238E27FC236}">
-                  <a16:creationId xmlns:a16="http://schemas.microsoft.com/office/drawing/2014/main" id="{9192C2C4-2E46-4E08-09A7-E2109DB14EA4}"/>
-                </a:ext>
-              </a:extLst>
-            </p:cNvPr>
-            <p:cNvSpPr/>
-            <p:nvPr/>
-          </p:nvSpPr>
-          <p:spPr>
-            <a:xfrm>
-              <a:off x="13169731" y="1989865"/>
-              <a:ext cx="4661496" cy="1182447"/>
-            </a:xfrm>
-            <a:prstGeom prst="rect">
-              <a:avLst/>
-            </a:prstGeom>
-            <a:noFill/>
-            <a:ln/>
-          </p:spPr>
-          <p:txBody>
-            <a:bodyPr wrap="square" lIns="25400" tIns="25400" rIns="25400" bIns="25400" rtlCol="0" anchor="t">
-              <a:normAutofit/>
-            </a:bodyPr>
-            <a:lstStyle/>
-            <a:p>
-              <a:r>
-                <a:rPr lang="en-GB" sz="1650" dirty="0">
-                  <a:solidFill>
-                    <a:srgbClr val="643791"/>
-                  </a:solidFill>
-                  <a:latin typeface="DM Sans 14pt" pitchFamily="2" charset="77"/>
-                </a:rPr>
-                <a:t>{{</a:t>
-              </a:r>
-              <a:r>
-                <a:rPr lang="en-GB" sz="1650" dirty="0" err="1">
-                  <a:solidFill>
-                    <a:srgbClr val="643791"/>
-                  </a:solidFill>
-                  <a:latin typeface="DM Sans 14pt" pitchFamily="2" charset="77"/>
-                </a:rPr>
-                <a:t>chart_explainer_spend_vs_ratecard</a:t>
-              </a:r>
-              <a:r>
-                <a:rPr lang="en-GB" sz="1650" dirty="0">
-                  <a:solidFill>
-                    <a:srgbClr val="643791"/>
-                  </a:solidFill>
-                  <a:latin typeface="DM Sans 14pt" pitchFamily="2" charset="77"/>
-                </a:rPr>
-                <a:t>}}</a:t>
-              </a:r>
-            </a:p>
-          </p:txBody>
-        </p:sp>
-      </p:grpSp>
-      <p:grpSp>
-        <p:nvGrpSpPr>
-          <p:cNvPr id="64" name="Group 63">
+          <p:cNvSpPr/>
+          <p:nvPr/>
+        </p:nvSpPr>
+        <p:spPr>
+          <a:xfrm>
+            <a:off x="12995755" y="5271016"/>
+            <a:ext cx="4703047" cy="1182447"/>
+          </a:xfrm>
+          <a:prstGeom prst="roundRect">
+            <a:avLst>
+              <a:gd name="adj" fmla="val 14191"/>
+            </a:avLst>
+          </a:prstGeom>
+          <a:solidFill>
+            <a:srgbClr val="643791">
+              <a:alpha val="8000"/>
+            </a:srgbClr>
+          </a:solidFill>
+          <a:ln/>
+        </p:spPr>
+        <p:txBody>
+          <a:bodyPr/>
+          <a:lstStyle/>
+          <a:p>
+            <a:r>
+              <a:rPr lang="en-US" sz="1400" dirty="0">
+                <a:solidFill>
+                  <a:srgbClr val="643791"/>
+                </a:solidFill>
+                <a:latin typeface="DM Sans 14pt" pitchFamily="2" charset="77"/>
+                <a:ea typeface="Arial" pitchFamily="34" charset="-122"/>
+                <a:cs typeface="Arial" pitchFamily="34" charset="-120"/>
+              </a:rPr>
+              <a:t>{{</a:t>
+            </a:r>
+            <a:r>
+              <a:rPr lang="en-US" sz="1400" dirty="0" err="1">
+                <a:solidFill>
+                  <a:srgbClr val="643791"/>
+                </a:solidFill>
+                <a:latin typeface="DM Sans 14pt" pitchFamily="2" charset="77"/>
+                <a:ea typeface="Arial" pitchFamily="34" charset="-122"/>
+                <a:cs typeface="Arial" pitchFamily="34" charset="-120"/>
+              </a:rPr>
+              <a:t>commentary_roi_intro</a:t>
+            </a:r>
+            <a:r>
+              <a:rPr lang="en-US" sz="1400" dirty="0">
+                <a:solidFill>
+                  <a:srgbClr val="643791"/>
+                </a:solidFill>
+                <a:latin typeface="DM Sans 14pt" pitchFamily="2" charset="77"/>
+                <a:ea typeface="Arial" pitchFamily="34" charset="-122"/>
+                <a:cs typeface="Arial" pitchFamily="34" charset="-120"/>
+              </a:rPr>
+              <a:t>}}</a:t>
+            </a:r>
+            <a:endParaRPr lang="en-US" sz="1400" dirty="0">
+              <a:latin typeface="DM Sans 14pt" pitchFamily="2" charset="77"/>
+            </a:endParaRPr>
+          </a:p>
+        </p:txBody>
+      </p:sp>
+      <p:sp>
+        <p:nvSpPr>
+          <p:cNvPr id="15" name="Shape 30">
             <a:extLst>
               <a:ext uri="{FF2B5EF4-FFF2-40B4-BE49-F238E27FC236}">
-                <a16:creationId xmlns:a16="http://schemas.microsoft.com/office/drawing/2014/main" id="{23E8AEA6-519F-6CD9-A9E0-9AF8764F22E7}"/>
+                <a16:creationId xmlns:a16="http://schemas.microsoft.com/office/drawing/2014/main" id="{E4C5A338-6F10-3BF6-0BBD-F2AF144F8E1C}"/>
               </a:ext>
             </a:extLst>
           </p:cNvPr>
-          <p:cNvGrpSpPr/>
-          <p:nvPr/>
-        </p:nvGrpSpPr>
-        <p:grpSpPr>
+          <p:cNvSpPr/>
+          <p:nvPr/>
+        </p:nvSpPr>
+        <p:spPr>
+          <a:xfrm>
+            <a:off x="12995755" y="6662171"/>
+            <a:ext cx="4707474" cy="1174800"/>
+          </a:xfrm>
+          <a:prstGeom prst="roundRect">
+            <a:avLst>
+              <a:gd name="adj" fmla="val 15385"/>
+            </a:avLst>
+          </a:prstGeom>
+          <a:solidFill>
+            <a:srgbClr val="643791">
+              <a:alpha val="8000"/>
+            </a:srgbClr>
+          </a:solidFill>
+          <a:ln/>
+        </p:spPr>
+        <p:txBody>
+          <a:bodyPr/>
+          <a:lstStyle/>
+          <a:p>
+            <a:r>
+              <a:rPr lang="en-US" sz="1400" dirty="0">
+                <a:solidFill>
+                  <a:srgbClr val="643791"/>
+                </a:solidFill>
+                <a:latin typeface="DM Sans 14pt" pitchFamily="2" charset="77"/>
+                <a:ea typeface="Arial" pitchFamily="34" charset="-122"/>
+                <a:cs typeface="Arial" pitchFamily="34" charset="-120"/>
+              </a:rPr>
+              <a:t>{{commentary_roi_point_1}}</a:t>
+            </a:r>
+            <a:endParaRPr lang="en-US" sz="1400" dirty="0">
+              <a:latin typeface="DM Sans 14pt" pitchFamily="2" charset="77"/>
+            </a:endParaRPr>
+          </a:p>
+        </p:txBody>
+      </p:sp>
+      <p:sp>
+        <p:nvSpPr>
+          <p:cNvPr id="18" name="Shape 32">
+            <a:extLst>
+              <a:ext uri="{FF2B5EF4-FFF2-40B4-BE49-F238E27FC236}">
+                <a16:creationId xmlns:a16="http://schemas.microsoft.com/office/drawing/2014/main" id="{BB3BE6E6-00CA-127E-5168-8756B094DDF2}"/>
+              </a:ext>
+            </a:extLst>
+          </p:cNvPr>
+          <p:cNvSpPr/>
+          <p:nvPr/>
+        </p:nvSpPr>
+        <p:spPr>
+          <a:xfrm>
+            <a:off x="12995755" y="8053326"/>
+            <a:ext cx="4707474" cy="1174410"/>
+          </a:xfrm>
+          <a:prstGeom prst="roundRect">
+            <a:avLst>
+              <a:gd name="adj" fmla="val 15385"/>
+            </a:avLst>
+          </a:prstGeom>
+          <a:solidFill>
+            <a:srgbClr val="643791">
+              <a:alpha val="8000"/>
+            </a:srgbClr>
+          </a:solidFill>
+          <a:ln/>
+        </p:spPr>
+        <p:txBody>
+          <a:bodyPr/>
+          <a:lstStyle/>
+          <a:p>
+            <a:pPr>
+              <a:lnSpc>
+                <a:spcPct val="110000"/>
+              </a:lnSpc>
+            </a:pPr>
+            <a:r>
+              <a:rPr lang="en-US" sz="1400" dirty="0">
+                <a:solidFill>
+                  <a:srgbClr val="643791"/>
+                </a:solidFill>
+                <a:latin typeface="DM Sans 14pt" pitchFamily="2" charset="77"/>
+                <a:ea typeface="Arial" pitchFamily="34" charset="-122"/>
+                <a:cs typeface="Arial" pitchFamily="34" charset="-120"/>
+              </a:rPr>
+              <a:t>{{commentary_roi_point_2}}</a:t>
+            </a:r>
+            <a:endParaRPr lang="en-US" sz="1400" dirty="0">
+              <a:latin typeface="DM Sans 14pt" pitchFamily="2" charset="77"/>
+            </a:endParaRPr>
+          </a:p>
+        </p:txBody>
+      </p:sp>
+      <p:sp>
+        <p:nvSpPr>
+          <p:cNvPr id="21" name="Shape 28">
+            <a:extLst>
+              <a:ext uri="{FF2B5EF4-FFF2-40B4-BE49-F238E27FC236}">
+                <a16:creationId xmlns:a16="http://schemas.microsoft.com/office/drawing/2014/main" id="{6D0424A9-E958-5944-C203-BF2D77DEB55E}"/>
+              </a:ext>
+            </a:extLst>
+          </p:cNvPr>
+          <p:cNvSpPr/>
+          <p:nvPr/>
+        </p:nvSpPr>
+        <p:spPr>
+          <a:xfrm>
+            <a:off x="12995755" y="1890712"/>
+            <a:ext cx="4703047" cy="1182447"/>
+          </a:xfrm>
+          <a:prstGeom prst="roundRect">
+            <a:avLst>
+              <a:gd name="adj" fmla="val 14191"/>
+            </a:avLst>
+          </a:prstGeom>
+          <a:solidFill>
+            <a:srgbClr val="643791">
+              <a:alpha val="8000"/>
+            </a:srgbClr>
+          </a:solidFill>
+          <a:ln/>
+        </p:spPr>
+        <p:txBody>
+          <a:bodyPr/>
+          <a:lstStyle/>
+          <a:p>
+            <a:r>
+              <a:rPr lang="en-GB" sz="1400" dirty="0">
+                <a:solidFill>
+                  <a:srgbClr val="643791"/>
+                </a:solidFill>
+                <a:latin typeface="DM Sans 14pt" pitchFamily="2" charset="77"/>
+              </a:rPr>
+              <a:t>{{</a:t>
+            </a:r>
+            <a:r>
+              <a:rPr lang="en-GB" sz="1400" dirty="0" err="1">
+                <a:solidFill>
+                  <a:srgbClr val="643791"/>
+                </a:solidFill>
+                <a:latin typeface="DM Sans 14pt" pitchFamily="2" charset="77"/>
+              </a:rPr>
+              <a:t>chart_explainer_spend_vs_ratecard</a:t>
+            </a:r>
+            <a:r>
+              <a:rPr lang="en-GB" sz="1400" dirty="0">
+                <a:solidFill>
+                  <a:srgbClr val="643791"/>
+                </a:solidFill>
+                <a:latin typeface="DM Sans 14pt" pitchFamily="2" charset="77"/>
+              </a:rPr>
+              <a:t>}}</a:t>
+            </a:r>
+          </a:p>
+        </p:txBody>
+      </p:sp>
+      <p:sp>
+        <p:nvSpPr>
+          <p:cNvPr id="65" name="Shape 28">
+            <a:extLst>
+              <a:ext uri="{FF2B5EF4-FFF2-40B4-BE49-F238E27FC236}">
+                <a16:creationId xmlns:a16="http://schemas.microsoft.com/office/drawing/2014/main" id="{F71A69BB-30EF-C953-A8C6-CC84B32402CE}"/>
+              </a:ext>
+            </a:extLst>
+          </p:cNvPr>
+          <p:cNvSpPr/>
+          <p:nvPr/>
+        </p:nvSpPr>
+        <p:spPr>
           <a:xfrm>
             <a:off x="12957602" y="3336432"/>
-            <a:ext cx="4741200" cy="1281600"/>
-            <a:chOff x="13090027" y="1890712"/>
-            <a:chExt cx="4741200" cy="1281600"/>
-          </a:xfrm>
-        </p:grpSpPr>
-        <p:sp>
-          <p:nvSpPr>
-            <p:cNvPr id="65" name="Shape 28">
-              <a:extLst>
-                <a:ext uri="{FF2B5EF4-FFF2-40B4-BE49-F238E27FC236}">
-                  <a16:creationId xmlns:a16="http://schemas.microsoft.com/office/drawing/2014/main" id="{F71A69BB-30EF-C953-A8C6-CC84B32402CE}"/>
-                </a:ext>
-              </a:extLst>
-            </p:cNvPr>
-            <p:cNvSpPr/>
-            <p:nvPr/>
-          </p:nvSpPr>
-          <p:spPr>
-            <a:xfrm>
-              <a:off x="13090027" y="1890712"/>
-              <a:ext cx="4703047" cy="1182447"/>
-            </a:xfrm>
-            <a:prstGeom prst="roundRect">
-              <a:avLst>
-                <a:gd name="adj" fmla="val 14191"/>
-              </a:avLst>
-            </a:prstGeom>
-            <a:solidFill>
-              <a:srgbClr val="643791">
-                <a:alpha val="8000"/>
-              </a:srgbClr>
-            </a:solidFill>
-            <a:ln/>
-          </p:spPr>
-          <p:txBody>
-            <a:bodyPr/>
-            <a:lstStyle/>
-            <a:p>
-              <a:endParaRPr lang="en-GB">
-                <a:latin typeface="DM Sans 14pt" pitchFamily="2" charset="77"/>
-              </a:endParaRPr>
-            </a:p>
-          </p:txBody>
-        </p:sp>
-        <p:sp>
-          <p:nvSpPr>
-            <p:cNvPr id="66" name="Text 29">
-              <a:extLst>
-                <a:ext uri="{FF2B5EF4-FFF2-40B4-BE49-F238E27FC236}">
-                  <a16:creationId xmlns:a16="http://schemas.microsoft.com/office/drawing/2014/main" id="{CE831AF1-4DDE-C594-92DB-FFDFFA686576}"/>
-                </a:ext>
-              </a:extLst>
-            </p:cNvPr>
-            <p:cNvSpPr/>
-            <p:nvPr/>
-          </p:nvSpPr>
-          <p:spPr>
-            <a:xfrm>
-              <a:off x="13169731" y="1989865"/>
-              <a:ext cx="4661496" cy="1182447"/>
-            </a:xfrm>
-            <a:prstGeom prst="rect">
-              <a:avLst/>
-            </a:prstGeom>
-            <a:noFill/>
-            <a:ln/>
-          </p:spPr>
-          <p:txBody>
-            <a:bodyPr wrap="square" lIns="25400" tIns="25400" rIns="25400" bIns="25400" rtlCol="0" anchor="t">
-              <a:normAutofit/>
-            </a:bodyPr>
-            <a:lstStyle/>
-            <a:p>
-              <a:r>
-                <a:rPr lang="en-GB" sz="1650" dirty="0">
-                  <a:solidFill>
-                    <a:srgbClr val="643791"/>
-                  </a:solidFill>
-                  <a:latin typeface="DM Sans 14pt" pitchFamily="2" charset="77"/>
-                </a:rPr>
-                <a:t>{{</a:t>
-              </a:r>
-              <a:r>
-                <a:rPr lang="en-GB" sz="1650" dirty="0" err="1">
-                  <a:solidFill>
-                    <a:srgbClr val="643791"/>
-                  </a:solidFill>
-                  <a:latin typeface="DM Sans 14pt" pitchFamily="2" charset="77"/>
-                </a:rPr>
-                <a:t>chart_explainer_cost_per_app_by_occupation</a:t>
-              </a:r>
-              <a:r>
-                <a:rPr lang="en-GB" sz="1650" dirty="0">
-                  <a:solidFill>
-                    <a:srgbClr val="643791"/>
-                  </a:solidFill>
-                  <a:latin typeface="DM Sans 14pt" pitchFamily="2" charset="77"/>
-                </a:rPr>
-                <a:t>}}</a:t>
-              </a:r>
-            </a:p>
-          </p:txBody>
-        </p:sp>
-      </p:grpSp>
+            <a:ext cx="4703047" cy="1182447"/>
+          </a:xfrm>
+          <a:prstGeom prst="roundRect">
+            <a:avLst>
+              <a:gd name="adj" fmla="val 14191"/>
+            </a:avLst>
+          </a:prstGeom>
+          <a:solidFill>
+            <a:srgbClr val="643791">
+              <a:alpha val="8000"/>
+            </a:srgbClr>
+          </a:solidFill>
+          <a:ln/>
+        </p:spPr>
+        <p:txBody>
+          <a:bodyPr/>
+          <a:lstStyle/>
+          <a:p>
+            <a:r>
+              <a:rPr lang="en-GB" sz="1400" dirty="0">
+                <a:solidFill>
+                  <a:srgbClr val="643791"/>
+                </a:solidFill>
+                <a:latin typeface="DM Sans 14pt" pitchFamily="2" charset="77"/>
+              </a:rPr>
+              <a:t>{{</a:t>
+            </a:r>
+            <a:r>
+              <a:rPr lang="en-GB" sz="1400" dirty="0" err="1">
+                <a:solidFill>
+                  <a:srgbClr val="643791"/>
+                </a:solidFill>
+                <a:latin typeface="DM Sans 14pt" pitchFamily="2" charset="77"/>
+              </a:rPr>
+              <a:t>chart_explainer_cost_per_app_by_occupation</a:t>
+            </a:r>
+            <a:r>
+              <a:rPr lang="en-GB" sz="1400" dirty="0">
+                <a:solidFill>
+                  <a:srgbClr val="643791"/>
+                </a:solidFill>
+                <a:latin typeface="DM Sans 14pt" pitchFamily="2" charset="77"/>
+              </a:rPr>
+              <a:t>}}</a:t>
+            </a:r>
+          </a:p>
+        </p:txBody>
+      </p:sp>
       <p:grpSp>
         <p:nvGrpSpPr>
           <p:cNvPr id="69" name="Group 68">
@@ -9546,591 +8546,311 @@
           </a:p>
         </p:txBody>
       </p:sp>
-      <p:grpSp>
-        <p:nvGrpSpPr>
-          <p:cNvPr id="8" name="Group 7">
+      <p:sp>
+        <p:nvSpPr>
+          <p:cNvPr id="9" name="Shape 28">
             <a:extLst>
               <a:ext uri="{FF2B5EF4-FFF2-40B4-BE49-F238E27FC236}">
-                <a16:creationId xmlns:a16="http://schemas.microsoft.com/office/drawing/2014/main" id="{42167671-FC1B-AD8B-47A5-C64D88CBCE64}"/>
+                <a16:creationId xmlns:a16="http://schemas.microsoft.com/office/drawing/2014/main" id="{920950EF-86C0-4C53-171E-03E2D25359FB}"/>
               </a:ext>
             </a:extLst>
           </p:cNvPr>
-          <p:cNvGrpSpPr/>
-          <p:nvPr/>
-        </p:nvGrpSpPr>
-        <p:grpSpPr>
+          <p:cNvSpPr/>
+          <p:nvPr/>
+        </p:nvSpPr>
+        <p:spPr>
           <a:xfrm>
             <a:off x="12995755" y="3880287"/>
-            <a:ext cx="4741200" cy="1281600"/>
-            <a:chOff x="13090029" y="4818473"/>
-            <a:chExt cx="4532760" cy="246230"/>
-          </a:xfrm>
-        </p:grpSpPr>
-        <p:sp>
-          <p:nvSpPr>
-            <p:cNvPr id="9" name="Shape 28">
-              <a:extLst>
-                <a:ext uri="{FF2B5EF4-FFF2-40B4-BE49-F238E27FC236}">
-                  <a16:creationId xmlns:a16="http://schemas.microsoft.com/office/drawing/2014/main" id="{920950EF-86C0-4C53-171E-03E2D25359FB}"/>
-                </a:ext>
-              </a:extLst>
-            </p:cNvPr>
-            <p:cNvSpPr/>
-            <p:nvPr/>
-          </p:nvSpPr>
-          <p:spPr>
-            <a:xfrm>
-              <a:off x="13090029" y="4818473"/>
-              <a:ext cx="4496284" cy="227180"/>
-            </a:xfrm>
-            <a:prstGeom prst="roundRect">
-              <a:avLst>
-                <a:gd name="adj" fmla="val 14191"/>
-              </a:avLst>
-            </a:prstGeom>
-            <a:solidFill>
-              <a:srgbClr val="643791">
-                <a:alpha val="8000"/>
-              </a:srgbClr>
-            </a:solidFill>
-            <a:ln/>
-          </p:spPr>
-          <p:txBody>
-            <a:bodyPr/>
-            <a:lstStyle/>
-            <a:p>
-              <a:endParaRPr lang="en-GB">
-                <a:latin typeface="DM Sans 14pt" pitchFamily="2" charset="77"/>
-              </a:endParaRPr>
-            </a:p>
-          </p:txBody>
-        </p:sp>
-        <p:sp>
-          <p:nvSpPr>
-            <p:cNvPr id="10" name="Text 29">
-              <a:extLst>
-                <a:ext uri="{FF2B5EF4-FFF2-40B4-BE49-F238E27FC236}">
-                  <a16:creationId xmlns:a16="http://schemas.microsoft.com/office/drawing/2014/main" id="{8992F2D1-F808-4008-ED03-6D4AC5DA309E}"/>
-                </a:ext>
-              </a:extLst>
-            </p:cNvPr>
-            <p:cNvSpPr/>
-            <p:nvPr/>
-          </p:nvSpPr>
-          <p:spPr>
-            <a:xfrm>
-              <a:off x="13166229" y="4837523"/>
-              <a:ext cx="4456560" cy="227180"/>
-            </a:xfrm>
-            <a:prstGeom prst="rect">
-              <a:avLst/>
-            </a:prstGeom>
-            <a:noFill/>
-            <a:ln/>
-          </p:spPr>
-          <p:txBody>
-            <a:bodyPr wrap="square" lIns="25400" tIns="25400" rIns="25400" bIns="25400" rtlCol="0" anchor="t">
-              <a:normAutofit/>
-            </a:bodyPr>
-            <a:lstStyle/>
-            <a:p>
-              <a:pPr>
-                <a:lnSpc>
-                  <a:spcPct val="110000"/>
-                </a:lnSpc>
-              </a:pPr>
-              <a:r>
-                <a:rPr lang="en-US" sz="1650" dirty="0">
-                  <a:solidFill>
-                    <a:srgbClr val="643791"/>
-                  </a:solidFill>
-                  <a:latin typeface="DM Sans 14pt" pitchFamily="2" charset="77"/>
-                  <a:ea typeface="Arial" pitchFamily="34" charset="-122"/>
-                  <a:cs typeface="Arial" pitchFamily="34" charset="-120"/>
-                </a:rPr>
-                <a:t>{{</a:t>
-              </a:r>
-              <a:r>
-                <a:rPr lang="en-US" sz="1650" dirty="0" err="1">
-                  <a:solidFill>
-                    <a:srgbClr val="643791"/>
-                  </a:solidFill>
-                  <a:latin typeface="DM Sans 14pt" pitchFamily="2" charset="77"/>
-                  <a:ea typeface="Arial" pitchFamily="34" charset="-122"/>
-                  <a:cs typeface="Arial" pitchFamily="34" charset="-120"/>
-                </a:rPr>
-                <a:t>commentary_media_intro</a:t>
-              </a:r>
-              <a:r>
-                <a:rPr lang="en-US" sz="1650" dirty="0">
-                  <a:solidFill>
-                    <a:srgbClr val="643791"/>
-                  </a:solidFill>
-                  <a:latin typeface="DM Sans 14pt" pitchFamily="2" charset="77"/>
-                  <a:ea typeface="Arial" pitchFamily="34" charset="-122"/>
-                  <a:cs typeface="Arial" pitchFamily="34" charset="-120"/>
-                </a:rPr>
-                <a:t>}}</a:t>
-              </a:r>
-              <a:endParaRPr lang="en-US" sz="1650" dirty="0">
-                <a:latin typeface="DM Sans 14pt" pitchFamily="2" charset="77"/>
-              </a:endParaRPr>
-            </a:p>
-          </p:txBody>
-        </p:sp>
-      </p:grpSp>
-      <p:grpSp>
-        <p:nvGrpSpPr>
-          <p:cNvPr id="11" name="Group 10">
+            <a:ext cx="4703047" cy="1182447"/>
+          </a:xfrm>
+          <a:prstGeom prst="roundRect">
+            <a:avLst>
+              <a:gd name="adj" fmla="val 14191"/>
+            </a:avLst>
+          </a:prstGeom>
+          <a:solidFill>
+            <a:srgbClr val="643791">
+              <a:alpha val="8000"/>
+            </a:srgbClr>
+          </a:solidFill>
+          <a:ln/>
+        </p:spPr>
+        <p:txBody>
+          <a:bodyPr/>
+          <a:lstStyle/>
+          <a:p>
+            <a:pPr>
+              <a:lnSpc>
+                <a:spcPct val="110000"/>
+              </a:lnSpc>
+            </a:pPr>
+            <a:r>
+              <a:rPr lang="en-US" sz="1400" dirty="0">
+                <a:solidFill>
+                  <a:srgbClr val="643791"/>
+                </a:solidFill>
+                <a:latin typeface="DM Sans 14pt" pitchFamily="2" charset="77"/>
+                <a:ea typeface="Arial" pitchFamily="34" charset="-122"/>
+                <a:cs typeface="Arial" pitchFamily="34" charset="-120"/>
+              </a:rPr>
+              <a:t>{{</a:t>
+            </a:r>
+            <a:r>
+              <a:rPr lang="en-US" sz="1400" dirty="0" err="1">
+                <a:solidFill>
+                  <a:srgbClr val="643791"/>
+                </a:solidFill>
+                <a:latin typeface="DM Sans 14pt" pitchFamily="2" charset="77"/>
+                <a:ea typeface="Arial" pitchFamily="34" charset="-122"/>
+                <a:cs typeface="Arial" pitchFamily="34" charset="-120"/>
+              </a:rPr>
+              <a:t>commentary_media_intro</a:t>
+            </a:r>
+            <a:r>
+              <a:rPr lang="en-US" sz="1400" dirty="0">
+                <a:solidFill>
+                  <a:srgbClr val="643791"/>
+                </a:solidFill>
+                <a:latin typeface="DM Sans 14pt" pitchFamily="2" charset="77"/>
+                <a:ea typeface="Arial" pitchFamily="34" charset="-122"/>
+                <a:cs typeface="Arial" pitchFamily="34" charset="-120"/>
+              </a:rPr>
+              <a:t>}}</a:t>
+            </a:r>
+            <a:endParaRPr lang="en-US" sz="1400" dirty="0">
+              <a:latin typeface="DM Sans 14pt" pitchFamily="2" charset="77"/>
+            </a:endParaRPr>
+          </a:p>
+        </p:txBody>
+      </p:sp>
+      <p:sp>
+        <p:nvSpPr>
+          <p:cNvPr id="12" name="Shape 30">
             <a:extLst>
               <a:ext uri="{FF2B5EF4-FFF2-40B4-BE49-F238E27FC236}">
-                <a16:creationId xmlns:a16="http://schemas.microsoft.com/office/drawing/2014/main" id="{35D0A1F0-BEAF-2888-ED73-52EBA041B5CC}"/>
+                <a16:creationId xmlns:a16="http://schemas.microsoft.com/office/drawing/2014/main" id="{3E1BE4B2-6481-8DB3-3CA9-75F35C91DA9C}"/>
               </a:ext>
             </a:extLst>
           </p:cNvPr>
-          <p:cNvGrpSpPr/>
-          <p:nvPr/>
-        </p:nvGrpSpPr>
-        <p:grpSpPr>
+          <p:cNvSpPr/>
+          <p:nvPr/>
+        </p:nvSpPr>
+        <p:spPr>
           <a:xfrm>
             <a:off x="12995755" y="5271442"/>
-            <a:ext cx="4742571" cy="1281600"/>
-            <a:chOff x="13356729" y="5341306"/>
-            <a:chExt cx="4397870" cy="228600"/>
-          </a:xfrm>
-        </p:grpSpPr>
-        <p:sp>
-          <p:nvSpPr>
-            <p:cNvPr id="12" name="Shape 30">
-              <a:extLst>
-                <a:ext uri="{FF2B5EF4-FFF2-40B4-BE49-F238E27FC236}">
-                  <a16:creationId xmlns:a16="http://schemas.microsoft.com/office/drawing/2014/main" id="{3E1BE4B2-6481-8DB3-3CA9-75F35C91DA9C}"/>
-                </a:ext>
-              </a:extLst>
-            </p:cNvPr>
-            <p:cNvSpPr/>
-            <p:nvPr/>
-          </p:nvSpPr>
-          <p:spPr>
-            <a:xfrm>
-              <a:off x="13356729" y="5341306"/>
-              <a:ext cx="4365324" cy="209550"/>
-            </a:xfrm>
-            <a:prstGeom prst="roundRect">
-              <a:avLst>
-                <a:gd name="adj" fmla="val 15385"/>
-              </a:avLst>
-            </a:prstGeom>
-            <a:solidFill>
-              <a:srgbClr val="643791">
-                <a:alpha val="8000"/>
-              </a:srgbClr>
-            </a:solidFill>
-            <a:ln/>
-          </p:spPr>
-          <p:txBody>
-            <a:bodyPr/>
-            <a:lstStyle/>
-            <a:p>
-              <a:endParaRPr lang="en-GB">
-                <a:latin typeface="DM Sans 14pt" pitchFamily="2" charset="77"/>
-              </a:endParaRPr>
-            </a:p>
-          </p:txBody>
-        </p:sp>
-        <p:sp>
-          <p:nvSpPr>
-            <p:cNvPr id="13" name="Text 31">
-              <a:extLst>
-                <a:ext uri="{FF2B5EF4-FFF2-40B4-BE49-F238E27FC236}">
-                  <a16:creationId xmlns:a16="http://schemas.microsoft.com/office/drawing/2014/main" id="{D1BABB9F-671B-3577-BF24-54206373BFC3}"/>
-                </a:ext>
-              </a:extLst>
-            </p:cNvPr>
-            <p:cNvSpPr/>
-            <p:nvPr/>
-          </p:nvSpPr>
-          <p:spPr>
-            <a:xfrm>
-              <a:off x="13432928" y="5360356"/>
-              <a:ext cx="4321671" cy="209550"/>
-            </a:xfrm>
-            <a:prstGeom prst="rect">
-              <a:avLst/>
-            </a:prstGeom>
-            <a:noFill/>
-            <a:ln/>
-          </p:spPr>
-          <p:txBody>
-            <a:bodyPr wrap="square" lIns="25400" tIns="25400" rIns="25400" bIns="25400" rtlCol="0" anchor="t">
-              <a:normAutofit/>
-            </a:bodyPr>
-            <a:lstStyle/>
-            <a:p>
-              <a:pPr>
-                <a:lnSpc>
-                  <a:spcPct val="110000"/>
-                </a:lnSpc>
-              </a:pPr>
-              <a:r>
-                <a:rPr lang="en-US" sz="1500" dirty="0">
-                  <a:solidFill>
-                    <a:srgbClr val="643791"/>
-                  </a:solidFill>
-                  <a:latin typeface="DM Sans 14pt" pitchFamily="2" charset="77"/>
-                  <a:ea typeface="Arial" pitchFamily="34" charset="-122"/>
-                  <a:cs typeface="Arial" pitchFamily="34" charset="-120"/>
-                </a:rPr>
-                <a:t>{{commentary_media_point_1}}</a:t>
-              </a:r>
-              <a:endParaRPr lang="en-US" sz="1500" dirty="0">
-                <a:latin typeface="DM Sans 14pt" pitchFamily="2" charset="77"/>
-              </a:endParaRPr>
-            </a:p>
-          </p:txBody>
-        </p:sp>
-      </p:grpSp>
-      <p:grpSp>
-        <p:nvGrpSpPr>
-          <p:cNvPr id="14" name="Group 13">
+            <a:ext cx="4707474" cy="1174800"/>
+          </a:xfrm>
+          <a:prstGeom prst="roundRect">
+            <a:avLst>
+              <a:gd name="adj" fmla="val 15385"/>
+            </a:avLst>
+          </a:prstGeom>
+          <a:solidFill>
+            <a:srgbClr val="643791">
+              <a:alpha val="8000"/>
+            </a:srgbClr>
+          </a:solidFill>
+          <a:ln/>
+        </p:spPr>
+        <p:txBody>
+          <a:bodyPr/>
+          <a:lstStyle/>
+          <a:p>
+            <a:pPr>
+              <a:lnSpc>
+                <a:spcPct val="110000"/>
+              </a:lnSpc>
+            </a:pPr>
+            <a:r>
+              <a:rPr lang="en-US" sz="1400" dirty="0">
+                <a:solidFill>
+                  <a:srgbClr val="643791"/>
+                </a:solidFill>
+                <a:latin typeface="DM Sans 14pt" pitchFamily="2" charset="77"/>
+                <a:ea typeface="Arial" pitchFamily="34" charset="-122"/>
+                <a:cs typeface="Arial" pitchFamily="34" charset="-120"/>
+              </a:rPr>
+              <a:t>{{commentary_media_point_1}}</a:t>
+            </a:r>
+            <a:endParaRPr lang="en-US" sz="1400" dirty="0">
+              <a:latin typeface="DM Sans 14pt" pitchFamily="2" charset="77"/>
+            </a:endParaRPr>
+          </a:p>
+        </p:txBody>
+      </p:sp>
+      <p:sp>
+        <p:nvSpPr>
+          <p:cNvPr id="15" name="Shape 32">
             <a:extLst>
               <a:ext uri="{FF2B5EF4-FFF2-40B4-BE49-F238E27FC236}">
-                <a16:creationId xmlns:a16="http://schemas.microsoft.com/office/drawing/2014/main" id="{954012C7-AF76-3AAF-A6A7-01D72A2F4ABA}"/>
+                <a16:creationId xmlns:a16="http://schemas.microsoft.com/office/drawing/2014/main" id="{D980B683-AC2E-6F6D-47F3-939BDCACDA6F}"/>
               </a:ext>
             </a:extLst>
           </p:cNvPr>
-          <p:cNvGrpSpPr/>
-          <p:nvPr/>
-        </p:nvGrpSpPr>
-        <p:grpSpPr>
+          <p:cNvSpPr/>
+          <p:nvPr/>
+        </p:nvSpPr>
+        <p:spPr>
           <a:xfrm>
             <a:off x="12995755" y="6662597"/>
-            <a:ext cx="4742571" cy="1281174"/>
-            <a:chOff x="13356729" y="7948173"/>
-            <a:chExt cx="4397870" cy="228600"/>
-          </a:xfrm>
-        </p:grpSpPr>
-        <p:sp>
-          <p:nvSpPr>
-            <p:cNvPr id="15" name="Shape 32">
-              <a:extLst>
-                <a:ext uri="{FF2B5EF4-FFF2-40B4-BE49-F238E27FC236}">
-                  <a16:creationId xmlns:a16="http://schemas.microsoft.com/office/drawing/2014/main" id="{D980B683-AC2E-6F6D-47F3-939BDCACDA6F}"/>
-                </a:ext>
-              </a:extLst>
-            </p:cNvPr>
-            <p:cNvSpPr/>
-            <p:nvPr/>
-          </p:nvSpPr>
-          <p:spPr>
-            <a:xfrm>
-              <a:off x="13356729" y="7948173"/>
-              <a:ext cx="4365324" cy="209550"/>
-            </a:xfrm>
-            <a:prstGeom prst="roundRect">
-              <a:avLst>
-                <a:gd name="adj" fmla="val 15385"/>
-              </a:avLst>
-            </a:prstGeom>
-            <a:solidFill>
-              <a:srgbClr val="643791">
-                <a:alpha val="8000"/>
-              </a:srgbClr>
-            </a:solidFill>
-            <a:ln/>
-          </p:spPr>
-          <p:txBody>
-            <a:bodyPr/>
-            <a:lstStyle/>
-            <a:p>
-              <a:endParaRPr lang="en-GB">
-                <a:latin typeface="DM Sans 14pt" pitchFamily="2" charset="77"/>
-              </a:endParaRPr>
-            </a:p>
-          </p:txBody>
-        </p:sp>
-        <p:sp>
-          <p:nvSpPr>
-            <p:cNvPr id="16" name="Text 33">
-              <a:extLst>
-                <a:ext uri="{FF2B5EF4-FFF2-40B4-BE49-F238E27FC236}">
-                  <a16:creationId xmlns:a16="http://schemas.microsoft.com/office/drawing/2014/main" id="{F47CC696-18CB-9CBF-3FA2-8E64B632A415}"/>
-                </a:ext>
-              </a:extLst>
-            </p:cNvPr>
-            <p:cNvSpPr/>
-            <p:nvPr/>
-          </p:nvSpPr>
-          <p:spPr>
-            <a:xfrm>
-              <a:off x="13432928" y="7967223"/>
-              <a:ext cx="4321671" cy="209550"/>
-            </a:xfrm>
-            <a:prstGeom prst="rect">
-              <a:avLst/>
-            </a:prstGeom>
-            <a:noFill/>
-            <a:ln/>
-          </p:spPr>
-          <p:txBody>
-            <a:bodyPr wrap="square" lIns="25400" tIns="25400" rIns="25400" bIns="25400" rtlCol="0" anchor="t">
-              <a:normAutofit/>
-            </a:bodyPr>
-            <a:lstStyle/>
-            <a:p>
-              <a:pPr>
-                <a:lnSpc>
-                  <a:spcPct val="110000"/>
-                </a:lnSpc>
-              </a:pPr>
-              <a:r>
-                <a:rPr lang="en-US" sz="1500" dirty="0">
-                  <a:solidFill>
-                    <a:srgbClr val="643791"/>
-                  </a:solidFill>
-                  <a:latin typeface="DM Sans 14pt" pitchFamily="2" charset="77"/>
-                  <a:ea typeface="Arial" pitchFamily="34" charset="-122"/>
-                  <a:cs typeface="Arial" pitchFamily="34" charset="-120"/>
-                </a:rPr>
-                <a:t>{{commentary_media_point_2}}</a:t>
-              </a:r>
-              <a:endParaRPr lang="en-US" sz="1500" dirty="0">
-                <a:latin typeface="DM Sans 14pt" pitchFamily="2" charset="77"/>
-              </a:endParaRPr>
-            </a:p>
-          </p:txBody>
-        </p:sp>
-      </p:grpSp>
-      <p:grpSp>
-        <p:nvGrpSpPr>
-          <p:cNvPr id="17" name="Group 16">
+            <a:ext cx="4707474" cy="1174410"/>
+          </a:xfrm>
+          <a:prstGeom prst="roundRect">
+            <a:avLst>
+              <a:gd name="adj" fmla="val 15385"/>
+            </a:avLst>
+          </a:prstGeom>
+          <a:solidFill>
+            <a:srgbClr val="643791">
+              <a:alpha val="8000"/>
+            </a:srgbClr>
+          </a:solidFill>
+          <a:ln/>
+        </p:spPr>
+        <p:txBody>
+          <a:bodyPr/>
+          <a:lstStyle/>
+          <a:p>
+            <a:pPr>
+              <a:lnSpc>
+                <a:spcPct val="110000"/>
+              </a:lnSpc>
+            </a:pPr>
+            <a:r>
+              <a:rPr lang="en-US" sz="1400" dirty="0">
+                <a:solidFill>
+                  <a:srgbClr val="643791"/>
+                </a:solidFill>
+                <a:latin typeface="DM Sans 14pt" pitchFamily="2" charset="77"/>
+                <a:ea typeface="Arial" pitchFamily="34" charset="-122"/>
+                <a:cs typeface="Arial" pitchFamily="34" charset="-120"/>
+              </a:rPr>
+              <a:t>{{commentary_media_point_2}}</a:t>
+            </a:r>
+            <a:endParaRPr lang="en-US" sz="1400" dirty="0">
+              <a:latin typeface="DM Sans 14pt" pitchFamily="2" charset="77"/>
+            </a:endParaRPr>
+          </a:p>
+        </p:txBody>
+      </p:sp>
+      <p:sp>
+        <p:nvSpPr>
+          <p:cNvPr id="18" name="Shape 28">
             <a:extLst>
               <a:ext uri="{FF2B5EF4-FFF2-40B4-BE49-F238E27FC236}">
-                <a16:creationId xmlns:a16="http://schemas.microsoft.com/office/drawing/2014/main" id="{165C889A-8EEE-1CE3-232E-3B0C1A4C24EA}"/>
+                <a16:creationId xmlns:a16="http://schemas.microsoft.com/office/drawing/2014/main" id="{3461690E-5EBE-6686-6107-63D8CFF5053E}"/>
               </a:ext>
             </a:extLst>
           </p:cNvPr>
-          <p:cNvGrpSpPr/>
-          <p:nvPr/>
-        </p:nvGrpSpPr>
-        <p:grpSpPr>
+          <p:cNvSpPr/>
+          <p:nvPr/>
+        </p:nvSpPr>
+        <p:spPr>
           <a:xfrm>
             <a:off x="12995755" y="1890712"/>
-            <a:ext cx="4741200" cy="1281600"/>
-            <a:chOff x="13090027" y="1890712"/>
-            <a:chExt cx="4741200" cy="1281600"/>
-          </a:xfrm>
-        </p:grpSpPr>
-        <p:sp>
-          <p:nvSpPr>
-            <p:cNvPr id="18" name="Shape 28">
-              <a:extLst>
-                <a:ext uri="{FF2B5EF4-FFF2-40B4-BE49-F238E27FC236}">
-                  <a16:creationId xmlns:a16="http://schemas.microsoft.com/office/drawing/2014/main" id="{3461690E-5EBE-6686-6107-63D8CFF5053E}"/>
-                </a:ext>
-              </a:extLst>
-            </p:cNvPr>
-            <p:cNvSpPr/>
-            <p:nvPr/>
-          </p:nvSpPr>
-          <p:spPr>
-            <a:xfrm>
-              <a:off x="13090027" y="1890712"/>
-              <a:ext cx="4703047" cy="1182447"/>
-            </a:xfrm>
-            <a:prstGeom prst="roundRect">
-              <a:avLst>
-                <a:gd name="adj" fmla="val 14191"/>
-              </a:avLst>
-            </a:prstGeom>
-            <a:solidFill>
-              <a:srgbClr val="643791">
-                <a:alpha val="8000"/>
-              </a:srgbClr>
-            </a:solidFill>
-            <a:ln/>
-          </p:spPr>
-          <p:txBody>
-            <a:bodyPr/>
-            <a:lstStyle/>
-            <a:p>
-              <a:endParaRPr lang="en-GB">
-                <a:latin typeface="DM Sans 14pt" pitchFamily="2" charset="77"/>
-              </a:endParaRPr>
-            </a:p>
-          </p:txBody>
-        </p:sp>
-        <p:sp>
-          <p:nvSpPr>
-            <p:cNvPr id="19" name="Text 29">
-              <a:extLst>
-                <a:ext uri="{FF2B5EF4-FFF2-40B4-BE49-F238E27FC236}">
-                  <a16:creationId xmlns:a16="http://schemas.microsoft.com/office/drawing/2014/main" id="{282D90C5-9F6F-5D5D-AE54-FF6CDACF425E}"/>
-                </a:ext>
-              </a:extLst>
-            </p:cNvPr>
-            <p:cNvSpPr/>
-            <p:nvPr/>
-          </p:nvSpPr>
-          <p:spPr>
-            <a:xfrm>
-              <a:off x="13169731" y="1989865"/>
-              <a:ext cx="4661496" cy="1182447"/>
-            </a:xfrm>
-            <a:prstGeom prst="rect">
-              <a:avLst/>
-            </a:prstGeom>
-            <a:noFill/>
-            <a:ln/>
-          </p:spPr>
-          <p:txBody>
-            <a:bodyPr wrap="square" lIns="25400" tIns="25400" rIns="25400" bIns="25400" rtlCol="0" anchor="t">
-              <a:normAutofit/>
-            </a:bodyPr>
-            <a:lstStyle/>
-            <a:p>
-              <a:r>
-                <a:rPr lang="en-GB" sz="1650" dirty="0">
-                  <a:solidFill>
-                    <a:srgbClr val="643791"/>
-                  </a:solidFill>
-                  <a:latin typeface="DM Sans 14pt" pitchFamily="2" charset="77"/>
-                </a:rPr>
-                <a:t>{{</a:t>
-              </a:r>
-              <a:r>
-                <a:rPr lang="en-GB" sz="1650" dirty="0" err="1">
-                  <a:solidFill>
-                    <a:srgbClr val="643791"/>
-                  </a:solidFill>
-                  <a:latin typeface="DM Sans 14pt" pitchFamily="2" charset="77"/>
-                </a:rPr>
-                <a:t>chart_explainer_media_performance</a:t>
-              </a:r>
-              <a:r>
-                <a:rPr lang="en-GB" sz="1650" dirty="0">
-                  <a:solidFill>
-                    <a:srgbClr val="643791"/>
-                  </a:solidFill>
-                  <a:latin typeface="DM Sans 14pt" pitchFamily="2" charset="77"/>
-                </a:rPr>
-                <a:t>}}</a:t>
-              </a:r>
-            </a:p>
-          </p:txBody>
-        </p:sp>
-      </p:grpSp>
-      <p:grpSp>
-        <p:nvGrpSpPr>
-          <p:cNvPr id="20" name="Group 19">
+            <a:ext cx="4703047" cy="1182447"/>
+          </a:xfrm>
+          <a:prstGeom prst="roundRect">
+            <a:avLst>
+              <a:gd name="adj" fmla="val 14191"/>
+            </a:avLst>
+          </a:prstGeom>
+          <a:solidFill>
+            <a:srgbClr val="643791">
+              <a:alpha val="8000"/>
+            </a:srgbClr>
+          </a:solidFill>
+          <a:ln/>
+        </p:spPr>
+        <p:txBody>
+          <a:bodyPr/>
+          <a:lstStyle/>
+          <a:p>
+            <a:r>
+              <a:rPr lang="en-GB" sz="1400" dirty="0">
+                <a:solidFill>
+                  <a:srgbClr val="643791"/>
+                </a:solidFill>
+                <a:latin typeface="DM Sans 14pt" pitchFamily="2" charset="77"/>
+              </a:rPr>
+              <a:t>{{</a:t>
+            </a:r>
+            <a:r>
+              <a:rPr lang="en-GB" sz="1400" dirty="0" err="1">
+                <a:solidFill>
+                  <a:srgbClr val="643791"/>
+                </a:solidFill>
+                <a:latin typeface="DM Sans 14pt" pitchFamily="2" charset="77"/>
+              </a:rPr>
+              <a:t>chart_explainer_media_performance</a:t>
+            </a:r>
+            <a:r>
+              <a:rPr lang="en-GB" sz="1400" dirty="0">
+                <a:solidFill>
+                  <a:srgbClr val="643791"/>
+                </a:solidFill>
+                <a:latin typeface="DM Sans 14pt" pitchFamily="2" charset="77"/>
+              </a:rPr>
+              <a:t>}}</a:t>
+            </a:r>
+          </a:p>
+        </p:txBody>
+      </p:sp>
+      <p:sp>
+        <p:nvSpPr>
+          <p:cNvPr id="40" name="Shape 32">
             <a:extLst>
               <a:ext uri="{FF2B5EF4-FFF2-40B4-BE49-F238E27FC236}">
-                <a16:creationId xmlns:a16="http://schemas.microsoft.com/office/drawing/2014/main" id="{6E388387-CA7F-D039-D615-B3FA5BFFB15A}"/>
+                <a16:creationId xmlns:a16="http://schemas.microsoft.com/office/drawing/2014/main" id="{7A86A295-B34A-9FDE-CDD2-2CB9E93E6884}"/>
               </a:ext>
             </a:extLst>
           </p:cNvPr>
-          <p:cNvGrpSpPr/>
-          <p:nvPr/>
-        </p:nvGrpSpPr>
-        <p:grpSpPr>
+          <p:cNvSpPr/>
+          <p:nvPr/>
+        </p:nvSpPr>
+        <p:spPr>
           <a:xfrm>
             <a:off x="12995755" y="8053326"/>
-            <a:ext cx="4742571" cy="1281174"/>
-            <a:chOff x="13356729" y="7948173"/>
-            <a:chExt cx="4397870" cy="228600"/>
-          </a:xfrm>
-        </p:grpSpPr>
-        <p:sp>
-          <p:nvSpPr>
-            <p:cNvPr id="40" name="Shape 32">
-              <a:extLst>
-                <a:ext uri="{FF2B5EF4-FFF2-40B4-BE49-F238E27FC236}">
-                  <a16:creationId xmlns:a16="http://schemas.microsoft.com/office/drawing/2014/main" id="{7A86A295-B34A-9FDE-CDD2-2CB9E93E6884}"/>
-                </a:ext>
-              </a:extLst>
-            </p:cNvPr>
-            <p:cNvSpPr/>
-            <p:nvPr/>
-          </p:nvSpPr>
-          <p:spPr>
-            <a:xfrm>
-              <a:off x="13356729" y="7948173"/>
-              <a:ext cx="4365324" cy="209550"/>
-            </a:xfrm>
-            <a:prstGeom prst="roundRect">
-              <a:avLst>
-                <a:gd name="adj" fmla="val 15385"/>
-              </a:avLst>
-            </a:prstGeom>
-            <a:solidFill>
-              <a:srgbClr val="643791">
-                <a:alpha val="8000"/>
-              </a:srgbClr>
-            </a:solidFill>
-            <a:ln/>
-          </p:spPr>
-          <p:txBody>
-            <a:bodyPr/>
-            <a:lstStyle/>
-            <a:p>
-              <a:endParaRPr lang="en-GB">
-                <a:latin typeface="DM Sans 14pt" pitchFamily="2" charset="77"/>
-              </a:endParaRPr>
-            </a:p>
-          </p:txBody>
-        </p:sp>
-        <p:sp>
-          <p:nvSpPr>
-            <p:cNvPr id="41" name="Text 33">
-              <a:extLst>
-                <a:ext uri="{FF2B5EF4-FFF2-40B4-BE49-F238E27FC236}">
-                  <a16:creationId xmlns:a16="http://schemas.microsoft.com/office/drawing/2014/main" id="{375BCDAD-90F5-2AB5-CD03-4546BFE2ED7F}"/>
-                </a:ext>
-              </a:extLst>
-            </p:cNvPr>
-            <p:cNvSpPr/>
-            <p:nvPr/>
-          </p:nvSpPr>
-          <p:spPr>
-            <a:xfrm>
-              <a:off x="13432928" y="7967223"/>
-              <a:ext cx="4321671" cy="209550"/>
-            </a:xfrm>
-            <a:prstGeom prst="rect">
-              <a:avLst/>
-            </a:prstGeom>
-            <a:noFill/>
-            <a:ln/>
-          </p:spPr>
-          <p:txBody>
-            <a:bodyPr wrap="square" lIns="25400" tIns="25400" rIns="25400" bIns="25400" rtlCol="0" anchor="t">
-              <a:normAutofit/>
-            </a:bodyPr>
-            <a:lstStyle/>
-            <a:p>
-              <a:pPr>
-                <a:lnSpc>
-                  <a:spcPct val="110000"/>
-                </a:lnSpc>
-              </a:pPr>
-              <a:r>
-                <a:rPr lang="en-US" sz="1500" dirty="0">
-                  <a:solidFill>
-                    <a:srgbClr val="643791"/>
-                  </a:solidFill>
-                  <a:latin typeface="DM Sans 14pt" pitchFamily="2" charset="77"/>
-                  <a:ea typeface="Arial" pitchFamily="34" charset="-122"/>
-                  <a:cs typeface="Arial" pitchFamily="34" charset="-120"/>
-                </a:rPr>
-                <a:t>{{commentary_media_point_3}}</a:t>
-              </a:r>
-              <a:endParaRPr lang="en-US" sz="1500" dirty="0">
-                <a:latin typeface="DM Sans 14pt" pitchFamily="2" charset="77"/>
-              </a:endParaRPr>
-            </a:p>
-          </p:txBody>
-        </p:sp>
-      </p:grpSp>
+            <a:ext cx="4707474" cy="1174410"/>
+          </a:xfrm>
+          <a:prstGeom prst="roundRect">
+            <a:avLst>
+              <a:gd name="adj" fmla="val 15385"/>
+            </a:avLst>
+          </a:prstGeom>
+          <a:solidFill>
+            <a:srgbClr val="643791">
+              <a:alpha val="8000"/>
+            </a:srgbClr>
+          </a:solidFill>
+          <a:ln/>
+        </p:spPr>
+        <p:txBody>
+          <a:bodyPr/>
+          <a:lstStyle/>
+          <a:p>
+            <a:pPr>
+              <a:lnSpc>
+                <a:spcPct val="110000"/>
+              </a:lnSpc>
+            </a:pPr>
+            <a:r>
+              <a:rPr lang="en-US" sz="1400" dirty="0">
+                <a:solidFill>
+                  <a:srgbClr val="643791"/>
+                </a:solidFill>
+                <a:latin typeface="DM Sans 14pt" pitchFamily="2" charset="77"/>
+                <a:ea typeface="Arial" pitchFamily="34" charset="-122"/>
+                <a:cs typeface="Arial" pitchFamily="34" charset="-120"/>
+              </a:rPr>
+              <a:t>{{commentary_media_point_3}}</a:t>
+            </a:r>
+            <a:endParaRPr lang="en-US" sz="1400" dirty="0">
+              <a:latin typeface="DM Sans 14pt" pitchFamily="2" charset="77"/>
+            </a:endParaRPr>
+          </a:p>
+        </p:txBody>
+      </p:sp>
       <p:grpSp>
         <p:nvGrpSpPr>
           <p:cNvPr id="45" name="Group 44">
@@ -10676,7 +9396,7 @@
         <p:spPr>
           <a:xfrm>
             <a:off x="1676400" y="7831485"/>
-            <a:ext cx="4395341" cy="540990"/>
+            <a:ext cx="6125497" cy="540990"/>
           </a:xfrm>
           <a:prstGeom prst="roundRect">
             <a:avLst>
@@ -10691,25 +9411,238 @@
           <a:ln/>
         </p:spPr>
         <p:txBody>
+          <a:bodyPr anchor="ctr"/>
+          <a:lstStyle/>
+          <a:p>
+            <a:r>
+              <a:rPr lang="en-US" kern="0" spc="-72" dirty="0">
+                <a:solidFill>
+                  <a:srgbClr val="643791"/>
+                </a:solidFill>
+                <a:latin typeface="DM Sans 14pt" pitchFamily="2" charset="77"/>
+                <a:ea typeface="Arial" pitchFamily="34" charset="-122"/>
+                <a:cs typeface="Arial" pitchFamily="34" charset="-120"/>
+              </a:rPr>
+              <a:t>{{</a:t>
+            </a:r>
+            <a:r>
+              <a:rPr lang="en-US" kern="0" spc="-72" dirty="0" err="1">
+                <a:solidFill>
+                  <a:srgbClr val="643791"/>
+                </a:solidFill>
+                <a:latin typeface="DM Sans 14pt" pitchFamily="2" charset="77"/>
+                <a:ea typeface="Arial" pitchFamily="34" charset="-122"/>
+                <a:cs typeface="Arial" pitchFamily="34" charset="-120"/>
+              </a:rPr>
+              <a:t>contact_name</a:t>
+            </a:r>
+            <a:r>
+              <a:rPr lang="en-US" kern="0" spc="-72" dirty="0">
+                <a:solidFill>
+                  <a:srgbClr val="643791"/>
+                </a:solidFill>
+                <a:latin typeface="DM Sans 14pt" pitchFamily="2" charset="77"/>
+                <a:ea typeface="Arial" pitchFamily="34" charset="-122"/>
+                <a:cs typeface="Arial" pitchFamily="34" charset="-120"/>
+              </a:rPr>
+              <a:t>}}</a:t>
+            </a:r>
+            <a:endParaRPr lang="en-US" dirty="0">
+              <a:latin typeface="DM Sans 14pt" pitchFamily="2" charset="77"/>
+            </a:endParaRPr>
+          </a:p>
+        </p:txBody>
+      </p:sp>
+      <p:sp>
+        <p:nvSpPr>
+          <p:cNvPr id="11" name="Shape 9"/>
+          <p:cNvSpPr/>
+          <p:nvPr/>
+        </p:nvSpPr>
+        <p:spPr>
+          <a:xfrm>
+            <a:off x="1676399" y="8429624"/>
+            <a:ext cx="4399936" cy="419407"/>
+          </a:xfrm>
+          <a:prstGeom prst="roundRect">
+            <a:avLst>
+              <a:gd name="adj" fmla="val 15385"/>
+            </a:avLst>
+          </a:prstGeom>
+          <a:solidFill>
+            <a:srgbClr val="643791">
+              <a:alpha val="8000"/>
+            </a:srgbClr>
+          </a:solidFill>
+          <a:ln/>
+        </p:spPr>
+        <p:txBody>
           <a:bodyPr/>
           <a:lstStyle/>
           <a:p>
-            <a:endParaRPr lang="en-GB">
-              <a:latin typeface="DM Sans 14pt" pitchFamily="2" charset="77"/>
-            </a:endParaRPr>
-          </a:p>
-        </p:txBody>
-      </p:sp>
-      <p:sp>
-        <p:nvSpPr>
-          <p:cNvPr id="10" name="Text 8"/>
-          <p:cNvSpPr/>
-          <p:nvPr/>
-        </p:nvSpPr>
-        <p:spPr>
-          <a:xfrm>
-            <a:off x="1752600" y="7850535"/>
-            <a:ext cx="4374801" cy="540990"/>
+            <a:r>
+              <a:rPr lang="en-US" dirty="0">
+                <a:solidFill>
+                  <a:srgbClr val="643791"/>
+                </a:solidFill>
+                <a:latin typeface="DM Sans 14pt" pitchFamily="2" charset="77"/>
+                <a:ea typeface="Arial" pitchFamily="34" charset="-122"/>
+                <a:cs typeface="Arial" pitchFamily="34" charset="-120"/>
+              </a:rPr>
+              <a:t>{{</a:t>
+            </a:r>
+            <a:r>
+              <a:rPr lang="en-US" dirty="0" err="1">
+                <a:solidFill>
+                  <a:srgbClr val="643791"/>
+                </a:solidFill>
+                <a:latin typeface="DM Sans 14pt" pitchFamily="2" charset="77"/>
+                <a:ea typeface="Arial" pitchFamily="34" charset="-122"/>
+                <a:cs typeface="Arial" pitchFamily="34" charset="-120"/>
+              </a:rPr>
+              <a:t>contact_title</a:t>
+            </a:r>
+            <a:r>
+              <a:rPr lang="en-US" dirty="0">
+                <a:solidFill>
+                  <a:srgbClr val="643791"/>
+                </a:solidFill>
+                <a:latin typeface="DM Sans 14pt" pitchFamily="2" charset="77"/>
+                <a:ea typeface="Arial" pitchFamily="34" charset="-122"/>
+                <a:cs typeface="Arial" pitchFamily="34" charset="-120"/>
+              </a:rPr>
+              <a:t>}}</a:t>
+            </a:r>
+            <a:endParaRPr lang="en-US" dirty="0">
+              <a:latin typeface="DM Sans 14pt" pitchFamily="2" charset="77"/>
+            </a:endParaRPr>
+          </a:p>
+        </p:txBody>
+      </p:sp>
+      <p:sp>
+        <p:nvSpPr>
+          <p:cNvPr id="13" name="Text 11"/>
+          <p:cNvSpPr/>
+          <p:nvPr/>
+        </p:nvSpPr>
+        <p:spPr>
+          <a:xfrm>
+            <a:off x="8572500" y="7641878"/>
+            <a:ext cx="647700" cy="171450"/>
+          </a:xfrm>
+          <a:prstGeom prst="rect">
+            <a:avLst/>
+          </a:prstGeom>
+          <a:noFill/>
+          <a:ln/>
+        </p:spPr>
+        <p:txBody>
+          <a:bodyPr wrap="square" lIns="25400" tIns="25400" rIns="25400" bIns="25400" rtlCol="0" anchor="t">
+            <a:normAutofit fontScale="92500" lnSpcReduction="10000"/>
+          </a:bodyPr>
+          <a:lstStyle/>
+          <a:p>
+            <a:pPr marL="0" indent="0" algn="l">
+              <a:buNone/>
+            </a:pPr>
+            <a:r>
+              <a:rPr lang="en-US" sz="900" kern="0" spc="225" dirty="0">
+                <a:solidFill>
+                  <a:srgbClr val="643791"/>
+                </a:solidFill>
+                <a:latin typeface="DM Sans 14pt" pitchFamily="2" charset="77"/>
+                <a:ea typeface="Arial" pitchFamily="34" charset="-122"/>
+                <a:cs typeface="Arial" pitchFamily="34" charset="-120"/>
+              </a:rPr>
+              <a:t>EMAIL</a:t>
+            </a:r>
+            <a:endParaRPr lang="en-US" sz="900" dirty="0">
+              <a:latin typeface="DM Sans 14pt" pitchFamily="2" charset="77"/>
+            </a:endParaRPr>
+          </a:p>
+        </p:txBody>
+      </p:sp>
+      <p:sp>
+        <p:nvSpPr>
+          <p:cNvPr id="14" name="Shape 12"/>
+          <p:cNvSpPr/>
+          <p:nvPr/>
+        </p:nvSpPr>
+        <p:spPr>
+          <a:xfrm>
+            <a:off x="9277350" y="7574309"/>
+            <a:ext cx="4276418" cy="313879"/>
+          </a:xfrm>
+          <a:prstGeom prst="roundRect">
+            <a:avLst>
+              <a:gd name="adj" fmla="val 14191"/>
+            </a:avLst>
+          </a:prstGeom>
+          <a:solidFill>
+            <a:srgbClr val="643791">
+              <a:alpha val="8000"/>
+            </a:srgbClr>
+          </a:solidFill>
+          <a:ln/>
+        </p:spPr>
+        <p:txBody>
+          <a:bodyPr/>
+          <a:lstStyle/>
+          <a:p>
+            <a:r>
+              <a:rPr lang="en-US" sz="1400" dirty="0">
+                <a:solidFill>
+                  <a:srgbClr val="643791"/>
+                </a:solidFill>
+                <a:latin typeface="DM Sans 14pt" pitchFamily="2" charset="77"/>
+                <a:ea typeface="Arial" pitchFamily="34" charset="-122"/>
+                <a:cs typeface="Arial" pitchFamily="34" charset="-120"/>
+              </a:rPr>
+              <a:t>{{</a:t>
+            </a:r>
+            <a:r>
+              <a:rPr lang="en-US" sz="1400" dirty="0" err="1">
+                <a:solidFill>
+                  <a:srgbClr val="643791"/>
+                </a:solidFill>
+                <a:latin typeface="DM Sans 14pt" pitchFamily="2" charset="77"/>
+                <a:ea typeface="Arial" pitchFamily="34" charset="-122"/>
+                <a:cs typeface="Arial" pitchFamily="34" charset="-120"/>
+              </a:rPr>
+              <a:t>contact_email</a:t>
+            </a:r>
+            <a:r>
+              <a:rPr lang="en-US" sz="1400" dirty="0">
+                <a:solidFill>
+                  <a:srgbClr val="643791"/>
+                </a:solidFill>
+                <a:latin typeface="DM Sans 14pt" pitchFamily="2" charset="77"/>
+                <a:ea typeface="Arial" pitchFamily="34" charset="-122"/>
+                <a:cs typeface="Arial" pitchFamily="34" charset="-120"/>
+              </a:rPr>
+              <a:t>}}</a:t>
+            </a:r>
+            <a:endParaRPr lang="en-US" sz="1400" dirty="0">
+              <a:latin typeface="DM Sans 14pt" pitchFamily="2" charset="77"/>
+            </a:endParaRPr>
+          </a:p>
+          <a:p>
+            <a:endParaRPr lang="en-GB" sz="1400" dirty="0">
+              <a:latin typeface="DM Sans 14pt" pitchFamily="2" charset="77"/>
+            </a:endParaRPr>
+          </a:p>
+        </p:txBody>
+      </p:sp>
+      <p:sp>
+        <p:nvSpPr>
+          <p:cNvPr id="15" name="Text 13"/>
+          <p:cNvSpPr/>
+          <p:nvPr/>
+        </p:nvSpPr>
+        <p:spPr>
+          <a:xfrm>
+            <a:off x="9353550" y="7593360"/>
+            <a:ext cx="2213670" cy="268486"/>
           </a:xfrm>
           <a:prstGeom prst="rect">
             <a:avLst/>
@@ -10729,8 +9662,40 @@
               </a:lnSpc>
               <a:buNone/>
             </a:pPr>
-            <a:r>
-              <a:rPr lang="en-US" sz="3600" kern="0" spc="-72" dirty="0">
+            <a:endParaRPr lang="en-US" sz="1650" dirty="0">
+              <a:latin typeface="DM Sans 14pt" pitchFamily="2" charset="77"/>
+            </a:endParaRPr>
+          </a:p>
+        </p:txBody>
+      </p:sp>
+      <p:sp>
+        <p:nvSpPr>
+          <p:cNvPr id="16" name="Text 14"/>
+          <p:cNvSpPr/>
+          <p:nvPr/>
+        </p:nvSpPr>
+        <p:spPr>
+          <a:xfrm>
+            <a:off x="8572500" y="8043714"/>
+            <a:ext cx="647700" cy="171450"/>
+          </a:xfrm>
+          <a:prstGeom prst="rect">
+            <a:avLst/>
+          </a:prstGeom>
+          <a:noFill/>
+          <a:ln/>
+        </p:spPr>
+        <p:txBody>
+          <a:bodyPr wrap="square" lIns="25400" tIns="25400" rIns="25400" bIns="25400" rtlCol="0" anchor="t">
+            <a:normAutofit fontScale="92500" lnSpcReduction="10000"/>
+          </a:bodyPr>
+          <a:lstStyle/>
+          <a:p>
+            <a:pPr marL="0" indent="0" algn="l">
+              <a:buNone/>
+            </a:pPr>
+            <a:r>
+              <a:rPr lang="en-US" sz="900" kern="0" spc="225" dirty="0">
                 <a:solidFill>
                   <a:srgbClr val="643791"/>
                 </a:solidFill>
@@ -10738,28 +9703,28 @@
                 <a:ea typeface="Arial" pitchFamily="34" charset="-122"/>
                 <a:cs typeface="Arial" pitchFamily="34" charset="-120"/>
               </a:rPr>
-              <a:t>{{contact_name}}</a:t>
-            </a:r>
-            <a:endParaRPr lang="en-US" sz="3600" dirty="0">
-              <a:latin typeface="DM Sans 14pt" pitchFamily="2" charset="77"/>
-            </a:endParaRPr>
-          </a:p>
-        </p:txBody>
-      </p:sp>
-      <p:sp>
-        <p:nvSpPr>
-          <p:cNvPr id="11" name="Shape 9"/>
-          <p:cNvSpPr/>
-          <p:nvPr/>
-        </p:nvSpPr>
-        <p:spPr>
-          <a:xfrm>
-            <a:off x="1676400" y="8429625"/>
-            <a:ext cx="2095500" cy="247650"/>
+              <a:t>PHONE</a:t>
+            </a:r>
+            <a:endParaRPr lang="en-US" sz="900" dirty="0">
+              <a:latin typeface="DM Sans 14pt" pitchFamily="2" charset="77"/>
+            </a:endParaRPr>
+          </a:p>
+        </p:txBody>
+      </p:sp>
+      <p:sp>
+        <p:nvSpPr>
+          <p:cNvPr id="17" name="Shape 15"/>
+          <p:cNvSpPr/>
+          <p:nvPr/>
+        </p:nvSpPr>
+        <p:spPr>
+          <a:xfrm>
+            <a:off x="9277349" y="7976146"/>
+            <a:ext cx="4276417" cy="313878"/>
           </a:xfrm>
           <a:prstGeom prst="roundRect">
             <a:avLst>
-              <a:gd name="adj" fmla="val 15385"/>
+              <a:gd name="adj" fmla="val 14191"/>
             </a:avLst>
           </a:prstGeom>
           <a:solidFill>
@@ -10773,43 +9738,8 @@
           <a:bodyPr/>
           <a:lstStyle/>
           <a:p>
-            <a:endParaRPr lang="en-GB">
-              <a:latin typeface="DM Sans 14pt" pitchFamily="2" charset="77"/>
-            </a:endParaRPr>
-          </a:p>
-        </p:txBody>
-      </p:sp>
-      <p:sp>
-        <p:nvSpPr>
-          <p:cNvPr id="12" name="Text 10"/>
-          <p:cNvSpPr/>
-          <p:nvPr/>
-        </p:nvSpPr>
-        <p:spPr>
-          <a:xfrm>
-            <a:off x="1752600" y="8448675"/>
-            <a:ext cx="2019300" cy="247650"/>
-          </a:xfrm>
-          <a:prstGeom prst="rect">
-            <a:avLst/>
-          </a:prstGeom>
-          <a:noFill/>
-          <a:ln/>
-        </p:spPr>
-        <p:txBody>
-          <a:bodyPr wrap="square" lIns="25400" tIns="25400" rIns="25400" bIns="25400" rtlCol="0" anchor="t">
-            <a:normAutofit fontScale="92500" lnSpcReduction="20000"/>
-          </a:bodyPr>
-          <a:lstStyle/>
-          <a:p>
-            <a:pPr marL="0" indent="0" algn="l">
-              <a:lnSpc>
-                <a:spcPct val="110000"/>
-              </a:lnSpc>
-              <a:buNone/>
-            </a:pPr>
-            <a:r>
-              <a:rPr lang="en-US" sz="1500" dirty="0">
+            <a:r>
+              <a:rPr lang="en-US" sz="1400" dirty="0">
                 <a:solidFill>
                   <a:srgbClr val="643791"/>
                 </a:solidFill>
@@ -10817,23 +9747,45 @@
                 <a:ea typeface="Arial" pitchFamily="34" charset="-122"/>
                 <a:cs typeface="Arial" pitchFamily="34" charset="-120"/>
               </a:rPr>
-              <a:t>{{contact_title}}</a:t>
-            </a:r>
-            <a:endParaRPr lang="en-US" sz="1500" dirty="0">
-              <a:latin typeface="DM Sans 14pt" pitchFamily="2" charset="77"/>
-            </a:endParaRPr>
-          </a:p>
-        </p:txBody>
-      </p:sp>
-      <p:sp>
-        <p:nvSpPr>
-          <p:cNvPr id="13" name="Text 11"/>
-          <p:cNvSpPr/>
-          <p:nvPr/>
-        </p:nvSpPr>
-        <p:spPr>
-          <a:xfrm>
-            <a:off x="8572500" y="7641878"/>
+              <a:t>{{</a:t>
+            </a:r>
+            <a:r>
+              <a:rPr lang="en-US" sz="1400" dirty="0" err="1">
+                <a:solidFill>
+                  <a:srgbClr val="643791"/>
+                </a:solidFill>
+                <a:latin typeface="DM Sans 14pt" pitchFamily="2" charset="77"/>
+                <a:ea typeface="Arial" pitchFamily="34" charset="-122"/>
+                <a:cs typeface="Arial" pitchFamily="34" charset="-120"/>
+              </a:rPr>
+              <a:t>contact_phone</a:t>
+            </a:r>
+            <a:r>
+              <a:rPr lang="en-US" sz="1400" dirty="0">
+                <a:solidFill>
+                  <a:srgbClr val="643791"/>
+                </a:solidFill>
+                <a:latin typeface="DM Sans 14pt" pitchFamily="2" charset="77"/>
+                <a:ea typeface="Arial" pitchFamily="34" charset="-122"/>
+                <a:cs typeface="Arial" pitchFamily="34" charset="-120"/>
+              </a:rPr>
+              <a:t>}}</a:t>
+            </a:r>
+            <a:endParaRPr lang="en-US" sz="1400" dirty="0">
+              <a:latin typeface="DM Sans 14pt" pitchFamily="2" charset="77"/>
+            </a:endParaRPr>
+          </a:p>
+        </p:txBody>
+      </p:sp>
+      <p:sp>
+        <p:nvSpPr>
+          <p:cNvPr id="19" name="Text 17"/>
+          <p:cNvSpPr/>
+          <p:nvPr/>
+        </p:nvSpPr>
+        <p:spPr>
+          <a:xfrm>
+            <a:off x="8572500" y="8435132"/>
             <a:ext cx="647700" cy="171450"/>
           </a:xfrm>
           <a:prstGeom prst="rect">
@@ -10860,7 +9812,7 @@
                 <a:ea typeface="Arial" pitchFamily="34" charset="-122"/>
                 <a:cs typeface="Arial" pitchFamily="34" charset="-120"/>
               </a:rPr>
-              <a:t>EMAIL</a:t>
+              <a:t>WEB</a:t>
             </a:r>
             <a:endParaRPr lang="en-US" sz="900" dirty="0">
               <a:latin typeface="DM Sans 14pt" pitchFamily="2" charset="77"/>
@@ -10870,47 +9822,14 @@
       </p:sp>
       <p:sp>
         <p:nvSpPr>
-          <p:cNvPr id="14" name="Shape 12"/>
-          <p:cNvSpPr/>
-          <p:nvPr/>
-        </p:nvSpPr>
-        <p:spPr>
-          <a:xfrm>
-            <a:off x="9277350" y="7574310"/>
-            <a:ext cx="2289870" cy="268486"/>
-          </a:xfrm>
-          <a:prstGeom prst="roundRect">
-            <a:avLst>
-              <a:gd name="adj" fmla="val 14191"/>
-            </a:avLst>
-          </a:prstGeom>
-          <a:solidFill>
-            <a:srgbClr val="643791">
-              <a:alpha val="8000"/>
-            </a:srgbClr>
-          </a:solidFill>
-          <a:ln/>
-        </p:spPr>
-        <p:txBody>
-          <a:bodyPr/>
-          <a:lstStyle/>
-          <a:p>
-            <a:endParaRPr lang="en-GB">
-              <a:latin typeface="DM Sans 14pt" pitchFamily="2" charset="77"/>
-            </a:endParaRPr>
-          </a:p>
-        </p:txBody>
-      </p:sp>
-      <p:sp>
-        <p:nvSpPr>
-          <p:cNvPr id="15" name="Text 13"/>
-          <p:cNvSpPr/>
-          <p:nvPr/>
-        </p:nvSpPr>
-        <p:spPr>
-          <a:xfrm>
-            <a:off x="9353550" y="7593360"/>
-            <a:ext cx="2213670" cy="268486"/>
+          <p:cNvPr id="20" name="Text 18"/>
+          <p:cNvSpPr/>
+          <p:nvPr/>
+        </p:nvSpPr>
+        <p:spPr>
+          <a:xfrm>
+            <a:off x="9277350" y="8377982"/>
+            <a:ext cx="4276416" cy="313878"/>
           </a:xfrm>
           <a:prstGeom prst="rect">
             <a:avLst/>
@@ -10919,219 +9838,8 @@
           <a:ln/>
         </p:spPr>
         <p:txBody>
-          <a:bodyPr wrap="square" lIns="25400" tIns="25400" rIns="25400" bIns="25400" rtlCol="0" anchor="t">
-            <a:normAutofit fontScale="92500" lnSpcReduction="20000"/>
-          </a:bodyPr>
-          <a:lstStyle/>
-          <a:p>
-            <a:pPr marL="0" indent="0" algn="l">
-              <a:lnSpc>
-                <a:spcPct val="110000"/>
-              </a:lnSpc>
-              <a:buNone/>
-            </a:pPr>
-            <a:r>
-              <a:rPr lang="en-US" sz="1650" dirty="0">
-                <a:solidFill>
-                  <a:srgbClr val="643791"/>
-                </a:solidFill>
-                <a:latin typeface="DM Sans 14pt" pitchFamily="2" charset="77"/>
-                <a:ea typeface="Arial" pitchFamily="34" charset="-122"/>
-                <a:cs typeface="Arial" pitchFamily="34" charset="-120"/>
-              </a:rPr>
-              <a:t>{{contact_email}}</a:t>
-            </a:r>
-            <a:endParaRPr lang="en-US" sz="1650" dirty="0">
-              <a:latin typeface="DM Sans 14pt" pitchFamily="2" charset="77"/>
-            </a:endParaRPr>
-          </a:p>
-        </p:txBody>
-      </p:sp>
-      <p:sp>
-        <p:nvSpPr>
-          <p:cNvPr id="16" name="Text 14"/>
-          <p:cNvSpPr/>
-          <p:nvPr/>
-        </p:nvSpPr>
-        <p:spPr>
-          <a:xfrm>
-            <a:off x="8572500" y="8043714"/>
-            <a:ext cx="647700" cy="171450"/>
-          </a:xfrm>
-          <a:prstGeom prst="rect">
-            <a:avLst/>
-          </a:prstGeom>
-          <a:noFill/>
-          <a:ln/>
-        </p:spPr>
-        <p:txBody>
-          <a:bodyPr wrap="square" lIns="25400" tIns="25400" rIns="25400" bIns="25400" rtlCol="0" anchor="t">
-            <a:normAutofit fontScale="92500" lnSpcReduction="10000"/>
-          </a:bodyPr>
-          <a:lstStyle/>
-          <a:p>
-            <a:pPr marL="0" indent="0" algn="l">
-              <a:buNone/>
-            </a:pPr>
-            <a:r>
-              <a:rPr lang="en-US" sz="900" kern="0" spc="225" dirty="0">
-                <a:solidFill>
-                  <a:srgbClr val="643791"/>
-                </a:solidFill>
-                <a:latin typeface="DM Sans 14pt" pitchFamily="2" charset="77"/>
-                <a:ea typeface="Arial" pitchFamily="34" charset="-122"/>
-                <a:cs typeface="Arial" pitchFamily="34" charset="-120"/>
-              </a:rPr>
-              <a:t>PHONE</a:t>
-            </a:r>
-            <a:endParaRPr lang="en-US" sz="900" dirty="0">
-              <a:latin typeface="DM Sans 14pt" pitchFamily="2" charset="77"/>
-            </a:endParaRPr>
-          </a:p>
-        </p:txBody>
-      </p:sp>
-      <p:sp>
-        <p:nvSpPr>
-          <p:cNvPr id="17" name="Shape 15"/>
-          <p:cNvSpPr/>
-          <p:nvPr/>
-        </p:nvSpPr>
-        <p:spPr>
-          <a:xfrm>
-            <a:off x="9277350" y="7976146"/>
-            <a:ext cx="2289870" cy="268486"/>
-          </a:xfrm>
-          <a:prstGeom prst="roundRect">
-            <a:avLst>
-              <a:gd name="adj" fmla="val 14191"/>
-            </a:avLst>
-          </a:prstGeom>
-          <a:solidFill>
-            <a:srgbClr val="643791">
-              <a:alpha val="8000"/>
-            </a:srgbClr>
-          </a:solidFill>
-          <a:ln/>
-        </p:spPr>
-        <p:txBody>
-          <a:bodyPr/>
-          <a:lstStyle/>
-          <a:p>
-            <a:endParaRPr lang="en-GB">
-              <a:latin typeface="DM Sans 14pt" pitchFamily="2" charset="77"/>
-            </a:endParaRPr>
-          </a:p>
-        </p:txBody>
-      </p:sp>
-      <p:sp>
-        <p:nvSpPr>
-          <p:cNvPr id="18" name="Text 16"/>
-          <p:cNvSpPr/>
-          <p:nvPr/>
-        </p:nvSpPr>
-        <p:spPr>
-          <a:xfrm>
-            <a:off x="9353550" y="7995196"/>
-            <a:ext cx="2213670" cy="268486"/>
-          </a:xfrm>
-          <a:prstGeom prst="rect">
-            <a:avLst/>
-          </a:prstGeom>
-          <a:noFill/>
-          <a:ln/>
-        </p:spPr>
-        <p:txBody>
-          <a:bodyPr wrap="square" lIns="25400" tIns="25400" rIns="25400" bIns="25400" rtlCol="0" anchor="t">
-            <a:normAutofit fontScale="92500" lnSpcReduction="20000"/>
-          </a:bodyPr>
-          <a:lstStyle/>
-          <a:p>
-            <a:pPr marL="0" indent="0" algn="l">
-              <a:lnSpc>
-                <a:spcPct val="110000"/>
-              </a:lnSpc>
-              <a:buNone/>
-            </a:pPr>
-            <a:r>
-              <a:rPr lang="en-US" sz="1650" dirty="0">
-                <a:solidFill>
-                  <a:srgbClr val="643791"/>
-                </a:solidFill>
-                <a:latin typeface="DM Sans 14pt" pitchFamily="2" charset="77"/>
-                <a:ea typeface="Arial" pitchFamily="34" charset="-122"/>
-                <a:cs typeface="Arial" pitchFamily="34" charset="-120"/>
-              </a:rPr>
-              <a:t>{{contact_phone}}</a:t>
-            </a:r>
-            <a:endParaRPr lang="en-US" sz="1650" dirty="0">
-              <a:latin typeface="DM Sans 14pt" pitchFamily="2" charset="77"/>
-            </a:endParaRPr>
-          </a:p>
-        </p:txBody>
-      </p:sp>
-      <p:sp>
-        <p:nvSpPr>
-          <p:cNvPr id="19" name="Text 17"/>
-          <p:cNvSpPr/>
-          <p:nvPr/>
-        </p:nvSpPr>
-        <p:spPr>
-          <a:xfrm>
-            <a:off x="8572500" y="8435132"/>
-            <a:ext cx="647700" cy="171450"/>
-          </a:xfrm>
-          <a:prstGeom prst="rect">
-            <a:avLst/>
-          </a:prstGeom>
-          <a:noFill/>
-          <a:ln/>
-        </p:spPr>
-        <p:txBody>
-          <a:bodyPr wrap="square" lIns="25400" tIns="25400" rIns="25400" bIns="25400" rtlCol="0" anchor="t">
-            <a:normAutofit fontScale="92500" lnSpcReduction="10000"/>
-          </a:bodyPr>
-          <a:lstStyle/>
-          <a:p>
-            <a:pPr marL="0" indent="0" algn="l">
-              <a:buNone/>
-            </a:pPr>
-            <a:r>
-              <a:rPr lang="en-US" sz="900" kern="0" spc="225" dirty="0">
-                <a:solidFill>
-                  <a:srgbClr val="643791"/>
-                </a:solidFill>
-                <a:latin typeface="DM Sans 14pt" pitchFamily="2" charset="77"/>
-                <a:ea typeface="Arial" pitchFamily="34" charset="-122"/>
-                <a:cs typeface="Arial" pitchFamily="34" charset="-120"/>
-              </a:rPr>
-              <a:t>WEB</a:t>
-            </a:r>
-            <a:endParaRPr lang="en-US" sz="900" dirty="0">
-              <a:latin typeface="DM Sans 14pt" pitchFamily="2" charset="77"/>
-            </a:endParaRPr>
-          </a:p>
-        </p:txBody>
-      </p:sp>
-      <p:sp>
-        <p:nvSpPr>
-          <p:cNvPr id="20" name="Text 18"/>
-          <p:cNvSpPr/>
-          <p:nvPr/>
-        </p:nvSpPr>
-        <p:spPr>
-          <a:xfrm>
-            <a:off x="9277350" y="8377982"/>
-            <a:ext cx="1695301" cy="276225"/>
-          </a:xfrm>
-          <a:prstGeom prst="rect">
-            <a:avLst/>
-          </a:prstGeom>
-          <a:noFill/>
-          <a:ln/>
-        </p:spPr>
-        <p:txBody>
           <a:bodyPr wrap="square" lIns="0" tIns="0" rIns="0" bIns="0" rtlCol="0" anchor="t">
-            <a:normAutofit fontScale="92500"/>
+            <a:normAutofit/>
           </a:bodyPr>
           <a:lstStyle/>
           <a:p>

--- a/Renewals.pptx
+++ b/Renewals.pptx
@@ -1505,7 +1505,7 @@
                 <a:ea typeface="Arial" pitchFamily="34" charset="-122"/>
                 <a:cs typeface="Arial" pitchFamily="34" charset="-120"/>
               </a:rPr>
-              <a:t>Report.</a:t>
+              <a:t>Report</a:t>
             </a:r>
             <a:endParaRPr lang="en-US" sz="16500" dirty="0"/>
           </a:p>
@@ -1581,43 +1581,8 @@
           <a:bodyPr/>
           <a:lstStyle/>
           <a:p>
-            <a:endParaRPr lang="en-GB">
-              <a:latin typeface="DM Sans 14pt" pitchFamily="2" charset="77"/>
-            </a:endParaRPr>
-          </a:p>
-        </p:txBody>
-      </p:sp>
-      <p:sp>
-        <p:nvSpPr>
-          <p:cNvPr id="12" name="Text 10"/>
-          <p:cNvSpPr/>
-          <p:nvPr/>
-        </p:nvSpPr>
-        <p:spPr>
-          <a:xfrm>
-            <a:off x="1219200" y="8601075"/>
-            <a:ext cx="4101633" cy="540990"/>
-          </a:xfrm>
-          <a:prstGeom prst="rect">
-            <a:avLst/>
-          </a:prstGeom>
-          <a:noFill/>
-          <a:ln/>
-        </p:spPr>
-        <p:txBody>
-          <a:bodyPr wrap="square" lIns="25400" tIns="25400" rIns="25400" bIns="25400" rtlCol="0" anchor="t">
-            <a:normAutofit fontScale="92500" lnSpcReduction="20000"/>
-          </a:bodyPr>
-          <a:lstStyle/>
-          <a:p>
-            <a:pPr marL="0" indent="0" algn="l">
-              <a:lnSpc>
-                <a:spcPct val="110000"/>
-              </a:lnSpc>
-              <a:buNone/>
-            </a:pPr>
-            <a:r>
-              <a:rPr lang="en-US" sz="3600" kern="0" spc="-72" dirty="0">
+            <a:r>
+              <a:rPr lang="en-US" sz="2800" kern="0" spc="-72" dirty="0">
                 <a:solidFill>
                   <a:srgbClr val="FFFFFF"/>
                 </a:solidFill>
@@ -1625,9 +1590,31 @@
                 <a:ea typeface="Arial" pitchFamily="34" charset="-122"/>
                 <a:cs typeface="Arial" pitchFamily="34" charset="-120"/>
               </a:rPr>
-              <a:t>{{client_name}}</a:t>
-            </a:r>
-            <a:endParaRPr lang="en-US" sz="3600" dirty="0">
+              <a:t>{{</a:t>
+            </a:r>
+            <a:r>
+              <a:rPr lang="en-US" sz="2800" kern="0" spc="-72" dirty="0" err="1">
+                <a:solidFill>
+                  <a:srgbClr val="FFFFFF"/>
+                </a:solidFill>
+                <a:latin typeface="DM Sans 14pt" pitchFamily="2" charset="77"/>
+                <a:ea typeface="Arial" pitchFamily="34" charset="-122"/>
+                <a:cs typeface="Arial" pitchFamily="34" charset="-120"/>
+              </a:rPr>
+              <a:t>client_name</a:t>
+            </a:r>
+            <a:r>
+              <a:rPr lang="en-US" sz="2800" kern="0" spc="-72" dirty="0">
+                <a:solidFill>
+                  <a:srgbClr val="FFFFFF"/>
+                </a:solidFill>
+                <a:latin typeface="DM Sans 14pt" pitchFamily="2" charset="77"/>
+                <a:ea typeface="Arial" pitchFamily="34" charset="-122"/>
+                <a:cs typeface="Arial" pitchFamily="34" charset="-120"/>
+              </a:rPr>
+              <a:t>}}</a:t>
+            </a:r>
+            <a:endParaRPr lang="en-US" sz="2800" dirty="0">
               <a:latin typeface="DM Sans 14pt" pitchFamily="2" charset="77"/>
             </a:endParaRPr>
           </a:p>
@@ -1686,7 +1673,7 @@
         </p:nvSpPr>
         <p:spPr>
           <a:xfrm>
-            <a:off x="10517838" y="8820150"/>
+            <a:off x="10606093" y="8852520"/>
             <a:ext cx="6627162" cy="361950"/>
           </a:xfrm>
           <a:prstGeom prst="rect">
@@ -1706,9 +1693,9 @@
             </a:pPr>
             <a:r>
               <a:rPr lang="en-US" sz="1950" kern="0" spc="293" dirty="0">
-                <a:highlight>
-                  <a:srgbClr val="FFFFFF"/>
-                </a:highlight>
+                <a:solidFill>
+                  <a:schemeClr val="bg1"/>
+                </a:solidFill>
                 <a:latin typeface="DM Sans 14pt" pitchFamily="2" charset="77"/>
                 <a:ea typeface="Arial" pitchFamily="34" charset="-122"/>
                 <a:cs typeface="Arial" pitchFamily="34" charset="-120"/>
@@ -1717,6 +1704,9 @@
             </a:r>
             <a:r>
               <a:rPr lang="en-US" sz="1950" b="1" kern="0" spc="293" dirty="0">
+                <a:solidFill>
+                  <a:schemeClr val="bg1"/>
+                </a:solidFill>
                 <a:latin typeface="DM Sans 14pt" pitchFamily="2" charset="77"/>
                 <a:ea typeface="Arial" pitchFamily="34" charset="-122"/>
                 <a:cs typeface="Arial" pitchFamily="34" charset="-120"/>
@@ -1725,9 +1715,9 @@
             </a:r>
             <a:r>
               <a:rPr lang="en-US" sz="1950" kern="0" spc="293" dirty="0">
-                <a:highlight>
-                  <a:srgbClr val="FFFFFF"/>
-                </a:highlight>
+                <a:solidFill>
+                  <a:schemeClr val="bg1"/>
+                </a:solidFill>
                 <a:latin typeface="DM Sans 14pt" pitchFamily="2" charset="77"/>
                 <a:ea typeface="Arial" pitchFamily="34" charset="-122"/>
                 <a:cs typeface="Arial" pitchFamily="34" charset="-120"/>
@@ -1735,6 +1725,9 @@
               <a:t>{{PERIOD_END}}</a:t>
             </a:r>
             <a:endParaRPr lang="en-US" sz="1950" dirty="0">
+              <a:solidFill>
+                <a:schemeClr val="bg1"/>
+              </a:solidFill>
               <a:latin typeface="DM Sans 14pt" pitchFamily="2" charset="77"/>
             </a:endParaRPr>
           </a:p>
@@ -2054,418 +2047,6 @@
       </p:sp>
       <p:sp>
         <p:nvSpPr>
-          <p:cNvPr id="8" name="Shape 6"/>
-          <p:cNvSpPr/>
-          <p:nvPr/>
-        </p:nvSpPr>
-        <p:spPr>
-          <a:xfrm>
-            <a:off x="9986861" y="1890712"/>
-            <a:ext cx="2710403" cy="1946065"/>
-          </a:xfrm>
-          <a:prstGeom prst="roundRect">
-            <a:avLst/>
-          </a:prstGeom>
-          <a:solidFill>
-            <a:srgbClr val="643791"/>
-          </a:solidFill>
-          <a:ln/>
-        </p:spPr>
-        <p:txBody>
-          <a:bodyPr/>
-          <a:lstStyle/>
-          <a:p>
-            <a:endParaRPr lang="en-GB">
-              <a:latin typeface="DM Sans 14pt" pitchFamily="2" charset="77"/>
-            </a:endParaRPr>
-          </a:p>
-        </p:txBody>
-      </p:sp>
-      <p:sp>
-        <p:nvSpPr>
-          <p:cNvPr id="9" name="Shape 7"/>
-          <p:cNvSpPr/>
-          <p:nvPr/>
-        </p:nvSpPr>
-        <p:spPr>
-          <a:xfrm>
-            <a:off x="10158311" y="2055334"/>
-            <a:ext cx="2380822" cy="1459641"/>
-          </a:xfrm>
-          <a:prstGeom prst="roundRect">
-            <a:avLst>
-              <a:gd name="adj" fmla="val 17778"/>
-            </a:avLst>
-          </a:prstGeom>
-          <a:solidFill>
-            <a:srgbClr val="FFFFFF">
-              <a:alpha val="15000"/>
-            </a:srgbClr>
-          </a:solidFill>
-          <a:ln/>
-        </p:spPr>
-        <p:txBody>
-          <a:bodyPr anchor="ctr"/>
-          <a:lstStyle/>
-          <a:p>
-            <a:pPr algn="ctr"/>
-            <a:r>
-              <a:rPr lang="en-US" sz="3000" kern="0" spc="-67" dirty="0">
-                <a:solidFill>
-                  <a:srgbClr val="FFFFFF"/>
-                </a:solidFill>
-                <a:latin typeface="DM Sans 14pt" pitchFamily="2" charset="77"/>
-                <a:ea typeface="Arial" pitchFamily="34" charset="-122"/>
-                <a:cs typeface="Arial" pitchFamily="34" charset="-120"/>
-              </a:rPr>
-              <a:t>{{</a:t>
-            </a:r>
-            <a:r>
-              <a:rPr lang="en-US" sz="3000" kern="0" spc="-67" dirty="0" err="1">
-                <a:solidFill>
-                  <a:srgbClr val="FFFFFF"/>
-                </a:solidFill>
-                <a:latin typeface="DM Sans 14pt" pitchFamily="2" charset="77"/>
-                <a:ea typeface="Arial" pitchFamily="34" charset="-122"/>
-                <a:cs typeface="Arial" pitchFamily="34" charset="-120"/>
-              </a:rPr>
-              <a:t>stat_total_jobs</a:t>
-            </a:r>
-            <a:r>
-              <a:rPr lang="en-US" sz="3000" kern="0" spc="-67" dirty="0">
-                <a:solidFill>
-                  <a:srgbClr val="FFFFFF"/>
-                </a:solidFill>
-                <a:latin typeface="DM Sans 14pt" pitchFamily="2" charset="77"/>
-                <a:ea typeface="Arial" pitchFamily="34" charset="-122"/>
-                <a:cs typeface="Arial" pitchFamily="34" charset="-120"/>
-              </a:rPr>
-              <a:t>}}</a:t>
-            </a:r>
-            <a:endParaRPr lang="en-US" sz="3000" dirty="0">
-              <a:latin typeface="DM Sans 14pt" pitchFamily="2" charset="77"/>
-            </a:endParaRPr>
-          </a:p>
-        </p:txBody>
-      </p:sp>
-      <p:sp>
-        <p:nvSpPr>
-          <p:cNvPr id="11" name="Text 9"/>
-          <p:cNvSpPr/>
-          <p:nvPr/>
-        </p:nvSpPr>
-        <p:spPr>
-          <a:xfrm>
-            <a:off x="10532881" y="3520548"/>
-            <a:ext cx="1618357" cy="304994"/>
-          </a:xfrm>
-          <a:prstGeom prst="rect">
-            <a:avLst/>
-          </a:prstGeom>
-          <a:noFill/>
-          <a:ln/>
-        </p:spPr>
-        <p:txBody>
-          <a:bodyPr wrap="square" lIns="25400" tIns="25400" rIns="25400" bIns="25400" rtlCol="0" anchor="b">
-            <a:normAutofit/>
-          </a:bodyPr>
-          <a:lstStyle/>
-          <a:p>
-            <a:pPr marL="0" indent="0" algn="l">
-              <a:buNone/>
-            </a:pPr>
-            <a:r>
-              <a:rPr lang="en-US" sz="825" kern="0" spc="182" dirty="0">
-                <a:solidFill>
-                  <a:srgbClr val="FFFFFF">
-                    <a:alpha val="85000"/>
-                  </a:srgbClr>
-                </a:solidFill>
-                <a:latin typeface="DM Sans 14pt" pitchFamily="2" charset="77"/>
-                <a:ea typeface="Arial" pitchFamily="34" charset="-122"/>
-                <a:cs typeface="Arial" pitchFamily="34" charset="-120"/>
-              </a:rPr>
-              <a:t>ROLES BENCHMARKED</a:t>
-            </a:r>
-            <a:endParaRPr lang="en-US" sz="825" dirty="0">
-              <a:latin typeface="DM Sans 14pt" pitchFamily="2" charset="77"/>
-            </a:endParaRPr>
-          </a:p>
-        </p:txBody>
-      </p:sp>
-      <p:grpSp>
-        <p:nvGrpSpPr>
-          <p:cNvPr id="52" name="Group 51">
-            <a:extLst>
-              <a:ext uri="{FF2B5EF4-FFF2-40B4-BE49-F238E27FC236}">
-                <a16:creationId xmlns:a16="http://schemas.microsoft.com/office/drawing/2014/main" id="{8BCF2827-5626-8C6D-774D-F9EC939EE4AC}"/>
-              </a:ext>
-            </a:extLst>
-          </p:cNvPr>
-          <p:cNvGrpSpPr/>
-          <p:nvPr/>
-        </p:nvGrpSpPr>
-        <p:grpSpPr>
-          <a:xfrm>
-            <a:off x="9986861" y="4636790"/>
-            <a:ext cx="2710403" cy="1951636"/>
-            <a:chOff x="10089846" y="3991843"/>
-            <a:chExt cx="2710403" cy="1951636"/>
-          </a:xfrm>
-        </p:grpSpPr>
-        <p:sp>
-          <p:nvSpPr>
-            <p:cNvPr id="12" name="Shape 10"/>
-            <p:cNvSpPr/>
-            <p:nvPr/>
-          </p:nvSpPr>
-          <p:spPr>
-            <a:xfrm>
-              <a:off x="10089846" y="3991843"/>
-              <a:ext cx="2710403" cy="1946063"/>
-            </a:xfrm>
-            <a:prstGeom prst="roundRect">
-              <a:avLst/>
-            </a:prstGeom>
-            <a:solidFill>
-              <a:srgbClr val="E5FF6E"/>
-            </a:solidFill>
-            <a:ln/>
-          </p:spPr>
-          <p:txBody>
-            <a:bodyPr anchor="ctr"/>
-            <a:lstStyle/>
-            <a:p>
-              <a:pPr algn="ctr"/>
-              <a:endParaRPr lang="en-US" dirty="0">
-                <a:latin typeface="DM Sans 14pt" pitchFamily="2" charset="77"/>
-              </a:endParaRPr>
-            </a:p>
-          </p:txBody>
-        </p:sp>
-        <p:sp>
-          <p:nvSpPr>
-            <p:cNvPr id="13" name="Shape 11"/>
-            <p:cNvSpPr/>
-            <p:nvPr/>
-          </p:nvSpPr>
-          <p:spPr>
-            <a:xfrm>
-              <a:off x="10261296" y="4200561"/>
-              <a:ext cx="2300827" cy="1362039"/>
-            </a:xfrm>
-            <a:prstGeom prst="roundRect">
-              <a:avLst>
-                <a:gd name="adj" fmla="val 17778"/>
-              </a:avLst>
-            </a:prstGeom>
-            <a:noFill/>
-            <a:ln/>
-          </p:spPr>
-          <p:txBody>
-            <a:bodyPr wrap="square" lIns="25400" tIns="25400" rIns="25400" bIns="25400" rtlCol="0" anchor="t">
-              <a:normAutofit/>
-            </a:bodyPr>
-            <a:lstStyle/>
-            <a:p>
-              <a:pPr>
-                <a:lnSpc>
-                  <a:spcPct val="110000"/>
-                </a:lnSpc>
-              </a:pPr>
-              <a:endParaRPr lang="en-GB" sz="3000" kern="0" spc="-67">
-                <a:solidFill>
-                  <a:srgbClr val="FFFFFF"/>
-                </a:solidFill>
-                <a:latin typeface="DM Sans 14pt" pitchFamily="2" charset="77"/>
-                <a:cs typeface="Arial" pitchFamily="34" charset="-120"/>
-              </a:endParaRPr>
-            </a:p>
-          </p:txBody>
-        </p:sp>
-        <p:sp>
-          <p:nvSpPr>
-            <p:cNvPr id="16" name="Text 14"/>
-            <p:cNvSpPr/>
-            <p:nvPr/>
-          </p:nvSpPr>
-          <p:spPr>
-            <a:xfrm>
-              <a:off x="10327970" y="5658331"/>
-              <a:ext cx="2234153" cy="285148"/>
-            </a:xfrm>
-            <a:prstGeom prst="rect">
-              <a:avLst/>
-            </a:prstGeom>
-            <a:noFill/>
-            <a:ln/>
-          </p:spPr>
-          <p:txBody>
-            <a:bodyPr wrap="square" lIns="25400" tIns="25400" rIns="25400" bIns="25400" rtlCol="0" anchor="b">
-              <a:normAutofit/>
-            </a:bodyPr>
-            <a:lstStyle/>
-            <a:p>
-              <a:pPr marL="0" indent="0" algn="l">
-                <a:buNone/>
-              </a:pPr>
-              <a:r>
-                <a:rPr lang="en-US" sz="825" kern="0" spc="182" dirty="0">
-                  <a:solidFill>
-                    <a:srgbClr val="240F45">
-                      <a:alpha val="85000"/>
-                    </a:srgbClr>
-                  </a:solidFill>
-                  <a:latin typeface="DM Sans 14pt" pitchFamily="2" charset="77"/>
-                  <a:ea typeface="Arial" pitchFamily="34" charset="-122"/>
-                  <a:cs typeface="Arial" pitchFamily="34" charset="-120"/>
-                </a:rPr>
-                <a:t>IN THE TOP-RIGHT QUADRANT</a:t>
-              </a:r>
-              <a:endParaRPr lang="en-US" sz="825" dirty="0">
-                <a:latin typeface="DM Sans 14pt" pitchFamily="2" charset="77"/>
-              </a:endParaRPr>
-            </a:p>
-          </p:txBody>
-        </p:sp>
-      </p:grpSp>
-      <p:sp>
-        <p:nvSpPr>
-          <p:cNvPr id="17" name="Shape 15"/>
-          <p:cNvSpPr/>
-          <p:nvPr/>
-        </p:nvSpPr>
-        <p:spPr>
-          <a:xfrm>
-            <a:off x="9986861" y="7388438"/>
-            <a:ext cx="2710403" cy="1946062"/>
-          </a:xfrm>
-          <a:prstGeom prst="roundRect">
-            <a:avLst/>
-          </a:prstGeom>
-          <a:solidFill>
-            <a:srgbClr val="643791"/>
-          </a:solidFill>
-          <a:ln/>
-        </p:spPr>
-        <p:txBody>
-          <a:bodyPr/>
-          <a:lstStyle/>
-          <a:p>
-            <a:endParaRPr lang="en-GB">
-              <a:latin typeface="DM Sans 14pt" pitchFamily="2" charset="77"/>
-            </a:endParaRPr>
-          </a:p>
-        </p:txBody>
-      </p:sp>
-      <p:sp>
-        <p:nvSpPr>
-          <p:cNvPr id="18" name="Shape 16"/>
-          <p:cNvSpPr/>
-          <p:nvPr/>
-        </p:nvSpPr>
-        <p:spPr>
-          <a:xfrm>
-            <a:off x="10158922" y="7553060"/>
-            <a:ext cx="2379600" cy="1461600"/>
-          </a:xfrm>
-          <a:prstGeom prst="roundRect">
-            <a:avLst>
-              <a:gd name="adj" fmla="val 17778"/>
-            </a:avLst>
-          </a:prstGeom>
-          <a:solidFill>
-            <a:srgbClr val="FFFFFF">
-              <a:alpha val="15000"/>
-            </a:srgbClr>
-          </a:solidFill>
-          <a:ln/>
-        </p:spPr>
-        <p:txBody>
-          <a:bodyPr anchor="ctr"/>
-          <a:lstStyle/>
-          <a:p>
-            <a:pPr algn="ctr"/>
-            <a:r>
-              <a:rPr lang="en-US" sz="3000" kern="0" spc="-67" dirty="0">
-                <a:solidFill>
-                  <a:srgbClr val="FFFFFF"/>
-                </a:solidFill>
-                <a:latin typeface="DM Sans 14pt" pitchFamily="2" charset="77"/>
-                <a:cs typeface="Arial" pitchFamily="34" charset="-120"/>
-              </a:rPr>
-              <a:t>{{</a:t>
-            </a:r>
-            <a:r>
-              <a:rPr lang="en-US" sz="3000" kern="0" spc="-67" dirty="0" err="1">
-                <a:solidFill>
-                  <a:srgbClr val="FFFFFF"/>
-                </a:solidFill>
-                <a:latin typeface="DM Sans 14pt" pitchFamily="2" charset="77"/>
-                <a:cs typeface="Arial" pitchFamily="34" charset="-120"/>
-              </a:rPr>
-              <a:t>stat_top_category</a:t>
-            </a:r>
-            <a:r>
-              <a:rPr lang="en-US" sz="3000" kern="0" spc="-67" dirty="0">
-                <a:solidFill>
-                  <a:srgbClr val="FFFFFF"/>
-                </a:solidFill>
-                <a:latin typeface="DM Sans 14pt" pitchFamily="2" charset="77"/>
-                <a:cs typeface="Arial" pitchFamily="34" charset="-120"/>
-              </a:rPr>
-              <a:t>}}</a:t>
-            </a:r>
-          </a:p>
-        </p:txBody>
-      </p:sp>
-      <p:sp>
-        <p:nvSpPr>
-          <p:cNvPr id="20" name="Text 18"/>
-          <p:cNvSpPr/>
-          <p:nvPr/>
-        </p:nvSpPr>
-        <p:spPr>
-          <a:xfrm>
-            <a:off x="10286188" y="9006912"/>
-            <a:ext cx="2111745" cy="311605"/>
-          </a:xfrm>
-          <a:prstGeom prst="rect">
-            <a:avLst/>
-          </a:prstGeom>
-          <a:noFill/>
-          <a:ln/>
-        </p:spPr>
-        <p:txBody>
-          <a:bodyPr wrap="square" lIns="25400" tIns="25400" rIns="25400" bIns="25400" rtlCol="0" anchor="b">
-            <a:normAutofit/>
-          </a:bodyPr>
-          <a:lstStyle/>
-          <a:p>
-            <a:pPr marL="0" indent="0" algn="l">
-              <a:buNone/>
-            </a:pPr>
-            <a:r>
-              <a:rPr lang="en-US" sz="825" kern="0" spc="182" dirty="0">
-                <a:solidFill>
-                  <a:srgbClr val="FFFFFF">
-                    <a:alpha val="85000"/>
-                  </a:srgbClr>
-                </a:solidFill>
-                <a:latin typeface="DM Sans 14pt" pitchFamily="2" charset="77"/>
-                <a:ea typeface="Arial" pitchFamily="34" charset="-122"/>
-                <a:cs typeface="Arial" pitchFamily="34" charset="-120"/>
-              </a:rPr>
-              <a:t>STRONGEST JOB CATEGORY</a:t>
-            </a:r>
-            <a:endParaRPr lang="en-US" sz="825" dirty="0">
-              <a:latin typeface="DM Sans 14pt" pitchFamily="2" charset="77"/>
-            </a:endParaRPr>
-          </a:p>
-        </p:txBody>
-      </p:sp>
-      <p:sp>
-        <p:nvSpPr>
           <p:cNvPr id="22" name="Shape 20"/>
           <p:cNvSpPr/>
           <p:nvPr/>
@@ -2566,51 +2147,6 @@
               <a:t>}}</a:t>
             </a:r>
             <a:endParaRPr lang="en-US" dirty="0">
-              <a:latin typeface="DM Sans 14pt" pitchFamily="2" charset="77"/>
-            </a:endParaRPr>
-          </a:p>
-        </p:txBody>
-      </p:sp>
-      <p:sp>
-        <p:nvSpPr>
-          <p:cNvPr id="28" name="Text 26"/>
-          <p:cNvSpPr/>
-          <p:nvPr/>
-        </p:nvSpPr>
-        <p:spPr>
-          <a:xfrm>
-            <a:off x="857249" y="2020637"/>
-            <a:ext cx="4065789" cy="190500"/>
-          </a:xfrm>
-          <a:prstGeom prst="rect">
-            <a:avLst/>
-          </a:prstGeom>
-          <a:noFill/>
-          <a:ln/>
-        </p:spPr>
-        <p:txBody>
-          <a:bodyPr wrap="square" lIns="25400" tIns="25400" rIns="25400" bIns="25400" rtlCol="0" anchor="t">
-            <a:normAutofit fontScale="92500" lnSpcReduction="10000"/>
-          </a:bodyPr>
-          <a:lstStyle/>
-          <a:p>
-            <a:pPr marL="0" indent="0">
-              <a:buNone/>
-            </a:pPr>
-            <a:r>
-              <a:rPr lang="en-US" sz="1050" kern="0" spc="84" dirty="0">
-                <a:solidFill>
-                  <a:srgbClr val="111111">
-                    <a:alpha val="63000"/>
-                  </a:srgbClr>
-                </a:solidFill>
-                <a:latin typeface="DM Sans 14pt" pitchFamily="2" charset="77"/>
-                <a:ea typeface="Arial" pitchFamily="34" charset="-122"/>
-                <a:cs typeface="Arial" pitchFamily="34" charset="-120"/>
-              </a:rPr>
-              <a:t>Views vs. apply clicks, % above/below benchmark</a:t>
-            </a:r>
-            <a:endParaRPr lang="en-US" sz="1050" dirty="0">
               <a:latin typeface="DM Sans 14pt" pitchFamily="2" charset="77"/>
             </a:endParaRPr>
           </a:p>
@@ -3157,10 +2693,299 @@
       </p:grpSp>
       <p:sp>
         <p:nvSpPr>
-          <p:cNvPr id="62" name="Shape 10">
+          <p:cNvPr id="8" name="Shape 6"/>
+          <p:cNvSpPr/>
+          <p:nvPr/>
+        </p:nvSpPr>
+        <p:spPr>
+          <a:xfrm>
+            <a:off x="9986861" y="1890711"/>
+            <a:ext cx="2710403" cy="2354060"/>
+          </a:xfrm>
+          <a:prstGeom prst="roundRect">
+            <a:avLst/>
+          </a:prstGeom>
+          <a:solidFill>
+            <a:srgbClr val="643791"/>
+          </a:solidFill>
+          <a:ln/>
+        </p:spPr>
+        <p:txBody>
+          <a:bodyPr lIns="0" tIns="0" rIns="0" bIns="0" anchor="b"/>
+          <a:lstStyle/>
+          <a:p>
+            <a:pPr algn="ctr"/>
+            <a:r>
+              <a:rPr lang="en-US" sz="1050" kern="0" spc="182" dirty="0">
+                <a:solidFill>
+                  <a:srgbClr val="FFFFFF">
+                    <a:alpha val="85000"/>
+                  </a:srgbClr>
+                </a:solidFill>
+                <a:latin typeface="DM Sans 14pt" pitchFamily="2" charset="77"/>
+                <a:ea typeface="Arial" pitchFamily="34" charset="-122"/>
+                <a:cs typeface="Arial" pitchFamily="34" charset="-120"/>
+              </a:rPr>
+              <a:t>ROLES BENCHMARKED</a:t>
+            </a:r>
+            <a:endParaRPr lang="en-US" sz="1050" dirty="0">
+              <a:latin typeface="DM Sans 14pt" pitchFamily="2" charset="77"/>
+            </a:endParaRPr>
+          </a:p>
+        </p:txBody>
+      </p:sp>
+      <p:sp>
+        <p:nvSpPr>
+          <p:cNvPr id="9" name="Shape 7"/>
+          <p:cNvSpPr/>
+          <p:nvPr/>
+        </p:nvSpPr>
+        <p:spPr>
+          <a:xfrm>
+            <a:off x="10151651" y="2089846"/>
+            <a:ext cx="2380822" cy="1765657"/>
+          </a:xfrm>
+          <a:prstGeom prst="roundRect">
+            <a:avLst>
+              <a:gd name="adj" fmla="val 17778"/>
+            </a:avLst>
+          </a:prstGeom>
+          <a:solidFill>
+            <a:srgbClr val="FFFFFF">
+              <a:alpha val="15000"/>
+            </a:srgbClr>
+          </a:solidFill>
+          <a:ln/>
+        </p:spPr>
+        <p:txBody>
+          <a:bodyPr anchor="ctr"/>
+          <a:lstStyle/>
+          <a:p>
+            <a:pPr algn="ctr"/>
+            <a:r>
+              <a:rPr lang="en-US" sz="3000" b="1" kern="0" spc="-67" dirty="0">
+                <a:solidFill>
+                  <a:srgbClr val="FFFFFF"/>
+                </a:solidFill>
+                <a:latin typeface="DM Sans 14pt" pitchFamily="2" charset="77"/>
+                <a:ea typeface="Arial" pitchFamily="34" charset="-122"/>
+                <a:cs typeface="Arial" pitchFamily="34" charset="-120"/>
+              </a:rPr>
+              <a:t>{{</a:t>
+            </a:r>
+            <a:r>
+              <a:rPr lang="en-US" sz="3000" b="1" kern="0" spc="-67" dirty="0" err="1">
+                <a:solidFill>
+                  <a:srgbClr val="FFFFFF"/>
+                </a:solidFill>
+                <a:latin typeface="DM Sans 14pt" pitchFamily="2" charset="77"/>
+                <a:ea typeface="Arial" pitchFamily="34" charset="-122"/>
+                <a:cs typeface="Arial" pitchFamily="34" charset="-120"/>
+              </a:rPr>
+              <a:t>stat_total_jobs</a:t>
+            </a:r>
+            <a:r>
+              <a:rPr lang="en-US" sz="3000" b="1" kern="0" spc="-67" dirty="0">
+                <a:solidFill>
+                  <a:srgbClr val="FFFFFF"/>
+                </a:solidFill>
+                <a:latin typeface="DM Sans 14pt" pitchFamily="2" charset="77"/>
+                <a:ea typeface="Arial" pitchFamily="34" charset="-122"/>
+                <a:cs typeface="Arial" pitchFamily="34" charset="-120"/>
+              </a:rPr>
+              <a:t>}}</a:t>
+            </a:r>
+            <a:endParaRPr lang="en-US" sz="3000" b="1" dirty="0">
+              <a:latin typeface="DM Sans 14pt" pitchFamily="2" charset="77"/>
+            </a:endParaRPr>
+          </a:p>
+        </p:txBody>
+      </p:sp>
+      <p:sp>
+        <p:nvSpPr>
+          <p:cNvPr id="11" name="Text 9"/>
+          <p:cNvSpPr/>
+          <p:nvPr/>
+        </p:nvSpPr>
+        <p:spPr>
+          <a:xfrm>
+            <a:off x="9986860" y="3862243"/>
+            <a:ext cx="2710403" cy="375788"/>
+          </a:xfrm>
+          <a:prstGeom prst="rect">
+            <a:avLst/>
+          </a:prstGeom>
+          <a:noFill/>
+          <a:ln/>
+        </p:spPr>
+        <p:txBody>
+          <a:bodyPr wrap="square" lIns="25400" tIns="25400" rIns="25400" bIns="25400" rtlCol="0" anchor="b">
+            <a:normAutofit/>
+          </a:bodyPr>
+          <a:lstStyle/>
+          <a:p>
+            <a:pPr marL="0" indent="0" algn="ctr">
+              <a:buNone/>
+            </a:pPr>
+            <a:endParaRPr lang="en-US" sz="825" dirty="0">
+              <a:latin typeface="DM Sans 14pt" pitchFamily="2" charset="77"/>
+            </a:endParaRPr>
+          </a:p>
+        </p:txBody>
+      </p:sp>
+      <p:sp>
+        <p:nvSpPr>
+          <p:cNvPr id="17" name="Shape 15"/>
+          <p:cNvSpPr/>
+          <p:nvPr/>
+        </p:nvSpPr>
+        <p:spPr>
+          <a:xfrm>
+            <a:off x="9986861" y="6980442"/>
+            <a:ext cx="2710403" cy="2354056"/>
+          </a:xfrm>
+          <a:prstGeom prst="roundRect">
+            <a:avLst/>
+          </a:prstGeom>
+          <a:solidFill>
+            <a:srgbClr val="643791"/>
+          </a:solidFill>
+          <a:ln/>
+        </p:spPr>
+        <p:txBody>
+          <a:bodyPr lIns="0" tIns="0" rIns="0" bIns="0" anchor="b"/>
+          <a:lstStyle/>
+          <a:p>
+            <a:pPr algn="ctr"/>
+            <a:r>
+              <a:rPr lang="en-US" sz="1050" kern="0" spc="182" dirty="0">
+                <a:solidFill>
+                  <a:srgbClr val="FFFFFF">
+                    <a:alpha val="85000"/>
+                  </a:srgbClr>
+                </a:solidFill>
+                <a:latin typeface="DM Sans 14pt" pitchFamily="2" charset="77"/>
+                <a:ea typeface="Arial" pitchFamily="34" charset="-122"/>
+                <a:cs typeface="Arial" pitchFamily="34" charset="-120"/>
+              </a:rPr>
+              <a:t>STRONGEST JOB CATEGORY</a:t>
+            </a:r>
+            <a:endParaRPr lang="en-US" sz="1050" dirty="0">
+              <a:latin typeface="DM Sans 14pt" pitchFamily="2" charset="77"/>
+            </a:endParaRPr>
+          </a:p>
+        </p:txBody>
+      </p:sp>
+      <p:sp>
+        <p:nvSpPr>
+          <p:cNvPr id="18" name="Shape 16"/>
+          <p:cNvSpPr/>
+          <p:nvPr/>
+        </p:nvSpPr>
+        <p:spPr>
+          <a:xfrm>
+            <a:off x="10158922" y="7179577"/>
+            <a:ext cx="2379600" cy="1768026"/>
+          </a:xfrm>
+          <a:prstGeom prst="roundRect">
+            <a:avLst>
+              <a:gd name="adj" fmla="val 17778"/>
+            </a:avLst>
+          </a:prstGeom>
+          <a:solidFill>
+            <a:srgbClr val="FFFFFF">
+              <a:alpha val="15000"/>
+            </a:srgbClr>
+          </a:solidFill>
+          <a:ln/>
+        </p:spPr>
+        <p:txBody>
+          <a:bodyPr anchor="ctr"/>
+          <a:lstStyle/>
+          <a:p>
+            <a:pPr algn="ctr"/>
+            <a:r>
+              <a:rPr lang="en-US" sz="3000" b="1" kern="0" spc="-67" dirty="0">
+                <a:solidFill>
+                  <a:srgbClr val="FFFFFF"/>
+                </a:solidFill>
+                <a:latin typeface="DM Sans 14pt" pitchFamily="2" charset="77"/>
+                <a:cs typeface="Arial" pitchFamily="34" charset="-120"/>
+              </a:rPr>
+              <a:t>{{</a:t>
+            </a:r>
+            <a:r>
+              <a:rPr lang="en-US" sz="3000" b="1" kern="0" spc="-67" dirty="0" err="1">
+                <a:solidFill>
+                  <a:srgbClr val="FFFFFF"/>
+                </a:solidFill>
+                <a:latin typeface="DM Sans 14pt" pitchFamily="2" charset="77"/>
+                <a:cs typeface="Arial" pitchFamily="34" charset="-120"/>
+              </a:rPr>
+              <a:t>stat_top_category</a:t>
+            </a:r>
+            <a:r>
+              <a:rPr lang="en-US" sz="3000" b="1" kern="0" spc="-67" dirty="0">
+                <a:solidFill>
+                  <a:srgbClr val="FFFFFF"/>
+                </a:solidFill>
+                <a:latin typeface="DM Sans 14pt" pitchFamily="2" charset="77"/>
+                <a:cs typeface="Arial" pitchFamily="34" charset="-120"/>
+              </a:rPr>
+              <a:t>}}</a:t>
+            </a:r>
+          </a:p>
+        </p:txBody>
+      </p:sp>
+      <p:sp>
+        <p:nvSpPr>
+          <p:cNvPr id="12" name="Shape 10"/>
+          <p:cNvSpPr/>
+          <p:nvPr/>
+        </p:nvSpPr>
+        <p:spPr>
+          <a:xfrm>
+            <a:off x="9986861" y="4437127"/>
+            <a:ext cx="2710403" cy="2354057"/>
+          </a:xfrm>
+          <a:prstGeom prst="roundRect">
+            <a:avLst/>
+          </a:prstGeom>
+          <a:solidFill>
+            <a:srgbClr val="E5FF6E"/>
+          </a:solidFill>
+          <a:ln/>
+        </p:spPr>
+        <p:txBody>
+          <a:bodyPr lIns="0" tIns="0" rIns="0" bIns="0" anchor="b"/>
+          <a:lstStyle/>
+          <a:p>
+            <a:pPr algn="ctr"/>
+            <a:r>
+              <a:rPr lang="en-US" sz="1050" kern="0" spc="182" dirty="0">
+                <a:solidFill>
+                  <a:srgbClr val="240F45">
+                    <a:alpha val="85000"/>
+                  </a:srgbClr>
+                </a:solidFill>
+                <a:latin typeface="DM Sans 14pt" pitchFamily="2" charset="77"/>
+                <a:ea typeface="Arial" pitchFamily="34" charset="-122"/>
+                <a:cs typeface="Arial" pitchFamily="34" charset="-120"/>
+              </a:rPr>
+              <a:t>IN THE TOP-RIGHT QUADRANT</a:t>
+            </a:r>
+            <a:endParaRPr lang="en-US" sz="1050" dirty="0">
+              <a:latin typeface="DM Sans 14pt" pitchFamily="2" charset="77"/>
+            </a:endParaRPr>
+          </a:p>
+        </p:txBody>
+      </p:sp>
+      <p:sp>
+        <p:nvSpPr>
+          <p:cNvPr id="5" name="Shape 10">
             <a:extLst>
               <a:ext uri="{FF2B5EF4-FFF2-40B4-BE49-F238E27FC236}">
-                <a16:creationId xmlns:a16="http://schemas.microsoft.com/office/drawing/2014/main" id="{F9149085-C9BF-B06F-2BD2-89A1D127AA4D}"/>
+                <a16:creationId xmlns:a16="http://schemas.microsoft.com/office/drawing/2014/main" id="{621C128D-F2A7-22A1-C0E3-B6F2F281ACB4}"/>
               </a:ext>
             </a:extLst>
           </p:cNvPr>
@@ -3169,8 +2994,8 @@
         </p:nvSpPr>
         <p:spPr>
           <a:xfrm>
-            <a:off x="10158922" y="4825695"/>
-            <a:ext cx="2379600" cy="1461600"/>
+            <a:off x="10144126" y="4626384"/>
+            <a:ext cx="2379600" cy="1768026"/>
           </a:xfrm>
           <a:prstGeom prst="roundRect">
             <a:avLst/>
@@ -3186,7 +3011,7 @@
           <a:p>
             <a:pPr algn="ctr"/>
             <a:r>
-              <a:rPr lang="en-US" sz="3000" kern="0" spc="-67" dirty="0">
+              <a:rPr lang="en-US" sz="3000" b="1" kern="0" spc="-67" dirty="0">
                 <a:solidFill>
                   <a:srgbClr val="240F45"/>
                 </a:solidFill>
@@ -3197,7 +3022,7 @@
               <a:t>{{</a:t>
             </a:r>
             <a:r>
-              <a:rPr lang="en-US" sz="3000" kern="0" spc="-67" dirty="0" err="1">
+              <a:rPr lang="en-US" sz="3000" b="1" kern="0" spc="-67" dirty="0" err="1">
                 <a:solidFill>
                   <a:srgbClr val="240F45"/>
                 </a:solidFill>
@@ -3208,7 +3033,7 @@
               <a:t>stat_top_quadrant_pct</a:t>
             </a:r>
             <a:r>
-              <a:rPr lang="en-US" sz="3000" kern="0" spc="-67" dirty="0">
+              <a:rPr lang="en-US" sz="3000" b="1" kern="0" spc="-67" dirty="0">
                 <a:solidFill>
                   <a:srgbClr val="240F45"/>
                 </a:solidFill>
@@ -3218,7 +3043,71 @@
               </a:rPr>
               <a:t>}}</a:t>
             </a:r>
-            <a:endParaRPr lang="en-US" sz="3000" dirty="0">
+            <a:endParaRPr lang="en-US" sz="3000" b="1" dirty="0">
+              <a:latin typeface="DM Sans 14pt" pitchFamily="2" charset="77"/>
+            </a:endParaRPr>
+          </a:p>
+        </p:txBody>
+      </p:sp>
+      <p:sp>
+        <p:nvSpPr>
+          <p:cNvPr id="21" name="Rectangle 20">
+            <a:extLst>
+              <a:ext uri="{FF2B5EF4-FFF2-40B4-BE49-F238E27FC236}">
+                <a16:creationId xmlns:a16="http://schemas.microsoft.com/office/drawing/2014/main" id="{76A9494F-52A5-D760-AE5B-C1AAE512CD77}"/>
+              </a:ext>
+            </a:extLst>
+          </p:cNvPr>
+          <p:cNvSpPr/>
+          <p:nvPr/>
+        </p:nvSpPr>
+        <p:spPr>
+          <a:xfrm>
+            <a:off x="888847" y="1964831"/>
+            <a:ext cx="8009197" cy="299438"/>
+          </a:xfrm>
+          <a:prstGeom prst="rect">
+            <a:avLst/>
+          </a:prstGeom>
+          <a:noFill/>
+          <a:ln>
+            <a:noFill/>
+          </a:ln>
+        </p:spPr>
+        <p:style>
+          <a:lnRef idx="2">
+            <a:schemeClr val="accent1">
+              <a:shade val="15000"/>
+            </a:schemeClr>
+          </a:lnRef>
+          <a:fillRef idx="1">
+            <a:schemeClr val="accent1"/>
+          </a:fillRef>
+          <a:effectRef idx="0">
+            <a:schemeClr val="accent1"/>
+          </a:effectRef>
+          <a:fontRef idx="minor">
+            <a:schemeClr val="lt1"/>
+          </a:fontRef>
+        </p:style>
+        <p:txBody>
+          <a:bodyPr lIns="0" tIns="0" rIns="0" bIns="0" rtlCol="0" anchor="ctr"/>
+          <a:lstStyle/>
+          <a:p>
+            <a:r>
+              <a:rPr lang="en-US" kern="0" spc="84" dirty="0">
+                <a:solidFill>
+                  <a:srgbClr val="111111">
+                    <a:alpha val="63000"/>
+                  </a:srgbClr>
+                </a:solidFill>
+                <a:latin typeface="DM Sans 14pt" pitchFamily="2" charset="77"/>
+                <a:ea typeface="Arial" pitchFamily="34" charset="-122"/>
+                <a:cs typeface="Arial" pitchFamily="34" charset="-120"/>
+              </a:rPr>
+              <a:t>Views vs. apply clicks, % above/below benchmark</a:t>
+            </a:r>
+            <a:endParaRPr lang="en-US" dirty="0">
               <a:latin typeface="DM Sans 14pt" pitchFamily="2" charset="77"/>
             </a:endParaRPr>
           </a:p>
@@ -3479,7 +3368,7 @@
           </a:ln>
         </p:spPr>
         <p:txBody>
-          <a:bodyPr/>
+          <a:bodyPr lIns="0" tIns="0" rIns="0" bIns="0"/>
           <a:lstStyle/>
           <a:p>
             <a:r>
@@ -3634,7 +3523,53 @@
           <a:bodyPr/>
           <a:lstStyle/>
           <a:p>
-            <a:endParaRPr lang="en-GB">
+            <a:pPr algn="r"/>
+            <a:r>
+              <a:rPr lang="en-US" sz="1050" kern="0" spc="182" dirty="0">
+                <a:solidFill>
+                  <a:srgbClr val="FFFFFF">
+                    <a:alpha val="85000"/>
+                  </a:srgbClr>
+                </a:solidFill>
+                <a:latin typeface="DM Sans 14pt" pitchFamily="2" charset="77"/>
+                <a:ea typeface="Arial" pitchFamily="34" charset="-122"/>
+                <a:cs typeface="Arial" pitchFamily="34" charset="-120"/>
+              </a:rPr>
+              <a:t>BENCHMARK </a:t>
+            </a:r>
+          </a:p>
+          <a:p>
+            <a:pPr algn="r"/>
+            <a:r>
+              <a:rPr lang="en-US" sz="1050" kern="0" spc="182" dirty="0">
+                <a:solidFill>
+                  <a:srgbClr val="FFFFFF">
+                    <a:alpha val="85000"/>
+                  </a:srgbClr>
+                </a:solidFill>
+                <a:latin typeface="DM Sans 14pt" pitchFamily="2" charset="77"/>
+                <a:ea typeface="Arial" pitchFamily="34" charset="-122"/>
+                <a:cs typeface="Arial" pitchFamily="34" charset="-120"/>
+              </a:rPr>
+              <a:t>AVERAGE</a:t>
+            </a:r>
+          </a:p>
+          <a:p>
+            <a:pPr algn="r"/>
+            <a:r>
+              <a:rPr lang="en-US" sz="1050" kern="0" spc="182" dirty="0">
+                <a:solidFill>
+                  <a:srgbClr val="FFFFFF">
+                    <a:alpha val="85000"/>
+                  </a:srgbClr>
+                </a:solidFill>
+                <a:latin typeface="DM Sans 14pt" pitchFamily="2" charset="77"/>
+                <a:ea typeface="Arial" pitchFamily="34" charset="-122"/>
+                <a:cs typeface="Arial" pitchFamily="34" charset="-120"/>
+              </a:rPr>
+              <a:t> VIEWS</a:t>
+            </a:r>
+            <a:endParaRPr lang="en-US" sz="1050" dirty="0">
               <a:latin typeface="DM Sans 14pt" pitchFamily="2" charset="77"/>
             </a:endParaRPr>
           </a:p>
@@ -3648,8 +3583,8 @@
         </p:nvSpPr>
         <p:spPr>
           <a:xfrm>
-            <a:off x="888846" y="1890712"/>
-            <a:ext cx="2469476" cy="490538"/>
+            <a:off x="811592" y="1906638"/>
+            <a:ext cx="1281704" cy="602293"/>
           </a:xfrm>
           <a:prstGeom prst="roundRect">
             <a:avLst>
@@ -3667,43 +3602,8 @@
           <a:bodyPr/>
           <a:lstStyle/>
           <a:p>
-            <a:endParaRPr lang="en-GB">
-              <a:latin typeface="DM Sans 14pt" pitchFamily="2" charset="77"/>
-            </a:endParaRPr>
-          </a:p>
-        </p:txBody>
-      </p:sp>
-      <p:sp>
-        <p:nvSpPr>
-          <p:cNvPr id="10" name="Text 8"/>
-          <p:cNvSpPr/>
-          <p:nvPr/>
-        </p:nvSpPr>
-        <p:spPr>
-          <a:xfrm>
-            <a:off x="983855" y="1890712"/>
-            <a:ext cx="2347381" cy="433388"/>
-          </a:xfrm>
-          <a:prstGeom prst="rect">
-            <a:avLst/>
-          </a:prstGeom>
-          <a:noFill/>
-          <a:ln/>
-        </p:spPr>
-        <p:txBody>
-          <a:bodyPr wrap="square" lIns="25400" tIns="25400" rIns="25400" bIns="25400" rtlCol="0" anchor="t">
-            <a:noAutofit/>
-          </a:bodyPr>
-          <a:lstStyle/>
-          <a:p>
-            <a:pPr marL="0" indent="0" algn="l">
-              <a:lnSpc>
-                <a:spcPct val="110000"/>
-              </a:lnSpc>
-              <a:buNone/>
-            </a:pPr>
-            <a:r>
-              <a:rPr lang="en-US" sz="1400" kern="0" spc="-67" dirty="0">
+            <a:r>
+              <a:rPr lang="en-US" kern="0" spc="-67" dirty="0">
                 <a:solidFill>
                   <a:srgbClr val="FFFFFF"/>
                 </a:solidFill>
@@ -3714,7 +3614,7 @@
               <a:t>{{</a:t>
             </a:r>
             <a:r>
-              <a:rPr lang="en-US" sz="1400" kern="0" spc="-67" dirty="0" err="1">
+              <a:rPr lang="en-US" kern="0" spc="-67" dirty="0" err="1">
                 <a:solidFill>
                   <a:srgbClr val="FFFFFF"/>
                 </a:solidFill>
@@ -3725,7 +3625,7 @@
               <a:t>stat_benchmark_average_views</a:t>
             </a:r>
             <a:r>
-              <a:rPr lang="en-US" sz="1400" kern="0" spc="-67" dirty="0">
+              <a:rPr lang="en-US" kern="0" spc="-67" dirty="0">
                 <a:solidFill>
                   <a:srgbClr val="FFFFFF"/>
                 </a:solidFill>
@@ -3735,636 +3635,12 @@
               </a:rPr>
               <a:t>}}</a:t>
             </a:r>
-            <a:endParaRPr lang="en-US" sz="1400" dirty="0">
-              <a:latin typeface="DM Sans 14pt" pitchFamily="2" charset="77"/>
-            </a:endParaRPr>
-          </a:p>
-        </p:txBody>
-      </p:sp>
-      <p:sp>
-        <p:nvSpPr>
-          <p:cNvPr id="12" name="Shape 10"/>
-          <p:cNvSpPr/>
-          <p:nvPr/>
-        </p:nvSpPr>
-        <p:spPr>
-          <a:xfrm>
-            <a:off x="3751854" y="1847850"/>
-            <a:ext cx="2767998" cy="723900"/>
-          </a:xfrm>
-          <a:prstGeom prst="roundRect">
-            <a:avLst/>
-          </a:prstGeom>
-          <a:solidFill>
-            <a:srgbClr val="E5FF6E"/>
-          </a:solidFill>
-          <a:ln/>
-        </p:spPr>
-        <p:txBody>
-          <a:bodyPr/>
-          <a:lstStyle/>
-          <a:p>
-            <a:endParaRPr lang="en-GB">
-              <a:latin typeface="DM Sans 14pt" pitchFamily="2" charset="77"/>
-            </a:endParaRPr>
-          </a:p>
-        </p:txBody>
-      </p:sp>
-      <p:sp>
-        <p:nvSpPr>
-          <p:cNvPr id="14" name="Shape 12"/>
-          <p:cNvSpPr/>
-          <p:nvPr/>
-        </p:nvSpPr>
-        <p:spPr>
-          <a:xfrm>
-            <a:off x="4080238" y="2016919"/>
-            <a:ext cx="2140978" cy="214313"/>
-          </a:xfrm>
-          <a:prstGeom prst="roundRect">
-            <a:avLst>
-              <a:gd name="adj" fmla="val 17778"/>
-            </a:avLst>
-          </a:prstGeom>
-          <a:solidFill>
-            <a:srgbClr val="000000">
-              <a:alpha val="8000"/>
-            </a:srgbClr>
-          </a:solidFill>
-          <a:ln/>
-        </p:spPr>
-        <p:txBody>
-          <a:bodyPr/>
-          <a:lstStyle/>
-          <a:p>
-            <a:endParaRPr lang="en-GB">
-              <a:latin typeface="DM Sans 14pt" pitchFamily="2" charset="77"/>
-            </a:endParaRPr>
-          </a:p>
-        </p:txBody>
-      </p:sp>
-      <p:sp>
-        <p:nvSpPr>
-          <p:cNvPr id="15" name="Text 13"/>
-          <p:cNvSpPr/>
-          <p:nvPr/>
-        </p:nvSpPr>
-        <p:spPr>
-          <a:xfrm>
-            <a:off x="3885467" y="1974057"/>
-            <a:ext cx="2369881" cy="350043"/>
-          </a:xfrm>
-          <a:prstGeom prst="rect">
-            <a:avLst/>
-          </a:prstGeom>
-          <a:noFill/>
-          <a:ln/>
-        </p:spPr>
-        <p:txBody>
-          <a:bodyPr wrap="square" lIns="25400" tIns="25400" rIns="25400" bIns="25400" rtlCol="0" anchor="t">
-            <a:noAutofit/>
-          </a:bodyPr>
-          <a:lstStyle/>
-          <a:p>
-            <a:pPr marL="0" indent="0" algn="l">
-              <a:lnSpc>
-                <a:spcPct val="110000"/>
-              </a:lnSpc>
-              <a:buNone/>
-            </a:pPr>
-            <a:r>
-              <a:rPr lang="en-US" sz="1400" kern="0" spc="-67" dirty="0">
-                <a:solidFill>
-                  <a:srgbClr val="240F45"/>
-                </a:solidFill>
-                <a:latin typeface="DM Sans 14pt" pitchFamily="2" charset="77"/>
-                <a:ea typeface="Arial" pitchFamily="34" charset="-122"/>
-                <a:cs typeface="Arial" pitchFamily="34" charset="-120"/>
-              </a:rPr>
-              <a:t>{{</a:t>
-            </a:r>
-            <a:r>
-              <a:rPr lang="en-US" sz="1400" kern="0" spc="-67" dirty="0" err="1">
-                <a:solidFill>
-                  <a:srgbClr val="240F45"/>
-                </a:solidFill>
-                <a:latin typeface="DM Sans 14pt" pitchFamily="2" charset="77"/>
-                <a:ea typeface="Arial" pitchFamily="34" charset="-122"/>
-                <a:cs typeface="Arial" pitchFamily="34" charset="-120"/>
-              </a:rPr>
-              <a:t>stat_your_jobs_average_views</a:t>
-            </a:r>
-            <a:r>
-              <a:rPr lang="en-US" sz="1400" kern="0" spc="-67" dirty="0">
-                <a:solidFill>
-                  <a:srgbClr val="240F45"/>
-                </a:solidFill>
-                <a:latin typeface="DM Sans 14pt" pitchFamily="2" charset="77"/>
-                <a:ea typeface="Arial" pitchFamily="34" charset="-122"/>
-                <a:cs typeface="Arial" pitchFamily="34" charset="-120"/>
-              </a:rPr>
-              <a:t>}}</a:t>
-            </a:r>
-            <a:endParaRPr lang="en-US" sz="1400" dirty="0">
-              <a:latin typeface="DM Sans 14pt" pitchFamily="2" charset="77"/>
-            </a:endParaRPr>
-          </a:p>
-        </p:txBody>
-      </p:sp>
-      <p:sp>
-        <p:nvSpPr>
-          <p:cNvPr id="16" name="Text 14"/>
-          <p:cNvSpPr/>
-          <p:nvPr/>
-        </p:nvSpPr>
-        <p:spPr>
-          <a:xfrm>
-            <a:off x="6255349" y="1933575"/>
-            <a:ext cx="291588" cy="409575"/>
-          </a:xfrm>
-          <a:prstGeom prst="rect">
-            <a:avLst/>
-          </a:prstGeom>
-          <a:noFill/>
-          <a:ln/>
-        </p:spPr>
-        <p:txBody>
-          <a:bodyPr wrap="square" lIns="0" tIns="0" rIns="0" bIns="0" rtlCol="0" anchor="t">
-            <a:normAutofit/>
-          </a:bodyPr>
-          <a:lstStyle/>
-          <a:p>
-            <a:pPr marL="0" indent="0" algn="l">
-              <a:lnSpc>
-                <a:spcPct val="100000"/>
-              </a:lnSpc>
-              <a:buNone/>
-            </a:pPr>
-            <a:endParaRPr lang="en-US" sz="2250" dirty="0">
-              <a:latin typeface="DM Sans 14pt" pitchFamily="2" charset="77"/>
-            </a:endParaRPr>
-          </a:p>
-        </p:txBody>
-      </p:sp>
-      <p:sp>
-        <p:nvSpPr>
-          <p:cNvPr id="18" name="Shape 16"/>
-          <p:cNvSpPr/>
-          <p:nvPr/>
-        </p:nvSpPr>
-        <p:spPr>
-          <a:xfrm>
-            <a:off x="6741707" y="1847850"/>
-            <a:ext cx="2762457" cy="723900"/>
-          </a:xfrm>
-          <a:prstGeom prst="roundRect">
-            <a:avLst/>
-          </a:prstGeom>
-          <a:solidFill>
-            <a:srgbClr val="643791"/>
-          </a:solidFill>
-          <a:ln/>
-        </p:spPr>
-        <p:txBody>
-          <a:bodyPr/>
-          <a:lstStyle/>
-          <a:p>
-            <a:endParaRPr lang="en-GB">
-              <a:latin typeface="DM Sans 14pt" pitchFamily="2" charset="77"/>
-            </a:endParaRPr>
-          </a:p>
-        </p:txBody>
-      </p:sp>
-      <p:sp>
-        <p:nvSpPr>
-          <p:cNvPr id="19" name="Shape 17"/>
-          <p:cNvSpPr/>
-          <p:nvPr/>
-        </p:nvSpPr>
-        <p:spPr>
-          <a:xfrm>
-            <a:off x="6895301" y="2016919"/>
-            <a:ext cx="2002716" cy="214313"/>
-          </a:xfrm>
-          <a:prstGeom prst="roundRect">
-            <a:avLst>
-              <a:gd name="adj" fmla="val 17778"/>
-            </a:avLst>
-          </a:prstGeom>
-          <a:solidFill>
-            <a:srgbClr val="FFFFFF">
-              <a:alpha val="15000"/>
-            </a:srgbClr>
-          </a:solidFill>
-          <a:ln/>
-        </p:spPr>
-        <p:txBody>
-          <a:bodyPr/>
-          <a:lstStyle/>
-          <a:p>
-            <a:endParaRPr lang="en-GB">
-              <a:latin typeface="DM Sans 14pt" pitchFamily="2" charset="77"/>
-            </a:endParaRPr>
-          </a:p>
-        </p:txBody>
-      </p:sp>
-      <p:sp>
-        <p:nvSpPr>
-          <p:cNvPr id="20" name="Text 18"/>
-          <p:cNvSpPr/>
-          <p:nvPr/>
-        </p:nvSpPr>
-        <p:spPr>
-          <a:xfrm>
-            <a:off x="6963563" y="1890712"/>
-            <a:ext cx="2426421" cy="411958"/>
-          </a:xfrm>
-          <a:prstGeom prst="rect">
-            <a:avLst/>
-          </a:prstGeom>
-          <a:noFill/>
-          <a:ln/>
-        </p:spPr>
-        <p:txBody>
-          <a:bodyPr wrap="square" lIns="25400" tIns="25400" rIns="25400" bIns="25400" rtlCol="0" anchor="t">
-            <a:noAutofit/>
-          </a:bodyPr>
-          <a:lstStyle/>
-          <a:p>
-            <a:pPr marL="0" indent="0" algn="l">
-              <a:lnSpc>
-                <a:spcPct val="110000"/>
-              </a:lnSpc>
-              <a:buNone/>
-            </a:pPr>
-            <a:r>
-              <a:rPr lang="en-US" sz="1400" kern="0" spc="-67" dirty="0">
-                <a:solidFill>
-                  <a:srgbClr val="FFFFFF"/>
-                </a:solidFill>
-                <a:latin typeface="DM Sans 14pt" pitchFamily="2" charset="77"/>
-                <a:ea typeface="Arial" pitchFamily="34" charset="-122"/>
-                <a:cs typeface="Arial" pitchFamily="34" charset="-120"/>
-              </a:rPr>
-              <a:t>{{</a:t>
-            </a:r>
-            <a:r>
-              <a:rPr lang="en-US" sz="1400" kern="0" spc="-67" dirty="0" err="1">
-                <a:solidFill>
-                  <a:srgbClr val="FFFFFF"/>
-                </a:solidFill>
-                <a:latin typeface="DM Sans 14pt" pitchFamily="2" charset="77"/>
-                <a:ea typeface="Arial" pitchFamily="34" charset="-122"/>
-                <a:cs typeface="Arial" pitchFamily="34" charset="-120"/>
-              </a:rPr>
-              <a:t>stat_benchmark_average_applies</a:t>
-            </a:r>
-            <a:r>
-              <a:rPr lang="en-US" sz="1400" kern="0" spc="-67" dirty="0">
-                <a:solidFill>
-                  <a:srgbClr val="FFFFFF"/>
-                </a:solidFill>
-                <a:latin typeface="DM Sans 14pt" pitchFamily="2" charset="77"/>
-                <a:ea typeface="Arial" pitchFamily="34" charset="-122"/>
-                <a:cs typeface="Arial" pitchFamily="34" charset="-120"/>
-              </a:rPr>
-              <a:t>}}</a:t>
-            </a:r>
-            <a:endParaRPr lang="en-US" sz="1400" dirty="0">
-              <a:latin typeface="DM Sans 14pt" pitchFamily="2" charset="77"/>
-            </a:endParaRPr>
-          </a:p>
-        </p:txBody>
-      </p:sp>
-      <p:sp>
-        <p:nvSpPr>
-          <p:cNvPr id="22" name="Text 20"/>
-          <p:cNvSpPr/>
-          <p:nvPr/>
-        </p:nvSpPr>
-        <p:spPr>
-          <a:xfrm>
-            <a:off x="6895301" y="2324100"/>
-            <a:ext cx="2863967" cy="152400"/>
-          </a:xfrm>
-          <a:prstGeom prst="rect">
-            <a:avLst/>
-          </a:prstGeom>
-          <a:noFill/>
-          <a:ln/>
-        </p:spPr>
-        <p:txBody>
-          <a:bodyPr wrap="square" lIns="25400" tIns="25400" rIns="25400" bIns="25400" rtlCol="0" anchor="t">
-            <a:normAutofit fontScale="85000" lnSpcReduction="10000"/>
-          </a:bodyPr>
-          <a:lstStyle/>
-          <a:p>
-            <a:pPr marL="0" indent="0" algn="l">
-              <a:buNone/>
-            </a:pPr>
-            <a:r>
-              <a:rPr lang="en-US" sz="825" kern="0" spc="182" dirty="0">
-                <a:solidFill>
-                  <a:srgbClr val="FFFFFF">
-                    <a:alpha val="85000"/>
-                  </a:srgbClr>
-                </a:solidFill>
-                <a:latin typeface="DM Sans 14pt" pitchFamily="2" charset="77"/>
-                <a:ea typeface="Arial" pitchFamily="34" charset="-122"/>
-                <a:cs typeface="Arial" pitchFamily="34" charset="-120"/>
-              </a:rPr>
-              <a:t>BENCHMARK AVERAGE APPLYS</a:t>
-            </a:r>
-            <a:endParaRPr lang="en-US" sz="825" dirty="0">
-              <a:latin typeface="DM Sans 14pt" pitchFamily="2" charset="77"/>
-            </a:endParaRPr>
-          </a:p>
-        </p:txBody>
-      </p:sp>
-      <p:sp>
-        <p:nvSpPr>
-          <p:cNvPr id="40" name="Shape 10">
-            <a:extLst>
-              <a:ext uri="{FF2B5EF4-FFF2-40B4-BE49-F238E27FC236}">
-                <a16:creationId xmlns:a16="http://schemas.microsoft.com/office/drawing/2014/main" id="{9AFE0004-10EC-66DD-A433-5D4508C4D667}"/>
-              </a:ext>
-            </a:extLst>
-          </p:cNvPr>
-          <p:cNvSpPr/>
-          <p:nvPr/>
-        </p:nvSpPr>
-        <p:spPr>
-          <a:xfrm>
-            <a:off x="9698935" y="1847850"/>
-            <a:ext cx="2767998" cy="723900"/>
-          </a:xfrm>
-          <a:prstGeom prst="roundRect">
-            <a:avLst/>
-          </a:prstGeom>
-          <a:solidFill>
-            <a:srgbClr val="E5FF6E"/>
-          </a:solidFill>
-          <a:ln/>
-        </p:spPr>
-        <p:txBody>
-          <a:bodyPr/>
-          <a:lstStyle/>
-          <a:p>
-            <a:endParaRPr lang="en-GB">
-              <a:latin typeface="DM Sans 14pt" pitchFamily="2" charset="77"/>
-            </a:endParaRPr>
-          </a:p>
-        </p:txBody>
-      </p:sp>
-      <p:sp>
-        <p:nvSpPr>
-          <p:cNvPr id="42" name="Shape 12">
-            <a:extLst>
-              <a:ext uri="{FF2B5EF4-FFF2-40B4-BE49-F238E27FC236}">
-                <a16:creationId xmlns:a16="http://schemas.microsoft.com/office/drawing/2014/main" id="{D797879B-C0B2-E195-8621-8907B9D82F1F}"/>
-              </a:ext>
-            </a:extLst>
-          </p:cNvPr>
-          <p:cNvSpPr/>
-          <p:nvPr/>
-        </p:nvSpPr>
-        <p:spPr>
-          <a:xfrm>
-            <a:off x="9784266" y="2016919"/>
-            <a:ext cx="2384034" cy="223838"/>
-          </a:xfrm>
-          <a:prstGeom prst="roundRect">
-            <a:avLst>
-              <a:gd name="adj" fmla="val 17778"/>
-            </a:avLst>
-          </a:prstGeom>
-          <a:solidFill>
-            <a:srgbClr val="000000">
-              <a:alpha val="8000"/>
-            </a:srgbClr>
-          </a:solidFill>
-          <a:ln/>
-        </p:spPr>
-        <p:txBody>
-          <a:bodyPr/>
-          <a:lstStyle/>
-          <a:p>
-            <a:endParaRPr lang="en-GB" sz="1400" dirty="0">
-              <a:latin typeface="DM Sans 14pt" pitchFamily="2" charset="77"/>
-            </a:endParaRPr>
-          </a:p>
-        </p:txBody>
-      </p:sp>
-      <p:sp>
-        <p:nvSpPr>
-          <p:cNvPr id="43" name="Text 13">
-            <a:extLst>
-              <a:ext uri="{FF2B5EF4-FFF2-40B4-BE49-F238E27FC236}">
-                <a16:creationId xmlns:a16="http://schemas.microsoft.com/office/drawing/2014/main" id="{449B7F61-8DB7-9C1A-5603-4B3D66B1A57C}"/>
-              </a:ext>
-            </a:extLst>
-          </p:cNvPr>
-          <p:cNvSpPr/>
-          <p:nvPr/>
-        </p:nvSpPr>
-        <p:spPr>
-          <a:xfrm>
-            <a:off x="9759268" y="2045494"/>
-            <a:ext cx="2409032" cy="183355"/>
-          </a:xfrm>
-          <a:prstGeom prst="rect">
-            <a:avLst/>
-          </a:prstGeom>
-          <a:noFill/>
-          <a:ln/>
-        </p:spPr>
-        <p:txBody>
-          <a:bodyPr wrap="square" lIns="25400" tIns="25400" rIns="25400" bIns="25400" rtlCol="0" anchor="t">
-            <a:noAutofit/>
-          </a:bodyPr>
-          <a:lstStyle/>
-          <a:p>
-            <a:pPr marL="0" indent="0" algn="l">
-              <a:lnSpc>
-                <a:spcPct val="110000"/>
-              </a:lnSpc>
-              <a:buNone/>
-            </a:pPr>
-            <a:r>
-              <a:rPr lang="en-US" sz="1400" kern="0" spc="-67" dirty="0">
-                <a:solidFill>
-                  <a:srgbClr val="240F45"/>
-                </a:solidFill>
-                <a:latin typeface="DM Sans 14pt" pitchFamily="2" charset="77"/>
-                <a:ea typeface="Arial" pitchFamily="34" charset="-122"/>
-                <a:cs typeface="Arial" pitchFamily="34" charset="-120"/>
-              </a:rPr>
-              <a:t>{{</a:t>
-            </a:r>
-            <a:r>
-              <a:rPr lang="en-US" sz="1400" kern="0" spc="-67" dirty="0" err="1">
-                <a:solidFill>
-                  <a:srgbClr val="240F45"/>
-                </a:solidFill>
-                <a:latin typeface="DM Sans 14pt" pitchFamily="2" charset="77"/>
-                <a:ea typeface="Arial" pitchFamily="34" charset="-122"/>
-                <a:cs typeface="Arial" pitchFamily="34" charset="-120"/>
-              </a:rPr>
-              <a:t>stat_your_jobs_average_applies</a:t>
-            </a:r>
-            <a:r>
-              <a:rPr lang="en-US" sz="1400" kern="0" spc="-67" dirty="0">
-                <a:solidFill>
-                  <a:srgbClr val="240F45"/>
-                </a:solidFill>
-                <a:latin typeface="DM Sans 14pt" pitchFamily="2" charset="77"/>
-                <a:ea typeface="Arial" pitchFamily="34" charset="-122"/>
-                <a:cs typeface="Arial" pitchFamily="34" charset="-120"/>
-              </a:rPr>
-              <a:t>}}</a:t>
-            </a:r>
-            <a:endParaRPr lang="en-US" sz="1400" dirty="0">
-              <a:latin typeface="DM Sans 14pt" pitchFamily="2" charset="77"/>
-            </a:endParaRPr>
-          </a:p>
-        </p:txBody>
-      </p:sp>
-      <p:sp>
-        <p:nvSpPr>
-          <p:cNvPr id="45" name="Text 15">
-            <a:extLst>
-              <a:ext uri="{FF2B5EF4-FFF2-40B4-BE49-F238E27FC236}">
-                <a16:creationId xmlns:a16="http://schemas.microsoft.com/office/drawing/2014/main" id="{814AD5B6-1982-6091-1726-B65BA561066F}"/>
-              </a:ext>
-            </a:extLst>
-          </p:cNvPr>
-          <p:cNvSpPr/>
-          <p:nvPr/>
-        </p:nvSpPr>
-        <p:spPr>
-          <a:xfrm>
-            <a:off x="9784266" y="2324100"/>
-            <a:ext cx="3499933" cy="152400"/>
-          </a:xfrm>
-          <a:prstGeom prst="rect">
-            <a:avLst/>
-          </a:prstGeom>
-          <a:noFill/>
-          <a:ln/>
-        </p:spPr>
-        <p:txBody>
-          <a:bodyPr wrap="square" lIns="25400" tIns="25400" rIns="25400" bIns="25400" rtlCol="0" anchor="t">
-            <a:normAutofit fontScale="85000" lnSpcReduction="10000"/>
-          </a:bodyPr>
-          <a:lstStyle/>
-          <a:p>
-            <a:pPr marL="0" indent="0" algn="l">
-              <a:buNone/>
-            </a:pPr>
-            <a:r>
-              <a:rPr lang="en-US" sz="825" kern="0" spc="182" dirty="0">
-                <a:solidFill>
-                  <a:srgbClr val="240F45">
-                    <a:alpha val="85000"/>
-                  </a:srgbClr>
-                </a:solidFill>
-                <a:latin typeface="DM Sans 14pt" pitchFamily="2" charset="77"/>
-                <a:ea typeface="Arial" pitchFamily="34" charset="-122"/>
-                <a:cs typeface="Arial" pitchFamily="34" charset="-120"/>
-              </a:rPr>
-              <a:t>YOUR JOBS – AVERAGE APPLYS</a:t>
-            </a:r>
-            <a:endParaRPr lang="en-US" sz="825" dirty="0">
-              <a:latin typeface="DM Sans 14pt" pitchFamily="2" charset="77"/>
-            </a:endParaRPr>
-          </a:p>
-        </p:txBody>
-      </p:sp>
-      <p:sp>
-        <p:nvSpPr>
-          <p:cNvPr id="17" name="Text 15"/>
-          <p:cNvSpPr/>
-          <p:nvPr/>
-        </p:nvSpPr>
-        <p:spPr>
-          <a:xfrm>
-            <a:off x="3851225" y="2393157"/>
-            <a:ext cx="2890482" cy="152400"/>
-          </a:xfrm>
-          <a:prstGeom prst="rect">
-            <a:avLst/>
-          </a:prstGeom>
-          <a:noFill/>
-          <a:ln/>
-        </p:spPr>
-        <p:txBody>
-          <a:bodyPr wrap="square" lIns="25400" tIns="25400" rIns="25400" bIns="25400" rtlCol="0" anchor="t">
-            <a:normAutofit fontScale="85000" lnSpcReduction="10000"/>
-          </a:bodyPr>
-          <a:lstStyle/>
-          <a:p>
-            <a:pPr marL="0" indent="0" algn="l">
-              <a:buNone/>
-            </a:pPr>
-            <a:r>
-              <a:rPr lang="en-US" sz="825" kern="0" spc="182" dirty="0">
-                <a:solidFill>
-                  <a:srgbClr val="240F45">
-                    <a:alpha val="85000"/>
-                  </a:srgbClr>
-                </a:solidFill>
-                <a:latin typeface="DM Sans 14pt" pitchFamily="2" charset="77"/>
-                <a:ea typeface="Arial" pitchFamily="34" charset="-122"/>
-                <a:cs typeface="Arial" pitchFamily="34" charset="-120"/>
-              </a:rPr>
-              <a:t>YOUR JOBS – AVERAGE VIEWS</a:t>
-            </a:r>
-            <a:endParaRPr lang="en-US" sz="825" dirty="0">
-              <a:latin typeface="DM Sans 14pt" pitchFamily="2" charset="77"/>
-            </a:endParaRPr>
-          </a:p>
-        </p:txBody>
-      </p:sp>
-      <p:sp>
-        <p:nvSpPr>
-          <p:cNvPr id="11" name="Text 9"/>
-          <p:cNvSpPr/>
-          <p:nvPr/>
-        </p:nvSpPr>
-        <p:spPr>
-          <a:xfrm>
-            <a:off x="863848" y="2366636"/>
-            <a:ext cx="2467388" cy="226544"/>
-          </a:xfrm>
-          <a:prstGeom prst="rect">
-            <a:avLst/>
-          </a:prstGeom>
-          <a:noFill/>
-          <a:ln/>
-        </p:spPr>
-        <p:txBody>
-          <a:bodyPr wrap="square" lIns="25400" tIns="25400" rIns="25400" bIns="25400" rtlCol="0" anchor="t">
-            <a:normAutofit/>
-          </a:bodyPr>
-          <a:lstStyle/>
-          <a:p>
-            <a:pPr marL="0" indent="0" algn="l">
-              <a:buNone/>
-            </a:pPr>
-            <a:r>
-              <a:rPr lang="en-US" sz="825" kern="0" spc="182" dirty="0">
-                <a:solidFill>
-                  <a:srgbClr val="FFFFFF">
-                    <a:alpha val="85000"/>
-                  </a:srgbClr>
-                </a:solidFill>
-                <a:latin typeface="DM Sans 14pt" pitchFamily="2" charset="77"/>
-                <a:ea typeface="Arial" pitchFamily="34" charset="-122"/>
-                <a:cs typeface="Arial" pitchFamily="34" charset="-120"/>
-              </a:rPr>
-              <a:t>BENCHMARK AVERAGE VIEWS</a:t>
-            </a:r>
-            <a:endParaRPr lang="en-US" sz="825" dirty="0">
+            <a:endParaRPr lang="en-US" dirty="0">
+              <a:latin typeface="DM Sans 14pt" pitchFamily="2" charset="77"/>
+            </a:endParaRPr>
+          </a:p>
+          <a:p>
+            <a:endParaRPr lang="en-GB" dirty="0">
               <a:latin typeface="DM Sans 14pt" pitchFamily="2" charset="77"/>
             </a:endParaRPr>
           </a:p>
@@ -4867,8 +4143,498 @@
           </a:bodyPr>
           <a:lstStyle/>
           <a:p>
-            <a:r>
-              <a:rPr lang="en-US" sz="1050" kern="0" spc="84" dirty="0">
+            <a:endParaRPr lang="en-US" sz="1100" dirty="0">
+              <a:latin typeface="DM Sans 14pt" pitchFamily="2" charset="77"/>
+            </a:endParaRPr>
+          </a:p>
+        </p:txBody>
+      </p:sp>
+      <p:sp>
+        <p:nvSpPr>
+          <p:cNvPr id="13" name="Shape 6">
+            <a:extLst>
+              <a:ext uri="{FF2B5EF4-FFF2-40B4-BE49-F238E27FC236}">
+                <a16:creationId xmlns:a16="http://schemas.microsoft.com/office/drawing/2014/main" id="{8C44538B-8BCE-A405-F239-6C4E08DB3913}"/>
+              </a:ext>
+            </a:extLst>
+          </p:cNvPr>
+          <p:cNvSpPr/>
+          <p:nvPr/>
+        </p:nvSpPr>
+        <p:spPr>
+          <a:xfrm>
+            <a:off x="3778940" y="1847850"/>
+            <a:ext cx="2767997" cy="723900"/>
+          </a:xfrm>
+          <a:prstGeom prst="roundRect">
+            <a:avLst/>
+          </a:prstGeom>
+          <a:solidFill>
+            <a:srgbClr val="E6FF6E"/>
+          </a:solidFill>
+          <a:ln/>
+        </p:spPr>
+        <p:txBody>
+          <a:bodyPr/>
+          <a:lstStyle/>
+          <a:p>
+            <a:pPr algn="r"/>
+            <a:r>
+              <a:rPr lang="en-US" sz="1050" kern="0" spc="182" dirty="0">
+                <a:latin typeface="DM Sans 14pt" pitchFamily="2" charset="77"/>
+                <a:ea typeface="Arial" pitchFamily="34" charset="-122"/>
+                <a:cs typeface="Arial" pitchFamily="34" charset="-120"/>
+              </a:rPr>
+              <a:t>YOUR JOBS – </a:t>
+            </a:r>
+          </a:p>
+          <a:p>
+            <a:pPr algn="r"/>
+            <a:r>
+              <a:rPr lang="en-US" sz="1050" kern="0" spc="182" dirty="0">
+                <a:latin typeface="DM Sans 14pt" pitchFamily="2" charset="77"/>
+                <a:ea typeface="Arial" pitchFamily="34" charset="-122"/>
+                <a:cs typeface="Arial" pitchFamily="34" charset="-120"/>
+              </a:rPr>
+              <a:t>AVERAGE</a:t>
+            </a:r>
+          </a:p>
+          <a:p>
+            <a:pPr algn="r"/>
+            <a:r>
+              <a:rPr lang="en-US" sz="1050" kern="0" spc="182" dirty="0">
+                <a:latin typeface="DM Sans 14pt" pitchFamily="2" charset="77"/>
+                <a:ea typeface="Arial" pitchFamily="34" charset="-122"/>
+                <a:cs typeface="Arial" pitchFamily="34" charset="-120"/>
+              </a:rPr>
+              <a:t>VIEWS</a:t>
+            </a:r>
+            <a:endParaRPr lang="en-US" sz="1050" dirty="0">
+              <a:latin typeface="DM Sans 14pt" pitchFamily="2" charset="77"/>
+            </a:endParaRPr>
+          </a:p>
+        </p:txBody>
+      </p:sp>
+      <p:sp>
+        <p:nvSpPr>
+          <p:cNvPr id="23" name="Shape 7">
+            <a:extLst>
+              <a:ext uri="{FF2B5EF4-FFF2-40B4-BE49-F238E27FC236}">
+                <a16:creationId xmlns:a16="http://schemas.microsoft.com/office/drawing/2014/main" id="{0EBED078-0815-5F85-26FB-DB9ABFCCCCB7}"/>
+              </a:ext>
+            </a:extLst>
+          </p:cNvPr>
+          <p:cNvSpPr/>
+          <p:nvPr/>
+        </p:nvSpPr>
+        <p:spPr>
+          <a:xfrm>
+            <a:off x="3828532" y="1906638"/>
+            <a:ext cx="1281704" cy="602293"/>
+          </a:xfrm>
+          <a:prstGeom prst="roundRect">
+            <a:avLst>
+              <a:gd name="adj" fmla="val 17778"/>
+            </a:avLst>
+          </a:prstGeom>
+          <a:solidFill>
+            <a:srgbClr val="D4EB66"/>
+          </a:solidFill>
+          <a:ln/>
+        </p:spPr>
+        <p:txBody>
+          <a:bodyPr/>
+          <a:lstStyle/>
+          <a:p>
+            <a:pPr>
+              <a:lnSpc>
+                <a:spcPct val="110000"/>
+              </a:lnSpc>
+            </a:pPr>
+            <a:r>
+              <a:rPr lang="en-US" kern="0" spc="-67" dirty="0">
+                <a:solidFill>
+                  <a:srgbClr val="240F45"/>
+                </a:solidFill>
+                <a:latin typeface="DM Sans 14pt" pitchFamily="2" charset="77"/>
+                <a:ea typeface="Arial" pitchFamily="34" charset="-122"/>
+                <a:cs typeface="Arial" pitchFamily="34" charset="-120"/>
+              </a:rPr>
+              <a:t>{{</a:t>
+            </a:r>
+            <a:r>
+              <a:rPr lang="en-US" kern="0" spc="-67" dirty="0" err="1">
+                <a:solidFill>
+                  <a:srgbClr val="240F45"/>
+                </a:solidFill>
+                <a:latin typeface="DM Sans 14pt" pitchFamily="2" charset="77"/>
+                <a:ea typeface="Arial" pitchFamily="34" charset="-122"/>
+                <a:cs typeface="Arial" pitchFamily="34" charset="-120"/>
+              </a:rPr>
+              <a:t>stat_your_jobs_average_views</a:t>
+            </a:r>
+            <a:r>
+              <a:rPr lang="en-US" kern="0" spc="-67" dirty="0">
+                <a:solidFill>
+                  <a:srgbClr val="240F45"/>
+                </a:solidFill>
+                <a:latin typeface="DM Sans 14pt" pitchFamily="2" charset="77"/>
+                <a:ea typeface="Arial" pitchFamily="34" charset="-122"/>
+                <a:cs typeface="Arial" pitchFamily="34" charset="-120"/>
+              </a:rPr>
+              <a:t>}}</a:t>
+            </a:r>
+            <a:endParaRPr lang="en-US" dirty="0">
+              <a:latin typeface="DM Sans 14pt" pitchFamily="2" charset="77"/>
+            </a:endParaRPr>
+          </a:p>
+        </p:txBody>
+      </p:sp>
+      <p:sp>
+        <p:nvSpPr>
+          <p:cNvPr id="26" name="Shape 6">
+            <a:extLst>
+              <a:ext uri="{FF2B5EF4-FFF2-40B4-BE49-F238E27FC236}">
+                <a16:creationId xmlns:a16="http://schemas.microsoft.com/office/drawing/2014/main" id="{D1EB76D1-D1DC-624B-0A48-A56A3A39CD50}"/>
+              </a:ext>
+            </a:extLst>
+          </p:cNvPr>
+          <p:cNvSpPr/>
+          <p:nvPr/>
+        </p:nvSpPr>
+        <p:spPr>
+          <a:xfrm>
+            <a:off x="6736167" y="1847850"/>
+            <a:ext cx="2767997" cy="723900"/>
+          </a:xfrm>
+          <a:prstGeom prst="roundRect">
+            <a:avLst/>
+          </a:prstGeom>
+          <a:solidFill>
+            <a:srgbClr val="643791"/>
+          </a:solidFill>
+          <a:ln/>
+        </p:spPr>
+        <p:txBody>
+          <a:bodyPr/>
+          <a:lstStyle/>
+          <a:p>
+            <a:pPr algn="r"/>
+            <a:r>
+              <a:rPr lang="en-US" sz="1050" kern="0" spc="182" dirty="0">
+                <a:solidFill>
+                  <a:srgbClr val="FFFFFF">
+                    <a:alpha val="85000"/>
+                  </a:srgbClr>
+                </a:solidFill>
+                <a:latin typeface="DM Sans 14pt" pitchFamily="2" charset="77"/>
+                <a:ea typeface="Arial" pitchFamily="34" charset="-122"/>
+                <a:cs typeface="Arial" pitchFamily="34" charset="-120"/>
+              </a:rPr>
+              <a:t>BENCHMARK </a:t>
+            </a:r>
+          </a:p>
+          <a:p>
+            <a:pPr algn="r"/>
+            <a:r>
+              <a:rPr lang="en-US" sz="1050" kern="0" spc="182" dirty="0">
+                <a:solidFill>
+                  <a:srgbClr val="FFFFFF">
+                    <a:alpha val="85000"/>
+                  </a:srgbClr>
+                </a:solidFill>
+                <a:latin typeface="DM Sans 14pt" pitchFamily="2" charset="77"/>
+                <a:ea typeface="Arial" pitchFamily="34" charset="-122"/>
+                <a:cs typeface="Arial" pitchFamily="34" charset="-120"/>
+              </a:rPr>
+              <a:t>AVERAGE</a:t>
+            </a:r>
+          </a:p>
+          <a:p>
+            <a:pPr algn="r"/>
+            <a:r>
+              <a:rPr lang="en-US" sz="1050" kern="0" spc="182" dirty="0">
+                <a:solidFill>
+                  <a:srgbClr val="FFFFFF">
+                    <a:alpha val="85000"/>
+                  </a:srgbClr>
+                </a:solidFill>
+                <a:latin typeface="DM Sans 14pt" pitchFamily="2" charset="77"/>
+                <a:ea typeface="Arial" pitchFamily="34" charset="-122"/>
+                <a:cs typeface="Arial" pitchFamily="34" charset="-120"/>
+              </a:rPr>
+              <a:t> APPLIES</a:t>
+            </a:r>
+            <a:endParaRPr lang="en-US" sz="1050" dirty="0">
+              <a:latin typeface="DM Sans 14pt" pitchFamily="2" charset="77"/>
+            </a:endParaRPr>
+          </a:p>
+        </p:txBody>
+      </p:sp>
+      <p:sp>
+        <p:nvSpPr>
+          <p:cNvPr id="27" name="Shape 7">
+            <a:extLst>
+              <a:ext uri="{FF2B5EF4-FFF2-40B4-BE49-F238E27FC236}">
+                <a16:creationId xmlns:a16="http://schemas.microsoft.com/office/drawing/2014/main" id="{1F3CEC1A-B76C-2510-ACD2-F9BB079DEBEA}"/>
+              </a:ext>
+            </a:extLst>
+          </p:cNvPr>
+          <p:cNvSpPr/>
+          <p:nvPr/>
+        </p:nvSpPr>
+        <p:spPr>
+          <a:xfrm>
+            <a:off x="6785759" y="1906638"/>
+            <a:ext cx="1281704" cy="602293"/>
+          </a:xfrm>
+          <a:prstGeom prst="roundRect">
+            <a:avLst>
+              <a:gd name="adj" fmla="val 17778"/>
+            </a:avLst>
+          </a:prstGeom>
+          <a:solidFill>
+            <a:srgbClr val="FFFFFF">
+              <a:alpha val="15000"/>
+            </a:srgbClr>
+          </a:solidFill>
+          <a:ln/>
+        </p:spPr>
+        <p:txBody>
+          <a:bodyPr/>
+          <a:lstStyle/>
+          <a:p>
+            <a:r>
+              <a:rPr lang="en-US" kern="0" spc="-67" dirty="0">
+                <a:solidFill>
+                  <a:srgbClr val="FFFFFF"/>
+                </a:solidFill>
+                <a:latin typeface="DM Sans 14pt" pitchFamily="2" charset="77"/>
+                <a:ea typeface="Arial" pitchFamily="34" charset="-122"/>
+                <a:cs typeface="Arial" pitchFamily="34" charset="-120"/>
+              </a:rPr>
+              <a:t>{{</a:t>
+            </a:r>
+            <a:r>
+              <a:rPr lang="en-US" kern="0" spc="-67" dirty="0" err="1">
+                <a:solidFill>
+                  <a:srgbClr val="FFFFFF"/>
+                </a:solidFill>
+                <a:latin typeface="DM Sans 14pt" pitchFamily="2" charset="77"/>
+                <a:ea typeface="Arial" pitchFamily="34" charset="-122"/>
+                <a:cs typeface="Arial" pitchFamily="34" charset="-120"/>
+              </a:rPr>
+              <a:t>stat_benchmark_average_applies</a:t>
+            </a:r>
+            <a:r>
+              <a:rPr lang="en-US" kern="0" spc="-67" dirty="0">
+                <a:solidFill>
+                  <a:srgbClr val="FFFFFF"/>
+                </a:solidFill>
+                <a:latin typeface="DM Sans 14pt" pitchFamily="2" charset="77"/>
+                <a:ea typeface="Arial" pitchFamily="34" charset="-122"/>
+                <a:cs typeface="Arial" pitchFamily="34" charset="-120"/>
+              </a:rPr>
+              <a:t>}}</a:t>
+            </a:r>
+            <a:endParaRPr lang="en-US" dirty="0">
+              <a:latin typeface="DM Sans 14pt" pitchFamily="2" charset="77"/>
+            </a:endParaRPr>
+          </a:p>
+          <a:p>
+            <a:endParaRPr lang="en-GB" dirty="0">
+              <a:latin typeface="DM Sans 14pt" pitchFamily="2" charset="77"/>
+            </a:endParaRPr>
+          </a:p>
+        </p:txBody>
+      </p:sp>
+      <p:sp>
+        <p:nvSpPr>
+          <p:cNvPr id="30" name="Shape 6">
+            <a:extLst>
+              <a:ext uri="{FF2B5EF4-FFF2-40B4-BE49-F238E27FC236}">
+                <a16:creationId xmlns:a16="http://schemas.microsoft.com/office/drawing/2014/main" id="{57A19399-4232-DBD4-372D-5800DB9229C0}"/>
+              </a:ext>
+            </a:extLst>
+          </p:cNvPr>
+          <p:cNvSpPr/>
+          <p:nvPr/>
+        </p:nvSpPr>
+        <p:spPr>
+          <a:xfrm>
+            <a:off x="9750532" y="1849951"/>
+            <a:ext cx="2767997" cy="723900"/>
+          </a:xfrm>
+          <a:prstGeom prst="roundRect">
+            <a:avLst/>
+          </a:prstGeom>
+          <a:solidFill>
+            <a:srgbClr val="E6FF6E"/>
+          </a:solidFill>
+          <a:ln/>
+        </p:spPr>
+        <p:txBody>
+          <a:bodyPr/>
+          <a:lstStyle/>
+          <a:p>
+            <a:pPr algn="r"/>
+            <a:r>
+              <a:rPr lang="en-US" sz="1050" kern="0" spc="182" dirty="0">
+                <a:latin typeface="DM Sans 14pt" pitchFamily="2" charset="77"/>
+                <a:ea typeface="Arial" pitchFamily="34" charset="-122"/>
+                <a:cs typeface="Arial" pitchFamily="34" charset="-120"/>
+              </a:rPr>
+              <a:t>YOUR JOBS – </a:t>
+            </a:r>
+          </a:p>
+          <a:p>
+            <a:pPr algn="r"/>
+            <a:r>
+              <a:rPr lang="en-US" sz="1050" kern="0" spc="182" dirty="0">
+                <a:latin typeface="DM Sans 14pt" pitchFamily="2" charset="77"/>
+                <a:ea typeface="Arial" pitchFamily="34" charset="-122"/>
+                <a:cs typeface="Arial" pitchFamily="34" charset="-120"/>
+              </a:rPr>
+              <a:t>AVERAGE</a:t>
+            </a:r>
+          </a:p>
+          <a:p>
+            <a:pPr algn="r"/>
+            <a:r>
+              <a:rPr lang="en-US" sz="1050" kern="0" spc="182" dirty="0">
+                <a:latin typeface="DM Sans 14pt" pitchFamily="2" charset="77"/>
+                <a:cs typeface="Arial" pitchFamily="34" charset="-120"/>
+              </a:rPr>
+              <a:t>APPLIES</a:t>
+            </a:r>
+            <a:endParaRPr lang="en-US" sz="1050" dirty="0">
+              <a:latin typeface="DM Sans 14pt" pitchFamily="2" charset="77"/>
+            </a:endParaRPr>
+          </a:p>
+        </p:txBody>
+      </p:sp>
+      <p:sp>
+        <p:nvSpPr>
+          <p:cNvPr id="31" name="Shape 7">
+            <a:extLst>
+              <a:ext uri="{FF2B5EF4-FFF2-40B4-BE49-F238E27FC236}">
+                <a16:creationId xmlns:a16="http://schemas.microsoft.com/office/drawing/2014/main" id="{2CB93A45-F9B5-B969-F066-7828CDAC37F3}"/>
+              </a:ext>
+            </a:extLst>
+          </p:cNvPr>
+          <p:cNvSpPr/>
+          <p:nvPr/>
+        </p:nvSpPr>
+        <p:spPr>
+          <a:xfrm>
+            <a:off x="9800124" y="1908739"/>
+            <a:ext cx="1281704" cy="602293"/>
+          </a:xfrm>
+          <a:prstGeom prst="roundRect">
+            <a:avLst>
+              <a:gd name="adj" fmla="val 17778"/>
+            </a:avLst>
+          </a:prstGeom>
+          <a:solidFill>
+            <a:srgbClr val="D4EB66"/>
+          </a:solidFill>
+          <a:ln/>
+        </p:spPr>
+        <p:txBody>
+          <a:bodyPr/>
+          <a:lstStyle/>
+          <a:p>
+            <a:pPr>
+              <a:lnSpc>
+                <a:spcPct val="110000"/>
+              </a:lnSpc>
+            </a:pPr>
+            <a:r>
+              <a:rPr lang="en-US" kern="0" spc="-67" dirty="0">
+                <a:solidFill>
+                  <a:srgbClr val="240F45"/>
+                </a:solidFill>
+                <a:latin typeface="DM Sans 14pt" pitchFamily="2" charset="77"/>
+                <a:ea typeface="Arial" pitchFamily="34" charset="-122"/>
+                <a:cs typeface="Arial" pitchFamily="34" charset="-120"/>
+              </a:rPr>
+              <a:t>{{</a:t>
+            </a:r>
+            <a:r>
+              <a:rPr lang="en-US" kern="0" spc="-67" dirty="0" err="1">
+                <a:solidFill>
+                  <a:srgbClr val="240F45"/>
+                </a:solidFill>
+                <a:latin typeface="DM Sans 14pt" pitchFamily="2" charset="77"/>
+                <a:ea typeface="Arial" pitchFamily="34" charset="-122"/>
+                <a:cs typeface="Arial" pitchFamily="34" charset="-120"/>
+              </a:rPr>
+              <a:t>stat_your_jobs_average_applies</a:t>
+            </a:r>
+            <a:r>
+              <a:rPr lang="en-US" kern="0" spc="-67" dirty="0">
+                <a:solidFill>
+                  <a:srgbClr val="240F45"/>
+                </a:solidFill>
+                <a:latin typeface="DM Sans 14pt" pitchFamily="2" charset="77"/>
+                <a:ea typeface="Arial" pitchFamily="34" charset="-122"/>
+                <a:cs typeface="Arial" pitchFamily="34" charset="-120"/>
+              </a:rPr>
+              <a:t>}}</a:t>
+            </a:r>
+            <a:endParaRPr lang="en-US" dirty="0">
+              <a:latin typeface="DM Sans 14pt" pitchFamily="2" charset="77"/>
+            </a:endParaRPr>
+          </a:p>
+        </p:txBody>
+      </p:sp>
+      <p:sp>
+        <p:nvSpPr>
+          <p:cNvPr id="32" name="Rectangle 31">
+            <a:extLst>
+              <a:ext uri="{FF2B5EF4-FFF2-40B4-BE49-F238E27FC236}">
+                <a16:creationId xmlns:a16="http://schemas.microsoft.com/office/drawing/2014/main" id="{097EA86C-CA48-161C-4318-F999C296E479}"/>
+              </a:ext>
+            </a:extLst>
+          </p:cNvPr>
+          <p:cNvSpPr/>
+          <p:nvPr/>
+        </p:nvSpPr>
+        <p:spPr>
+          <a:xfrm>
+            <a:off x="888847" y="2876723"/>
+            <a:ext cx="8009197" cy="299438"/>
+          </a:xfrm>
+          <a:prstGeom prst="rect">
+            <a:avLst/>
+          </a:prstGeom>
+          <a:noFill/>
+          <a:ln>
+            <a:noFill/>
+          </a:ln>
+        </p:spPr>
+        <p:style>
+          <a:lnRef idx="2">
+            <a:schemeClr val="accent1">
+              <a:shade val="15000"/>
+            </a:schemeClr>
+          </a:lnRef>
+          <a:fillRef idx="1">
+            <a:schemeClr val="accent1"/>
+          </a:fillRef>
+          <a:effectRef idx="0">
+            <a:schemeClr val="accent1"/>
+          </a:effectRef>
+          <a:fontRef idx="minor">
+            <a:schemeClr val="lt1"/>
+          </a:fontRef>
+        </p:style>
+        <p:txBody>
+          <a:bodyPr lIns="0" tIns="0" rIns="0" bIns="0" rtlCol="0" anchor="ctr"/>
+          <a:lstStyle/>
+          <a:p>
+            <a:r>
+              <a:rPr lang="en-US" kern="0" spc="84" dirty="0">
                 <a:solidFill>
                   <a:srgbClr val="111111">
                     <a:alpha val="63000"/>
@@ -4880,7 +4646,7 @@
               </a:rPr>
               <a:t>Views per vacancy · Apply clicks per vacancy</a:t>
             </a:r>
-            <a:endParaRPr lang="en-US" sz="1050" dirty="0">
+            <a:endParaRPr lang="en-US" dirty="0">
               <a:latin typeface="DM Sans 14pt" pitchFamily="2" charset="77"/>
             </a:endParaRPr>
           </a:p>
@@ -5118,88 +4884,14 @@
       </p:sp>
       <p:sp>
         <p:nvSpPr>
-          <p:cNvPr id="23" name="Shape 21"/>
-          <p:cNvSpPr/>
-          <p:nvPr/>
-        </p:nvSpPr>
-        <p:spPr>
-          <a:xfrm>
-            <a:off x="10210056" y="1883177"/>
-            <a:ext cx="2117973" cy="228600"/>
-          </a:xfrm>
-          <a:prstGeom prst="roundRect">
-            <a:avLst>
-              <a:gd name="adj" fmla="val 16667"/>
-            </a:avLst>
-          </a:prstGeom>
-          <a:solidFill>
-            <a:srgbClr val="643791"/>
-          </a:solidFill>
-          <a:ln/>
-        </p:spPr>
-        <p:txBody>
-          <a:bodyPr/>
-          <a:lstStyle/>
-          <a:p>
-            <a:endParaRPr lang="en-GB">
-              <a:latin typeface="DM Sans 14pt" pitchFamily="2" charset="77"/>
-            </a:endParaRPr>
-          </a:p>
-        </p:txBody>
-      </p:sp>
-      <p:sp>
-        <p:nvSpPr>
-          <p:cNvPr id="24" name="Text 22"/>
-          <p:cNvSpPr/>
-          <p:nvPr/>
-        </p:nvSpPr>
-        <p:spPr>
-          <a:xfrm>
-            <a:off x="10324356" y="1940327"/>
-            <a:ext cx="1965573" cy="152400"/>
-          </a:xfrm>
-          <a:prstGeom prst="rect">
-            <a:avLst/>
-          </a:prstGeom>
-          <a:noFill/>
-          <a:ln/>
-        </p:spPr>
-        <p:txBody>
-          <a:bodyPr wrap="square" lIns="25400" tIns="25400" rIns="25400" bIns="25400" rtlCol="0" anchor="t">
-            <a:normAutofit fontScale="85000" lnSpcReduction="10000"/>
-          </a:bodyPr>
-          <a:lstStyle/>
-          <a:p>
-            <a:pPr marL="0" indent="0" algn="l">
-              <a:buNone/>
-            </a:pPr>
-            <a:r>
-              <a:rPr lang="en-US" sz="825" kern="0" spc="124" dirty="0">
-                <a:solidFill>
-                  <a:srgbClr val="FFFFFF"/>
-                </a:solidFill>
-                <a:latin typeface="DM Sans 14pt" pitchFamily="2" charset="77"/>
-                <a:ea typeface="Arial" pitchFamily="34" charset="-122"/>
-                <a:cs typeface="Arial" pitchFamily="34" charset="-120"/>
-              </a:rPr>
-              <a:t>STACKED BAR · BY JOB TYPE</a:t>
-            </a:r>
-            <a:endParaRPr lang="en-US" sz="825" dirty="0">
-              <a:latin typeface="DM Sans 14pt" pitchFamily="2" charset="77"/>
-            </a:endParaRPr>
-          </a:p>
-        </p:txBody>
-      </p:sp>
-      <p:sp>
-        <p:nvSpPr>
           <p:cNvPr id="25" name="Shape 23"/>
           <p:cNvSpPr/>
           <p:nvPr/>
         </p:nvSpPr>
         <p:spPr>
           <a:xfrm>
-            <a:off x="851338" y="2299503"/>
-            <a:ext cx="11592910" cy="6939747"/>
+            <a:off x="851338" y="2111777"/>
+            <a:ext cx="11592910" cy="7127473"/>
           </a:xfrm>
           <a:prstGeom prst="roundRect">
             <a:avLst>
@@ -5222,22 +4914,55 @@
           <a:bodyPr/>
           <a:lstStyle/>
           <a:p>
-            <a:endParaRPr lang="en-GB">
-              <a:latin typeface="DM Sans 14pt" pitchFamily="2" charset="77"/>
-            </a:endParaRPr>
-          </a:p>
-        </p:txBody>
-      </p:sp>
-      <p:sp>
-        <p:nvSpPr>
-          <p:cNvPr id="26" name="Text 24"/>
-          <p:cNvSpPr/>
-          <p:nvPr/>
-        </p:nvSpPr>
-        <p:spPr>
-          <a:xfrm>
-            <a:off x="987973" y="2337602"/>
-            <a:ext cx="11301956" cy="6753846"/>
+            <a:r>
+              <a:rPr lang="en-US" kern="0" spc="30" dirty="0">
+                <a:solidFill>
+                  <a:srgbClr val="240F45"/>
+                </a:solidFill>
+                <a:latin typeface="DM Sans 14pt" pitchFamily="2" charset="77"/>
+                <a:ea typeface="monospace" pitchFamily="34" charset="-122"/>
+                <a:cs typeface="monospace" pitchFamily="34" charset="-120"/>
+              </a:rPr>
+              <a:t>{{</a:t>
+            </a:r>
+            <a:r>
+              <a:rPr lang="en-US" kern="0" spc="30" dirty="0" err="1">
+                <a:solidFill>
+                  <a:srgbClr val="240F45"/>
+                </a:solidFill>
+                <a:latin typeface="DM Sans 14pt" pitchFamily="2" charset="77"/>
+                <a:ea typeface="monospace" pitchFamily="34" charset="-122"/>
+                <a:cs typeface="monospace" pitchFamily="34" charset="-120"/>
+              </a:rPr>
+              <a:t>chart:postings_by_type</a:t>
+            </a:r>
+            <a:r>
+              <a:rPr lang="en-US" kern="0" spc="30" dirty="0">
+                <a:solidFill>
+                  <a:srgbClr val="240F45"/>
+                </a:solidFill>
+                <a:latin typeface="DM Sans 14pt" pitchFamily="2" charset="77"/>
+                <a:ea typeface="monospace" pitchFamily="34" charset="-122"/>
+                <a:cs typeface="monospace" pitchFamily="34" charset="-120"/>
+              </a:rPr>
+              <a:t>}}</a:t>
+            </a:r>
+            <a:endParaRPr lang="en-US" dirty="0">
+              <a:latin typeface="DM Sans 14pt" pitchFamily="2" charset="77"/>
+            </a:endParaRPr>
+          </a:p>
+        </p:txBody>
+      </p:sp>
+      <p:sp>
+        <p:nvSpPr>
+          <p:cNvPr id="27" name="Text 25"/>
+          <p:cNvSpPr/>
+          <p:nvPr/>
+        </p:nvSpPr>
+        <p:spPr>
+          <a:xfrm>
+            <a:off x="4893357" y="1902227"/>
+            <a:ext cx="3931965" cy="190500"/>
           </a:xfrm>
           <a:prstGeom prst="rect">
             <a:avLst/>
@@ -5247,69 +4972,13 @@
         </p:spPr>
         <p:txBody>
           <a:bodyPr wrap="square" lIns="25400" tIns="25400" rIns="25400" bIns="25400" rtlCol="0" anchor="t">
-            <a:normAutofit/>
+            <a:normAutofit fontScale="92500" lnSpcReduction="10000"/>
           </a:bodyPr>
           <a:lstStyle/>
           <a:p>
             <a:pPr marL="0" indent="0" algn="ctr">
               <a:buNone/>
             </a:pPr>
-            <a:r>
-              <a:rPr lang="en-US" sz="1650" kern="0" spc="30" dirty="0">
-                <a:solidFill>
-                  <a:srgbClr val="240F45"/>
-                </a:solidFill>
-                <a:latin typeface="DM Sans 14pt" pitchFamily="2" charset="77"/>
-                <a:ea typeface="monospace" pitchFamily="34" charset="-122"/>
-                <a:cs typeface="monospace" pitchFamily="34" charset="-120"/>
-              </a:rPr>
-              <a:t>{{chart:postings_by_type}}</a:t>
-            </a:r>
-            <a:endParaRPr lang="en-US" sz="1650" dirty="0">
-              <a:latin typeface="DM Sans 14pt" pitchFamily="2" charset="77"/>
-            </a:endParaRPr>
-          </a:p>
-        </p:txBody>
-      </p:sp>
-      <p:sp>
-        <p:nvSpPr>
-          <p:cNvPr id="27" name="Text 25"/>
-          <p:cNvSpPr/>
-          <p:nvPr/>
-        </p:nvSpPr>
-        <p:spPr>
-          <a:xfrm>
-            <a:off x="4893357" y="1902227"/>
-            <a:ext cx="3931965" cy="190500"/>
-          </a:xfrm>
-          <a:prstGeom prst="rect">
-            <a:avLst/>
-          </a:prstGeom>
-          <a:noFill/>
-          <a:ln/>
-        </p:spPr>
-        <p:txBody>
-          <a:bodyPr wrap="square" lIns="25400" tIns="25400" rIns="25400" bIns="25400" rtlCol="0" anchor="t">
-            <a:normAutofit fontScale="92500" lnSpcReduction="10000"/>
-          </a:bodyPr>
-          <a:lstStyle/>
-          <a:p>
-            <a:pPr marL="0" indent="0" algn="ctr">
-              <a:buNone/>
-            </a:pPr>
-            <a:r>
-              <a:rPr lang="en-US" sz="1050" kern="0" spc="84" dirty="0">
-                <a:solidFill>
-                  <a:srgbClr val="111111">
-                    <a:alpha val="63000"/>
-                  </a:srgbClr>
-                </a:solidFill>
-                <a:latin typeface="DM Sans 14pt" pitchFamily="2" charset="77"/>
-                <a:ea typeface="Arial" pitchFamily="34" charset="-122"/>
-                <a:cs typeface="Arial" pitchFamily="34" charset="-120"/>
-              </a:rPr>
-              <a:t>Postings · views · apply clicks per category</a:t>
-            </a:r>
             <a:endParaRPr lang="en-US" sz="1050" dirty="0">
               <a:latin typeface="DM Sans 14pt" pitchFamily="2" charset="77"/>
             </a:endParaRPr>
@@ -5826,6 +5495,70 @@
           </p:txBody>
         </p:sp>
       </p:grpSp>
+      <p:sp>
+        <p:nvSpPr>
+          <p:cNvPr id="5" name="Rectangle 4">
+            <a:extLst>
+              <a:ext uri="{FF2B5EF4-FFF2-40B4-BE49-F238E27FC236}">
+                <a16:creationId xmlns:a16="http://schemas.microsoft.com/office/drawing/2014/main" id="{8C07A67A-A209-CB62-2E13-644DBB245FFF}"/>
+              </a:ext>
+            </a:extLst>
+          </p:cNvPr>
+          <p:cNvSpPr/>
+          <p:nvPr/>
+        </p:nvSpPr>
+        <p:spPr>
+          <a:xfrm>
+            <a:off x="851338" y="1754496"/>
+            <a:ext cx="8009197" cy="299438"/>
+          </a:xfrm>
+          <a:prstGeom prst="rect">
+            <a:avLst/>
+          </a:prstGeom>
+          <a:noFill/>
+          <a:ln>
+            <a:noFill/>
+          </a:ln>
+        </p:spPr>
+        <p:style>
+          <a:lnRef idx="2">
+            <a:schemeClr val="accent1">
+              <a:shade val="15000"/>
+            </a:schemeClr>
+          </a:lnRef>
+          <a:fillRef idx="1">
+            <a:schemeClr val="accent1"/>
+          </a:fillRef>
+          <a:effectRef idx="0">
+            <a:schemeClr val="accent1"/>
+          </a:effectRef>
+          <a:fontRef idx="minor">
+            <a:schemeClr val="lt1"/>
+          </a:fontRef>
+        </p:style>
+        <p:txBody>
+          <a:bodyPr lIns="0" tIns="0" rIns="0" bIns="0" rtlCol="0" anchor="ctr"/>
+          <a:lstStyle/>
+          <a:p>
+            <a:r>
+              <a:rPr lang="en-US" kern="0" spc="84" dirty="0">
+                <a:solidFill>
+                  <a:srgbClr val="111111">
+                    <a:alpha val="63000"/>
+                  </a:srgbClr>
+                </a:solidFill>
+                <a:latin typeface="DM Sans 14pt" pitchFamily="2" charset="77"/>
+                <a:ea typeface="Arial" pitchFamily="34" charset="-122"/>
+                <a:cs typeface="Arial" pitchFamily="34" charset="-120"/>
+              </a:rPr>
+              <a:t>Postings · views · apply clicks per category</a:t>
+            </a:r>
+            <a:endParaRPr lang="en-US" dirty="0">
+              <a:latin typeface="DM Sans 14pt" pitchFamily="2" charset="77"/>
+            </a:endParaRPr>
+          </a:p>
+        </p:txBody>
+      </p:sp>
     </p:spTree>
   </p:cSld>
   <p:clrMapOvr>
@@ -6075,7 +5808,7 @@
           </a:xfrm>
           <a:prstGeom prst="roundRect">
             <a:avLst>
-              <a:gd name="adj" fmla="val 2332"/>
+              <a:gd name="adj" fmla="val 5085"/>
             </a:avLst>
           </a:prstGeom>
           <a:solidFill>
@@ -6100,131 +5833,14 @@
       </p:sp>
       <p:sp>
         <p:nvSpPr>
-          <p:cNvPr id="25" name="Text 23"/>
-          <p:cNvSpPr/>
-          <p:nvPr/>
-        </p:nvSpPr>
-        <p:spPr>
-          <a:xfrm>
-            <a:off x="888847" y="2900362"/>
-            <a:ext cx="1981051" cy="180975"/>
-          </a:xfrm>
-          <a:prstGeom prst="rect">
-            <a:avLst/>
-          </a:prstGeom>
-          <a:noFill/>
-          <a:ln/>
-        </p:spPr>
-        <p:txBody>
-          <a:bodyPr wrap="square" lIns="25400" tIns="25400" rIns="25400" bIns="25400" rtlCol="0" anchor="t">
-            <a:normAutofit fontScale="92500" lnSpcReduction="10000"/>
-          </a:bodyPr>
-          <a:lstStyle/>
-          <a:p>
-            <a:pPr marL="0" indent="0" algn="l">
-              <a:buNone/>
-            </a:pPr>
-            <a:r>
-              <a:rPr lang="en-US" sz="975" kern="0" spc="244" dirty="0">
-                <a:solidFill>
-                  <a:srgbClr val="643791"/>
-                </a:solidFill>
-                <a:latin typeface="DM Sans 14pt" pitchFamily="2" charset="77"/>
-                <a:ea typeface="Arial" pitchFamily="34" charset="-122"/>
-                <a:cs typeface="Arial" pitchFamily="34" charset="-120"/>
-              </a:rPr>
-              <a:t>CHART PLACEHOLDER</a:t>
-            </a:r>
-            <a:endParaRPr lang="en-US" sz="975" dirty="0">
-              <a:latin typeface="DM Sans 14pt" pitchFamily="2" charset="77"/>
-            </a:endParaRPr>
-          </a:p>
-        </p:txBody>
-      </p:sp>
-      <p:sp>
-        <p:nvSpPr>
-          <p:cNvPr id="26" name="Shape 24"/>
-          <p:cNvSpPr/>
-          <p:nvPr/>
-        </p:nvSpPr>
-        <p:spPr>
-          <a:xfrm>
-            <a:off x="3820110" y="2976564"/>
-            <a:ext cx="2699742" cy="228600"/>
-          </a:xfrm>
-          <a:prstGeom prst="roundRect">
-            <a:avLst>
-              <a:gd name="adj" fmla="val 16667"/>
-            </a:avLst>
-          </a:prstGeom>
-          <a:solidFill>
-            <a:srgbClr val="643791"/>
-          </a:solidFill>
-          <a:ln/>
-        </p:spPr>
-        <p:txBody>
-          <a:bodyPr/>
-          <a:lstStyle/>
-          <a:p>
-            <a:endParaRPr lang="en-GB">
-              <a:latin typeface="DM Sans 14pt" pitchFamily="2" charset="77"/>
-            </a:endParaRPr>
-          </a:p>
-        </p:txBody>
-      </p:sp>
-      <p:sp>
-        <p:nvSpPr>
-          <p:cNvPr id="27" name="Text 25"/>
-          <p:cNvSpPr/>
-          <p:nvPr/>
-        </p:nvSpPr>
-        <p:spPr>
-          <a:xfrm>
-            <a:off x="3967718" y="3014664"/>
-            <a:ext cx="2552134" cy="152400"/>
-          </a:xfrm>
-          <a:prstGeom prst="rect">
-            <a:avLst/>
-          </a:prstGeom>
-          <a:noFill/>
-          <a:ln/>
-        </p:spPr>
-        <p:txBody>
-          <a:bodyPr wrap="square" lIns="25400" tIns="25400" rIns="25400" bIns="25400" rtlCol="0" anchor="t">
-            <a:normAutofit fontScale="85000" lnSpcReduction="10000"/>
-          </a:bodyPr>
-          <a:lstStyle/>
-          <a:p>
-            <a:pPr marL="0" indent="0" algn="l">
-              <a:buNone/>
-            </a:pPr>
-            <a:r>
-              <a:rPr lang="en-US" sz="825" kern="0" spc="124" dirty="0">
-                <a:solidFill>
-                  <a:srgbClr val="FFFFFF"/>
-                </a:solidFill>
-                <a:latin typeface="DM Sans 14pt" pitchFamily="2" charset="77"/>
-                <a:ea typeface="Arial" pitchFamily="34" charset="-122"/>
-                <a:cs typeface="Arial" pitchFamily="34" charset="-120"/>
-              </a:rPr>
-              <a:t>BAR · COST PER APPLY BY CATEGORY</a:t>
-            </a:r>
-            <a:endParaRPr lang="en-US" sz="825" dirty="0">
-              <a:latin typeface="DM Sans 14pt" pitchFamily="2" charset="77"/>
-            </a:endParaRPr>
-          </a:p>
-        </p:txBody>
-      </p:sp>
-      <p:sp>
-        <p:nvSpPr>
           <p:cNvPr id="28" name="Shape 26"/>
           <p:cNvSpPr/>
           <p:nvPr/>
         </p:nvSpPr>
         <p:spPr>
           <a:xfrm>
-            <a:off x="825441" y="3081338"/>
-            <a:ext cx="2607164" cy="6157912"/>
+            <a:off x="825441" y="3215883"/>
+            <a:ext cx="2607164" cy="6023366"/>
           </a:xfrm>
           <a:prstGeom prst="roundRect">
             <a:avLst>
@@ -6247,22 +5863,55 @@
           <a:bodyPr/>
           <a:lstStyle/>
           <a:p>
-            <a:endParaRPr lang="en-GB">
-              <a:latin typeface="DM Sans 14pt" pitchFamily="2" charset="77"/>
-            </a:endParaRPr>
-          </a:p>
-        </p:txBody>
-      </p:sp>
-      <p:sp>
-        <p:nvSpPr>
-          <p:cNvPr id="29" name="Text 27"/>
-          <p:cNvSpPr/>
-          <p:nvPr/>
-        </p:nvSpPr>
-        <p:spPr>
-          <a:xfrm>
-            <a:off x="915591" y="3205164"/>
-            <a:ext cx="2440558" cy="5917815"/>
+            <a:r>
+              <a:rPr lang="en-US" kern="0" spc="30" dirty="0">
+                <a:solidFill>
+                  <a:srgbClr val="240F45"/>
+                </a:solidFill>
+                <a:latin typeface="DM Sans 14pt" pitchFamily="2" charset="77"/>
+                <a:ea typeface="monospace" pitchFamily="34" charset="-122"/>
+                <a:cs typeface="monospace" pitchFamily="34" charset="-120"/>
+              </a:rPr>
+              <a:t>{{</a:t>
+            </a:r>
+            <a:r>
+              <a:rPr lang="en-US" kern="0" spc="30" dirty="0" err="1">
+                <a:solidFill>
+                  <a:srgbClr val="240F45"/>
+                </a:solidFill>
+                <a:latin typeface="DM Sans 14pt" pitchFamily="2" charset="77"/>
+                <a:ea typeface="monospace" pitchFamily="34" charset="-122"/>
+                <a:cs typeface="monospace" pitchFamily="34" charset="-120"/>
+              </a:rPr>
+              <a:t>chart:spend_vs_ratecard</a:t>
+            </a:r>
+            <a:r>
+              <a:rPr lang="en-US" kern="0" spc="30" dirty="0">
+                <a:solidFill>
+                  <a:srgbClr val="240F45"/>
+                </a:solidFill>
+                <a:latin typeface="DM Sans 14pt" pitchFamily="2" charset="77"/>
+                <a:ea typeface="monospace" pitchFamily="34" charset="-122"/>
+                <a:cs typeface="monospace" pitchFamily="34" charset="-120"/>
+              </a:rPr>
+              <a:t>}}</a:t>
+            </a:r>
+            <a:endParaRPr lang="en-US" dirty="0">
+              <a:latin typeface="DM Sans 14pt" pitchFamily="2" charset="77"/>
+            </a:endParaRPr>
+          </a:p>
+        </p:txBody>
+      </p:sp>
+      <p:sp>
+        <p:nvSpPr>
+          <p:cNvPr id="38" name="Text 36"/>
+          <p:cNvSpPr/>
+          <p:nvPr/>
+        </p:nvSpPr>
+        <p:spPr>
+          <a:xfrm>
+            <a:off x="609600" y="9753600"/>
+            <a:ext cx="2373511" cy="190500"/>
           </a:xfrm>
           <a:prstGeom prst="rect">
             <a:avLst/>
@@ -6272,80 +5921,15 @@
         </p:spPr>
         <p:txBody>
           <a:bodyPr wrap="square" lIns="25400" tIns="25400" rIns="25400" bIns="25400" rtlCol="0" anchor="t">
-            <a:normAutofit/>
+            <a:normAutofit fontScale="85000" lnSpcReduction="10000"/>
           </a:bodyPr>
           <a:lstStyle/>
           <a:p>
-            <a:pPr marL="0" indent="0" algn="ctr">
+            <a:pPr marL="0" indent="0" algn="l">
               <a:buNone/>
             </a:pPr>
             <a:r>
-              <a:rPr lang="en-US" sz="1650" kern="0" spc="30" dirty="0">
-                <a:solidFill>
-                  <a:srgbClr val="240F45"/>
-                </a:solidFill>
-                <a:latin typeface="DM Sans 14pt" pitchFamily="2" charset="77"/>
-                <a:ea typeface="monospace" pitchFamily="34" charset="-122"/>
-                <a:cs typeface="monospace" pitchFamily="34" charset="-120"/>
-              </a:rPr>
-              <a:t>{{</a:t>
-            </a:r>
-            <a:r>
-              <a:rPr lang="en-US" sz="1650" kern="0" spc="30" dirty="0" err="1">
-                <a:solidFill>
-                  <a:srgbClr val="240F45"/>
-                </a:solidFill>
-                <a:latin typeface="DM Sans 14pt" pitchFamily="2" charset="77"/>
-                <a:ea typeface="monospace" pitchFamily="34" charset="-122"/>
-                <a:cs typeface="monospace" pitchFamily="34" charset="-120"/>
-              </a:rPr>
-              <a:t>chart:spend_vs_ratecard</a:t>
-            </a:r>
-            <a:r>
-              <a:rPr lang="en-US" sz="1650" kern="0" spc="30" dirty="0">
-                <a:solidFill>
-                  <a:srgbClr val="240F45"/>
-                </a:solidFill>
-                <a:latin typeface="DM Sans 14pt" pitchFamily="2" charset="77"/>
-                <a:ea typeface="monospace" pitchFamily="34" charset="-122"/>
-                <a:cs typeface="monospace" pitchFamily="34" charset="-120"/>
-              </a:rPr>
-              <a:t>}}</a:t>
-            </a:r>
-            <a:endParaRPr lang="en-US" sz="1650" dirty="0">
-              <a:latin typeface="DM Sans 14pt" pitchFamily="2" charset="77"/>
-            </a:endParaRPr>
-          </a:p>
-        </p:txBody>
-      </p:sp>
-      <p:sp>
-        <p:nvSpPr>
-          <p:cNvPr id="30" name="Text 28"/>
-          <p:cNvSpPr/>
-          <p:nvPr/>
-        </p:nvSpPr>
-        <p:spPr>
-          <a:xfrm>
-            <a:off x="803042" y="6161088"/>
-            <a:ext cx="2588521" cy="525462"/>
-          </a:xfrm>
-          <a:prstGeom prst="rect">
-            <a:avLst/>
-          </a:prstGeom>
-          <a:noFill/>
-          <a:ln/>
-        </p:spPr>
-        <p:txBody>
-          <a:bodyPr wrap="square" lIns="25400" tIns="25400" rIns="25400" bIns="25400" rtlCol="0" anchor="t">
-            <a:normAutofit/>
-          </a:bodyPr>
-          <a:lstStyle/>
-          <a:p>
-            <a:pPr marL="0" indent="0" algn="ctr">
-              <a:buNone/>
-            </a:pPr>
-            <a:r>
-              <a:rPr lang="en-US" sz="1050" kern="0" spc="84" dirty="0">
+              <a:rPr lang="en-US" sz="1050" kern="0" spc="42" dirty="0">
                 <a:solidFill>
                   <a:srgbClr val="111111">
                     <a:alpha val="63000"/>
@@ -6355,7 +5939,7 @@
                 <a:ea typeface="Arial" pitchFamily="34" charset="-122"/>
                 <a:cs typeface="Arial" pitchFamily="34" charset="-120"/>
               </a:rPr>
-              <a:t>Spent vs rate card</a:t>
+              <a:t>{{client_name}} · Advertising Report</a:t>
             </a:r>
             <a:endParaRPr lang="en-US" sz="1050" dirty="0">
               <a:latin typeface="DM Sans 14pt" pitchFamily="2" charset="77"/>
@@ -6365,14 +5949,14 @@
       </p:sp>
       <p:sp>
         <p:nvSpPr>
-          <p:cNvPr id="38" name="Text 36"/>
-          <p:cNvSpPr/>
-          <p:nvPr/>
-        </p:nvSpPr>
-        <p:spPr>
-          <a:xfrm>
-            <a:off x="609600" y="9753600"/>
-            <a:ext cx="2373511" cy="190500"/>
+          <p:cNvPr id="39" name="Text 37"/>
+          <p:cNvSpPr/>
+          <p:nvPr/>
+        </p:nvSpPr>
+        <p:spPr>
+          <a:xfrm>
+            <a:off x="17233255" y="9753600"/>
+            <a:ext cx="521345" cy="190500"/>
           </a:xfrm>
           <a:prstGeom prst="rect">
             <a:avLst/>
@@ -6400,896 +5984,9 @@
                 <a:ea typeface="Arial" pitchFamily="34" charset="-122"/>
                 <a:cs typeface="Arial" pitchFamily="34" charset="-120"/>
               </a:rPr>
-              <a:t>{{client_name}} · Advertising Report</a:t>
+              <a:t>05 / 07</a:t>
             </a:r>
             <a:endParaRPr lang="en-US" sz="1050" dirty="0">
-              <a:latin typeface="DM Sans 14pt" pitchFamily="2" charset="77"/>
-            </a:endParaRPr>
-          </a:p>
-        </p:txBody>
-      </p:sp>
-      <p:sp>
-        <p:nvSpPr>
-          <p:cNvPr id="39" name="Text 37"/>
-          <p:cNvSpPr/>
-          <p:nvPr/>
-        </p:nvSpPr>
-        <p:spPr>
-          <a:xfrm>
-            <a:off x="17233255" y="9753600"/>
-            <a:ext cx="521345" cy="190500"/>
-          </a:xfrm>
-          <a:prstGeom prst="rect">
-            <a:avLst/>
-          </a:prstGeom>
-          <a:noFill/>
-          <a:ln/>
-        </p:spPr>
-        <p:txBody>
-          <a:bodyPr wrap="square" lIns="25400" tIns="25400" rIns="25400" bIns="25400" rtlCol="0" anchor="t">
-            <a:normAutofit fontScale="85000" lnSpcReduction="10000"/>
-          </a:bodyPr>
-          <a:lstStyle/>
-          <a:p>
-            <a:pPr marL="0" indent="0" algn="l">
-              <a:buNone/>
-            </a:pPr>
-            <a:r>
-              <a:rPr lang="en-US" sz="1050" kern="0" spc="42" dirty="0">
-                <a:solidFill>
-                  <a:srgbClr val="111111">
-                    <a:alpha val="63000"/>
-                  </a:srgbClr>
-                </a:solidFill>
-                <a:latin typeface="DM Sans 14pt" pitchFamily="2" charset="77"/>
-                <a:ea typeface="Arial" pitchFamily="34" charset="-122"/>
-                <a:cs typeface="Arial" pitchFamily="34" charset="-120"/>
-              </a:rPr>
-              <a:t>05 / 07</a:t>
-            </a:r>
-            <a:endParaRPr lang="en-US" sz="1050" dirty="0">
-              <a:latin typeface="DM Sans 14pt" pitchFamily="2" charset="77"/>
-            </a:endParaRPr>
-          </a:p>
-        </p:txBody>
-      </p:sp>
-      <p:sp>
-        <p:nvSpPr>
-          <p:cNvPr id="40" name="Shape 6">
-            <a:extLst>
-              <a:ext uri="{FF2B5EF4-FFF2-40B4-BE49-F238E27FC236}">
-                <a16:creationId xmlns:a16="http://schemas.microsoft.com/office/drawing/2014/main" id="{CC3A9E5C-B88E-E185-8372-EE03F5A2B5D7}"/>
-              </a:ext>
-            </a:extLst>
-          </p:cNvPr>
-          <p:cNvSpPr/>
-          <p:nvPr/>
-        </p:nvSpPr>
-        <p:spPr>
-          <a:xfrm>
-            <a:off x="762000" y="1847850"/>
-            <a:ext cx="2767997" cy="723900"/>
-          </a:xfrm>
-          <a:prstGeom prst="roundRect">
-            <a:avLst/>
-          </a:prstGeom>
-          <a:solidFill>
-            <a:srgbClr val="643791"/>
-          </a:solidFill>
-          <a:ln/>
-        </p:spPr>
-        <p:txBody>
-          <a:bodyPr/>
-          <a:lstStyle/>
-          <a:p>
-            <a:endParaRPr lang="en-GB">
-              <a:latin typeface="DM Sans 14pt" pitchFamily="2" charset="77"/>
-            </a:endParaRPr>
-          </a:p>
-        </p:txBody>
-      </p:sp>
-      <p:sp>
-        <p:nvSpPr>
-          <p:cNvPr id="41" name="Shape 7">
-            <a:extLst>
-              <a:ext uri="{FF2B5EF4-FFF2-40B4-BE49-F238E27FC236}">
-                <a16:creationId xmlns:a16="http://schemas.microsoft.com/office/drawing/2014/main" id="{2836D9AC-24FD-DBDE-86B8-01457B5CE080}"/>
-              </a:ext>
-            </a:extLst>
-          </p:cNvPr>
-          <p:cNvSpPr/>
-          <p:nvPr/>
-        </p:nvSpPr>
-        <p:spPr>
-          <a:xfrm>
-            <a:off x="915592" y="1981200"/>
-            <a:ext cx="1449807" cy="214313"/>
-          </a:xfrm>
-          <a:prstGeom prst="roundRect">
-            <a:avLst>
-              <a:gd name="adj" fmla="val 17778"/>
-            </a:avLst>
-          </a:prstGeom>
-          <a:solidFill>
-            <a:srgbClr val="FFFFFF">
-              <a:alpha val="15000"/>
-            </a:srgbClr>
-          </a:solidFill>
-          <a:ln/>
-        </p:spPr>
-        <p:txBody>
-          <a:bodyPr/>
-          <a:lstStyle/>
-          <a:p>
-            <a:endParaRPr lang="en-GB">
-              <a:latin typeface="DM Sans 14pt" pitchFamily="2" charset="77"/>
-            </a:endParaRPr>
-          </a:p>
-        </p:txBody>
-      </p:sp>
-      <p:sp>
-        <p:nvSpPr>
-          <p:cNvPr id="42" name="Text 8">
-            <a:extLst>
-              <a:ext uri="{FF2B5EF4-FFF2-40B4-BE49-F238E27FC236}">
-                <a16:creationId xmlns:a16="http://schemas.microsoft.com/office/drawing/2014/main" id="{8AFAD58A-4779-D711-EF93-CF70613B8328}"/>
-              </a:ext>
-            </a:extLst>
-          </p:cNvPr>
-          <p:cNvSpPr/>
-          <p:nvPr/>
-        </p:nvSpPr>
-        <p:spPr>
-          <a:xfrm>
-            <a:off x="915591" y="1904918"/>
-            <a:ext cx="1886042" cy="314325"/>
-          </a:xfrm>
-          <a:prstGeom prst="rect">
-            <a:avLst/>
-          </a:prstGeom>
-          <a:noFill/>
-          <a:ln/>
-        </p:spPr>
-        <p:txBody>
-          <a:bodyPr wrap="square" lIns="25400" tIns="25400" rIns="25400" bIns="25400" rtlCol="0" anchor="t">
-            <a:noAutofit/>
-          </a:bodyPr>
-          <a:lstStyle/>
-          <a:p>
-            <a:pPr marL="0" indent="0" algn="l">
-              <a:lnSpc>
-                <a:spcPct val="110000"/>
-              </a:lnSpc>
-              <a:buNone/>
-            </a:pPr>
-            <a:r>
-              <a:rPr lang="en-US" sz="1400" kern="0" spc="-67" dirty="0">
-                <a:solidFill>
-                  <a:srgbClr val="FFFFFF"/>
-                </a:solidFill>
-                <a:latin typeface="DM Sans 14pt" pitchFamily="2" charset="77"/>
-                <a:ea typeface="Arial" pitchFamily="34" charset="-122"/>
-                <a:cs typeface="Arial" pitchFamily="34" charset="-120"/>
-              </a:rPr>
-              <a:t>{{stat_total_jobs}}</a:t>
-            </a:r>
-            <a:endParaRPr lang="en-US" sz="1400" dirty="0">
-              <a:latin typeface="DM Sans 14pt" pitchFamily="2" charset="77"/>
-            </a:endParaRPr>
-          </a:p>
-        </p:txBody>
-      </p:sp>
-      <p:sp>
-        <p:nvSpPr>
-          <p:cNvPr id="43" name="Shape 10">
-            <a:extLst>
-              <a:ext uri="{FF2B5EF4-FFF2-40B4-BE49-F238E27FC236}">
-                <a16:creationId xmlns:a16="http://schemas.microsoft.com/office/drawing/2014/main" id="{9192B9F2-E9FB-1E01-247F-21B731030822}"/>
-              </a:ext>
-            </a:extLst>
-          </p:cNvPr>
-          <p:cNvSpPr/>
-          <p:nvPr/>
-        </p:nvSpPr>
-        <p:spPr>
-          <a:xfrm>
-            <a:off x="3751854" y="1847850"/>
-            <a:ext cx="2767998" cy="723900"/>
-          </a:xfrm>
-          <a:prstGeom prst="roundRect">
-            <a:avLst/>
-          </a:prstGeom>
-          <a:solidFill>
-            <a:srgbClr val="E5FF6E"/>
-          </a:solidFill>
-          <a:ln/>
-        </p:spPr>
-        <p:txBody>
-          <a:bodyPr/>
-          <a:lstStyle/>
-          <a:p>
-            <a:endParaRPr lang="en-GB">
-              <a:latin typeface="DM Sans 14pt" pitchFamily="2" charset="77"/>
-            </a:endParaRPr>
-          </a:p>
-        </p:txBody>
-      </p:sp>
-      <p:sp>
-        <p:nvSpPr>
-          <p:cNvPr id="44" name="Text 11">
-            <a:extLst>
-              <a:ext uri="{FF2B5EF4-FFF2-40B4-BE49-F238E27FC236}">
-                <a16:creationId xmlns:a16="http://schemas.microsoft.com/office/drawing/2014/main" id="{30CA462F-47A2-539D-4291-F1CD13DCC540}"/>
-              </a:ext>
-            </a:extLst>
-          </p:cNvPr>
-          <p:cNvSpPr/>
-          <p:nvPr/>
-        </p:nvSpPr>
-        <p:spPr>
-          <a:xfrm>
-            <a:off x="3905446" y="1933575"/>
-            <a:ext cx="208924" cy="409575"/>
-          </a:xfrm>
-          <a:prstGeom prst="rect">
-            <a:avLst/>
-          </a:prstGeom>
-          <a:noFill/>
-          <a:ln/>
-        </p:spPr>
-        <p:txBody>
-          <a:bodyPr wrap="square" lIns="0" tIns="0" rIns="0" bIns="0" rtlCol="0" anchor="t">
-            <a:normAutofit/>
-          </a:bodyPr>
-          <a:lstStyle/>
-          <a:p>
-            <a:pPr marL="0" indent="0" algn="l">
-              <a:lnSpc>
-                <a:spcPct val="100000"/>
-              </a:lnSpc>
-              <a:buNone/>
-            </a:pPr>
-            <a:r>
-              <a:rPr lang="en-US" sz="2250" b="1" kern="0" spc="-67" dirty="0">
-                <a:solidFill>
-                  <a:srgbClr val="240F45"/>
-                </a:solidFill>
-                <a:latin typeface="DM Sans 14pt" pitchFamily="2" charset="77"/>
-                <a:ea typeface="Arial" pitchFamily="34" charset="-122"/>
-                <a:cs typeface="Arial" pitchFamily="34" charset="-120"/>
-              </a:rPr>
-              <a:t>+</a:t>
-            </a:r>
-            <a:endParaRPr lang="en-US" sz="2250" dirty="0">
-              <a:latin typeface="DM Sans 14pt" pitchFamily="2" charset="77"/>
-            </a:endParaRPr>
-          </a:p>
-        </p:txBody>
-      </p:sp>
-      <p:sp>
-        <p:nvSpPr>
-          <p:cNvPr id="45" name="Shape 12">
-            <a:extLst>
-              <a:ext uri="{FF2B5EF4-FFF2-40B4-BE49-F238E27FC236}">
-                <a16:creationId xmlns:a16="http://schemas.microsoft.com/office/drawing/2014/main" id="{E8EC669E-B281-D005-F716-5E6DA02F3AF4}"/>
-              </a:ext>
-            </a:extLst>
-          </p:cNvPr>
-          <p:cNvSpPr/>
-          <p:nvPr/>
-        </p:nvSpPr>
-        <p:spPr>
-          <a:xfrm>
-            <a:off x="4080238" y="2016919"/>
-            <a:ext cx="2140978" cy="214313"/>
-          </a:xfrm>
-          <a:prstGeom prst="roundRect">
-            <a:avLst>
-              <a:gd name="adj" fmla="val 17778"/>
-            </a:avLst>
-          </a:prstGeom>
-          <a:solidFill>
-            <a:srgbClr val="000000">
-              <a:alpha val="8000"/>
-            </a:srgbClr>
-          </a:solidFill>
-          <a:ln/>
-        </p:spPr>
-        <p:txBody>
-          <a:bodyPr/>
-          <a:lstStyle/>
-          <a:p>
-            <a:endParaRPr lang="en-GB">
-              <a:latin typeface="DM Sans 14pt" pitchFamily="2" charset="77"/>
-            </a:endParaRPr>
-          </a:p>
-        </p:txBody>
-      </p:sp>
-      <p:sp>
-        <p:nvSpPr>
-          <p:cNvPr id="46" name="Text 13">
-            <a:extLst>
-              <a:ext uri="{FF2B5EF4-FFF2-40B4-BE49-F238E27FC236}">
-                <a16:creationId xmlns:a16="http://schemas.microsoft.com/office/drawing/2014/main" id="{2F73C7D4-3186-84A0-40C8-8F61C92D93B1}"/>
-              </a:ext>
-            </a:extLst>
-          </p:cNvPr>
-          <p:cNvSpPr/>
-          <p:nvPr/>
-        </p:nvSpPr>
-        <p:spPr>
-          <a:xfrm>
-            <a:off x="4148502" y="1949450"/>
-            <a:ext cx="2072714" cy="393700"/>
-          </a:xfrm>
-          <a:prstGeom prst="rect">
-            <a:avLst/>
-          </a:prstGeom>
-          <a:noFill/>
-          <a:ln/>
-        </p:spPr>
-        <p:txBody>
-          <a:bodyPr wrap="square" lIns="25400" tIns="25400" rIns="25400" bIns="25400" rtlCol="0" anchor="t">
-            <a:normAutofit fontScale="85000" lnSpcReduction="10000"/>
-          </a:bodyPr>
-          <a:lstStyle/>
-          <a:p>
-            <a:pPr>
-              <a:lnSpc>
-                <a:spcPct val="110000"/>
-              </a:lnSpc>
-            </a:pPr>
-            <a:r>
-              <a:rPr lang="en-GB" dirty="0">
-                <a:latin typeface="DM Sans 14pt" pitchFamily="2" charset="77"/>
-              </a:rPr>
-              <a:t>{{</a:t>
-            </a:r>
-            <a:r>
-              <a:rPr lang="en-GB" dirty="0" err="1">
-                <a:latin typeface="DM Sans 14pt" pitchFamily="2" charset="77"/>
-              </a:rPr>
-              <a:t>stat_cost_per_job</a:t>
-            </a:r>
-            <a:r>
-              <a:rPr lang="en-GB" dirty="0">
-                <a:latin typeface="DM Sans 14pt" pitchFamily="2" charset="77"/>
-              </a:rPr>
-              <a:t>}}</a:t>
-            </a:r>
-            <a:endParaRPr lang="en-US" sz="1125" dirty="0">
-              <a:latin typeface="DM Sans 14pt" pitchFamily="2" charset="77"/>
-            </a:endParaRPr>
-          </a:p>
-        </p:txBody>
-      </p:sp>
-      <p:sp>
-        <p:nvSpPr>
-          <p:cNvPr id="48" name="Shape 16">
-            <a:extLst>
-              <a:ext uri="{FF2B5EF4-FFF2-40B4-BE49-F238E27FC236}">
-                <a16:creationId xmlns:a16="http://schemas.microsoft.com/office/drawing/2014/main" id="{9F8B3AB7-9523-34C1-645F-B8C4D2A44E0B}"/>
-              </a:ext>
-            </a:extLst>
-          </p:cNvPr>
-          <p:cNvSpPr/>
-          <p:nvPr/>
-        </p:nvSpPr>
-        <p:spPr>
-          <a:xfrm>
-            <a:off x="6741707" y="1847850"/>
-            <a:ext cx="2762457" cy="723900"/>
-          </a:xfrm>
-          <a:prstGeom prst="roundRect">
-            <a:avLst/>
-          </a:prstGeom>
-          <a:solidFill>
-            <a:srgbClr val="643791"/>
-          </a:solidFill>
-          <a:ln/>
-        </p:spPr>
-        <p:txBody>
-          <a:bodyPr/>
-          <a:lstStyle/>
-          <a:p>
-            <a:endParaRPr lang="en-GB">
-              <a:latin typeface="DM Sans 14pt" pitchFamily="2" charset="77"/>
-            </a:endParaRPr>
-          </a:p>
-        </p:txBody>
-      </p:sp>
-      <p:sp>
-        <p:nvSpPr>
-          <p:cNvPr id="49" name="Shape 17">
-            <a:extLst>
-              <a:ext uri="{FF2B5EF4-FFF2-40B4-BE49-F238E27FC236}">
-                <a16:creationId xmlns:a16="http://schemas.microsoft.com/office/drawing/2014/main" id="{2298B627-B84D-2E7B-AE52-3CECED5E4F0E}"/>
-              </a:ext>
-            </a:extLst>
-          </p:cNvPr>
-          <p:cNvSpPr/>
-          <p:nvPr/>
-        </p:nvSpPr>
-        <p:spPr>
-          <a:xfrm>
-            <a:off x="6895301" y="2016919"/>
-            <a:ext cx="2002716" cy="214313"/>
-          </a:xfrm>
-          <a:prstGeom prst="roundRect">
-            <a:avLst>
-              <a:gd name="adj" fmla="val 17778"/>
-            </a:avLst>
-          </a:prstGeom>
-          <a:solidFill>
-            <a:srgbClr val="FFFFFF">
-              <a:alpha val="15000"/>
-            </a:srgbClr>
-          </a:solidFill>
-          <a:ln/>
-        </p:spPr>
-        <p:txBody>
-          <a:bodyPr/>
-          <a:lstStyle/>
-          <a:p>
-            <a:endParaRPr lang="en-GB">
-              <a:latin typeface="DM Sans 14pt" pitchFamily="2" charset="77"/>
-            </a:endParaRPr>
-          </a:p>
-        </p:txBody>
-      </p:sp>
-      <p:sp>
-        <p:nvSpPr>
-          <p:cNvPr id="50" name="Text 18">
-            <a:extLst>
-              <a:ext uri="{FF2B5EF4-FFF2-40B4-BE49-F238E27FC236}">
-                <a16:creationId xmlns:a16="http://schemas.microsoft.com/office/drawing/2014/main" id="{C3B1C651-D76C-3D27-08A2-7C8E9CBAFBD7}"/>
-              </a:ext>
-            </a:extLst>
-          </p:cNvPr>
-          <p:cNvSpPr/>
-          <p:nvPr/>
-        </p:nvSpPr>
-        <p:spPr>
-          <a:xfrm>
-            <a:off x="6963564" y="1949450"/>
-            <a:ext cx="1934452" cy="374650"/>
-          </a:xfrm>
-          <a:prstGeom prst="rect">
-            <a:avLst/>
-          </a:prstGeom>
-          <a:noFill/>
-          <a:ln/>
-        </p:spPr>
-        <p:txBody>
-          <a:bodyPr wrap="square" lIns="25400" tIns="25400" rIns="25400" bIns="25400" rtlCol="0" anchor="t">
-            <a:normAutofit fontScale="70000" lnSpcReduction="20000"/>
-          </a:bodyPr>
-          <a:lstStyle/>
-          <a:p>
-            <a:pPr>
-              <a:lnSpc>
-                <a:spcPct val="110000"/>
-              </a:lnSpc>
-            </a:pPr>
-            <a:r>
-              <a:rPr lang="en-GB" dirty="0">
-                <a:solidFill>
-                  <a:schemeClr val="bg1"/>
-                </a:solidFill>
-                <a:latin typeface="DM Sans 14pt" pitchFamily="2" charset="77"/>
-              </a:rPr>
-              <a:t>{{</a:t>
-            </a:r>
-            <a:r>
-              <a:rPr lang="en-GB" dirty="0" err="1">
-                <a:solidFill>
-                  <a:schemeClr val="bg1"/>
-                </a:solidFill>
-                <a:latin typeface="DM Sans 14pt" pitchFamily="2" charset="77"/>
-              </a:rPr>
-              <a:t>stat_cost_per_view</a:t>
-            </a:r>
-            <a:r>
-              <a:rPr lang="en-GB" dirty="0">
-                <a:solidFill>
-                  <a:schemeClr val="bg1"/>
-                </a:solidFill>
-                <a:latin typeface="DM Sans 14pt" pitchFamily="2" charset="77"/>
-              </a:rPr>
-              <a:t>}}</a:t>
-            </a:r>
-            <a:endParaRPr lang="en-US" sz="1125" dirty="0">
-              <a:solidFill>
-                <a:schemeClr val="bg1"/>
-              </a:solidFill>
-              <a:latin typeface="DM Sans 14pt" pitchFamily="2" charset="77"/>
-            </a:endParaRPr>
-          </a:p>
-        </p:txBody>
-      </p:sp>
-      <p:sp>
-        <p:nvSpPr>
-          <p:cNvPr id="52" name="Text 20">
-            <a:extLst>
-              <a:ext uri="{FF2B5EF4-FFF2-40B4-BE49-F238E27FC236}">
-                <a16:creationId xmlns:a16="http://schemas.microsoft.com/office/drawing/2014/main" id="{63CBE318-EEF2-7156-C72F-2878779B5DD4}"/>
-              </a:ext>
-            </a:extLst>
-          </p:cNvPr>
-          <p:cNvSpPr/>
-          <p:nvPr/>
-        </p:nvSpPr>
-        <p:spPr>
-          <a:xfrm>
-            <a:off x="6895301" y="2324100"/>
-            <a:ext cx="2863967" cy="152400"/>
-          </a:xfrm>
-          <a:prstGeom prst="rect">
-            <a:avLst/>
-          </a:prstGeom>
-          <a:noFill/>
-          <a:ln/>
-        </p:spPr>
-        <p:txBody>
-          <a:bodyPr wrap="square" lIns="25400" tIns="25400" rIns="25400" bIns="25400" rtlCol="0" anchor="t">
-            <a:normAutofit fontScale="85000" lnSpcReduction="10000"/>
-          </a:bodyPr>
-          <a:lstStyle/>
-          <a:p>
-            <a:pPr marL="0" indent="0" algn="l">
-              <a:buNone/>
-            </a:pPr>
-            <a:r>
-              <a:rPr lang="en-US" sz="825" kern="0" spc="182" dirty="0">
-                <a:solidFill>
-                  <a:srgbClr val="FFFFFF">
-                    <a:alpha val="85000"/>
-                  </a:srgbClr>
-                </a:solidFill>
-                <a:latin typeface="DM Sans 14pt" pitchFamily="2" charset="77"/>
-                <a:ea typeface="Arial" pitchFamily="34" charset="-122"/>
-                <a:cs typeface="Arial" pitchFamily="34" charset="-120"/>
-              </a:rPr>
-              <a:t>COST PER VIEW</a:t>
-            </a:r>
-            <a:endParaRPr lang="en-US" sz="825" dirty="0">
-              <a:latin typeface="DM Sans 14pt" pitchFamily="2" charset="77"/>
-            </a:endParaRPr>
-          </a:p>
-        </p:txBody>
-      </p:sp>
-      <p:sp>
-        <p:nvSpPr>
-          <p:cNvPr id="53" name="Shape 10">
-            <a:extLst>
-              <a:ext uri="{FF2B5EF4-FFF2-40B4-BE49-F238E27FC236}">
-                <a16:creationId xmlns:a16="http://schemas.microsoft.com/office/drawing/2014/main" id="{57A6C571-1EC7-020A-154F-EC030A036EA9}"/>
-              </a:ext>
-            </a:extLst>
-          </p:cNvPr>
-          <p:cNvSpPr/>
-          <p:nvPr/>
-        </p:nvSpPr>
-        <p:spPr>
-          <a:xfrm>
-            <a:off x="9698935" y="1847850"/>
-            <a:ext cx="2767998" cy="723900"/>
-          </a:xfrm>
-          <a:prstGeom prst="roundRect">
-            <a:avLst/>
-          </a:prstGeom>
-          <a:solidFill>
-            <a:srgbClr val="E5FF6E"/>
-          </a:solidFill>
-          <a:ln/>
-        </p:spPr>
-        <p:txBody>
-          <a:bodyPr/>
-          <a:lstStyle/>
-          <a:p>
-            <a:endParaRPr lang="en-GB">
-              <a:latin typeface="DM Sans 14pt" pitchFamily="2" charset="77"/>
-            </a:endParaRPr>
-          </a:p>
-        </p:txBody>
-      </p:sp>
-      <p:sp>
-        <p:nvSpPr>
-          <p:cNvPr id="54" name="Text 11">
-            <a:extLst>
-              <a:ext uri="{FF2B5EF4-FFF2-40B4-BE49-F238E27FC236}">
-                <a16:creationId xmlns:a16="http://schemas.microsoft.com/office/drawing/2014/main" id="{94D51E3C-6092-E7D7-C249-4FF59454B526}"/>
-              </a:ext>
-            </a:extLst>
-          </p:cNvPr>
-          <p:cNvSpPr/>
-          <p:nvPr/>
-        </p:nvSpPr>
-        <p:spPr>
-          <a:xfrm>
-            <a:off x="9852530" y="1933575"/>
-            <a:ext cx="208924" cy="409575"/>
-          </a:xfrm>
-          <a:prstGeom prst="rect">
-            <a:avLst/>
-          </a:prstGeom>
-          <a:noFill/>
-          <a:ln/>
-        </p:spPr>
-        <p:txBody>
-          <a:bodyPr wrap="square" lIns="0" tIns="0" rIns="0" bIns="0" rtlCol="0" anchor="t">
-            <a:normAutofit/>
-          </a:bodyPr>
-          <a:lstStyle/>
-          <a:p>
-            <a:pPr marL="0" indent="0" algn="l">
-              <a:lnSpc>
-                <a:spcPct val="100000"/>
-              </a:lnSpc>
-              <a:buNone/>
-            </a:pPr>
-            <a:r>
-              <a:rPr lang="en-US" sz="2250" b="1" kern="0" spc="-67" dirty="0">
-                <a:solidFill>
-                  <a:srgbClr val="240F45"/>
-                </a:solidFill>
-                <a:latin typeface="DM Sans 14pt" pitchFamily="2" charset="77"/>
-                <a:ea typeface="Arial" pitchFamily="34" charset="-122"/>
-                <a:cs typeface="Arial" pitchFamily="34" charset="-120"/>
-              </a:rPr>
-              <a:t>+</a:t>
-            </a:r>
-            <a:endParaRPr lang="en-US" sz="2250" dirty="0">
-              <a:latin typeface="DM Sans 14pt" pitchFamily="2" charset="77"/>
-            </a:endParaRPr>
-          </a:p>
-        </p:txBody>
-      </p:sp>
-      <p:sp>
-        <p:nvSpPr>
-          <p:cNvPr id="55" name="Shape 12">
-            <a:extLst>
-              <a:ext uri="{FF2B5EF4-FFF2-40B4-BE49-F238E27FC236}">
-                <a16:creationId xmlns:a16="http://schemas.microsoft.com/office/drawing/2014/main" id="{BBAEC2AE-31B6-408B-3044-63A60B8B67FC}"/>
-              </a:ext>
-            </a:extLst>
-          </p:cNvPr>
-          <p:cNvSpPr/>
-          <p:nvPr/>
-        </p:nvSpPr>
-        <p:spPr>
-          <a:xfrm>
-            <a:off x="10027322" y="2016919"/>
-            <a:ext cx="2140978" cy="214313"/>
-          </a:xfrm>
-          <a:prstGeom prst="roundRect">
-            <a:avLst>
-              <a:gd name="adj" fmla="val 17778"/>
-            </a:avLst>
-          </a:prstGeom>
-          <a:solidFill>
-            <a:srgbClr val="000000">
-              <a:alpha val="8000"/>
-            </a:srgbClr>
-          </a:solidFill>
-          <a:ln/>
-        </p:spPr>
-        <p:txBody>
-          <a:bodyPr/>
-          <a:lstStyle/>
-          <a:p>
-            <a:endParaRPr lang="en-GB">
-              <a:latin typeface="DM Sans 14pt" pitchFamily="2" charset="77"/>
-            </a:endParaRPr>
-          </a:p>
-        </p:txBody>
-      </p:sp>
-      <p:sp>
-        <p:nvSpPr>
-          <p:cNvPr id="56" name="Text 13">
-            <a:extLst>
-              <a:ext uri="{FF2B5EF4-FFF2-40B4-BE49-F238E27FC236}">
-                <a16:creationId xmlns:a16="http://schemas.microsoft.com/office/drawing/2014/main" id="{178D26F2-32CF-63D1-0AE3-7BAA3734AB74}"/>
-              </a:ext>
-            </a:extLst>
-          </p:cNvPr>
-          <p:cNvSpPr/>
-          <p:nvPr/>
-        </p:nvSpPr>
-        <p:spPr>
-          <a:xfrm>
-            <a:off x="10095586" y="1949450"/>
-            <a:ext cx="2072714" cy="393700"/>
-          </a:xfrm>
-          <a:prstGeom prst="rect">
-            <a:avLst/>
-          </a:prstGeom>
-          <a:noFill/>
-          <a:ln/>
-        </p:spPr>
-        <p:txBody>
-          <a:bodyPr wrap="square" lIns="25400" tIns="25400" rIns="25400" bIns="25400" rtlCol="0" anchor="t">
-            <a:normAutofit fontScale="70000" lnSpcReduction="20000"/>
-          </a:bodyPr>
-          <a:lstStyle/>
-          <a:p>
-            <a:pPr>
-              <a:lnSpc>
-                <a:spcPct val="110000"/>
-              </a:lnSpc>
-            </a:pPr>
-            <a:r>
-              <a:rPr lang="en-GB" dirty="0">
-                <a:latin typeface="DM Sans 14pt" pitchFamily="2" charset="77"/>
-              </a:rPr>
-              <a:t>{{</a:t>
-            </a:r>
-            <a:r>
-              <a:rPr lang="en-GB" dirty="0" err="1">
-                <a:latin typeface="DM Sans 14pt" pitchFamily="2" charset="77"/>
-              </a:rPr>
-              <a:t>stat_cost_per_apply</a:t>
-            </a:r>
-            <a:r>
-              <a:rPr lang="en-GB" dirty="0">
-                <a:latin typeface="DM Sans 14pt" pitchFamily="2" charset="77"/>
-              </a:rPr>
-              <a:t>}}</a:t>
-            </a:r>
-            <a:endParaRPr lang="en-US" sz="1125" dirty="0">
-              <a:latin typeface="DM Sans 14pt" pitchFamily="2" charset="77"/>
-            </a:endParaRPr>
-          </a:p>
-        </p:txBody>
-      </p:sp>
-      <p:sp>
-        <p:nvSpPr>
-          <p:cNvPr id="58" name="Text 15">
-            <a:extLst>
-              <a:ext uri="{FF2B5EF4-FFF2-40B4-BE49-F238E27FC236}">
-                <a16:creationId xmlns:a16="http://schemas.microsoft.com/office/drawing/2014/main" id="{9775CBD7-A12C-E553-E3CF-DE9BADCFFB83}"/>
-              </a:ext>
-            </a:extLst>
-          </p:cNvPr>
-          <p:cNvSpPr/>
-          <p:nvPr/>
-        </p:nvSpPr>
-        <p:spPr>
-          <a:xfrm>
-            <a:off x="3851225" y="2393157"/>
-            <a:ext cx="2890482" cy="152400"/>
-          </a:xfrm>
-          <a:prstGeom prst="rect">
-            <a:avLst/>
-          </a:prstGeom>
-          <a:noFill/>
-          <a:ln/>
-        </p:spPr>
-        <p:txBody>
-          <a:bodyPr wrap="square" lIns="25400" tIns="25400" rIns="25400" bIns="25400" rtlCol="0" anchor="t">
-            <a:normAutofit fontScale="85000" lnSpcReduction="10000"/>
-          </a:bodyPr>
-          <a:lstStyle/>
-          <a:p>
-            <a:pPr marL="0" indent="0" algn="l">
-              <a:buNone/>
-            </a:pPr>
-            <a:r>
-              <a:rPr lang="en-US" sz="825" kern="0" spc="182" dirty="0">
-                <a:solidFill>
-                  <a:srgbClr val="240F45">
-                    <a:alpha val="85000"/>
-                  </a:srgbClr>
-                </a:solidFill>
-                <a:latin typeface="DM Sans 14pt" pitchFamily="2" charset="77"/>
-                <a:ea typeface="Arial" pitchFamily="34" charset="-122"/>
-                <a:cs typeface="Arial" pitchFamily="34" charset="-120"/>
-              </a:rPr>
-              <a:t>COST PER JOB</a:t>
-            </a:r>
-            <a:endParaRPr lang="en-US" sz="825" dirty="0">
-              <a:latin typeface="DM Sans 14pt" pitchFamily="2" charset="77"/>
-            </a:endParaRPr>
-          </a:p>
-        </p:txBody>
-      </p:sp>
-      <p:sp>
-        <p:nvSpPr>
-          <p:cNvPr id="59" name="Text 9">
-            <a:extLst>
-              <a:ext uri="{FF2B5EF4-FFF2-40B4-BE49-F238E27FC236}">
-                <a16:creationId xmlns:a16="http://schemas.microsoft.com/office/drawing/2014/main" id="{51C4B41E-6F28-3706-46B1-33C7347B9EE7}"/>
-              </a:ext>
-            </a:extLst>
-          </p:cNvPr>
-          <p:cNvSpPr/>
-          <p:nvPr/>
-        </p:nvSpPr>
-        <p:spPr>
-          <a:xfrm>
-            <a:off x="888847" y="2252662"/>
-            <a:ext cx="2075319" cy="319088"/>
-          </a:xfrm>
-          <a:prstGeom prst="rect">
-            <a:avLst/>
-          </a:prstGeom>
-          <a:noFill/>
-          <a:ln/>
-        </p:spPr>
-        <p:txBody>
-          <a:bodyPr wrap="square" lIns="25400" tIns="25400" rIns="25400" bIns="25400" rtlCol="0" anchor="t">
-            <a:normAutofit/>
-          </a:bodyPr>
-          <a:lstStyle/>
-          <a:p>
-            <a:pPr marL="0" indent="0" algn="l">
-              <a:buNone/>
-            </a:pPr>
-            <a:r>
-              <a:rPr lang="en-US" sz="825" kern="0" spc="182" dirty="0">
-                <a:solidFill>
-                  <a:srgbClr val="FFFFFF">
-                    <a:alpha val="85000"/>
-                  </a:srgbClr>
-                </a:solidFill>
-                <a:latin typeface="DM Sans 14pt" pitchFamily="2" charset="77"/>
-                <a:ea typeface="Arial" pitchFamily="34" charset="-122"/>
-                <a:cs typeface="Arial" pitchFamily="34" charset="-120"/>
-              </a:rPr>
-              <a:t>JOBS ADVERTISED THIS PERIOD</a:t>
-            </a:r>
-            <a:endParaRPr lang="en-US" sz="825" dirty="0">
-              <a:latin typeface="DM Sans 14pt" pitchFamily="2" charset="77"/>
-            </a:endParaRPr>
-          </a:p>
-        </p:txBody>
-      </p:sp>
-      <p:sp>
-        <p:nvSpPr>
-          <p:cNvPr id="61" name="Text 15">
-            <a:extLst>
-              <a:ext uri="{FF2B5EF4-FFF2-40B4-BE49-F238E27FC236}">
-                <a16:creationId xmlns:a16="http://schemas.microsoft.com/office/drawing/2014/main" id="{03FF3443-5D4F-C6E1-7E90-F0F17F8319F8}"/>
-              </a:ext>
-            </a:extLst>
-          </p:cNvPr>
-          <p:cNvSpPr/>
-          <p:nvPr/>
-        </p:nvSpPr>
-        <p:spPr>
-          <a:xfrm>
-            <a:off x="9754649" y="2406650"/>
-            <a:ext cx="2890482" cy="152400"/>
-          </a:xfrm>
-          <a:prstGeom prst="rect">
-            <a:avLst/>
-          </a:prstGeom>
-          <a:noFill/>
-          <a:ln/>
-        </p:spPr>
-        <p:txBody>
-          <a:bodyPr wrap="square" lIns="25400" tIns="25400" rIns="25400" bIns="25400" rtlCol="0" anchor="t">
-            <a:normAutofit fontScale="85000" lnSpcReduction="10000"/>
-          </a:bodyPr>
-          <a:lstStyle/>
-          <a:p>
-            <a:pPr marL="0" indent="0" algn="l">
-              <a:buNone/>
-            </a:pPr>
-            <a:r>
-              <a:rPr lang="en-US" sz="825" kern="0" spc="182" dirty="0">
-                <a:solidFill>
-                  <a:srgbClr val="240F45">
-                    <a:alpha val="85000"/>
-                  </a:srgbClr>
-                </a:solidFill>
-                <a:latin typeface="DM Sans 14pt" pitchFamily="2" charset="77"/>
-                <a:ea typeface="Arial" pitchFamily="34" charset="-122"/>
-                <a:cs typeface="Arial" pitchFamily="34" charset="-120"/>
-              </a:rPr>
-              <a:t>COST PER APPLY</a:t>
-            </a:r>
-            <a:endParaRPr lang="en-US" sz="825" dirty="0">
               <a:latin typeface="DM Sans 14pt" pitchFamily="2" charset="77"/>
             </a:endParaRPr>
           </a:p>
@@ -7333,46 +6030,9 @@
           <a:bodyPr/>
           <a:lstStyle/>
           <a:p>
-            <a:endParaRPr lang="en-GB">
-              <a:latin typeface="DM Sans 14pt" pitchFamily="2" charset="77"/>
-            </a:endParaRPr>
-          </a:p>
-        </p:txBody>
-      </p:sp>
-      <p:sp>
-        <p:nvSpPr>
-          <p:cNvPr id="8" name="Text 27">
-            <a:extLst>
-              <a:ext uri="{FF2B5EF4-FFF2-40B4-BE49-F238E27FC236}">
-                <a16:creationId xmlns:a16="http://schemas.microsoft.com/office/drawing/2014/main" id="{E3916DC2-DB39-47D8-75A9-BD1F5FA1D75B}"/>
-              </a:ext>
-            </a:extLst>
-          </p:cNvPr>
-          <p:cNvSpPr/>
-          <p:nvPr/>
-        </p:nvSpPr>
-        <p:spPr>
-          <a:xfrm>
-            <a:off x="3905446" y="3382171"/>
-            <a:ext cx="8349616" cy="5740808"/>
-          </a:xfrm>
-          <a:prstGeom prst="rect">
-            <a:avLst/>
-          </a:prstGeom>
-          <a:noFill/>
-          <a:ln/>
-        </p:spPr>
-        <p:txBody>
-          <a:bodyPr wrap="square" lIns="25400" tIns="25400" rIns="25400" bIns="25400" rtlCol="0" anchor="t">
-            <a:normAutofit/>
-          </a:bodyPr>
-          <a:lstStyle/>
-          <a:p>
-            <a:pPr marL="0" indent="0" algn="ctr">
-              <a:buNone/>
-            </a:pPr>
-            <a:r>
-              <a:rPr lang="en-US" sz="1650" kern="0" spc="30" dirty="0">
+            <a:pPr algn="ctr"/>
+            <a:r>
+              <a:rPr lang="en-US" kern="0" spc="30" dirty="0">
                 <a:solidFill>
                   <a:srgbClr val="240F45"/>
                 </a:solidFill>
@@ -7383,7 +6043,7 @@
               <a:t>{{</a:t>
             </a:r>
             <a:r>
-              <a:rPr lang="en-US" sz="1650" kern="0" spc="30" dirty="0" err="1">
+              <a:rPr lang="en-US" kern="0" spc="30" dirty="0" err="1">
                 <a:solidFill>
                   <a:srgbClr val="240F45"/>
                 </a:solidFill>
@@ -7394,7 +6054,7 @@
               <a:t>chart:cost_per_app_by_occupation</a:t>
             </a:r>
             <a:r>
-              <a:rPr lang="en-US" sz="1650" kern="0" spc="30" dirty="0">
+              <a:rPr lang="en-US" kern="0" spc="30" dirty="0">
                 <a:solidFill>
                   <a:srgbClr val="240F45"/>
                 </a:solidFill>
@@ -7404,58 +6064,7 @@
               </a:rPr>
               <a:t>}}</a:t>
             </a:r>
-            <a:endParaRPr lang="en-US" sz="1650" dirty="0">
-              <a:latin typeface="DM Sans 14pt" pitchFamily="2" charset="77"/>
-            </a:endParaRPr>
-          </a:p>
-        </p:txBody>
-      </p:sp>
-      <p:sp>
-        <p:nvSpPr>
-          <p:cNvPr id="9" name="Text 28">
-            <a:extLst>
-              <a:ext uri="{FF2B5EF4-FFF2-40B4-BE49-F238E27FC236}">
-                <a16:creationId xmlns:a16="http://schemas.microsoft.com/office/drawing/2014/main" id="{00E9CB72-1B10-A610-AE07-711C77F3054B}"/>
-              </a:ext>
-            </a:extLst>
-          </p:cNvPr>
-          <p:cNvSpPr/>
-          <p:nvPr/>
-        </p:nvSpPr>
-        <p:spPr>
-          <a:xfrm>
-            <a:off x="6590859" y="6161088"/>
-            <a:ext cx="2588521" cy="525462"/>
-          </a:xfrm>
-          <a:prstGeom prst="rect">
-            <a:avLst/>
-          </a:prstGeom>
-          <a:noFill/>
-          <a:ln/>
-        </p:spPr>
-        <p:txBody>
-          <a:bodyPr wrap="square" lIns="25400" tIns="25400" rIns="25400" bIns="25400" rtlCol="0" anchor="t">
-            <a:normAutofit/>
-          </a:bodyPr>
-          <a:lstStyle/>
-          <a:p>
-            <a:pPr marL="0" indent="0" algn="ctr">
-              <a:buNone/>
-            </a:pPr>
-            <a:r>
-              <a:rPr lang="en-US" sz="1050" kern="0" spc="84" dirty="0">
-                <a:solidFill>
-                  <a:srgbClr val="111111">
-                    <a:alpha val="63000"/>
-                  </a:srgbClr>
-                </a:solidFill>
-                <a:latin typeface="DM Sans 14pt" pitchFamily="2" charset="77"/>
-                <a:ea typeface="Arial" pitchFamily="34" charset="-122"/>
-                <a:cs typeface="Arial" pitchFamily="34" charset="-120"/>
-              </a:rPr>
-              <a:t>Cost per view · Cost per apply · by job type</a:t>
-            </a:r>
-            <a:endParaRPr lang="en-US" sz="1050" dirty="0">
+            <a:endParaRPr lang="en-US" dirty="0">
               <a:latin typeface="DM Sans 14pt" pitchFamily="2" charset="77"/>
             </a:endParaRPr>
           </a:p>
@@ -7934,6 +6543,770 @@
           </p:txBody>
         </p:sp>
       </p:grpSp>
+      <p:sp>
+        <p:nvSpPr>
+          <p:cNvPr id="31" name="Shape 6">
+            <a:extLst>
+              <a:ext uri="{FF2B5EF4-FFF2-40B4-BE49-F238E27FC236}">
+                <a16:creationId xmlns:a16="http://schemas.microsoft.com/office/drawing/2014/main" id="{09A0168B-F380-80A7-39A5-36B8F464A5FE}"/>
+              </a:ext>
+            </a:extLst>
+          </p:cNvPr>
+          <p:cNvSpPr/>
+          <p:nvPr/>
+        </p:nvSpPr>
+        <p:spPr>
+          <a:xfrm>
+            <a:off x="762000" y="1847850"/>
+            <a:ext cx="2767997" cy="723900"/>
+          </a:xfrm>
+          <a:prstGeom prst="roundRect">
+            <a:avLst/>
+          </a:prstGeom>
+          <a:solidFill>
+            <a:srgbClr val="643791"/>
+          </a:solidFill>
+          <a:ln/>
+        </p:spPr>
+        <p:txBody>
+          <a:bodyPr/>
+          <a:lstStyle/>
+          <a:p>
+            <a:pPr algn="r"/>
+            <a:r>
+              <a:rPr lang="en-US" sz="1050" kern="0" spc="182" dirty="0">
+                <a:solidFill>
+                  <a:srgbClr val="FFFFFF">
+                    <a:alpha val="85000"/>
+                  </a:srgbClr>
+                </a:solidFill>
+                <a:latin typeface="DM Sans 14pt" pitchFamily="2" charset="77"/>
+                <a:ea typeface="Arial" pitchFamily="34" charset="-122"/>
+                <a:cs typeface="Arial" pitchFamily="34" charset="-120"/>
+              </a:rPr>
+              <a:t>JOBS </a:t>
+            </a:r>
+          </a:p>
+          <a:p>
+            <a:pPr algn="r"/>
+            <a:r>
+              <a:rPr lang="en-US" sz="1050" kern="0" spc="182" dirty="0">
+                <a:solidFill>
+                  <a:srgbClr val="FFFFFF">
+                    <a:alpha val="85000"/>
+                  </a:srgbClr>
+                </a:solidFill>
+                <a:latin typeface="DM Sans 14pt" pitchFamily="2" charset="77"/>
+                <a:ea typeface="Arial" pitchFamily="34" charset="-122"/>
+                <a:cs typeface="Arial" pitchFamily="34" charset="-120"/>
+              </a:rPr>
+              <a:t>ADVERTISED </a:t>
+            </a:r>
+          </a:p>
+          <a:p>
+            <a:pPr algn="r"/>
+            <a:r>
+              <a:rPr lang="en-US" sz="1050" kern="0" spc="182" dirty="0">
+                <a:solidFill>
+                  <a:srgbClr val="FFFFFF">
+                    <a:alpha val="85000"/>
+                  </a:srgbClr>
+                </a:solidFill>
+                <a:latin typeface="DM Sans 14pt" pitchFamily="2" charset="77"/>
+                <a:ea typeface="Arial" pitchFamily="34" charset="-122"/>
+                <a:cs typeface="Arial" pitchFamily="34" charset="-120"/>
+              </a:rPr>
+              <a:t>THIS PERIOD</a:t>
+            </a:r>
+            <a:endParaRPr lang="en-US" sz="1050" dirty="0">
+              <a:latin typeface="DM Sans 14pt" pitchFamily="2" charset="77"/>
+            </a:endParaRPr>
+          </a:p>
+        </p:txBody>
+      </p:sp>
+      <p:sp>
+        <p:nvSpPr>
+          <p:cNvPr id="32" name="Shape 7">
+            <a:extLst>
+              <a:ext uri="{FF2B5EF4-FFF2-40B4-BE49-F238E27FC236}">
+                <a16:creationId xmlns:a16="http://schemas.microsoft.com/office/drawing/2014/main" id="{F6C7FAF3-554C-2106-11D3-A3E13AF10E91}"/>
+              </a:ext>
+            </a:extLst>
+          </p:cNvPr>
+          <p:cNvSpPr/>
+          <p:nvPr/>
+        </p:nvSpPr>
+        <p:spPr>
+          <a:xfrm>
+            <a:off x="811592" y="1906638"/>
+            <a:ext cx="1281704" cy="602293"/>
+          </a:xfrm>
+          <a:prstGeom prst="roundRect">
+            <a:avLst>
+              <a:gd name="adj" fmla="val 17778"/>
+            </a:avLst>
+          </a:prstGeom>
+          <a:solidFill>
+            <a:srgbClr val="FFFFFF">
+              <a:alpha val="15000"/>
+            </a:srgbClr>
+          </a:solidFill>
+          <a:ln/>
+        </p:spPr>
+        <p:txBody>
+          <a:bodyPr/>
+          <a:lstStyle/>
+          <a:p>
+            <a:r>
+              <a:rPr lang="en-US" kern="0" spc="-67" dirty="0">
+                <a:solidFill>
+                  <a:srgbClr val="FFFFFF"/>
+                </a:solidFill>
+                <a:latin typeface="DM Sans 14pt" pitchFamily="2" charset="77"/>
+                <a:ea typeface="Arial" pitchFamily="34" charset="-122"/>
+                <a:cs typeface="Arial" pitchFamily="34" charset="-120"/>
+              </a:rPr>
+              <a:t>{{</a:t>
+            </a:r>
+            <a:r>
+              <a:rPr lang="en-US" kern="0" spc="-67" dirty="0" err="1">
+                <a:solidFill>
+                  <a:srgbClr val="FFFFFF"/>
+                </a:solidFill>
+                <a:latin typeface="DM Sans 14pt" pitchFamily="2" charset="77"/>
+                <a:ea typeface="Arial" pitchFamily="34" charset="-122"/>
+                <a:cs typeface="Arial" pitchFamily="34" charset="-120"/>
+              </a:rPr>
+              <a:t>stat_total_jobs</a:t>
+            </a:r>
+            <a:r>
+              <a:rPr lang="en-US" kern="0" spc="-67" dirty="0">
+                <a:solidFill>
+                  <a:srgbClr val="FFFFFF"/>
+                </a:solidFill>
+                <a:latin typeface="DM Sans 14pt" pitchFamily="2" charset="77"/>
+                <a:ea typeface="Arial" pitchFamily="34" charset="-122"/>
+                <a:cs typeface="Arial" pitchFamily="34" charset="-120"/>
+              </a:rPr>
+              <a:t>}}</a:t>
+            </a:r>
+            <a:endParaRPr lang="en-US" dirty="0">
+              <a:latin typeface="DM Sans 14pt" pitchFamily="2" charset="77"/>
+            </a:endParaRPr>
+          </a:p>
+        </p:txBody>
+      </p:sp>
+      <p:sp>
+        <p:nvSpPr>
+          <p:cNvPr id="33" name="Shape 6">
+            <a:extLst>
+              <a:ext uri="{FF2B5EF4-FFF2-40B4-BE49-F238E27FC236}">
+                <a16:creationId xmlns:a16="http://schemas.microsoft.com/office/drawing/2014/main" id="{94E35CDC-E6D9-1C8A-2FF0-8C32B865FB4F}"/>
+              </a:ext>
+            </a:extLst>
+          </p:cNvPr>
+          <p:cNvSpPr/>
+          <p:nvPr/>
+        </p:nvSpPr>
+        <p:spPr>
+          <a:xfrm>
+            <a:off x="3778940" y="1847850"/>
+            <a:ext cx="2767997" cy="723900"/>
+          </a:xfrm>
+          <a:prstGeom prst="roundRect">
+            <a:avLst/>
+          </a:prstGeom>
+          <a:solidFill>
+            <a:srgbClr val="E6FF6E"/>
+          </a:solidFill>
+          <a:ln/>
+        </p:spPr>
+        <p:txBody>
+          <a:bodyPr/>
+          <a:lstStyle/>
+          <a:p>
+            <a:pPr algn="r"/>
+            <a:r>
+              <a:rPr lang="en-US" sz="1050" kern="0" spc="182" dirty="0">
+                <a:latin typeface="DM Sans 14pt" pitchFamily="2" charset="77"/>
+                <a:ea typeface="Arial" pitchFamily="34" charset="-122"/>
+                <a:cs typeface="Arial" pitchFamily="34" charset="-120"/>
+              </a:rPr>
+              <a:t>COST PER </a:t>
+            </a:r>
+            <a:br>
+              <a:rPr lang="en-US" sz="1050" kern="0" spc="182" dirty="0">
+                <a:latin typeface="DM Sans 14pt" pitchFamily="2" charset="77"/>
+                <a:ea typeface="Arial" pitchFamily="34" charset="-122"/>
+                <a:cs typeface="Arial" pitchFamily="34" charset="-120"/>
+              </a:rPr>
+            </a:br>
+            <a:r>
+              <a:rPr lang="en-US" sz="1050" kern="0" spc="182" dirty="0">
+                <a:latin typeface="DM Sans 14pt" pitchFamily="2" charset="77"/>
+                <a:ea typeface="Arial" pitchFamily="34" charset="-122"/>
+                <a:cs typeface="Arial" pitchFamily="34" charset="-120"/>
+              </a:rPr>
+              <a:t>JOB</a:t>
+            </a:r>
+            <a:endParaRPr lang="en-US" sz="1050" dirty="0">
+              <a:latin typeface="DM Sans 14pt" pitchFamily="2" charset="77"/>
+            </a:endParaRPr>
+          </a:p>
+        </p:txBody>
+      </p:sp>
+      <p:sp>
+        <p:nvSpPr>
+          <p:cNvPr id="34" name="Shape 7">
+            <a:extLst>
+              <a:ext uri="{FF2B5EF4-FFF2-40B4-BE49-F238E27FC236}">
+                <a16:creationId xmlns:a16="http://schemas.microsoft.com/office/drawing/2014/main" id="{87887C06-69D9-CF7F-C0DE-8E57574B2DF3}"/>
+              </a:ext>
+            </a:extLst>
+          </p:cNvPr>
+          <p:cNvSpPr/>
+          <p:nvPr/>
+        </p:nvSpPr>
+        <p:spPr>
+          <a:xfrm>
+            <a:off x="3828532" y="1906638"/>
+            <a:ext cx="1281704" cy="602293"/>
+          </a:xfrm>
+          <a:prstGeom prst="roundRect">
+            <a:avLst>
+              <a:gd name="adj" fmla="val 17778"/>
+            </a:avLst>
+          </a:prstGeom>
+          <a:solidFill>
+            <a:srgbClr val="D4EB66"/>
+          </a:solidFill>
+          <a:ln/>
+        </p:spPr>
+        <p:txBody>
+          <a:bodyPr/>
+          <a:lstStyle/>
+          <a:p>
+            <a:pPr>
+              <a:lnSpc>
+                <a:spcPct val="110000"/>
+              </a:lnSpc>
+            </a:pPr>
+            <a:r>
+              <a:rPr lang="en-GB" dirty="0">
+                <a:latin typeface="DM Sans 14pt" pitchFamily="2" charset="77"/>
+              </a:rPr>
+              <a:t>{{</a:t>
+            </a:r>
+            <a:r>
+              <a:rPr lang="en-GB" dirty="0" err="1">
+                <a:latin typeface="DM Sans 14pt" pitchFamily="2" charset="77"/>
+              </a:rPr>
+              <a:t>stat_cost_per_job</a:t>
+            </a:r>
+            <a:r>
+              <a:rPr lang="en-GB" dirty="0">
+                <a:latin typeface="DM Sans 14pt" pitchFamily="2" charset="77"/>
+              </a:rPr>
+              <a:t>}}</a:t>
+            </a:r>
+            <a:endParaRPr lang="en-US" sz="1125" dirty="0">
+              <a:latin typeface="DM Sans 14pt" pitchFamily="2" charset="77"/>
+            </a:endParaRPr>
+          </a:p>
+        </p:txBody>
+      </p:sp>
+      <p:sp>
+        <p:nvSpPr>
+          <p:cNvPr id="35" name="Shape 6">
+            <a:extLst>
+              <a:ext uri="{FF2B5EF4-FFF2-40B4-BE49-F238E27FC236}">
+                <a16:creationId xmlns:a16="http://schemas.microsoft.com/office/drawing/2014/main" id="{A5E31498-FA6D-09E3-AA19-F3987DD6FE78}"/>
+              </a:ext>
+            </a:extLst>
+          </p:cNvPr>
+          <p:cNvSpPr/>
+          <p:nvPr/>
+        </p:nvSpPr>
+        <p:spPr>
+          <a:xfrm>
+            <a:off x="6736167" y="1847850"/>
+            <a:ext cx="2767997" cy="723900"/>
+          </a:xfrm>
+          <a:prstGeom prst="roundRect">
+            <a:avLst/>
+          </a:prstGeom>
+          <a:solidFill>
+            <a:srgbClr val="643791"/>
+          </a:solidFill>
+          <a:ln/>
+        </p:spPr>
+        <p:txBody>
+          <a:bodyPr/>
+          <a:lstStyle/>
+          <a:p>
+            <a:pPr algn="r"/>
+            <a:r>
+              <a:rPr lang="en-US" sz="1050" kern="0" spc="182" dirty="0">
+                <a:solidFill>
+                  <a:srgbClr val="FFFFFF">
+                    <a:alpha val="85000"/>
+                  </a:srgbClr>
+                </a:solidFill>
+                <a:latin typeface="DM Sans 14pt" pitchFamily="2" charset="77"/>
+                <a:ea typeface="Arial" pitchFamily="34" charset="-122"/>
+                <a:cs typeface="Arial" pitchFamily="34" charset="-120"/>
+              </a:rPr>
+              <a:t>COST PER </a:t>
+            </a:r>
+            <a:br>
+              <a:rPr lang="en-US" sz="1050" kern="0" spc="182" dirty="0">
+                <a:solidFill>
+                  <a:srgbClr val="FFFFFF">
+                    <a:alpha val="85000"/>
+                  </a:srgbClr>
+                </a:solidFill>
+                <a:latin typeface="DM Sans 14pt" pitchFamily="2" charset="77"/>
+                <a:ea typeface="Arial" pitchFamily="34" charset="-122"/>
+                <a:cs typeface="Arial" pitchFamily="34" charset="-120"/>
+              </a:rPr>
+            </a:br>
+            <a:r>
+              <a:rPr lang="en-US" sz="1050" kern="0" spc="182" dirty="0">
+                <a:solidFill>
+                  <a:srgbClr val="FFFFFF">
+                    <a:alpha val="85000"/>
+                  </a:srgbClr>
+                </a:solidFill>
+                <a:latin typeface="DM Sans 14pt" pitchFamily="2" charset="77"/>
+                <a:ea typeface="Arial" pitchFamily="34" charset="-122"/>
+                <a:cs typeface="Arial" pitchFamily="34" charset="-120"/>
+              </a:rPr>
+              <a:t>VIEW</a:t>
+            </a:r>
+            <a:endParaRPr lang="en-US" sz="1050" dirty="0">
+              <a:latin typeface="DM Sans 14pt" pitchFamily="2" charset="77"/>
+            </a:endParaRPr>
+          </a:p>
+        </p:txBody>
+      </p:sp>
+      <p:sp>
+        <p:nvSpPr>
+          <p:cNvPr id="36" name="Shape 7">
+            <a:extLst>
+              <a:ext uri="{FF2B5EF4-FFF2-40B4-BE49-F238E27FC236}">
+                <a16:creationId xmlns:a16="http://schemas.microsoft.com/office/drawing/2014/main" id="{05796D16-C6C7-9826-FA3C-FAF8DCC80115}"/>
+              </a:ext>
+            </a:extLst>
+          </p:cNvPr>
+          <p:cNvSpPr/>
+          <p:nvPr/>
+        </p:nvSpPr>
+        <p:spPr>
+          <a:xfrm>
+            <a:off x="6785759" y="1906638"/>
+            <a:ext cx="1281704" cy="602293"/>
+          </a:xfrm>
+          <a:prstGeom prst="roundRect">
+            <a:avLst>
+              <a:gd name="adj" fmla="val 17778"/>
+            </a:avLst>
+          </a:prstGeom>
+          <a:solidFill>
+            <a:srgbClr val="FFFFFF">
+              <a:alpha val="15000"/>
+            </a:srgbClr>
+          </a:solidFill>
+          <a:ln/>
+        </p:spPr>
+        <p:txBody>
+          <a:bodyPr/>
+          <a:lstStyle/>
+          <a:p>
+            <a:r>
+              <a:rPr lang="en-GB" dirty="0">
+                <a:solidFill>
+                  <a:schemeClr val="bg1"/>
+                </a:solidFill>
+                <a:latin typeface="DM Sans 14pt" pitchFamily="2" charset="77"/>
+              </a:rPr>
+              <a:t>{{</a:t>
+            </a:r>
+            <a:r>
+              <a:rPr lang="en-GB" dirty="0" err="1">
+                <a:solidFill>
+                  <a:schemeClr val="bg1"/>
+                </a:solidFill>
+                <a:latin typeface="DM Sans 14pt" pitchFamily="2" charset="77"/>
+              </a:rPr>
+              <a:t>stat_cost_per_view</a:t>
+            </a:r>
+            <a:r>
+              <a:rPr lang="en-GB" dirty="0">
+                <a:solidFill>
+                  <a:schemeClr val="bg1"/>
+                </a:solidFill>
+                <a:latin typeface="DM Sans 14pt" pitchFamily="2" charset="77"/>
+              </a:rPr>
+              <a:t>}}</a:t>
+            </a:r>
+            <a:endParaRPr lang="en-US" sz="1125" dirty="0">
+              <a:solidFill>
+                <a:schemeClr val="bg1"/>
+              </a:solidFill>
+              <a:latin typeface="DM Sans 14pt" pitchFamily="2" charset="77"/>
+            </a:endParaRPr>
+          </a:p>
+        </p:txBody>
+      </p:sp>
+      <p:sp>
+        <p:nvSpPr>
+          <p:cNvPr id="37" name="Shape 6">
+            <a:extLst>
+              <a:ext uri="{FF2B5EF4-FFF2-40B4-BE49-F238E27FC236}">
+                <a16:creationId xmlns:a16="http://schemas.microsoft.com/office/drawing/2014/main" id="{68276EBA-110F-3411-194D-C9E8C43AE6CA}"/>
+              </a:ext>
+            </a:extLst>
+          </p:cNvPr>
+          <p:cNvSpPr/>
+          <p:nvPr/>
+        </p:nvSpPr>
+        <p:spPr>
+          <a:xfrm>
+            <a:off x="9750532" y="1849951"/>
+            <a:ext cx="2767997" cy="723900"/>
+          </a:xfrm>
+          <a:prstGeom prst="roundRect">
+            <a:avLst/>
+          </a:prstGeom>
+          <a:solidFill>
+            <a:srgbClr val="E6FF6E"/>
+          </a:solidFill>
+          <a:ln/>
+        </p:spPr>
+        <p:txBody>
+          <a:bodyPr/>
+          <a:lstStyle/>
+          <a:p>
+            <a:pPr algn="r"/>
+            <a:r>
+              <a:rPr lang="en-US" sz="1050" kern="0" spc="182" dirty="0">
+                <a:latin typeface="DM Sans 14pt" pitchFamily="2" charset="77"/>
+                <a:ea typeface="Arial" pitchFamily="34" charset="-122"/>
+                <a:cs typeface="Arial" pitchFamily="34" charset="-120"/>
+              </a:rPr>
+              <a:t>COST PER</a:t>
+            </a:r>
+            <a:br>
+              <a:rPr lang="en-US" sz="1050" kern="0" spc="182" dirty="0">
+                <a:latin typeface="DM Sans 14pt" pitchFamily="2" charset="77"/>
+                <a:ea typeface="Arial" pitchFamily="34" charset="-122"/>
+                <a:cs typeface="Arial" pitchFamily="34" charset="-120"/>
+              </a:rPr>
+            </a:br>
+            <a:r>
+              <a:rPr lang="en-US" sz="1050" kern="0" spc="182" dirty="0">
+                <a:latin typeface="DM Sans 14pt" pitchFamily="2" charset="77"/>
+                <a:ea typeface="Arial" pitchFamily="34" charset="-122"/>
+                <a:cs typeface="Arial" pitchFamily="34" charset="-120"/>
+              </a:rPr>
+              <a:t>APPLY</a:t>
+            </a:r>
+            <a:endParaRPr lang="en-US" sz="1050" dirty="0">
+              <a:latin typeface="DM Sans 14pt" pitchFamily="2" charset="77"/>
+            </a:endParaRPr>
+          </a:p>
+        </p:txBody>
+      </p:sp>
+      <p:sp>
+        <p:nvSpPr>
+          <p:cNvPr id="47" name="Shape 7">
+            <a:extLst>
+              <a:ext uri="{FF2B5EF4-FFF2-40B4-BE49-F238E27FC236}">
+                <a16:creationId xmlns:a16="http://schemas.microsoft.com/office/drawing/2014/main" id="{04BD443A-E607-4C46-2EF0-83A49510C3CC}"/>
+              </a:ext>
+            </a:extLst>
+          </p:cNvPr>
+          <p:cNvSpPr/>
+          <p:nvPr/>
+        </p:nvSpPr>
+        <p:spPr>
+          <a:xfrm>
+            <a:off x="9800124" y="1908739"/>
+            <a:ext cx="1281704" cy="602293"/>
+          </a:xfrm>
+          <a:prstGeom prst="roundRect">
+            <a:avLst>
+              <a:gd name="adj" fmla="val 17778"/>
+            </a:avLst>
+          </a:prstGeom>
+          <a:solidFill>
+            <a:srgbClr val="D4EB66"/>
+          </a:solidFill>
+          <a:ln/>
+        </p:spPr>
+        <p:txBody>
+          <a:bodyPr/>
+          <a:lstStyle/>
+          <a:p>
+            <a:pPr>
+              <a:lnSpc>
+                <a:spcPct val="110000"/>
+              </a:lnSpc>
+            </a:pPr>
+            <a:r>
+              <a:rPr lang="en-GB" dirty="0">
+                <a:latin typeface="DM Sans 14pt" pitchFamily="2" charset="77"/>
+              </a:rPr>
+              <a:t>{{</a:t>
+            </a:r>
+            <a:r>
+              <a:rPr lang="en-GB" dirty="0" err="1">
+                <a:latin typeface="DM Sans 14pt" pitchFamily="2" charset="77"/>
+              </a:rPr>
+              <a:t>stat_cost_per_apply</a:t>
+            </a:r>
+            <a:r>
+              <a:rPr lang="en-GB" dirty="0">
+                <a:latin typeface="DM Sans 14pt" pitchFamily="2" charset="77"/>
+              </a:rPr>
+              <a:t>}}</a:t>
+            </a:r>
+            <a:endParaRPr lang="en-US" sz="1125" dirty="0">
+              <a:latin typeface="DM Sans 14pt" pitchFamily="2" charset="77"/>
+            </a:endParaRPr>
+          </a:p>
+        </p:txBody>
+      </p:sp>
+      <p:sp>
+        <p:nvSpPr>
+          <p:cNvPr id="51" name="Rectangle 50">
+            <a:extLst>
+              <a:ext uri="{FF2B5EF4-FFF2-40B4-BE49-F238E27FC236}">
+                <a16:creationId xmlns:a16="http://schemas.microsoft.com/office/drawing/2014/main" id="{8A37FCBE-F906-AD3F-FED0-C40CB32166AF}"/>
+              </a:ext>
+            </a:extLst>
+          </p:cNvPr>
+          <p:cNvSpPr/>
+          <p:nvPr/>
+        </p:nvSpPr>
+        <p:spPr>
+          <a:xfrm>
+            <a:off x="888759" y="-535480"/>
+            <a:ext cx="2440558" cy="299438"/>
+          </a:xfrm>
+          <a:prstGeom prst="rect">
+            <a:avLst/>
+          </a:prstGeom>
+          <a:noFill/>
+          <a:ln>
+            <a:noFill/>
+          </a:ln>
+        </p:spPr>
+        <p:style>
+          <a:lnRef idx="2">
+            <a:schemeClr val="accent1">
+              <a:shade val="15000"/>
+            </a:schemeClr>
+          </a:lnRef>
+          <a:fillRef idx="1">
+            <a:schemeClr val="accent1"/>
+          </a:fillRef>
+          <a:effectRef idx="0">
+            <a:schemeClr val="accent1"/>
+          </a:effectRef>
+          <a:fontRef idx="minor">
+            <a:schemeClr val="lt1"/>
+          </a:fontRef>
+        </p:style>
+        <p:txBody>
+          <a:bodyPr lIns="0" tIns="0" rIns="0" bIns="0" rtlCol="0" anchor="ctr"/>
+          <a:lstStyle/>
+          <a:p>
+            <a:r>
+              <a:rPr lang="en-US" kern="0" spc="84" dirty="0">
+                <a:solidFill>
+                  <a:srgbClr val="111111">
+                    <a:alpha val="63000"/>
+                  </a:srgbClr>
+                </a:solidFill>
+                <a:latin typeface="DM Sans 14pt" pitchFamily="2" charset="77"/>
+                <a:ea typeface="Arial" pitchFamily="34" charset="-122"/>
+                <a:cs typeface="Arial" pitchFamily="34" charset="-120"/>
+              </a:rPr>
+              <a:t>Spent vs rate card</a:t>
+            </a:r>
+            <a:endParaRPr lang="en-US" dirty="0">
+              <a:latin typeface="DM Sans 14pt" pitchFamily="2" charset="77"/>
+            </a:endParaRPr>
+          </a:p>
+        </p:txBody>
+      </p:sp>
+      <p:sp>
+        <p:nvSpPr>
+          <p:cNvPr id="67" name="Text 25">
+            <a:extLst>
+              <a:ext uri="{FF2B5EF4-FFF2-40B4-BE49-F238E27FC236}">
+                <a16:creationId xmlns:a16="http://schemas.microsoft.com/office/drawing/2014/main" id="{1AA2F224-0D2A-A56F-924F-6668AFA3EC30}"/>
+              </a:ext>
+            </a:extLst>
+          </p:cNvPr>
+          <p:cNvSpPr/>
+          <p:nvPr/>
+        </p:nvSpPr>
+        <p:spPr>
+          <a:xfrm>
+            <a:off x="7854759" y="3004118"/>
+            <a:ext cx="3931965" cy="190500"/>
+          </a:xfrm>
+          <a:prstGeom prst="rect">
+            <a:avLst/>
+          </a:prstGeom>
+          <a:noFill/>
+          <a:ln/>
+        </p:spPr>
+        <p:txBody>
+          <a:bodyPr wrap="square" lIns="25400" tIns="25400" rIns="25400" bIns="25400" rtlCol="0" anchor="t">
+            <a:normAutofit fontScale="92500" lnSpcReduction="10000"/>
+          </a:bodyPr>
+          <a:lstStyle/>
+          <a:p>
+            <a:pPr marL="0" indent="0" algn="ctr">
+              <a:buNone/>
+            </a:pPr>
+            <a:endParaRPr lang="en-US" sz="1050" dirty="0">
+              <a:latin typeface="DM Sans 14pt" pitchFamily="2" charset="77"/>
+            </a:endParaRPr>
+          </a:p>
+        </p:txBody>
+      </p:sp>
+      <p:sp>
+        <p:nvSpPr>
+          <p:cNvPr id="68" name="Rectangle 67">
+            <a:extLst>
+              <a:ext uri="{FF2B5EF4-FFF2-40B4-BE49-F238E27FC236}">
+                <a16:creationId xmlns:a16="http://schemas.microsoft.com/office/drawing/2014/main" id="{61E2CB06-5747-3C23-E251-3CD858542AE9}"/>
+              </a:ext>
+            </a:extLst>
+          </p:cNvPr>
+          <p:cNvSpPr/>
+          <p:nvPr/>
+        </p:nvSpPr>
+        <p:spPr>
+          <a:xfrm>
+            <a:off x="819150" y="2856387"/>
+            <a:ext cx="2607165" cy="299438"/>
+          </a:xfrm>
+          <a:prstGeom prst="rect">
+            <a:avLst/>
+          </a:prstGeom>
+          <a:noFill/>
+          <a:ln>
+            <a:noFill/>
+          </a:ln>
+        </p:spPr>
+        <p:style>
+          <a:lnRef idx="2">
+            <a:schemeClr val="accent1">
+              <a:shade val="15000"/>
+            </a:schemeClr>
+          </a:lnRef>
+          <a:fillRef idx="1">
+            <a:schemeClr val="accent1"/>
+          </a:fillRef>
+          <a:effectRef idx="0">
+            <a:schemeClr val="accent1"/>
+          </a:effectRef>
+          <a:fontRef idx="minor">
+            <a:schemeClr val="lt1"/>
+          </a:fontRef>
+        </p:style>
+        <p:txBody>
+          <a:bodyPr lIns="0" tIns="0" rIns="0" bIns="0" rtlCol="0" anchor="ctr"/>
+          <a:lstStyle/>
+          <a:p>
+            <a:r>
+              <a:rPr lang="en-US" kern="0" spc="84" dirty="0">
+                <a:solidFill>
+                  <a:srgbClr val="111111">
+                    <a:alpha val="63000"/>
+                  </a:srgbClr>
+                </a:solidFill>
+                <a:latin typeface="DM Sans 14pt" pitchFamily="2" charset="77"/>
+                <a:ea typeface="Arial" pitchFamily="34" charset="-122"/>
+                <a:cs typeface="Arial" pitchFamily="34" charset="-120"/>
+              </a:rPr>
+              <a:t>Spent vs rate card</a:t>
+            </a:r>
+            <a:endParaRPr lang="en-US" dirty="0">
+              <a:latin typeface="DM Sans 14pt" pitchFamily="2" charset="77"/>
+            </a:endParaRPr>
+          </a:p>
+        </p:txBody>
+      </p:sp>
+      <p:sp>
+        <p:nvSpPr>
+          <p:cNvPr id="72" name="Rectangle 71">
+            <a:extLst>
+              <a:ext uri="{FF2B5EF4-FFF2-40B4-BE49-F238E27FC236}">
+                <a16:creationId xmlns:a16="http://schemas.microsoft.com/office/drawing/2014/main" id="{6A689E9D-4C68-487F-F198-BD395CA50078}"/>
+              </a:ext>
+            </a:extLst>
+          </p:cNvPr>
+          <p:cNvSpPr/>
+          <p:nvPr/>
+        </p:nvSpPr>
+        <p:spPr>
+          <a:xfrm>
+            <a:off x="3789002" y="2854399"/>
+            <a:ext cx="8581674" cy="299438"/>
+          </a:xfrm>
+          <a:prstGeom prst="rect">
+            <a:avLst/>
+          </a:prstGeom>
+          <a:noFill/>
+          <a:ln>
+            <a:noFill/>
+          </a:ln>
+        </p:spPr>
+        <p:style>
+          <a:lnRef idx="2">
+            <a:schemeClr val="accent1">
+              <a:shade val="15000"/>
+            </a:schemeClr>
+          </a:lnRef>
+          <a:fillRef idx="1">
+            <a:schemeClr val="accent1"/>
+          </a:fillRef>
+          <a:effectRef idx="0">
+            <a:schemeClr val="accent1"/>
+          </a:effectRef>
+          <a:fontRef idx="minor">
+            <a:schemeClr val="lt1"/>
+          </a:fontRef>
+        </p:style>
+        <p:txBody>
+          <a:bodyPr lIns="0" tIns="0" rIns="0" bIns="0" rtlCol="0" anchor="ctr"/>
+          <a:lstStyle/>
+          <a:p>
+            <a:r>
+              <a:rPr lang="en-US" kern="0" spc="84" dirty="0">
+                <a:solidFill>
+                  <a:srgbClr val="111111">
+                    <a:alpha val="63000"/>
+                  </a:srgbClr>
+                </a:solidFill>
+                <a:latin typeface="DM Sans 14pt" pitchFamily="2" charset="77"/>
+                <a:ea typeface="Arial" pitchFamily="34" charset="-122"/>
+                <a:cs typeface="Arial" pitchFamily="34" charset="-120"/>
+              </a:rPr>
+              <a:t>Cost per view · Cost per apply · by job type</a:t>
+            </a:r>
+            <a:endParaRPr lang="en-US" dirty="0">
+              <a:latin typeface="DM Sans 14pt" pitchFamily="2" charset="77"/>
+            </a:endParaRPr>
+          </a:p>
+        </p:txBody>
+      </p:sp>
     </p:spTree>
   </p:cSld>
   <p:clrMapOvr>
@@ -8130,197 +7503,6 @@
       </p:sp>
       <p:sp>
         <p:nvSpPr>
-          <p:cNvPr id="22" name="Shape 20"/>
-          <p:cNvSpPr/>
-          <p:nvPr/>
-        </p:nvSpPr>
-        <p:spPr>
-          <a:xfrm>
-            <a:off x="762000" y="1809750"/>
-            <a:ext cx="11756529" cy="7524750"/>
-          </a:xfrm>
-          <a:prstGeom prst="roundRect">
-            <a:avLst>
-              <a:gd name="adj" fmla="val 2332"/>
-            </a:avLst>
-          </a:prstGeom>
-          <a:solidFill>
-            <a:srgbClr val="E8E0F2"/>
-          </a:solidFill>
-          <a:ln w="19050">
-            <a:solidFill>
-              <a:srgbClr val="643791"/>
-            </a:solidFill>
-            <a:prstDash val="dash"/>
-          </a:ln>
-        </p:spPr>
-        <p:txBody>
-          <a:bodyPr/>
-          <a:lstStyle/>
-          <a:p>
-            <a:endParaRPr lang="en-GB">
-              <a:latin typeface="DM Sans 14pt" pitchFamily="2" charset="77"/>
-            </a:endParaRPr>
-          </a:p>
-        </p:txBody>
-      </p:sp>
-      <p:sp>
-        <p:nvSpPr>
-          <p:cNvPr id="23" name="Text 21"/>
-          <p:cNvSpPr/>
-          <p:nvPr/>
-        </p:nvSpPr>
-        <p:spPr>
-          <a:xfrm>
-            <a:off x="1066800" y="2057401"/>
-            <a:ext cx="1981051" cy="180975"/>
-          </a:xfrm>
-          <a:prstGeom prst="rect">
-            <a:avLst/>
-          </a:prstGeom>
-          <a:noFill/>
-          <a:ln/>
-        </p:spPr>
-        <p:txBody>
-          <a:bodyPr wrap="square" lIns="25400" tIns="25400" rIns="25400" bIns="25400" rtlCol="0" anchor="t">
-            <a:normAutofit fontScale="92500" lnSpcReduction="10000"/>
-          </a:bodyPr>
-          <a:lstStyle/>
-          <a:p>
-            <a:pPr marL="0" indent="0" algn="l">
-              <a:buNone/>
-            </a:pPr>
-            <a:r>
-              <a:rPr lang="en-US" sz="975" kern="0" spc="244" dirty="0">
-                <a:solidFill>
-                  <a:srgbClr val="643791"/>
-                </a:solidFill>
-                <a:latin typeface="DM Sans 14pt" pitchFamily="2" charset="77"/>
-                <a:ea typeface="Arial" pitchFamily="34" charset="-122"/>
-                <a:cs typeface="Arial" pitchFamily="34" charset="-120"/>
-              </a:rPr>
-              <a:t>CHART PLACEHOLDER</a:t>
-            </a:r>
-            <a:endParaRPr lang="en-US" sz="975" dirty="0">
-              <a:latin typeface="DM Sans 14pt" pitchFamily="2" charset="77"/>
-            </a:endParaRPr>
-          </a:p>
-        </p:txBody>
-      </p:sp>
-      <p:sp>
-        <p:nvSpPr>
-          <p:cNvPr id="24" name="Shape 22"/>
-          <p:cNvSpPr/>
-          <p:nvPr/>
-        </p:nvSpPr>
-        <p:spPr>
-          <a:xfrm>
-            <a:off x="9805839" y="2014538"/>
-            <a:ext cx="2522190" cy="228600"/>
-          </a:xfrm>
-          <a:prstGeom prst="roundRect">
-            <a:avLst>
-              <a:gd name="adj" fmla="val 16667"/>
-            </a:avLst>
-          </a:prstGeom>
-          <a:solidFill>
-            <a:srgbClr val="643791"/>
-          </a:solidFill>
-          <a:ln/>
-        </p:spPr>
-        <p:txBody>
-          <a:bodyPr/>
-          <a:lstStyle/>
-          <a:p>
-            <a:endParaRPr lang="en-GB">
-              <a:latin typeface="DM Sans 14pt" pitchFamily="2" charset="77"/>
-            </a:endParaRPr>
-          </a:p>
-        </p:txBody>
-      </p:sp>
-      <p:sp>
-        <p:nvSpPr>
-          <p:cNvPr id="25" name="Text 23"/>
-          <p:cNvSpPr/>
-          <p:nvPr/>
-        </p:nvSpPr>
-        <p:spPr>
-          <a:xfrm>
-            <a:off x="9920139" y="2071688"/>
-            <a:ext cx="2369790" cy="152400"/>
-          </a:xfrm>
-          <a:prstGeom prst="rect">
-            <a:avLst/>
-          </a:prstGeom>
-          <a:noFill/>
-          <a:ln/>
-        </p:spPr>
-        <p:txBody>
-          <a:bodyPr wrap="square" lIns="25400" tIns="25400" rIns="25400" bIns="25400" rtlCol="0" anchor="t">
-            <a:normAutofit fontScale="85000" lnSpcReduction="10000"/>
-          </a:bodyPr>
-          <a:lstStyle/>
-          <a:p>
-            <a:pPr marL="0" indent="0" algn="l">
-              <a:buNone/>
-            </a:pPr>
-            <a:r>
-              <a:rPr lang="en-US" sz="825" kern="0" spc="124" dirty="0">
-                <a:solidFill>
-                  <a:srgbClr val="FFFFFF"/>
-                </a:solidFill>
-                <a:latin typeface="DM Sans 14pt" pitchFamily="2" charset="77"/>
-                <a:ea typeface="Arial" pitchFamily="34" charset="-122"/>
-                <a:cs typeface="Arial" pitchFamily="34" charset="-120"/>
-              </a:rPr>
-              <a:t>GROUPED BAR · BY MEDIA SOURCE</a:t>
-            </a:r>
-            <a:endParaRPr lang="en-US" sz="825" dirty="0">
-              <a:latin typeface="DM Sans 14pt" pitchFamily="2" charset="77"/>
-            </a:endParaRPr>
-          </a:p>
-        </p:txBody>
-      </p:sp>
-      <p:sp>
-        <p:nvSpPr>
-          <p:cNvPr id="26" name="Shape 24"/>
-          <p:cNvSpPr/>
-          <p:nvPr/>
-        </p:nvSpPr>
-        <p:spPr>
-          <a:xfrm>
-            <a:off x="872359" y="2333626"/>
-            <a:ext cx="11571889" cy="6905623"/>
-          </a:xfrm>
-          <a:prstGeom prst="roundRect">
-            <a:avLst>
-              <a:gd name="adj" fmla="val 2978"/>
-            </a:avLst>
-          </a:prstGeom>
-          <a:solidFill>
-            <a:srgbClr val="FFFFFF"/>
-          </a:solidFill>
-          <a:ln w="9525">
-            <a:solidFill>
-              <a:srgbClr val="000000">
-                <a:alpha val="10000"/>
-              </a:srgbClr>
-            </a:solidFill>
-            <a:prstDash val="solid"/>
-          </a:ln>
-        </p:spPr>
-        <p:txBody>
-          <a:bodyPr/>
-          <a:lstStyle/>
-          <a:p>
-            <a:endParaRPr lang="en-GB">
-              <a:latin typeface="DM Sans 14pt" pitchFamily="2" charset="77"/>
-            </a:endParaRPr>
-          </a:p>
-        </p:txBody>
-      </p:sp>
-      <p:sp>
-        <p:nvSpPr>
           <p:cNvPr id="27" name="Text 25"/>
           <p:cNvSpPr/>
           <p:nvPr/>
@@ -8345,63 +7527,7 @@
             <a:pPr marL="0" indent="0" algn="ctr">
               <a:buNone/>
             </a:pPr>
-            <a:r>
-              <a:rPr lang="en-US" sz="1650" kern="0" spc="30" dirty="0">
-                <a:solidFill>
-                  <a:srgbClr val="240F45"/>
-                </a:solidFill>
-                <a:latin typeface="DM Sans 14pt" pitchFamily="2" charset="77"/>
-                <a:ea typeface="monospace" pitchFamily="34" charset="-122"/>
-                <a:cs typeface="monospace" pitchFamily="34" charset="-120"/>
-              </a:rPr>
-              <a:t>{{chart:media_performance}}</a:t>
-            </a:r>
             <a:endParaRPr lang="en-US" sz="1650" dirty="0">
-              <a:latin typeface="DM Sans 14pt" pitchFamily="2" charset="77"/>
-            </a:endParaRPr>
-          </a:p>
-        </p:txBody>
-      </p:sp>
-      <p:sp>
-        <p:nvSpPr>
-          <p:cNvPr id="28" name="Text 26"/>
-          <p:cNvSpPr/>
-          <p:nvPr/>
-        </p:nvSpPr>
-        <p:spPr>
-          <a:xfrm>
-            <a:off x="4607295" y="6367463"/>
-            <a:ext cx="4065789" cy="190500"/>
-          </a:xfrm>
-          <a:prstGeom prst="rect">
-            <a:avLst/>
-          </a:prstGeom>
-          <a:noFill/>
-          <a:ln/>
-        </p:spPr>
-        <p:txBody>
-          <a:bodyPr wrap="square" lIns="25400" tIns="25400" rIns="25400" bIns="25400" rtlCol="0" anchor="t">
-            <a:normAutofit fontScale="92500" lnSpcReduction="10000"/>
-          </a:bodyPr>
-          <a:lstStyle/>
-          <a:p>
-            <a:pPr marL="0" indent="0" algn="ctr">
-              <a:buNone/>
-            </a:pPr>
-            <a:r>
-              <a:rPr lang="en-US" sz="1050" kern="0" spc="84" dirty="0">
-                <a:solidFill>
-                  <a:srgbClr val="111111">
-                    <a:alpha val="63000"/>
-                  </a:srgbClr>
-                </a:solidFill>
-                <a:latin typeface="DM Sans 14pt" pitchFamily="2" charset="77"/>
-                <a:ea typeface="Arial" pitchFamily="34" charset="-122"/>
-                <a:cs typeface="Arial" pitchFamily="34" charset="-120"/>
-              </a:rPr>
-              <a:t>Views and apply clicks per vacancy, per source</a:t>
-            </a:r>
-            <a:endParaRPr lang="en-US" sz="1050" dirty="0">
               <a:latin typeface="DM Sans 14pt" pitchFamily="2" charset="77"/>
             </a:endParaRPr>
           </a:p>
@@ -9000,66 +8126,220 @@
       </p:grpSp>
       <p:sp>
         <p:nvSpPr>
-          <p:cNvPr id="49" name="TextBox 48">
+          <p:cNvPr id="10" name="Text 25">
             <a:extLst>
               <a:ext uri="{FF2B5EF4-FFF2-40B4-BE49-F238E27FC236}">
-                <a16:creationId xmlns:a16="http://schemas.microsoft.com/office/drawing/2014/main" id="{470A2B72-8B13-8876-5B88-FDA778E4DC84}"/>
+                <a16:creationId xmlns:a16="http://schemas.microsoft.com/office/drawing/2014/main" id="{6A8E8859-631F-EEF0-0FE0-BED6654904E5}"/>
               </a:ext>
             </a:extLst>
           </p:cNvPr>
-          <p:cNvSpPr txBox="1"/>
-          <p:nvPr/>
-        </p:nvSpPr>
-        <p:spPr>
-          <a:xfrm>
-            <a:off x="4607295" y="-2348786"/>
-            <a:ext cx="9144000" cy="346249"/>
+          <p:cNvSpPr/>
+          <p:nvPr/>
+        </p:nvSpPr>
+        <p:spPr>
+          <a:xfrm>
+            <a:off x="4893357" y="4881636"/>
+            <a:ext cx="3931965" cy="190500"/>
           </a:xfrm>
           <a:prstGeom prst="rect">
             <a:avLst/>
           </a:prstGeom>
           <a:noFill/>
-        </p:spPr>
-        <p:txBody>
-          <a:bodyPr wrap="square">
-            <a:spAutoFit/>
+          <a:ln/>
+        </p:spPr>
+        <p:txBody>
+          <a:bodyPr wrap="square" lIns="25400" tIns="25400" rIns="25400" bIns="25400" rtlCol="0" anchor="t">
+            <a:normAutofit fontScale="92500" lnSpcReduction="10000"/>
           </a:bodyPr>
           <a:lstStyle/>
           <a:p>
-            <a:r>
-              <a:rPr lang="en-GB" sz="1650" b="0" i="0" dirty="0">
-                <a:solidFill>
-                  <a:srgbClr val="643791"/>
-                </a:solidFill>
-                <a:effectLst/>
-                <a:latin typeface="DM Sans 14pt" pitchFamily="2" charset="77"/>
+            <a:pPr marL="0" indent="0" algn="ctr">
+              <a:buNone/>
+            </a:pPr>
+            <a:endParaRPr lang="en-US" sz="1050" dirty="0">
+              <a:latin typeface="DM Sans 14pt" pitchFamily="2" charset="77"/>
+            </a:endParaRPr>
+          </a:p>
+        </p:txBody>
+      </p:sp>
+      <p:sp>
+        <p:nvSpPr>
+          <p:cNvPr id="13" name="Shape 19">
+            <a:extLst>
+              <a:ext uri="{FF2B5EF4-FFF2-40B4-BE49-F238E27FC236}">
+                <a16:creationId xmlns:a16="http://schemas.microsoft.com/office/drawing/2014/main" id="{C7D18365-0678-F3D8-B4C4-9BC05823CF69}"/>
+              </a:ext>
+            </a:extLst>
+          </p:cNvPr>
+          <p:cNvSpPr/>
+          <p:nvPr/>
+        </p:nvSpPr>
+        <p:spPr>
+          <a:xfrm>
+            <a:off x="762000" y="1786181"/>
+            <a:ext cx="11756529" cy="7639050"/>
+          </a:xfrm>
+          <a:prstGeom prst="roundRect">
+            <a:avLst>
+              <a:gd name="adj" fmla="val 2331"/>
+            </a:avLst>
+          </a:prstGeom>
+          <a:solidFill>
+            <a:srgbClr val="E8E0F2"/>
+          </a:solidFill>
+          <a:ln w="19050">
+            <a:solidFill>
+              <a:srgbClr val="643791"/>
+            </a:solidFill>
+            <a:prstDash val="dash"/>
+          </a:ln>
+        </p:spPr>
+        <p:txBody>
+          <a:bodyPr/>
+          <a:lstStyle/>
+          <a:p>
+            <a:endParaRPr lang="en-GB">
+              <a:latin typeface="DM Sans 14pt" pitchFamily="2" charset="77"/>
+            </a:endParaRPr>
+          </a:p>
+        </p:txBody>
+      </p:sp>
+      <p:sp>
+        <p:nvSpPr>
+          <p:cNvPr id="14" name="Shape 23">
+            <a:extLst>
+              <a:ext uri="{FF2B5EF4-FFF2-40B4-BE49-F238E27FC236}">
+                <a16:creationId xmlns:a16="http://schemas.microsoft.com/office/drawing/2014/main" id="{E7FBA325-E675-B8ED-62A7-0B1DE99C7D20}"/>
+              </a:ext>
+            </a:extLst>
+          </p:cNvPr>
+          <p:cNvSpPr/>
+          <p:nvPr/>
+        </p:nvSpPr>
+        <p:spPr>
+          <a:xfrm>
+            <a:off x="851338" y="2202507"/>
+            <a:ext cx="11592910" cy="7127473"/>
+          </a:xfrm>
+          <a:prstGeom prst="roundRect">
+            <a:avLst>
+              <a:gd name="adj" fmla="val 3334"/>
+            </a:avLst>
+          </a:prstGeom>
+          <a:solidFill>
+            <a:srgbClr val="FFFFFF"/>
+          </a:solidFill>
+          <a:ln w="9525">
+            <a:solidFill>
+              <a:srgbClr val="000000">
+                <a:alpha val="10000"/>
+              </a:srgbClr>
+            </a:solidFill>
+            <a:prstDash val="solid"/>
+          </a:ln>
+        </p:spPr>
+        <p:txBody>
+          <a:bodyPr/>
+          <a:lstStyle/>
+          <a:p>
+            <a:r>
+              <a:rPr lang="en-US" kern="0" spc="30" dirty="0">
+                <a:solidFill>
+                  <a:srgbClr val="240F45"/>
+                </a:solidFill>
+                <a:latin typeface="DM Sans 14pt" pitchFamily="2" charset="77"/>
+                <a:ea typeface="monospace" pitchFamily="34" charset="-122"/>
+                <a:cs typeface="monospace" pitchFamily="34" charset="-120"/>
               </a:rPr>
               <a:t>{{</a:t>
             </a:r>
             <a:r>
-              <a:rPr lang="en-GB" sz="1650" b="0" i="0" dirty="0" err="1">
-                <a:solidFill>
-                  <a:srgbClr val="643791"/>
-                </a:solidFill>
-                <a:effectLst/>
-                <a:latin typeface="DM Sans 14pt" pitchFamily="2" charset="77"/>
-              </a:rPr>
-              <a:t>chart_explainer_media_performance</a:t>
-            </a:r>
-            <a:r>
-              <a:rPr lang="en-GB" sz="1650" b="0" i="0" dirty="0">
-                <a:solidFill>
-                  <a:srgbClr val="643791"/>
-                </a:solidFill>
-                <a:effectLst/>
-                <a:latin typeface="DM Sans 14pt" pitchFamily="2" charset="77"/>
+              <a:rPr lang="en-US" kern="0" spc="30" dirty="0" err="1">
+                <a:solidFill>
+                  <a:srgbClr val="240F45"/>
+                </a:solidFill>
+                <a:latin typeface="DM Sans 14pt" pitchFamily="2" charset="77"/>
+                <a:ea typeface="monospace" pitchFamily="34" charset="-122"/>
+                <a:cs typeface="monospace" pitchFamily="34" charset="-120"/>
+              </a:rPr>
+              <a:t>chart:media_performance</a:t>
+            </a:r>
+            <a:r>
+              <a:rPr lang="en-US" kern="0" spc="30" dirty="0">
+                <a:solidFill>
+                  <a:srgbClr val="240F45"/>
+                </a:solidFill>
+                <a:latin typeface="DM Sans 14pt" pitchFamily="2" charset="77"/>
+                <a:ea typeface="monospace" pitchFamily="34" charset="-122"/>
+                <a:cs typeface="monospace" pitchFamily="34" charset="-120"/>
               </a:rPr>
               <a:t>}}</a:t>
             </a:r>
-            <a:endParaRPr lang="en-GB" sz="1650" dirty="0">
-              <a:solidFill>
-                <a:srgbClr val="643791"/>
-              </a:solidFill>
+            <a:endParaRPr lang="en-US" dirty="0">
+              <a:latin typeface="DM Sans 14pt" pitchFamily="2" charset="77"/>
+            </a:endParaRPr>
+          </a:p>
+        </p:txBody>
+      </p:sp>
+      <p:sp>
+        <p:nvSpPr>
+          <p:cNvPr id="16" name="Rectangle 15">
+            <a:extLst>
+              <a:ext uri="{FF2B5EF4-FFF2-40B4-BE49-F238E27FC236}">
+                <a16:creationId xmlns:a16="http://schemas.microsoft.com/office/drawing/2014/main" id="{4A5A2DA5-EFA0-6960-EF7E-91A9B04AFC71}"/>
+              </a:ext>
+            </a:extLst>
+          </p:cNvPr>
+          <p:cNvSpPr/>
+          <p:nvPr/>
+        </p:nvSpPr>
+        <p:spPr>
+          <a:xfrm>
+            <a:off x="851338" y="1845226"/>
+            <a:ext cx="8009197" cy="299438"/>
+          </a:xfrm>
+          <a:prstGeom prst="rect">
+            <a:avLst/>
+          </a:prstGeom>
+          <a:noFill/>
+          <a:ln>
+            <a:noFill/>
+          </a:ln>
+        </p:spPr>
+        <p:style>
+          <a:lnRef idx="2">
+            <a:schemeClr val="accent1">
+              <a:shade val="15000"/>
+            </a:schemeClr>
+          </a:lnRef>
+          <a:fillRef idx="1">
+            <a:schemeClr val="accent1"/>
+          </a:fillRef>
+          <a:effectRef idx="0">
+            <a:schemeClr val="accent1"/>
+          </a:effectRef>
+          <a:fontRef idx="minor">
+            <a:schemeClr val="lt1"/>
+          </a:fontRef>
+        </p:style>
+        <p:txBody>
+          <a:bodyPr lIns="0" tIns="0" rIns="0" bIns="0" rtlCol="0" anchor="ctr"/>
+          <a:lstStyle/>
+          <a:p>
+            <a:r>
+              <a:rPr lang="en-US" kern="0" spc="84" dirty="0">
+                <a:solidFill>
+                  <a:srgbClr val="111111">
+                    <a:alpha val="63000"/>
+                  </a:srgbClr>
+                </a:solidFill>
+                <a:latin typeface="DM Sans 14pt" pitchFamily="2" charset="77"/>
+                <a:ea typeface="Arial" pitchFamily="34" charset="-122"/>
+                <a:cs typeface="Arial" pitchFamily="34" charset="-120"/>
+              </a:rPr>
+              <a:t>Views and apply clicks per vacancy, per source</a:t>
+            </a:r>
+            <a:endParaRPr lang="en-US" dirty="0">
               <a:latin typeface="DM Sans 14pt" pitchFamily="2" charset="77"/>
             </a:endParaRPr>
           </a:p>
@@ -9322,7 +8602,7 @@
         <p:spPr>
           <a:xfrm>
             <a:off x="1143000" y="7117110"/>
-            <a:ext cx="14401800" cy="2026890"/>
+            <a:ext cx="12797287" cy="2026890"/>
           </a:xfrm>
           <a:prstGeom prst="roundRect">
             <a:avLst>
@@ -9330,7 +8610,7 @@
             </a:avLst>
           </a:prstGeom>
           <a:solidFill>
-            <a:srgbClr val="FFFFFF"/>
+            <a:srgbClr val="E8E0F2"/>
           </a:solidFill>
           <a:ln/>
         </p:spPr>
@@ -9461,8 +8741,8 @@
         </p:nvSpPr>
         <p:spPr>
           <a:xfrm>
-            <a:off x="1676399" y="8429624"/>
-            <a:ext cx="4399936" cy="419407"/>
+            <a:off x="1676398" y="8429623"/>
+            <a:ext cx="6125497" cy="540000"/>
           </a:xfrm>
           <a:prstGeom prst="roundRect">
             <a:avLst>
@@ -9477,7 +8757,7 @@
           <a:ln/>
         </p:spPr>
         <p:txBody>
-          <a:bodyPr/>
+          <a:bodyPr anchor="ctr"/>
           <a:lstStyle/>
           <a:p>
             <a:r>
@@ -9527,7 +8807,7 @@
         </p:nvSpPr>
         <p:spPr>
           <a:xfrm>
-            <a:off x="8572500" y="7641878"/>
+            <a:off x="8523975" y="8016750"/>
             <a:ext cx="647700" cy="171450"/>
           </a:xfrm>
           <a:prstGeom prst="rect">
@@ -9570,8 +8850,8 @@
         </p:nvSpPr>
         <p:spPr>
           <a:xfrm>
-            <a:off x="9277350" y="7574309"/>
-            <a:ext cx="4276418" cy="313879"/>
+            <a:off x="9277350" y="7832475"/>
+            <a:ext cx="4276418" cy="540000"/>
           </a:xfrm>
           <a:prstGeom prst="roundRect">
             <a:avLst>
@@ -9626,11 +8906,6 @@
               <a:latin typeface="DM Sans 14pt" pitchFamily="2" charset="77"/>
             </a:endParaRPr>
           </a:p>
-          <a:p>
-            <a:endParaRPr lang="en-GB" sz="1400" dirty="0">
-              <a:latin typeface="DM Sans 14pt" pitchFamily="2" charset="77"/>
-            </a:endParaRPr>
-          </a:p>
         </p:txBody>
       </p:sp>
       <p:sp>
@@ -9642,7 +8917,7 @@
         <p:spPr>
           <a:xfrm>
             <a:off x="9353550" y="7593360"/>
-            <a:ext cx="2213670" cy="268486"/>
+            <a:ext cx="2213670" cy="540000"/>
           </a:xfrm>
           <a:prstGeom prst="rect">
             <a:avLst/>
@@ -9652,7 +8927,7 @@
         </p:spPr>
         <p:txBody>
           <a:bodyPr wrap="square" lIns="25400" tIns="25400" rIns="25400" bIns="25400" rtlCol="0" anchor="t">
-            <a:normAutofit fontScale="92500" lnSpcReduction="20000"/>
+            <a:normAutofit/>
           </a:bodyPr>
           <a:lstStyle/>
           <a:p>
@@ -9676,7 +8951,7 @@
         </p:nvSpPr>
         <p:spPr>
           <a:xfrm>
-            <a:off x="8572500" y="8043714"/>
+            <a:off x="8523975" y="8613898"/>
             <a:ext cx="647700" cy="171450"/>
           </a:xfrm>
           <a:prstGeom prst="rect">
@@ -9719,8 +8994,8 @@
         </p:nvSpPr>
         <p:spPr>
           <a:xfrm>
-            <a:off x="9277349" y="7976146"/>
-            <a:ext cx="4276417" cy="313878"/>
+            <a:off x="9277349" y="8429623"/>
+            <a:ext cx="4276417" cy="540000"/>
           </a:xfrm>
           <a:prstGeom prst="roundRect">
             <a:avLst>
@@ -9772,92 +9047,6 @@
               <a:t>}}</a:t>
             </a:r>
             <a:endParaRPr lang="en-US" sz="1400" dirty="0">
-              <a:latin typeface="DM Sans 14pt" pitchFamily="2" charset="77"/>
-            </a:endParaRPr>
-          </a:p>
-        </p:txBody>
-      </p:sp>
-      <p:sp>
-        <p:nvSpPr>
-          <p:cNvPr id="19" name="Text 17"/>
-          <p:cNvSpPr/>
-          <p:nvPr/>
-        </p:nvSpPr>
-        <p:spPr>
-          <a:xfrm>
-            <a:off x="8572500" y="8435132"/>
-            <a:ext cx="647700" cy="171450"/>
-          </a:xfrm>
-          <a:prstGeom prst="rect">
-            <a:avLst/>
-          </a:prstGeom>
-          <a:noFill/>
-          <a:ln/>
-        </p:spPr>
-        <p:txBody>
-          <a:bodyPr wrap="square" lIns="25400" tIns="25400" rIns="25400" bIns="25400" rtlCol="0" anchor="t">
-            <a:normAutofit fontScale="92500" lnSpcReduction="10000"/>
-          </a:bodyPr>
-          <a:lstStyle/>
-          <a:p>
-            <a:pPr marL="0" indent="0" algn="l">
-              <a:buNone/>
-            </a:pPr>
-            <a:r>
-              <a:rPr lang="en-US" sz="900" kern="0" spc="225" dirty="0">
-                <a:solidFill>
-                  <a:srgbClr val="643791"/>
-                </a:solidFill>
-                <a:latin typeface="DM Sans 14pt" pitchFamily="2" charset="77"/>
-                <a:ea typeface="Arial" pitchFamily="34" charset="-122"/>
-                <a:cs typeface="Arial" pitchFamily="34" charset="-120"/>
-              </a:rPr>
-              <a:t>WEB</a:t>
-            </a:r>
-            <a:endParaRPr lang="en-US" sz="900" dirty="0">
-              <a:latin typeface="DM Sans 14pt" pitchFamily="2" charset="77"/>
-            </a:endParaRPr>
-          </a:p>
-        </p:txBody>
-      </p:sp>
-      <p:sp>
-        <p:nvSpPr>
-          <p:cNvPr id="20" name="Text 18"/>
-          <p:cNvSpPr/>
-          <p:nvPr/>
-        </p:nvSpPr>
-        <p:spPr>
-          <a:xfrm>
-            <a:off x="9277350" y="8377982"/>
-            <a:ext cx="4276416" cy="313878"/>
-          </a:xfrm>
-          <a:prstGeom prst="rect">
-            <a:avLst/>
-          </a:prstGeom>
-          <a:noFill/>
-          <a:ln/>
-        </p:spPr>
-        <p:txBody>
-          <a:bodyPr wrap="square" lIns="0" tIns="0" rIns="0" bIns="0" rtlCol="0" anchor="t">
-            <a:normAutofit/>
-          </a:bodyPr>
-          <a:lstStyle/>
-          <a:p>
-            <a:pPr marL="0" indent="0" algn="l">
-              <a:buNone/>
-            </a:pPr>
-            <a:r>
-              <a:rPr lang="en-US" sz="1650" dirty="0">
-                <a:solidFill>
-                  <a:srgbClr val="111111"/>
-                </a:solidFill>
-                <a:latin typeface="DM Sans 14pt" pitchFamily="2" charset="77"/>
-                <a:ea typeface="Arial" pitchFamily="34" charset="-122"/>
-                <a:cs typeface="Arial" pitchFamily="34" charset="-120"/>
-              </a:rPr>
-              <a:t>jobsgopublic.com</a:t>
-            </a:r>
-            <a:endParaRPr lang="en-US" sz="1650" dirty="0">
               <a:latin typeface="DM Sans 14pt" pitchFamily="2" charset="77"/>
             </a:endParaRPr>
           </a:p>

--- a/Renewals.pptx
+++ b/Renewals.pptx
@@ -2763,7 +2763,7 @@
           <a:p>
             <a:pPr algn="ctr"/>
             <a:r>
-              <a:rPr lang="en-US" sz="3000" b="1" kern="0" spc="-67" dirty="0">
+              <a:rPr lang="en-US" sz="9600" b="1" kern="0" spc="-67" dirty="0">
                 <a:solidFill>
                   <a:srgbClr val="FFFFFF"/>
                 </a:solidFill>
@@ -2774,7 +2774,7 @@
               <a:t>{{</a:t>
             </a:r>
             <a:r>
-              <a:rPr lang="en-US" sz="3000" b="1" kern="0" spc="-67" dirty="0" err="1">
+              <a:rPr lang="en-US" sz="9600" b="1" kern="0" spc="-67" dirty="0" err="1">
                 <a:solidFill>
                   <a:srgbClr val="FFFFFF"/>
                 </a:solidFill>
@@ -2785,7 +2785,7 @@
               <a:t>stat_total_jobs</a:t>
             </a:r>
             <a:r>
-              <a:rPr lang="en-US" sz="3000" b="1" kern="0" spc="-67" dirty="0">
+              <a:rPr lang="en-US" sz="9600" b="1" kern="0" spc="-67" dirty="0">
                 <a:solidFill>
                   <a:srgbClr val="FFFFFF"/>
                 </a:solidFill>
@@ -2795,7 +2795,7 @@
               </a:rPr>
               <a:t>}}</a:t>
             </a:r>
-            <a:endParaRPr lang="en-US" sz="3000" b="1" dirty="0">
+            <a:endParaRPr lang="en-US" sz="9600" b="1" dirty="0">
               <a:latin typeface="DM Sans 14pt" pitchFamily="2" charset="77"/>
             </a:endParaRPr>
           </a:p>
@@ -2900,12 +2900,14 @@
           <a:ln/>
         </p:spPr>
         <p:txBody>
-          <a:bodyPr anchor="ctr"/>
+          <a:bodyPr lIns="0" rIns="0" anchor="ctr">
+            <a:normAutofit fontScale="92500" lnSpcReduction="20000"/>
+          </a:bodyPr>
           <a:lstStyle/>
           <a:p>
             <a:pPr algn="ctr"/>
             <a:r>
-              <a:rPr lang="en-US" sz="3000" b="1" kern="0" spc="-67" dirty="0">
+              <a:rPr lang="en-US" sz="4000" b="1" kern="0" spc="-67" dirty="0">
                 <a:solidFill>
                   <a:srgbClr val="FFFFFF"/>
                 </a:solidFill>
@@ -2915,7 +2917,7 @@
               <a:t>{{</a:t>
             </a:r>
             <a:r>
-              <a:rPr lang="en-US" sz="3000" b="1" kern="0" spc="-67" dirty="0" err="1">
+              <a:rPr lang="en-US" sz="4000" b="1" kern="0" spc="-67" dirty="0" err="1">
                 <a:solidFill>
                   <a:srgbClr val="FFFFFF"/>
                 </a:solidFill>
@@ -2925,7 +2927,7 @@
               <a:t>stat_top_category</a:t>
             </a:r>
             <a:r>
-              <a:rPr lang="en-US" sz="3000" b="1" kern="0" spc="-67" dirty="0">
+              <a:rPr lang="en-US" sz="4000" b="1" kern="0" spc="-67" dirty="0">
                 <a:solidFill>
                   <a:srgbClr val="FFFFFF"/>
                 </a:solidFill>
@@ -3011,7 +3013,7 @@
           <a:p>
             <a:pPr algn="ctr"/>
             <a:r>
-              <a:rPr lang="en-US" sz="3000" b="1" kern="0" spc="-67" dirty="0">
+              <a:rPr lang="en-US" sz="9600" b="1" kern="0" spc="-67" dirty="0">
                 <a:solidFill>
                   <a:srgbClr val="240F45"/>
                 </a:solidFill>
@@ -3022,7 +3024,7 @@
               <a:t>{{</a:t>
             </a:r>
             <a:r>
-              <a:rPr lang="en-US" sz="3000" b="1" kern="0" spc="-67" dirty="0" err="1">
+              <a:rPr lang="en-US" sz="9600" b="1" kern="0" spc="-67" dirty="0" err="1">
                 <a:solidFill>
                   <a:srgbClr val="240F45"/>
                 </a:solidFill>
@@ -3033,7 +3035,7 @@
               <a:t>stat_top_quadrant_pct</a:t>
             </a:r>
             <a:r>
-              <a:rPr lang="en-US" sz="3000" b="1" kern="0" spc="-67" dirty="0">
+              <a:rPr lang="en-US" sz="9600" b="1" kern="0" spc="-67" dirty="0">
                 <a:solidFill>
                   <a:srgbClr val="240F45"/>
                 </a:solidFill>
@@ -3043,7 +3045,7 @@
               </a:rPr>
               <a:t>}}</a:t>
             </a:r>
-            <a:endParaRPr lang="en-US" sz="3000" b="1" dirty="0">
+            <a:endParaRPr lang="en-US" sz="9600" b="1" dirty="0">
               <a:latin typeface="DM Sans 14pt" pitchFamily="2" charset="77"/>
             </a:endParaRPr>
           </a:p>
@@ -3603,7 +3605,7 @@
           <a:lstStyle/>
           <a:p>
             <a:r>
-              <a:rPr lang="en-US" kern="0" spc="-67" dirty="0">
+              <a:rPr lang="en-US" sz="3600" kern="0" spc="-67" dirty="0">
                 <a:solidFill>
                   <a:srgbClr val="FFFFFF"/>
                 </a:solidFill>
@@ -3614,7 +3616,7 @@
               <a:t>{{</a:t>
             </a:r>
             <a:r>
-              <a:rPr lang="en-US" kern="0" spc="-67" dirty="0" err="1">
+              <a:rPr lang="en-US" sz="3600" kern="0" spc="-67" dirty="0" err="1">
                 <a:solidFill>
                   <a:srgbClr val="FFFFFF"/>
                 </a:solidFill>
@@ -3625,7 +3627,7 @@
               <a:t>stat_benchmark_average_views</a:t>
             </a:r>
             <a:r>
-              <a:rPr lang="en-US" kern="0" spc="-67" dirty="0">
+              <a:rPr lang="en-US" sz="3600" kern="0" spc="-67" dirty="0">
                 <a:solidFill>
                   <a:srgbClr val="FFFFFF"/>
                 </a:solidFill>
@@ -3635,12 +3637,12 @@
               </a:rPr>
               <a:t>}}</a:t>
             </a:r>
-            <a:endParaRPr lang="en-US" dirty="0">
-              <a:latin typeface="DM Sans 14pt" pitchFamily="2" charset="77"/>
-            </a:endParaRPr>
-          </a:p>
-          <a:p>
-            <a:endParaRPr lang="en-GB" dirty="0">
+            <a:endParaRPr lang="en-US" sz="3600" dirty="0">
+              <a:latin typeface="DM Sans 14pt" pitchFamily="2" charset="77"/>
+            </a:endParaRPr>
+          </a:p>
+          <a:p>
+            <a:endParaRPr lang="en-GB" sz="3600" dirty="0">
               <a:latin typeface="DM Sans 14pt" pitchFamily="2" charset="77"/>
             </a:endParaRPr>
           </a:p>
@@ -4252,7 +4254,7 @@
               </a:lnSpc>
             </a:pPr>
             <a:r>
-              <a:rPr lang="en-US" kern="0" spc="-67" dirty="0">
+              <a:rPr lang="en-US" sz="3600" kern="0" spc="-67" dirty="0">
                 <a:solidFill>
                   <a:srgbClr val="240F45"/>
                 </a:solidFill>
@@ -4263,7 +4265,7 @@
               <a:t>{{</a:t>
             </a:r>
             <a:r>
-              <a:rPr lang="en-US" kern="0" spc="-67" dirty="0" err="1">
+              <a:rPr lang="en-US" sz="3600" kern="0" spc="-67" dirty="0" err="1">
                 <a:solidFill>
                   <a:srgbClr val="240F45"/>
                 </a:solidFill>
@@ -4274,7 +4276,7 @@
               <a:t>stat_your_jobs_average_views</a:t>
             </a:r>
             <a:r>
-              <a:rPr lang="en-US" kern="0" spc="-67" dirty="0">
+              <a:rPr lang="en-US" sz="3600" kern="0" spc="-67" dirty="0">
                 <a:solidFill>
                   <a:srgbClr val="240F45"/>
                 </a:solidFill>
@@ -4284,7 +4286,7 @@
               </a:rPr>
               <a:t>}}</a:t>
             </a:r>
-            <a:endParaRPr lang="en-US" dirty="0">
+            <a:endParaRPr lang="en-US" sz="3600" dirty="0">
               <a:latin typeface="DM Sans 14pt" pitchFamily="2" charset="77"/>
             </a:endParaRPr>
           </a:p>
@@ -4405,7 +4407,7 @@
           <a:lstStyle/>
           <a:p>
             <a:r>
-              <a:rPr lang="en-US" kern="0" spc="-67" dirty="0">
+              <a:rPr lang="en-US" sz="3600" kern="0" spc="-67" dirty="0">
                 <a:solidFill>
                   <a:srgbClr val="FFFFFF"/>
                 </a:solidFill>
@@ -4416,7 +4418,7 @@
               <a:t>{{</a:t>
             </a:r>
             <a:r>
-              <a:rPr lang="en-US" kern="0" spc="-67" dirty="0" err="1">
+              <a:rPr lang="en-US" sz="3600" kern="0" spc="-67" dirty="0" err="1">
                 <a:solidFill>
                   <a:srgbClr val="FFFFFF"/>
                 </a:solidFill>
@@ -4427,7 +4429,7 @@
               <a:t>stat_benchmark_average_applies</a:t>
             </a:r>
             <a:r>
-              <a:rPr lang="en-US" kern="0" spc="-67" dirty="0">
+              <a:rPr lang="en-US" sz="3600" kern="0" spc="-67" dirty="0">
                 <a:solidFill>
                   <a:srgbClr val="FFFFFF"/>
                 </a:solidFill>
@@ -4437,12 +4439,12 @@
               </a:rPr>
               <a:t>}}</a:t>
             </a:r>
-            <a:endParaRPr lang="en-US" dirty="0">
-              <a:latin typeface="DM Sans 14pt" pitchFamily="2" charset="77"/>
-            </a:endParaRPr>
-          </a:p>
-          <a:p>
-            <a:endParaRPr lang="en-GB" dirty="0">
+            <a:endParaRPr lang="en-US" sz="3600" dirty="0">
+              <a:latin typeface="DM Sans 14pt" pitchFamily="2" charset="77"/>
+            </a:endParaRPr>
+          </a:p>
+          <a:p>
+            <a:endParaRPr lang="en-GB" sz="3600" dirty="0">
               <a:latin typeface="DM Sans 14pt" pitchFamily="2" charset="77"/>
             </a:endParaRPr>
           </a:p>
@@ -4550,7 +4552,7 @@
               </a:lnSpc>
             </a:pPr>
             <a:r>
-              <a:rPr lang="en-US" kern="0" spc="-67" dirty="0">
+              <a:rPr lang="en-US" sz="3600" kern="0" spc="-67" dirty="0">
                 <a:solidFill>
                   <a:srgbClr val="240F45"/>
                 </a:solidFill>
@@ -4561,7 +4563,7 @@
               <a:t>{{</a:t>
             </a:r>
             <a:r>
-              <a:rPr lang="en-US" kern="0" spc="-67" dirty="0" err="1">
+              <a:rPr lang="en-US" sz="3600" kern="0" spc="-67" dirty="0" err="1">
                 <a:solidFill>
                   <a:srgbClr val="240F45"/>
                 </a:solidFill>
@@ -4572,7 +4574,7 @@
               <a:t>stat_your_jobs_average_applies</a:t>
             </a:r>
             <a:r>
-              <a:rPr lang="en-US" kern="0" spc="-67" dirty="0">
+              <a:rPr lang="en-US" sz="3600" kern="0" spc="-67" dirty="0">
                 <a:solidFill>
                   <a:srgbClr val="240F45"/>
                 </a:solidFill>
@@ -4582,7 +4584,7 @@
               </a:rPr>
               <a:t>}}</a:t>
             </a:r>
-            <a:endParaRPr lang="en-US" dirty="0">
+            <a:endParaRPr lang="en-US" sz="3600" dirty="0">
               <a:latin typeface="DM Sans 14pt" pitchFamily="2" charset="77"/>
             </a:endParaRPr>
           </a:p>
@@ -6658,7 +6660,7 @@
           <a:lstStyle/>
           <a:p>
             <a:r>
-              <a:rPr lang="en-US" kern="0" spc="-67" dirty="0">
+              <a:rPr lang="en-US" sz="3600" kern="0" spc="-67" dirty="0">
                 <a:solidFill>
                   <a:srgbClr val="FFFFFF"/>
                 </a:solidFill>
@@ -6669,7 +6671,7 @@
               <a:t>{{</a:t>
             </a:r>
             <a:r>
-              <a:rPr lang="en-US" kern="0" spc="-67" dirty="0" err="1">
+              <a:rPr lang="en-US" sz="3600" kern="0" spc="-67" dirty="0" err="1">
                 <a:solidFill>
                   <a:srgbClr val="FFFFFF"/>
                 </a:solidFill>
@@ -6680,7 +6682,7 @@
               <a:t>stat_total_jobs</a:t>
             </a:r>
             <a:r>
-              <a:rPr lang="en-US" kern="0" spc="-67" dirty="0">
+              <a:rPr lang="en-US" sz="3600" kern="0" spc="-67" dirty="0">
                 <a:solidFill>
                   <a:srgbClr val="FFFFFF"/>
                 </a:solidFill>
@@ -6690,7 +6692,7 @@
               </a:rPr>
               <a:t>}}</a:t>
             </a:r>
-            <a:endParaRPr lang="en-US" dirty="0">
+            <a:endParaRPr lang="en-US" sz="3600" dirty="0">
               <a:latin typeface="DM Sans 14pt" pitchFamily="2" charset="77"/>
             </a:endParaRPr>
           </a:p>
@@ -6792,24 +6794,24 @@
               </a:lnSpc>
             </a:pPr>
             <a:r>
-              <a:rPr lang="en-GB" dirty="0">
+              <a:rPr lang="en-GB" sz="3600" dirty="0">
                 <a:latin typeface="DM Sans 14pt" pitchFamily="2" charset="77"/>
               </a:rPr>
               <a:t>{{</a:t>
             </a:r>
             <a:r>
-              <a:rPr lang="en-GB" dirty="0" err="1">
+              <a:rPr lang="en-GB" sz="3600" dirty="0" err="1">
                 <a:latin typeface="DM Sans 14pt" pitchFamily="2" charset="77"/>
               </a:rPr>
               <a:t>stat_cost_per_job</a:t>
             </a:r>
             <a:r>
-              <a:rPr lang="en-GB" dirty="0">
+              <a:rPr lang="en-GB" sz="3600" dirty="0">
                 <a:latin typeface="DM Sans 14pt" pitchFamily="2" charset="77"/>
               </a:rPr>
               <a:t>}}</a:t>
             </a:r>
-            <a:endParaRPr lang="en-US" sz="1125" dirty="0">
+            <a:endParaRPr lang="en-US" sz="3600" dirty="0">
               <a:latin typeface="DM Sans 14pt" pitchFamily="2" charset="77"/>
             </a:endParaRPr>
           </a:p>
@@ -6923,7 +6925,7 @@
           <a:lstStyle/>
           <a:p>
             <a:r>
-              <a:rPr lang="en-GB" dirty="0">
+              <a:rPr lang="en-GB" sz="3600" dirty="0">
                 <a:solidFill>
                   <a:schemeClr val="bg1"/>
                 </a:solidFill>
@@ -6932,7 +6934,7 @@
               <a:t>{{</a:t>
             </a:r>
             <a:r>
-              <a:rPr lang="en-GB" dirty="0" err="1">
+              <a:rPr lang="en-GB" sz="3600" dirty="0" err="1">
                 <a:solidFill>
                   <a:schemeClr val="bg1"/>
                 </a:solidFill>
@@ -6941,7 +6943,7 @@
               <a:t>stat_cost_per_view</a:t>
             </a:r>
             <a:r>
-              <a:rPr lang="en-GB" dirty="0">
+              <a:rPr lang="en-GB" sz="3600" dirty="0">
                 <a:solidFill>
                   <a:schemeClr val="bg1"/>
                 </a:solidFill>
@@ -6949,7 +6951,7 @@
               </a:rPr>
               <a:t>}}</a:t>
             </a:r>
-            <a:endParaRPr lang="en-US" sz="1125" dirty="0">
+            <a:endParaRPr lang="en-US" sz="3600" dirty="0">
               <a:solidFill>
                 <a:schemeClr val="bg1"/>
               </a:solidFill>
@@ -7054,88 +7056,24 @@
               </a:lnSpc>
             </a:pPr>
             <a:r>
-              <a:rPr lang="en-GB" dirty="0">
+              <a:rPr lang="en-GB" sz="3600" dirty="0">
                 <a:latin typeface="DM Sans 14pt" pitchFamily="2" charset="77"/>
               </a:rPr>
               <a:t>{{</a:t>
             </a:r>
             <a:r>
-              <a:rPr lang="en-GB" dirty="0" err="1">
+              <a:rPr lang="en-GB" sz="3600" dirty="0" err="1">
                 <a:latin typeface="DM Sans 14pt" pitchFamily="2" charset="77"/>
               </a:rPr>
               <a:t>stat_cost_per_apply</a:t>
             </a:r>
             <a:r>
-              <a:rPr lang="en-GB" dirty="0">
+              <a:rPr lang="en-GB" sz="3600" dirty="0">
                 <a:latin typeface="DM Sans 14pt" pitchFamily="2" charset="77"/>
               </a:rPr>
               <a:t>}}</a:t>
             </a:r>
-            <a:endParaRPr lang="en-US" sz="1125" dirty="0">
-              <a:latin typeface="DM Sans 14pt" pitchFamily="2" charset="77"/>
-            </a:endParaRPr>
-          </a:p>
-        </p:txBody>
-      </p:sp>
-      <p:sp>
-        <p:nvSpPr>
-          <p:cNvPr id="51" name="Rectangle 50">
-            <a:extLst>
-              <a:ext uri="{FF2B5EF4-FFF2-40B4-BE49-F238E27FC236}">
-                <a16:creationId xmlns:a16="http://schemas.microsoft.com/office/drawing/2014/main" id="{8A37FCBE-F906-AD3F-FED0-C40CB32166AF}"/>
-              </a:ext>
-            </a:extLst>
-          </p:cNvPr>
-          <p:cNvSpPr/>
-          <p:nvPr/>
-        </p:nvSpPr>
-        <p:spPr>
-          <a:xfrm>
-            <a:off x="888759" y="-535480"/>
-            <a:ext cx="2440558" cy="299438"/>
-          </a:xfrm>
-          <a:prstGeom prst="rect">
-            <a:avLst/>
-          </a:prstGeom>
-          <a:noFill/>
-          <a:ln>
-            <a:noFill/>
-          </a:ln>
-        </p:spPr>
-        <p:style>
-          <a:lnRef idx="2">
-            <a:schemeClr val="accent1">
-              <a:shade val="15000"/>
-            </a:schemeClr>
-          </a:lnRef>
-          <a:fillRef idx="1">
-            <a:schemeClr val="accent1"/>
-          </a:fillRef>
-          <a:effectRef idx="0">
-            <a:schemeClr val="accent1"/>
-          </a:effectRef>
-          <a:fontRef idx="minor">
-            <a:schemeClr val="lt1"/>
-          </a:fontRef>
-        </p:style>
-        <p:txBody>
-          <a:bodyPr lIns="0" tIns="0" rIns="0" bIns="0" rtlCol="0" anchor="ctr"/>
-          <a:lstStyle/>
-          <a:p>
-            <a:r>
-              <a:rPr lang="en-US" kern="0" spc="84" dirty="0">
-                <a:solidFill>
-                  <a:srgbClr val="111111">
-                    <a:alpha val="63000"/>
-                  </a:srgbClr>
-                </a:solidFill>
-                <a:latin typeface="DM Sans 14pt" pitchFamily="2" charset="77"/>
-                <a:ea typeface="Arial" pitchFamily="34" charset="-122"/>
-                <a:cs typeface="Arial" pitchFamily="34" charset="-120"/>
-              </a:rPr>
-              <a:t>Spent vs rate card</a:t>
-            </a:r>
-            <a:endParaRPr lang="en-US" dirty="0">
+            <a:endParaRPr lang="en-US" sz="3600" dirty="0">
               <a:latin typeface="DM Sans 14pt" pitchFamily="2" charset="77"/>
             </a:endParaRPr>
           </a:p>

--- a/Renewals.pptx
+++ b/Renewals.pptx
@@ -1628,7 +1628,7 @@
         </p:nvSpPr>
         <p:spPr>
           <a:xfrm>
-            <a:off x="14875222" y="8543925"/>
+            <a:off x="14887277" y="8543925"/>
             <a:ext cx="2345978" cy="228600"/>
           </a:xfrm>
           <a:prstGeom prst="rect">
@@ -2037,7 +2037,7 @@
                 <a:ea typeface="Arial" pitchFamily="34" charset="-122"/>
                 <a:cs typeface="Arial" pitchFamily="34" charset="-120"/>
               </a:rPr>
-              <a:t>How your roles performed vs. benchmark.</a:t>
+              <a:t>How your roles performed vs. benchmark</a:t>
             </a:r>
             <a:endParaRPr lang="en-US" sz="4800" dirty="0">
               <a:latin typeface="DM Sans 14pt" pitchFamily="2" charset="77"/>
@@ -3301,7 +3301,7 @@
                 <a:ea typeface="Arial" pitchFamily="34" charset="-122"/>
                 <a:cs typeface="Arial" pitchFamily="34" charset="-120"/>
               </a:rPr>
-              <a:t>Your average vs. the market.</a:t>
+              <a:t>Your average vs. the market</a:t>
             </a:r>
             <a:endParaRPr lang="en-US" sz="4800" dirty="0">
               <a:latin typeface="DM Sans 14pt" pitchFamily="2" charset="77"/>
@@ -4840,7 +4840,7 @@
                 <a:ea typeface="Arial" pitchFamily="34" charset="-122"/>
                 <a:cs typeface="Arial" pitchFamily="34" charset="-120"/>
               </a:rPr>
-              <a:t>Where your applies came from.</a:t>
+              <a:t>Where your applies came from</a:t>
             </a:r>
             <a:endParaRPr lang="en-US" sz="4800" dirty="0">
               <a:latin typeface="DM Sans 14pt" pitchFamily="2" charset="77"/>
@@ -5789,7 +5789,7 @@
                 <a:ea typeface="Arial" pitchFamily="34" charset="-122"/>
                 <a:cs typeface="Arial" pitchFamily="34" charset="-120"/>
               </a:rPr>
-              <a:t>Return on your subscription.</a:t>
+              <a:t>Return on your subscription</a:t>
             </a:r>
             <a:endParaRPr lang="en-US" sz="4800" dirty="0">
               <a:latin typeface="DM Sans 14pt" pitchFamily="2" charset="77"/>
@@ -7431,7 +7431,7 @@
                 <a:ea typeface="Arial" pitchFamily="34" charset="-122"/>
                 <a:cs typeface="Arial" pitchFamily="34" charset="-120"/>
               </a:rPr>
-              <a:t>Which channels worked hardest.</a:t>
+              <a:t>Which channels worked hardest</a:t>
             </a:r>
             <a:endParaRPr lang="en-US" sz="4800" dirty="0">
               <a:latin typeface="DM Sans 14pt" pitchFamily="2" charset="77"/>
@@ -8523,7 +8523,7 @@
                 <a:ea typeface="Arial" pitchFamily="34" charset="-122"/>
                 <a:cs typeface="Arial" pitchFamily="34" charset="-120"/>
               </a:rPr>
-              <a:t>what's next.</a:t>
+              <a:t>what's next</a:t>
             </a:r>
             <a:endParaRPr lang="en-US" sz="13500" dirty="0">
               <a:latin typeface="DM Sans 14pt" pitchFamily="2" charset="77"/>
@@ -8804,7 +8804,7 @@
           <a:ln/>
         </p:spPr>
         <p:txBody>
-          <a:bodyPr/>
+          <a:bodyPr anchor="ctr"/>
           <a:lstStyle/>
           <a:p>
             <a:r>
@@ -8948,7 +8948,7 @@
           <a:ln/>
         </p:spPr>
         <p:txBody>
-          <a:bodyPr/>
+          <a:bodyPr anchor="ctr"/>
           <a:lstStyle/>
           <a:p>
             <a:r>

--- a/Renewals.pptx
+++ b/Renewals.pptx
@@ -5,7 +5,7 @@
     <p:sldMasterId id="2147483648" r:id="rId1"/>
   </p:sldMasterIdLst>
   <p:notesMasterIdLst>
-    <p:notesMasterId r:id="rId9"/>
+    <p:notesMasterId r:id="rId10"/>
   </p:notesMasterIdLst>
   <p:sldIdLst>
     <p:sldId id="256" r:id="rId2"/>
@@ -14,7 +14,8 @@
     <p:sldId id="259" r:id="rId5"/>
     <p:sldId id="260" r:id="rId6"/>
     <p:sldId id="261" r:id="rId7"/>
-    <p:sldId id="262" r:id="rId8"/>
+    <p:sldId id="263" r:id="rId8"/>
+    <p:sldId id="262" r:id="rId9"/>
   </p:sldIdLst>
   <p:sldSz cx="18288000" cy="10287000"/>
   <p:notesSz cx="10287000" cy="18288000"/>
@@ -794,6 +795,121 @@
   <p:cSld>
     <p:spTree>
       <p:nvGrpSpPr>
+        <p:cNvPr id="1" name="">
+          <a:extLst>
+            <a:ext uri="{FF2B5EF4-FFF2-40B4-BE49-F238E27FC236}">
+              <a16:creationId xmlns:a16="http://schemas.microsoft.com/office/drawing/2014/main" id="{B552FF92-6068-B815-02DE-D970CB521387}"/>
+            </a:ext>
+          </a:extLst>
+        </p:cNvPr>
+        <p:cNvGrpSpPr/>
+        <p:nvPr/>
+      </p:nvGrpSpPr>
+      <p:grpSpPr>
+        <a:xfrm>
+          <a:off x="0" y="0"/>
+          <a:ext cx="0" cy="0"/>
+          <a:chOff x="0" y="0"/>
+          <a:chExt cx="0" cy="0"/>
+        </a:xfrm>
+      </p:grpSpPr>
+      <p:sp>
+        <p:nvSpPr>
+          <p:cNvPr id="2" name="Slide Image Placeholder 1">
+            <a:extLst>
+              <a:ext uri="{FF2B5EF4-FFF2-40B4-BE49-F238E27FC236}">
+                <a16:creationId xmlns:a16="http://schemas.microsoft.com/office/drawing/2014/main" id="{0CADB017-CA4C-82FE-5FE7-0A1FC95D69C8}"/>
+              </a:ext>
+            </a:extLst>
+          </p:cNvPr>
+          <p:cNvSpPr>
+            <a:spLocks noGrp="1" noRot="1" noChangeAspect="1"/>
+          </p:cNvSpPr>
+          <p:nvPr>
+            <p:ph type="sldImg"/>
+          </p:nvPr>
+        </p:nvSpPr>
+        <p:spPr/>
+        <p:txBody>
+          <a:bodyPr/>
+          <a:lstStyle/>
+          <a:p>
+            <a:endParaRPr lang="en-GB"/>
+          </a:p>
+        </p:txBody>
+      </p:sp>
+      <p:sp>
+        <p:nvSpPr>
+          <p:cNvPr id="3" name="Notes Placeholder 2">
+            <a:extLst>
+              <a:ext uri="{FF2B5EF4-FFF2-40B4-BE49-F238E27FC236}">
+                <a16:creationId xmlns:a16="http://schemas.microsoft.com/office/drawing/2014/main" id="{D504ADF5-95FD-749B-6252-370C2599F338}"/>
+              </a:ext>
+            </a:extLst>
+          </p:cNvPr>
+          <p:cNvSpPr>
+            <a:spLocks noGrp="1"/>
+          </p:cNvSpPr>
+          <p:nvPr>
+            <p:ph type="body" idx="1"/>
+          </p:nvPr>
+        </p:nvSpPr>
+        <p:spPr/>
+        <p:txBody>
+          <a:bodyPr/>
+          <a:lstStyle/>
+          <a:p>
+            <a:endParaRPr lang="en-US" dirty="0"/>
+          </a:p>
+        </p:txBody>
+      </p:sp>
+      <p:sp>
+        <p:nvSpPr>
+          <p:cNvPr id="4" name="Slide Number Placeholder 3">
+            <a:extLst>
+              <a:ext uri="{FF2B5EF4-FFF2-40B4-BE49-F238E27FC236}">
+                <a16:creationId xmlns:a16="http://schemas.microsoft.com/office/drawing/2014/main" id="{8E1F8A82-35DA-6EFF-1274-237623735FDE}"/>
+              </a:ext>
+            </a:extLst>
+          </p:cNvPr>
+          <p:cNvSpPr>
+            <a:spLocks noGrp="1"/>
+          </p:cNvSpPr>
+          <p:nvPr>
+            <p:ph type="sldNum" sz="quarter" idx="10"/>
+          </p:nvPr>
+        </p:nvSpPr>
+        <p:spPr/>
+        <p:txBody>
+          <a:bodyPr/>
+          <a:lstStyle/>
+          <a:p>
+            <a:fld id="{F7021451-1387-4CA6-816F-3879F97B5CBC}" type="slidenum">
+              <a:rPr lang="en-US"/>
+              <a:t>7</a:t>
+            </a:fld>
+            <a:endParaRPr lang="en-US"/>
+          </a:p>
+        </p:txBody>
+      </p:sp>
+    </p:spTree>
+    <p:extLst>
+      <p:ext uri="{BB962C8B-B14F-4D97-AF65-F5344CB8AC3E}">
+        <p14:creationId xmlns:p14="http://schemas.microsoft.com/office/powerpoint/2010/main" val="1039301045"/>
+      </p:ext>
+    </p:extLst>
+  </p:cSld>
+  <p:clrMapOvr>
+    <a:masterClrMapping/>
+  </p:clrMapOvr>
+</p:notes>
+</file>
+
+<file path=ppt/notesSlides/notesSlide8.xml><?xml version="1.0" encoding="utf-8"?>
+<p:notes xmlns:a="http://schemas.openxmlformats.org/drawingml/2006/main" xmlns:r="http://schemas.openxmlformats.org/officeDocument/2006/relationships" xmlns:p="http://schemas.openxmlformats.org/presentationml/2006/main">
+  <p:cSld>
+    <p:spTree>
+      <p:nvGrpSpPr>
         <p:cNvPr id="1" name=""/>
         <p:cNvGrpSpPr/>
         <p:nvPr/>
@@ -861,7 +977,7 @@
           <a:p>
             <a:fld id="{F7021451-1387-4CA6-816F-3879F97B5CBC}" type="slidenum">
               <a:rPr lang="en-US"/>
-              <a:t>7</a:t>
+              <a:t>8</a:t>
             </a:fld>
             <a:endParaRPr lang="en-US"/>
           </a:p>
@@ -907,6 +1023,22 @@
   <p:clrMapOvr>
     <a:masterClrMapping/>
   </p:clrMapOvr>
+  <p:extLst>
+    <p:ext uri="{DCECCB84-F9BA-43D5-87BE-67443E8EF086}">
+      <p15:sldGuideLst xmlns:p15="http://schemas.microsoft.com/office/powerpoint/2012/main">
+        <p15:guide id="1" orient="horz" pos="3240" userDrawn="1">
+          <p15:clr>
+            <a:srgbClr val="FBAE40"/>
+          </p15:clr>
+        </p15:guide>
+        <p15:guide id="2" pos="5760" userDrawn="1">
+          <p15:clr>
+            <a:srgbClr val="FBAE40"/>
+          </p15:clr>
+        </p15:guide>
+      </p15:sldGuideLst>
+    </p:ext>
+  </p:extLst>
 </p:sldLayout>
 </file>
 
@@ -1563,7 +1695,7 @@
         <p:spPr>
           <a:xfrm>
             <a:off x="1143000" y="8582025"/>
-            <a:ext cx="4130129" cy="540990"/>
+            <a:ext cx="6263640" cy="540990"/>
           </a:xfrm>
           <a:prstGeom prst="roundRect">
             <a:avLst>
@@ -1805,49 +1937,6 @@
               <a:t>Go places. Go public.</a:t>
             </a:r>
             <a:endParaRPr lang="en-US" sz="900" dirty="0"/>
-          </a:p>
-        </p:txBody>
-      </p:sp>
-      <p:sp>
-        <p:nvSpPr>
-          <p:cNvPr id="17" name="Text 15"/>
-          <p:cNvSpPr/>
-          <p:nvPr/>
-        </p:nvSpPr>
-        <p:spPr>
-          <a:xfrm>
-            <a:off x="17233255" y="9747945"/>
-            <a:ext cx="521345" cy="190500"/>
-          </a:xfrm>
-          <a:prstGeom prst="rect">
-            <a:avLst/>
-          </a:prstGeom>
-          <a:noFill/>
-          <a:ln/>
-        </p:spPr>
-        <p:txBody>
-          <a:bodyPr wrap="square" lIns="25400" tIns="25400" rIns="25400" bIns="25400" rtlCol="0" anchor="t">
-            <a:normAutofit fontScale="92500" lnSpcReduction="10000"/>
-          </a:bodyPr>
-          <a:lstStyle/>
-          <a:p>
-            <a:pPr marL="0" indent="0" algn="l">
-              <a:buNone/>
-            </a:pPr>
-            <a:r>
-              <a:rPr lang="en-US" sz="1050" kern="0" spc="42" dirty="0">
-                <a:solidFill>
-                  <a:srgbClr val="FFFFFF">
-                    <a:alpha val="63000"/>
-                  </a:srgbClr>
-                </a:solidFill>
-                <a:latin typeface="Arial" pitchFamily="34" charset="0"/>
-                <a:ea typeface="Arial" pitchFamily="34" charset="-122"/>
-                <a:cs typeface="Arial" pitchFamily="34" charset="-120"/>
-              </a:rPr>
-              <a:t>01 / 07</a:t>
-            </a:r>
-            <a:endParaRPr lang="en-US" sz="1050" dirty="0"/>
           </a:p>
         </p:txBody>
       </p:sp>
@@ -2014,7 +2103,9 @@
             <a:avLst/>
           </a:prstGeom>
           <a:noFill/>
-          <a:ln/>
+          <a:ln>
+            <a:noFill/>
+          </a:ln>
         </p:spPr>
         <p:txBody>
           <a:bodyPr wrap="square" lIns="25400" tIns="25400" rIns="25400" bIns="25400" rtlCol="0" anchor="t">
@@ -2053,8 +2144,8 @@
         </p:nvSpPr>
         <p:spPr>
           <a:xfrm>
-            <a:off x="762000" y="1890712"/>
-            <a:ext cx="8910097" cy="7443788"/>
+            <a:off x="762000" y="1866901"/>
+            <a:ext cx="8921750" cy="7481189"/>
           </a:xfrm>
           <a:prstGeom prst="roundRect">
             <a:avLst>
@@ -2089,12 +2180,12 @@
         </p:nvSpPr>
         <p:spPr>
           <a:xfrm>
-            <a:off x="857249" y="2319904"/>
-            <a:ext cx="8704459" cy="6919345"/>
+            <a:off x="868675" y="2297616"/>
+            <a:ext cx="8708400" cy="6940549"/>
           </a:xfrm>
           <a:prstGeom prst="roundRect">
             <a:avLst>
-              <a:gd name="adj" fmla="val 4022"/>
+              <a:gd name="adj" fmla="val 2570"/>
             </a:avLst>
           </a:prstGeom>
           <a:solidFill>
@@ -2154,20 +2245,73 @@
       </p:sp>
       <p:sp>
         <p:nvSpPr>
-          <p:cNvPr id="29" name="Text 27"/>
-          <p:cNvSpPr/>
-          <p:nvPr/>
-        </p:nvSpPr>
-        <p:spPr>
-          <a:xfrm>
-            <a:off x="12995755" y="3391422"/>
-            <a:ext cx="4741200" cy="488865"/>
+          <p:cNvPr id="38" name="Text 36"/>
+          <p:cNvSpPr/>
+          <p:nvPr/>
+        </p:nvSpPr>
+        <p:spPr>
+          <a:xfrm>
+            <a:off x="609600" y="9753600"/>
+            <a:ext cx="2373511" cy="190500"/>
           </a:xfrm>
           <a:prstGeom prst="rect">
             <a:avLst/>
           </a:prstGeom>
           <a:noFill/>
           <a:ln/>
+        </p:spPr>
+        <p:txBody>
+          <a:bodyPr wrap="square" lIns="25400" tIns="25400" rIns="25400" bIns="25400" rtlCol="0" anchor="t">
+            <a:normAutofit fontScale="85000" lnSpcReduction="10000"/>
+          </a:bodyPr>
+          <a:lstStyle/>
+          <a:p>
+            <a:pPr marL="0" indent="0" algn="l">
+              <a:buNone/>
+            </a:pPr>
+            <a:r>
+              <a:rPr lang="en-US" sz="1050" kern="0" spc="42" dirty="0">
+                <a:solidFill>
+                  <a:srgbClr val="111111">
+                    <a:alpha val="63000"/>
+                  </a:srgbClr>
+                </a:solidFill>
+                <a:latin typeface="DM Sans 14pt" pitchFamily="2" charset="77"/>
+                <a:ea typeface="Arial" pitchFamily="34" charset="-122"/>
+                <a:cs typeface="Arial" pitchFamily="34" charset="-120"/>
+              </a:rPr>
+              <a:t>{{client_name}} · Advertising Report</a:t>
+            </a:r>
+            <a:endParaRPr lang="en-US" sz="1050" dirty="0">
+              <a:latin typeface="DM Sans 14pt" pitchFamily="2" charset="77"/>
+            </a:endParaRPr>
+          </a:p>
+        </p:txBody>
+      </p:sp>
+      <p:sp>
+        <p:nvSpPr>
+          <p:cNvPr id="7" name="Text 3">
+            <a:extLst>
+              <a:ext uri="{FF2B5EF4-FFF2-40B4-BE49-F238E27FC236}">
+                <a16:creationId xmlns:a16="http://schemas.microsoft.com/office/drawing/2014/main" id="{6F7C33C0-2054-2D5C-F29F-CD13941B3BB5}"/>
+              </a:ext>
+            </a:extLst>
+          </p:cNvPr>
+          <p:cNvSpPr/>
+          <p:nvPr/>
+        </p:nvSpPr>
+        <p:spPr>
+          <a:xfrm>
+            <a:off x="12995755" y="575051"/>
+            <a:ext cx="4703047" cy="280800"/>
+          </a:xfrm>
+          <a:prstGeom prst="rect">
+            <a:avLst/>
+          </a:prstGeom>
+          <a:noFill/>
+          <a:ln>
+            <a:noFill/>
+          </a:ln>
         </p:spPr>
         <p:txBody>
           <a:bodyPr wrap="square" lIns="25400" tIns="25400" rIns="25400" bIns="25400" rtlCol="0" anchor="t">
@@ -2175,11 +2319,11 @@
           </a:bodyPr>
           <a:lstStyle/>
           <a:p>
-            <a:pPr marL="0" indent="0" algn="l">
+            <a:pPr marL="0" indent="0" algn="r">
               <a:buNone/>
             </a:pPr>
             <a:r>
-              <a:rPr lang="en-US" sz="2400" b="1" kern="0" spc="368" dirty="0">
+              <a:rPr lang="en-US" sz="1200" kern="0" spc="420" dirty="0">
                 <a:solidFill>
                   <a:srgbClr val="643791"/>
                 </a:solidFill>
@@ -2187,510 +2331,14 @@
                 <a:ea typeface="Arial" pitchFamily="34" charset="-122"/>
                 <a:cs typeface="Arial" pitchFamily="34" charset="-120"/>
               </a:rPr>
-              <a:t>COMMENTARY</a:t>
-            </a:r>
-            <a:endParaRPr lang="en-US" sz="2400" b="1" dirty="0">
-              <a:latin typeface="DM Sans 14pt" pitchFamily="2" charset="77"/>
-            </a:endParaRPr>
-          </a:p>
-        </p:txBody>
-      </p:sp>
-      <p:sp>
-        <p:nvSpPr>
-          <p:cNvPr id="30" name="Shape 28"/>
-          <p:cNvSpPr/>
-          <p:nvPr/>
-        </p:nvSpPr>
-        <p:spPr>
-          <a:xfrm>
-            <a:off x="12995755" y="3880287"/>
-            <a:ext cx="4703047" cy="1182447"/>
-          </a:xfrm>
-          <a:prstGeom prst="roundRect">
-            <a:avLst>
-              <a:gd name="adj" fmla="val 14191"/>
-            </a:avLst>
-          </a:prstGeom>
-          <a:solidFill>
-            <a:srgbClr val="643791">
-              <a:alpha val="8000"/>
-            </a:srgbClr>
-          </a:solidFill>
-          <a:ln/>
-        </p:spPr>
-        <p:txBody>
-          <a:bodyPr/>
-          <a:lstStyle/>
-          <a:p>
-            <a:r>
-              <a:rPr lang="en-US" sz="1400" dirty="0">
-                <a:solidFill>
-                  <a:srgbClr val="643791"/>
-                </a:solidFill>
-                <a:latin typeface="DM Sans 14pt" pitchFamily="2" charset="77"/>
-                <a:ea typeface="Arial" pitchFamily="34" charset="-122"/>
-                <a:cs typeface="Arial" pitchFamily="34" charset="-120"/>
-              </a:rPr>
-              <a:t>{{</a:t>
-            </a:r>
-            <a:r>
-              <a:rPr lang="en-US" sz="1400" dirty="0" err="1">
-                <a:solidFill>
-                  <a:srgbClr val="643791"/>
-                </a:solidFill>
-                <a:latin typeface="DM Sans 14pt" pitchFamily="2" charset="77"/>
-                <a:ea typeface="Arial" pitchFamily="34" charset="-122"/>
-                <a:cs typeface="Arial" pitchFamily="34" charset="-120"/>
-              </a:rPr>
-              <a:t>commentary_benchmark_intro</a:t>
-            </a:r>
-            <a:r>
-              <a:rPr lang="en-US" sz="1400" dirty="0">
-                <a:solidFill>
-                  <a:srgbClr val="643791"/>
-                </a:solidFill>
-                <a:latin typeface="DM Sans 14pt" pitchFamily="2" charset="77"/>
-                <a:ea typeface="Arial" pitchFamily="34" charset="-122"/>
-                <a:cs typeface="Arial" pitchFamily="34" charset="-120"/>
-              </a:rPr>
-              <a:t>}}</a:t>
-            </a:r>
-            <a:endParaRPr lang="en-US" sz="1400" dirty="0">
-              <a:latin typeface="DM Sans 14pt" pitchFamily="2" charset="77"/>
-            </a:endParaRPr>
-          </a:p>
-        </p:txBody>
-      </p:sp>
-      <p:sp>
-        <p:nvSpPr>
-          <p:cNvPr id="32" name="Shape 30"/>
-          <p:cNvSpPr/>
-          <p:nvPr/>
-        </p:nvSpPr>
-        <p:spPr>
-          <a:xfrm>
-            <a:off x="12995755" y="5271442"/>
-            <a:ext cx="4707474" cy="1174800"/>
-          </a:xfrm>
-          <a:prstGeom prst="roundRect">
-            <a:avLst>
-              <a:gd name="adj" fmla="val 15385"/>
-            </a:avLst>
-          </a:prstGeom>
-          <a:solidFill>
-            <a:srgbClr val="643791">
-              <a:alpha val="8000"/>
-            </a:srgbClr>
-          </a:solidFill>
-          <a:ln/>
-        </p:spPr>
-        <p:txBody>
-          <a:bodyPr/>
-          <a:lstStyle/>
-          <a:p>
-            <a:pPr>
-              <a:lnSpc>
-                <a:spcPct val="110000"/>
-              </a:lnSpc>
-            </a:pPr>
-            <a:r>
-              <a:rPr lang="en-US" sz="1400" dirty="0">
-                <a:solidFill>
-                  <a:srgbClr val="643791"/>
-                </a:solidFill>
-                <a:latin typeface="DM Sans 14pt" pitchFamily="2" charset="77"/>
-                <a:ea typeface="Arial" pitchFamily="34" charset="-122"/>
-                <a:cs typeface="Arial" pitchFamily="34" charset="-120"/>
-              </a:rPr>
-              <a:t>{{commentary_benchmark_point_1}}</a:t>
-            </a:r>
-            <a:endParaRPr lang="en-US" sz="1400" dirty="0">
-              <a:latin typeface="DM Sans 14pt" pitchFamily="2" charset="77"/>
-            </a:endParaRPr>
-          </a:p>
-        </p:txBody>
-      </p:sp>
-      <p:sp>
-        <p:nvSpPr>
-          <p:cNvPr id="34" name="Shape 32"/>
-          <p:cNvSpPr/>
-          <p:nvPr/>
-        </p:nvSpPr>
-        <p:spPr>
-          <a:xfrm>
-            <a:off x="12995755" y="6662597"/>
-            <a:ext cx="4707474" cy="1174410"/>
-          </a:xfrm>
-          <a:prstGeom prst="roundRect">
-            <a:avLst>
-              <a:gd name="adj" fmla="val 15385"/>
-            </a:avLst>
-          </a:prstGeom>
-          <a:solidFill>
-            <a:srgbClr val="643791">
-              <a:alpha val="8000"/>
-            </a:srgbClr>
-          </a:solidFill>
-          <a:ln/>
-        </p:spPr>
-        <p:txBody>
-          <a:bodyPr/>
-          <a:lstStyle/>
-          <a:p>
-            <a:pPr>
-              <a:lnSpc>
-                <a:spcPct val="110000"/>
-              </a:lnSpc>
-            </a:pPr>
-            <a:r>
-              <a:rPr lang="en-US" sz="1400" dirty="0">
-                <a:solidFill>
-                  <a:srgbClr val="643791"/>
-                </a:solidFill>
-                <a:latin typeface="DM Sans 14pt" pitchFamily="2" charset="77"/>
-                <a:ea typeface="Arial" pitchFamily="34" charset="-122"/>
-                <a:cs typeface="Arial" pitchFamily="34" charset="-120"/>
-              </a:rPr>
-              <a:t>{{commentary_benchmark_point_2}}</a:t>
-            </a:r>
-            <a:endParaRPr lang="en-US" sz="1400" dirty="0">
-              <a:latin typeface="DM Sans 14pt" pitchFamily="2" charset="77"/>
-            </a:endParaRPr>
-          </a:p>
-        </p:txBody>
-      </p:sp>
-      <p:sp>
-        <p:nvSpPr>
-          <p:cNvPr id="38" name="Text 36"/>
-          <p:cNvSpPr/>
-          <p:nvPr/>
-        </p:nvSpPr>
-        <p:spPr>
-          <a:xfrm>
-            <a:off x="609600" y="9753600"/>
-            <a:ext cx="2373511" cy="190500"/>
-          </a:xfrm>
-          <a:prstGeom prst="rect">
-            <a:avLst/>
-          </a:prstGeom>
-          <a:noFill/>
-          <a:ln/>
-        </p:spPr>
-        <p:txBody>
-          <a:bodyPr wrap="square" lIns="25400" tIns="25400" rIns="25400" bIns="25400" rtlCol="0" anchor="t">
-            <a:normAutofit fontScale="85000" lnSpcReduction="10000"/>
-          </a:bodyPr>
-          <a:lstStyle/>
-          <a:p>
-            <a:pPr marL="0" indent="0" algn="l">
-              <a:buNone/>
-            </a:pPr>
-            <a:r>
-              <a:rPr lang="en-US" sz="1050" kern="0" spc="42" dirty="0">
-                <a:solidFill>
-                  <a:srgbClr val="111111">
-                    <a:alpha val="63000"/>
-                  </a:srgbClr>
-                </a:solidFill>
-                <a:latin typeface="DM Sans 14pt" pitchFamily="2" charset="77"/>
-                <a:ea typeface="Arial" pitchFamily="34" charset="-122"/>
-                <a:cs typeface="Arial" pitchFamily="34" charset="-120"/>
-              </a:rPr>
-              <a:t>{{client_name}} · Advertising Report</a:t>
-            </a:r>
-            <a:endParaRPr lang="en-US" sz="1050" dirty="0">
-              <a:latin typeface="DM Sans 14pt" pitchFamily="2" charset="77"/>
-            </a:endParaRPr>
-          </a:p>
-        </p:txBody>
-      </p:sp>
-      <p:sp>
-        <p:nvSpPr>
-          <p:cNvPr id="39" name="Text 37"/>
-          <p:cNvSpPr/>
-          <p:nvPr/>
-        </p:nvSpPr>
-        <p:spPr>
-          <a:xfrm>
-            <a:off x="17233255" y="9753600"/>
-            <a:ext cx="521345" cy="190500"/>
-          </a:xfrm>
-          <a:prstGeom prst="rect">
-            <a:avLst/>
-          </a:prstGeom>
-          <a:noFill/>
-          <a:ln/>
-        </p:spPr>
-        <p:txBody>
-          <a:bodyPr wrap="square" lIns="25400" tIns="25400" rIns="25400" bIns="25400" rtlCol="0" anchor="t">
-            <a:normAutofit fontScale="92500" lnSpcReduction="10000"/>
-          </a:bodyPr>
-          <a:lstStyle/>
-          <a:p>
-            <a:pPr marL="0" indent="0" algn="l">
-              <a:buNone/>
-            </a:pPr>
-            <a:r>
-              <a:rPr lang="en-US" sz="1050" kern="0" spc="42" dirty="0">
-                <a:solidFill>
-                  <a:srgbClr val="111111">
-                    <a:alpha val="63000"/>
-                  </a:srgbClr>
-                </a:solidFill>
-                <a:latin typeface="DM Sans 14pt" pitchFamily="2" charset="77"/>
-                <a:ea typeface="Arial" pitchFamily="34" charset="-122"/>
-                <a:cs typeface="Arial" pitchFamily="34" charset="-120"/>
-              </a:rPr>
-              <a:t>02 / 07</a:t>
-            </a:r>
-            <a:endParaRPr lang="en-US" sz="1050" dirty="0">
-              <a:latin typeface="DM Sans 14pt" pitchFamily="2" charset="77"/>
-            </a:endParaRPr>
-          </a:p>
-        </p:txBody>
-      </p:sp>
-      <p:sp>
-        <p:nvSpPr>
-          <p:cNvPr id="46" name="Shape 28">
-            <a:extLst>
-              <a:ext uri="{FF2B5EF4-FFF2-40B4-BE49-F238E27FC236}">
-                <a16:creationId xmlns:a16="http://schemas.microsoft.com/office/drawing/2014/main" id="{6BF6FE9E-6B60-55B6-FFB2-3A3997294303}"/>
-              </a:ext>
-            </a:extLst>
-          </p:cNvPr>
-          <p:cNvSpPr/>
-          <p:nvPr/>
-        </p:nvSpPr>
-        <p:spPr>
-          <a:xfrm>
-            <a:off x="12995755" y="1890712"/>
-            <a:ext cx="4703047" cy="1182447"/>
-          </a:xfrm>
-          <a:prstGeom prst="roundRect">
-            <a:avLst>
-              <a:gd name="adj" fmla="val 14191"/>
-            </a:avLst>
-          </a:prstGeom>
-          <a:solidFill>
-            <a:srgbClr val="643791">
-              <a:alpha val="8000"/>
-            </a:srgbClr>
-          </a:solidFill>
-          <a:ln/>
-        </p:spPr>
-        <p:txBody>
-          <a:bodyPr/>
-          <a:lstStyle/>
-          <a:p>
-            <a:r>
-              <a:rPr lang="en-GB" sz="1400" dirty="0">
-                <a:solidFill>
-                  <a:srgbClr val="643791"/>
-                </a:solidFill>
-                <a:latin typeface="DM Sans 14pt" pitchFamily="2" charset="77"/>
-              </a:rPr>
-              <a:t>{{</a:t>
-            </a:r>
-            <a:r>
-              <a:rPr lang="en-GB" sz="1400" dirty="0" err="1">
-                <a:solidFill>
-                  <a:srgbClr val="643791"/>
-                </a:solidFill>
-                <a:latin typeface="DM Sans 14pt" pitchFamily="2" charset="77"/>
-              </a:rPr>
-              <a:t>chart_explainer_benchmark_scatter</a:t>
-            </a:r>
-            <a:r>
-              <a:rPr lang="en-GB" sz="1400" dirty="0">
-                <a:solidFill>
-                  <a:srgbClr val="643791"/>
-                </a:solidFill>
-                <a:latin typeface="DM Sans 14pt" pitchFamily="2" charset="77"/>
-              </a:rPr>
-              <a:t>}}</a:t>
-            </a:r>
-            <a:endParaRPr lang="en-US" sz="1400" dirty="0">
-              <a:solidFill>
-                <a:srgbClr val="643791"/>
-              </a:solidFill>
-              <a:latin typeface="DM Sans 14pt" pitchFamily="2" charset="77"/>
-            </a:endParaRPr>
-          </a:p>
-        </p:txBody>
-      </p:sp>
-      <p:sp>
-        <p:nvSpPr>
-          <p:cNvPr id="49" name="Shape 32">
-            <a:extLst>
-              <a:ext uri="{FF2B5EF4-FFF2-40B4-BE49-F238E27FC236}">
-                <a16:creationId xmlns:a16="http://schemas.microsoft.com/office/drawing/2014/main" id="{49E04A68-847E-82E3-4038-6247474AA428}"/>
-              </a:ext>
-            </a:extLst>
-          </p:cNvPr>
-          <p:cNvSpPr/>
-          <p:nvPr/>
-        </p:nvSpPr>
-        <p:spPr>
-          <a:xfrm>
-            <a:off x="12995755" y="8053326"/>
-            <a:ext cx="4707474" cy="1174410"/>
-          </a:xfrm>
-          <a:prstGeom prst="roundRect">
-            <a:avLst>
-              <a:gd name="adj" fmla="val 15385"/>
-            </a:avLst>
-          </a:prstGeom>
-          <a:solidFill>
-            <a:srgbClr val="643791">
-              <a:alpha val="8000"/>
-            </a:srgbClr>
-          </a:solidFill>
-          <a:ln/>
-        </p:spPr>
-        <p:txBody>
-          <a:bodyPr/>
-          <a:lstStyle/>
-          <a:p>
-            <a:r>
-              <a:rPr lang="en-US" sz="1400" dirty="0">
-                <a:solidFill>
-                  <a:srgbClr val="643791"/>
-                </a:solidFill>
-                <a:latin typeface="DM Sans 14pt" pitchFamily="2" charset="77"/>
-                <a:ea typeface="Arial" pitchFamily="34" charset="-122"/>
-                <a:cs typeface="Arial" pitchFamily="34" charset="-120"/>
-              </a:rPr>
-              <a:t>{{commentary_benchmark_point_3}}</a:t>
-            </a:r>
-            <a:endParaRPr lang="en-US" sz="1400" dirty="0">
-              <a:latin typeface="DM Sans 14pt" pitchFamily="2" charset="77"/>
-            </a:endParaRPr>
-          </a:p>
-        </p:txBody>
-      </p:sp>
-      <p:grpSp>
-        <p:nvGrpSpPr>
-          <p:cNvPr id="61" name="Group 60">
-            <a:extLst>
-              <a:ext uri="{FF2B5EF4-FFF2-40B4-BE49-F238E27FC236}">
-                <a16:creationId xmlns:a16="http://schemas.microsoft.com/office/drawing/2014/main" id="{84277861-6ED0-04AA-BFD6-B3A1BD64266B}"/>
-              </a:ext>
-            </a:extLst>
-          </p:cNvPr>
-          <p:cNvGrpSpPr/>
-          <p:nvPr/>
-        </p:nvGrpSpPr>
-        <p:grpSpPr>
-          <a:xfrm>
-            <a:off x="12995755" y="575051"/>
-            <a:ext cx="4703047" cy="1096551"/>
-            <a:chOff x="12995755" y="575051"/>
-            <a:chExt cx="4703047" cy="1096551"/>
-          </a:xfrm>
-        </p:grpSpPr>
-        <p:sp>
-          <p:nvSpPr>
-            <p:cNvPr id="7" name="Text 3">
-              <a:extLst>
-                <a:ext uri="{FF2B5EF4-FFF2-40B4-BE49-F238E27FC236}">
-                  <a16:creationId xmlns:a16="http://schemas.microsoft.com/office/drawing/2014/main" id="{6F7C33C0-2054-2D5C-F29F-CD13941B3BB5}"/>
-                </a:ext>
-              </a:extLst>
-            </p:cNvPr>
-            <p:cNvSpPr/>
-            <p:nvPr/>
-          </p:nvSpPr>
-          <p:spPr>
-            <a:xfrm>
-              <a:off x="12995755" y="575051"/>
-              <a:ext cx="4703047" cy="297317"/>
-            </a:xfrm>
-            <a:prstGeom prst="rect">
-              <a:avLst/>
-            </a:prstGeom>
-            <a:noFill/>
-            <a:ln/>
-          </p:spPr>
-          <p:txBody>
-            <a:bodyPr wrap="square" lIns="25400" tIns="25400" rIns="25400" bIns="25400" rtlCol="0" anchor="t">
-              <a:normAutofit/>
-            </a:bodyPr>
-            <a:lstStyle/>
-            <a:p>
-              <a:pPr marL="0" indent="0" algn="r">
-                <a:buNone/>
-              </a:pPr>
-              <a:r>
-                <a:rPr lang="en-US" sz="1200" kern="0" spc="420" dirty="0">
-                  <a:solidFill>
-                    <a:srgbClr val="643791"/>
-                  </a:solidFill>
-                  <a:latin typeface="DM Sans 14pt" pitchFamily="2" charset="77"/>
-                  <a:ea typeface="Arial" pitchFamily="34" charset="-122"/>
-                  <a:cs typeface="Arial" pitchFamily="34" charset="-120"/>
-                </a:rPr>
-                <a:t>01 · BENCHMARKING JOBS</a:t>
-              </a:r>
-              <a:endParaRPr lang="en-US" sz="1200" dirty="0">
-                <a:latin typeface="DM Sans 14pt" pitchFamily="2" charset="77"/>
-              </a:endParaRPr>
-            </a:p>
-          </p:txBody>
-        </p:sp>
-        <p:sp>
-          <p:nvSpPr>
-            <p:cNvPr id="58" name="Text 21">
-              <a:extLst>
-                <a:ext uri="{FF2B5EF4-FFF2-40B4-BE49-F238E27FC236}">
-                  <a16:creationId xmlns:a16="http://schemas.microsoft.com/office/drawing/2014/main" id="{F285D6AD-CCAA-2178-0719-E68B4ED056A3}"/>
-                </a:ext>
-              </a:extLst>
-            </p:cNvPr>
-            <p:cNvSpPr/>
-            <p:nvPr/>
-          </p:nvSpPr>
-          <p:spPr>
-            <a:xfrm>
-              <a:off x="12995755" y="933450"/>
-              <a:ext cx="4703047" cy="738152"/>
-            </a:xfrm>
-            <a:prstGeom prst="rect">
-              <a:avLst/>
-            </a:prstGeom>
-            <a:noFill/>
-            <a:ln/>
-          </p:spPr>
-          <p:txBody>
-            <a:bodyPr wrap="square" lIns="25400" tIns="25400" rIns="25400" bIns="25400" rtlCol="0" anchor="t">
-              <a:normAutofit fontScale="92500" lnSpcReduction="20000"/>
-            </a:bodyPr>
-            <a:lstStyle/>
-            <a:p>
-              <a:pPr>
-                <a:lnSpc>
-                  <a:spcPct val="140000"/>
-                </a:lnSpc>
-              </a:pPr>
-              <a:r>
-                <a:rPr lang="en-US" sz="1350" dirty="0">
-                  <a:solidFill>
-                    <a:srgbClr val="111111">
-                      <a:alpha val="63000"/>
-                    </a:srgbClr>
-                  </a:solidFill>
-                  <a:latin typeface="DM Sans 14pt" pitchFamily="2" charset="77"/>
-                  <a:ea typeface="Arial" pitchFamily="34" charset="-122"/>
-                  <a:cs typeface="Arial" pitchFamily="34" charset="-120"/>
-                </a:rPr>
-                <a:t>Each dot is one of your vacancies, positioned by views and apply clicks relative to our market benchmark. The top-right quadrant is exceeding benchmark on both.</a:t>
-              </a:r>
-              <a:endParaRPr lang="en-US" sz="1350" dirty="0">
-                <a:latin typeface="DM Sans 14pt" pitchFamily="2" charset="77"/>
-              </a:endParaRPr>
-            </a:p>
-          </p:txBody>
-        </p:sp>
-      </p:grpSp>
+              <a:t>01 · BENCHMARKING JOBS</a:t>
+            </a:r>
+            <a:endParaRPr lang="en-US" sz="1200" dirty="0">
+              <a:latin typeface="DM Sans 14pt" pitchFamily="2" charset="77"/>
+            </a:endParaRPr>
+          </a:p>
+        </p:txBody>
+      </p:sp>
       <p:sp>
         <p:nvSpPr>
           <p:cNvPr id="8" name="Shape 6"/>
@@ -2699,8 +2347,8 @@
         </p:nvSpPr>
         <p:spPr>
           <a:xfrm>
-            <a:off x="9986861" y="1890711"/>
-            <a:ext cx="2710403" cy="2354060"/>
+            <a:off x="9986861" y="1866899"/>
+            <a:ext cx="2721077" cy="2354400"/>
           </a:xfrm>
           <a:prstGeom prst="roundRect">
             <a:avLst/>
@@ -2742,8 +2390,8 @@
         </p:nvSpPr>
         <p:spPr>
           <a:xfrm>
-            <a:off x="10151651" y="2089846"/>
-            <a:ext cx="2380822" cy="1765657"/>
+            <a:off x="10094599" y="1978372"/>
+            <a:ext cx="2505600" cy="1904400"/>
           </a:xfrm>
           <a:prstGeom prst="roundRect">
             <a:avLst>
@@ -2758,12 +2406,12 @@
           <a:ln/>
         </p:spPr>
         <p:txBody>
-          <a:bodyPr anchor="ctr"/>
+          <a:bodyPr lIns="36000" tIns="36000" rIns="36000" bIns="36000" anchor="ctr"/>
           <a:lstStyle/>
           <a:p>
             <a:pPr algn="ctr"/>
             <a:r>
-              <a:rPr lang="en-US" sz="9600" b="1" kern="0" spc="-67" dirty="0">
+              <a:rPr lang="en-US" sz="6800" b="1" kern="0" spc="-67" dirty="0">
                 <a:solidFill>
                   <a:srgbClr val="FFFFFF"/>
                 </a:solidFill>
@@ -2774,7 +2422,7 @@
               <a:t>{{</a:t>
             </a:r>
             <a:r>
-              <a:rPr lang="en-US" sz="9600" b="1" kern="0" spc="-67" dirty="0" err="1">
+              <a:rPr lang="en-US" sz="6800" b="1" kern="0" spc="-67" dirty="0" err="1">
                 <a:solidFill>
                   <a:srgbClr val="FFFFFF"/>
                 </a:solidFill>
@@ -2785,7 +2433,7 @@
               <a:t>stat_total_jobs</a:t>
             </a:r>
             <a:r>
-              <a:rPr lang="en-US" sz="9600" b="1" kern="0" spc="-67" dirty="0">
+              <a:rPr lang="en-US" sz="6800" b="1" kern="0" spc="-67" dirty="0">
                 <a:solidFill>
                   <a:srgbClr val="FFFFFF"/>
                 </a:solidFill>
@@ -2795,39 +2443,7 @@
               </a:rPr>
               <a:t>}}</a:t>
             </a:r>
-            <a:endParaRPr lang="en-US" sz="9600" b="1" dirty="0">
-              <a:latin typeface="DM Sans 14pt" pitchFamily="2" charset="77"/>
-            </a:endParaRPr>
-          </a:p>
-        </p:txBody>
-      </p:sp>
-      <p:sp>
-        <p:nvSpPr>
-          <p:cNvPr id="11" name="Text 9"/>
-          <p:cNvSpPr/>
-          <p:nvPr/>
-        </p:nvSpPr>
-        <p:spPr>
-          <a:xfrm>
-            <a:off x="9986860" y="3862243"/>
-            <a:ext cx="2710403" cy="375788"/>
-          </a:xfrm>
-          <a:prstGeom prst="rect">
-            <a:avLst/>
-          </a:prstGeom>
-          <a:noFill/>
-          <a:ln/>
-        </p:spPr>
-        <p:txBody>
-          <a:bodyPr wrap="square" lIns="25400" tIns="25400" rIns="25400" bIns="25400" rtlCol="0" anchor="b">
-            <a:normAutofit/>
-          </a:bodyPr>
-          <a:lstStyle/>
-          <a:p>
-            <a:pPr marL="0" indent="0" algn="ctr">
-              <a:buNone/>
-            </a:pPr>
-            <a:endParaRPr lang="en-US" sz="825" dirty="0">
+            <a:endParaRPr lang="en-US" sz="6800" b="1" dirty="0">
               <a:latin typeface="DM Sans 14pt" pitchFamily="2" charset="77"/>
             </a:endParaRPr>
           </a:p>
@@ -2841,8 +2457,8 @@
         </p:nvSpPr>
         <p:spPr>
           <a:xfrm>
-            <a:off x="9986861" y="6980442"/>
-            <a:ext cx="2710403" cy="2354056"/>
+            <a:off x="9986861" y="6993690"/>
+            <a:ext cx="2721077" cy="2354400"/>
           </a:xfrm>
           <a:prstGeom prst="roundRect">
             <a:avLst/>
@@ -2884,8 +2500,8 @@
         </p:nvSpPr>
         <p:spPr>
           <a:xfrm>
-            <a:off x="10158922" y="7179577"/>
-            <a:ext cx="2379600" cy="1768026"/>
+            <a:off x="10094599" y="7088442"/>
+            <a:ext cx="2505600" cy="1904400"/>
           </a:xfrm>
           <a:prstGeom prst="roundRect">
             <a:avLst>
@@ -2901,7 +2517,7 @@
         </p:spPr>
         <p:txBody>
           <a:bodyPr lIns="0" rIns="0" anchor="ctr">
-            <a:normAutofit fontScale="92500" lnSpcReduction="20000"/>
+            <a:normAutofit fontScale="92500" lnSpcReduction="10000"/>
           </a:bodyPr>
           <a:lstStyle/>
           <a:p>
@@ -2947,8 +2563,8 @@
         </p:nvSpPr>
         <p:spPr>
           <a:xfrm>
-            <a:off x="9986861" y="4437127"/>
-            <a:ext cx="2710403" cy="2354057"/>
+            <a:off x="9986861" y="4437126"/>
+            <a:ext cx="2721077" cy="2354400"/>
           </a:xfrm>
           <a:prstGeom prst="roundRect">
             <a:avLst/>
@@ -2996,8 +2612,8 @@
         </p:nvSpPr>
         <p:spPr>
           <a:xfrm>
-            <a:off x="10144126" y="4626384"/>
-            <a:ext cx="2379600" cy="1768026"/>
+            <a:off x="10094599" y="4545126"/>
+            <a:ext cx="2505600" cy="1904400"/>
           </a:xfrm>
           <a:prstGeom prst="roundRect">
             <a:avLst/>
@@ -3008,14 +2624,14 @@
           <a:ln/>
         </p:spPr>
         <p:txBody>
-          <a:bodyPr anchor="ctr"/>
+          <a:bodyPr lIns="36000" tIns="36000" rIns="36000" bIns="36000" anchor="ctr"/>
           <a:lstStyle/>
           <a:p>
             <a:pPr algn="ctr"/>
             <a:r>
-              <a:rPr lang="en-US" sz="9600" b="1" kern="0" spc="-67" dirty="0">
-                <a:solidFill>
-                  <a:srgbClr val="240F45"/>
+              <a:rPr lang="en-US" sz="6800" b="1" kern="0" spc="-67" dirty="0">
+                <a:solidFill>
+                  <a:srgbClr val="757575"/>
                 </a:solidFill>
                 <a:latin typeface="DM Sans 14pt" pitchFamily="2" charset="77"/>
                 <a:ea typeface="Arial" pitchFamily="34" charset="-122"/>
@@ -3024,9 +2640,9 @@
               <a:t>{{</a:t>
             </a:r>
             <a:r>
-              <a:rPr lang="en-US" sz="9600" b="1" kern="0" spc="-67" dirty="0" err="1">
-                <a:solidFill>
-                  <a:srgbClr val="240F45"/>
+              <a:rPr lang="en-US" sz="6800" b="1" kern="0" spc="-67" dirty="0" err="1">
+                <a:solidFill>
+                  <a:srgbClr val="757575"/>
                 </a:solidFill>
                 <a:latin typeface="DM Sans 14pt" pitchFamily="2" charset="77"/>
                 <a:ea typeface="Arial" pitchFamily="34" charset="-122"/>
@@ -3035,9 +2651,9 @@
               <a:t>stat_top_quadrant_pct</a:t>
             </a:r>
             <a:r>
-              <a:rPr lang="en-US" sz="9600" b="1" kern="0" spc="-67" dirty="0">
-                <a:solidFill>
-                  <a:srgbClr val="240F45"/>
+              <a:rPr lang="en-US" sz="6800" b="1" kern="0" spc="-67" dirty="0">
+                <a:solidFill>
+                  <a:srgbClr val="757575"/>
                 </a:solidFill>
                 <a:latin typeface="DM Sans 14pt" pitchFamily="2" charset="77"/>
                 <a:ea typeface="Arial" pitchFamily="34" charset="-122"/>
@@ -3045,7 +2661,10 @@
               </a:rPr>
               <a:t>}}</a:t>
             </a:r>
-            <a:endParaRPr lang="en-US" sz="9600" b="1" dirty="0">
+            <a:endParaRPr lang="en-US" sz="6800" b="1" dirty="0">
+              <a:solidFill>
+                <a:srgbClr val="757575"/>
+              </a:solidFill>
               <a:latin typeface="DM Sans 14pt" pitchFamily="2" charset="77"/>
             </a:endParaRPr>
           </a:p>
@@ -3065,8 +2684,8 @@
         </p:nvSpPr>
         <p:spPr>
           <a:xfrm>
-            <a:off x="888847" y="1964831"/>
-            <a:ext cx="8009197" cy="299438"/>
+            <a:off x="857249" y="1866900"/>
+            <a:ext cx="8009197" cy="431799"/>
           </a:xfrm>
           <a:prstGeom prst="rect">
             <a:avLst/>
@@ -3110,6 +2729,421 @@
               <a:t>Views vs. apply clicks, % above/below benchmark</a:t>
             </a:r>
             <a:endParaRPr lang="en-US" dirty="0">
+              <a:latin typeface="DM Sans 14pt" pitchFamily="2" charset="77"/>
+            </a:endParaRPr>
+          </a:p>
+        </p:txBody>
+      </p:sp>
+      <p:sp>
+        <p:nvSpPr>
+          <p:cNvPr id="10" name="Footer Placeholder 1">
+            <a:extLst>
+              <a:ext uri="{FF2B5EF4-FFF2-40B4-BE49-F238E27FC236}">
+                <a16:creationId xmlns:a16="http://schemas.microsoft.com/office/drawing/2014/main" id="{9E9E4482-0345-AAE9-2155-E6821A53F22A}"/>
+              </a:ext>
+            </a:extLst>
+          </p:cNvPr>
+          <p:cNvSpPr txBox="1">
+            <a:spLocks/>
+          </p:cNvSpPr>
+          <p:nvPr/>
+        </p:nvSpPr>
+        <p:spPr>
+          <a:xfrm>
+            <a:off x="17233255" y="9753300"/>
+            <a:ext cx="522000" cy="190800"/>
+          </a:xfrm>
+          <a:prstGeom prst="rect">
+            <a:avLst/>
+          </a:prstGeom>
+        </p:spPr>
+        <p:txBody>
+          <a:bodyPr vert="horz" lIns="36000" tIns="36000" rIns="36000" bIns="36000" rtlCol="0" anchor="ctr"/>
+          <a:lstStyle>
+            <a:lvl1pPr marL="0" algn="l" defTabSz="914400" rtl="0" eaLnBrk="1" latinLnBrk="0" hangingPunct="1">
+              <a:defRPr sz="900" kern="1200">
+                <a:solidFill>
+                  <a:srgbClr val="E8E0F2"/>
+                </a:solidFill>
+                <a:latin typeface="DM Sans 14pt" pitchFamily="2" charset="77"/>
+                <a:ea typeface="+mn-ea"/>
+                <a:cs typeface="+mn-cs"/>
+              </a:defRPr>
+            </a:lvl1pPr>
+            <a:lvl2pPr marL="457200" algn="l" defTabSz="914400" rtl="0" eaLnBrk="1" latinLnBrk="0" hangingPunct="1">
+              <a:defRPr sz="1800" kern="1200">
+                <a:solidFill>
+                  <a:schemeClr val="tx1"/>
+                </a:solidFill>
+                <a:latin typeface="+mn-lt"/>
+                <a:ea typeface="+mn-ea"/>
+                <a:cs typeface="+mn-cs"/>
+              </a:defRPr>
+            </a:lvl2pPr>
+            <a:lvl3pPr marL="914400" algn="l" defTabSz="914400" rtl="0" eaLnBrk="1" latinLnBrk="0" hangingPunct="1">
+              <a:defRPr sz="1800" kern="1200">
+                <a:solidFill>
+                  <a:schemeClr val="tx1"/>
+                </a:solidFill>
+                <a:latin typeface="+mn-lt"/>
+                <a:ea typeface="+mn-ea"/>
+                <a:cs typeface="+mn-cs"/>
+              </a:defRPr>
+            </a:lvl3pPr>
+            <a:lvl4pPr marL="1371600" algn="l" defTabSz="914400" rtl="0" eaLnBrk="1" latinLnBrk="0" hangingPunct="1">
+              <a:defRPr sz="1800" kern="1200">
+                <a:solidFill>
+                  <a:schemeClr val="tx1"/>
+                </a:solidFill>
+                <a:latin typeface="+mn-lt"/>
+                <a:ea typeface="+mn-ea"/>
+                <a:cs typeface="+mn-cs"/>
+              </a:defRPr>
+            </a:lvl4pPr>
+            <a:lvl5pPr marL="1828800" algn="l" defTabSz="914400" rtl="0" eaLnBrk="1" latinLnBrk="0" hangingPunct="1">
+              <a:defRPr sz="1800" kern="1200">
+                <a:solidFill>
+                  <a:schemeClr val="tx1"/>
+                </a:solidFill>
+                <a:latin typeface="+mn-lt"/>
+                <a:ea typeface="+mn-ea"/>
+                <a:cs typeface="+mn-cs"/>
+              </a:defRPr>
+            </a:lvl5pPr>
+            <a:lvl6pPr marL="2286000" algn="l" defTabSz="914400" rtl="0" eaLnBrk="1" latinLnBrk="0" hangingPunct="1">
+              <a:defRPr sz="1800" kern="1200">
+                <a:solidFill>
+                  <a:schemeClr val="tx1"/>
+                </a:solidFill>
+                <a:latin typeface="+mn-lt"/>
+                <a:ea typeface="+mn-ea"/>
+                <a:cs typeface="+mn-cs"/>
+              </a:defRPr>
+            </a:lvl6pPr>
+            <a:lvl7pPr marL="2743200" algn="l" defTabSz="914400" rtl="0" eaLnBrk="1" latinLnBrk="0" hangingPunct="1">
+              <a:defRPr sz="1800" kern="1200">
+                <a:solidFill>
+                  <a:schemeClr val="tx1"/>
+                </a:solidFill>
+                <a:latin typeface="+mn-lt"/>
+                <a:ea typeface="+mn-ea"/>
+                <a:cs typeface="+mn-cs"/>
+              </a:defRPr>
+            </a:lvl7pPr>
+            <a:lvl8pPr marL="3200400" algn="l" defTabSz="914400" rtl="0" eaLnBrk="1" latinLnBrk="0" hangingPunct="1">
+              <a:defRPr sz="1800" kern="1200">
+                <a:solidFill>
+                  <a:schemeClr val="tx1"/>
+                </a:solidFill>
+                <a:latin typeface="+mn-lt"/>
+                <a:ea typeface="+mn-ea"/>
+                <a:cs typeface="+mn-cs"/>
+              </a:defRPr>
+            </a:lvl8pPr>
+            <a:lvl9pPr marL="3657600" algn="l" defTabSz="914400" rtl="0" eaLnBrk="1" latinLnBrk="0" hangingPunct="1">
+              <a:defRPr sz="1800" kern="1200">
+                <a:solidFill>
+                  <a:schemeClr val="tx1"/>
+                </a:solidFill>
+                <a:latin typeface="+mn-lt"/>
+                <a:ea typeface="+mn-ea"/>
+                <a:cs typeface="+mn-cs"/>
+              </a:defRPr>
+            </a:lvl9pPr>
+          </a:lstStyle>
+          <a:p>
+            <a:r>
+              <a:rPr lang="en-GB" dirty="0">
+                <a:solidFill>
+                  <a:srgbClr val="757575"/>
+                </a:solidFill>
+              </a:rPr>
+              <a:t>{{</a:t>
+            </a:r>
+            <a:r>
+              <a:rPr lang="en-GB" dirty="0" err="1">
+                <a:solidFill>
+                  <a:srgbClr val="757575"/>
+                </a:solidFill>
+              </a:rPr>
+              <a:t>slide_number</a:t>
+            </a:r>
+            <a:r>
+              <a:rPr lang="en-GB" dirty="0">
+                <a:solidFill>
+                  <a:srgbClr val="757575"/>
+                </a:solidFill>
+              </a:rPr>
+              <a:t>}} / {{</a:t>
+            </a:r>
+            <a:r>
+              <a:rPr lang="en-GB" dirty="0" err="1">
+                <a:solidFill>
+                  <a:srgbClr val="757575"/>
+                </a:solidFill>
+              </a:rPr>
+              <a:t>total_slides</a:t>
+            </a:r>
+            <a:r>
+              <a:rPr lang="en-GB" dirty="0">
+                <a:solidFill>
+                  <a:srgbClr val="757575"/>
+                </a:solidFill>
+              </a:rPr>
+              <a:t>}}</a:t>
+            </a:r>
+          </a:p>
+        </p:txBody>
+      </p:sp>
+      <p:sp>
+        <p:nvSpPr>
+          <p:cNvPr id="14" name="Shape 28">
+            <a:extLst>
+              <a:ext uri="{FF2B5EF4-FFF2-40B4-BE49-F238E27FC236}">
+                <a16:creationId xmlns:a16="http://schemas.microsoft.com/office/drawing/2014/main" id="{190CFC65-FAEB-0611-CE95-6555ED005839}"/>
+              </a:ext>
+            </a:extLst>
+          </p:cNvPr>
+          <p:cNvSpPr/>
+          <p:nvPr/>
+        </p:nvSpPr>
+        <p:spPr>
+          <a:xfrm>
+            <a:off x="12995755" y="1866899"/>
+            <a:ext cx="4701600" cy="1188000"/>
+          </a:xfrm>
+          <a:prstGeom prst="roundRect">
+            <a:avLst>
+              <a:gd name="adj" fmla="val 6000"/>
+            </a:avLst>
+          </a:prstGeom>
+          <a:solidFill>
+            <a:srgbClr val="643791">
+              <a:alpha val="8000"/>
+            </a:srgbClr>
+          </a:solidFill>
+          <a:ln/>
+        </p:spPr>
+        <p:txBody>
+          <a:bodyPr/>
+          <a:lstStyle/>
+          <a:p>
+            <a:r>
+              <a:rPr lang="en-GB" sz="1400" dirty="0">
+                <a:solidFill>
+                  <a:srgbClr val="643791"/>
+                </a:solidFill>
+                <a:latin typeface="DM Sans 14pt" pitchFamily="2" charset="77"/>
+              </a:rPr>
+              <a:t>{{</a:t>
+            </a:r>
+            <a:r>
+              <a:rPr lang="en-GB" sz="1400" dirty="0" err="1">
+                <a:solidFill>
+                  <a:srgbClr val="643791"/>
+                </a:solidFill>
+                <a:latin typeface="DM Sans 14pt" pitchFamily="2" charset="77"/>
+              </a:rPr>
+              <a:t>chart_explainer_benchmark_scatter</a:t>
+            </a:r>
+            <a:r>
+              <a:rPr lang="en-GB" sz="1400" dirty="0">
+                <a:solidFill>
+                  <a:srgbClr val="643791"/>
+                </a:solidFill>
+                <a:latin typeface="DM Sans 14pt" pitchFamily="2" charset="77"/>
+              </a:rPr>
+              <a:t>}}</a:t>
+            </a:r>
+            <a:endParaRPr lang="en-US" sz="1400" dirty="0">
+              <a:solidFill>
+                <a:srgbClr val="643791"/>
+              </a:solidFill>
+              <a:latin typeface="DM Sans 14pt" pitchFamily="2" charset="77"/>
+            </a:endParaRPr>
+          </a:p>
+        </p:txBody>
+      </p:sp>
+      <p:sp>
+        <p:nvSpPr>
+          <p:cNvPr id="15" name="Text 27">
+            <a:extLst>
+              <a:ext uri="{FF2B5EF4-FFF2-40B4-BE49-F238E27FC236}">
+                <a16:creationId xmlns:a16="http://schemas.microsoft.com/office/drawing/2014/main" id="{6C5F6419-482C-4205-169A-EF192C99949B}"/>
+              </a:ext>
+            </a:extLst>
+          </p:cNvPr>
+          <p:cNvSpPr/>
+          <p:nvPr/>
+        </p:nvSpPr>
+        <p:spPr>
+          <a:xfrm>
+            <a:off x="12995755" y="3259384"/>
+            <a:ext cx="4701600" cy="488865"/>
+          </a:xfrm>
+          <a:prstGeom prst="rect">
+            <a:avLst/>
+          </a:prstGeom>
+          <a:noFill/>
+          <a:ln/>
+        </p:spPr>
+        <p:txBody>
+          <a:bodyPr wrap="square" lIns="25400" tIns="25400" rIns="25400" bIns="25400" rtlCol="0" anchor="t">
+            <a:normAutofit/>
+          </a:bodyPr>
+          <a:lstStyle/>
+          <a:p>
+            <a:pPr marL="0" indent="0" algn="l">
+              <a:buNone/>
+            </a:pPr>
+            <a:r>
+              <a:rPr lang="en-US" sz="2400" b="1" kern="0" spc="368" dirty="0">
+                <a:solidFill>
+                  <a:srgbClr val="643791"/>
+                </a:solidFill>
+                <a:latin typeface="DM Sans 14pt" pitchFamily="2" charset="77"/>
+                <a:ea typeface="Arial" pitchFamily="34" charset="-122"/>
+                <a:cs typeface="Arial" pitchFamily="34" charset="-120"/>
+              </a:rPr>
+              <a:t>COMMENTARY</a:t>
+            </a:r>
+            <a:endParaRPr lang="en-US" sz="2400" b="1" dirty="0">
+              <a:latin typeface="DM Sans 14pt" pitchFamily="2" charset="77"/>
+            </a:endParaRPr>
+          </a:p>
+        </p:txBody>
+      </p:sp>
+      <p:sp>
+        <p:nvSpPr>
+          <p:cNvPr id="16" name="Shape 28">
+            <a:extLst>
+              <a:ext uri="{FF2B5EF4-FFF2-40B4-BE49-F238E27FC236}">
+                <a16:creationId xmlns:a16="http://schemas.microsoft.com/office/drawing/2014/main" id="{ABAA4934-FD5B-4DC4-85E5-5BBF5C9FCC4C}"/>
+              </a:ext>
+            </a:extLst>
+          </p:cNvPr>
+          <p:cNvSpPr/>
+          <p:nvPr/>
+        </p:nvSpPr>
+        <p:spPr>
+          <a:xfrm>
+            <a:off x="12995755" y="3748249"/>
+            <a:ext cx="4701600" cy="5606765"/>
+          </a:xfrm>
+          <a:prstGeom prst="roundRect">
+            <a:avLst>
+              <a:gd name="adj" fmla="val 3000"/>
+            </a:avLst>
+          </a:prstGeom>
+          <a:solidFill>
+            <a:srgbClr val="643791">
+              <a:alpha val="8000"/>
+            </a:srgbClr>
+          </a:solidFill>
+          <a:ln/>
+        </p:spPr>
+        <p:txBody>
+          <a:bodyPr/>
+          <a:lstStyle/>
+          <a:p>
+            <a:r>
+              <a:rPr lang="en-US" sz="1400" dirty="0">
+                <a:solidFill>
+                  <a:srgbClr val="643791"/>
+                </a:solidFill>
+                <a:latin typeface="DM Sans 14pt" pitchFamily="2" charset="77"/>
+                <a:ea typeface="Arial" pitchFamily="34" charset="-122"/>
+                <a:cs typeface="Arial" pitchFamily="34" charset="-120"/>
+              </a:rPr>
+              <a:t>{{</a:t>
+            </a:r>
+            <a:r>
+              <a:rPr lang="en-US" sz="1400" dirty="0" err="1">
+                <a:solidFill>
+                  <a:srgbClr val="643791"/>
+                </a:solidFill>
+                <a:latin typeface="DM Sans 14pt" pitchFamily="2" charset="77"/>
+                <a:ea typeface="Arial" pitchFamily="34" charset="-122"/>
+                <a:cs typeface="Arial" pitchFamily="34" charset="-120"/>
+              </a:rPr>
+              <a:t>commentary_benchmark_intro</a:t>
+            </a:r>
+            <a:r>
+              <a:rPr lang="en-US" sz="1400" dirty="0">
+                <a:solidFill>
+                  <a:srgbClr val="643791"/>
+                </a:solidFill>
+                <a:latin typeface="DM Sans 14pt" pitchFamily="2" charset="77"/>
+                <a:ea typeface="Arial" pitchFamily="34" charset="-122"/>
+                <a:cs typeface="Arial" pitchFamily="34" charset="-120"/>
+              </a:rPr>
+              <a:t>}}</a:t>
+            </a:r>
+          </a:p>
+          <a:p>
+            <a:endParaRPr lang="en-US" sz="1400" dirty="0">
+              <a:solidFill>
+                <a:srgbClr val="643791"/>
+              </a:solidFill>
+              <a:latin typeface="DM Sans 14pt" pitchFamily="2" charset="77"/>
+              <a:cs typeface="Arial" pitchFamily="34" charset="-120"/>
+            </a:endParaRPr>
+          </a:p>
+          <a:p>
+            <a:r>
+              <a:rPr lang="en-US" sz="1400" dirty="0">
+                <a:solidFill>
+                  <a:srgbClr val="643791"/>
+                </a:solidFill>
+                <a:latin typeface="DM Sans 14pt" pitchFamily="2" charset="77"/>
+                <a:ea typeface="Arial" pitchFamily="34" charset="-122"/>
+                <a:cs typeface="Arial" pitchFamily="34" charset="-120"/>
+              </a:rPr>
+              <a:t>{{commentary_benchmark_point_1}}</a:t>
+            </a:r>
+            <a:endParaRPr lang="en-US" sz="1400" dirty="0">
+              <a:latin typeface="DM Sans 14pt" pitchFamily="2" charset="77"/>
+            </a:endParaRPr>
+          </a:p>
+          <a:p>
+            <a:endParaRPr lang="en-US" sz="1400" dirty="0">
+              <a:latin typeface="DM Sans 14pt" pitchFamily="2" charset="77"/>
+            </a:endParaRPr>
+          </a:p>
+          <a:p>
+            <a:r>
+              <a:rPr lang="en-US" sz="1400" dirty="0">
+                <a:solidFill>
+                  <a:srgbClr val="643791"/>
+                </a:solidFill>
+                <a:latin typeface="DM Sans 14pt" pitchFamily="2" charset="77"/>
+                <a:ea typeface="Arial" pitchFamily="34" charset="-122"/>
+                <a:cs typeface="Arial" pitchFamily="34" charset="-120"/>
+              </a:rPr>
+              <a:t>{{commentary_benchmark_point_2}}</a:t>
+            </a:r>
+            <a:endParaRPr lang="en-US" sz="1400" dirty="0">
+              <a:latin typeface="DM Sans 14pt" pitchFamily="2" charset="77"/>
+            </a:endParaRPr>
+          </a:p>
+          <a:p>
+            <a:endParaRPr lang="en-US" sz="1400" dirty="0">
+              <a:latin typeface="DM Sans 14pt" pitchFamily="2" charset="77"/>
+            </a:endParaRPr>
+          </a:p>
+          <a:p>
+            <a:r>
+              <a:rPr lang="en-US" sz="1400" dirty="0">
+                <a:solidFill>
+                  <a:srgbClr val="643791"/>
+                </a:solidFill>
+                <a:latin typeface="DM Sans 14pt" pitchFamily="2" charset="77"/>
+                <a:ea typeface="Arial" pitchFamily="34" charset="-122"/>
+                <a:cs typeface="Arial" pitchFamily="34" charset="-120"/>
+              </a:rPr>
+              <a:t>{{commentary_benchmark_point_3}}</a:t>
+            </a:r>
+            <a:endParaRPr lang="en-US" sz="1400" dirty="0">
               <a:latin typeface="DM Sans 14pt" pitchFamily="2" charset="77"/>
             </a:endParaRPr>
           </a:p>
@@ -3278,7 +3312,9 @@
             <a:avLst/>
           </a:prstGeom>
           <a:noFill/>
-          <a:ln/>
+          <a:ln>
+            <a:noFill/>
+          </a:ln>
         </p:spPr>
         <p:txBody>
           <a:bodyPr wrap="square" lIns="25400" tIns="25400" rIns="25400" bIns="25400" rtlCol="0" anchor="t">
@@ -3318,7 +3354,7 @@
         <p:spPr>
           <a:xfrm>
             <a:off x="762000" y="2800350"/>
-            <a:ext cx="11756529" cy="6534150"/>
+            <a:ext cx="11945938" cy="6547740"/>
           </a:xfrm>
           <a:prstGeom prst="roundRect">
             <a:avLst>
@@ -3353,58 +3389,53 @@
         </p:nvSpPr>
         <p:spPr>
           <a:xfrm>
-            <a:off x="888847" y="3233450"/>
-            <a:ext cx="11500657" cy="6005800"/>
+            <a:off x="864348" y="3227185"/>
+            <a:ext cx="11725200" cy="6015600"/>
           </a:xfrm>
           <a:prstGeom prst="roundRect">
             <a:avLst>
-              <a:gd name="adj" fmla="val 3546"/>
+              <a:gd name="adj" fmla="val 2614"/>
             </a:avLst>
           </a:prstGeom>
           <a:solidFill>
             <a:srgbClr val="FFFFFF"/>
           </a:solidFill>
           <a:ln w="9525">
-            <a:noFill/>
+            <a:solidFill>
+              <a:srgbClr val="000000">
+                <a:alpha val="10000"/>
+              </a:srgbClr>
+            </a:solidFill>
             <a:prstDash val="solid"/>
           </a:ln>
         </p:spPr>
         <p:txBody>
-          <a:bodyPr lIns="0" tIns="0" rIns="0" bIns="0"/>
-          <a:lstStyle/>
-          <a:p>
-            <a:r>
-              <a:rPr lang="en-US" kern="0" spc="30" dirty="0">
-                <a:solidFill>
-                  <a:srgbClr val="240F45"/>
-                </a:solidFill>
-                <a:latin typeface="DM Sans 14pt" pitchFamily="2" charset="77"/>
-                <a:ea typeface="monospace" pitchFamily="34" charset="-122"/>
-                <a:cs typeface="monospace" pitchFamily="34" charset="-120"/>
+          <a:bodyPr/>
+          <a:lstStyle/>
+          <a:p>
+            <a:r>
+              <a:rPr lang="en-US">
+                <a:latin typeface="DM Sans 14pt" pitchFamily="2" charset="77"/>
               </a:rPr>
               <a:t>{{</a:t>
             </a:r>
             <a:r>
-              <a:rPr lang="en-US" kern="0" spc="30" dirty="0" err="1">
-                <a:solidFill>
-                  <a:srgbClr val="240F45"/>
-                </a:solidFill>
-                <a:latin typeface="DM Sans 14pt" pitchFamily="2" charset="77"/>
-                <a:ea typeface="monospace" pitchFamily="34" charset="-122"/>
-                <a:cs typeface="monospace" pitchFamily="34" charset="-120"/>
-              </a:rPr>
-              <a:t>chart:benchmark_average</a:t>
-            </a:r>
-            <a:r>
-              <a:rPr lang="en-US" kern="0" spc="30" dirty="0">
-                <a:solidFill>
-                  <a:srgbClr val="240F45"/>
-                </a:solidFill>
-                <a:latin typeface="DM Sans 14pt" pitchFamily="2" charset="77"/>
-                <a:ea typeface="monospace" pitchFamily="34" charset="-122"/>
-                <a:cs typeface="monospace" pitchFamily="34" charset="-120"/>
-              </a:rPr>
-              <a:t>}}</a:t>
+              <a:rPr lang="en-US" dirty="0" err="1">
+                <a:latin typeface="DM Sans 14pt" pitchFamily="2" charset="77"/>
+              </a:rPr>
+              <a:t>chart:benchmark</a:t>
+            </a:r>
+            <a:r>
+              <a:rPr lang="en-US" err="1">
+                <a:latin typeface="DM Sans 14pt" pitchFamily="2" charset="77"/>
+              </a:rPr>
+              <a:t>_</a:t>
+            </a:r>
+            <a:r>
+              <a:rPr lang="en-US">
+                <a:latin typeface="DM Sans 14pt" pitchFamily="2" charset="77"/>
+              </a:rPr>
+              <a:t>average}}</a:t>
             </a:r>
             <a:endParaRPr lang="en-US" dirty="0">
               <a:latin typeface="DM Sans 14pt" pitchFamily="2" charset="77"/>
@@ -3459,59 +3490,14 @@
       </p:sp>
       <p:sp>
         <p:nvSpPr>
-          <p:cNvPr id="39" name="Text 37"/>
-          <p:cNvSpPr/>
-          <p:nvPr/>
-        </p:nvSpPr>
-        <p:spPr>
-          <a:xfrm>
-            <a:off x="17233255" y="9753600"/>
-            <a:ext cx="521345" cy="190500"/>
-          </a:xfrm>
-          <a:prstGeom prst="rect">
-            <a:avLst/>
-          </a:prstGeom>
-          <a:noFill/>
-          <a:ln/>
-        </p:spPr>
-        <p:txBody>
-          <a:bodyPr wrap="square" lIns="25400" tIns="25400" rIns="25400" bIns="25400" rtlCol="0" anchor="t">
-            <a:normAutofit fontScale="85000" lnSpcReduction="10000"/>
-          </a:bodyPr>
-          <a:lstStyle/>
-          <a:p>
-            <a:pPr marL="0" indent="0" algn="l">
-              <a:buNone/>
-            </a:pPr>
-            <a:r>
-              <a:rPr lang="en-US" sz="1050" kern="0" spc="42" dirty="0">
-                <a:solidFill>
-                  <a:srgbClr val="111111">
-                    <a:alpha val="63000"/>
-                  </a:srgbClr>
-                </a:solidFill>
-                <a:latin typeface="DM Sans 14pt" pitchFamily="2" charset="77"/>
-                <a:ea typeface="Arial" pitchFamily="34" charset="-122"/>
-                <a:cs typeface="Arial" pitchFamily="34" charset="-120"/>
-              </a:rPr>
-              <a:t>03 / 07</a:t>
-            </a:r>
-            <a:endParaRPr lang="en-US" sz="1050" dirty="0">
-              <a:latin typeface="DM Sans 14pt" pitchFamily="2" charset="77"/>
-            </a:endParaRPr>
-          </a:p>
-        </p:txBody>
-      </p:sp>
-      <p:sp>
-        <p:nvSpPr>
           <p:cNvPr id="8" name="Shape 6"/>
           <p:cNvSpPr/>
           <p:nvPr/>
         </p:nvSpPr>
         <p:spPr>
           <a:xfrm>
-            <a:off x="762000" y="1847850"/>
-            <a:ext cx="2767997" cy="723900"/>
+            <a:off x="761999" y="1866899"/>
+            <a:ext cx="2772000" cy="723600"/>
           </a:xfrm>
           <a:prstGeom prst="roundRect">
             <a:avLst/>
@@ -3585,8 +3571,8 @@
         </p:nvSpPr>
         <p:spPr>
           <a:xfrm>
-            <a:off x="811592" y="1906638"/>
-            <a:ext cx="1281704" cy="602293"/>
+            <a:off x="811592" y="1925687"/>
+            <a:ext cx="1407600" cy="604800"/>
           </a:xfrm>
           <a:prstGeom prst="roundRect">
             <a:avLst>
@@ -3601,11 +3587,12 @@
           <a:ln/>
         </p:spPr>
         <p:txBody>
-          <a:bodyPr/>
-          <a:lstStyle/>
-          <a:p>
-            <a:r>
-              <a:rPr lang="en-US" sz="3600" kern="0" spc="-67" dirty="0">
+          <a:bodyPr lIns="36000" tIns="36000" rIns="36000" bIns="36000" anchor="ctr"/>
+          <a:lstStyle/>
+          <a:p>
+            <a:pPr algn="ctr"/>
+            <a:r>
+              <a:rPr lang="en-US" sz="2800" kern="0" spc="-67" dirty="0">
                 <a:solidFill>
                   <a:srgbClr val="FFFFFF"/>
                 </a:solidFill>
@@ -3616,7 +3603,7 @@
               <a:t>{{</a:t>
             </a:r>
             <a:r>
-              <a:rPr lang="en-US" sz="3600" kern="0" spc="-67" dirty="0" err="1">
+              <a:rPr lang="en-US" sz="2800" kern="0" spc="-67" dirty="0" err="1">
                 <a:solidFill>
                   <a:srgbClr val="FFFFFF"/>
                 </a:solidFill>
@@ -3627,7 +3614,7 @@
               <a:t>stat_benchmark_average_views</a:t>
             </a:r>
             <a:r>
-              <a:rPr lang="en-US" sz="3600" kern="0" spc="-67" dirty="0">
+              <a:rPr lang="en-US" sz="2800" kern="0" spc="-67" dirty="0">
                 <a:solidFill>
                   <a:srgbClr val="FFFFFF"/>
                 </a:solidFill>
@@ -3637,23 +3624,18 @@
               </a:rPr>
               <a:t>}}</a:t>
             </a:r>
-            <a:endParaRPr lang="en-US" sz="3600" dirty="0">
-              <a:latin typeface="DM Sans 14pt" pitchFamily="2" charset="77"/>
-            </a:endParaRPr>
-          </a:p>
-          <a:p>
-            <a:endParaRPr lang="en-GB" sz="3600" dirty="0">
-              <a:latin typeface="DM Sans 14pt" pitchFamily="2" charset="77"/>
-            </a:endParaRPr>
-          </a:p>
-        </p:txBody>
-      </p:sp>
-      <p:sp>
-        <p:nvSpPr>
-          <p:cNvPr id="7" name="Text 27">
+            <a:endParaRPr lang="en-US" sz="2800" dirty="0">
+              <a:latin typeface="DM Sans 14pt" pitchFamily="2" charset="77"/>
+            </a:endParaRPr>
+          </a:p>
+        </p:txBody>
+      </p:sp>
+      <p:sp>
+        <p:nvSpPr>
+          <p:cNvPr id="67" name="Text 3">
             <a:extLst>
               <a:ext uri="{FF2B5EF4-FFF2-40B4-BE49-F238E27FC236}">
-                <a16:creationId xmlns:a16="http://schemas.microsoft.com/office/drawing/2014/main" id="{6A0DF149-128C-9B78-2631-397C50980B39}"/>
+                <a16:creationId xmlns:a16="http://schemas.microsoft.com/office/drawing/2014/main" id="{06DB073C-0DC3-299A-5EB3-6CFA66DF2747}"/>
               </a:ext>
             </a:extLst>
           </p:cNvPr>
@@ -3662,14 +3644,16 @@
         </p:nvSpPr>
         <p:spPr>
           <a:xfrm>
-            <a:off x="12995755" y="3391422"/>
-            <a:ext cx="4741200" cy="488865"/>
+            <a:off x="12995755" y="575051"/>
+            <a:ext cx="4703047" cy="280800"/>
           </a:xfrm>
           <a:prstGeom prst="rect">
             <a:avLst/>
           </a:prstGeom>
           <a:noFill/>
-          <a:ln/>
+          <a:ln>
+            <a:noFill/>
+          </a:ln>
         </p:spPr>
         <p:txBody>
           <a:bodyPr wrap="square" lIns="25400" tIns="25400" rIns="25400" bIns="25400" rtlCol="0" anchor="t">
@@ -3677,11 +3661,9 @@
           </a:bodyPr>
           <a:lstStyle/>
           <a:p>
-            <a:pPr marL="0" indent="0" algn="l">
-              <a:buNone/>
-            </a:pPr>
-            <a:r>
-              <a:rPr lang="en-US" sz="2400" b="1" kern="0" spc="368" dirty="0">
+            <a:pPr algn="r"/>
+            <a:r>
+              <a:rPr lang="en-US" sz="1200" kern="0" spc="420" dirty="0">
                 <a:solidFill>
                   <a:srgbClr val="643791"/>
                 </a:solidFill>
@@ -3689,433 +3671,14 @@
                 <a:ea typeface="Arial" pitchFamily="34" charset="-122"/>
                 <a:cs typeface="Arial" pitchFamily="34" charset="-120"/>
               </a:rPr>
-              <a:t>COMMENTARY</a:t>
-            </a:r>
-            <a:endParaRPr lang="en-US" sz="2400" b="1" dirty="0">
-              <a:latin typeface="DM Sans 14pt" pitchFamily="2" charset="77"/>
-            </a:endParaRPr>
-          </a:p>
-        </p:txBody>
-      </p:sp>
-      <p:sp>
-        <p:nvSpPr>
-          <p:cNvPr id="21" name="Shape 28">
-            <a:extLst>
-              <a:ext uri="{FF2B5EF4-FFF2-40B4-BE49-F238E27FC236}">
-                <a16:creationId xmlns:a16="http://schemas.microsoft.com/office/drawing/2014/main" id="{AD11CE6B-1F35-10CA-93D1-DC7E7FEBDD35}"/>
-              </a:ext>
-            </a:extLst>
-          </p:cNvPr>
-          <p:cNvSpPr/>
-          <p:nvPr/>
-        </p:nvSpPr>
-        <p:spPr>
-          <a:xfrm>
-            <a:off x="12995755" y="3880287"/>
-            <a:ext cx="4703047" cy="1182447"/>
-          </a:xfrm>
-          <a:prstGeom prst="roundRect">
-            <a:avLst>
-              <a:gd name="adj" fmla="val 14191"/>
-            </a:avLst>
-          </a:prstGeom>
-          <a:solidFill>
-            <a:srgbClr val="643791">
-              <a:alpha val="8000"/>
-            </a:srgbClr>
-          </a:solidFill>
-          <a:ln/>
-        </p:spPr>
-        <p:txBody>
-          <a:bodyPr/>
-          <a:lstStyle/>
-          <a:p>
-            <a:pPr>
-              <a:lnSpc>
-                <a:spcPct val="110000"/>
-              </a:lnSpc>
-            </a:pPr>
-            <a:r>
-              <a:rPr lang="en-US" sz="1400" dirty="0">
-                <a:solidFill>
-                  <a:srgbClr val="643791"/>
-                </a:solidFill>
-                <a:latin typeface="DM Sans 14pt" pitchFamily="2" charset="77"/>
-                <a:ea typeface="Arial" pitchFamily="34" charset="-122"/>
-                <a:cs typeface="Arial" pitchFamily="34" charset="-120"/>
-              </a:rPr>
-              <a:t>{{</a:t>
-            </a:r>
-            <a:r>
-              <a:rPr lang="en-US" sz="1400" dirty="0" err="1">
-                <a:solidFill>
-                  <a:srgbClr val="643791"/>
-                </a:solidFill>
-                <a:latin typeface="DM Sans 14pt" pitchFamily="2" charset="77"/>
-                <a:ea typeface="Arial" pitchFamily="34" charset="-122"/>
-                <a:cs typeface="Arial" pitchFamily="34" charset="-120"/>
-              </a:rPr>
-              <a:t>commentary_average_intro</a:t>
-            </a:r>
-            <a:r>
-              <a:rPr lang="en-US" sz="1400" dirty="0">
-                <a:solidFill>
-                  <a:srgbClr val="643791"/>
-                </a:solidFill>
-                <a:latin typeface="DM Sans 14pt" pitchFamily="2" charset="77"/>
-                <a:ea typeface="Arial" pitchFamily="34" charset="-122"/>
-                <a:cs typeface="Arial" pitchFamily="34" charset="-120"/>
-              </a:rPr>
-              <a:t>}}</a:t>
-            </a:r>
-            <a:endParaRPr lang="en-US" sz="1400" dirty="0">
-              <a:latin typeface="DM Sans 14pt" pitchFamily="2" charset="77"/>
-            </a:endParaRPr>
-          </a:p>
-        </p:txBody>
-      </p:sp>
-      <p:sp>
-        <p:nvSpPr>
-          <p:cNvPr id="46" name="Shape 30">
-            <a:extLst>
-              <a:ext uri="{FF2B5EF4-FFF2-40B4-BE49-F238E27FC236}">
-                <a16:creationId xmlns:a16="http://schemas.microsoft.com/office/drawing/2014/main" id="{BC486ACB-7DD7-21F6-B0FC-03635C87339A}"/>
-              </a:ext>
-            </a:extLst>
-          </p:cNvPr>
-          <p:cNvSpPr/>
-          <p:nvPr/>
-        </p:nvSpPr>
-        <p:spPr>
-          <a:xfrm>
-            <a:off x="12995755" y="5271442"/>
-            <a:ext cx="4707474" cy="1174800"/>
-          </a:xfrm>
-          <a:prstGeom prst="roundRect">
-            <a:avLst>
-              <a:gd name="adj" fmla="val 15385"/>
-            </a:avLst>
-          </a:prstGeom>
-          <a:solidFill>
-            <a:srgbClr val="643791">
-              <a:alpha val="8000"/>
-            </a:srgbClr>
-          </a:solidFill>
-          <a:ln/>
-        </p:spPr>
-        <p:txBody>
-          <a:bodyPr/>
-          <a:lstStyle/>
-          <a:p>
-            <a:r>
-              <a:rPr lang="en-US" sz="1400" dirty="0">
-                <a:solidFill>
-                  <a:srgbClr val="643791"/>
-                </a:solidFill>
-                <a:latin typeface="DM Sans 14pt" pitchFamily="2" charset="77"/>
-                <a:ea typeface="Arial" pitchFamily="34" charset="-122"/>
-                <a:cs typeface="Arial" pitchFamily="34" charset="-120"/>
-              </a:rPr>
-              <a:t>{{commentary_average_point_1}}</a:t>
-            </a:r>
-            <a:endParaRPr lang="en-US" sz="1400" dirty="0">
-              <a:latin typeface="DM Sans 14pt" pitchFamily="2" charset="77"/>
-            </a:endParaRPr>
-          </a:p>
-        </p:txBody>
-      </p:sp>
-      <p:sp>
-        <p:nvSpPr>
-          <p:cNvPr id="49" name="Shape 32">
-            <a:extLst>
-              <a:ext uri="{FF2B5EF4-FFF2-40B4-BE49-F238E27FC236}">
-                <a16:creationId xmlns:a16="http://schemas.microsoft.com/office/drawing/2014/main" id="{FDEF387C-5013-25D7-982E-02BE79CD5688}"/>
-              </a:ext>
-            </a:extLst>
-          </p:cNvPr>
-          <p:cNvSpPr/>
-          <p:nvPr/>
-        </p:nvSpPr>
-        <p:spPr>
-          <a:xfrm>
-            <a:off x="12995755" y="6662597"/>
-            <a:ext cx="4707474" cy="1174410"/>
-          </a:xfrm>
-          <a:prstGeom prst="roundRect">
-            <a:avLst>
-              <a:gd name="adj" fmla="val 15385"/>
-            </a:avLst>
-          </a:prstGeom>
-          <a:solidFill>
-            <a:srgbClr val="643791">
-              <a:alpha val="8000"/>
-            </a:srgbClr>
-          </a:solidFill>
-          <a:ln/>
-        </p:spPr>
-        <p:txBody>
-          <a:bodyPr/>
-          <a:lstStyle/>
-          <a:p>
-            <a:r>
-              <a:rPr lang="en-US" sz="1400" dirty="0">
-                <a:solidFill>
-                  <a:srgbClr val="643791"/>
-                </a:solidFill>
-                <a:latin typeface="DM Sans 14pt" pitchFamily="2" charset="77"/>
-                <a:ea typeface="Arial" pitchFamily="34" charset="-122"/>
-                <a:cs typeface="Arial" pitchFamily="34" charset="-120"/>
-              </a:rPr>
-              <a:t>{{commentary_average_point_2}}</a:t>
-            </a:r>
-            <a:endParaRPr lang="en-US" sz="1400" dirty="0">
-              <a:latin typeface="DM Sans 14pt" pitchFamily="2" charset="77"/>
-            </a:endParaRPr>
-          </a:p>
-        </p:txBody>
-      </p:sp>
-      <p:sp>
-        <p:nvSpPr>
-          <p:cNvPr id="52" name="Shape 28">
-            <a:extLst>
-              <a:ext uri="{FF2B5EF4-FFF2-40B4-BE49-F238E27FC236}">
-                <a16:creationId xmlns:a16="http://schemas.microsoft.com/office/drawing/2014/main" id="{6E1337BE-457A-B636-2A43-3B1372F7401D}"/>
-              </a:ext>
-            </a:extLst>
-          </p:cNvPr>
-          <p:cNvSpPr/>
-          <p:nvPr/>
-        </p:nvSpPr>
-        <p:spPr>
-          <a:xfrm>
-            <a:off x="12995755" y="1890712"/>
-            <a:ext cx="4703047" cy="1182447"/>
-          </a:xfrm>
-          <a:prstGeom prst="roundRect">
-            <a:avLst>
-              <a:gd name="adj" fmla="val 14191"/>
-            </a:avLst>
-          </a:prstGeom>
-          <a:solidFill>
-            <a:srgbClr val="643791">
-              <a:alpha val="8000"/>
-            </a:srgbClr>
-          </a:solidFill>
-          <a:ln/>
-        </p:spPr>
-        <p:txBody>
-          <a:bodyPr/>
-          <a:lstStyle/>
-          <a:p>
-            <a:r>
-              <a:rPr lang="en-GB" sz="1400" dirty="0">
-                <a:solidFill>
-                  <a:srgbClr val="643791"/>
-                </a:solidFill>
-                <a:latin typeface="DM Sans 14pt" pitchFamily="2" charset="77"/>
-              </a:rPr>
-              <a:t>{{</a:t>
-            </a:r>
-            <a:r>
-              <a:rPr lang="en-GB" sz="1400" dirty="0" err="1">
-                <a:solidFill>
-                  <a:srgbClr val="643791"/>
-                </a:solidFill>
-                <a:latin typeface="DM Sans 14pt" pitchFamily="2" charset="77"/>
-              </a:rPr>
-              <a:t>chart_explainer_benchmark_average</a:t>
-            </a:r>
-            <a:r>
-              <a:rPr lang="en-GB" sz="1400" dirty="0">
-                <a:solidFill>
-                  <a:srgbClr val="643791"/>
-                </a:solidFill>
-                <a:latin typeface="DM Sans 14pt" pitchFamily="2" charset="77"/>
-              </a:rPr>
-              <a:t>}}</a:t>
-            </a:r>
-            <a:endParaRPr lang="en-US" sz="1400" dirty="0">
-              <a:solidFill>
-                <a:srgbClr val="643791"/>
-              </a:solidFill>
-              <a:latin typeface="DM Sans 14pt" pitchFamily="2" charset="77"/>
-            </a:endParaRPr>
-          </a:p>
-        </p:txBody>
-      </p:sp>
-      <p:sp>
-        <p:nvSpPr>
-          <p:cNvPr id="59" name="Text 29">
-            <a:extLst>
-              <a:ext uri="{FF2B5EF4-FFF2-40B4-BE49-F238E27FC236}">
-                <a16:creationId xmlns:a16="http://schemas.microsoft.com/office/drawing/2014/main" id="{4781B945-2946-0799-CAA7-A6CBCB58821A}"/>
-              </a:ext>
-            </a:extLst>
-          </p:cNvPr>
-          <p:cNvSpPr/>
-          <p:nvPr/>
-        </p:nvSpPr>
-        <p:spPr>
-          <a:xfrm>
-            <a:off x="6546937" y="-2453221"/>
-            <a:ext cx="4661496" cy="1182447"/>
-          </a:xfrm>
-          <a:prstGeom prst="rect">
-            <a:avLst/>
-          </a:prstGeom>
-          <a:noFill/>
-          <a:ln/>
-        </p:spPr>
-        <p:txBody>
-          <a:bodyPr wrap="square" lIns="25400" tIns="25400" rIns="25400" bIns="25400" rtlCol="0" anchor="t">
-            <a:normAutofit/>
-          </a:bodyPr>
-          <a:lstStyle/>
-          <a:p>
-            <a:pPr>
-              <a:lnSpc>
-                <a:spcPct val="110000"/>
-              </a:lnSpc>
-            </a:pPr>
-            <a:r>
-              <a:rPr lang="en-GB" sz="1650" dirty="0">
-                <a:solidFill>
-                  <a:srgbClr val="643791"/>
-                </a:solidFill>
-                <a:latin typeface="DM Sans 14pt" pitchFamily="2" charset="77"/>
-              </a:rPr>
-              <a:t>{{chart_explainer_benchmark_scatter}}</a:t>
-            </a:r>
-            <a:endParaRPr lang="en-US" sz="1650" dirty="0">
-              <a:solidFill>
-                <a:srgbClr val="643791"/>
-              </a:solidFill>
-              <a:latin typeface="DM Sans 14pt" pitchFamily="2" charset="77"/>
-            </a:endParaRPr>
-          </a:p>
-        </p:txBody>
-      </p:sp>
-      <p:grpSp>
-        <p:nvGrpSpPr>
-          <p:cNvPr id="66" name="Group 65">
-            <a:extLst>
-              <a:ext uri="{FF2B5EF4-FFF2-40B4-BE49-F238E27FC236}">
-                <a16:creationId xmlns:a16="http://schemas.microsoft.com/office/drawing/2014/main" id="{C4A8F459-F5C0-90D7-162E-BEA9A56AB013}"/>
-              </a:ext>
-            </a:extLst>
-          </p:cNvPr>
-          <p:cNvGrpSpPr/>
-          <p:nvPr/>
-        </p:nvGrpSpPr>
-        <p:grpSpPr>
-          <a:xfrm>
-            <a:off x="12995755" y="575051"/>
-            <a:ext cx="4703047" cy="1096551"/>
-            <a:chOff x="12995755" y="575051"/>
-            <a:chExt cx="4703047" cy="1096551"/>
-          </a:xfrm>
-        </p:grpSpPr>
-        <p:sp>
-          <p:nvSpPr>
-            <p:cNvPr id="67" name="Text 3">
-              <a:extLst>
-                <a:ext uri="{FF2B5EF4-FFF2-40B4-BE49-F238E27FC236}">
-                  <a16:creationId xmlns:a16="http://schemas.microsoft.com/office/drawing/2014/main" id="{06DB073C-0DC3-299A-5EB3-6CFA66DF2747}"/>
-                </a:ext>
-              </a:extLst>
-            </p:cNvPr>
-            <p:cNvSpPr/>
-            <p:nvPr/>
-          </p:nvSpPr>
-          <p:spPr>
-            <a:xfrm>
-              <a:off x="12995755" y="575051"/>
-              <a:ext cx="4703047" cy="297317"/>
-            </a:xfrm>
-            <a:prstGeom prst="rect">
-              <a:avLst/>
-            </a:prstGeom>
-            <a:noFill/>
-            <a:ln/>
-          </p:spPr>
-          <p:txBody>
-            <a:bodyPr wrap="square" lIns="25400" tIns="25400" rIns="25400" bIns="25400" rtlCol="0" anchor="t">
-              <a:normAutofit/>
-            </a:bodyPr>
-            <a:lstStyle/>
-            <a:p>
-              <a:pPr algn="r"/>
-              <a:r>
-                <a:rPr lang="en-US" sz="1200" kern="0" spc="420" dirty="0">
-                  <a:solidFill>
-                    <a:srgbClr val="643791"/>
-                  </a:solidFill>
-                  <a:latin typeface="DM Sans 14pt" pitchFamily="2" charset="77"/>
-                  <a:ea typeface="Arial" pitchFamily="34" charset="-122"/>
-                  <a:cs typeface="Arial" pitchFamily="34" charset="-120"/>
-                </a:rPr>
-                <a:t>02 · AVERAGE PERFORMANCE</a:t>
-              </a:r>
-              <a:endParaRPr lang="en-US" sz="1200" dirty="0">
-                <a:latin typeface="DM Sans 14pt" pitchFamily="2" charset="77"/>
-              </a:endParaRPr>
-            </a:p>
-          </p:txBody>
-        </p:sp>
-        <p:sp>
-          <p:nvSpPr>
-            <p:cNvPr id="68" name="Text 21">
-              <a:extLst>
-                <a:ext uri="{FF2B5EF4-FFF2-40B4-BE49-F238E27FC236}">
-                  <a16:creationId xmlns:a16="http://schemas.microsoft.com/office/drawing/2014/main" id="{AA8D2D39-DF50-ADAB-4AB5-294CA052C018}"/>
-                </a:ext>
-              </a:extLst>
-            </p:cNvPr>
-            <p:cNvSpPr/>
-            <p:nvPr/>
-          </p:nvSpPr>
-          <p:spPr>
-            <a:xfrm>
-              <a:off x="12995755" y="933450"/>
-              <a:ext cx="4703047" cy="738152"/>
-            </a:xfrm>
-            <a:prstGeom prst="rect">
-              <a:avLst/>
-            </a:prstGeom>
-            <a:noFill/>
-            <a:ln/>
-          </p:spPr>
-          <p:txBody>
-            <a:bodyPr wrap="square" lIns="25400" tIns="25400" rIns="25400" bIns="25400" rtlCol="0" anchor="t">
-              <a:normAutofit fontScale="92500"/>
-            </a:bodyPr>
-            <a:lstStyle/>
-            <a:p>
-              <a:pPr>
-                <a:lnSpc>
-                  <a:spcPct val="140000"/>
-                </a:lnSpc>
-              </a:pPr>
-              <a:r>
-                <a:rPr lang="en-US" sz="1350" dirty="0">
-                  <a:solidFill>
-                    <a:srgbClr val="111111">
-                      <a:alpha val="63000"/>
-                    </a:srgbClr>
-                  </a:solidFill>
-                  <a:latin typeface="DM Sans 14pt" pitchFamily="2" charset="77"/>
-                  <a:ea typeface="Arial" pitchFamily="34" charset="-122"/>
-                  <a:cs typeface="Arial" pitchFamily="34" charset="-120"/>
-                </a:rPr>
-                <a:t>Rolling up all your vacancies into a single average, compared with the benchmark for comparable public sector roles.</a:t>
-              </a:r>
-              <a:endParaRPr lang="en-US" sz="1350" dirty="0">
-                <a:latin typeface="DM Sans 14pt" pitchFamily="2" charset="77"/>
-              </a:endParaRPr>
-            </a:p>
-          </p:txBody>
-        </p:sp>
-      </p:grpSp>
+              <a:t>02 · AVERAGE PERFORMANCE</a:t>
+            </a:r>
+            <a:endParaRPr lang="en-US" sz="1200" dirty="0">
+              <a:latin typeface="DM Sans 14pt" pitchFamily="2" charset="77"/>
+            </a:endParaRPr>
+          </a:p>
+        </p:txBody>
+      </p:sp>
       <p:sp>
         <p:nvSpPr>
           <p:cNvPr id="71" name="Text 26">
@@ -4165,8 +3728,8 @@
         </p:nvSpPr>
         <p:spPr>
           <a:xfrm>
-            <a:off x="3778940" y="1847850"/>
-            <a:ext cx="2767997" cy="723900"/>
+            <a:off x="3778939" y="1866899"/>
+            <a:ext cx="2772000" cy="723600"/>
           </a:xfrm>
           <a:prstGeom prst="roundRect">
             <a:avLst/>
@@ -4231,8 +3794,8 @@
         </p:nvSpPr>
         <p:spPr>
           <a:xfrm>
-            <a:off x="3828532" y="1906638"/>
-            <a:ext cx="1281704" cy="602293"/>
+            <a:off x="3828532" y="1925687"/>
+            <a:ext cx="1407600" cy="604800"/>
           </a:xfrm>
           <a:prstGeom prst="roundRect">
             <a:avLst>
@@ -4245,18 +3808,18 @@
           <a:ln/>
         </p:spPr>
         <p:txBody>
-          <a:bodyPr/>
-          <a:lstStyle/>
-          <a:p>
-            <a:pPr>
+          <a:bodyPr lIns="36000" tIns="36000" rIns="36000" bIns="36000" anchor="ctr"/>
+          <a:lstStyle/>
+          <a:p>
+            <a:pPr algn="ctr">
               <a:lnSpc>
                 <a:spcPct val="110000"/>
               </a:lnSpc>
             </a:pPr>
             <a:r>
-              <a:rPr lang="en-US" sz="3600" kern="0" spc="-67" dirty="0">
-                <a:solidFill>
-                  <a:srgbClr val="240F45"/>
+              <a:rPr lang="en-US" sz="2800" kern="0" spc="-67" dirty="0">
+                <a:solidFill>
+                  <a:srgbClr val="757575"/>
                 </a:solidFill>
                 <a:latin typeface="DM Sans 14pt" pitchFamily="2" charset="77"/>
                 <a:ea typeface="Arial" pitchFamily="34" charset="-122"/>
@@ -4265,9 +3828,9 @@
               <a:t>{{</a:t>
             </a:r>
             <a:r>
-              <a:rPr lang="en-US" sz="3600" kern="0" spc="-67" dirty="0" err="1">
-                <a:solidFill>
-                  <a:srgbClr val="240F45"/>
+              <a:rPr lang="en-US" sz="2800" kern="0" spc="-67" dirty="0" err="1">
+                <a:solidFill>
+                  <a:srgbClr val="757575"/>
                 </a:solidFill>
                 <a:latin typeface="DM Sans 14pt" pitchFamily="2" charset="77"/>
                 <a:ea typeface="Arial" pitchFamily="34" charset="-122"/>
@@ -4276,9 +3839,9 @@
               <a:t>stat_your_jobs_average_views</a:t>
             </a:r>
             <a:r>
-              <a:rPr lang="en-US" sz="3600" kern="0" spc="-67" dirty="0">
-                <a:solidFill>
-                  <a:srgbClr val="240F45"/>
+              <a:rPr lang="en-US" sz="2800" kern="0" spc="-67" dirty="0">
+                <a:solidFill>
+                  <a:srgbClr val="757575"/>
                 </a:solidFill>
                 <a:latin typeface="DM Sans 14pt" pitchFamily="2" charset="77"/>
                 <a:ea typeface="Arial" pitchFamily="34" charset="-122"/>
@@ -4286,7 +3849,10 @@
               </a:rPr>
               <a:t>}}</a:t>
             </a:r>
-            <a:endParaRPr lang="en-US" sz="3600" dirty="0">
+            <a:endParaRPr lang="en-US" sz="2800" dirty="0">
+              <a:solidFill>
+                <a:srgbClr val="757575"/>
+              </a:solidFill>
               <a:latin typeface="DM Sans 14pt" pitchFamily="2" charset="77"/>
             </a:endParaRPr>
           </a:p>
@@ -4306,8 +3872,8 @@
         </p:nvSpPr>
         <p:spPr>
           <a:xfrm>
-            <a:off x="6736167" y="1847850"/>
-            <a:ext cx="2767997" cy="723900"/>
+            <a:off x="6736166" y="1866900"/>
+            <a:ext cx="2772000" cy="723600"/>
           </a:xfrm>
           <a:prstGeom prst="roundRect">
             <a:avLst/>
@@ -4387,8 +3953,8 @@
         </p:nvSpPr>
         <p:spPr>
           <a:xfrm>
-            <a:off x="6785759" y="1906638"/>
-            <a:ext cx="1281704" cy="602293"/>
+            <a:off x="6785759" y="1925687"/>
+            <a:ext cx="1407600" cy="604800"/>
           </a:xfrm>
           <a:prstGeom prst="roundRect">
             <a:avLst>
@@ -4403,11 +3969,12 @@
           <a:ln/>
         </p:spPr>
         <p:txBody>
-          <a:bodyPr/>
-          <a:lstStyle/>
-          <a:p>
-            <a:r>
-              <a:rPr lang="en-US" sz="3600" kern="0" spc="-67" dirty="0">
+          <a:bodyPr lIns="36000" tIns="36000" rIns="36000" bIns="36000" anchor="ctr"/>
+          <a:lstStyle/>
+          <a:p>
+            <a:pPr algn="ctr"/>
+            <a:r>
+              <a:rPr lang="en-US" sz="2800" kern="0" spc="-67" dirty="0">
                 <a:solidFill>
                   <a:srgbClr val="FFFFFF"/>
                 </a:solidFill>
@@ -4418,7 +3985,7 @@
               <a:t>{{</a:t>
             </a:r>
             <a:r>
-              <a:rPr lang="en-US" sz="3600" kern="0" spc="-67" dirty="0" err="1">
+              <a:rPr lang="en-US" sz="2800" kern="0" spc="-67" dirty="0" err="1">
                 <a:solidFill>
                   <a:srgbClr val="FFFFFF"/>
                 </a:solidFill>
@@ -4429,7 +3996,7 @@
               <a:t>stat_benchmark_average_applies</a:t>
             </a:r>
             <a:r>
-              <a:rPr lang="en-US" sz="3600" kern="0" spc="-67" dirty="0">
+              <a:rPr lang="en-US" sz="2800" kern="0" spc="-67" dirty="0">
                 <a:solidFill>
                   <a:srgbClr val="FFFFFF"/>
                 </a:solidFill>
@@ -4439,12 +4006,7 @@
               </a:rPr>
               <a:t>}}</a:t>
             </a:r>
-            <a:endParaRPr lang="en-US" sz="3600" dirty="0">
-              <a:latin typeface="DM Sans 14pt" pitchFamily="2" charset="77"/>
-            </a:endParaRPr>
-          </a:p>
-          <a:p>
-            <a:endParaRPr lang="en-GB" sz="3600" dirty="0">
+            <a:endParaRPr lang="en-US" sz="2800" dirty="0">
               <a:latin typeface="DM Sans 14pt" pitchFamily="2" charset="77"/>
             </a:endParaRPr>
           </a:p>
@@ -4464,8 +4026,8 @@
         </p:nvSpPr>
         <p:spPr>
           <a:xfrm>
-            <a:off x="9750532" y="1849951"/>
-            <a:ext cx="2767997" cy="723900"/>
+            <a:off x="9750531" y="1866900"/>
+            <a:ext cx="2772000" cy="723600"/>
           </a:xfrm>
           <a:prstGeom prst="roundRect">
             <a:avLst/>
@@ -4529,8 +4091,8 @@
         </p:nvSpPr>
         <p:spPr>
           <a:xfrm>
-            <a:off x="9800124" y="1908739"/>
-            <a:ext cx="1281704" cy="602293"/>
+            <a:off x="9800124" y="1925687"/>
+            <a:ext cx="1407600" cy="604800"/>
           </a:xfrm>
           <a:prstGeom prst="roundRect">
             <a:avLst>
@@ -4543,18 +4105,18 @@
           <a:ln/>
         </p:spPr>
         <p:txBody>
-          <a:bodyPr/>
-          <a:lstStyle/>
-          <a:p>
-            <a:pPr>
+          <a:bodyPr lIns="36000" tIns="36000" rIns="36000" bIns="36000" anchor="ctr"/>
+          <a:lstStyle/>
+          <a:p>
+            <a:pPr algn="ctr">
               <a:lnSpc>
                 <a:spcPct val="110000"/>
               </a:lnSpc>
             </a:pPr>
             <a:r>
-              <a:rPr lang="en-US" sz="3600" kern="0" spc="-67" dirty="0">
-                <a:solidFill>
-                  <a:srgbClr val="240F45"/>
+              <a:rPr lang="en-US" sz="2800" kern="0" spc="-67" dirty="0">
+                <a:solidFill>
+                  <a:srgbClr val="757575"/>
                 </a:solidFill>
                 <a:latin typeface="DM Sans 14pt" pitchFamily="2" charset="77"/>
                 <a:ea typeface="Arial" pitchFamily="34" charset="-122"/>
@@ -4563,9 +4125,9 @@
               <a:t>{{</a:t>
             </a:r>
             <a:r>
-              <a:rPr lang="en-US" sz="3600" kern="0" spc="-67" dirty="0" err="1">
-                <a:solidFill>
-                  <a:srgbClr val="240F45"/>
+              <a:rPr lang="en-US" sz="2800" kern="0" spc="-67" dirty="0" err="1">
+                <a:solidFill>
+                  <a:srgbClr val="757575"/>
                 </a:solidFill>
                 <a:latin typeface="DM Sans 14pt" pitchFamily="2" charset="77"/>
                 <a:ea typeface="Arial" pitchFamily="34" charset="-122"/>
@@ -4574,9 +4136,9 @@
               <a:t>stat_your_jobs_average_applies</a:t>
             </a:r>
             <a:r>
-              <a:rPr lang="en-US" sz="3600" kern="0" spc="-67" dirty="0">
-                <a:solidFill>
-                  <a:srgbClr val="240F45"/>
+              <a:rPr lang="en-US" sz="2800" kern="0" spc="-67" dirty="0">
+                <a:solidFill>
+                  <a:srgbClr val="757575"/>
                 </a:solidFill>
                 <a:latin typeface="DM Sans 14pt" pitchFamily="2" charset="77"/>
                 <a:ea typeface="Arial" pitchFamily="34" charset="-122"/>
@@ -4584,7 +4146,10 @@
               </a:rPr>
               <a:t>}}</a:t>
             </a:r>
-            <a:endParaRPr lang="en-US" sz="3600" dirty="0">
+            <a:endParaRPr lang="en-US" sz="2800" dirty="0">
+              <a:solidFill>
+                <a:srgbClr val="757575"/>
+              </a:solidFill>
               <a:latin typeface="DM Sans 14pt" pitchFamily="2" charset="77"/>
             </a:endParaRPr>
           </a:p>
@@ -4604,8 +4169,8 @@
         </p:nvSpPr>
         <p:spPr>
           <a:xfrm>
-            <a:off x="888847" y="2876723"/>
-            <a:ext cx="8009197" cy="299438"/>
+            <a:off x="888847" y="2800350"/>
+            <a:ext cx="8009197" cy="428400"/>
           </a:xfrm>
           <a:prstGeom prst="rect">
             <a:avLst/>
@@ -4651,6 +4216,466 @@
             <a:endParaRPr lang="en-US" dirty="0">
               <a:latin typeface="DM Sans 14pt" pitchFamily="2" charset="77"/>
             </a:endParaRPr>
+          </a:p>
+        </p:txBody>
+      </p:sp>
+      <p:sp>
+        <p:nvSpPr>
+          <p:cNvPr id="5" name="Footer Placeholder 1">
+            <a:extLst>
+              <a:ext uri="{FF2B5EF4-FFF2-40B4-BE49-F238E27FC236}">
+                <a16:creationId xmlns:a16="http://schemas.microsoft.com/office/drawing/2014/main" id="{D6275BDE-DD84-855F-5788-EDDFB4BE3224}"/>
+              </a:ext>
+            </a:extLst>
+          </p:cNvPr>
+          <p:cNvSpPr txBox="1">
+            <a:spLocks/>
+          </p:cNvSpPr>
+          <p:nvPr/>
+        </p:nvSpPr>
+        <p:spPr>
+          <a:xfrm>
+            <a:off x="17233255" y="9753300"/>
+            <a:ext cx="522000" cy="190800"/>
+          </a:xfrm>
+          <a:prstGeom prst="rect">
+            <a:avLst/>
+          </a:prstGeom>
+        </p:spPr>
+        <p:txBody>
+          <a:bodyPr vert="horz" lIns="36000" tIns="36000" rIns="36000" bIns="36000" rtlCol="0" anchor="ctr"/>
+          <a:lstStyle>
+            <a:lvl1pPr marL="0" algn="l" defTabSz="914400" rtl="0" eaLnBrk="1" latinLnBrk="0" hangingPunct="1">
+              <a:defRPr sz="900" kern="1200">
+                <a:solidFill>
+                  <a:srgbClr val="E8E0F2"/>
+                </a:solidFill>
+                <a:latin typeface="DM Sans 14pt" pitchFamily="2" charset="77"/>
+                <a:ea typeface="+mn-ea"/>
+                <a:cs typeface="+mn-cs"/>
+              </a:defRPr>
+            </a:lvl1pPr>
+            <a:lvl2pPr marL="457200" algn="l" defTabSz="914400" rtl="0" eaLnBrk="1" latinLnBrk="0" hangingPunct="1">
+              <a:defRPr sz="1800" kern="1200">
+                <a:solidFill>
+                  <a:schemeClr val="tx1"/>
+                </a:solidFill>
+                <a:latin typeface="+mn-lt"/>
+                <a:ea typeface="+mn-ea"/>
+                <a:cs typeface="+mn-cs"/>
+              </a:defRPr>
+            </a:lvl2pPr>
+            <a:lvl3pPr marL="914400" algn="l" defTabSz="914400" rtl="0" eaLnBrk="1" latinLnBrk="0" hangingPunct="1">
+              <a:defRPr sz="1800" kern="1200">
+                <a:solidFill>
+                  <a:schemeClr val="tx1"/>
+                </a:solidFill>
+                <a:latin typeface="+mn-lt"/>
+                <a:ea typeface="+mn-ea"/>
+                <a:cs typeface="+mn-cs"/>
+              </a:defRPr>
+            </a:lvl3pPr>
+            <a:lvl4pPr marL="1371600" algn="l" defTabSz="914400" rtl="0" eaLnBrk="1" latinLnBrk="0" hangingPunct="1">
+              <a:defRPr sz="1800" kern="1200">
+                <a:solidFill>
+                  <a:schemeClr val="tx1"/>
+                </a:solidFill>
+                <a:latin typeface="+mn-lt"/>
+                <a:ea typeface="+mn-ea"/>
+                <a:cs typeface="+mn-cs"/>
+              </a:defRPr>
+            </a:lvl4pPr>
+            <a:lvl5pPr marL="1828800" algn="l" defTabSz="914400" rtl="0" eaLnBrk="1" latinLnBrk="0" hangingPunct="1">
+              <a:defRPr sz="1800" kern="1200">
+                <a:solidFill>
+                  <a:schemeClr val="tx1"/>
+                </a:solidFill>
+                <a:latin typeface="+mn-lt"/>
+                <a:ea typeface="+mn-ea"/>
+                <a:cs typeface="+mn-cs"/>
+              </a:defRPr>
+            </a:lvl5pPr>
+            <a:lvl6pPr marL="2286000" algn="l" defTabSz="914400" rtl="0" eaLnBrk="1" latinLnBrk="0" hangingPunct="1">
+              <a:defRPr sz="1800" kern="1200">
+                <a:solidFill>
+                  <a:schemeClr val="tx1"/>
+                </a:solidFill>
+                <a:latin typeface="+mn-lt"/>
+                <a:ea typeface="+mn-ea"/>
+                <a:cs typeface="+mn-cs"/>
+              </a:defRPr>
+            </a:lvl6pPr>
+            <a:lvl7pPr marL="2743200" algn="l" defTabSz="914400" rtl="0" eaLnBrk="1" latinLnBrk="0" hangingPunct="1">
+              <a:defRPr sz="1800" kern="1200">
+                <a:solidFill>
+                  <a:schemeClr val="tx1"/>
+                </a:solidFill>
+                <a:latin typeface="+mn-lt"/>
+                <a:ea typeface="+mn-ea"/>
+                <a:cs typeface="+mn-cs"/>
+              </a:defRPr>
+            </a:lvl7pPr>
+            <a:lvl8pPr marL="3200400" algn="l" defTabSz="914400" rtl="0" eaLnBrk="1" latinLnBrk="0" hangingPunct="1">
+              <a:defRPr sz="1800" kern="1200">
+                <a:solidFill>
+                  <a:schemeClr val="tx1"/>
+                </a:solidFill>
+                <a:latin typeface="+mn-lt"/>
+                <a:ea typeface="+mn-ea"/>
+                <a:cs typeface="+mn-cs"/>
+              </a:defRPr>
+            </a:lvl8pPr>
+            <a:lvl9pPr marL="3657600" algn="l" defTabSz="914400" rtl="0" eaLnBrk="1" latinLnBrk="0" hangingPunct="1">
+              <a:defRPr sz="1800" kern="1200">
+                <a:solidFill>
+                  <a:schemeClr val="tx1"/>
+                </a:solidFill>
+                <a:latin typeface="+mn-lt"/>
+                <a:ea typeface="+mn-ea"/>
+                <a:cs typeface="+mn-cs"/>
+              </a:defRPr>
+            </a:lvl9pPr>
+          </a:lstStyle>
+          <a:p>
+            <a:r>
+              <a:rPr lang="en-GB" dirty="0">
+                <a:solidFill>
+                  <a:srgbClr val="757575"/>
+                </a:solidFill>
+              </a:rPr>
+              <a:t>{{</a:t>
+            </a:r>
+            <a:r>
+              <a:rPr lang="en-GB" dirty="0" err="1">
+                <a:solidFill>
+                  <a:srgbClr val="757575"/>
+                </a:solidFill>
+              </a:rPr>
+              <a:t>slide_number</a:t>
+            </a:r>
+            <a:r>
+              <a:rPr lang="en-GB" dirty="0">
+                <a:solidFill>
+                  <a:srgbClr val="757575"/>
+                </a:solidFill>
+              </a:rPr>
+              <a:t>}} / {{</a:t>
+            </a:r>
+            <a:r>
+              <a:rPr lang="en-GB" dirty="0" err="1">
+                <a:solidFill>
+                  <a:srgbClr val="757575"/>
+                </a:solidFill>
+              </a:rPr>
+              <a:t>total_slides</a:t>
+            </a:r>
+            <a:r>
+              <a:rPr lang="en-GB" dirty="0">
+                <a:solidFill>
+                  <a:srgbClr val="757575"/>
+                </a:solidFill>
+              </a:rPr>
+              <a:t>}}</a:t>
+            </a:r>
+          </a:p>
+        </p:txBody>
+      </p:sp>
+      <p:sp>
+        <p:nvSpPr>
+          <p:cNvPr id="10" name="Shape 28">
+            <a:extLst>
+              <a:ext uri="{FF2B5EF4-FFF2-40B4-BE49-F238E27FC236}">
+                <a16:creationId xmlns:a16="http://schemas.microsoft.com/office/drawing/2014/main" id="{46C71CB8-D020-C358-506A-1F59E56F780C}"/>
+              </a:ext>
+            </a:extLst>
+          </p:cNvPr>
+          <p:cNvSpPr/>
+          <p:nvPr/>
+        </p:nvSpPr>
+        <p:spPr>
+          <a:xfrm>
+            <a:off x="12995755" y="1866900"/>
+            <a:ext cx="4701600" cy="1188000"/>
+          </a:xfrm>
+          <a:prstGeom prst="roundRect">
+            <a:avLst>
+              <a:gd name="adj" fmla="val 6000"/>
+            </a:avLst>
+          </a:prstGeom>
+          <a:solidFill>
+            <a:srgbClr val="643791">
+              <a:alpha val="8000"/>
+            </a:srgbClr>
+          </a:solidFill>
+          <a:ln/>
+        </p:spPr>
+        <p:txBody>
+          <a:bodyPr/>
+          <a:lstStyle/>
+          <a:p>
+            <a:pPr>
+              <a:lnSpc>
+                <a:spcPct val="110000"/>
+              </a:lnSpc>
+            </a:pPr>
+            <a:r>
+              <a:rPr lang="en-GB" sz="1400" dirty="0">
+                <a:solidFill>
+                  <a:srgbClr val="643791"/>
+                </a:solidFill>
+                <a:latin typeface="DM Sans 14pt" pitchFamily="2" charset="77"/>
+                <a:cs typeface="Arial" pitchFamily="34" charset="-120"/>
+              </a:rPr>
+              <a:t>{{</a:t>
+            </a:r>
+            <a:r>
+              <a:rPr lang="en-GB" sz="1400" dirty="0" err="1">
+                <a:solidFill>
+                  <a:srgbClr val="643791"/>
+                </a:solidFill>
+                <a:latin typeface="DM Sans 14pt" pitchFamily="2" charset="77"/>
+                <a:cs typeface="Arial" pitchFamily="34" charset="-120"/>
+              </a:rPr>
+              <a:t>chart_explainer_benchmark_</a:t>
+            </a:r>
+            <a:r>
+              <a:rPr lang="en-GB" sz="1400" err="1">
+                <a:solidFill>
+                  <a:srgbClr val="643791"/>
+                </a:solidFill>
+                <a:latin typeface="DM Sans 14pt" pitchFamily="2" charset="77"/>
+                <a:cs typeface="Arial" pitchFamily="34" charset="-120"/>
+              </a:rPr>
+              <a:t>average</a:t>
+            </a:r>
+            <a:r>
+              <a:rPr lang="en-GB" sz="1400">
+                <a:solidFill>
+                  <a:srgbClr val="643791"/>
+                </a:solidFill>
+                <a:latin typeface="DM Sans 14pt" pitchFamily="2" charset="77"/>
+                <a:cs typeface="Arial" pitchFamily="34" charset="-120"/>
+              </a:rPr>
+              <a:t>}}</a:t>
+            </a:r>
+            <a:endParaRPr lang="en-US" sz="1400" dirty="0">
+              <a:solidFill>
+                <a:srgbClr val="643791"/>
+              </a:solidFill>
+              <a:latin typeface="DM Sans 14pt" pitchFamily="2" charset="77"/>
+              <a:cs typeface="Arial" pitchFamily="34" charset="-120"/>
+            </a:endParaRPr>
+          </a:p>
+        </p:txBody>
+      </p:sp>
+      <p:sp>
+        <p:nvSpPr>
+          <p:cNvPr id="11" name="Text 27">
+            <a:extLst>
+              <a:ext uri="{FF2B5EF4-FFF2-40B4-BE49-F238E27FC236}">
+                <a16:creationId xmlns:a16="http://schemas.microsoft.com/office/drawing/2014/main" id="{2D240F46-20B1-8FE8-EA8B-D2F4A1B5AB24}"/>
+              </a:ext>
+            </a:extLst>
+          </p:cNvPr>
+          <p:cNvSpPr/>
+          <p:nvPr/>
+        </p:nvSpPr>
+        <p:spPr>
+          <a:xfrm>
+            <a:off x="12995755" y="3259384"/>
+            <a:ext cx="4701600" cy="488865"/>
+          </a:xfrm>
+          <a:prstGeom prst="rect">
+            <a:avLst/>
+          </a:prstGeom>
+          <a:noFill/>
+          <a:ln/>
+        </p:spPr>
+        <p:txBody>
+          <a:bodyPr wrap="square" lIns="25400" tIns="25400" rIns="25400" bIns="25400" rtlCol="0" anchor="t">
+            <a:normAutofit/>
+          </a:bodyPr>
+          <a:lstStyle/>
+          <a:p>
+            <a:pPr marL="0" indent="0" algn="l">
+              <a:buNone/>
+            </a:pPr>
+            <a:r>
+              <a:rPr lang="en-US" sz="2400" b="1" kern="0" spc="368" dirty="0">
+                <a:solidFill>
+                  <a:srgbClr val="643791"/>
+                </a:solidFill>
+                <a:latin typeface="DM Sans 14pt" pitchFamily="2" charset="77"/>
+                <a:ea typeface="Arial" pitchFamily="34" charset="-122"/>
+                <a:cs typeface="Arial" pitchFamily="34" charset="-120"/>
+              </a:rPr>
+              <a:t>COMMENTARY</a:t>
+            </a:r>
+            <a:endParaRPr lang="en-US" sz="2400" b="1" dirty="0">
+              <a:latin typeface="DM Sans 14pt" pitchFamily="2" charset="77"/>
+            </a:endParaRPr>
+          </a:p>
+        </p:txBody>
+      </p:sp>
+      <p:sp>
+        <p:nvSpPr>
+          <p:cNvPr id="12" name="Shape 28">
+            <a:extLst>
+              <a:ext uri="{FF2B5EF4-FFF2-40B4-BE49-F238E27FC236}">
+                <a16:creationId xmlns:a16="http://schemas.microsoft.com/office/drawing/2014/main" id="{6D2B688A-D648-8DE9-4BF5-D04A62A5A6D9}"/>
+              </a:ext>
+            </a:extLst>
+          </p:cNvPr>
+          <p:cNvSpPr/>
+          <p:nvPr/>
+        </p:nvSpPr>
+        <p:spPr>
+          <a:xfrm>
+            <a:off x="12995755" y="3748249"/>
+            <a:ext cx="4701600" cy="5606765"/>
+          </a:xfrm>
+          <a:prstGeom prst="roundRect">
+            <a:avLst>
+              <a:gd name="adj" fmla="val 3000"/>
+            </a:avLst>
+          </a:prstGeom>
+          <a:solidFill>
+            <a:srgbClr val="643791">
+              <a:alpha val="8000"/>
+            </a:srgbClr>
+          </a:solidFill>
+          <a:ln/>
+        </p:spPr>
+        <p:txBody>
+          <a:bodyPr/>
+          <a:lstStyle/>
+          <a:p>
+            <a:r>
+              <a:rPr lang="en-US" sz="1400">
+                <a:solidFill>
+                  <a:srgbClr val="643791"/>
+                </a:solidFill>
+                <a:latin typeface="DM Sans 14pt" pitchFamily="2" charset="77"/>
+                <a:cs typeface="Arial" pitchFamily="34" charset="-120"/>
+              </a:rPr>
+              <a:t>{{</a:t>
+            </a:r>
+            <a:r>
+              <a:rPr lang="en-US" sz="1400" dirty="0" err="1">
+                <a:solidFill>
+                  <a:srgbClr val="643791"/>
+                </a:solidFill>
+                <a:latin typeface="DM Sans 14pt" pitchFamily="2" charset="77"/>
+                <a:cs typeface="Arial" pitchFamily="34" charset="-120"/>
+              </a:rPr>
+              <a:t>commentary_average</a:t>
+            </a:r>
+            <a:r>
+              <a:rPr lang="en-US" sz="1400" err="1">
+                <a:solidFill>
+                  <a:srgbClr val="643791"/>
+                </a:solidFill>
+                <a:latin typeface="DM Sans 14pt" pitchFamily="2" charset="77"/>
+                <a:cs typeface="Arial" pitchFamily="34" charset="-120"/>
+              </a:rPr>
+              <a:t>_</a:t>
+            </a:r>
+            <a:r>
+              <a:rPr lang="en-US" sz="1400">
+                <a:solidFill>
+                  <a:srgbClr val="643791"/>
+                </a:solidFill>
+                <a:latin typeface="DM Sans 14pt" pitchFamily="2" charset="77"/>
+                <a:cs typeface="Arial" pitchFamily="34" charset="-120"/>
+              </a:rPr>
+              <a:t>intro}}</a:t>
+            </a:r>
+            <a:endParaRPr lang="en-US" sz="1400" dirty="0">
+              <a:solidFill>
+                <a:srgbClr val="643791"/>
+              </a:solidFill>
+              <a:latin typeface="DM Sans 14pt" pitchFamily="2" charset="77"/>
+              <a:cs typeface="Arial" pitchFamily="34" charset="-120"/>
+            </a:endParaRPr>
+          </a:p>
+          <a:p>
+            <a:endParaRPr lang="en-US" sz="1400" dirty="0">
+              <a:solidFill>
+                <a:srgbClr val="643791"/>
+              </a:solidFill>
+              <a:latin typeface="DM Sans 14pt" pitchFamily="2" charset="77"/>
+              <a:cs typeface="Arial" pitchFamily="34" charset="-120"/>
+            </a:endParaRPr>
+          </a:p>
+          <a:p>
+            <a:r>
+              <a:rPr lang="en-US" sz="1400" dirty="0">
+                <a:solidFill>
+                  <a:srgbClr val="643791"/>
+                </a:solidFill>
+                <a:latin typeface="DM Sans 14pt" pitchFamily="2" charset="77"/>
+                <a:cs typeface="Arial" pitchFamily="34" charset="-120"/>
+              </a:rPr>
+              <a:t>{{commentary_average_point_</a:t>
+            </a:r>
+            <a:r>
+              <a:rPr lang="en-US" sz="1400">
+                <a:solidFill>
+                  <a:srgbClr val="643791"/>
+                </a:solidFill>
+                <a:latin typeface="DM Sans 14pt" pitchFamily="2" charset="77"/>
+                <a:cs typeface="Arial" pitchFamily="34" charset="-120"/>
+              </a:rPr>
+              <a:t>1}}</a:t>
+            </a:r>
+            <a:endParaRPr lang="en-US" sz="1400" dirty="0">
+              <a:solidFill>
+                <a:srgbClr val="643791"/>
+              </a:solidFill>
+              <a:latin typeface="DM Sans 14pt" pitchFamily="2" charset="77"/>
+              <a:cs typeface="Arial" pitchFamily="34" charset="-120"/>
+            </a:endParaRPr>
+          </a:p>
+          <a:p>
+            <a:endParaRPr lang="en-US" sz="1400" dirty="0">
+              <a:solidFill>
+                <a:srgbClr val="643791"/>
+              </a:solidFill>
+              <a:latin typeface="DM Sans 14pt" pitchFamily="2" charset="77"/>
+              <a:cs typeface="Arial" pitchFamily="34" charset="-120"/>
+            </a:endParaRPr>
+          </a:p>
+          <a:p>
+            <a:r>
+              <a:rPr lang="en-US" sz="1400" dirty="0">
+                <a:solidFill>
+                  <a:srgbClr val="643791"/>
+                </a:solidFill>
+                <a:latin typeface="DM Sans 14pt" pitchFamily="2" charset="77"/>
+                <a:cs typeface="Arial" pitchFamily="34" charset="-120"/>
+              </a:rPr>
+              <a:t>{{commentary_average_point</a:t>
+            </a:r>
+            <a:r>
+              <a:rPr lang="en-US" sz="1400">
+                <a:solidFill>
+                  <a:srgbClr val="643791"/>
+                </a:solidFill>
+                <a:latin typeface="DM Sans 14pt" pitchFamily="2" charset="77"/>
+                <a:cs typeface="Arial" pitchFamily="34" charset="-120"/>
+              </a:rPr>
+              <a:t>_2</a:t>
+            </a:r>
+            <a:r>
+              <a:rPr lang="en-US" sz="1400" dirty="0">
+                <a:solidFill>
+                  <a:srgbClr val="643791"/>
+                </a:solidFill>
+                <a:latin typeface="DM Sans 14pt" pitchFamily="2" charset="77"/>
+                <a:cs typeface="Arial" pitchFamily="34" charset="-120"/>
+              </a:rPr>
+              <a:t>}}</a:t>
+            </a:r>
           </a:p>
         </p:txBody>
       </p:sp>
@@ -4817,7 +4842,9 @@
             <a:avLst/>
           </a:prstGeom>
           <a:noFill/>
-          <a:ln/>
+          <a:ln>
+            <a:noFill/>
+          </a:ln>
         </p:spPr>
         <p:txBody>
           <a:bodyPr wrap="square" lIns="25400" tIns="25400" rIns="25400" bIns="25400" rtlCol="0" anchor="t">
@@ -4856,8 +4883,8 @@
         </p:nvSpPr>
         <p:spPr>
           <a:xfrm>
-            <a:off x="762000" y="1695451"/>
-            <a:ext cx="11756529" cy="7639050"/>
+            <a:off x="762000" y="1866900"/>
+            <a:ext cx="11945938" cy="7481190"/>
           </a:xfrm>
           <a:prstGeom prst="roundRect">
             <a:avLst>
@@ -4892,12 +4919,12 @@
         </p:nvSpPr>
         <p:spPr>
           <a:xfrm>
-            <a:off x="851338" y="2111777"/>
-            <a:ext cx="11592910" cy="7127473"/>
+            <a:off x="864348" y="2297615"/>
+            <a:ext cx="11725200" cy="6940550"/>
           </a:xfrm>
           <a:prstGeom prst="roundRect">
             <a:avLst>
-              <a:gd name="adj" fmla="val 3334"/>
+              <a:gd name="adj" fmla="val 2521"/>
             </a:avLst>
           </a:prstGeom>
           <a:solidFill>
@@ -5034,55 +5061,10 @@
       </p:sp>
       <p:sp>
         <p:nvSpPr>
-          <p:cNvPr id="36" name="Text 34"/>
-          <p:cNvSpPr/>
-          <p:nvPr/>
-        </p:nvSpPr>
-        <p:spPr>
-          <a:xfrm>
-            <a:off x="17233255" y="9753600"/>
-            <a:ext cx="521345" cy="190500"/>
-          </a:xfrm>
-          <a:prstGeom prst="rect">
-            <a:avLst/>
-          </a:prstGeom>
-          <a:noFill/>
-          <a:ln/>
-        </p:spPr>
-        <p:txBody>
-          <a:bodyPr wrap="square" lIns="25400" tIns="25400" rIns="25400" bIns="25400" rtlCol="0" anchor="t">
-            <a:normAutofit fontScale="85000" lnSpcReduction="10000"/>
-          </a:bodyPr>
-          <a:lstStyle/>
-          <a:p>
-            <a:pPr marL="0" indent="0" algn="l">
-              <a:buNone/>
-            </a:pPr>
-            <a:r>
-              <a:rPr lang="en-US" sz="1050" kern="0" spc="42" dirty="0">
-                <a:solidFill>
-                  <a:srgbClr val="111111">
-                    <a:alpha val="63000"/>
-                  </a:srgbClr>
-                </a:solidFill>
-                <a:latin typeface="DM Sans 14pt" pitchFamily="2" charset="77"/>
-                <a:ea typeface="Arial" pitchFamily="34" charset="-122"/>
-                <a:cs typeface="Arial" pitchFamily="34" charset="-120"/>
-              </a:rPr>
-              <a:t>04 / 07</a:t>
-            </a:r>
-            <a:endParaRPr lang="en-US" sz="1050" dirty="0">
-              <a:latin typeface="DM Sans 14pt" pitchFamily="2" charset="77"/>
-            </a:endParaRPr>
-          </a:p>
-        </p:txBody>
-      </p:sp>
-      <p:sp>
-        <p:nvSpPr>
-          <p:cNvPr id="7" name="Text 27">
+          <p:cNvPr id="46" name="Text 3">
             <a:extLst>
               <a:ext uri="{FF2B5EF4-FFF2-40B4-BE49-F238E27FC236}">
-                <a16:creationId xmlns:a16="http://schemas.microsoft.com/office/drawing/2014/main" id="{3FF78C94-A50F-976C-A980-8C3CAB3F0D38}"/>
+                <a16:creationId xmlns:a16="http://schemas.microsoft.com/office/drawing/2014/main" id="{62BE7D87-7869-8168-6968-EDBE76A419EB}"/>
               </a:ext>
             </a:extLst>
           </p:cNvPr>
@@ -5091,14 +5073,16 @@
         </p:nvSpPr>
         <p:spPr>
           <a:xfrm>
-            <a:off x="12995755" y="3391422"/>
-            <a:ext cx="4741200" cy="488865"/>
+            <a:off x="12995755" y="575051"/>
+            <a:ext cx="4703047" cy="280800"/>
           </a:xfrm>
           <a:prstGeom prst="rect">
             <a:avLst/>
           </a:prstGeom>
           <a:noFill/>
-          <a:ln/>
+          <a:ln>
+            <a:noFill/>
+          </a:ln>
         </p:spPr>
         <p:txBody>
           <a:bodyPr wrap="square" lIns="25400" tIns="25400" rIns="25400" bIns="25400" rtlCol="0" anchor="t">
@@ -5106,11 +5090,9 @@
           </a:bodyPr>
           <a:lstStyle/>
           <a:p>
-            <a:pPr marL="0" indent="0" algn="l">
-              <a:buNone/>
-            </a:pPr>
-            <a:r>
-              <a:rPr lang="en-US" sz="2400" b="1" kern="0" spc="368" dirty="0">
+            <a:pPr algn="r"/>
+            <a:r>
+              <a:rPr lang="en-US" sz="1200" kern="0" spc="420" dirty="0">
                 <a:solidFill>
                   <a:srgbClr val="643791"/>
                 </a:solidFill>
@@ -5118,385 +5100,14 @@
                 <a:ea typeface="Arial" pitchFamily="34" charset="-122"/>
                 <a:cs typeface="Arial" pitchFamily="34" charset="-120"/>
               </a:rPr>
-              <a:t>COMMENTARY</a:t>
-            </a:r>
-            <a:endParaRPr lang="en-US" sz="2400" b="1" dirty="0">
-              <a:latin typeface="DM Sans 14pt" pitchFamily="2" charset="77"/>
-            </a:endParaRPr>
-          </a:p>
-        </p:txBody>
-      </p:sp>
-      <p:sp>
-        <p:nvSpPr>
-          <p:cNvPr id="9" name="Shape 28">
-            <a:extLst>
-              <a:ext uri="{FF2B5EF4-FFF2-40B4-BE49-F238E27FC236}">
-                <a16:creationId xmlns:a16="http://schemas.microsoft.com/office/drawing/2014/main" id="{CD38405B-7A80-D9F5-43F9-EF7730151C46}"/>
-              </a:ext>
-            </a:extLst>
-          </p:cNvPr>
-          <p:cNvSpPr/>
-          <p:nvPr/>
-        </p:nvSpPr>
-        <p:spPr>
-          <a:xfrm>
-            <a:off x="12995755" y="3880287"/>
-            <a:ext cx="4703047" cy="1182447"/>
-          </a:xfrm>
-          <a:prstGeom prst="roundRect">
-            <a:avLst>
-              <a:gd name="adj" fmla="val 14191"/>
-            </a:avLst>
-          </a:prstGeom>
-          <a:solidFill>
-            <a:srgbClr val="643791">
-              <a:alpha val="8000"/>
-            </a:srgbClr>
-          </a:solidFill>
-          <a:ln/>
-        </p:spPr>
-        <p:txBody>
-          <a:bodyPr/>
-          <a:lstStyle/>
-          <a:p>
-            <a:pPr>
-              <a:lnSpc>
-                <a:spcPct val="110000"/>
-              </a:lnSpc>
-            </a:pPr>
-            <a:r>
-              <a:rPr lang="en-US" sz="1400" dirty="0">
-                <a:solidFill>
-                  <a:srgbClr val="643791"/>
-                </a:solidFill>
-                <a:latin typeface="DM Sans 14pt" pitchFamily="2" charset="77"/>
-                <a:ea typeface="Arial" pitchFamily="34" charset="-122"/>
-                <a:cs typeface="Arial" pitchFamily="34" charset="-120"/>
-              </a:rPr>
-              <a:t>{{</a:t>
-            </a:r>
-            <a:r>
-              <a:rPr lang="en-US" sz="1400" dirty="0" err="1">
-                <a:solidFill>
-                  <a:srgbClr val="643791"/>
-                </a:solidFill>
-                <a:latin typeface="DM Sans 14pt" pitchFamily="2" charset="77"/>
-                <a:ea typeface="Arial" pitchFamily="34" charset="-122"/>
-                <a:cs typeface="Arial" pitchFamily="34" charset="-120"/>
-              </a:rPr>
-              <a:t>commentary_postings_intro</a:t>
-            </a:r>
-            <a:r>
-              <a:rPr lang="en-US" sz="1400" dirty="0">
-                <a:solidFill>
-                  <a:srgbClr val="643791"/>
-                </a:solidFill>
-                <a:latin typeface="DM Sans 14pt" pitchFamily="2" charset="77"/>
-                <a:ea typeface="Arial" pitchFamily="34" charset="-122"/>
-                <a:cs typeface="Arial" pitchFamily="34" charset="-120"/>
-              </a:rPr>
-              <a:t>}}</a:t>
-            </a:r>
-            <a:endParaRPr lang="en-US" sz="1400" dirty="0">
-              <a:latin typeface="DM Sans 14pt" pitchFamily="2" charset="77"/>
-            </a:endParaRPr>
-          </a:p>
-        </p:txBody>
-      </p:sp>
-      <p:sp>
-        <p:nvSpPr>
-          <p:cNvPr id="12" name="Shape 30">
-            <a:extLst>
-              <a:ext uri="{FF2B5EF4-FFF2-40B4-BE49-F238E27FC236}">
-                <a16:creationId xmlns:a16="http://schemas.microsoft.com/office/drawing/2014/main" id="{36B729F7-3A69-5881-97D9-C59766E932D7}"/>
-              </a:ext>
-            </a:extLst>
-          </p:cNvPr>
-          <p:cNvSpPr/>
-          <p:nvPr/>
-        </p:nvSpPr>
-        <p:spPr>
-          <a:xfrm>
-            <a:off x="12995755" y="5271442"/>
-            <a:ext cx="4707474" cy="1174800"/>
-          </a:xfrm>
-          <a:prstGeom prst="roundRect">
-            <a:avLst>
-              <a:gd name="adj" fmla="val 15385"/>
-            </a:avLst>
-          </a:prstGeom>
-          <a:solidFill>
-            <a:srgbClr val="643791">
-              <a:alpha val="8000"/>
-            </a:srgbClr>
-          </a:solidFill>
-          <a:ln/>
-        </p:spPr>
-        <p:txBody>
-          <a:bodyPr/>
-          <a:lstStyle/>
-          <a:p>
-            <a:pPr>
-              <a:lnSpc>
-                <a:spcPct val="110000"/>
-              </a:lnSpc>
-            </a:pPr>
-            <a:r>
-              <a:rPr lang="en-US" sz="1400" dirty="0">
-                <a:solidFill>
-                  <a:srgbClr val="643791"/>
-                </a:solidFill>
-                <a:latin typeface="DM Sans 14pt" pitchFamily="2" charset="77"/>
-                <a:ea typeface="Arial" pitchFamily="34" charset="-122"/>
-                <a:cs typeface="Arial" pitchFamily="34" charset="-120"/>
-              </a:rPr>
-              <a:t>{{commentary_postings_point_1}}</a:t>
-            </a:r>
-            <a:endParaRPr lang="en-US" sz="1400" dirty="0">
-              <a:latin typeface="DM Sans 14pt" pitchFamily="2" charset="77"/>
-            </a:endParaRPr>
-          </a:p>
-        </p:txBody>
-      </p:sp>
-      <p:sp>
-        <p:nvSpPr>
-          <p:cNvPr id="15" name="Shape 32">
-            <a:extLst>
-              <a:ext uri="{FF2B5EF4-FFF2-40B4-BE49-F238E27FC236}">
-                <a16:creationId xmlns:a16="http://schemas.microsoft.com/office/drawing/2014/main" id="{62C2C6E1-4CAF-1AA6-2366-B71F536E616E}"/>
-              </a:ext>
-            </a:extLst>
-          </p:cNvPr>
-          <p:cNvSpPr/>
-          <p:nvPr/>
-        </p:nvSpPr>
-        <p:spPr>
-          <a:xfrm>
-            <a:off x="12995755" y="6662597"/>
-            <a:ext cx="4707474" cy="1174410"/>
-          </a:xfrm>
-          <a:prstGeom prst="roundRect">
-            <a:avLst>
-              <a:gd name="adj" fmla="val 15385"/>
-            </a:avLst>
-          </a:prstGeom>
-          <a:solidFill>
-            <a:srgbClr val="643791">
-              <a:alpha val="8000"/>
-            </a:srgbClr>
-          </a:solidFill>
-          <a:ln/>
-        </p:spPr>
-        <p:txBody>
-          <a:bodyPr/>
-          <a:lstStyle/>
-          <a:p>
-            <a:pPr>
-              <a:lnSpc>
-                <a:spcPct val="110000"/>
-              </a:lnSpc>
-            </a:pPr>
-            <a:r>
-              <a:rPr lang="en-US" sz="1400" dirty="0">
-                <a:solidFill>
-                  <a:srgbClr val="643791"/>
-                </a:solidFill>
-                <a:latin typeface="DM Sans 14pt" pitchFamily="2" charset="77"/>
-                <a:ea typeface="Arial" pitchFamily="34" charset="-122"/>
-                <a:cs typeface="Arial" pitchFamily="34" charset="-120"/>
-              </a:rPr>
-              <a:t>{{commentary_postings_point_2}}</a:t>
-            </a:r>
-            <a:endParaRPr lang="en-US" sz="1400" dirty="0">
-              <a:latin typeface="DM Sans 14pt" pitchFamily="2" charset="77"/>
-            </a:endParaRPr>
-          </a:p>
-        </p:txBody>
-      </p:sp>
-      <p:sp>
-        <p:nvSpPr>
-          <p:cNvPr id="18" name="Shape 28">
-            <a:extLst>
-              <a:ext uri="{FF2B5EF4-FFF2-40B4-BE49-F238E27FC236}">
-                <a16:creationId xmlns:a16="http://schemas.microsoft.com/office/drawing/2014/main" id="{B062927B-9F35-2BF4-1AC4-64F9583E72B9}"/>
-              </a:ext>
-            </a:extLst>
-          </p:cNvPr>
-          <p:cNvSpPr/>
-          <p:nvPr/>
-        </p:nvSpPr>
-        <p:spPr>
-          <a:xfrm>
-            <a:off x="12995755" y="1890712"/>
-            <a:ext cx="4703047" cy="1182447"/>
-          </a:xfrm>
-          <a:prstGeom prst="roundRect">
-            <a:avLst>
-              <a:gd name="adj" fmla="val 14191"/>
-            </a:avLst>
-          </a:prstGeom>
-          <a:solidFill>
-            <a:srgbClr val="643791">
-              <a:alpha val="8000"/>
-            </a:srgbClr>
-          </a:solidFill>
-          <a:ln/>
-        </p:spPr>
-        <p:txBody>
-          <a:bodyPr/>
-          <a:lstStyle/>
-          <a:p>
-            <a:r>
-              <a:rPr lang="en-GB" sz="1400" dirty="0">
-                <a:solidFill>
-                  <a:srgbClr val="643791"/>
-                </a:solidFill>
-                <a:latin typeface="DM Sans 14pt" pitchFamily="2" charset="77"/>
-              </a:rPr>
-              <a:t>{{</a:t>
-            </a:r>
-            <a:r>
-              <a:rPr lang="en-GB" sz="1400" dirty="0" err="1">
-                <a:solidFill>
-                  <a:srgbClr val="643791"/>
-                </a:solidFill>
-                <a:latin typeface="DM Sans 14pt" pitchFamily="2" charset="77"/>
-              </a:rPr>
-              <a:t>chart_explainer_postings_by_type</a:t>
-            </a:r>
-            <a:r>
-              <a:rPr lang="en-GB" sz="1400" dirty="0">
-                <a:solidFill>
-                  <a:srgbClr val="643791"/>
-                </a:solidFill>
-                <a:latin typeface="DM Sans 14pt" pitchFamily="2" charset="77"/>
-              </a:rPr>
-              <a:t>}}</a:t>
-            </a:r>
-          </a:p>
-        </p:txBody>
-      </p:sp>
-      <p:grpSp>
-        <p:nvGrpSpPr>
-          <p:cNvPr id="45" name="Group 44">
-            <a:extLst>
-              <a:ext uri="{FF2B5EF4-FFF2-40B4-BE49-F238E27FC236}">
-                <a16:creationId xmlns:a16="http://schemas.microsoft.com/office/drawing/2014/main" id="{6D313A4E-6410-2708-0A46-7A596DFFE2CB}"/>
-              </a:ext>
-            </a:extLst>
-          </p:cNvPr>
-          <p:cNvGrpSpPr/>
-          <p:nvPr/>
-        </p:nvGrpSpPr>
-        <p:grpSpPr>
-          <a:xfrm>
-            <a:off x="12995755" y="575051"/>
-            <a:ext cx="4703047" cy="1096551"/>
-            <a:chOff x="12995755" y="575051"/>
-            <a:chExt cx="4703047" cy="1096551"/>
-          </a:xfrm>
-        </p:grpSpPr>
-        <p:sp>
-          <p:nvSpPr>
-            <p:cNvPr id="46" name="Text 3">
-              <a:extLst>
-                <a:ext uri="{FF2B5EF4-FFF2-40B4-BE49-F238E27FC236}">
-                  <a16:creationId xmlns:a16="http://schemas.microsoft.com/office/drawing/2014/main" id="{62BE7D87-7869-8168-6968-EDBE76A419EB}"/>
-                </a:ext>
-              </a:extLst>
-            </p:cNvPr>
-            <p:cNvSpPr/>
-            <p:nvPr/>
-          </p:nvSpPr>
-          <p:spPr>
-            <a:xfrm>
-              <a:off x="12995755" y="575051"/>
-              <a:ext cx="4703047" cy="297317"/>
-            </a:xfrm>
-            <a:prstGeom prst="rect">
-              <a:avLst/>
-            </a:prstGeom>
-            <a:noFill/>
-            <a:ln/>
-          </p:spPr>
-          <p:txBody>
-            <a:bodyPr wrap="square" lIns="25400" tIns="25400" rIns="25400" bIns="25400" rtlCol="0" anchor="t">
-              <a:normAutofit/>
-            </a:bodyPr>
-            <a:lstStyle/>
-            <a:p>
-              <a:pPr algn="r"/>
-              <a:r>
-                <a:rPr lang="en-US" sz="1200" kern="0" spc="420" dirty="0">
-                  <a:solidFill>
-                    <a:srgbClr val="643791"/>
-                  </a:solidFill>
-                  <a:latin typeface="DM Sans 14pt" pitchFamily="2" charset="77"/>
-                  <a:ea typeface="Arial" pitchFamily="34" charset="-122"/>
-                  <a:cs typeface="Arial" pitchFamily="34" charset="-120"/>
-                </a:rPr>
-                <a:t>03 · JOB POSTINGS</a:t>
-              </a:r>
-              <a:endParaRPr lang="en-US" sz="1200" dirty="0">
-                <a:latin typeface="DM Sans 14pt" pitchFamily="2" charset="77"/>
-              </a:endParaRPr>
-            </a:p>
-          </p:txBody>
-        </p:sp>
-        <p:sp>
-          <p:nvSpPr>
-            <p:cNvPr id="47" name="Text 21">
-              <a:extLst>
-                <a:ext uri="{FF2B5EF4-FFF2-40B4-BE49-F238E27FC236}">
-                  <a16:creationId xmlns:a16="http://schemas.microsoft.com/office/drawing/2014/main" id="{649E6B38-9A71-39CC-9327-91FE0E05FC58}"/>
-                </a:ext>
-              </a:extLst>
-            </p:cNvPr>
-            <p:cNvSpPr/>
-            <p:nvPr/>
-          </p:nvSpPr>
-          <p:spPr>
-            <a:xfrm>
-              <a:off x="12995755" y="933450"/>
-              <a:ext cx="4703047" cy="738152"/>
-            </a:xfrm>
-            <a:prstGeom prst="rect">
-              <a:avLst/>
-            </a:prstGeom>
-            <a:noFill/>
-            <a:ln/>
-          </p:spPr>
-          <p:txBody>
-            <a:bodyPr wrap="square" lIns="25400" tIns="25400" rIns="25400" bIns="25400" rtlCol="0" anchor="t">
-              <a:normAutofit fontScale="92500" lnSpcReduction="20000"/>
-            </a:bodyPr>
-            <a:lstStyle/>
-            <a:p>
-              <a:pPr>
-                <a:lnSpc>
-                  <a:spcPct val="140000"/>
-                </a:lnSpc>
-              </a:pPr>
-              <a:r>
-                <a:rPr lang="en-US" sz="1350" dirty="0">
-                  <a:solidFill>
-                    <a:srgbClr val="111111">
-                      <a:alpha val="63000"/>
-                    </a:srgbClr>
-                  </a:solidFill>
-                  <a:latin typeface="DM Sans 14pt" pitchFamily="2" charset="77"/>
-                  <a:ea typeface="Arial" pitchFamily="34" charset="-122"/>
-                  <a:cs typeface="Arial" pitchFamily="34" charset="-120"/>
-                </a:rPr>
-                <a:t>Postings broken down by job type. A role can appear in more than one category, so totals may exceed unique jobs posted. Low-volume categories are excluded.</a:t>
-              </a:r>
-              <a:endParaRPr lang="en-US" sz="1350" dirty="0">
-                <a:latin typeface="DM Sans 14pt" pitchFamily="2" charset="77"/>
-              </a:endParaRPr>
-            </a:p>
-          </p:txBody>
-        </p:sp>
-      </p:grpSp>
+              <a:t>03 · JOB POSTINGS</a:t>
+            </a:r>
+            <a:endParaRPr lang="en-US" sz="1200" dirty="0">
+              <a:latin typeface="DM Sans 14pt" pitchFamily="2" charset="77"/>
+            </a:endParaRPr>
+          </a:p>
+        </p:txBody>
+      </p:sp>
       <p:sp>
         <p:nvSpPr>
           <p:cNvPr id="5" name="Rectangle 4">
@@ -5511,8 +5122,8 @@
         </p:nvSpPr>
         <p:spPr>
           <a:xfrm>
-            <a:off x="851338" y="1754496"/>
-            <a:ext cx="8009197" cy="299438"/>
+            <a:off x="872369" y="1866900"/>
+            <a:ext cx="8009197" cy="428400"/>
           </a:xfrm>
           <a:prstGeom prst="rect">
             <a:avLst/>
@@ -5557,6 +5168,478 @@
             </a:r>
             <a:endParaRPr lang="en-US" dirty="0">
               <a:latin typeface="DM Sans 14pt" pitchFamily="2" charset="77"/>
+            </a:endParaRPr>
+          </a:p>
+        </p:txBody>
+      </p:sp>
+      <p:sp>
+        <p:nvSpPr>
+          <p:cNvPr id="8" name="Footer Placeholder 1">
+            <a:extLst>
+              <a:ext uri="{FF2B5EF4-FFF2-40B4-BE49-F238E27FC236}">
+                <a16:creationId xmlns:a16="http://schemas.microsoft.com/office/drawing/2014/main" id="{9C15951F-B6DE-38FF-7696-8351EB1A8602}"/>
+              </a:ext>
+            </a:extLst>
+          </p:cNvPr>
+          <p:cNvSpPr txBox="1">
+            <a:spLocks/>
+          </p:cNvSpPr>
+          <p:nvPr/>
+        </p:nvSpPr>
+        <p:spPr>
+          <a:xfrm>
+            <a:off x="17233255" y="9753300"/>
+            <a:ext cx="522000" cy="190800"/>
+          </a:xfrm>
+          <a:prstGeom prst="rect">
+            <a:avLst/>
+          </a:prstGeom>
+        </p:spPr>
+        <p:txBody>
+          <a:bodyPr vert="horz" lIns="36000" tIns="36000" rIns="36000" bIns="36000" rtlCol="0" anchor="ctr"/>
+          <a:lstStyle>
+            <a:lvl1pPr marL="0" algn="l" defTabSz="914400" rtl="0" eaLnBrk="1" latinLnBrk="0" hangingPunct="1">
+              <a:defRPr sz="900" kern="1200">
+                <a:solidFill>
+                  <a:srgbClr val="E8E0F2"/>
+                </a:solidFill>
+                <a:latin typeface="DM Sans 14pt" pitchFamily="2" charset="77"/>
+                <a:ea typeface="+mn-ea"/>
+                <a:cs typeface="+mn-cs"/>
+              </a:defRPr>
+            </a:lvl1pPr>
+            <a:lvl2pPr marL="457200" algn="l" defTabSz="914400" rtl="0" eaLnBrk="1" latinLnBrk="0" hangingPunct="1">
+              <a:defRPr sz="1800" kern="1200">
+                <a:solidFill>
+                  <a:schemeClr val="tx1"/>
+                </a:solidFill>
+                <a:latin typeface="+mn-lt"/>
+                <a:ea typeface="+mn-ea"/>
+                <a:cs typeface="+mn-cs"/>
+              </a:defRPr>
+            </a:lvl2pPr>
+            <a:lvl3pPr marL="914400" algn="l" defTabSz="914400" rtl="0" eaLnBrk="1" latinLnBrk="0" hangingPunct="1">
+              <a:defRPr sz="1800" kern="1200">
+                <a:solidFill>
+                  <a:schemeClr val="tx1"/>
+                </a:solidFill>
+                <a:latin typeface="+mn-lt"/>
+                <a:ea typeface="+mn-ea"/>
+                <a:cs typeface="+mn-cs"/>
+              </a:defRPr>
+            </a:lvl3pPr>
+            <a:lvl4pPr marL="1371600" algn="l" defTabSz="914400" rtl="0" eaLnBrk="1" latinLnBrk="0" hangingPunct="1">
+              <a:defRPr sz="1800" kern="1200">
+                <a:solidFill>
+                  <a:schemeClr val="tx1"/>
+                </a:solidFill>
+                <a:latin typeface="+mn-lt"/>
+                <a:ea typeface="+mn-ea"/>
+                <a:cs typeface="+mn-cs"/>
+              </a:defRPr>
+            </a:lvl4pPr>
+            <a:lvl5pPr marL="1828800" algn="l" defTabSz="914400" rtl="0" eaLnBrk="1" latinLnBrk="0" hangingPunct="1">
+              <a:defRPr sz="1800" kern="1200">
+                <a:solidFill>
+                  <a:schemeClr val="tx1"/>
+                </a:solidFill>
+                <a:latin typeface="+mn-lt"/>
+                <a:ea typeface="+mn-ea"/>
+                <a:cs typeface="+mn-cs"/>
+              </a:defRPr>
+            </a:lvl5pPr>
+            <a:lvl6pPr marL="2286000" algn="l" defTabSz="914400" rtl="0" eaLnBrk="1" latinLnBrk="0" hangingPunct="1">
+              <a:defRPr sz="1800" kern="1200">
+                <a:solidFill>
+                  <a:schemeClr val="tx1"/>
+                </a:solidFill>
+                <a:latin typeface="+mn-lt"/>
+                <a:ea typeface="+mn-ea"/>
+                <a:cs typeface="+mn-cs"/>
+              </a:defRPr>
+            </a:lvl6pPr>
+            <a:lvl7pPr marL="2743200" algn="l" defTabSz="914400" rtl="0" eaLnBrk="1" latinLnBrk="0" hangingPunct="1">
+              <a:defRPr sz="1800" kern="1200">
+                <a:solidFill>
+                  <a:schemeClr val="tx1"/>
+                </a:solidFill>
+                <a:latin typeface="+mn-lt"/>
+                <a:ea typeface="+mn-ea"/>
+                <a:cs typeface="+mn-cs"/>
+              </a:defRPr>
+            </a:lvl7pPr>
+            <a:lvl8pPr marL="3200400" algn="l" defTabSz="914400" rtl="0" eaLnBrk="1" latinLnBrk="0" hangingPunct="1">
+              <a:defRPr sz="1800" kern="1200">
+                <a:solidFill>
+                  <a:schemeClr val="tx1"/>
+                </a:solidFill>
+                <a:latin typeface="+mn-lt"/>
+                <a:ea typeface="+mn-ea"/>
+                <a:cs typeface="+mn-cs"/>
+              </a:defRPr>
+            </a:lvl8pPr>
+            <a:lvl9pPr marL="3657600" algn="l" defTabSz="914400" rtl="0" eaLnBrk="1" latinLnBrk="0" hangingPunct="1">
+              <a:defRPr sz="1800" kern="1200">
+                <a:solidFill>
+                  <a:schemeClr val="tx1"/>
+                </a:solidFill>
+                <a:latin typeface="+mn-lt"/>
+                <a:ea typeface="+mn-ea"/>
+                <a:cs typeface="+mn-cs"/>
+              </a:defRPr>
+            </a:lvl9pPr>
+          </a:lstStyle>
+          <a:p>
+            <a:r>
+              <a:rPr lang="en-GB" dirty="0">
+                <a:solidFill>
+                  <a:srgbClr val="757575"/>
+                </a:solidFill>
+              </a:rPr>
+              <a:t>{{</a:t>
+            </a:r>
+            <a:r>
+              <a:rPr lang="en-GB" dirty="0" err="1">
+                <a:solidFill>
+                  <a:srgbClr val="757575"/>
+                </a:solidFill>
+              </a:rPr>
+              <a:t>slide_number</a:t>
+            </a:r>
+            <a:r>
+              <a:rPr lang="en-GB" dirty="0">
+                <a:solidFill>
+                  <a:srgbClr val="757575"/>
+                </a:solidFill>
+              </a:rPr>
+              <a:t>}} / {{</a:t>
+            </a:r>
+            <a:r>
+              <a:rPr lang="en-GB" dirty="0" err="1">
+                <a:solidFill>
+                  <a:srgbClr val="757575"/>
+                </a:solidFill>
+              </a:rPr>
+              <a:t>total_slides</a:t>
+            </a:r>
+            <a:r>
+              <a:rPr lang="en-GB" dirty="0">
+                <a:solidFill>
+                  <a:srgbClr val="757575"/>
+                </a:solidFill>
+              </a:rPr>
+              <a:t>}}</a:t>
+            </a:r>
+          </a:p>
+        </p:txBody>
+      </p:sp>
+      <p:sp>
+        <p:nvSpPr>
+          <p:cNvPr id="10" name="Shape 28">
+            <a:extLst>
+              <a:ext uri="{FF2B5EF4-FFF2-40B4-BE49-F238E27FC236}">
+                <a16:creationId xmlns:a16="http://schemas.microsoft.com/office/drawing/2014/main" id="{AFE5766F-F155-3B07-428B-A39029D39CF9}"/>
+              </a:ext>
+            </a:extLst>
+          </p:cNvPr>
+          <p:cNvSpPr/>
+          <p:nvPr/>
+        </p:nvSpPr>
+        <p:spPr>
+          <a:xfrm>
+            <a:off x="12995755" y="1866900"/>
+            <a:ext cx="4701600" cy="1188000"/>
+          </a:xfrm>
+          <a:prstGeom prst="roundRect">
+            <a:avLst>
+              <a:gd name="adj" fmla="val 6000"/>
+            </a:avLst>
+          </a:prstGeom>
+          <a:solidFill>
+            <a:srgbClr val="643791">
+              <a:alpha val="8000"/>
+            </a:srgbClr>
+          </a:solidFill>
+          <a:ln>
+            <a:noFill/>
+          </a:ln>
+        </p:spPr>
+        <p:txBody>
+          <a:bodyPr/>
+          <a:lstStyle/>
+          <a:p>
+            <a:r>
+              <a:rPr lang="en-GB" sz="1400" dirty="0">
+                <a:solidFill>
+                  <a:srgbClr val="643791"/>
+                </a:solidFill>
+                <a:latin typeface="DM Sans 14pt" pitchFamily="2" charset="77"/>
+              </a:rPr>
+              <a:t>{{</a:t>
+            </a:r>
+            <a:r>
+              <a:rPr lang="en-GB" sz="1400" dirty="0" err="1">
+                <a:solidFill>
+                  <a:srgbClr val="643791"/>
+                </a:solidFill>
+                <a:latin typeface="DM Sans 14pt" pitchFamily="2" charset="77"/>
+              </a:rPr>
+              <a:t>chart_explainer_postings_by_type</a:t>
+            </a:r>
+            <a:r>
+              <a:rPr lang="en-GB" sz="1400" dirty="0">
+                <a:solidFill>
+                  <a:srgbClr val="643791"/>
+                </a:solidFill>
+                <a:latin typeface="DM Sans 14pt" pitchFamily="2" charset="77"/>
+              </a:rPr>
+              <a:t>}}</a:t>
+            </a:r>
+          </a:p>
+        </p:txBody>
+      </p:sp>
+      <p:sp>
+        <p:nvSpPr>
+          <p:cNvPr id="11" name="Text 27">
+            <a:extLst>
+              <a:ext uri="{FF2B5EF4-FFF2-40B4-BE49-F238E27FC236}">
+                <a16:creationId xmlns:a16="http://schemas.microsoft.com/office/drawing/2014/main" id="{701E97B9-499D-96E0-E342-773D2083064A}"/>
+              </a:ext>
+            </a:extLst>
+          </p:cNvPr>
+          <p:cNvSpPr/>
+          <p:nvPr/>
+        </p:nvSpPr>
+        <p:spPr>
+          <a:xfrm>
+            <a:off x="12995755" y="3259384"/>
+            <a:ext cx="4701600" cy="488865"/>
+          </a:xfrm>
+          <a:prstGeom prst="rect">
+            <a:avLst/>
+          </a:prstGeom>
+          <a:noFill/>
+          <a:ln/>
+        </p:spPr>
+        <p:txBody>
+          <a:bodyPr wrap="square" lIns="25400" tIns="25400" rIns="25400" bIns="25400" rtlCol="0" anchor="t">
+            <a:normAutofit/>
+          </a:bodyPr>
+          <a:lstStyle/>
+          <a:p>
+            <a:pPr marL="0" indent="0" algn="l">
+              <a:buNone/>
+            </a:pPr>
+            <a:r>
+              <a:rPr lang="en-US" sz="2400" b="1" kern="0" spc="368" dirty="0">
+                <a:solidFill>
+                  <a:srgbClr val="643791"/>
+                </a:solidFill>
+                <a:latin typeface="DM Sans 14pt" pitchFamily="2" charset="77"/>
+                <a:ea typeface="Arial" pitchFamily="34" charset="-122"/>
+                <a:cs typeface="Arial" pitchFamily="34" charset="-120"/>
+              </a:rPr>
+              <a:t>COMMENTARY</a:t>
+            </a:r>
+            <a:endParaRPr lang="en-US" sz="2400" b="1" dirty="0">
+              <a:latin typeface="DM Sans 14pt" pitchFamily="2" charset="77"/>
+            </a:endParaRPr>
+          </a:p>
+        </p:txBody>
+      </p:sp>
+      <p:sp>
+        <p:nvSpPr>
+          <p:cNvPr id="13" name="Shape 28">
+            <a:extLst>
+              <a:ext uri="{FF2B5EF4-FFF2-40B4-BE49-F238E27FC236}">
+                <a16:creationId xmlns:a16="http://schemas.microsoft.com/office/drawing/2014/main" id="{2BF818E8-0463-8F64-E3B9-F3CA68736DF1}"/>
+              </a:ext>
+            </a:extLst>
+          </p:cNvPr>
+          <p:cNvSpPr/>
+          <p:nvPr/>
+        </p:nvSpPr>
+        <p:spPr>
+          <a:xfrm>
+            <a:off x="12995755" y="3748249"/>
+            <a:ext cx="4701600" cy="5606765"/>
+          </a:xfrm>
+          <a:prstGeom prst="roundRect">
+            <a:avLst>
+              <a:gd name="adj" fmla="val 3000"/>
+            </a:avLst>
+          </a:prstGeom>
+          <a:solidFill>
+            <a:srgbClr val="643791">
+              <a:alpha val="8000"/>
+            </a:srgbClr>
+          </a:solidFill>
+          <a:ln/>
+        </p:spPr>
+        <p:txBody>
+          <a:bodyPr/>
+          <a:lstStyle/>
+          <a:p>
+            <a:r>
+              <a:rPr lang="en-US" sz="1400">
+                <a:solidFill>
+                  <a:srgbClr val="643791"/>
+                </a:solidFill>
+                <a:latin typeface="DM Sans 14pt" pitchFamily="2" charset="77"/>
+                <a:cs typeface="Arial" pitchFamily="34" charset="-120"/>
+              </a:rPr>
+              <a:t>{{</a:t>
+            </a:r>
+            <a:r>
+              <a:rPr lang="en-US" sz="1400" dirty="0" err="1">
+                <a:solidFill>
+                  <a:srgbClr val="643791"/>
+                </a:solidFill>
+                <a:latin typeface="DM Sans 14pt" pitchFamily="2" charset="77"/>
+                <a:cs typeface="Arial" pitchFamily="34" charset="-120"/>
+              </a:rPr>
+              <a:t>commentary</a:t>
+            </a:r>
+            <a:r>
+              <a:rPr lang="en-US" sz="1400" err="1">
+                <a:solidFill>
+                  <a:srgbClr val="643791"/>
+                </a:solidFill>
+                <a:latin typeface="DM Sans 14pt" pitchFamily="2" charset="77"/>
+                <a:cs typeface="Arial" pitchFamily="34" charset="-120"/>
+              </a:rPr>
+              <a:t>_</a:t>
+            </a:r>
+            <a:r>
+              <a:rPr lang="en-US" sz="1400">
+                <a:solidFill>
+                  <a:srgbClr val="643791"/>
+                </a:solidFill>
+                <a:latin typeface="DM Sans 14pt" pitchFamily="2" charset="77"/>
+                <a:cs typeface="Arial" pitchFamily="34" charset="-120"/>
+              </a:rPr>
+              <a:t>postings_intro}}</a:t>
+            </a:r>
+            <a:endParaRPr lang="en-US" sz="1400" dirty="0">
+              <a:solidFill>
+                <a:srgbClr val="643791"/>
+              </a:solidFill>
+              <a:latin typeface="DM Sans 14pt" pitchFamily="2" charset="77"/>
+              <a:cs typeface="Arial" pitchFamily="34" charset="-120"/>
+            </a:endParaRPr>
+          </a:p>
+          <a:p>
+            <a:endParaRPr lang="en-US" sz="1400" dirty="0">
+              <a:solidFill>
+                <a:srgbClr val="643791"/>
+              </a:solidFill>
+              <a:latin typeface="DM Sans 14pt" pitchFamily="2" charset="77"/>
+              <a:cs typeface="Arial" pitchFamily="34" charset="-120"/>
+            </a:endParaRPr>
+          </a:p>
+          <a:p>
+            <a:r>
+              <a:rPr lang="en-US" sz="1400" dirty="0">
+                <a:solidFill>
+                  <a:srgbClr val="643791"/>
+                </a:solidFill>
+                <a:latin typeface="DM Sans 14pt" pitchFamily="2" charset="77"/>
+                <a:cs typeface="Arial" pitchFamily="34" charset="-120"/>
+              </a:rPr>
+              <a:t>{{commentary_postings_</a:t>
+            </a:r>
+            <a:r>
+              <a:rPr lang="en-US" sz="1400">
+                <a:solidFill>
+                  <a:srgbClr val="643791"/>
+                </a:solidFill>
+                <a:latin typeface="DM Sans 14pt" pitchFamily="2" charset="77"/>
+                <a:cs typeface="Arial" pitchFamily="34" charset="-120"/>
+              </a:rPr>
+              <a:t>point_1}}</a:t>
+            </a:r>
+            <a:endParaRPr lang="en-US" sz="1400" dirty="0">
+              <a:solidFill>
+                <a:srgbClr val="643791"/>
+              </a:solidFill>
+              <a:latin typeface="DM Sans 14pt" pitchFamily="2" charset="77"/>
+              <a:cs typeface="Arial" pitchFamily="34" charset="-120"/>
+            </a:endParaRPr>
+          </a:p>
+          <a:p>
+            <a:endParaRPr lang="en-US" sz="1400" dirty="0">
+              <a:solidFill>
+                <a:srgbClr val="643791"/>
+              </a:solidFill>
+              <a:latin typeface="DM Sans 14pt" pitchFamily="2" charset="77"/>
+              <a:cs typeface="Arial" pitchFamily="34" charset="-120"/>
+            </a:endParaRPr>
+          </a:p>
+          <a:p>
+            <a:r>
+              <a:rPr lang="en-US" sz="1400" dirty="0">
+                <a:solidFill>
+                  <a:srgbClr val="643791"/>
+                </a:solidFill>
+                <a:latin typeface="DM Sans 14pt" pitchFamily="2" charset="77"/>
+                <a:cs typeface="Arial" pitchFamily="34" charset="-120"/>
+              </a:rPr>
+              <a:t>{{commentary_postings_</a:t>
+            </a:r>
+            <a:r>
+              <a:rPr lang="en-US" sz="1400">
+                <a:solidFill>
+                  <a:srgbClr val="643791"/>
+                </a:solidFill>
+                <a:latin typeface="DM Sans 14pt" pitchFamily="2" charset="77"/>
+                <a:cs typeface="Arial" pitchFamily="34" charset="-120"/>
+              </a:rPr>
+              <a:t>point_2}}</a:t>
+            </a:r>
+            <a:endParaRPr lang="en-US" sz="1400" dirty="0">
+              <a:solidFill>
+                <a:srgbClr val="643791"/>
+              </a:solidFill>
+              <a:latin typeface="DM Sans 14pt" pitchFamily="2" charset="77"/>
+              <a:cs typeface="Arial" pitchFamily="34" charset="-120"/>
+            </a:endParaRPr>
+          </a:p>
+          <a:p>
+            <a:endParaRPr lang="en-US" sz="1400" dirty="0">
+              <a:solidFill>
+                <a:srgbClr val="643791"/>
+              </a:solidFill>
+              <a:latin typeface="DM Sans 14pt" pitchFamily="2" charset="77"/>
+              <a:cs typeface="Arial" pitchFamily="34" charset="-120"/>
+            </a:endParaRPr>
+          </a:p>
+          <a:p>
+            <a:r>
+              <a:rPr lang="en-US" sz="1400" dirty="0">
+                <a:solidFill>
+                  <a:srgbClr val="643791"/>
+                </a:solidFill>
+                <a:latin typeface="DM Sans 14pt" pitchFamily="2" charset="77"/>
+                <a:cs typeface="Arial" pitchFamily="34" charset="-120"/>
+              </a:rPr>
+              <a:t>{{commentary</a:t>
+            </a:r>
+            <a:r>
+              <a:rPr lang="en-US" sz="1400">
+                <a:solidFill>
+                  <a:srgbClr val="643791"/>
+                </a:solidFill>
+                <a:latin typeface="DM Sans 14pt" pitchFamily="2" charset="77"/>
+                <a:cs typeface="Arial" pitchFamily="34" charset="-120"/>
+              </a:rPr>
+              <a:t>_postings_point_3}}</a:t>
+            </a:r>
+            <a:endParaRPr lang="en-US" sz="1400" dirty="0">
+              <a:solidFill>
+                <a:srgbClr val="643791"/>
+              </a:solidFill>
+              <a:latin typeface="DM Sans 14pt" pitchFamily="2" charset="77"/>
+              <a:cs typeface="Arial" pitchFamily="34" charset="-120"/>
             </a:endParaRPr>
           </a:p>
         </p:txBody>
@@ -5608,8 +5691,8 @@
         </p:nvSpPr>
         <p:spPr>
           <a:xfrm>
-            <a:off x="3712545" y="2799557"/>
-            <a:ext cx="8754388" cy="6534943"/>
+            <a:off x="3898198" y="2799557"/>
+            <a:ext cx="8805984" cy="6547741"/>
           </a:xfrm>
           <a:prstGeom prst="roundRect">
             <a:avLst>
@@ -5766,7 +5849,9 @@
             <a:avLst/>
           </a:prstGeom>
           <a:noFill/>
-          <a:ln/>
+          <a:ln>
+            <a:noFill/>
+          </a:ln>
         </p:spPr>
         <p:txBody>
           <a:bodyPr wrap="square" lIns="25400" tIns="25400" rIns="25400" bIns="25400" rtlCol="0" anchor="t">
@@ -5806,7 +5891,7 @@
         <p:spPr>
           <a:xfrm>
             <a:off x="762000" y="2800350"/>
-            <a:ext cx="2767997" cy="6534150"/>
+            <a:ext cx="3036564" cy="6546948"/>
           </a:xfrm>
           <a:prstGeom prst="roundRect">
             <a:avLst>
@@ -5841,12 +5926,12 @@
         </p:nvSpPr>
         <p:spPr>
           <a:xfrm>
-            <a:off x="825441" y="3215883"/>
-            <a:ext cx="2607164" cy="6023366"/>
+            <a:off x="868675" y="3227185"/>
+            <a:ext cx="2822400" cy="6013810"/>
           </a:xfrm>
           <a:prstGeom prst="roundRect">
             <a:avLst>
-              <a:gd name="adj" fmla="val 6482"/>
+              <a:gd name="adj" fmla="val 5356"/>
             </a:avLst>
           </a:prstGeom>
           <a:solidFill>
@@ -5951,51 +6036,6 @@
       </p:sp>
       <p:sp>
         <p:nvSpPr>
-          <p:cNvPr id="39" name="Text 37"/>
-          <p:cNvSpPr/>
-          <p:nvPr/>
-        </p:nvSpPr>
-        <p:spPr>
-          <a:xfrm>
-            <a:off x="17233255" y="9753600"/>
-            <a:ext cx="521345" cy="190500"/>
-          </a:xfrm>
-          <a:prstGeom prst="rect">
-            <a:avLst/>
-          </a:prstGeom>
-          <a:noFill/>
-          <a:ln/>
-        </p:spPr>
-        <p:txBody>
-          <a:bodyPr wrap="square" lIns="25400" tIns="25400" rIns="25400" bIns="25400" rtlCol="0" anchor="t">
-            <a:normAutofit fontScale="85000" lnSpcReduction="10000"/>
-          </a:bodyPr>
-          <a:lstStyle/>
-          <a:p>
-            <a:pPr marL="0" indent="0" algn="l">
-              <a:buNone/>
-            </a:pPr>
-            <a:r>
-              <a:rPr lang="en-US" sz="1050" kern="0" spc="42" dirty="0">
-                <a:solidFill>
-                  <a:srgbClr val="111111">
-                    <a:alpha val="63000"/>
-                  </a:srgbClr>
-                </a:solidFill>
-                <a:latin typeface="DM Sans 14pt" pitchFamily="2" charset="77"/>
-                <a:ea typeface="Arial" pitchFamily="34" charset="-122"/>
-                <a:cs typeface="Arial" pitchFamily="34" charset="-120"/>
-              </a:rPr>
-              <a:t>05 / 07</a:t>
-            </a:r>
-            <a:endParaRPr lang="en-US" sz="1050" dirty="0">
-              <a:latin typeface="DM Sans 14pt" pitchFamily="2" charset="77"/>
-            </a:endParaRPr>
-          </a:p>
-        </p:txBody>
-      </p:sp>
-      <p:sp>
-        <p:nvSpPr>
           <p:cNvPr id="7" name="Shape 26">
             <a:extLst>
               <a:ext uri="{FF2B5EF4-FFF2-40B4-BE49-F238E27FC236}">
@@ -6008,12 +6048,12 @@
         </p:nvSpPr>
         <p:spPr>
           <a:xfrm>
-            <a:off x="3789002" y="3243264"/>
-            <a:ext cx="8581674" cy="5995986"/>
+            <a:off x="4006390" y="3227184"/>
+            <a:ext cx="8589600" cy="6013812"/>
           </a:xfrm>
           <a:prstGeom prst="roundRect">
             <a:avLst>
-              <a:gd name="adj" fmla="val 2275"/>
+              <a:gd name="adj" fmla="val 2486"/>
             </a:avLst>
           </a:prstGeom>
           <a:solidFill>
@@ -6032,7 +6072,6 @@
           <a:bodyPr/>
           <a:lstStyle/>
           <a:p>
-            <a:pPr algn="ctr"/>
             <a:r>
               <a:rPr lang="en-US" kern="0" spc="30" dirty="0">
                 <a:solidFill>
@@ -6074,10 +6113,10 @@
       </p:sp>
       <p:sp>
         <p:nvSpPr>
-          <p:cNvPr id="10" name="Text 27">
+          <p:cNvPr id="70" name="Text 3">
             <a:extLst>
               <a:ext uri="{FF2B5EF4-FFF2-40B4-BE49-F238E27FC236}">
-                <a16:creationId xmlns:a16="http://schemas.microsoft.com/office/drawing/2014/main" id="{C5697E3F-850F-2F5E-151D-312EC56A7E9F}"/>
+                <a16:creationId xmlns:a16="http://schemas.microsoft.com/office/drawing/2014/main" id="{A5DE5FD6-3A8E-E663-3EA5-D6DE5AEB793B}"/>
               </a:ext>
             </a:extLst>
           </p:cNvPr>
@@ -6086,14 +6125,16 @@
         </p:nvSpPr>
         <p:spPr>
           <a:xfrm>
-            <a:off x="12995755" y="4782151"/>
-            <a:ext cx="4741200" cy="488865"/>
+            <a:off x="12995755" y="575050"/>
+            <a:ext cx="4703047" cy="280800"/>
           </a:xfrm>
           <a:prstGeom prst="rect">
             <a:avLst/>
           </a:prstGeom>
           <a:noFill/>
-          <a:ln/>
+          <a:ln>
+            <a:noFill/>
+          </a:ln>
         </p:spPr>
         <p:txBody>
           <a:bodyPr wrap="square" lIns="25400" tIns="25400" rIns="25400" bIns="25400" rtlCol="0" anchor="t">
@@ -6101,11 +6142,9 @@
           </a:bodyPr>
           <a:lstStyle/>
           <a:p>
-            <a:pPr marL="0" indent="0" algn="l">
-              <a:buNone/>
-            </a:pPr>
-            <a:r>
-              <a:rPr lang="en-US" sz="2400" b="1" kern="0" spc="368" dirty="0">
+            <a:pPr algn="r"/>
+            <a:r>
+              <a:rPr lang="en-US" sz="1200" kern="0" spc="420" dirty="0">
                 <a:solidFill>
                   <a:srgbClr val="643791"/>
                 </a:solidFill>
@@ -6113,438 +6152,14 @@
                 <a:ea typeface="Arial" pitchFamily="34" charset="-122"/>
                 <a:cs typeface="Arial" pitchFamily="34" charset="-120"/>
               </a:rPr>
-              <a:t>COMMENTARY</a:t>
-            </a:r>
-            <a:endParaRPr lang="en-US" sz="2400" b="1" dirty="0">
-              <a:latin typeface="DM Sans 14pt" pitchFamily="2" charset="77"/>
-            </a:endParaRPr>
-          </a:p>
-        </p:txBody>
-      </p:sp>
-      <p:sp>
-        <p:nvSpPr>
-          <p:cNvPr id="12" name="Shape 28">
-            <a:extLst>
-              <a:ext uri="{FF2B5EF4-FFF2-40B4-BE49-F238E27FC236}">
-                <a16:creationId xmlns:a16="http://schemas.microsoft.com/office/drawing/2014/main" id="{83F6394D-8B8D-2F71-BE18-2B217EA0B79E}"/>
-              </a:ext>
-            </a:extLst>
-          </p:cNvPr>
-          <p:cNvSpPr/>
-          <p:nvPr/>
-        </p:nvSpPr>
-        <p:spPr>
-          <a:xfrm>
-            <a:off x="12995755" y="5271016"/>
-            <a:ext cx="4703047" cy="1182447"/>
-          </a:xfrm>
-          <a:prstGeom prst="roundRect">
-            <a:avLst>
-              <a:gd name="adj" fmla="val 14191"/>
-            </a:avLst>
-          </a:prstGeom>
-          <a:solidFill>
-            <a:srgbClr val="643791">
-              <a:alpha val="8000"/>
-            </a:srgbClr>
-          </a:solidFill>
-          <a:ln/>
-        </p:spPr>
-        <p:txBody>
-          <a:bodyPr/>
-          <a:lstStyle/>
-          <a:p>
-            <a:r>
-              <a:rPr lang="en-US" sz="1400" dirty="0">
-                <a:solidFill>
-                  <a:srgbClr val="643791"/>
-                </a:solidFill>
-                <a:latin typeface="DM Sans 14pt" pitchFamily="2" charset="77"/>
-                <a:ea typeface="Arial" pitchFamily="34" charset="-122"/>
-                <a:cs typeface="Arial" pitchFamily="34" charset="-120"/>
-              </a:rPr>
-              <a:t>{{</a:t>
-            </a:r>
-            <a:r>
-              <a:rPr lang="en-US" sz="1400" dirty="0" err="1">
-                <a:solidFill>
-                  <a:srgbClr val="643791"/>
-                </a:solidFill>
-                <a:latin typeface="DM Sans 14pt" pitchFamily="2" charset="77"/>
-                <a:ea typeface="Arial" pitchFamily="34" charset="-122"/>
-                <a:cs typeface="Arial" pitchFamily="34" charset="-120"/>
-              </a:rPr>
-              <a:t>commentary_roi_intro</a:t>
-            </a:r>
-            <a:r>
-              <a:rPr lang="en-US" sz="1400" dirty="0">
-                <a:solidFill>
-                  <a:srgbClr val="643791"/>
-                </a:solidFill>
-                <a:latin typeface="DM Sans 14pt" pitchFamily="2" charset="77"/>
-                <a:ea typeface="Arial" pitchFamily="34" charset="-122"/>
-                <a:cs typeface="Arial" pitchFamily="34" charset="-120"/>
-              </a:rPr>
-              <a:t>}}</a:t>
-            </a:r>
-            <a:endParaRPr lang="en-US" sz="1400" dirty="0">
-              <a:latin typeface="DM Sans 14pt" pitchFamily="2" charset="77"/>
-            </a:endParaRPr>
-          </a:p>
-        </p:txBody>
-      </p:sp>
-      <p:sp>
-        <p:nvSpPr>
-          <p:cNvPr id="15" name="Shape 30">
-            <a:extLst>
-              <a:ext uri="{FF2B5EF4-FFF2-40B4-BE49-F238E27FC236}">
-                <a16:creationId xmlns:a16="http://schemas.microsoft.com/office/drawing/2014/main" id="{E4C5A338-6F10-3BF6-0BBD-F2AF144F8E1C}"/>
-              </a:ext>
-            </a:extLst>
-          </p:cNvPr>
-          <p:cNvSpPr/>
-          <p:nvPr/>
-        </p:nvSpPr>
-        <p:spPr>
-          <a:xfrm>
-            <a:off x="12995755" y="6662171"/>
-            <a:ext cx="4707474" cy="1174800"/>
-          </a:xfrm>
-          <a:prstGeom prst="roundRect">
-            <a:avLst>
-              <a:gd name="adj" fmla="val 15385"/>
-            </a:avLst>
-          </a:prstGeom>
-          <a:solidFill>
-            <a:srgbClr val="643791">
-              <a:alpha val="8000"/>
-            </a:srgbClr>
-          </a:solidFill>
-          <a:ln/>
-        </p:spPr>
-        <p:txBody>
-          <a:bodyPr/>
-          <a:lstStyle/>
-          <a:p>
-            <a:r>
-              <a:rPr lang="en-US" sz="1400" dirty="0">
-                <a:solidFill>
-                  <a:srgbClr val="643791"/>
-                </a:solidFill>
-                <a:latin typeface="DM Sans 14pt" pitchFamily="2" charset="77"/>
-                <a:ea typeface="Arial" pitchFamily="34" charset="-122"/>
-                <a:cs typeface="Arial" pitchFamily="34" charset="-120"/>
-              </a:rPr>
-              <a:t>{{commentary_roi_point_1}}</a:t>
-            </a:r>
-            <a:endParaRPr lang="en-US" sz="1400" dirty="0">
-              <a:latin typeface="DM Sans 14pt" pitchFamily="2" charset="77"/>
-            </a:endParaRPr>
-          </a:p>
-        </p:txBody>
-      </p:sp>
-      <p:sp>
-        <p:nvSpPr>
-          <p:cNvPr id="18" name="Shape 32">
-            <a:extLst>
-              <a:ext uri="{FF2B5EF4-FFF2-40B4-BE49-F238E27FC236}">
-                <a16:creationId xmlns:a16="http://schemas.microsoft.com/office/drawing/2014/main" id="{BB3BE6E6-00CA-127E-5168-8756B094DDF2}"/>
-              </a:ext>
-            </a:extLst>
-          </p:cNvPr>
-          <p:cNvSpPr/>
-          <p:nvPr/>
-        </p:nvSpPr>
-        <p:spPr>
-          <a:xfrm>
-            <a:off x="12995755" y="8053326"/>
-            <a:ext cx="4707474" cy="1174410"/>
-          </a:xfrm>
-          <a:prstGeom prst="roundRect">
-            <a:avLst>
-              <a:gd name="adj" fmla="val 15385"/>
-            </a:avLst>
-          </a:prstGeom>
-          <a:solidFill>
-            <a:srgbClr val="643791">
-              <a:alpha val="8000"/>
-            </a:srgbClr>
-          </a:solidFill>
-          <a:ln/>
-        </p:spPr>
-        <p:txBody>
-          <a:bodyPr/>
-          <a:lstStyle/>
-          <a:p>
-            <a:pPr>
-              <a:lnSpc>
-                <a:spcPct val="110000"/>
-              </a:lnSpc>
-            </a:pPr>
-            <a:r>
-              <a:rPr lang="en-US" sz="1400" dirty="0">
-                <a:solidFill>
-                  <a:srgbClr val="643791"/>
-                </a:solidFill>
-                <a:latin typeface="DM Sans 14pt" pitchFamily="2" charset="77"/>
-                <a:ea typeface="Arial" pitchFamily="34" charset="-122"/>
-                <a:cs typeface="Arial" pitchFamily="34" charset="-120"/>
-              </a:rPr>
-              <a:t>{{commentary_roi_point_2}}</a:t>
-            </a:r>
-            <a:endParaRPr lang="en-US" sz="1400" dirty="0">
-              <a:latin typeface="DM Sans 14pt" pitchFamily="2" charset="77"/>
-            </a:endParaRPr>
-          </a:p>
-        </p:txBody>
-      </p:sp>
-      <p:sp>
-        <p:nvSpPr>
-          <p:cNvPr id="21" name="Shape 28">
-            <a:extLst>
-              <a:ext uri="{FF2B5EF4-FFF2-40B4-BE49-F238E27FC236}">
-                <a16:creationId xmlns:a16="http://schemas.microsoft.com/office/drawing/2014/main" id="{6D0424A9-E958-5944-C203-BF2D77DEB55E}"/>
-              </a:ext>
-            </a:extLst>
-          </p:cNvPr>
-          <p:cNvSpPr/>
-          <p:nvPr/>
-        </p:nvSpPr>
-        <p:spPr>
-          <a:xfrm>
-            <a:off x="12995755" y="1890712"/>
-            <a:ext cx="4703047" cy="1182447"/>
-          </a:xfrm>
-          <a:prstGeom prst="roundRect">
-            <a:avLst>
-              <a:gd name="adj" fmla="val 14191"/>
-            </a:avLst>
-          </a:prstGeom>
-          <a:solidFill>
-            <a:srgbClr val="643791">
-              <a:alpha val="8000"/>
-            </a:srgbClr>
-          </a:solidFill>
-          <a:ln/>
-        </p:spPr>
-        <p:txBody>
-          <a:bodyPr/>
-          <a:lstStyle/>
-          <a:p>
-            <a:r>
-              <a:rPr lang="en-GB" sz="1400" dirty="0">
-                <a:solidFill>
-                  <a:srgbClr val="643791"/>
-                </a:solidFill>
-                <a:latin typeface="DM Sans 14pt" pitchFamily="2" charset="77"/>
-              </a:rPr>
-              <a:t>{{</a:t>
-            </a:r>
-            <a:r>
-              <a:rPr lang="en-GB" sz="1400" dirty="0" err="1">
-                <a:solidFill>
-                  <a:srgbClr val="643791"/>
-                </a:solidFill>
-                <a:latin typeface="DM Sans 14pt" pitchFamily="2" charset="77"/>
-              </a:rPr>
-              <a:t>chart_explainer_spend_vs_ratecard</a:t>
-            </a:r>
-            <a:r>
-              <a:rPr lang="en-GB" sz="1400" dirty="0">
-                <a:solidFill>
-                  <a:srgbClr val="643791"/>
-                </a:solidFill>
-                <a:latin typeface="DM Sans 14pt" pitchFamily="2" charset="77"/>
-              </a:rPr>
-              <a:t>}}</a:t>
-            </a:r>
-          </a:p>
-        </p:txBody>
-      </p:sp>
-      <p:sp>
-        <p:nvSpPr>
-          <p:cNvPr id="65" name="Shape 28">
-            <a:extLst>
-              <a:ext uri="{FF2B5EF4-FFF2-40B4-BE49-F238E27FC236}">
-                <a16:creationId xmlns:a16="http://schemas.microsoft.com/office/drawing/2014/main" id="{F71A69BB-30EF-C953-A8C6-CC84B32402CE}"/>
-              </a:ext>
-            </a:extLst>
-          </p:cNvPr>
-          <p:cNvSpPr/>
-          <p:nvPr/>
-        </p:nvSpPr>
-        <p:spPr>
-          <a:xfrm>
-            <a:off x="12957602" y="3336432"/>
-            <a:ext cx="4703047" cy="1182447"/>
-          </a:xfrm>
-          <a:prstGeom prst="roundRect">
-            <a:avLst>
-              <a:gd name="adj" fmla="val 14191"/>
-            </a:avLst>
-          </a:prstGeom>
-          <a:solidFill>
-            <a:srgbClr val="643791">
-              <a:alpha val="8000"/>
-            </a:srgbClr>
-          </a:solidFill>
-          <a:ln/>
-        </p:spPr>
-        <p:txBody>
-          <a:bodyPr/>
-          <a:lstStyle/>
-          <a:p>
-            <a:r>
-              <a:rPr lang="en-GB" sz="1400" dirty="0">
-                <a:solidFill>
-                  <a:srgbClr val="643791"/>
-                </a:solidFill>
-                <a:latin typeface="DM Sans 14pt" pitchFamily="2" charset="77"/>
-              </a:rPr>
-              <a:t>{{</a:t>
-            </a:r>
-            <a:r>
-              <a:rPr lang="en-GB" sz="1400" dirty="0" err="1">
-                <a:solidFill>
-                  <a:srgbClr val="643791"/>
-                </a:solidFill>
-                <a:latin typeface="DM Sans 14pt" pitchFamily="2" charset="77"/>
-              </a:rPr>
-              <a:t>chart_explainer_cost_per_app_by_occupation</a:t>
-            </a:r>
-            <a:r>
-              <a:rPr lang="en-GB" sz="1400" dirty="0">
-                <a:solidFill>
-                  <a:srgbClr val="643791"/>
-                </a:solidFill>
-                <a:latin typeface="DM Sans 14pt" pitchFamily="2" charset="77"/>
-              </a:rPr>
-              <a:t>}}</a:t>
-            </a:r>
-          </a:p>
-        </p:txBody>
-      </p:sp>
-      <p:grpSp>
-        <p:nvGrpSpPr>
-          <p:cNvPr id="69" name="Group 68">
-            <a:extLst>
-              <a:ext uri="{FF2B5EF4-FFF2-40B4-BE49-F238E27FC236}">
-                <a16:creationId xmlns:a16="http://schemas.microsoft.com/office/drawing/2014/main" id="{751A8DE3-F679-88CA-1912-74D209B5D55F}"/>
-              </a:ext>
-            </a:extLst>
-          </p:cNvPr>
-          <p:cNvGrpSpPr/>
-          <p:nvPr/>
-        </p:nvGrpSpPr>
-        <p:grpSpPr>
-          <a:xfrm>
-            <a:off x="12995755" y="575051"/>
-            <a:ext cx="4703047" cy="1096551"/>
-            <a:chOff x="12995755" y="575051"/>
-            <a:chExt cx="4703047" cy="1096551"/>
-          </a:xfrm>
-        </p:grpSpPr>
-        <p:sp>
-          <p:nvSpPr>
-            <p:cNvPr id="70" name="Text 3">
-              <a:extLst>
-                <a:ext uri="{FF2B5EF4-FFF2-40B4-BE49-F238E27FC236}">
-                  <a16:creationId xmlns:a16="http://schemas.microsoft.com/office/drawing/2014/main" id="{A5DE5FD6-3A8E-E663-3EA5-D6DE5AEB793B}"/>
-                </a:ext>
-              </a:extLst>
-            </p:cNvPr>
-            <p:cNvSpPr/>
-            <p:nvPr/>
-          </p:nvSpPr>
-          <p:spPr>
-            <a:xfrm>
-              <a:off x="12995755" y="575051"/>
-              <a:ext cx="4703047" cy="297317"/>
-            </a:xfrm>
-            <a:prstGeom prst="rect">
-              <a:avLst/>
-            </a:prstGeom>
-            <a:noFill/>
-            <a:ln/>
-          </p:spPr>
-          <p:txBody>
-            <a:bodyPr wrap="square" lIns="25400" tIns="25400" rIns="25400" bIns="25400" rtlCol="0" anchor="t">
-              <a:normAutofit/>
-            </a:bodyPr>
-            <a:lstStyle/>
-            <a:p>
-              <a:pPr algn="r"/>
-              <a:r>
-                <a:rPr lang="en-US" sz="1200" kern="0" spc="420" dirty="0">
-                  <a:solidFill>
-                    <a:srgbClr val="643791"/>
-                  </a:solidFill>
-                  <a:latin typeface="DM Sans 14pt" pitchFamily="2" charset="77"/>
-                  <a:ea typeface="Arial" pitchFamily="34" charset="-122"/>
-                  <a:cs typeface="Arial" pitchFamily="34" charset="-120"/>
-                </a:rPr>
-                <a:t>04 · ADVERTISING ROI</a:t>
-              </a:r>
-              <a:endParaRPr lang="en-US" sz="1200" dirty="0">
-                <a:latin typeface="DM Sans 14pt" pitchFamily="2" charset="77"/>
-              </a:endParaRPr>
-            </a:p>
-          </p:txBody>
-        </p:sp>
-        <p:sp>
-          <p:nvSpPr>
-            <p:cNvPr id="71" name="Text 21">
-              <a:extLst>
-                <a:ext uri="{FF2B5EF4-FFF2-40B4-BE49-F238E27FC236}">
-                  <a16:creationId xmlns:a16="http://schemas.microsoft.com/office/drawing/2014/main" id="{C1A58630-5592-79B1-CDE4-AE68E9BF3409}"/>
-                </a:ext>
-              </a:extLst>
-            </p:cNvPr>
-            <p:cNvSpPr/>
-            <p:nvPr/>
-          </p:nvSpPr>
-          <p:spPr>
-            <a:xfrm>
-              <a:off x="12995755" y="933450"/>
-              <a:ext cx="4703047" cy="738152"/>
-            </a:xfrm>
-            <a:prstGeom prst="rect">
-              <a:avLst/>
-            </a:prstGeom>
-            <a:noFill/>
-            <a:ln/>
-          </p:spPr>
-          <p:txBody>
-            <a:bodyPr wrap="square" lIns="25400" tIns="25400" rIns="25400" bIns="25400" rtlCol="0" anchor="t">
-              <a:normAutofit/>
-            </a:bodyPr>
-            <a:lstStyle/>
-            <a:p>
-              <a:pPr>
-                <a:lnSpc>
-                  <a:spcPct val="140000"/>
-                </a:lnSpc>
-              </a:pPr>
-              <a:r>
-                <a:rPr lang="en-US" sz="1200" dirty="0">
-                  <a:solidFill>
-                    <a:srgbClr val="111111">
-                      <a:alpha val="63000"/>
-                    </a:srgbClr>
-                  </a:solidFill>
-                  <a:latin typeface="DM Sans 14pt" pitchFamily="2" charset="77"/>
-                  <a:ea typeface="Arial" pitchFamily="34" charset="-122"/>
-                  <a:cs typeface="Arial" pitchFamily="34" charset="-120"/>
-                </a:rPr>
-                <a:t>The value your subscription delivered, compared with the equivalent rate card cost of posting each role individually.</a:t>
-              </a:r>
-              <a:endParaRPr lang="en-US" sz="1200" dirty="0">
-                <a:latin typeface="DM Sans 14pt" pitchFamily="2" charset="77"/>
-              </a:endParaRPr>
-            </a:p>
-          </p:txBody>
-        </p:sp>
-      </p:grpSp>
+              <a:t>04 · ADVERTISING ROI</a:t>
+            </a:r>
+            <a:endParaRPr lang="en-US" sz="1200" dirty="0">
+              <a:latin typeface="DM Sans 14pt" pitchFamily="2" charset="77"/>
+            </a:endParaRPr>
+          </a:p>
+        </p:txBody>
+      </p:sp>
       <p:sp>
         <p:nvSpPr>
           <p:cNvPr id="31" name="Shape 6">
@@ -6559,8 +6174,8 @@
         </p:nvSpPr>
         <p:spPr>
           <a:xfrm>
-            <a:off x="762000" y="1847850"/>
-            <a:ext cx="2767997" cy="723900"/>
+            <a:off x="761999" y="1866900"/>
+            <a:ext cx="2772000" cy="723600"/>
           </a:xfrm>
           <a:prstGeom prst="roundRect">
             <a:avLst/>
@@ -6640,8 +6255,8 @@
         </p:nvSpPr>
         <p:spPr>
           <a:xfrm>
-            <a:off x="811592" y="1906638"/>
-            <a:ext cx="1281704" cy="602293"/>
+            <a:off x="811592" y="1925993"/>
+            <a:ext cx="1407600" cy="604800"/>
           </a:xfrm>
           <a:prstGeom prst="roundRect">
             <a:avLst>
@@ -6656,11 +6271,12 @@
           <a:ln/>
         </p:spPr>
         <p:txBody>
-          <a:bodyPr/>
-          <a:lstStyle/>
-          <a:p>
-            <a:r>
-              <a:rPr lang="en-US" sz="3600" kern="0" spc="-67" dirty="0">
+          <a:bodyPr lIns="36000" tIns="36000" rIns="36000" bIns="36000" anchor="ctr"/>
+          <a:lstStyle/>
+          <a:p>
+            <a:pPr algn="ctr"/>
+            <a:r>
+              <a:rPr lang="en-US" sz="2800" kern="0" spc="-67" dirty="0">
                 <a:solidFill>
                   <a:srgbClr val="FFFFFF"/>
                 </a:solidFill>
@@ -6671,7 +6287,7 @@
               <a:t>{{</a:t>
             </a:r>
             <a:r>
-              <a:rPr lang="en-US" sz="3600" kern="0" spc="-67" dirty="0" err="1">
+              <a:rPr lang="en-US" sz="2800" kern="0" spc="-67" dirty="0" err="1">
                 <a:solidFill>
                   <a:srgbClr val="FFFFFF"/>
                 </a:solidFill>
@@ -6682,7 +6298,7 @@
               <a:t>stat_total_jobs</a:t>
             </a:r>
             <a:r>
-              <a:rPr lang="en-US" sz="3600" kern="0" spc="-67" dirty="0">
+              <a:rPr lang="en-US" sz="2800" kern="0" spc="-67" dirty="0">
                 <a:solidFill>
                   <a:srgbClr val="FFFFFF"/>
                 </a:solidFill>
@@ -6692,7 +6308,7 @@
               </a:rPr>
               <a:t>}}</a:t>
             </a:r>
-            <a:endParaRPr lang="en-US" sz="3600" dirty="0">
+            <a:endParaRPr lang="en-US" sz="2800" dirty="0">
               <a:latin typeface="DM Sans 14pt" pitchFamily="2" charset="77"/>
             </a:endParaRPr>
           </a:p>
@@ -6712,8 +6328,8 @@
         </p:nvSpPr>
         <p:spPr>
           <a:xfrm>
-            <a:off x="3778940" y="1847850"/>
-            <a:ext cx="2767997" cy="723900"/>
+            <a:off x="3778939" y="1866900"/>
+            <a:ext cx="2772000" cy="723600"/>
           </a:xfrm>
           <a:prstGeom prst="roundRect">
             <a:avLst/>
@@ -6771,8 +6387,8 @@
         </p:nvSpPr>
         <p:spPr>
           <a:xfrm>
-            <a:off x="3828532" y="1906638"/>
-            <a:ext cx="1281704" cy="602293"/>
+            <a:off x="3828532" y="1925993"/>
+            <a:ext cx="1407600" cy="604800"/>
           </a:xfrm>
           <a:prstGeom prst="roundRect">
             <a:avLst>
@@ -6785,33 +6401,45 @@
           <a:ln/>
         </p:spPr>
         <p:txBody>
-          <a:bodyPr/>
-          <a:lstStyle/>
-          <a:p>
-            <a:pPr>
+          <a:bodyPr lIns="36000" tIns="36000" rIns="36000" bIns="36000" anchor="ctr"/>
+          <a:lstStyle/>
+          <a:p>
+            <a:pPr algn="ctr">
               <a:lnSpc>
                 <a:spcPct val="110000"/>
               </a:lnSpc>
             </a:pPr>
             <a:r>
-              <a:rPr lang="en-GB" sz="3600" dirty="0">
+              <a:rPr lang="en-GB" sz="2800" dirty="0">
+                <a:solidFill>
+                  <a:srgbClr val="757575"/>
+                </a:solidFill>
                 <a:latin typeface="DM Sans 14pt" pitchFamily="2" charset="77"/>
               </a:rPr>
               <a:t>{{</a:t>
             </a:r>
             <a:r>
-              <a:rPr lang="en-GB" sz="3600" dirty="0" err="1">
+              <a:rPr lang="en-GB" sz="2800" dirty="0" err="1">
+                <a:solidFill>
+                  <a:srgbClr val="757575"/>
+                </a:solidFill>
                 <a:latin typeface="DM Sans 14pt" pitchFamily="2" charset="77"/>
               </a:rPr>
               <a:t>stat_cost_per_job</a:t>
             </a:r>
             <a:r>
-              <a:rPr lang="en-GB" sz="3600" dirty="0">
+              <a:rPr lang="en-GB" sz="2800" dirty="0">
+                <a:solidFill>
+                  <a:srgbClr val="757575"/>
+                </a:solidFill>
                 <a:latin typeface="DM Sans 14pt" pitchFamily="2" charset="77"/>
               </a:rPr>
               <a:t>}}</a:t>
             </a:r>
-            <a:endParaRPr lang="en-US" sz="3600" dirty="0">
+            <a:endParaRPr lang="en-US" sz="2800" dirty="0">
+              <a:solidFill>
+                <a:srgbClr val="757575"/>
+              </a:solidFill>
               <a:latin typeface="DM Sans 14pt" pitchFamily="2" charset="77"/>
             </a:endParaRPr>
           </a:p>
@@ -6831,8 +6459,8 @@
         </p:nvSpPr>
         <p:spPr>
           <a:xfrm>
-            <a:off x="6736167" y="1847850"/>
-            <a:ext cx="2767997" cy="723900"/>
+            <a:off x="6736166" y="1866900"/>
+            <a:ext cx="2772000" cy="723600"/>
           </a:xfrm>
           <a:prstGeom prst="roundRect">
             <a:avLst/>
@@ -6905,8 +6533,8 @@
         </p:nvSpPr>
         <p:spPr>
           <a:xfrm>
-            <a:off x="6785759" y="1906638"/>
-            <a:ext cx="1281704" cy="602293"/>
+            <a:off x="6785759" y="1925993"/>
+            <a:ext cx="1407600" cy="604800"/>
           </a:xfrm>
           <a:prstGeom prst="roundRect">
             <a:avLst>
@@ -6921,11 +6549,12 @@
           <a:ln/>
         </p:spPr>
         <p:txBody>
-          <a:bodyPr/>
-          <a:lstStyle/>
-          <a:p>
-            <a:r>
-              <a:rPr lang="en-GB" sz="3600" dirty="0">
+          <a:bodyPr lIns="36000" tIns="36000" rIns="36000" bIns="36000" anchor="ctr"/>
+          <a:lstStyle/>
+          <a:p>
+            <a:pPr algn="ctr"/>
+            <a:r>
+              <a:rPr lang="en-GB" sz="2800" dirty="0">
                 <a:solidFill>
                   <a:schemeClr val="bg1"/>
                 </a:solidFill>
@@ -6934,7 +6563,7 @@
               <a:t>{{</a:t>
             </a:r>
             <a:r>
-              <a:rPr lang="en-GB" sz="3600" dirty="0" err="1">
+              <a:rPr lang="en-GB" sz="2800" dirty="0" err="1">
                 <a:solidFill>
                   <a:schemeClr val="bg1"/>
                 </a:solidFill>
@@ -6943,7 +6572,7 @@
               <a:t>stat_cost_per_view</a:t>
             </a:r>
             <a:r>
-              <a:rPr lang="en-GB" sz="3600" dirty="0">
+              <a:rPr lang="en-GB" sz="2800" dirty="0">
                 <a:solidFill>
                   <a:schemeClr val="bg1"/>
                 </a:solidFill>
@@ -6951,7 +6580,7 @@
               </a:rPr>
               <a:t>}}</a:t>
             </a:r>
-            <a:endParaRPr lang="en-US" sz="3600" dirty="0">
+            <a:endParaRPr lang="en-US" sz="2800" dirty="0">
               <a:solidFill>
                 <a:schemeClr val="bg1"/>
               </a:solidFill>
@@ -6974,8 +6603,8 @@
         </p:nvSpPr>
         <p:spPr>
           <a:xfrm>
-            <a:off x="9750532" y="1849951"/>
-            <a:ext cx="2767997" cy="723900"/>
+            <a:off x="9750531" y="1866900"/>
+            <a:ext cx="2772000" cy="723600"/>
           </a:xfrm>
           <a:prstGeom prst="roundRect">
             <a:avLst/>
@@ -7033,8 +6662,8 @@
         </p:nvSpPr>
         <p:spPr>
           <a:xfrm>
-            <a:off x="9800124" y="1908739"/>
-            <a:ext cx="1281704" cy="602293"/>
+            <a:off x="9800124" y="1925993"/>
+            <a:ext cx="1407600" cy="604800"/>
           </a:xfrm>
           <a:prstGeom prst="roundRect">
             <a:avLst>
@@ -7047,33 +6676,45 @@
           <a:ln/>
         </p:spPr>
         <p:txBody>
-          <a:bodyPr/>
-          <a:lstStyle/>
-          <a:p>
-            <a:pPr>
+          <a:bodyPr lIns="36000" tIns="36000" rIns="36000" bIns="36000" anchor="ctr"/>
+          <a:lstStyle/>
+          <a:p>
+            <a:pPr algn="ctr">
               <a:lnSpc>
                 <a:spcPct val="110000"/>
               </a:lnSpc>
             </a:pPr>
             <a:r>
-              <a:rPr lang="en-GB" sz="3600" dirty="0">
+              <a:rPr lang="en-GB" sz="2800" dirty="0">
+                <a:solidFill>
+                  <a:srgbClr val="757575"/>
+                </a:solidFill>
                 <a:latin typeface="DM Sans 14pt" pitchFamily="2" charset="77"/>
               </a:rPr>
               <a:t>{{</a:t>
             </a:r>
             <a:r>
-              <a:rPr lang="en-GB" sz="3600" dirty="0" err="1">
+              <a:rPr lang="en-GB" sz="2800" dirty="0" err="1">
+                <a:solidFill>
+                  <a:srgbClr val="757575"/>
+                </a:solidFill>
                 <a:latin typeface="DM Sans 14pt" pitchFamily="2" charset="77"/>
               </a:rPr>
               <a:t>stat_cost_per_apply</a:t>
             </a:r>
             <a:r>
-              <a:rPr lang="en-GB" sz="3600" dirty="0">
+              <a:rPr lang="en-GB" sz="2800" dirty="0">
+                <a:solidFill>
+                  <a:srgbClr val="757575"/>
+                </a:solidFill>
                 <a:latin typeface="DM Sans 14pt" pitchFamily="2" charset="77"/>
               </a:rPr>
               <a:t>}}</a:t>
             </a:r>
-            <a:endParaRPr lang="en-US" sz="3600" dirty="0">
+            <a:endParaRPr lang="en-US" sz="2800" dirty="0">
+              <a:solidFill>
+                <a:srgbClr val="757575"/>
+              </a:solidFill>
               <a:latin typeface="DM Sans 14pt" pitchFamily="2" charset="77"/>
             </a:endParaRPr>
           </a:p>
@@ -7131,8 +6772,8 @@
         </p:nvSpPr>
         <p:spPr>
           <a:xfrm>
-            <a:off x="819150" y="2856387"/>
-            <a:ext cx="2607165" cy="299438"/>
+            <a:off x="869082" y="2799557"/>
+            <a:ext cx="2607165" cy="428400"/>
           </a:xfrm>
           <a:prstGeom prst="rect">
             <a:avLst/>
@@ -7195,8 +6836,8 @@
         </p:nvSpPr>
         <p:spPr>
           <a:xfrm>
-            <a:off x="3789002" y="2854399"/>
-            <a:ext cx="8581674" cy="299438"/>
+            <a:off x="3987536" y="2799557"/>
+            <a:ext cx="8581674" cy="428400"/>
           </a:xfrm>
           <a:prstGeom prst="rect">
             <a:avLst/>
@@ -7241,6 +6882,501 @@
             </a:r>
             <a:endParaRPr lang="en-US" dirty="0">
               <a:latin typeface="DM Sans 14pt" pitchFamily="2" charset="77"/>
+            </a:endParaRPr>
+          </a:p>
+        </p:txBody>
+      </p:sp>
+      <p:sp>
+        <p:nvSpPr>
+          <p:cNvPr id="5" name="Footer Placeholder 1">
+            <a:extLst>
+              <a:ext uri="{FF2B5EF4-FFF2-40B4-BE49-F238E27FC236}">
+                <a16:creationId xmlns:a16="http://schemas.microsoft.com/office/drawing/2014/main" id="{C3F894CF-003B-DB6C-ECEC-0DCC355C033A}"/>
+              </a:ext>
+            </a:extLst>
+          </p:cNvPr>
+          <p:cNvSpPr txBox="1">
+            <a:spLocks/>
+          </p:cNvSpPr>
+          <p:nvPr/>
+        </p:nvSpPr>
+        <p:spPr>
+          <a:xfrm>
+            <a:off x="17233255" y="9753300"/>
+            <a:ext cx="522000" cy="190800"/>
+          </a:xfrm>
+          <a:prstGeom prst="rect">
+            <a:avLst/>
+          </a:prstGeom>
+        </p:spPr>
+        <p:txBody>
+          <a:bodyPr vert="horz" lIns="36000" tIns="36000" rIns="36000" bIns="36000" rtlCol="0" anchor="ctr"/>
+          <a:lstStyle>
+            <a:lvl1pPr marL="0" algn="l" defTabSz="914400" rtl="0" eaLnBrk="1" latinLnBrk="0" hangingPunct="1">
+              <a:defRPr sz="900" kern="1200">
+                <a:solidFill>
+                  <a:srgbClr val="E8E0F2"/>
+                </a:solidFill>
+                <a:latin typeface="DM Sans 14pt" pitchFamily="2" charset="77"/>
+                <a:ea typeface="+mn-ea"/>
+                <a:cs typeface="+mn-cs"/>
+              </a:defRPr>
+            </a:lvl1pPr>
+            <a:lvl2pPr marL="457200" algn="l" defTabSz="914400" rtl="0" eaLnBrk="1" latinLnBrk="0" hangingPunct="1">
+              <a:defRPr sz="1800" kern="1200">
+                <a:solidFill>
+                  <a:schemeClr val="tx1"/>
+                </a:solidFill>
+                <a:latin typeface="+mn-lt"/>
+                <a:ea typeface="+mn-ea"/>
+                <a:cs typeface="+mn-cs"/>
+              </a:defRPr>
+            </a:lvl2pPr>
+            <a:lvl3pPr marL="914400" algn="l" defTabSz="914400" rtl="0" eaLnBrk="1" latinLnBrk="0" hangingPunct="1">
+              <a:defRPr sz="1800" kern="1200">
+                <a:solidFill>
+                  <a:schemeClr val="tx1"/>
+                </a:solidFill>
+                <a:latin typeface="+mn-lt"/>
+                <a:ea typeface="+mn-ea"/>
+                <a:cs typeface="+mn-cs"/>
+              </a:defRPr>
+            </a:lvl3pPr>
+            <a:lvl4pPr marL="1371600" algn="l" defTabSz="914400" rtl="0" eaLnBrk="1" latinLnBrk="0" hangingPunct="1">
+              <a:defRPr sz="1800" kern="1200">
+                <a:solidFill>
+                  <a:schemeClr val="tx1"/>
+                </a:solidFill>
+                <a:latin typeface="+mn-lt"/>
+                <a:ea typeface="+mn-ea"/>
+                <a:cs typeface="+mn-cs"/>
+              </a:defRPr>
+            </a:lvl4pPr>
+            <a:lvl5pPr marL="1828800" algn="l" defTabSz="914400" rtl="0" eaLnBrk="1" latinLnBrk="0" hangingPunct="1">
+              <a:defRPr sz="1800" kern="1200">
+                <a:solidFill>
+                  <a:schemeClr val="tx1"/>
+                </a:solidFill>
+                <a:latin typeface="+mn-lt"/>
+                <a:ea typeface="+mn-ea"/>
+                <a:cs typeface="+mn-cs"/>
+              </a:defRPr>
+            </a:lvl5pPr>
+            <a:lvl6pPr marL="2286000" algn="l" defTabSz="914400" rtl="0" eaLnBrk="1" latinLnBrk="0" hangingPunct="1">
+              <a:defRPr sz="1800" kern="1200">
+                <a:solidFill>
+                  <a:schemeClr val="tx1"/>
+                </a:solidFill>
+                <a:latin typeface="+mn-lt"/>
+                <a:ea typeface="+mn-ea"/>
+                <a:cs typeface="+mn-cs"/>
+              </a:defRPr>
+            </a:lvl6pPr>
+            <a:lvl7pPr marL="2743200" algn="l" defTabSz="914400" rtl="0" eaLnBrk="1" latinLnBrk="0" hangingPunct="1">
+              <a:defRPr sz="1800" kern="1200">
+                <a:solidFill>
+                  <a:schemeClr val="tx1"/>
+                </a:solidFill>
+                <a:latin typeface="+mn-lt"/>
+                <a:ea typeface="+mn-ea"/>
+                <a:cs typeface="+mn-cs"/>
+              </a:defRPr>
+            </a:lvl7pPr>
+            <a:lvl8pPr marL="3200400" algn="l" defTabSz="914400" rtl="0" eaLnBrk="1" latinLnBrk="0" hangingPunct="1">
+              <a:defRPr sz="1800" kern="1200">
+                <a:solidFill>
+                  <a:schemeClr val="tx1"/>
+                </a:solidFill>
+                <a:latin typeface="+mn-lt"/>
+                <a:ea typeface="+mn-ea"/>
+                <a:cs typeface="+mn-cs"/>
+              </a:defRPr>
+            </a:lvl8pPr>
+            <a:lvl9pPr marL="3657600" algn="l" defTabSz="914400" rtl="0" eaLnBrk="1" latinLnBrk="0" hangingPunct="1">
+              <a:defRPr sz="1800" kern="1200">
+                <a:solidFill>
+                  <a:schemeClr val="tx1"/>
+                </a:solidFill>
+                <a:latin typeface="+mn-lt"/>
+                <a:ea typeface="+mn-ea"/>
+                <a:cs typeface="+mn-cs"/>
+              </a:defRPr>
+            </a:lvl9pPr>
+          </a:lstStyle>
+          <a:p>
+            <a:r>
+              <a:rPr lang="en-GB" dirty="0">
+                <a:solidFill>
+                  <a:srgbClr val="757575"/>
+                </a:solidFill>
+              </a:rPr>
+              <a:t>{{</a:t>
+            </a:r>
+            <a:r>
+              <a:rPr lang="en-GB" dirty="0" err="1">
+                <a:solidFill>
+                  <a:srgbClr val="757575"/>
+                </a:solidFill>
+              </a:rPr>
+              <a:t>slide_number</a:t>
+            </a:r>
+            <a:r>
+              <a:rPr lang="en-GB" dirty="0">
+                <a:solidFill>
+                  <a:srgbClr val="757575"/>
+                </a:solidFill>
+              </a:rPr>
+              <a:t>}} / {{</a:t>
+            </a:r>
+            <a:r>
+              <a:rPr lang="en-GB" dirty="0" err="1">
+                <a:solidFill>
+                  <a:srgbClr val="757575"/>
+                </a:solidFill>
+              </a:rPr>
+              <a:t>total_slides</a:t>
+            </a:r>
+            <a:r>
+              <a:rPr lang="en-GB" dirty="0">
+                <a:solidFill>
+                  <a:srgbClr val="757575"/>
+                </a:solidFill>
+              </a:rPr>
+              <a:t>}}</a:t>
+            </a:r>
+          </a:p>
+        </p:txBody>
+      </p:sp>
+      <p:sp>
+        <p:nvSpPr>
+          <p:cNvPr id="8" name="Shape 28">
+            <a:extLst>
+              <a:ext uri="{FF2B5EF4-FFF2-40B4-BE49-F238E27FC236}">
+                <a16:creationId xmlns:a16="http://schemas.microsoft.com/office/drawing/2014/main" id="{6A49D103-117C-847C-0C9B-0C9675E0C883}"/>
+              </a:ext>
+            </a:extLst>
+          </p:cNvPr>
+          <p:cNvSpPr/>
+          <p:nvPr/>
+        </p:nvSpPr>
+        <p:spPr>
+          <a:xfrm>
+            <a:off x="12995755" y="1866900"/>
+            <a:ext cx="4701600" cy="1188000"/>
+          </a:xfrm>
+          <a:prstGeom prst="roundRect">
+            <a:avLst>
+              <a:gd name="adj" fmla="val 6000"/>
+            </a:avLst>
+          </a:prstGeom>
+          <a:solidFill>
+            <a:srgbClr val="643791">
+              <a:alpha val="8000"/>
+            </a:srgbClr>
+          </a:solidFill>
+          <a:ln/>
+        </p:spPr>
+        <p:txBody>
+          <a:bodyPr/>
+          <a:lstStyle/>
+          <a:p>
+            <a:r>
+              <a:rPr lang="en-GB" sz="1400" dirty="0">
+                <a:solidFill>
+                  <a:srgbClr val="643791"/>
+                </a:solidFill>
+                <a:latin typeface="DM Sans 14pt" pitchFamily="2" charset="77"/>
+              </a:rPr>
+              <a:t>{{</a:t>
+            </a:r>
+            <a:r>
+              <a:rPr lang="en-GB" sz="1400" dirty="0" err="1">
+                <a:solidFill>
+                  <a:srgbClr val="643791"/>
+                </a:solidFill>
+                <a:latin typeface="DM Sans 14pt" pitchFamily="2" charset="77"/>
+              </a:rPr>
+              <a:t>chart_explainer_spend_vs_ratecard</a:t>
+            </a:r>
+            <a:r>
+              <a:rPr lang="en-GB" sz="1400" dirty="0">
+                <a:solidFill>
+                  <a:srgbClr val="643791"/>
+                </a:solidFill>
+                <a:latin typeface="DM Sans 14pt" pitchFamily="2" charset="77"/>
+              </a:rPr>
+              <a:t>}}</a:t>
+            </a:r>
+          </a:p>
+        </p:txBody>
+      </p:sp>
+      <p:sp>
+        <p:nvSpPr>
+          <p:cNvPr id="9" name="Shape 28">
+            <a:extLst>
+              <a:ext uri="{FF2B5EF4-FFF2-40B4-BE49-F238E27FC236}">
+                <a16:creationId xmlns:a16="http://schemas.microsoft.com/office/drawing/2014/main" id="{B791A240-B474-B511-F245-3B06012C0378}"/>
+              </a:ext>
+            </a:extLst>
+          </p:cNvPr>
+          <p:cNvSpPr/>
+          <p:nvPr/>
+        </p:nvSpPr>
+        <p:spPr>
+          <a:xfrm>
+            <a:off x="12995755" y="3262647"/>
+            <a:ext cx="4701600" cy="1188000"/>
+          </a:xfrm>
+          <a:prstGeom prst="roundRect">
+            <a:avLst>
+              <a:gd name="adj" fmla="val 6000"/>
+            </a:avLst>
+          </a:prstGeom>
+          <a:solidFill>
+            <a:srgbClr val="643791">
+              <a:alpha val="8000"/>
+            </a:srgbClr>
+          </a:solidFill>
+          <a:ln/>
+        </p:spPr>
+        <p:txBody>
+          <a:bodyPr/>
+          <a:lstStyle/>
+          <a:p>
+            <a:r>
+              <a:rPr lang="en-GB" sz="1400" dirty="0">
+                <a:solidFill>
+                  <a:srgbClr val="643791"/>
+                </a:solidFill>
+                <a:latin typeface="DM Sans 14pt" pitchFamily="2" charset="77"/>
+              </a:rPr>
+              <a:t>{{</a:t>
+            </a:r>
+            <a:r>
+              <a:rPr lang="en-GB" sz="1400" dirty="0" err="1">
+                <a:solidFill>
+                  <a:srgbClr val="643791"/>
+                </a:solidFill>
+                <a:latin typeface="DM Sans 14pt" pitchFamily="2" charset="77"/>
+              </a:rPr>
+              <a:t>chart_explainer_cost_per_app_by_occupation</a:t>
+            </a:r>
+            <a:r>
+              <a:rPr lang="en-GB" sz="1400" dirty="0">
+                <a:solidFill>
+                  <a:srgbClr val="643791"/>
+                </a:solidFill>
+                <a:latin typeface="DM Sans 14pt" pitchFamily="2" charset="77"/>
+              </a:rPr>
+              <a:t>}}</a:t>
+            </a:r>
+          </a:p>
+        </p:txBody>
+      </p:sp>
+      <p:sp>
+        <p:nvSpPr>
+          <p:cNvPr id="11" name="Text 27">
+            <a:extLst>
+              <a:ext uri="{FF2B5EF4-FFF2-40B4-BE49-F238E27FC236}">
+                <a16:creationId xmlns:a16="http://schemas.microsoft.com/office/drawing/2014/main" id="{30D615AC-9DBC-D2DC-5A8C-5430DBE92ADE}"/>
+              </a:ext>
+            </a:extLst>
+          </p:cNvPr>
+          <p:cNvSpPr/>
+          <p:nvPr/>
+        </p:nvSpPr>
+        <p:spPr>
+          <a:xfrm>
+            <a:off x="12995755" y="4658394"/>
+            <a:ext cx="4701600" cy="488865"/>
+          </a:xfrm>
+          <a:prstGeom prst="rect">
+            <a:avLst/>
+          </a:prstGeom>
+          <a:noFill/>
+          <a:ln/>
+        </p:spPr>
+        <p:txBody>
+          <a:bodyPr wrap="square" lIns="25400" tIns="25400" rIns="25400" bIns="25400" rtlCol="0" anchor="t">
+            <a:normAutofit/>
+          </a:bodyPr>
+          <a:lstStyle/>
+          <a:p>
+            <a:pPr marL="0" indent="0" algn="l">
+              <a:buNone/>
+            </a:pPr>
+            <a:r>
+              <a:rPr lang="en-US" sz="2400" b="1" kern="0" spc="368" dirty="0">
+                <a:solidFill>
+                  <a:srgbClr val="643791"/>
+                </a:solidFill>
+                <a:latin typeface="DM Sans 14pt" pitchFamily="2" charset="77"/>
+                <a:ea typeface="Arial" pitchFamily="34" charset="-122"/>
+                <a:cs typeface="Arial" pitchFamily="34" charset="-120"/>
+              </a:rPr>
+              <a:t>COMMENTARY</a:t>
+            </a:r>
+            <a:endParaRPr lang="en-US" sz="2400" b="1" dirty="0">
+              <a:latin typeface="DM Sans 14pt" pitchFamily="2" charset="77"/>
+            </a:endParaRPr>
+          </a:p>
+        </p:txBody>
+      </p:sp>
+      <p:sp>
+        <p:nvSpPr>
+          <p:cNvPr id="13" name="Shape 28">
+            <a:extLst>
+              <a:ext uri="{FF2B5EF4-FFF2-40B4-BE49-F238E27FC236}">
+                <a16:creationId xmlns:a16="http://schemas.microsoft.com/office/drawing/2014/main" id="{47061B04-CB2F-1EB7-370D-17632FF731D8}"/>
+              </a:ext>
+            </a:extLst>
+          </p:cNvPr>
+          <p:cNvSpPr/>
+          <p:nvPr/>
+        </p:nvSpPr>
+        <p:spPr>
+          <a:xfrm>
+            <a:off x="12995755" y="5143500"/>
+            <a:ext cx="4701600" cy="4211514"/>
+          </a:xfrm>
+          <a:prstGeom prst="roundRect">
+            <a:avLst>
+              <a:gd name="adj" fmla="val 3500"/>
+            </a:avLst>
+          </a:prstGeom>
+          <a:solidFill>
+            <a:srgbClr val="643791">
+              <a:alpha val="8000"/>
+            </a:srgbClr>
+          </a:solidFill>
+          <a:ln/>
+        </p:spPr>
+        <p:txBody>
+          <a:bodyPr/>
+          <a:lstStyle/>
+          <a:p>
+            <a:r>
+              <a:rPr lang="en-US" sz="1400">
+                <a:solidFill>
+                  <a:srgbClr val="643791"/>
+                </a:solidFill>
+                <a:latin typeface="DM Sans 14pt" pitchFamily="2" charset="77"/>
+                <a:cs typeface="Arial" pitchFamily="34" charset="-120"/>
+              </a:rPr>
+              <a:t>{{</a:t>
+            </a:r>
+            <a:r>
+              <a:rPr lang="en-US" sz="1400" dirty="0" err="1">
+                <a:solidFill>
+                  <a:srgbClr val="643791"/>
+                </a:solidFill>
+                <a:latin typeface="DM Sans 14pt" pitchFamily="2" charset="77"/>
+                <a:cs typeface="Arial" pitchFamily="34" charset="-120"/>
+              </a:rPr>
+              <a:t>commentary_roi</a:t>
+            </a:r>
+            <a:r>
+              <a:rPr lang="en-US" sz="1400" err="1">
+                <a:solidFill>
+                  <a:srgbClr val="643791"/>
+                </a:solidFill>
+                <a:latin typeface="DM Sans 14pt" pitchFamily="2" charset="77"/>
+                <a:cs typeface="Arial" pitchFamily="34" charset="-120"/>
+              </a:rPr>
+              <a:t>_</a:t>
+            </a:r>
+            <a:r>
+              <a:rPr lang="en-US" sz="1400">
+                <a:solidFill>
+                  <a:srgbClr val="643791"/>
+                </a:solidFill>
+                <a:latin typeface="DM Sans 14pt" pitchFamily="2" charset="77"/>
+                <a:cs typeface="Arial" pitchFamily="34" charset="-120"/>
+              </a:rPr>
+              <a:t>intro}}</a:t>
+            </a:r>
+            <a:endParaRPr lang="en-US" sz="1400" dirty="0">
+              <a:solidFill>
+                <a:srgbClr val="643791"/>
+              </a:solidFill>
+              <a:latin typeface="DM Sans 14pt" pitchFamily="2" charset="77"/>
+              <a:cs typeface="Arial" pitchFamily="34" charset="-120"/>
+            </a:endParaRPr>
+          </a:p>
+          <a:p>
+            <a:endParaRPr lang="en-US" sz="1400" dirty="0">
+              <a:solidFill>
+                <a:srgbClr val="643791"/>
+              </a:solidFill>
+              <a:latin typeface="DM Sans 14pt" pitchFamily="2" charset="77"/>
+              <a:cs typeface="Arial" pitchFamily="34" charset="-120"/>
+            </a:endParaRPr>
+          </a:p>
+          <a:p>
+            <a:r>
+              <a:rPr lang="en-US" sz="1400" dirty="0">
+                <a:solidFill>
+                  <a:srgbClr val="643791"/>
+                </a:solidFill>
+                <a:latin typeface="DM Sans 14pt" pitchFamily="2" charset="77"/>
+                <a:cs typeface="Arial" pitchFamily="34" charset="-120"/>
+              </a:rPr>
+              <a:t>{{commentary_roi_point_</a:t>
+            </a:r>
+            <a:r>
+              <a:rPr lang="en-US" sz="1400">
+                <a:solidFill>
+                  <a:srgbClr val="643791"/>
+                </a:solidFill>
+                <a:latin typeface="DM Sans 14pt" pitchFamily="2" charset="77"/>
+                <a:cs typeface="Arial" pitchFamily="34" charset="-120"/>
+              </a:rPr>
+              <a:t>1}}</a:t>
+            </a:r>
+            <a:endParaRPr lang="en-US" sz="1400" dirty="0">
+              <a:solidFill>
+                <a:srgbClr val="643791"/>
+              </a:solidFill>
+              <a:latin typeface="DM Sans 14pt" pitchFamily="2" charset="77"/>
+              <a:cs typeface="Arial" pitchFamily="34" charset="-120"/>
+            </a:endParaRPr>
+          </a:p>
+          <a:p>
+            <a:endParaRPr lang="en-US" sz="1400" dirty="0">
+              <a:solidFill>
+                <a:srgbClr val="643791"/>
+              </a:solidFill>
+              <a:latin typeface="DM Sans 14pt" pitchFamily="2" charset="77"/>
+              <a:cs typeface="Arial" pitchFamily="34" charset="-120"/>
+            </a:endParaRPr>
+          </a:p>
+          <a:p>
+            <a:r>
+              <a:rPr lang="en-US" sz="1400" dirty="0">
+                <a:solidFill>
+                  <a:srgbClr val="643791"/>
+                </a:solidFill>
+                <a:latin typeface="DM Sans 14pt" pitchFamily="2" charset="77"/>
+                <a:cs typeface="Arial" pitchFamily="34" charset="-120"/>
+              </a:rPr>
+              <a:t>{{commentary_roi_point</a:t>
+            </a:r>
+            <a:r>
+              <a:rPr lang="en-US" sz="1400">
+                <a:solidFill>
+                  <a:srgbClr val="643791"/>
+                </a:solidFill>
+                <a:latin typeface="DM Sans 14pt" pitchFamily="2" charset="77"/>
+                <a:cs typeface="Arial" pitchFamily="34" charset="-120"/>
+              </a:rPr>
+              <a:t>_2}}</a:t>
+            </a:r>
+            <a:endParaRPr lang="en-US" sz="1400" dirty="0">
+              <a:solidFill>
+                <a:srgbClr val="643791"/>
+              </a:solidFill>
+              <a:latin typeface="DM Sans 14pt" pitchFamily="2" charset="77"/>
+              <a:cs typeface="Arial" pitchFamily="34" charset="-120"/>
             </a:endParaRPr>
           </a:p>
         </p:txBody>
@@ -7408,7 +7544,9 @@
             <a:avLst/>
           </a:prstGeom>
           <a:noFill/>
-          <a:ln/>
+          <a:ln>
+            <a:noFill/>
+          </a:ln>
         </p:spPr>
         <p:txBody>
           <a:bodyPr wrap="square" lIns="25400" tIns="25400" rIns="25400" bIns="25400" rtlCol="0" anchor="t">
@@ -7518,55 +7656,10 @@
       </p:sp>
       <p:sp>
         <p:nvSpPr>
-          <p:cNvPr id="39" name="Text 37"/>
-          <p:cNvSpPr/>
-          <p:nvPr/>
-        </p:nvSpPr>
-        <p:spPr>
-          <a:xfrm>
-            <a:off x="17233255" y="9753600"/>
-            <a:ext cx="521345" cy="190500"/>
-          </a:xfrm>
-          <a:prstGeom prst="rect">
-            <a:avLst/>
-          </a:prstGeom>
-          <a:noFill/>
-          <a:ln/>
-        </p:spPr>
-        <p:txBody>
-          <a:bodyPr wrap="square" lIns="25400" tIns="25400" rIns="25400" bIns="25400" rtlCol="0" anchor="t">
-            <a:normAutofit fontScale="85000" lnSpcReduction="10000"/>
-          </a:bodyPr>
-          <a:lstStyle/>
-          <a:p>
-            <a:pPr marL="0" indent="0" algn="l">
-              <a:buNone/>
-            </a:pPr>
-            <a:r>
-              <a:rPr lang="en-US" sz="1050" kern="0" spc="42" dirty="0">
-                <a:solidFill>
-                  <a:srgbClr val="111111">
-                    <a:alpha val="63000"/>
-                  </a:srgbClr>
-                </a:solidFill>
-                <a:latin typeface="DM Sans 14pt" pitchFamily="2" charset="77"/>
-                <a:ea typeface="Arial" pitchFamily="34" charset="-122"/>
-                <a:cs typeface="Arial" pitchFamily="34" charset="-120"/>
-              </a:rPr>
-              <a:t>06 / 07</a:t>
-            </a:r>
-            <a:endParaRPr lang="en-US" sz="1050" dirty="0">
-              <a:latin typeface="DM Sans 14pt" pitchFamily="2" charset="77"/>
-            </a:endParaRPr>
-          </a:p>
-        </p:txBody>
-      </p:sp>
-      <p:sp>
-        <p:nvSpPr>
-          <p:cNvPr id="7" name="Text 27">
+          <p:cNvPr id="46" name="Text 3">
             <a:extLst>
               <a:ext uri="{FF2B5EF4-FFF2-40B4-BE49-F238E27FC236}">
-                <a16:creationId xmlns:a16="http://schemas.microsoft.com/office/drawing/2014/main" id="{23CA7696-0FAD-7A69-113D-3015E31E27A8}"/>
+                <a16:creationId xmlns:a16="http://schemas.microsoft.com/office/drawing/2014/main" id="{176F46CA-EFBD-4EF3-CA69-1930614DD215}"/>
               </a:ext>
             </a:extLst>
           </p:cNvPr>
@@ -7575,14 +7668,16 @@
         </p:nvSpPr>
         <p:spPr>
           <a:xfrm>
-            <a:off x="12995755" y="3391422"/>
-            <a:ext cx="4741200" cy="488865"/>
+            <a:off x="12995755" y="575051"/>
+            <a:ext cx="4703047" cy="280800"/>
           </a:xfrm>
           <a:prstGeom prst="rect">
             <a:avLst/>
           </a:prstGeom>
           <a:noFill/>
-          <a:ln/>
+          <a:ln>
+            <a:noFill/>
+          </a:ln>
         </p:spPr>
         <p:txBody>
           <a:bodyPr wrap="square" lIns="25400" tIns="25400" rIns="25400" bIns="25400" rtlCol="0" anchor="t">
@@ -7590,11 +7685,9 @@
           </a:bodyPr>
           <a:lstStyle/>
           <a:p>
-            <a:pPr marL="0" indent="0" algn="l">
-              <a:buNone/>
-            </a:pPr>
-            <a:r>
-              <a:rPr lang="en-US" sz="2400" b="1" kern="0" spc="368" dirty="0">
+            <a:pPr algn="r"/>
+            <a:r>
+              <a:rPr lang="en-US" sz="1200" kern="0" spc="420" dirty="0">
                 <a:solidFill>
                   <a:srgbClr val="643791"/>
                 </a:solidFill>
@@ -7602,466 +7695,14 @@
                 <a:ea typeface="Arial" pitchFamily="34" charset="-122"/>
                 <a:cs typeface="Arial" pitchFamily="34" charset="-120"/>
               </a:rPr>
-              <a:t>COMMENTARY</a:t>
-            </a:r>
-            <a:endParaRPr lang="en-US" sz="2400" b="1" dirty="0">
-              <a:latin typeface="DM Sans 14pt" pitchFamily="2" charset="77"/>
-            </a:endParaRPr>
-          </a:p>
-        </p:txBody>
-      </p:sp>
-      <p:sp>
-        <p:nvSpPr>
-          <p:cNvPr id="9" name="Shape 28">
-            <a:extLst>
-              <a:ext uri="{FF2B5EF4-FFF2-40B4-BE49-F238E27FC236}">
-                <a16:creationId xmlns:a16="http://schemas.microsoft.com/office/drawing/2014/main" id="{920950EF-86C0-4C53-171E-03E2D25359FB}"/>
-              </a:ext>
-            </a:extLst>
-          </p:cNvPr>
-          <p:cNvSpPr/>
-          <p:nvPr/>
-        </p:nvSpPr>
-        <p:spPr>
-          <a:xfrm>
-            <a:off x="12995755" y="3880287"/>
-            <a:ext cx="4703047" cy="1182447"/>
-          </a:xfrm>
-          <a:prstGeom prst="roundRect">
-            <a:avLst>
-              <a:gd name="adj" fmla="val 14191"/>
-            </a:avLst>
-          </a:prstGeom>
-          <a:solidFill>
-            <a:srgbClr val="643791">
-              <a:alpha val="8000"/>
-            </a:srgbClr>
-          </a:solidFill>
-          <a:ln/>
-        </p:spPr>
-        <p:txBody>
-          <a:bodyPr/>
-          <a:lstStyle/>
-          <a:p>
-            <a:pPr>
-              <a:lnSpc>
-                <a:spcPct val="110000"/>
-              </a:lnSpc>
-            </a:pPr>
-            <a:r>
-              <a:rPr lang="en-US" sz="1400" dirty="0">
-                <a:solidFill>
-                  <a:srgbClr val="643791"/>
-                </a:solidFill>
-                <a:latin typeface="DM Sans 14pt" pitchFamily="2" charset="77"/>
-                <a:ea typeface="Arial" pitchFamily="34" charset="-122"/>
-                <a:cs typeface="Arial" pitchFamily="34" charset="-120"/>
-              </a:rPr>
-              <a:t>{{</a:t>
-            </a:r>
-            <a:r>
-              <a:rPr lang="en-US" sz="1400" dirty="0" err="1">
-                <a:solidFill>
-                  <a:srgbClr val="643791"/>
-                </a:solidFill>
-                <a:latin typeface="DM Sans 14pt" pitchFamily="2" charset="77"/>
-                <a:ea typeface="Arial" pitchFamily="34" charset="-122"/>
-                <a:cs typeface="Arial" pitchFamily="34" charset="-120"/>
-              </a:rPr>
-              <a:t>commentary_media_intro</a:t>
-            </a:r>
-            <a:r>
-              <a:rPr lang="en-US" sz="1400" dirty="0">
-                <a:solidFill>
-                  <a:srgbClr val="643791"/>
-                </a:solidFill>
-                <a:latin typeface="DM Sans 14pt" pitchFamily="2" charset="77"/>
-                <a:ea typeface="Arial" pitchFamily="34" charset="-122"/>
-                <a:cs typeface="Arial" pitchFamily="34" charset="-120"/>
-              </a:rPr>
-              <a:t>}}</a:t>
-            </a:r>
-            <a:endParaRPr lang="en-US" sz="1400" dirty="0">
-              <a:latin typeface="DM Sans 14pt" pitchFamily="2" charset="77"/>
-            </a:endParaRPr>
-          </a:p>
-        </p:txBody>
-      </p:sp>
-      <p:sp>
-        <p:nvSpPr>
-          <p:cNvPr id="12" name="Shape 30">
-            <a:extLst>
-              <a:ext uri="{FF2B5EF4-FFF2-40B4-BE49-F238E27FC236}">
-                <a16:creationId xmlns:a16="http://schemas.microsoft.com/office/drawing/2014/main" id="{3E1BE4B2-6481-8DB3-3CA9-75F35C91DA9C}"/>
-              </a:ext>
-            </a:extLst>
-          </p:cNvPr>
-          <p:cNvSpPr/>
-          <p:nvPr/>
-        </p:nvSpPr>
-        <p:spPr>
-          <a:xfrm>
-            <a:off x="12995755" y="5271442"/>
-            <a:ext cx="4707474" cy="1174800"/>
-          </a:xfrm>
-          <a:prstGeom prst="roundRect">
-            <a:avLst>
-              <a:gd name="adj" fmla="val 15385"/>
-            </a:avLst>
-          </a:prstGeom>
-          <a:solidFill>
-            <a:srgbClr val="643791">
-              <a:alpha val="8000"/>
-            </a:srgbClr>
-          </a:solidFill>
-          <a:ln/>
-        </p:spPr>
-        <p:txBody>
-          <a:bodyPr/>
-          <a:lstStyle/>
-          <a:p>
-            <a:pPr>
-              <a:lnSpc>
-                <a:spcPct val="110000"/>
-              </a:lnSpc>
-            </a:pPr>
-            <a:r>
-              <a:rPr lang="en-US" sz="1400" dirty="0">
-                <a:solidFill>
-                  <a:srgbClr val="643791"/>
-                </a:solidFill>
-                <a:latin typeface="DM Sans 14pt" pitchFamily="2" charset="77"/>
-                <a:ea typeface="Arial" pitchFamily="34" charset="-122"/>
-                <a:cs typeface="Arial" pitchFamily="34" charset="-120"/>
-              </a:rPr>
-              <a:t>{{commentary_media_point_1}}</a:t>
-            </a:r>
-            <a:endParaRPr lang="en-US" sz="1400" dirty="0">
-              <a:latin typeface="DM Sans 14pt" pitchFamily="2" charset="77"/>
-            </a:endParaRPr>
-          </a:p>
-        </p:txBody>
-      </p:sp>
-      <p:sp>
-        <p:nvSpPr>
-          <p:cNvPr id="15" name="Shape 32">
-            <a:extLst>
-              <a:ext uri="{FF2B5EF4-FFF2-40B4-BE49-F238E27FC236}">
-                <a16:creationId xmlns:a16="http://schemas.microsoft.com/office/drawing/2014/main" id="{D980B683-AC2E-6F6D-47F3-939BDCACDA6F}"/>
-              </a:ext>
-            </a:extLst>
-          </p:cNvPr>
-          <p:cNvSpPr/>
-          <p:nvPr/>
-        </p:nvSpPr>
-        <p:spPr>
-          <a:xfrm>
-            <a:off x="12995755" y="6662597"/>
-            <a:ext cx="4707474" cy="1174410"/>
-          </a:xfrm>
-          <a:prstGeom prst="roundRect">
-            <a:avLst>
-              <a:gd name="adj" fmla="val 15385"/>
-            </a:avLst>
-          </a:prstGeom>
-          <a:solidFill>
-            <a:srgbClr val="643791">
-              <a:alpha val="8000"/>
-            </a:srgbClr>
-          </a:solidFill>
-          <a:ln/>
-        </p:spPr>
-        <p:txBody>
-          <a:bodyPr/>
-          <a:lstStyle/>
-          <a:p>
-            <a:pPr>
-              <a:lnSpc>
-                <a:spcPct val="110000"/>
-              </a:lnSpc>
-            </a:pPr>
-            <a:r>
-              <a:rPr lang="en-US" sz="1400" dirty="0">
-                <a:solidFill>
-                  <a:srgbClr val="643791"/>
-                </a:solidFill>
-                <a:latin typeface="DM Sans 14pt" pitchFamily="2" charset="77"/>
-                <a:ea typeface="Arial" pitchFamily="34" charset="-122"/>
-                <a:cs typeface="Arial" pitchFamily="34" charset="-120"/>
-              </a:rPr>
-              <a:t>{{commentary_media_point_2}}</a:t>
-            </a:r>
-            <a:endParaRPr lang="en-US" sz="1400" dirty="0">
-              <a:latin typeface="DM Sans 14pt" pitchFamily="2" charset="77"/>
-            </a:endParaRPr>
-          </a:p>
-        </p:txBody>
-      </p:sp>
-      <p:sp>
-        <p:nvSpPr>
-          <p:cNvPr id="18" name="Shape 28">
-            <a:extLst>
-              <a:ext uri="{FF2B5EF4-FFF2-40B4-BE49-F238E27FC236}">
-                <a16:creationId xmlns:a16="http://schemas.microsoft.com/office/drawing/2014/main" id="{3461690E-5EBE-6686-6107-63D8CFF5053E}"/>
-              </a:ext>
-            </a:extLst>
-          </p:cNvPr>
-          <p:cNvSpPr/>
-          <p:nvPr/>
-        </p:nvSpPr>
-        <p:spPr>
-          <a:xfrm>
-            <a:off x="12995755" y="1890712"/>
-            <a:ext cx="4703047" cy="1182447"/>
-          </a:xfrm>
-          <a:prstGeom prst="roundRect">
-            <a:avLst>
-              <a:gd name="adj" fmla="val 14191"/>
-            </a:avLst>
-          </a:prstGeom>
-          <a:solidFill>
-            <a:srgbClr val="643791">
-              <a:alpha val="8000"/>
-            </a:srgbClr>
-          </a:solidFill>
-          <a:ln/>
-        </p:spPr>
-        <p:txBody>
-          <a:bodyPr/>
-          <a:lstStyle/>
-          <a:p>
-            <a:r>
-              <a:rPr lang="en-GB" sz="1400" dirty="0">
-                <a:solidFill>
-                  <a:srgbClr val="643791"/>
-                </a:solidFill>
-                <a:latin typeface="DM Sans 14pt" pitchFamily="2" charset="77"/>
-              </a:rPr>
-              <a:t>{{</a:t>
-            </a:r>
-            <a:r>
-              <a:rPr lang="en-GB" sz="1400" dirty="0" err="1">
-                <a:solidFill>
-                  <a:srgbClr val="643791"/>
-                </a:solidFill>
-                <a:latin typeface="DM Sans 14pt" pitchFamily="2" charset="77"/>
-              </a:rPr>
-              <a:t>chart_explainer_media_performance</a:t>
-            </a:r>
-            <a:r>
-              <a:rPr lang="en-GB" sz="1400" dirty="0">
-                <a:solidFill>
-                  <a:srgbClr val="643791"/>
-                </a:solidFill>
-                <a:latin typeface="DM Sans 14pt" pitchFamily="2" charset="77"/>
-              </a:rPr>
-              <a:t>}}</a:t>
-            </a:r>
-          </a:p>
-        </p:txBody>
-      </p:sp>
-      <p:sp>
-        <p:nvSpPr>
-          <p:cNvPr id="40" name="Shape 32">
-            <a:extLst>
-              <a:ext uri="{FF2B5EF4-FFF2-40B4-BE49-F238E27FC236}">
-                <a16:creationId xmlns:a16="http://schemas.microsoft.com/office/drawing/2014/main" id="{7A86A295-B34A-9FDE-CDD2-2CB9E93E6884}"/>
-              </a:ext>
-            </a:extLst>
-          </p:cNvPr>
-          <p:cNvSpPr/>
-          <p:nvPr/>
-        </p:nvSpPr>
-        <p:spPr>
-          <a:xfrm>
-            <a:off x="12995755" y="8053326"/>
-            <a:ext cx="4707474" cy="1174410"/>
-          </a:xfrm>
-          <a:prstGeom prst="roundRect">
-            <a:avLst>
-              <a:gd name="adj" fmla="val 15385"/>
-            </a:avLst>
-          </a:prstGeom>
-          <a:solidFill>
-            <a:srgbClr val="643791">
-              <a:alpha val="8000"/>
-            </a:srgbClr>
-          </a:solidFill>
-          <a:ln/>
-        </p:spPr>
-        <p:txBody>
-          <a:bodyPr/>
-          <a:lstStyle/>
-          <a:p>
-            <a:pPr>
-              <a:lnSpc>
-                <a:spcPct val="110000"/>
-              </a:lnSpc>
-            </a:pPr>
-            <a:r>
-              <a:rPr lang="en-US" sz="1400" dirty="0">
-                <a:solidFill>
-                  <a:srgbClr val="643791"/>
-                </a:solidFill>
-                <a:latin typeface="DM Sans 14pt" pitchFamily="2" charset="77"/>
-                <a:ea typeface="Arial" pitchFamily="34" charset="-122"/>
-                <a:cs typeface="Arial" pitchFamily="34" charset="-120"/>
-              </a:rPr>
-              <a:t>{{commentary_media_point_3}}</a:t>
-            </a:r>
-            <a:endParaRPr lang="en-US" sz="1400" dirty="0">
-              <a:latin typeface="DM Sans 14pt" pitchFamily="2" charset="77"/>
-            </a:endParaRPr>
-          </a:p>
-        </p:txBody>
-      </p:sp>
-      <p:grpSp>
-        <p:nvGrpSpPr>
-          <p:cNvPr id="45" name="Group 44">
-            <a:extLst>
-              <a:ext uri="{FF2B5EF4-FFF2-40B4-BE49-F238E27FC236}">
-                <a16:creationId xmlns:a16="http://schemas.microsoft.com/office/drawing/2014/main" id="{F5BA74F1-CA6A-02D4-93D5-CC997FFAB1CF}"/>
-              </a:ext>
-            </a:extLst>
-          </p:cNvPr>
-          <p:cNvGrpSpPr/>
-          <p:nvPr/>
-        </p:nvGrpSpPr>
-        <p:grpSpPr>
-          <a:xfrm>
-            <a:off x="12995755" y="575051"/>
-            <a:ext cx="4703047" cy="1096551"/>
-            <a:chOff x="12995755" y="575051"/>
-            <a:chExt cx="4703047" cy="1096551"/>
-          </a:xfrm>
-        </p:grpSpPr>
-        <p:sp>
-          <p:nvSpPr>
-            <p:cNvPr id="46" name="Text 3">
-              <a:extLst>
-                <a:ext uri="{FF2B5EF4-FFF2-40B4-BE49-F238E27FC236}">
-                  <a16:creationId xmlns:a16="http://schemas.microsoft.com/office/drawing/2014/main" id="{176F46CA-EFBD-4EF3-CA69-1930614DD215}"/>
-                </a:ext>
-              </a:extLst>
-            </p:cNvPr>
-            <p:cNvSpPr/>
-            <p:nvPr/>
-          </p:nvSpPr>
-          <p:spPr>
-            <a:xfrm>
-              <a:off x="12995755" y="575051"/>
-              <a:ext cx="4703047" cy="297317"/>
-            </a:xfrm>
-            <a:prstGeom prst="rect">
-              <a:avLst/>
-            </a:prstGeom>
-            <a:noFill/>
-            <a:ln/>
-          </p:spPr>
-          <p:txBody>
-            <a:bodyPr wrap="square" lIns="25400" tIns="25400" rIns="25400" bIns="25400" rtlCol="0" anchor="t">
-              <a:normAutofit/>
-            </a:bodyPr>
-            <a:lstStyle/>
-            <a:p>
-              <a:pPr algn="r"/>
-              <a:r>
-                <a:rPr lang="en-US" sz="1200" kern="0" spc="420" dirty="0">
-                  <a:solidFill>
-                    <a:srgbClr val="643791"/>
-                  </a:solidFill>
-                  <a:latin typeface="DM Sans 14pt" pitchFamily="2" charset="77"/>
-                  <a:ea typeface="Arial" pitchFamily="34" charset="-122"/>
-                  <a:cs typeface="Arial" pitchFamily="34" charset="-120"/>
-                </a:rPr>
-                <a:t>05 · MEDIA PERFORMANCE</a:t>
-              </a:r>
-              <a:endParaRPr lang="en-US" sz="1200" dirty="0">
-                <a:latin typeface="DM Sans 14pt" pitchFamily="2" charset="77"/>
-              </a:endParaRPr>
-            </a:p>
-          </p:txBody>
-        </p:sp>
-        <p:sp>
-          <p:nvSpPr>
-            <p:cNvPr id="47" name="Text 21">
-              <a:extLst>
-                <a:ext uri="{FF2B5EF4-FFF2-40B4-BE49-F238E27FC236}">
-                  <a16:creationId xmlns:a16="http://schemas.microsoft.com/office/drawing/2014/main" id="{AEE36239-70B5-2540-42A3-5FD6BF17DE83}"/>
-                </a:ext>
-              </a:extLst>
-            </p:cNvPr>
-            <p:cNvSpPr/>
-            <p:nvPr/>
-          </p:nvSpPr>
-          <p:spPr>
-            <a:xfrm>
-              <a:off x="12995755" y="933450"/>
-              <a:ext cx="4703047" cy="738152"/>
-            </a:xfrm>
-            <a:prstGeom prst="rect">
-              <a:avLst/>
-            </a:prstGeom>
-            <a:noFill/>
-            <a:ln/>
-          </p:spPr>
-          <p:txBody>
-            <a:bodyPr wrap="square" lIns="25400" tIns="25400" rIns="25400" bIns="25400" rtlCol="0" anchor="t">
-              <a:normAutofit fontScale="92500" lnSpcReduction="20000"/>
-            </a:bodyPr>
-            <a:lstStyle/>
-            <a:p>
-              <a:pPr>
-                <a:lnSpc>
-                  <a:spcPct val="140000"/>
-                </a:lnSpc>
-              </a:pPr>
-              <a:r>
-                <a:rPr lang="en-US" sz="1350" dirty="0">
-                  <a:solidFill>
-                    <a:srgbClr val="111111">
-                      <a:alpha val="63000"/>
-                    </a:srgbClr>
-                  </a:solidFill>
-                  <a:latin typeface="DM Sans 14pt" pitchFamily="2" charset="77"/>
-                  <a:ea typeface="Arial" pitchFamily="34" charset="-122"/>
-                  <a:cs typeface="Arial" pitchFamily="34" charset="-120"/>
-                </a:rPr>
-                <a:t>Average views and apply clicks per vacancy, split by media source — your </a:t>
-              </a:r>
-              <a:r>
-                <a:rPr lang="en-US" sz="1350" dirty="0" err="1">
-                  <a:solidFill>
-                    <a:srgbClr val="111111">
-                      <a:alpha val="63000"/>
-                    </a:srgbClr>
-                  </a:solidFill>
-                  <a:latin typeface="DM Sans 14pt" pitchFamily="2" charset="77"/>
-                  <a:ea typeface="Arial" pitchFamily="34" charset="-122"/>
-                  <a:cs typeface="Arial" pitchFamily="34" charset="-120"/>
-                </a:rPr>
-                <a:t>Jobsgopublic</a:t>
-              </a:r>
-              <a:r>
-                <a:rPr lang="en-US" sz="1350" dirty="0">
-                  <a:solidFill>
-                    <a:srgbClr val="111111">
-                      <a:alpha val="63000"/>
-                    </a:srgbClr>
-                  </a:solidFill>
-                  <a:latin typeface="DM Sans 14pt" pitchFamily="2" charset="77"/>
-                  <a:ea typeface="Arial" pitchFamily="34" charset="-122"/>
-                  <a:cs typeface="Arial" pitchFamily="34" charset="-120"/>
-                </a:rPr>
-                <a:t> subscription, targeted emails, PPC, and any enhancements.</a:t>
-              </a:r>
-              <a:endParaRPr lang="en-US" sz="1350" dirty="0">
-                <a:latin typeface="DM Sans 14pt" pitchFamily="2" charset="77"/>
-              </a:endParaRPr>
-            </a:p>
-          </p:txBody>
-        </p:sp>
-      </p:grpSp>
+              <a:t>05 · MEDIA PERFORMANCE</a:t>
+            </a:r>
+            <a:endParaRPr lang="en-US" sz="1200" dirty="0">
+              <a:latin typeface="DM Sans 14pt" pitchFamily="2" charset="77"/>
+            </a:endParaRPr>
+          </a:p>
+        </p:txBody>
+      </p:sp>
       <p:sp>
         <p:nvSpPr>
           <p:cNvPr id="10" name="Text 25">
@@ -8114,8 +7755,8 @@
         </p:nvSpPr>
         <p:spPr>
           <a:xfrm>
-            <a:off x="762000" y="1786181"/>
-            <a:ext cx="11756529" cy="7639050"/>
+            <a:off x="762000" y="1866900"/>
+            <a:ext cx="11945938" cy="7481190"/>
           </a:xfrm>
           <a:prstGeom prst="roundRect">
             <a:avLst>
@@ -8156,12 +7797,12 @@
         </p:nvSpPr>
         <p:spPr>
           <a:xfrm>
-            <a:off x="851338" y="2202507"/>
-            <a:ext cx="11592910" cy="7127473"/>
+            <a:off x="868675" y="2292129"/>
+            <a:ext cx="11725200" cy="6951522"/>
           </a:xfrm>
           <a:prstGeom prst="roundRect">
             <a:avLst>
-              <a:gd name="adj" fmla="val 3334"/>
+              <a:gd name="adj" fmla="val 2451"/>
             </a:avLst>
           </a:prstGeom>
           <a:solidFill>
@@ -8233,8 +7874,8 @@
         </p:nvSpPr>
         <p:spPr>
           <a:xfrm>
-            <a:off x="851338" y="1845226"/>
-            <a:ext cx="8009197" cy="299438"/>
+            <a:off x="868675" y="1866899"/>
+            <a:ext cx="8009197" cy="428400"/>
           </a:xfrm>
           <a:prstGeom prst="rect">
             <a:avLst/>
@@ -8283,6 +7924,496 @@
           </a:p>
         </p:txBody>
       </p:sp>
+      <p:sp>
+        <p:nvSpPr>
+          <p:cNvPr id="5" name="Footer Placeholder 1">
+            <a:extLst>
+              <a:ext uri="{FF2B5EF4-FFF2-40B4-BE49-F238E27FC236}">
+                <a16:creationId xmlns:a16="http://schemas.microsoft.com/office/drawing/2014/main" id="{27963530-69B1-9150-8D58-0676ABDF185C}"/>
+              </a:ext>
+            </a:extLst>
+          </p:cNvPr>
+          <p:cNvSpPr txBox="1">
+            <a:spLocks/>
+          </p:cNvSpPr>
+          <p:nvPr/>
+        </p:nvSpPr>
+        <p:spPr>
+          <a:xfrm>
+            <a:off x="17233255" y="9753300"/>
+            <a:ext cx="522000" cy="190800"/>
+          </a:xfrm>
+          <a:prstGeom prst="rect">
+            <a:avLst/>
+          </a:prstGeom>
+        </p:spPr>
+        <p:txBody>
+          <a:bodyPr vert="horz" lIns="36000" tIns="36000" rIns="36000" bIns="36000" rtlCol="0" anchor="ctr"/>
+          <a:lstStyle>
+            <a:lvl1pPr marL="0" algn="l" defTabSz="914400" rtl="0" eaLnBrk="1" latinLnBrk="0" hangingPunct="1">
+              <a:defRPr sz="900" kern="1200">
+                <a:solidFill>
+                  <a:srgbClr val="E8E0F2"/>
+                </a:solidFill>
+                <a:latin typeface="DM Sans 14pt" pitchFamily="2" charset="77"/>
+                <a:ea typeface="+mn-ea"/>
+                <a:cs typeface="+mn-cs"/>
+              </a:defRPr>
+            </a:lvl1pPr>
+            <a:lvl2pPr marL="457200" algn="l" defTabSz="914400" rtl="0" eaLnBrk="1" latinLnBrk="0" hangingPunct="1">
+              <a:defRPr sz="1800" kern="1200">
+                <a:solidFill>
+                  <a:schemeClr val="tx1"/>
+                </a:solidFill>
+                <a:latin typeface="+mn-lt"/>
+                <a:ea typeface="+mn-ea"/>
+                <a:cs typeface="+mn-cs"/>
+              </a:defRPr>
+            </a:lvl2pPr>
+            <a:lvl3pPr marL="914400" algn="l" defTabSz="914400" rtl="0" eaLnBrk="1" latinLnBrk="0" hangingPunct="1">
+              <a:defRPr sz="1800" kern="1200">
+                <a:solidFill>
+                  <a:schemeClr val="tx1"/>
+                </a:solidFill>
+                <a:latin typeface="+mn-lt"/>
+                <a:ea typeface="+mn-ea"/>
+                <a:cs typeface="+mn-cs"/>
+              </a:defRPr>
+            </a:lvl3pPr>
+            <a:lvl4pPr marL="1371600" algn="l" defTabSz="914400" rtl="0" eaLnBrk="1" latinLnBrk="0" hangingPunct="1">
+              <a:defRPr sz="1800" kern="1200">
+                <a:solidFill>
+                  <a:schemeClr val="tx1"/>
+                </a:solidFill>
+                <a:latin typeface="+mn-lt"/>
+                <a:ea typeface="+mn-ea"/>
+                <a:cs typeface="+mn-cs"/>
+              </a:defRPr>
+            </a:lvl4pPr>
+            <a:lvl5pPr marL="1828800" algn="l" defTabSz="914400" rtl="0" eaLnBrk="1" latinLnBrk="0" hangingPunct="1">
+              <a:defRPr sz="1800" kern="1200">
+                <a:solidFill>
+                  <a:schemeClr val="tx1"/>
+                </a:solidFill>
+                <a:latin typeface="+mn-lt"/>
+                <a:ea typeface="+mn-ea"/>
+                <a:cs typeface="+mn-cs"/>
+              </a:defRPr>
+            </a:lvl5pPr>
+            <a:lvl6pPr marL="2286000" algn="l" defTabSz="914400" rtl="0" eaLnBrk="1" latinLnBrk="0" hangingPunct="1">
+              <a:defRPr sz="1800" kern="1200">
+                <a:solidFill>
+                  <a:schemeClr val="tx1"/>
+                </a:solidFill>
+                <a:latin typeface="+mn-lt"/>
+                <a:ea typeface="+mn-ea"/>
+                <a:cs typeface="+mn-cs"/>
+              </a:defRPr>
+            </a:lvl6pPr>
+            <a:lvl7pPr marL="2743200" algn="l" defTabSz="914400" rtl="0" eaLnBrk="1" latinLnBrk="0" hangingPunct="1">
+              <a:defRPr sz="1800" kern="1200">
+                <a:solidFill>
+                  <a:schemeClr val="tx1"/>
+                </a:solidFill>
+                <a:latin typeface="+mn-lt"/>
+                <a:ea typeface="+mn-ea"/>
+                <a:cs typeface="+mn-cs"/>
+              </a:defRPr>
+            </a:lvl7pPr>
+            <a:lvl8pPr marL="3200400" algn="l" defTabSz="914400" rtl="0" eaLnBrk="1" latinLnBrk="0" hangingPunct="1">
+              <a:defRPr sz="1800" kern="1200">
+                <a:solidFill>
+                  <a:schemeClr val="tx1"/>
+                </a:solidFill>
+                <a:latin typeface="+mn-lt"/>
+                <a:ea typeface="+mn-ea"/>
+                <a:cs typeface="+mn-cs"/>
+              </a:defRPr>
+            </a:lvl8pPr>
+            <a:lvl9pPr marL="3657600" algn="l" defTabSz="914400" rtl="0" eaLnBrk="1" latinLnBrk="0" hangingPunct="1">
+              <a:defRPr sz="1800" kern="1200">
+                <a:solidFill>
+                  <a:schemeClr val="tx1"/>
+                </a:solidFill>
+                <a:latin typeface="+mn-lt"/>
+                <a:ea typeface="+mn-ea"/>
+                <a:cs typeface="+mn-cs"/>
+              </a:defRPr>
+            </a:lvl9pPr>
+          </a:lstStyle>
+          <a:p>
+            <a:r>
+              <a:rPr lang="en-GB" dirty="0">
+                <a:solidFill>
+                  <a:srgbClr val="757575"/>
+                </a:solidFill>
+              </a:rPr>
+              <a:t>{{</a:t>
+            </a:r>
+            <a:r>
+              <a:rPr lang="en-GB" dirty="0" err="1">
+                <a:solidFill>
+                  <a:srgbClr val="757575"/>
+                </a:solidFill>
+              </a:rPr>
+              <a:t>slide_number</a:t>
+            </a:r>
+            <a:r>
+              <a:rPr lang="en-GB" dirty="0">
+                <a:solidFill>
+                  <a:srgbClr val="757575"/>
+                </a:solidFill>
+              </a:rPr>
+              <a:t>}} / {{</a:t>
+            </a:r>
+            <a:r>
+              <a:rPr lang="en-GB" dirty="0" err="1">
+                <a:solidFill>
+                  <a:srgbClr val="757575"/>
+                </a:solidFill>
+              </a:rPr>
+              <a:t>total_slides</a:t>
+            </a:r>
+            <a:r>
+              <a:rPr lang="en-GB" dirty="0">
+                <a:solidFill>
+                  <a:srgbClr val="757575"/>
+                </a:solidFill>
+              </a:rPr>
+              <a:t>}}</a:t>
+            </a:r>
+          </a:p>
+        </p:txBody>
+      </p:sp>
+      <p:sp>
+        <p:nvSpPr>
+          <p:cNvPr id="8" name="Shape 28">
+            <a:extLst>
+              <a:ext uri="{FF2B5EF4-FFF2-40B4-BE49-F238E27FC236}">
+                <a16:creationId xmlns:a16="http://schemas.microsoft.com/office/drawing/2014/main" id="{CC7F9FAC-F4C9-64FC-9BBE-EE4FFC807375}"/>
+              </a:ext>
+            </a:extLst>
+          </p:cNvPr>
+          <p:cNvSpPr/>
+          <p:nvPr/>
+        </p:nvSpPr>
+        <p:spPr>
+          <a:xfrm>
+            <a:off x="12995755" y="1866899"/>
+            <a:ext cx="4701600" cy="1188000"/>
+          </a:xfrm>
+          <a:prstGeom prst="roundRect">
+            <a:avLst>
+              <a:gd name="adj" fmla="val 6000"/>
+            </a:avLst>
+          </a:prstGeom>
+          <a:solidFill>
+            <a:srgbClr val="643791">
+              <a:alpha val="8000"/>
+            </a:srgbClr>
+          </a:solidFill>
+          <a:ln/>
+        </p:spPr>
+        <p:txBody>
+          <a:bodyPr/>
+          <a:lstStyle/>
+          <a:p>
+            <a:r>
+              <a:rPr lang="en-GB" sz="1400" dirty="0">
+                <a:solidFill>
+                  <a:srgbClr val="643791"/>
+                </a:solidFill>
+                <a:latin typeface="DM Sans 14pt" pitchFamily="2" charset="77"/>
+              </a:rPr>
+              <a:t>{{</a:t>
+            </a:r>
+            <a:r>
+              <a:rPr lang="en-GB" sz="1400" dirty="0" err="1">
+                <a:solidFill>
+                  <a:srgbClr val="643791"/>
+                </a:solidFill>
+                <a:latin typeface="DM Sans 14pt" pitchFamily="2" charset="77"/>
+              </a:rPr>
+              <a:t>chart_explainer_media_performance</a:t>
+            </a:r>
+            <a:r>
+              <a:rPr lang="en-GB" sz="1400" dirty="0">
+                <a:solidFill>
+                  <a:srgbClr val="643791"/>
+                </a:solidFill>
+                <a:latin typeface="DM Sans 14pt" pitchFamily="2" charset="77"/>
+              </a:rPr>
+              <a:t>}}</a:t>
+            </a:r>
+          </a:p>
+        </p:txBody>
+      </p:sp>
+      <p:sp>
+        <p:nvSpPr>
+          <p:cNvPr id="11" name="Text 27">
+            <a:extLst>
+              <a:ext uri="{FF2B5EF4-FFF2-40B4-BE49-F238E27FC236}">
+                <a16:creationId xmlns:a16="http://schemas.microsoft.com/office/drawing/2014/main" id="{70FE15C1-BC0D-49B2-7905-4CD52D904F9B}"/>
+              </a:ext>
+            </a:extLst>
+          </p:cNvPr>
+          <p:cNvSpPr/>
+          <p:nvPr/>
+        </p:nvSpPr>
+        <p:spPr>
+          <a:xfrm>
+            <a:off x="12995755" y="3259384"/>
+            <a:ext cx="4701600" cy="488865"/>
+          </a:xfrm>
+          <a:prstGeom prst="rect">
+            <a:avLst/>
+          </a:prstGeom>
+          <a:noFill/>
+          <a:ln/>
+        </p:spPr>
+        <p:txBody>
+          <a:bodyPr wrap="square" lIns="25400" tIns="25400" rIns="25400" bIns="25400" rtlCol="0" anchor="t">
+            <a:normAutofit/>
+          </a:bodyPr>
+          <a:lstStyle/>
+          <a:p>
+            <a:pPr marL="0" indent="0" algn="l">
+              <a:buNone/>
+            </a:pPr>
+            <a:r>
+              <a:rPr lang="en-US" sz="2400" b="1" kern="0" spc="368" dirty="0">
+                <a:solidFill>
+                  <a:srgbClr val="643791"/>
+                </a:solidFill>
+                <a:latin typeface="DM Sans 14pt" pitchFamily="2" charset="77"/>
+                <a:ea typeface="Arial" pitchFamily="34" charset="-122"/>
+                <a:cs typeface="Arial" pitchFamily="34" charset="-120"/>
+              </a:rPr>
+              <a:t>COMMENTARY</a:t>
+            </a:r>
+            <a:endParaRPr lang="en-US" sz="2400" b="1" dirty="0">
+              <a:latin typeface="DM Sans 14pt" pitchFamily="2" charset="77"/>
+            </a:endParaRPr>
+          </a:p>
+        </p:txBody>
+      </p:sp>
+      <p:sp>
+        <p:nvSpPr>
+          <p:cNvPr id="17" name="Shape 28">
+            <a:extLst>
+              <a:ext uri="{FF2B5EF4-FFF2-40B4-BE49-F238E27FC236}">
+                <a16:creationId xmlns:a16="http://schemas.microsoft.com/office/drawing/2014/main" id="{B7AF4DB2-7C41-050E-697B-5216A358A2F4}"/>
+              </a:ext>
+            </a:extLst>
+          </p:cNvPr>
+          <p:cNvSpPr/>
+          <p:nvPr/>
+        </p:nvSpPr>
+        <p:spPr>
+          <a:xfrm>
+            <a:off x="12995755" y="3748249"/>
+            <a:ext cx="4701600" cy="5606765"/>
+          </a:xfrm>
+          <a:prstGeom prst="roundRect">
+            <a:avLst>
+              <a:gd name="adj" fmla="val 3000"/>
+            </a:avLst>
+          </a:prstGeom>
+          <a:solidFill>
+            <a:srgbClr val="643791">
+              <a:alpha val="8000"/>
+            </a:srgbClr>
+          </a:solidFill>
+          <a:ln/>
+        </p:spPr>
+        <p:txBody>
+          <a:bodyPr/>
+          <a:lstStyle/>
+          <a:p>
+            <a:r>
+              <a:rPr lang="en-US" sz="1400">
+                <a:solidFill>
+                  <a:srgbClr val="643791"/>
+                </a:solidFill>
+                <a:latin typeface="DM Sans 14pt" pitchFamily="2" charset="77"/>
+                <a:cs typeface="Arial" pitchFamily="34" charset="-120"/>
+              </a:rPr>
+              <a:t>{{</a:t>
+            </a:r>
+            <a:r>
+              <a:rPr lang="en-US" sz="1400" dirty="0" err="1">
+                <a:solidFill>
+                  <a:srgbClr val="643791"/>
+                </a:solidFill>
+                <a:latin typeface="DM Sans 14pt" pitchFamily="2" charset="77"/>
+                <a:cs typeface="Arial" pitchFamily="34" charset="-120"/>
+              </a:rPr>
+              <a:t>commentary_media</a:t>
+            </a:r>
+            <a:r>
+              <a:rPr lang="en-US" sz="1400" err="1">
+                <a:solidFill>
+                  <a:srgbClr val="643791"/>
+                </a:solidFill>
+                <a:latin typeface="DM Sans 14pt" pitchFamily="2" charset="77"/>
+                <a:cs typeface="Arial" pitchFamily="34" charset="-120"/>
+              </a:rPr>
+              <a:t>_</a:t>
+            </a:r>
+            <a:r>
+              <a:rPr lang="en-US" sz="1400">
+                <a:solidFill>
+                  <a:srgbClr val="643791"/>
+                </a:solidFill>
+                <a:latin typeface="DM Sans 14pt" pitchFamily="2" charset="77"/>
+                <a:cs typeface="Arial" pitchFamily="34" charset="-120"/>
+              </a:rPr>
+              <a:t>intro}}</a:t>
+            </a:r>
+            <a:endParaRPr lang="en-US" sz="1400" dirty="0">
+              <a:solidFill>
+                <a:srgbClr val="643791"/>
+              </a:solidFill>
+              <a:latin typeface="DM Sans 14pt" pitchFamily="2" charset="77"/>
+              <a:cs typeface="Arial" pitchFamily="34" charset="-120"/>
+            </a:endParaRPr>
+          </a:p>
+          <a:p>
+            <a:endParaRPr lang="en-US" sz="1400" dirty="0">
+              <a:solidFill>
+                <a:srgbClr val="643791"/>
+              </a:solidFill>
+              <a:latin typeface="DM Sans 14pt" pitchFamily="2" charset="77"/>
+              <a:cs typeface="Arial" pitchFamily="34" charset="-120"/>
+            </a:endParaRPr>
+          </a:p>
+          <a:p>
+            <a:r>
+              <a:rPr lang="en-US" sz="1400" dirty="0">
+                <a:solidFill>
+                  <a:srgbClr val="643791"/>
+                </a:solidFill>
+                <a:latin typeface="DM Sans 14pt" pitchFamily="2" charset="77"/>
+                <a:cs typeface="Arial" pitchFamily="34" charset="-120"/>
+              </a:rPr>
+              <a:t>{{commentary_media_point_</a:t>
+            </a:r>
+            <a:r>
+              <a:rPr lang="en-US" sz="1400">
+                <a:solidFill>
+                  <a:srgbClr val="643791"/>
+                </a:solidFill>
+                <a:latin typeface="DM Sans 14pt" pitchFamily="2" charset="77"/>
+                <a:cs typeface="Arial" pitchFamily="34" charset="-120"/>
+              </a:rPr>
+              <a:t>1}}</a:t>
+            </a:r>
+            <a:endParaRPr lang="en-US" sz="1400" dirty="0">
+              <a:solidFill>
+                <a:srgbClr val="643791"/>
+              </a:solidFill>
+              <a:latin typeface="DM Sans 14pt" pitchFamily="2" charset="77"/>
+              <a:cs typeface="Arial" pitchFamily="34" charset="-120"/>
+            </a:endParaRPr>
+          </a:p>
+          <a:p>
+            <a:endParaRPr lang="en-US" sz="1400" dirty="0">
+              <a:solidFill>
+                <a:srgbClr val="643791"/>
+              </a:solidFill>
+              <a:latin typeface="DM Sans 14pt" pitchFamily="2" charset="77"/>
+              <a:cs typeface="Arial" pitchFamily="34" charset="-120"/>
+            </a:endParaRPr>
+          </a:p>
+          <a:p>
+            <a:r>
+              <a:rPr lang="en-US" sz="1400" dirty="0">
+                <a:solidFill>
+                  <a:srgbClr val="643791"/>
+                </a:solidFill>
+                <a:latin typeface="DM Sans 14pt" pitchFamily="2" charset="77"/>
+                <a:cs typeface="Arial" pitchFamily="34" charset="-120"/>
+              </a:rPr>
+              <a:t>{{commentary_media_point_</a:t>
+            </a:r>
+            <a:r>
+              <a:rPr lang="en-US" sz="1400">
+                <a:solidFill>
+                  <a:srgbClr val="643791"/>
+                </a:solidFill>
+                <a:latin typeface="DM Sans 14pt" pitchFamily="2" charset="77"/>
+                <a:cs typeface="Arial" pitchFamily="34" charset="-120"/>
+              </a:rPr>
+              <a:t>2}}</a:t>
+            </a:r>
+            <a:endParaRPr lang="en-US" sz="1400" dirty="0">
+              <a:solidFill>
+                <a:srgbClr val="643791"/>
+              </a:solidFill>
+              <a:latin typeface="DM Sans 14pt" pitchFamily="2" charset="77"/>
+              <a:cs typeface="Arial" pitchFamily="34" charset="-120"/>
+            </a:endParaRPr>
+          </a:p>
+          <a:p>
+            <a:endParaRPr lang="en-US" sz="1400" dirty="0">
+              <a:solidFill>
+                <a:srgbClr val="643791"/>
+              </a:solidFill>
+              <a:latin typeface="DM Sans 14pt" pitchFamily="2" charset="77"/>
+              <a:cs typeface="Arial" pitchFamily="34" charset="-120"/>
+            </a:endParaRPr>
+          </a:p>
+          <a:p>
+            <a:r>
+              <a:rPr lang="en-US" sz="1400" dirty="0">
+                <a:solidFill>
+                  <a:srgbClr val="643791"/>
+                </a:solidFill>
+                <a:latin typeface="DM Sans 14pt" pitchFamily="2" charset="77"/>
+                <a:cs typeface="Arial" pitchFamily="34" charset="-120"/>
+              </a:rPr>
+              <a:t>{{commentary_media</a:t>
+            </a:r>
+            <a:r>
+              <a:rPr lang="en-US" sz="1400">
+                <a:solidFill>
+                  <a:srgbClr val="643791"/>
+                </a:solidFill>
+                <a:latin typeface="DM Sans 14pt" pitchFamily="2" charset="77"/>
+                <a:cs typeface="Arial" pitchFamily="34" charset="-120"/>
+              </a:rPr>
+              <a:t>_point</a:t>
+            </a:r>
+            <a:r>
+              <a:rPr lang="en-US" sz="1400" dirty="0">
+                <a:solidFill>
+                  <a:srgbClr val="643791"/>
+                </a:solidFill>
+                <a:latin typeface="DM Sans 14pt" pitchFamily="2" charset="77"/>
+                <a:cs typeface="Arial" pitchFamily="34" charset="-120"/>
+              </a:rPr>
+              <a:t>_</a:t>
+            </a:r>
+            <a:r>
+              <a:rPr lang="en-US" sz="1400">
+                <a:solidFill>
+                  <a:srgbClr val="643791"/>
+                </a:solidFill>
+                <a:latin typeface="DM Sans 14pt" pitchFamily="2" charset="77"/>
+                <a:cs typeface="Arial" pitchFamily="34" charset="-120"/>
+              </a:rPr>
+              <a:t>3}}</a:t>
+            </a:r>
+            <a:endParaRPr lang="en-US" sz="1400" dirty="0">
+              <a:solidFill>
+                <a:srgbClr val="643791"/>
+              </a:solidFill>
+              <a:latin typeface="DM Sans 14pt" pitchFamily="2" charset="77"/>
+              <a:cs typeface="Arial" pitchFamily="34" charset="-120"/>
+            </a:endParaRPr>
+          </a:p>
+        </p:txBody>
+      </p:sp>
     </p:spTree>
   </p:cSld>
   <p:clrMapOvr>
@@ -8292,6 +8423,1156 @@
 </file>
 
 <file path=ppt/slides/slide7.xml><?xml version="1.0" encoding="utf-8"?>
+<p:sld xmlns:a="http://schemas.openxmlformats.org/drawingml/2006/main" xmlns:r="http://schemas.openxmlformats.org/officeDocument/2006/relationships" xmlns:p="http://schemas.openxmlformats.org/presentationml/2006/main">
+  <p:cSld>
+    <p:spTree>
+      <p:nvGrpSpPr>
+        <p:cNvPr id="1" name="">
+          <a:extLst>
+            <a:ext uri="{FF2B5EF4-FFF2-40B4-BE49-F238E27FC236}">
+              <a16:creationId xmlns:a16="http://schemas.microsoft.com/office/drawing/2014/main" id="{8B3B3652-5682-030C-16C8-859667E662CC}"/>
+            </a:ext>
+          </a:extLst>
+        </p:cNvPr>
+        <p:cNvGrpSpPr/>
+        <p:nvPr/>
+      </p:nvGrpSpPr>
+      <p:grpSpPr>
+        <a:xfrm>
+          <a:off x="0" y="0"/>
+          <a:ext cx="0" cy="0"/>
+          <a:chOff x="0" y="0"/>
+          <a:chExt cx="0" cy="0"/>
+        </a:xfrm>
+      </p:grpSpPr>
+      <p:sp>
+        <p:nvSpPr>
+          <p:cNvPr id="2" name="Shape 0">
+            <a:extLst>
+              <a:ext uri="{FF2B5EF4-FFF2-40B4-BE49-F238E27FC236}">
+                <a16:creationId xmlns:a16="http://schemas.microsoft.com/office/drawing/2014/main" id="{6769438C-534F-3653-4C67-806313405A08}"/>
+              </a:ext>
+            </a:extLst>
+          </p:cNvPr>
+          <p:cNvSpPr/>
+          <p:nvPr/>
+        </p:nvSpPr>
+        <p:spPr>
+          <a:xfrm>
+            <a:off x="609600" y="457200"/>
+            <a:ext cx="495300" cy="438150"/>
+          </a:xfrm>
+          <a:prstGeom prst="rect">
+            <a:avLst/>
+          </a:prstGeom>
+          <a:solidFill>
+            <a:srgbClr val="643791"/>
+          </a:solidFill>
+          <a:ln/>
+        </p:spPr>
+        <p:txBody>
+          <a:bodyPr/>
+          <a:lstStyle/>
+          <a:p>
+            <a:endParaRPr lang="en-GB">
+              <a:latin typeface="DM Sans 14pt" pitchFamily="2" charset="77"/>
+            </a:endParaRPr>
+          </a:p>
+        </p:txBody>
+      </p:sp>
+      <p:sp>
+        <p:nvSpPr>
+          <p:cNvPr id="3" name="Text 1">
+            <a:extLst>
+              <a:ext uri="{FF2B5EF4-FFF2-40B4-BE49-F238E27FC236}">
+                <a16:creationId xmlns:a16="http://schemas.microsoft.com/office/drawing/2014/main" id="{6F9E9FF0-CF8C-FC6B-F503-578F1A2C9E69}"/>
+              </a:ext>
+            </a:extLst>
+          </p:cNvPr>
+          <p:cNvSpPr/>
+          <p:nvPr/>
+        </p:nvSpPr>
+        <p:spPr>
+          <a:xfrm>
+            <a:off x="571500" y="476250"/>
+            <a:ext cx="495300" cy="457200"/>
+          </a:xfrm>
+          <a:prstGeom prst="rect">
+            <a:avLst/>
+          </a:prstGeom>
+          <a:noFill/>
+          <a:ln/>
+        </p:spPr>
+        <p:txBody>
+          <a:bodyPr wrap="square" lIns="25400" tIns="25400" rIns="25400" bIns="25400" rtlCol="0" anchor="ctr">
+            <a:normAutofit/>
+          </a:bodyPr>
+          <a:lstStyle/>
+          <a:p>
+            <a:pPr marL="0" indent="0" algn="ctr">
+              <a:buNone/>
+            </a:pPr>
+            <a:r>
+              <a:rPr lang="en-US" sz="1350" b="1" kern="0" spc="-27" dirty="0">
+                <a:solidFill>
+                  <a:srgbClr val="FFFFFF"/>
+                </a:solidFill>
+                <a:latin typeface="DM Sans 14pt" pitchFamily="2" charset="77"/>
+                <a:ea typeface="Arial" pitchFamily="34" charset="-122"/>
+                <a:cs typeface="Arial" pitchFamily="34" charset="-120"/>
+              </a:rPr>
+              <a:t>Go</a:t>
+            </a:r>
+            <a:endParaRPr lang="en-US" sz="1350" dirty="0">
+              <a:latin typeface="DM Sans 14pt" pitchFamily="2" charset="77"/>
+            </a:endParaRPr>
+          </a:p>
+        </p:txBody>
+      </p:sp>
+      <p:sp>
+        <p:nvSpPr>
+          <p:cNvPr id="4" name="Text 2">
+            <a:extLst>
+              <a:ext uri="{FF2B5EF4-FFF2-40B4-BE49-F238E27FC236}">
+                <a16:creationId xmlns:a16="http://schemas.microsoft.com/office/drawing/2014/main" id="{9A54BD05-0BEA-5C3A-B2A1-EBA393BDE115}"/>
+              </a:ext>
+            </a:extLst>
+          </p:cNvPr>
+          <p:cNvSpPr/>
+          <p:nvPr/>
+        </p:nvSpPr>
+        <p:spPr>
+          <a:xfrm>
+            <a:off x="1200150" y="538163"/>
+            <a:ext cx="1561505" cy="314325"/>
+          </a:xfrm>
+          <a:prstGeom prst="rect">
+            <a:avLst/>
+          </a:prstGeom>
+          <a:noFill/>
+          <a:ln/>
+        </p:spPr>
+        <p:txBody>
+          <a:bodyPr wrap="square" lIns="25400" tIns="25400" rIns="25400" bIns="25400" rtlCol="0" anchor="t">
+            <a:normAutofit/>
+          </a:bodyPr>
+          <a:lstStyle/>
+          <a:p>
+            <a:pPr marL="0" indent="0" algn="l">
+              <a:buNone/>
+            </a:pPr>
+            <a:r>
+              <a:rPr lang="en-US" sz="1650" b="1" kern="0" spc="-16" dirty="0">
+                <a:solidFill>
+                  <a:srgbClr val="111111"/>
+                </a:solidFill>
+                <a:latin typeface="DM Sans 14pt" pitchFamily="2" charset="77"/>
+                <a:ea typeface="Arial" pitchFamily="34" charset="-122"/>
+                <a:cs typeface="Arial" pitchFamily="34" charset="-120"/>
+              </a:rPr>
+              <a:t>Jobs Go Public</a:t>
+            </a:r>
+            <a:endParaRPr lang="en-US" sz="1650" dirty="0">
+              <a:latin typeface="DM Sans 14pt" pitchFamily="2" charset="77"/>
+            </a:endParaRPr>
+          </a:p>
+        </p:txBody>
+      </p:sp>
+      <p:sp>
+        <p:nvSpPr>
+          <p:cNvPr id="6" name="Text 4">
+            <a:extLst>
+              <a:ext uri="{FF2B5EF4-FFF2-40B4-BE49-F238E27FC236}">
+                <a16:creationId xmlns:a16="http://schemas.microsoft.com/office/drawing/2014/main" id="{B9084D09-BE08-E661-5616-7526A3AD2A01}"/>
+              </a:ext>
+            </a:extLst>
+          </p:cNvPr>
+          <p:cNvSpPr/>
+          <p:nvPr/>
+        </p:nvSpPr>
+        <p:spPr>
+          <a:xfrm>
+            <a:off x="762000" y="1047750"/>
+            <a:ext cx="9460629" cy="647700"/>
+          </a:xfrm>
+          <a:prstGeom prst="rect">
+            <a:avLst/>
+          </a:prstGeom>
+          <a:noFill/>
+          <a:ln>
+            <a:noFill/>
+          </a:ln>
+        </p:spPr>
+        <p:txBody>
+          <a:bodyPr wrap="square" lIns="25400" tIns="25400" rIns="25400" bIns="25400" rtlCol="0" anchor="t">
+            <a:normAutofit fontScale="92500" lnSpcReduction="20000"/>
+          </a:bodyPr>
+          <a:lstStyle/>
+          <a:p>
+            <a:pPr marL="0" indent="0" algn="l">
+              <a:lnSpc>
+                <a:spcPct val="100000"/>
+              </a:lnSpc>
+              <a:buNone/>
+            </a:pPr>
+            <a:r>
+              <a:rPr lang="en-US" sz="4800" b="1" kern="0" spc="-144" dirty="0">
+                <a:solidFill>
+                  <a:srgbClr val="111111"/>
+                </a:solidFill>
+                <a:latin typeface="DM Sans 14pt" pitchFamily="2" charset="77"/>
+                <a:ea typeface="Arial" pitchFamily="34" charset="-122"/>
+                <a:cs typeface="Arial" pitchFamily="34" charset="-120"/>
+              </a:rPr>
+              <a:t>Your salaries benchmarked</a:t>
+            </a:r>
+            <a:endParaRPr lang="en-US" sz="4800" dirty="0">
+              <a:latin typeface="DM Sans 14pt" pitchFamily="2" charset="77"/>
+            </a:endParaRPr>
+          </a:p>
+        </p:txBody>
+      </p:sp>
+      <p:sp>
+        <p:nvSpPr>
+          <p:cNvPr id="27" name="Text 25">
+            <a:extLst>
+              <a:ext uri="{FF2B5EF4-FFF2-40B4-BE49-F238E27FC236}">
+                <a16:creationId xmlns:a16="http://schemas.microsoft.com/office/drawing/2014/main" id="{4E718164-87F5-1C17-3C8C-7615C2BF65BC}"/>
+              </a:ext>
+            </a:extLst>
+          </p:cNvPr>
+          <p:cNvSpPr/>
+          <p:nvPr/>
+        </p:nvSpPr>
+        <p:spPr>
+          <a:xfrm>
+            <a:off x="977462" y="2486027"/>
+            <a:ext cx="11350567" cy="6626441"/>
+          </a:xfrm>
+          <a:prstGeom prst="rect">
+            <a:avLst/>
+          </a:prstGeom>
+          <a:noFill/>
+          <a:ln/>
+        </p:spPr>
+        <p:txBody>
+          <a:bodyPr wrap="square" lIns="25400" tIns="25400" rIns="25400" bIns="25400" rtlCol="0" anchor="t">
+            <a:normAutofit/>
+          </a:bodyPr>
+          <a:lstStyle/>
+          <a:p>
+            <a:pPr marL="0" indent="0" algn="ctr">
+              <a:buNone/>
+            </a:pPr>
+            <a:endParaRPr lang="en-US" sz="1650" dirty="0">
+              <a:latin typeface="DM Sans 14pt" pitchFamily="2" charset="77"/>
+            </a:endParaRPr>
+          </a:p>
+        </p:txBody>
+      </p:sp>
+      <p:sp>
+        <p:nvSpPr>
+          <p:cNvPr id="38" name="Text 36">
+            <a:extLst>
+              <a:ext uri="{FF2B5EF4-FFF2-40B4-BE49-F238E27FC236}">
+                <a16:creationId xmlns:a16="http://schemas.microsoft.com/office/drawing/2014/main" id="{D64166D0-A6F5-DBA5-F270-F86FC33A0F32}"/>
+              </a:ext>
+            </a:extLst>
+          </p:cNvPr>
+          <p:cNvSpPr/>
+          <p:nvPr/>
+        </p:nvSpPr>
+        <p:spPr>
+          <a:xfrm>
+            <a:off x="609600" y="9753600"/>
+            <a:ext cx="2373511" cy="190500"/>
+          </a:xfrm>
+          <a:prstGeom prst="rect">
+            <a:avLst/>
+          </a:prstGeom>
+          <a:noFill/>
+          <a:ln/>
+        </p:spPr>
+        <p:txBody>
+          <a:bodyPr wrap="square" lIns="25400" tIns="25400" rIns="25400" bIns="25400" rtlCol="0" anchor="t">
+            <a:normAutofit fontScale="85000" lnSpcReduction="10000"/>
+          </a:bodyPr>
+          <a:lstStyle/>
+          <a:p>
+            <a:pPr marL="0" indent="0" algn="l">
+              <a:buNone/>
+            </a:pPr>
+            <a:r>
+              <a:rPr lang="en-US" sz="1050" kern="0" spc="42" dirty="0">
+                <a:solidFill>
+                  <a:srgbClr val="111111">
+                    <a:alpha val="63000"/>
+                  </a:srgbClr>
+                </a:solidFill>
+                <a:latin typeface="DM Sans 14pt" pitchFamily="2" charset="77"/>
+                <a:ea typeface="Arial" pitchFamily="34" charset="-122"/>
+                <a:cs typeface="Arial" pitchFamily="34" charset="-120"/>
+              </a:rPr>
+              <a:t>{{client_name}} · Advertising Report</a:t>
+            </a:r>
+            <a:endParaRPr lang="en-US" sz="1050" dirty="0">
+              <a:latin typeface="DM Sans 14pt" pitchFamily="2" charset="77"/>
+            </a:endParaRPr>
+          </a:p>
+        </p:txBody>
+      </p:sp>
+      <p:sp>
+        <p:nvSpPr>
+          <p:cNvPr id="46" name="Text 3">
+            <a:extLst>
+              <a:ext uri="{FF2B5EF4-FFF2-40B4-BE49-F238E27FC236}">
+                <a16:creationId xmlns:a16="http://schemas.microsoft.com/office/drawing/2014/main" id="{BE3C597C-B529-9D9E-3C0F-A3121FDAF6B4}"/>
+              </a:ext>
+            </a:extLst>
+          </p:cNvPr>
+          <p:cNvSpPr/>
+          <p:nvPr/>
+        </p:nvSpPr>
+        <p:spPr>
+          <a:xfrm>
+            <a:off x="12995755" y="575051"/>
+            <a:ext cx="4703047" cy="280800"/>
+          </a:xfrm>
+          <a:prstGeom prst="rect">
+            <a:avLst/>
+          </a:prstGeom>
+          <a:noFill/>
+          <a:ln>
+            <a:noFill/>
+          </a:ln>
+        </p:spPr>
+        <p:txBody>
+          <a:bodyPr wrap="square" lIns="25400" tIns="25400" rIns="25400" bIns="25400" rtlCol="0" anchor="t">
+            <a:normAutofit/>
+          </a:bodyPr>
+          <a:lstStyle/>
+          <a:p>
+            <a:pPr algn="r"/>
+            <a:r>
+              <a:rPr lang="en-US" sz="1200" kern="0" spc="420" dirty="0">
+                <a:solidFill>
+                  <a:srgbClr val="643791"/>
+                </a:solidFill>
+                <a:latin typeface="DM Sans 14pt" pitchFamily="2" charset="77"/>
+                <a:ea typeface="Arial" pitchFamily="34" charset="-122"/>
+                <a:cs typeface="Arial" pitchFamily="34" charset="-120"/>
+              </a:rPr>
+              <a:t>06 · SALARY BENCHMARK</a:t>
+            </a:r>
+            <a:endParaRPr lang="en-US" sz="1200" dirty="0">
+              <a:latin typeface="DM Sans 14pt" pitchFamily="2" charset="77"/>
+            </a:endParaRPr>
+          </a:p>
+        </p:txBody>
+      </p:sp>
+      <p:sp>
+        <p:nvSpPr>
+          <p:cNvPr id="10" name="Text 25">
+            <a:extLst>
+              <a:ext uri="{FF2B5EF4-FFF2-40B4-BE49-F238E27FC236}">
+                <a16:creationId xmlns:a16="http://schemas.microsoft.com/office/drawing/2014/main" id="{A60EF022-AFCA-1D43-00F7-23502A73BD1F}"/>
+              </a:ext>
+            </a:extLst>
+          </p:cNvPr>
+          <p:cNvSpPr/>
+          <p:nvPr/>
+        </p:nvSpPr>
+        <p:spPr>
+          <a:xfrm>
+            <a:off x="4893357" y="4881636"/>
+            <a:ext cx="3931965" cy="190500"/>
+          </a:xfrm>
+          <a:prstGeom prst="rect">
+            <a:avLst/>
+          </a:prstGeom>
+          <a:noFill/>
+          <a:ln/>
+        </p:spPr>
+        <p:txBody>
+          <a:bodyPr wrap="square" lIns="25400" tIns="25400" rIns="25400" bIns="25400" rtlCol="0" anchor="t">
+            <a:normAutofit fontScale="92500" lnSpcReduction="10000"/>
+          </a:bodyPr>
+          <a:lstStyle/>
+          <a:p>
+            <a:pPr marL="0" indent="0" algn="ctr">
+              <a:buNone/>
+            </a:pPr>
+            <a:endParaRPr lang="en-US" sz="1050" dirty="0">
+              <a:latin typeface="DM Sans 14pt" pitchFamily="2" charset="77"/>
+            </a:endParaRPr>
+          </a:p>
+        </p:txBody>
+      </p:sp>
+      <p:sp>
+        <p:nvSpPr>
+          <p:cNvPr id="13" name="Shape 19">
+            <a:extLst>
+              <a:ext uri="{FF2B5EF4-FFF2-40B4-BE49-F238E27FC236}">
+                <a16:creationId xmlns:a16="http://schemas.microsoft.com/office/drawing/2014/main" id="{95A19A90-8ED4-8C19-01E3-E847C853A5DA}"/>
+              </a:ext>
+            </a:extLst>
+          </p:cNvPr>
+          <p:cNvSpPr/>
+          <p:nvPr/>
+        </p:nvSpPr>
+        <p:spPr>
+          <a:xfrm>
+            <a:off x="762000" y="1866900"/>
+            <a:ext cx="11945938" cy="7481190"/>
+          </a:xfrm>
+          <a:prstGeom prst="roundRect">
+            <a:avLst>
+              <a:gd name="adj" fmla="val 2331"/>
+            </a:avLst>
+          </a:prstGeom>
+          <a:solidFill>
+            <a:srgbClr val="E8E0F2"/>
+          </a:solidFill>
+          <a:ln w="19050">
+            <a:solidFill>
+              <a:srgbClr val="643791"/>
+            </a:solidFill>
+            <a:prstDash val="dash"/>
+          </a:ln>
+        </p:spPr>
+        <p:txBody>
+          <a:bodyPr/>
+          <a:lstStyle/>
+          <a:p>
+            <a:endParaRPr lang="en-GB" dirty="0">
+              <a:latin typeface="DM Sans 14pt" pitchFamily="2" charset="77"/>
+            </a:endParaRPr>
+          </a:p>
+        </p:txBody>
+      </p:sp>
+      <p:sp>
+        <p:nvSpPr>
+          <p:cNvPr id="14" name="Shape 23">
+            <a:extLst>
+              <a:ext uri="{FF2B5EF4-FFF2-40B4-BE49-F238E27FC236}">
+                <a16:creationId xmlns:a16="http://schemas.microsoft.com/office/drawing/2014/main" id="{7E6276C6-75CF-5427-234E-A6B95AFAA899}"/>
+              </a:ext>
+            </a:extLst>
+          </p:cNvPr>
+          <p:cNvSpPr/>
+          <p:nvPr/>
+        </p:nvSpPr>
+        <p:spPr>
+          <a:xfrm>
+            <a:off x="868675" y="2292129"/>
+            <a:ext cx="11725200" cy="6951522"/>
+          </a:xfrm>
+          <a:prstGeom prst="roundRect">
+            <a:avLst>
+              <a:gd name="adj" fmla="val 2451"/>
+            </a:avLst>
+          </a:prstGeom>
+          <a:solidFill>
+            <a:srgbClr val="FFFFFF"/>
+          </a:solidFill>
+          <a:ln w="9525">
+            <a:solidFill>
+              <a:srgbClr val="000000">
+                <a:alpha val="10000"/>
+              </a:srgbClr>
+            </a:solidFill>
+            <a:prstDash val="solid"/>
+          </a:ln>
+        </p:spPr>
+        <p:txBody>
+          <a:bodyPr/>
+          <a:lstStyle/>
+          <a:p>
+            <a:r>
+              <a:rPr lang="en-US" kern="0" spc="30" dirty="0">
+                <a:solidFill>
+                  <a:srgbClr val="240F45"/>
+                </a:solidFill>
+                <a:latin typeface="DM Sans 14pt" pitchFamily="2" charset="77"/>
+                <a:ea typeface="monospace" pitchFamily="34" charset="-122"/>
+                <a:cs typeface="monospace" pitchFamily="34" charset="-120"/>
+              </a:rPr>
+              <a:t>{{</a:t>
+            </a:r>
+            <a:r>
+              <a:rPr lang="en-US" kern="0" spc="30" dirty="0" err="1">
+                <a:solidFill>
+                  <a:srgbClr val="240F45"/>
+                </a:solidFill>
+                <a:latin typeface="DM Sans 14pt" pitchFamily="2" charset="77"/>
+                <a:ea typeface="monospace" pitchFamily="34" charset="-122"/>
+                <a:cs typeface="monospace" pitchFamily="34" charset="-120"/>
+              </a:rPr>
+              <a:t>chart:salary_by_occupation</a:t>
+            </a:r>
+            <a:r>
+              <a:rPr lang="en-US" kern="0" spc="30" dirty="0">
+                <a:solidFill>
+                  <a:srgbClr val="240F45"/>
+                </a:solidFill>
+                <a:latin typeface="DM Sans 14pt" pitchFamily="2" charset="77"/>
+                <a:ea typeface="monospace" pitchFamily="34" charset="-122"/>
+                <a:cs typeface="monospace" pitchFamily="34" charset="-120"/>
+              </a:rPr>
+              <a:t>}}</a:t>
+            </a:r>
+            <a:endParaRPr lang="en-US" dirty="0">
+              <a:latin typeface="DM Sans 14pt" pitchFamily="2" charset="77"/>
+            </a:endParaRPr>
+          </a:p>
+        </p:txBody>
+      </p:sp>
+      <p:sp>
+        <p:nvSpPr>
+          <p:cNvPr id="16" name="Rectangle 15">
+            <a:extLst>
+              <a:ext uri="{FF2B5EF4-FFF2-40B4-BE49-F238E27FC236}">
+                <a16:creationId xmlns:a16="http://schemas.microsoft.com/office/drawing/2014/main" id="{D7941C27-1F22-6A0D-3C82-2FA9F1BC078A}"/>
+              </a:ext>
+            </a:extLst>
+          </p:cNvPr>
+          <p:cNvSpPr/>
+          <p:nvPr/>
+        </p:nvSpPr>
+        <p:spPr>
+          <a:xfrm>
+            <a:off x="868675" y="1866899"/>
+            <a:ext cx="8009197" cy="428400"/>
+          </a:xfrm>
+          <a:prstGeom prst="rect">
+            <a:avLst/>
+          </a:prstGeom>
+          <a:noFill/>
+          <a:ln>
+            <a:noFill/>
+          </a:ln>
+        </p:spPr>
+        <p:style>
+          <a:lnRef idx="2">
+            <a:schemeClr val="accent1">
+              <a:shade val="15000"/>
+            </a:schemeClr>
+          </a:lnRef>
+          <a:fillRef idx="1">
+            <a:schemeClr val="accent1"/>
+          </a:fillRef>
+          <a:effectRef idx="0">
+            <a:schemeClr val="accent1"/>
+          </a:effectRef>
+          <a:fontRef idx="minor">
+            <a:schemeClr val="lt1"/>
+          </a:fontRef>
+        </p:style>
+        <p:txBody>
+          <a:bodyPr lIns="0" tIns="0" rIns="0" bIns="0" rtlCol="0" anchor="ctr"/>
+          <a:lstStyle/>
+          <a:p>
+            <a:r>
+              <a:rPr lang="en-US" kern="0" spc="84" dirty="0">
+                <a:solidFill>
+                  <a:srgbClr val="111111">
+                    <a:alpha val="63000"/>
+                  </a:srgbClr>
+                </a:solidFill>
+                <a:latin typeface="DM Sans 14pt" pitchFamily="2" charset="77"/>
+                <a:ea typeface="Arial" pitchFamily="34" charset="-122"/>
+                <a:cs typeface="Arial" pitchFamily="34" charset="-120"/>
+              </a:rPr>
+              <a:t>Top 10 occupations · salary benchmark</a:t>
+            </a:r>
+            <a:endParaRPr lang="en-US" dirty="0">
+              <a:latin typeface="DM Sans 14pt" pitchFamily="2" charset="77"/>
+            </a:endParaRPr>
+          </a:p>
+        </p:txBody>
+      </p:sp>
+      <p:sp>
+        <p:nvSpPr>
+          <p:cNvPr id="5" name="Footer Placeholder 1">
+            <a:extLst>
+              <a:ext uri="{FF2B5EF4-FFF2-40B4-BE49-F238E27FC236}">
+                <a16:creationId xmlns:a16="http://schemas.microsoft.com/office/drawing/2014/main" id="{0011CFF4-EA6B-87CF-5D66-EFA3703E982E}"/>
+              </a:ext>
+            </a:extLst>
+          </p:cNvPr>
+          <p:cNvSpPr txBox="1">
+            <a:spLocks/>
+          </p:cNvSpPr>
+          <p:nvPr/>
+        </p:nvSpPr>
+        <p:spPr>
+          <a:xfrm>
+            <a:off x="17233255" y="9753300"/>
+            <a:ext cx="522000" cy="190800"/>
+          </a:xfrm>
+          <a:prstGeom prst="rect">
+            <a:avLst/>
+          </a:prstGeom>
+        </p:spPr>
+        <p:txBody>
+          <a:bodyPr vert="horz" lIns="36000" tIns="36000" rIns="36000" bIns="36000" rtlCol="0" anchor="ctr"/>
+          <a:lstStyle>
+            <a:lvl1pPr marL="0" algn="l" defTabSz="914400" rtl="0" eaLnBrk="1" latinLnBrk="0" hangingPunct="1">
+              <a:defRPr sz="900" kern="1200">
+                <a:solidFill>
+                  <a:srgbClr val="E8E0F2"/>
+                </a:solidFill>
+                <a:latin typeface="DM Sans 14pt" pitchFamily="2" charset="77"/>
+                <a:ea typeface="+mn-ea"/>
+                <a:cs typeface="+mn-cs"/>
+              </a:defRPr>
+            </a:lvl1pPr>
+            <a:lvl2pPr marL="457200" algn="l" defTabSz="914400" rtl="0" eaLnBrk="1" latinLnBrk="0" hangingPunct="1">
+              <a:defRPr sz="1800" kern="1200">
+                <a:solidFill>
+                  <a:schemeClr val="tx1"/>
+                </a:solidFill>
+                <a:latin typeface="+mn-lt"/>
+                <a:ea typeface="+mn-ea"/>
+                <a:cs typeface="+mn-cs"/>
+              </a:defRPr>
+            </a:lvl2pPr>
+            <a:lvl3pPr marL="914400" algn="l" defTabSz="914400" rtl="0" eaLnBrk="1" latinLnBrk="0" hangingPunct="1">
+              <a:defRPr sz="1800" kern="1200">
+                <a:solidFill>
+                  <a:schemeClr val="tx1"/>
+                </a:solidFill>
+                <a:latin typeface="+mn-lt"/>
+                <a:ea typeface="+mn-ea"/>
+                <a:cs typeface="+mn-cs"/>
+              </a:defRPr>
+            </a:lvl3pPr>
+            <a:lvl4pPr marL="1371600" algn="l" defTabSz="914400" rtl="0" eaLnBrk="1" latinLnBrk="0" hangingPunct="1">
+              <a:defRPr sz="1800" kern="1200">
+                <a:solidFill>
+                  <a:schemeClr val="tx1"/>
+                </a:solidFill>
+                <a:latin typeface="+mn-lt"/>
+                <a:ea typeface="+mn-ea"/>
+                <a:cs typeface="+mn-cs"/>
+              </a:defRPr>
+            </a:lvl4pPr>
+            <a:lvl5pPr marL="1828800" algn="l" defTabSz="914400" rtl="0" eaLnBrk="1" latinLnBrk="0" hangingPunct="1">
+              <a:defRPr sz="1800" kern="1200">
+                <a:solidFill>
+                  <a:schemeClr val="tx1"/>
+                </a:solidFill>
+                <a:latin typeface="+mn-lt"/>
+                <a:ea typeface="+mn-ea"/>
+                <a:cs typeface="+mn-cs"/>
+              </a:defRPr>
+            </a:lvl5pPr>
+            <a:lvl6pPr marL="2286000" algn="l" defTabSz="914400" rtl="0" eaLnBrk="1" latinLnBrk="0" hangingPunct="1">
+              <a:defRPr sz="1800" kern="1200">
+                <a:solidFill>
+                  <a:schemeClr val="tx1"/>
+                </a:solidFill>
+                <a:latin typeface="+mn-lt"/>
+                <a:ea typeface="+mn-ea"/>
+                <a:cs typeface="+mn-cs"/>
+              </a:defRPr>
+            </a:lvl6pPr>
+            <a:lvl7pPr marL="2743200" algn="l" defTabSz="914400" rtl="0" eaLnBrk="1" latinLnBrk="0" hangingPunct="1">
+              <a:defRPr sz="1800" kern="1200">
+                <a:solidFill>
+                  <a:schemeClr val="tx1"/>
+                </a:solidFill>
+                <a:latin typeface="+mn-lt"/>
+                <a:ea typeface="+mn-ea"/>
+                <a:cs typeface="+mn-cs"/>
+              </a:defRPr>
+            </a:lvl7pPr>
+            <a:lvl8pPr marL="3200400" algn="l" defTabSz="914400" rtl="0" eaLnBrk="1" latinLnBrk="0" hangingPunct="1">
+              <a:defRPr sz="1800" kern="1200">
+                <a:solidFill>
+                  <a:schemeClr val="tx1"/>
+                </a:solidFill>
+                <a:latin typeface="+mn-lt"/>
+                <a:ea typeface="+mn-ea"/>
+                <a:cs typeface="+mn-cs"/>
+              </a:defRPr>
+            </a:lvl8pPr>
+            <a:lvl9pPr marL="3657600" algn="l" defTabSz="914400" rtl="0" eaLnBrk="1" latinLnBrk="0" hangingPunct="1">
+              <a:defRPr sz="1800" kern="1200">
+                <a:solidFill>
+                  <a:schemeClr val="tx1"/>
+                </a:solidFill>
+                <a:latin typeface="+mn-lt"/>
+                <a:ea typeface="+mn-ea"/>
+                <a:cs typeface="+mn-cs"/>
+              </a:defRPr>
+            </a:lvl9pPr>
+          </a:lstStyle>
+          <a:p>
+            <a:r>
+              <a:rPr lang="en-GB" dirty="0">
+                <a:solidFill>
+                  <a:srgbClr val="757575"/>
+                </a:solidFill>
+              </a:rPr>
+              <a:t>{{</a:t>
+            </a:r>
+            <a:r>
+              <a:rPr lang="en-GB" dirty="0" err="1">
+                <a:solidFill>
+                  <a:srgbClr val="757575"/>
+                </a:solidFill>
+              </a:rPr>
+              <a:t>slide_number</a:t>
+            </a:r>
+            <a:r>
+              <a:rPr lang="en-GB" dirty="0">
+                <a:solidFill>
+                  <a:srgbClr val="757575"/>
+                </a:solidFill>
+              </a:rPr>
+              <a:t>}} / {{</a:t>
+            </a:r>
+            <a:r>
+              <a:rPr lang="en-GB" dirty="0" err="1">
+                <a:solidFill>
+                  <a:srgbClr val="757575"/>
+                </a:solidFill>
+              </a:rPr>
+              <a:t>total_slides</a:t>
+            </a:r>
+            <a:r>
+              <a:rPr lang="en-GB" dirty="0">
+                <a:solidFill>
+                  <a:srgbClr val="757575"/>
+                </a:solidFill>
+              </a:rPr>
+              <a:t>}}</a:t>
+            </a:r>
+          </a:p>
+        </p:txBody>
+      </p:sp>
+      <p:sp>
+        <p:nvSpPr>
+          <p:cNvPr id="8" name="Shape 28">
+            <a:extLst>
+              <a:ext uri="{FF2B5EF4-FFF2-40B4-BE49-F238E27FC236}">
+                <a16:creationId xmlns:a16="http://schemas.microsoft.com/office/drawing/2014/main" id="{5D19BA13-C8A8-47B4-D449-BB8BDE721A67}"/>
+              </a:ext>
+            </a:extLst>
+          </p:cNvPr>
+          <p:cNvSpPr/>
+          <p:nvPr/>
+        </p:nvSpPr>
+        <p:spPr>
+          <a:xfrm>
+            <a:off x="12995755" y="1866899"/>
+            <a:ext cx="4701600" cy="1188000"/>
+          </a:xfrm>
+          <a:prstGeom prst="roundRect">
+            <a:avLst>
+              <a:gd name="adj" fmla="val 6000"/>
+            </a:avLst>
+          </a:prstGeom>
+          <a:solidFill>
+            <a:srgbClr val="643791">
+              <a:alpha val="8000"/>
+            </a:srgbClr>
+          </a:solidFill>
+          <a:ln/>
+        </p:spPr>
+        <p:txBody>
+          <a:bodyPr/>
+          <a:lstStyle/>
+          <a:p>
+            <a:pPr>
+              <a:lnSpc>
+                <a:spcPct val="110000"/>
+              </a:lnSpc>
+            </a:pPr>
+            <a:r>
+              <a:rPr lang="en-GB" sz="1400" dirty="0">
+                <a:solidFill>
+                  <a:srgbClr val="643791"/>
+                </a:solidFill>
+                <a:latin typeface="DM Sans 14pt" pitchFamily="2" charset="77"/>
+                <a:cs typeface="Arial" pitchFamily="34" charset="-120"/>
+              </a:rPr>
+              <a:t>{{</a:t>
+            </a:r>
+            <a:r>
+              <a:rPr lang="en-GB" sz="1400" dirty="0" err="1">
+                <a:solidFill>
+                  <a:srgbClr val="643791"/>
+                </a:solidFill>
+                <a:latin typeface="DM Sans 14pt" pitchFamily="2" charset="77"/>
+                <a:cs typeface="Arial" pitchFamily="34" charset="-120"/>
+              </a:rPr>
+              <a:t>chart_explainer_salary_by_occupation</a:t>
+            </a:r>
+            <a:r>
+              <a:rPr lang="en-GB" sz="1400" dirty="0">
+                <a:solidFill>
+                  <a:srgbClr val="643791"/>
+                </a:solidFill>
+                <a:latin typeface="DM Sans 14pt" pitchFamily="2" charset="77"/>
+                <a:cs typeface="Arial" pitchFamily="34" charset="-120"/>
+              </a:rPr>
+              <a:t>}}</a:t>
+            </a:r>
+          </a:p>
+        </p:txBody>
+      </p:sp>
+      <p:sp>
+        <p:nvSpPr>
+          <p:cNvPr id="11" name="Text 27">
+            <a:extLst>
+              <a:ext uri="{FF2B5EF4-FFF2-40B4-BE49-F238E27FC236}">
+                <a16:creationId xmlns:a16="http://schemas.microsoft.com/office/drawing/2014/main" id="{D6A29D89-A77D-0FD1-BDAA-9F510BFB5E88}"/>
+              </a:ext>
+            </a:extLst>
+          </p:cNvPr>
+          <p:cNvSpPr/>
+          <p:nvPr/>
+        </p:nvSpPr>
+        <p:spPr>
+          <a:xfrm>
+            <a:off x="12995755" y="3259384"/>
+            <a:ext cx="4701600" cy="488865"/>
+          </a:xfrm>
+          <a:prstGeom prst="rect">
+            <a:avLst/>
+          </a:prstGeom>
+          <a:noFill/>
+          <a:ln/>
+        </p:spPr>
+        <p:txBody>
+          <a:bodyPr wrap="square" lIns="25400" tIns="25400" rIns="25400" bIns="25400" rtlCol="0" anchor="t">
+            <a:normAutofit/>
+          </a:bodyPr>
+          <a:lstStyle/>
+          <a:p>
+            <a:pPr marL="0" indent="0" algn="l">
+              <a:buNone/>
+            </a:pPr>
+            <a:r>
+              <a:rPr lang="en-US" sz="2400" b="1" kern="0" spc="368" dirty="0">
+                <a:solidFill>
+                  <a:srgbClr val="643791"/>
+                </a:solidFill>
+                <a:latin typeface="DM Sans 14pt" pitchFamily="2" charset="77"/>
+                <a:ea typeface="Arial" pitchFamily="34" charset="-122"/>
+                <a:cs typeface="Arial" pitchFamily="34" charset="-120"/>
+              </a:rPr>
+              <a:t>COMMENTARY</a:t>
+            </a:r>
+            <a:endParaRPr lang="en-US" sz="2400" b="1" dirty="0">
+              <a:latin typeface="DM Sans 14pt" pitchFamily="2" charset="77"/>
+            </a:endParaRPr>
+          </a:p>
+        </p:txBody>
+      </p:sp>
+      <p:sp>
+        <p:nvSpPr>
+          <p:cNvPr id="17" name="Shape 28">
+            <a:extLst>
+              <a:ext uri="{FF2B5EF4-FFF2-40B4-BE49-F238E27FC236}">
+                <a16:creationId xmlns:a16="http://schemas.microsoft.com/office/drawing/2014/main" id="{D26B6FB8-984A-C032-5326-B6B169C26EFB}"/>
+              </a:ext>
+            </a:extLst>
+          </p:cNvPr>
+          <p:cNvSpPr/>
+          <p:nvPr/>
+        </p:nvSpPr>
+        <p:spPr>
+          <a:xfrm>
+            <a:off x="12995755" y="3748249"/>
+            <a:ext cx="4701600" cy="5606765"/>
+          </a:xfrm>
+          <a:prstGeom prst="roundRect">
+            <a:avLst>
+              <a:gd name="adj" fmla="val 3000"/>
+            </a:avLst>
+          </a:prstGeom>
+          <a:solidFill>
+            <a:srgbClr val="643791">
+              <a:alpha val="8000"/>
+            </a:srgbClr>
+          </a:solidFill>
+          <a:ln/>
+        </p:spPr>
+        <p:txBody>
+          <a:bodyPr/>
+          <a:lstStyle/>
+          <a:p>
+            <a:r>
+              <a:rPr lang="en-GB" sz="1400" dirty="0">
+                <a:solidFill>
+                  <a:srgbClr val="643791"/>
+                </a:solidFill>
+                <a:latin typeface="DM Sans 14pt" pitchFamily="2" charset="77"/>
+                <a:cs typeface="Arial" pitchFamily="34" charset="-120"/>
+              </a:rPr>
+              <a:t>{{</a:t>
+            </a:r>
+            <a:r>
+              <a:rPr lang="en-GB" sz="1400" dirty="0" err="1">
+                <a:solidFill>
+                  <a:srgbClr val="643791"/>
+                </a:solidFill>
+                <a:latin typeface="DM Sans 14pt" pitchFamily="2" charset="77"/>
+                <a:cs typeface="Arial" pitchFamily="34" charset="-120"/>
+              </a:rPr>
+              <a:t>commentary_salary_</a:t>
+            </a:r>
+            <a:r>
+              <a:rPr lang="en-GB" sz="1400" err="1">
+                <a:solidFill>
+                  <a:srgbClr val="643791"/>
+                </a:solidFill>
+                <a:latin typeface="DM Sans 14pt" pitchFamily="2" charset="77"/>
+                <a:cs typeface="Arial" pitchFamily="34" charset="-120"/>
+              </a:rPr>
+              <a:t>intro</a:t>
+            </a:r>
+            <a:r>
+              <a:rPr lang="en-GB" sz="1400">
+                <a:solidFill>
+                  <a:srgbClr val="643791"/>
+                </a:solidFill>
+                <a:latin typeface="DM Sans 14pt" pitchFamily="2" charset="77"/>
+                <a:cs typeface="Arial" pitchFamily="34" charset="-120"/>
+              </a:rPr>
+              <a:t>}}</a:t>
+            </a:r>
+            <a:endParaRPr lang="en-US" sz="1400" dirty="0">
+              <a:solidFill>
+                <a:srgbClr val="643791"/>
+              </a:solidFill>
+              <a:latin typeface="DM Sans 14pt" pitchFamily="2" charset="77"/>
+              <a:cs typeface="Arial" pitchFamily="34" charset="-120"/>
+            </a:endParaRPr>
+          </a:p>
+          <a:p>
+            <a:endParaRPr lang="en-US" sz="1400" dirty="0">
+              <a:solidFill>
+                <a:srgbClr val="643791"/>
+              </a:solidFill>
+              <a:latin typeface="DM Sans 14pt" pitchFamily="2" charset="77"/>
+              <a:cs typeface="Arial" pitchFamily="34" charset="-120"/>
+            </a:endParaRPr>
+          </a:p>
+          <a:p>
+            <a:r>
+              <a:rPr lang="en-US" sz="1400">
+                <a:solidFill>
+                  <a:srgbClr val="643791"/>
+                </a:solidFill>
+                <a:latin typeface="DM Sans 14pt" pitchFamily="2" charset="77"/>
+                <a:cs typeface="Arial" pitchFamily="34" charset="-120"/>
+              </a:rPr>
+              <a:t>{{commentary</a:t>
+            </a:r>
+            <a:r>
+              <a:rPr lang="en-US" sz="1400" dirty="0">
+                <a:solidFill>
+                  <a:srgbClr val="643791"/>
+                </a:solidFill>
+                <a:latin typeface="DM Sans 14pt" pitchFamily="2" charset="77"/>
+                <a:cs typeface="Arial" pitchFamily="34" charset="-120"/>
+              </a:rPr>
+              <a:t>_</a:t>
+            </a:r>
+            <a:r>
+              <a:rPr lang="en-US" sz="1400">
+                <a:solidFill>
+                  <a:srgbClr val="643791"/>
+                </a:solidFill>
+                <a:latin typeface="DM Sans 14pt" pitchFamily="2" charset="77"/>
+                <a:cs typeface="Arial" pitchFamily="34" charset="-120"/>
+              </a:rPr>
+              <a:t>salary_</a:t>
+            </a:r>
+            <a:r>
+              <a:rPr lang="en-US" sz="1400" dirty="0">
+                <a:solidFill>
+                  <a:srgbClr val="643791"/>
+                </a:solidFill>
+                <a:latin typeface="DM Sans 14pt" pitchFamily="2" charset="77"/>
+                <a:cs typeface="Arial" pitchFamily="34" charset="-120"/>
+              </a:rPr>
+              <a:t>point_</a:t>
+            </a:r>
+            <a:r>
+              <a:rPr lang="en-US" sz="1400">
+                <a:solidFill>
+                  <a:srgbClr val="643791"/>
+                </a:solidFill>
+                <a:latin typeface="DM Sans 14pt" pitchFamily="2" charset="77"/>
+                <a:cs typeface="Arial" pitchFamily="34" charset="-120"/>
+              </a:rPr>
+              <a:t>1}}</a:t>
+            </a:r>
+            <a:endParaRPr lang="en-US" sz="1400" dirty="0">
+              <a:solidFill>
+                <a:srgbClr val="643791"/>
+              </a:solidFill>
+              <a:latin typeface="DM Sans 14pt" pitchFamily="2" charset="77"/>
+              <a:cs typeface="Arial" pitchFamily="34" charset="-120"/>
+            </a:endParaRPr>
+          </a:p>
+          <a:p>
+            <a:endParaRPr lang="en-US" sz="1400" dirty="0">
+              <a:solidFill>
+                <a:srgbClr val="643791"/>
+              </a:solidFill>
+              <a:latin typeface="DM Sans 14pt" pitchFamily="2" charset="77"/>
+              <a:cs typeface="Arial" pitchFamily="34" charset="-120"/>
+            </a:endParaRPr>
+          </a:p>
+          <a:p>
+            <a:r>
+              <a:rPr lang="en-US" sz="1400">
+                <a:solidFill>
+                  <a:srgbClr val="643791"/>
+                </a:solidFill>
+                <a:latin typeface="DM Sans 14pt" pitchFamily="2" charset="77"/>
+                <a:cs typeface="Arial" pitchFamily="34" charset="-120"/>
+              </a:rPr>
+              <a:t>{{commentary_</a:t>
+            </a:r>
+            <a:r>
+              <a:rPr lang="en-US" sz="1400" dirty="0">
+                <a:solidFill>
+                  <a:srgbClr val="643791"/>
+                </a:solidFill>
+                <a:latin typeface="DM Sans 14pt" pitchFamily="2" charset="77"/>
+                <a:cs typeface="Arial" pitchFamily="34" charset="-120"/>
+              </a:rPr>
+              <a:t> </a:t>
+            </a:r>
+            <a:r>
+              <a:rPr lang="en-US" sz="1400">
+                <a:solidFill>
+                  <a:srgbClr val="643791"/>
+                </a:solidFill>
+                <a:latin typeface="DM Sans 14pt" pitchFamily="2" charset="77"/>
+                <a:cs typeface="Arial" pitchFamily="34" charset="-120"/>
+              </a:rPr>
+              <a:t>salary _</a:t>
+            </a:r>
+            <a:r>
+              <a:rPr lang="en-US" sz="1400" dirty="0">
+                <a:solidFill>
+                  <a:srgbClr val="643791"/>
+                </a:solidFill>
+                <a:latin typeface="DM Sans 14pt" pitchFamily="2" charset="77"/>
+                <a:cs typeface="Arial" pitchFamily="34" charset="-120"/>
+              </a:rPr>
+              <a:t>point_</a:t>
+            </a:r>
+            <a:r>
+              <a:rPr lang="en-US" sz="1400">
+                <a:solidFill>
+                  <a:srgbClr val="643791"/>
+                </a:solidFill>
+                <a:latin typeface="DM Sans 14pt" pitchFamily="2" charset="77"/>
+                <a:cs typeface="Arial" pitchFamily="34" charset="-120"/>
+              </a:rPr>
+              <a:t>2}}</a:t>
+            </a:r>
+            <a:endParaRPr lang="en-US" sz="1400" dirty="0">
+              <a:solidFill>
+                <a:srgbClr val="643791"/>
+              </a:solidFill>
+              <a:latin typeface="DM Sans 14pt" pitchFamily="2" charset="77"/>
+              <a:cs typeface="Arial" pitchFamily="34" charset="-120"/>
+            </a:endParaRPr>
+          </a:p>
+          <a:p>
+            <a:endParaRPr lang="en-US" sz="1400" dirty="0">
+              <a:solidFill>
+                <a:srgbClr val="643791"/>
+              </a:solidFill>
+              <a:latin typeface="DM Sans 14pt" pitchFamily="2" charset="77"/>
+              <a:cs typeface="Arial" pitchFamily="34" charset="-120"/>
+            </a:endParaRPr>
+          </a:p>
+          <a:p>
+            <a:r>
+              <a:rPr lang="en-US" sz="1400">
+                <a:solidFill>
+                  <a:srgbClr val="643791"/>
+                </a:solidFill>
+                <a:latin typeface="DM Sans 14pt" pitchFamily="2" charset="77"/>
+                <a:cs typeface="Arial" pitchFamily="34" charset="-120"/>
+              </a:rPr>
+              <a:t>{{commentary_</a:t>
+            </a:r>
+            <a:r>
+              <a:rPr lang="en-US" sz="1400" dirty="0">
+                <a:solidFill>
+                  <a:srgbClr val="643791"/>
+                </a:solidFill>
+                <a:latin typeface="DM Sans 14pt" pitchFamily="2" charset="77"/>
+                <a:cs typeface="Arial" pitchFamily="34" charset="-120"/>
+              </a:rPr>
+              <a:t> </a:t>
+            </a:r>
+            <a:r>
+              <a:rPr lang="en-US" sz="1400">
+                <a:solidFill>
+                  <a:srgbClr val="643791"/>
+                </a:solidFill>
+                <a:latin typeface="DM Sans 14pt" pitchFamily="2" charset="77"/>
+                <a:cs typeface="Arial" pitchFamily="34" charset="-120"/>
+              </a:rPr>
+              <a:t>salary _</a:t>
+            </a:r>
+            <a:r>
+              <a:rPr lang="en-US" sz="1400" dirty="0">
+                <a:solidFill>
+                  <a:srgbClr val="643791"/>
+                </a:solidFill>
+                <a:latin typeface="DM Sans 14pt" pitchFamily="2" charset="77"/>
+                <a:cs typeface="Arial" pitchFamily="34" charset="-120"/>
+              </a:rPr>
+              <a:t>point</a:t>
+            </a:r>
+            <a:r>
+              <a:rPr lang="en-US" sz="1400">
+                <a:solidFill>
+                  <a:srgbClr val="643791"/>
+                </a:solidFill>
+                <a:latin typeface="DM Sans 14pt" pitchFamily="2" charset="77"/>
+                <a:cs typeface="Arial" pitchFamily="34" charset="-120"/>
+              </a:rPr>
+              <a:t>_3}}</a:t>
+            </a:r>
+            <a:endParaRPr lang="en-US" sz="1400" dirty="0">
+              <a:solidFill>
+                <a:srgbClr val="643791"/>
+              </a:solidFill>
+              <a:latin typeface="DM Sans 14pt" pitchFamily="2" charset="77"/>
+              <a:cs typeface="Arial" pitchFamily="34" charset="-120"/>
+            </a:endParaRPr>
+          </a:p>
+        </p:txBody>
+      </p:sp>
+    </p:spTree>
+    <p:extLst>
+      <p:ext uri="{BB962C8B-B14F-4D97-AF65-F5344CB8AC3E}">
+        <p14:creationId xmlns:p14="http://schemas.microsoft.com/office/powerpoint/2010/main" val="2483968473"/>
+      </p:ext>
+    </p:extLst>
+  </p:cSld>
+  <p:clrMapOvr>
+    <a:masterClrMapping/>
+  </p:clrMapOvr>
+</p:sld>
+</file>
+
+<file path=ppt/slides/slide8.xml><?xml version="1.0" encoding="utf-8"?>
 <p:sld xmlns:a="http://schemas.openxmlformats.org/drawingml/2006/main" xmlns:r="http://schemas.openxmlformats.org/officeDocument/2006/relationships" xmlns:p="http://schemas.openxmlformats.org/presentationml/2006/main">
   <p:cSld name="Slide 7">
     <p:bg>
@@ -8439,7 +9720,7 @@
         </p:nvSpPr>
         <p:spPr>
           <a:xfrm>
-            <a:off x="1143000" y="1143000"/>
+            <a:off x="762000" y="1143000"/>
             <a:ext cx="16482060" cy="209550"/>
           </a:xfrm>
           <a:prstGeom prst="rect">
@@ -8482,7 +9763,7 @@
         </p:nvSpPr>
         <p:spPr>
           <a:xfrm>
-            <a:off x="1143000" y="1695450"/>
+            <a:off x="762000" y="1695450"/>
             <a:ext cx="13735050" cy="3124200"/>
           </a:xfrm>
           <a:prstGeom prst="rect">
@@ -8533,14 +9814,63 @@
       </p:sp>
       <p:sp>
         <p:nvSpPr>
-          <p:cNvPr id="7" name="Shape 5"/>
-          <p:cNvSpPr/>
-          <p:nvPr/>
-        </p:nvSpPr>
-        <p:spPr>
-          <a:xfrm>
-            <a:off x="1143000" y="7117110"/>
-            <a:ext cx="12797287" cy="2026890"/>
+          <p:cNvPr id="21" name="Text 19"/>
+          <p:cNvSpPr/>
+          <p:nvPr/>
+        </p:nvSpPr>
+        <p:spPr>
+          <a:xfrm>
+            <a:off x="609600" y="9734550"/>
+            <a:ext cx="2881908" cy="209550"/>
+          </a:xfrm>
+          <a:prstGeom prst="rect">
+            <a:avLst/>
+          </a:prstGeom>
+          <a:noFill/>
+          <a:ln/>
+        </p:spPr>
+        <p:txBody>
+          <a:bodyPr wrap="square" lIns="25400" tIns="25400" rIns="25400" bIns="25400" rtlCol="0" anchor="t">
+            <a:normAutofit fontScale="92500" lnSpcReduction="10000"/>
+          </a:bodyPr>
+          <a:lstStyle/>
+          <a:p>
+            <a:pPr marL="0" indent="0" algn="l">
+              <a:buNone/>
+            </a:pPr>
+            <a:r>
+              <a:rPr lang="en-US" sz="1200" kern="0" spc="360" dirty="0">
+                <a:solidFill>
+                  <a:srgbClr val="E5FF6E"/>
+                </a:solidFill>
+                <a:latin typeface="DM Sans 14pt" pitchFamily="2" charset="77"/>
+                <a:ea typeface="Arial" pitchFamily="34" charset="-122"/>
+                <a:cs typeface="Arial" pitchFamily="34" charset="-120"/>
+              </a:rPr>
+              <a:t>GO PLACES. GO PUBLIC.</a:t>
+            </a:r>
+            <a:endParaRPr lang="en-US" sz="1200" dirty="0">
+              <a:latin typeface="DM Sans 14pt" pitchFamily="2" charset="77"/>
+            </a:endParaRPr>
+          </a:p>
+        </p:txBody>
+      </p:sp>
+      <p:sp>
+        <p:nvSpPr>
+          <p:cNvPr id="26" name="Shape 5">
+            <a:extLst>
+              <a:ext uri="{FF2B5EF4-FFF2-40B4-BE49-F238E27FC236}">
+                <a16:creationId xmlns:a16="http://schemas.microsoft.com/office/drawing/2014/main" id="{9DDC85A7-AB8B-D8AC-56B5-4A857EACA061}"/>
+              </a:ext>
+            </a:extLst>
+          </p:cNvPr>
+          <p:cNvSpPr/>
+          <p:nvPr/>
+        </p:nvSpPr>
+        <p:spPr>
+          <a:xfrm>
+            <a:off x="762001" y="7321200"/>
+            <a:ext cx="13848182" cy="1980000"/>
           </a:xfrm>
           <a:prstGeom prst="roundRect">
             <a:avLst>
@@ -8548,7 +9878,9 @@
             </a:avLst>
           </a:prstGeom>
           <a:solidFill>
-            <a:srgbClr val="E8E0F2"/>
+            <a:srgbClr val="E8E0F2">
+              <a:alpha val="15000"/>
+            </a:srgbClr>
           </a:solidFill>
           <a:ln/>
         </p:spPr>
@@ -8557,21 +9889,30 @@
           <a:lstStyle/>
           <a:p>
             <a:endParaRPr lang="en-GB">
-              <a:latin typeface="DM Sans 14pt" pitchFamily="2" charset="77"/>
-            </a:endParaRPr>
-          </a:p>
-        </p:txBody>
-      </p:sp>
-      <p:sp>
-        <p:nvSpPr>
-          <p:cNvPr id="8" name="Text 6"/>
-          <p:cNvSpPr/>
-          <p:nvPr/>
-        </p:nvSpPr>
-        <p:spPr>
-          <a:xfrm>
-            <a:off x="1676400" y="7574310"/>
-            <a:ext cx="6632067" cy="180975"/>
+              <a:solidFill>
+                <a:srgbClr val="F1F3E2"/>
+              </a:solidFill>
+              <a:latin typeface="DM Sans 14pt" pitchFamily="2" charset="77"/>
+            </a:endParaRPr>
+          </a:p>
+        </p:txBody>
+      </p:sp>
+      <p:sp>
+        <p:nvSpPr>
+          <p:cNvPr id="27" name="Text 6">
+            <a:extLst>
+              <a:ext uri="{FF2B5EF4-FFF2-40B4-BE49-F238E27FC236}">
+                <a16:creationId xmlns:a16="http://schemas.microsoft.com/office/drawing/2014/main" id="{6E0D9A79-C9BA-D4A1-A9E2-D9484A4D7511}"/>
+              </a:ext>
+            </a:extLst>
+          </p:cNvPr>
+          <p:cNvSpPr/>
+          <p:nvPr/>
+        </p:nvSpPr>
+        <p:spPr>
+          <a:xfrm>
+            <a:off x="1031999" y="7591200"/>
+            <a:ext cx="6125495" cy="180975"/>
           </a:xfrm>
           <a:prstGeom prst="rect">
             <a:avLst/>
@@ -8591,7 +9932,7 @@
             <a:r>
               <a:rPr lang="en-US" sz="975" kern="0" spc="293" dirty="0">
                 <a:solidFill>
-                  <a:srgbClr val="643791"/>
+                  <a:srgbClr val="F1F3E2"/>
                 </a:solidFill>
                 <a:latin typeface="DM Sans 14pt" pitchFamily="2" charset="77"/>
                 <a:ea typeface="Arial" pitchFamily="34" charset="-122"/>
@@ -8600,31 +9941,38 @@
               <a:t>YOUR ACCOUNT TEAM</a:t>
             </a:r>
             <a:endParaRPr lang="en-US" sz="975" dirty="0">
-              <a:latin typeface="DM Sans 14pt" pitchFamily="2" charset="77"/>
-            </a:endParaRPr>
-          </a:p>
-        </p:txBody>
-      </p:sp>
-      <p:sp>
-        <p:nvSpPr>
-          <p:cNvPr id="9" name="Shape 7"/>
-          <p:cNvSpPr/>
-          <p:nvPr/>
-        </p:nvSpPr>
-        <p:spPr>
-          <a:xfrm>
-            <a:off x="1676400" y="7831485"/>
+              <a:solidFill>
+                <a:srgbClr val="F1F3E2"/>
+              </a:solidFill>
+              <a:latin typeface="DM Sans 14pt" pitchFamily="2" charset="77"/>
+            </a:endParaRPr>
+          </a:p>
+        </p:txBody>
+      </p:sp>
+      <p:sp>
+        <p:nvSpPr>
+          <p:cNvPr id="28" name="Shape 7">
+            <a:extLst>
+              <a:ext uri="{FF2B5EF4-FFF2-40B4-BE49-F238E27FC236}">
+                <a16:creationId xmlns:a16="http://schemas.microsoft.com/office/drawing/2014/main" id="{834C1E1C-41FB-F94B-831B-06824C51B72D}"/>
+              </a:ext>
+            </a:extLst>
+          </p:cNvPr>
+          <p:cNvSpPr/>
+          <p:nvPr/>
+        </p:nvSpPr>
+        <p:spPr>
+          <a:xfrm>
+            <a:off x="1031999" y="7861193"/>
             <a:ext cx="6125497" cy="540990"/>
           </a:xfrm>
           <a:prstGeom prst="roundRect">
             <a:avLst>
-              <a:gd name="adj" fmla="val 7043"/>
+              <a:gd name="adj" fmla="val 15242"/>
             </a:avLst>
           </a:prstGeom>
           <a:solidFill>
-            <a:srgbClr val="643791">
-              <a:alpha val="8000"/>
-            </a:srgbClr>
+            <a:srgbClr val="643791"/>
           </a:solidFill>
           <a:ln/>
         </p:spPr>
@@ -8635,7 +9983,7 @@
             <a:r>
               <a:rPr lang="en-US" kern="0" spc="-72" dirty="0">
                 <a:solidFill>
-                  <a:srgbClr val="643791"/>
+                  <a:srgbClr val="F1F3E2"/>
                 </a:solidFill>
                 <a:latin typeface="DM Sans 14pt" pitchFamily="2" charset="77"/>
                 <a:ea typeface="Arial" pitchFamily="34" charset="-122"/>
@@ -8646,7 +9994,7 @@
             <a:r>
               <a:rPr lang="en-US" kern="0" spc="-72" dirty="0" err="1">
                 <a:solidFill>
-                  <a:srgbClr val="643791"/>
+                  <a:srgbClr val="F1F3E2"/>
                 </a:solidFill>
                 <a:latin typeface="DM Sans 14pt" pitchFamily="2" charset="77"/>
                 <a:ea typeface="Arial" pitchFamily="34" charset="-122"/>
@@ -8657,7 +10005,7 @@
             <a:r>
               <a:rPr lang="en-US" kern="0" spc="-72" dirty="0">
                 <a:solidFill>
-                  <a:srgbClr val="643791"/>
+                  <a:srgbClr val="F1F3E2"/>
                 </a:solidFill>
                 <a:latin typeface="DM Sans 14pt" pitchFamily="2" charset="77"/>
                 <a:ea typeface="Arial" pitchFamily="34" charset="-122"/>
@@ -8666,20 +10014,29 @@
               <a:t>}}</a:t>
             </a:r>
             <a:endParaRPr lang="en-US" dirty="0">
-              <a:latin typeface="DM Sans 14pt" pitchFamily="2" charset="77"/>
-            </a:endParaRPr>
-          </a:p>
-        </p:txBody>
-      </p:sp>
-      <p:sp>
-        <p:nvSpPr>
-          <p:cNvPr id="11" name="Shape 9"/>
-          <p:cNvSpPr/>
-          <p:nvPr/>
-        </p:nvSpPr>
-        <p:spPr>
-          <a:xfrm>
-            <a:off x="1676398" y="8429623"/>
+              <a:solidFill>
+                <a:srgbClr val="F1F3E2"/>
+              </a:solidFill>
+              <a:latin typeface="DM Sans 14pt" pitchFamily="2" charset="77"/>
+            </a:endParaRPr>
+          </a:p>
+        </p:txBody>
+      </p:sp>
+      <p:sp>
+        <p:nvSpPr>
+          <p:cNvPr id="29" name="Shape 9">
+            <a:extLst>
+              <a:ext uri="{FF2B5EF4-FFF2-40B4-BE49-F238E27FC236}">
+                <a16:creationId xmlns:a16="http://schemas.microsoft.com/office/drawing/2014/main" id="{E2CDD09A-BBE0-9B80-19BA-A1CB90EBDD42}"/>
+              </a:ext>
+            </a:extLst>
+          </p:cNvPr>
+          <p:cNvSpPr/>
+          <p:nvPr/>
+        </p:nvSpPr>
+        <p:spPr>
+          <a:xfrm>
+            <a:off x="1031999" y="8491200"/>
             <a:ext cx="6125497" cy="540000"/>
           </a:xfrm>
           <a:prstGeom prst="roundRect">
@@ -8688,9 +10045,7 @@
             </a:avLst>
           </a:prstGeom>
           <a:solidFill>
-            <a:srgbClr val="643791">
-              <a:alpha val="8000"/>
-            </a:srgbClr>
+            <a:srgbClr val="643791"/>
           </a:solidFill>
           <a:ln/>
         </p:spPr>
@@ -8699,9 +10054,9 @@
           <a:lstStyle/>
           <a:p>
             <a:r>
-              <a:rPr lang="en-US" dirty="0">
-                <a:solidFill>
-                  <a:srgbClr val="643791"/>
+              <a:rPr lang="en-US" sz="1400" dirty="0">
+                <a:solidFill>
+                  <a:srgbClr val="F1F3E2"/>
                 </a:solidFill>
                 <a:latin typeface="DM Sans 14pt" pitchFamily="2" charset="77"/>
                 <a:ea typeface="Arial" pitchFamily="34" charset="-122"/>
@@ -8710,9 +10065,9 @@
               <a:t>{{</a:t>
             </a:r>
             <a:r>
-              <a:rPr lang="en-US" dirty="0" err="1">
-                <a:solidFill>
-                  <a:srgbClr val="643791"/>
+              <a:rPr lang="en-US" sz="1400" dirty="0" err="1">
+                <a:solidFill>
+                  <a:srgbClr val="F1F3E2"/>
                 </a:solidFill>
                 <a:latin typeface="DM Sans 14pt" pitchFamily="2" charset="77"/>
                 <a:ea typeface="Arial" pitchFamily="34" charset="-122"/>
@@ -8721,9 +10076,9 @@
               <a:t>contact_title</a:t>
             </a:r>
             <a:r>
-              <a:rPr lang="en-US" dirty="0">
-                <a:solidFill>
-                  <a:srgbClr val="643791"/>
+              <a:rPr lang="en-US" sz="1400" dirty="0">
+                <a:solidFill>
+                  <a:srgbClr val="F1F3E2"/>
                 </a:solidFill>
                 <a:latin typeface="DM Sans 14pt" pitchFamily="2" charset="77"/>
                 <a:ea typeface="Arial" pitchFamily="34" charset="-122"/>
@@ -8731,21 +10086,30 @@
               </a:rPr>
               <a:t>}}</a:t>
             </a:r>
-            <a:endParaRPr lang="en-US" dirty="0">
-              <a:latin typeface="DM Sans 14pt" pitchFamily="2" charset="77"/>
-            </a:endParaRPr>
-          </a:p>
-        </p:txBody>
-      </p:sp>
-      <p:sp>
-        <p:nvSpPr>
-          <p:cNvPr id="13" name="Text 11"/>
-          <p:cNvSpPr/>
-          <p:nvPr/>
-        </p:nvSpPr>
-        <p:spPr>
-          <a:xfrm>
-            <a:off x="8523975" y="8016750"/>
+            <a:endParaRPr lang="en-US" sz="1400" dirty="0">
+              <a:solidFill>
+                <a:srgbClr val="F1F3E2"/>
+              </a:solidFill>
+              <a:latin typeface="DM Sans 14pt" pitchFamily="2" charset="77"/>
+            </a:endParaRPr>
+          </a:p>
+        </p:txBody>
+      </p:sp>
+      <p:sp>
+        <p:nvSpPr>
+          <p:cNvPr id="30" name="Text 11">
+            <a:extLst>
+              <a:ext uri="{FF2B5EF4-FFF2-40B4-BE49-F238E27FC236}">
+                <a16:creationId xmlns:a16="http://schemas.microsoft.com/office/drawing/2014/main" id="{DF82FE61-23A2-8A05-D965-69E389ACB73F}"/>
+              </a:ext>
+            </a:extLst>
+          </p:cNvPr>
+          <p:cNvSpPr/>
+          <p:nvPr/>
+        </p:nvSpPr>
+        <p:spPr>
+          <a:xfrm>
+            <a:off x="7607822" y="8045963"/>
             <a:ext cx="647700" cy="171450"/>
           </a:xfrm>
           <a:prstGeom prst="rect">
@@ -8766,7 +10130,7 @@
             <a:r>
               <a:rPr lang="en-US" sz="900" kern="0" spc="225" dirty="0">
                 <a:solidFill>
-                  <a:srgbClr val="643791"/>
+                  <a:srgbClr val="F1F3E2"/>
                 </a:solidFill>
                 <a:latin typeface="DM Sans 14pt" pitchFamily="2" charset="77"/>
                 <a:ea typeface="Arial" pitchFamily="34" charset="-122"/>
@@ -8775,21 +10139,30 @@
               <a:t>EMAIL</a:t>
             </a:r>
             <a:endParaRPr lang="en-US" sz="900" dirty="0">
-              <a:latin typeface="DM Sans 14pt" pitchFamily="2" charset="77"/>
-            </a:endParaRPr>
-          </a:p>
-        </p:txBody>
-      </p:sp>
-      <p:sp>
-        <p:nvSpPr>
-          <p:cNvPr id="14" name="Shape 12"/>
-          <p:cNvSpPr/>
-          <p:nvPr/>
-        </p:nvSpPr>
-        <p:spPr>
-          <a:xfrm>
-            <a:off x="9277350" y="7832475"/>
-            <a:ext cx="4276418" cy="540000"/>
+              <a:solidFill>
+                <a:srgbClr val="F1F3E2"/>
+              </a:solidFill>
+              <a:latin typeface="DM Sans 14pt" pitchFamily="2" charset="77"/>
+            </a:endParaRPr>
+          </a:p>
+        </p:txBody>
+      </p:sp>
+      <p:sp>
+        <p:nvSpPr>
+          <p:cNvPr id="31" name="Shape 12">
+            <a:extLst>
+              <a:ext uri="{FF2B5EF4-FFF2-40B4-BE49-F238E27FC236}">
+                <a16:creationId xmlns:a16="http://schemas.microsoft.com/office/drawing/2014/main" id="{6B036337-E8CE-F66E-FA10-BAD6FC17A546}"/>
+              </a:ext>
+            </a:extLst>
+          </p:cNvPr>
+          <p:cNvSpPr/>
+          <p:nvPr/>
+        </p:nvSpPr>
+        <p:spPr>
+          <a:xfrm>
+            <a:off x="8220183" y="7862183"/>
+            <a:ext cx="6120000" cy="540000"/>
           </a:xfrm>
           <a:prstGeom prst="roundRect">
             <a:avLst>
@@ -8797,9 +10170,7 @@
             </a:avLst>
           </a:prstGeom>
           <a:solidFill>
-            <a:srgbClr val="643791">
-              <a:alpha val="8000"/>
-            </a:srgbClr>
+            <a:srgbClr val="643791"/>
           </a:solidFill>
           <a:ln/>
         </p:spPr>
@@ -8810,7 +10181,7 @@
             <a:r>
               <a:rPr lang="en-US" sz="1400" dirty="0">
                 <a:solidFill>
-                  <a:srgbClr val="643791"/>
+                  <a:srgbClr val="F1F3E2"/>
                 </a:solidFill>
                 <a:latin typeface="DM Sans 14pt" pitchFamily="2" charset="77"/>
                 <a:ea typeface="Arial" pitchFamily="34" charset="-122"/>
@@ -8821,7 +10192,7 @@
             <a:r>
               <a:rPr lang="en-US" sz="1400" dirty="0" err="1">
                 <a:solidFill>
-                  <a:srgbClr val="643791"/>
+                  <a:srgbClr val="F1F3E2"/>
                 </a:solidFill>
                 <a:latin typeface="DM Sans 14pt" pitchFamily="2" charset="77"/>
                 <a:ea typeface="Arial" pitchFamily="34" charset="-122"/>
@@ -8832,7 +10203,7 @@
             <a:r>
               <a:rPr lang="en-US" sz="1400" dirty="0">
                 <a:solidFill>
-                  <a:srgbClr val="643791"/>
+                  <a:srgbClr val="F1F3E2"/>
                 </a:solidFill>
                 <a:latin typeface="DM Sans 14pt" pitchFamily="2" charset="77"/>
                 <a:ea typeface="Arial" pitchFamily="34" charset="-122"/>
@@ -8841,55 +10212,29 @@
               <a:t>}}</a:t>
             </a:r>
             <a:endParaRPr lang="en-US" sz="1400" dirty="0">
-              <a:latin typeface="DM Sans 14pt" pitchFamily="2" charset="77"/>
-            </a:endParaRPr>
-          </a:p>
-        </p:txBody>
-      </p:sp>
-      <p:sp>
-        <p:nvSpPr>
-          <p:cNvPr id="15" name="Text 13"/>
-          <p:cNvSpPr/>
-          <p:nvPr/>
-        </p:nvSpPr>
-        <p:spPr>
-          <a:xfrm>
-            <a:off x="9353550" y="7593360"/>
-            <a:ext cx="2213670" cy="540000"/>
-          </a:xfrm>
-          <a:prstGeom prst="rect">
-            <a:avLst/>
-          </a:prstGeom>
-          <a:noFill/>
-          <a:ln/>
-        </p:spPr>
-        <p:txBody>
-          <a:bodyPr wrap="square" lIns="25400" tIns="25400" rIns="25400" bIns="25400" rtlCol="0" anchor="t">
-            <a:normAutofit/>
-          </a:bodyPr>
-          <a:lstStyle/>
-          <a:p>
-            <a:pPr marL="0" indent="0" algn="l">
-              <a:lnSpc>
-                <a:spcPct val="110000"/>
-              </a:lnSpc>
-              <a:buNone/>
-            </a:pPr>
-            <a:endParaRPr lang="en-US" sz="1650" dirty="0">
-              <a:latin typeface="DM Sans 14pt" pitchFamily="2" charset="77"/>
-            </a:endParaRPr>
-          </a:p>
-        </p:txBody>
-      </p:sp>
-      <p:sp>
-        <p:nvSpPr>
-          <p:cNvPr id="16" name="Text 14"/>
-          <p:cNvSpPr/>
-          <p:nvPr/>
-        </p:nvSpPr>
-        <p:spPr>
-          <a:xfrm>
-            <a:off x="8523975" y="8613898"/>
+              <a:solidFill>
+                <a:srgbClr val="F1F3E2"/>
+              </a:solidFill>
+              <a:latin typeface="DM Sans 14pt" pitchFamily="2" charset="77"/>
+            </a:endParaRPr>
+          </a:p>
+        </p:txBody>
+      </p:sp>
+      <p:sp>
+        <p:nvSpPr>
+          <p:cNvPr id="32" name="Text 14">
+            <a:extLst>
+              <a:ext uri="{FF2B5EF4-FFF2-40B4-BE49-F238E27FC236}">
+                <a16:creationId xmlns:a16="http://schemas.microsoft.com/office/drawing/2014/main" id="{30E88130-83D4-640A-3309-33A70E1C6934}"/>
+              </a:ext>
+            </a:extLst>
+          </p:cNvPr>
+          <p:cNvSpPr/>
+          <p:nvPr/>
+        </p:nvSpPr>
+        <p:spPr>
+          <a:xfrm>
+            <a:off x="7607822" y="8675475"/>
             <a:ext cx="647700" cy="171450"/>
           </a:xfrm>
           <a:prstGeom prst="rect">
@@ -8910,7 +10255,7 @@
             <a:r>
               <a:rPr lang="en-US" sz="900" kern="0" spc="225" dirty="0">
                 <a:solidFill>
-                  <a:srgbClr val="643791"/>
+                  <a:srgbClr val="F1F3E2"/>
                 </a:solidFill>
                 <a:latin typeface="DM Sans 14pt" pitchFamily="2" charset="77"/>
                 <a:ea typeface="Arial" pitchFamily="34" charset="-122"/>
@@ -8919,21 +10264,30 @@
               <a:t>PHONE</a:t>
             </a:r>
             <a:endParaRPr lang="en-US" sz="900" dirty="0">
-              <a:latin typeface="DM Sans 14pt" pitchFamily="2" charset="77"/>
-            </a:endParaRPr>
-          </a:p>
-        </p:txBody>
-      </p:sp>
-      <p:sp>
-        <p:nvSpPr>
-          <p:cNvPr id="17" name="Shape 15"/>
-          <p:cNvSpPr/>
-          <p:nvPr/>
-        </p:nvSpPr>
-        <p:spPr>
-          <a:xfrm>
-            <a:off x="9277349" y="8429623"/>
-            <a:ext cx="4276417" cy="540000"/>
+              <a:solidFill>
+                <a:srgbClr val="F1F3E2"/>
+              </a:solidFill>
+              <a:latin typeface="DM Sans 14pt" pitchFamily="2" charset="77"/>
+            </a:endParaRPr>
+          </a:p>
+        </p:txBody>
+      </p:sp>
+      <p:sp>
+        <p:nvSpPr>
+          <p:cNvPr id="33" name="Shape 15">
+            <a:extLst>
+              <a:ext uri="{FF2B5EF4-FFF2-40B4-BE49-F238E27FC236}">
+                <a16:creationId xmlns:a16="http://schemas.microsoft.com/office/drawing/2014/main" id="{383090B5-315A-B7DE-6DD5-21C27C77FB75}"/>
+              </a:ext>
+            </a:extLst>
+          </p:cNvPr>
+          <p:cNvSpPr/>
+          <p:nvPr/>
+        </p:nvSpPr>
+        <p:spPr>
+          <a:xfrm>
+            <a:off x="8220181" y="8491200"/>
+            <a:ext cx="6120000" cy="540000"/>
           </a:xfrm>
           <a:prstGeom prst="roundRect">
             <a:avLst>
@@ -8941,9 +10295,7 @@
             </a:avLst>
           </a:prstGeom>
           <a:solidFill>
-            <a:srgbClr val="643791">
-              <a:alpha val="8000"/>
-            </a:srgbClr>
+            <a:srgbClr val="643791"/>
           </a:solidFill>
           <a:ln/>
         </p:spPr>
@@ -8954,7 +10306,7 @@
             <a:r>
               <a:rPr lang="en-US" sz="1400" dirty="0">
                 <a:solidFill>
-                  <a:srgbClr val="643791"/>
+                  <a:srgbClr val="F1F3E2"/>
                 </a:solidFill>
                 <a:latin typeface="DM Sans 14pt" pitchFamily="2" charset="77"/>
                 <a:ea typeface="Arial" pitchFamily="34" charset="-122"/>
@@ -8965,7 +10317,7 @@
             <a:r>
               <a:rPr lang="en-US" sz="1400" dirty="0" err="1">
                 <a:solidFill>
-                  <a:srgbClr val="643791"/>
+                  <a:srgbClr val="F1F3E2"/>
                 </a:solidFill>
                 <a:latin typeface="DM Sans 14pt" pitchFamily="2" charset="77"/>
                 <a:ea typeface="Arial" pitchFamily="34" charset="-122"/>
@@ -8976,7 +10328,7 @@
             <a:r>
               <a:rPr lang="en-US" sz="1400" dirty="0">
                 <a:solidFill>
-                  <a:srgbClr val="643791"/>
+                  <a:srgbClr val="F1F3E2"/>
                 </a:solidFill>
                 <a:latin typeface="DM Sans 14pt" pitchFamily="2" charset="77"/>
                 <a:ea typeface="Arial" pitchFamily="34" charset="-122"/>
@@ -8985,94 +10337,9 @@
               <a:t>}}</a:t>
             </a:r>
             <a:endParaRPr lang="en-US" sz="1400" dirty="0">
-              <a:latin typeface="DM Sans 14pt" pitchFamily="2" charset="77"/>
-            </a:endParaRPr>
-          </a:p>
-        </p:txBody>
-      </p:sp>
-      <p:sp>
-        <p:nvSpPr>
-          <p:cNvPr id="21" name="Text 19"/>
-          <p:cNvSpPr/>
-          <p:nvPr/>
-        </p:nvSpPr>
-        <p:spPr>
-          <a:xfrm>
-            <a:off x="609600" y="9734550"/>
-            <a:ext cx="2881908" cy="209550"/>
-          </a:xfrm>
-          <a:prstGeom prst="rect">
-            <a:avLst/>
-          </a:prstGeom>
-          <a:noFill/>
-          <a:ln/>
-        </p:spPr>
-        <p:txBody>
-          <a:bodyPr wrap="square" lIns="25400" tIns="25400" rIns="25400" bIns="25400" rtlCol="0" anchor="t">
-            <a:normAutofit fontScale="92500" lnSpcReduction="10000"/>
-          </a:bodyPr>
-          <a:lstStyle/>
-          <a:p>
-            <a:pPr marL="0" indent="0" algn="l">
-              <a:buNone/>
-            </a:pPr>
-            <a:r>
-              <a:rPr lang="en-US" sz="1200" kern="0" spc="360" dirty="0">
-                <a:solidFill>
-                  <a:srgbClr val="E5FF6E"/>
-                </a:solidFill>
-                <a:latin typeface="DM Sans 14pt" pitchFamily="2" charset="77"/>
-                <a:ea typeface="Arial" pitchFamily="34" charset="-122"/>
-                <a:cs typeface="Arial" pitchFamily="34" charset="-120"/>
-              </a:rPr>
-              <a:t>GO PLACES. GO PUBLIC.</a:t>
-            </a:r>
-            <a:endParaRPr lang="en-US" sz="1200" dirty="0">
-              <a:latin typeface="DM Sans 14pt" pitchFamily="2" charset="77"/>
-            </a:endParaRPr>
-          </a:p>
-        </p:txBody>
-      </p:sp>
-      <p:sp>
-        <p:nvSpPr>
-          <p:cNvPr id="22" name="Text 20"/>
-          <p:cNvSpPr/>
-          <p:nvPr/>
-        </p:nvSpPr>
-        <p:spPr>
-          <a:xfrm>
-            <a:off x="17233255" y="9744075"/>
-            <a:ext cx="521345" cy="190500"/>
-          </a:xfrm>
-          <a:prstGeom prst="rect">
-            <a:avLst/>
-          </a:prstGeom>
-          <a:noFill/>
-          <a:ln/>
-        </p:spPr>
-        <p:txBody>
-          <a:bodyPr wrap="square" lIns="25400" tIns="25400" rIns="25400" bIns="25400" rtlCol="0" anchor="t">
-            <a:normAutofit fontScale="92500" lnSpcReduction="10000"/>
-          </a:bodyPr>
-          <a:lstStyle/>
-          <a:p>
-            <a:pPr marL="0" indent="0" algn="l">
-              <a:buNone/>
-            </a:pPr>
-            <a:r>
-              <a:rPr lang="en-US" sz="1050" kern="0" spc="42" dirty="0">
-                <a:solidFill>
-                  <a:srgbClr val="FFFFFF">
-                    <a:alpha val="63000"/>
-                  </a:srgbClr>
-                </a:solidFill>
-                <a:latin typeface="DM Sans 14pt" pitchFamily="2" charset="77"/>
-                <a:ea typeface="Arial" pitchFamily="34" charset="-122"/>
-                <a:cs typeface="Arial" pitchFamily="34" charset="-120"/>
-              </a:rPr>
-              <a:t>07 / 07</a:t>
-            </a:r>
-            <a:endParaRPr lang="en-US" sz="1050" dirty="0">
+              <a:solidFill>
+                <a:srgbClr val="F1F3E2"/>
+              </a:solidFill>
               <a:latin typeface="DM Sans 14pt" pitchFamily="2" charset="77"/>
             </a:endParaRPr>
           </a:p>

--- a/Renewals.pptx
+++ b/Renewals.pptx
@@ -1082,7 +1082,7 @@
           <a:solidFill>
             <a:schemeClr val="tx1"/>
           </a:solidFill>
-          <a:latin typeface="+mj-lt"/>
+          <a:latin typeface="DM Sans"/>
           <a:ea typeface="+mj-ea"/>
           <a:cs typeface="+mj-cs"/>
         </a:defRPr>
@@ -1099,7 +1099,7 @@
           <a:solidFill>
             <a:schemeClr val="tx1"/>
           </a:solidFill>
-          <a:latin typeface="+mn-lt"/>
+          <a:latin typeface="DM Sans"/>
           <a:ea typeface="+mn-ea"/>
           <a:cs typeface="+mn-cs"/>
         </a:defRPr>
@@ -1114,7 +1114,7 @@
           <a:solidFill>
             <a:schemeClr val="tx1"/>
           </a:solidFill>
-          <a:latin typeface="+mn-lt"/>
+          <a:latin typeface="DM Sans"/>
           <a:ea typeface="+mn-ea"/>
           <a:cs typeface="+mn-cs"/>
         </a:defRPr>
@@ -1129,7 +1129,7 @@
           <a:solidFill>
             <a:schemeClr val="tx1"/>
           </a:solidFill>
-          <a:latin typeface="+mn-lt"/>
+          <a:latin typeface="DM Sans"/>
           <a:ea typeface="+mn-ea"/>
           <a:cs typeface="+mn-cs"/>
         </a:defRPr>
@@ -1144,7 +1144,7 @@
           <a:solidFill>
             <a:schemeClr val="tx1"/>
           </a:solidFill>
-          <a:latin typeface="+mn-lt"/>
+          <a:latin typeface="DM Sans"/>
           <a:ea typeface="+mn-ea"/>
           <a:cs typeface="+mn-cs"/>
         </a:defRPr>
@@ -1159,7 +1159,7 @@
           <a:solidFill>
             <a:schemeClr val="tx1"/>
           </a:solidFill>
-          <a:latin typeface="+mn-lt"/>
+          <a:latin typeface="DM Sans"/>
           <a:ea typeface="+mn-ea"/>
           <a:cs typeface="+mn-cs"/>
         </a:defRPr>
@@ -1174,7 +1174,7 @@
           <a:solidFill>
             <a:schemeClr val="tx1"/>
           </a:solidFill>
-          <a:latin typeface="+mn-lt"/>
+          <a:latin typeface="DM Sans"/>
           <a:ea typeface="+mn-ea"/>
           <a:cs typeface="+mn-cs"/>
         </a:defRPr>
@@ -1189,7 +1189,7 @@
           <a:solidFill>
             <a:schemeClr val="tx1"/>
           </a:solidFill>
-          <a:latin typeface="+mn-lt"/>
+          <a:latin typeface="DM Sans"/>
           <a:ea typeface="+mn-ea"/>
           <a:cs typeface="+mn-cs"/>
         </a:defRPr>
@@ -1204,7 +1204,7 @@
           <a:solidFill>
             <a:schemeClr val="tx1"/>
           </a:solidFill>
-          <a:latin typeface="+mn-lt"/>
+          <a:latin typeface="DM Sans"/>
           <a:ea typeface="+mn-ea"/>
           <a:cs typeface="+mn-cs"/>
         </a:defRPr>
@@ -1219,7 +1219,7 @@
           <a:solidFill>
             <a:schemeClr val="tx1"/>
           </a:solidFill>
-          <a:latin typeface="+mn-lt"/>
+          <a:latin typeface="DM Sans"/>
           <a:ea typeface="+mn-ea"/>
           <a:cs typeface="+mn-cs"/>
         </a:defRPr>
@@ -1234,7 +1234,7 @@
           <a:solidFill>
             <a:schemeClr val="tx1"/>
           </a:solidFill>
-          <a:latin typeface="+mn-lt"/>
+          <a:latin typeface="DM Sans"/>
           <a:ea typeface="+mn-ea"/>
           <a:cs typeface="+mn-cs"/>
         </a:defRPr>
@@ -1244,7 +1244,7 @@
           <a:solidFill>
             <a:schemeClr val="tx1"/>
           </a:solidFill>
-          <a:latin typeface="+mn-lt"/>
+          <a:latin typeface="DM Sans"/>
           <a:ea typeface="+mn-ea"/>
           <a:cs typeface="+mn-cs"/>
         </a:defRPr>
@@ -1254,7 +1254,7 @@
           <a:solidFill>
             <a:schemeClr val="tx1"/>
           </a:solidFill>
-          <a:latin typeface="+mn-lt"/>
+          <a:latin typeface="DM Sans"/>
           <a:ea typeface="+mn-ea"/>
           <a:cs typeface="+mn-cs"/>
         </a:defRPr>
@@ -1264,7 +1264,7 @@
           <a:solidFill>
             <a:schemeClr val="tx1"/>
           </a:solidFill>
-          <a:latin typeface="+mn-lt"/>
+          <a:latin typeface="DM Sans"/>
           <a:ea typeface="+mn-ea"/>
           <a:cs typeface="+mn-cs"/>
         </a:defRPr>
@@ -1274,7 +1274,7 @@
           <a:solidFill>
             <a:schemeClr val="tx1"/>
           </a:solidFill>
-          <a:latin typeface="+mn-lt"/>
+          <a:latin typeface="DM Sans"/>
           <a:ea typeface="+mn-ea"/>
           <a:cs typeface="+mn-cs"/>
         </a:defRPr>
@@ -1284,7 +1284,7 @@
           <a:solidFill>
             <a:schemeClr val="tx1"/>
           </a:solidFill>
-          <a:latin typeface="+mn-lt"/>
+          <a:latin typeface="DM Sans"/>
           <a:ea typeface="+mn-ea"/>
           <a:cs typeface="+mn-cs"/>
         </a:defRPr>
@@ -1294,7 +1294,7 @@
           <a:solidFill>
             <a:schemeClr val="tx1"/>
           </a:solidFill>
-          <a:latin typeface="+mn-lt"/>
+          <a:latin typeface="DM Sans"/>
           <a:ea typeface="+mn-ea"/>
           <a:cs typeface="+mn-cs"/>
         </a:defRPr>
@@ -1304,7 +1304,7 @@
           <a:solidFill>
             <a:schemeClr val="tx1"/>
           </a:solidFill>
-          <a:latin typeface="+mn-lt"/>
+          <a:latin typeface="DM Sans"/>
           <a:ea typeface="+mn-ea"/>
           <a:cs typeface="+mn-cs"/>
         </a:defRPr>
@@ -1314,7 +1314,7 @@
           <a:solidFill>
             <a:schemeClr val="tx1"/>
           </a:solidFill>
-          <a:latin typeface="+mn-lt"/>
+          <a:latin typeface="DM Sans"/>
           <a:ea typeface="+mn-ea"/>
           <a:cs typeface="+mn-cs"/>
         </a:defRPr>
@@ -1351,148 +1351,24 @@
       </p:grpSpPr>
       <p:sp>
         <p:nvSpPr>
-          <p:cNvPr id="2" name="Shape 0"/>
-          <p:cNvSpPr/>
-          <p:nvPr/>
-        </p:nvSpPr>
-        <p:spPr>
-          <a:xfrm>
-            <a:off x="12763500" y="0"/>
-            <a:ext cx="3429000" cy="3619500"/>
+          <p:cNvPr id="7" name="Text 5"/>
+          <p:cNvSpPr/>
+          <p:nvPr/>
+        </p:nvSpPr>
+        <p:spPr>
+          <a:xfrm>
+            <a:off x="1143000" y="1143000"/>
+            <a:ext cx="16482060" cy="285750"/>
           </a:xfrm>
           <a:prstGeom prst="rect">
             <a:avLst/>
           </a:prstGeom>
-          <a:solidFill>
-            <a:srgbClr val="9C67D3">
-              <a:alpha val="60000"/>
-            </a:srgbClr>
-          </a:solidFill>
-          <a:ln/>
-        </p:spPr>
-        <p:txBody>
-          <a:bodyPr/>
-          <a:lstStyle/>
-          <a:p>
-            <a:endParaRPr lang="en-GB"/>
-          </a:p>
-        </p:txBody>
-      </p:sp>
-      <p:sp>
-        <p:nvSpPr>
-          <p:cNvPr id="3" name="Shape 1"/>
-          <p:cNvSpPr/>
-          <p:nvPr/>
-        </p:nvSpPr>
-        <p:spPr>
-          <a:xfrm>
-            <a:off x="14859000" y="0"/>
-            <a:ext cx="3429000" cy="4572000"/>
-          </a:xfrm>
-          <a:prstGeom prst="rect">
-            <a:avLst/>
-          </a:prstGeom>
-          <a:solidFill>
-            <a:srgbClr val="E5FF6E"/>
-          </a:solidFill>
-          <a:ln/>
-        </p:spPr>
-        <p:txBody>
-          <a:bodyPr/>
-          <a:lstStyle/>
-          <a:p>
-            <a:endParaRPr lang="en-GB"/>
-          </a:p>
-        </p:txBody>
-      </p:sp>
-      <p:sp>
-        <p:nvSpPr>
-          <p:cNvPr id="4" name="Shape 2"/>
-          <p:cNvSpPr/>
-          <p:nvPr/>
-        </p:nvSpPr>
-        <p:spPr>
-          <a:xfrm>
-            <a:off x="609600" y="457200"/>
-            <a:ext cx="495300" cy="438150"/>
-          </a:xfrm>
-          <a:prstGeom prst="rect">
-            <a:avLst/>
-          </a:prstGeom>
-          <a:solidFill>
-            <a:srgbClr val="FFFFFF"/>
-          </a:solidFill>
-          <a:ln/>
-        </p:spPr>
-        <p:txBody>
-          <a:bodyPr/>
-          <a:lstStyle/>
-          <a:p>
-            <a:endParaRPr lang="en-GB"/>
-          </a:p>
-        </p:txBody>
-      </p:sp>
-      <p:sp>
-        <p:nvSpPr>
-          <p:cNvPr id="5" name="Text 3"/>
-          <p:cNvSpPr/>
-          <p:nvPr/>
-        </p:nvSpPr>
-        <p:spPr>
-          <a:xfrm>
-            <a:off x="571500" y="476250"/>
-            <a:ext cx="495300" cy="457200"/>
-          </a:xfrm>
-          <a:prstGeom prst="rect">
-            <a:avLst/>
-          </a:prstGeom>
           <a:noFill/>
           <a:ln/>
         </p:spPr>
         <p:txBody>
-          <a:bodyPr wrap="square" lIns="25400" tIns="25400" rIns="25400" bIns="25400" rtlCol="0" anchor="ctr">
-            <a:normAutofit/>
-          </a:bodyPr>
-          <a:lstStyle/>
-          <a:p>
-            <a:pPr marL="0" indent="0" algn="ctr">
-              <a:buNone/>
-            </a:pPr>
-            <a:r>
-              <a:rPr lang="en-US" sz="1350" b="1" kern="0" spc="-27" dirty="0">
-                <a:solidFill>
-                  <a:srgbClr val="643791"/>
-                </a:solidFill>
-                <a:latin typeface="Arial" pitchFamily="34" charset="0"/>
-                <a:ea typeface="Arial" pitchFamily="34" charset="-122"/>
-                <a:cs typeface="Arial" pitchFamily="34" charset="-120"/>
-              </a:rPr>
-              <a:t>Go</a:t>
-            </a:r>
-            <a:endParaRPr lang="en-US" sz="1350" dirty="0"/>
-          </a:p>
-        </p:txBody>
-      </p:sp>
-      <p:sp>
-        <p:nvSpPr>
-          <p:cNvPr id="6" name="Text 4"/>
-          <p:cNvSpPr/>
-          <p:nvPr/>
-        </p:nvSpPr>
-        <p:spPr>
-          <a:xfrm>
-            <a:off x="1200150" y="538163"/>
-            <a:ext cx="1561505" cy="314325"/>
-          </a:xfrm>
-          <a:prstGeom prst="rect">
-            <a:avLst/>
-          </a:prstGeom>
-          <a:noFill/>
-          <a:ln/>
-        </p:spPr>
-        <p:txBody>
           <a:bodyPr wrap="square" lIns="25400" tIns="25400" rIns="25400" bIns="25400" rtlCol="0" anchor="t">
-            <a:normAutofit/>
+            <a:normAutofit lnSpcReduction="10000"/>
           </a:bodyPr>
           <a:lstStyle/>
           <a:p>
@@ -1500,15 +1376,15 @@
               <a:buNone/>
             </a:pPr>
             <a:r>
-              <a:rPr lang="en-US" sz="1650" b="1" kern="0" spc="-16" dirty="0">
-                <a:solidFill>
-                  <a:srgbClr val="FFFFFF"/>
-                </a:solidFill>
-                <a:latin typeface="Arial" pitchFamily="34" charset="0"/>
+              <a:rPr lang="en-US" sz="1650" kern="0" spc="0" dirty="0">
+                <a:solidFill>
+                  <a:srgbClr val="E5FF6E"/>
+                </a:solidFill>
+                <a:latin typeface="DM Sans"/>
                 <a:ea typeface="Arial" pitchFamily="34" charset="-122"/>
                 <a:cs typeface="Arial" pitchFamily="34" charset="-120"/>
               </a:rPr>
-              <a:t>Jobs Go Public</a:t>
+              <a:t>Advertising report</a:t>
             </a:r>
             <a:endParaRPr lang="en-US" sz="1650" dirty="0"/>
           </a:p>
@@ -1516,14 +1392,14 @@
       </p:sp>
       <p:sp>
         <p:nvSpPr>
-          <p:cNvPr id="7" name="Text 5"/>
-          <p:cNvSpPr/>
-          <p:nvPr/>
-        </p:nvSpPr>
-        <p:spPr>
-          <a:xfrm>
-            <a:off x="1143000" y="1143000"/>
-            <a:ext cx="16482060" cy="285750"/>
+          <p:cNvPr id="8" name="Text 6"/>
+          <p:cNvSpPr/>
+          <p:nvPr/>
+        </p:nvSpPr>
+        <p:spPr>
+          <a:xfrm>
+            <a:off x="1143000" y="1543050"/>
+            <a:ext cx="11179810" cy="2762250"/>
           </a:xfrm>
           <a:prstGeom prst="rect">
             <a:avLst/>
@@ -1532,8 +1408,164 @@
           <a:ln/>
         </p:spPr>
         <p:txBody>
+          <a:bodyPr wrap="square" lIns="0" tIns="0" rIns="0" bIns="0" rtlCol="0" anchor="t">
+            <a:normAutofit/>
+          </a:bodyPr>
+          <a:lstStyle/>
+          <a:p>
+            <a:pPr>
+              <a:lnSpc>
+                <a:spcPct val="90000"/>
+              </a:lnSpc>
+            </a:pPr>
+            <a:r>
+              <a:rPr lang="en-US" sz="16500" b="1" kern="0" spc="-660" dirty="0">
+                <a:solidFill>
+                  <a:srgbClr val="FFFFFF"/>
+                </a:solidFill>
+                <a:latin typeface="DM Sans 14pt" pitchFamily="2" charset="77"/>
+                <a:ea typeface="Arial" pitchFamily="34" charset="-122"/>
+                <a:cs typeface="Arial" pitchFamily="34" charset="-120"/>
+              </a:rPr>
+              <a:t>Adver</a:t>
+            </a:r>
+            <a:r>
+              <a:rPr lang="en-US" sz="6600" b="1" kern="0" spc="-660" dirty="0">
+                <a:solidFill>
+                  <a:srgbClr val="FFFFFF"/>
+                </a:solidFill>
+                <a:latin typeface="DM Sans 14pt" pitchFamily="2" charset="77"/>
+                <a:ea typeface="Arial" pitchFamily="34" charset="-122"/>
+                <a:cs typeface="Arial" pitchFamily="34" charset="-120"/>
+              </a:rPr>
+              <a:t> </a:t>
+            </a:r>
+            <a:r>
+              <a:rPr lang="en-US" sz="16500" b="1" kern="0" spc="-660" dirty="0">
+                <a:solidFill>
+                  <a:srgbClr val="FFFFFF"/>
+                </a:solidFill>
+                <a:latin typeface="DM Sans 14pt" pitchFamily="2" charset="77"/>
+                <a:ea typeface="Arial" pitchFamily="34" charset="-122"/>
+                <a:cs typeface="Arial" pitchFamily="34" charset="-120"/>
+              </a:rPr>
+              <a:t>t</a:t>
+            </a:r>
+            <a:r>
+              <a:rPr lang="en-US" sz="2600" b="1" kern="0" spc="-660" dirty="0">
+                <a:solidFill>
+                  <a:srgbClr val="FFFFFF"/>
+                </a:solidFill>
+                <a:latin typeface="DM Sans 14pt" pitchFamily="2" charset="77"/>
+                <a:ea typeface="Arial" pitchFamily="34" charset="-122"/>
+                <a:cs typeface="Arial" pitchFamily="34" charset="-120"/>
+              </a:rPr>
+              <a:t> </a:t>
+            </a:r>
+            <a:r>
+              <a:rPr lang="en-US" sz="16500" b="1" kern="0" spc="-660" dirty="0" err="1">
+                <a:solidFill>
+                  <a:srgbClr val="FFFFFF"/>
+                </a:solidFill>
+                <a:latin typeface="DM Sans 14pt" pitchFamily="2" charset="77"/>
+                <a:ea typeface="Arial" pitchFamily="34" charset="-122"/>
+                <a:cs typeface="Arial" pitchFamily="34" charset="-120"/>
+              </a:rPr>
+              <a:t>ising</a:t>
+            </a:r>
+            <a:endParaRPr lang="en-US" sz="16500" dirty="0">
+              <a:latin typeface="DM Sans 14pt" pitchFamily="2" charset="77"/>
+            </a:endParaRPr>
+          </a:p>
+        </p:txBody>
+      </p:sp>
+      <p:sp>
+        <p:nvSpPr>
+          <p:cNvPr id="9" name="Text 7"/>
+          <p:cNvSpPr/>
+          <p:nvPr/>
+        </p:nvSpPr>
+        <p:spPr>
+          <a:xfrm>
+            <a:off x="1143000" y="3848100"/>
+            <a:ext cx="16482060" cy="1924050"/>
+          </a:xfrm>
+          <a:prstGeom prst="rect">
+            <a:avLst/>
+          </a:prstGeom>
+          <a:noFill/>
+          <a:ln/>
+        </p:spPr>
+        <p:txBody>
           <a:bodyPr wrap="square" lIns="25400" tIns="25400" rIns="25400" bIns="25400" rtlCol="0" anchor="t">
-            <a:normAutofit lnSpcReduction="10000"/>
+            <a:noAutofit/>
+          </a:bodyPr>
+          <a:lstStyle/>
+          <a:p>
+            <a:pPr>
+              <a:lnSpc>
+                <a:spcPct val="90000"/>
+              </a:lnSpc>
+            </a:pPr>
+            <a:r>
+              <a:rPr lang="en-US" sz="16500" b="1" kern="0" spc="-660" dirty="0" err="1">
+                <a:solidFill>
+                  <a:srgbClr val="E5FF6E"/>
+                </a:solidFill>
+                <a:latin typeface="DM Sans 14pt" pitchFamily="2" charset="77"/>
+                <a:ea typeface="Arial" pitchFamily="34" charset="-122"/>
+                <a:cs typeface="Arial" pitchFamily="34" charset="-120"/>
+              </a:rPr>
+              <a:t>Repor</a:t>
+            </a:r>
+            <a:r>
+              <a:rPr lang="en-US" sz="6600" b="1" kern="0" spc="-660" dirty="0">
+                <a:solidFill>
+                  <a:srgbClr val="FFFFFF"/>
+                </a:solidFill>
+                <a:latin typeface="DM Sans 14pt" pitchFamily="2" charset="77"/>
+                <a:ea typeface="Arial" pitchFamily="34" charset="-122"/>
+                <a:cs typeface="Arial" pitchFamily="34" charset="-120"/>
+              </a:rPr>
+              <a:t> </a:t>
+            </a:r>
+            <a:r>
+              <a:rPr lang="en-US" sz="16500" b="1" kern="0" spc="-660" dirty="0">
+                <a:solidFill>
+                  <a:srgbClr val="E5FF6E"/>
+                </a:solidFill>
+                <a:latin typeface="DM Sans 14pt" pitchFamily="2" charset="77"/>
+                <a:ea typeface="Arial" pitchFamily="34" charset="-122"/>
+                <a:cs typeface="Arial" pitchFamily="34" charset="-120"/>
+              </a:rPr>
+              <a:t>t</a:t>
+            </a:r>
+            <a:endParaRPr lang="en-US" sz="16500" dirty="0">
+              <a:latin typeface="DM Sans 14pt" pitchFamily="2" charset="77"/>
+            </a:endParaRPr>
+          </a:p>
+        </p:txBody>
+      </p:sp>
+      <p:sp>
+        <p:nvSpPr>
+          <p:cNvPr id="10" name="Text 8"/>
+          <p:cNvSpPr/>
+          <p:nvPr/>
+        </p:nvSpPr>
+        <p:spPr>
+          <a:xfrm>
+            <a:off x="1143000" y="8239125"/>
+            <a:ext cx="4254033" cy="190500"/>
+          </a:xfrm>
+          <a:prstGeom prst="rect">
+            <a:avLst/>
+          </a:prstGeom>
+          <a:noFill/>
+          <a:ln/>
+        </p:spPr>
+        <p:txBody>
+          <a:bodyPr wrap="square" lIns="25400" tIns="25400" rIns="25400" bIns="25400" rtlCol="0" anchor="t">
+            <a:normAutofit fontScale="92500" lnSpcReduction="10000"/>
           </a:bodyPr>
           <a:lstStyle/>
           <a:p>
@@ -1541,147 +1573,18 @@
               <a:buNone/>
             </a:pPr>
             <a:r>
-              <a:rPr lang="en-US" sz="1650" kern="0" spc="660" dirty="0">
+              <a:rPr lang="en-US" sz="1050" kern="0" spc="0" dirty="0">
                 <a:solidFill>
                   <a:srgbClr val="E5FF6E"/>
                 </a:solidFill>
-                <a:latin typeface="Arial" pitchFamily="34" charset="0"/>
+                <a:latin typeface="DM Sans"/>
                 <a:ea typeface="Arial" pitchFamily="34" charset="-122"/>
                 <a:cs typeface="Arial" pitchFamily="34" charset="-120"/>
               </a:rPr>
-              <a:t>ADVERTISING REPORT</a:t>
-            </a:r>
-            <a:endParaRPr lang="en-US" sz="1650" dirty="0"/>
-          </a:p>
-        </p:txBody>
-      </p:sp>
-      <p:sp>
-        <p:nvSpPr>
-          <p:cNvPr id="8" name="Text 6"/>
-          <p:cNvSpPr/>
-          <p:nvPr/>
-        </p:nvSpPr>
-        <p:spPr>
-          <a:xfrm>
-            <a:off x="1143000" y="1543050"/>
-            <a:ext cx="11179810" cy="2762250"/>
-          </a:xfrm>
-          <a:prstGeom prst="rect">
-            <a:avLst/>
-          </a:prstGeom>
-          <a:noFill/>
-          <a:ln/>
-        </p:spPr>
-        <p:txBody>
-          <a:bodyPr wrap="square" lIns="0" tIns="0" rIns="0" bIns="0" rtlCol="0" anchor="t">
-            <a:normAutofit/>
-          </a:bodyPr>
-          <a:lstStyle/>
-          <a:p>
-            <a:pPr marL="0" indent="0" algn="l">
-              <a:lnSpc>
-                <a:spcPct val="90000"/>
-              </a:lnSpc>
-              <a:buNone/>
-            </a:pPr>
-            <a:r>
-              <a:rPr lang="en-US" sz="16500" b="1" kern="0" spc="-660" dirty="0">
-                <a:solidFill>
-                  <a:srgbClr val="FFFFFF"/>
-                </a:solidFill>
-                <a:latin typeface="Arial" pitchFamily="34" charset="0"/>
-                <a:ea typeface="Arial" pitchFamily="34" charset="-122"/>
-                <a:cs typeface="Arial" pitchFamily="34" charset="-120"/>
-              </a:rPr>
-              <a:t>Advertising</a:t>
-            </a:r>
-            <a:endParaRPr lang="en-US" sz="16500" dirty="0"/>
-          </a:p>
-        </p:txBody>
-      </p:sp>
-      <p:sp>
-        <p:nvSpPr>
-          <p:cNvPr id="9" name="Text 7"/>
-          <p:cNvSpPr/>
-          <p:nvPr/>
-        </p:nvSpPr>
-        <p:spPr>
-          <a:xfrm>
-            <a:off x="1143000" y="3848100"/>
-            <a:ext cx="16482060" cy="1924050"/>
-          </a:xfrm>
-          <a:prstGeom prst="rect">
-            <a:avLst/>
-          </a:prstGeom>
-          <a:noFill/>
-          <a:ln/>
-        </p:spPr>
-        <p:txBody>
-          <a:bodyPr wrap="square" lIns="25400" tIns="25400" rIns="25400" bIns="25400" rtlCol="0" anchor="t">
-            <a:normAutofit fontScale="92500" lnSpcReduction="20000"/>
-          </a:bodyPr>
-          <a:lstStyle/>
-          <a:p>
-            <a:pPr marL="0" indent="0" algn="l">
-              <a:lnSpc>
-                <a:spcPct val="90000"/>
-              </a:lnSpc>
-              <a:buNone/>
-            </a:pPr>
-            <a:r>
-              <a:rPr lang="en-US" sz="16500" b="1" kern="0" spc="-660" dirty="0">
-                <a:solidFill>
-                  <a:srgbClr val="E5FF6E"/>
-                </a:solidFill>
-                <a:latin typeface="Arial" pitchFamily="34" charset="0"/>
-                <a:ea typeface="Arial" pitchFamily="34" charset="-122"/>
-                <a:cs typeface="Arial" pitchFamily="34" charset="-120"/>
-              </a:rPr>
-              <a:t>Report</a:t>
-            </a:r>
-            <a:endParaRPr lang="en-US" sz="16500" dirty="0"/>
-          </a:p>
-        </p:txBody>
-      </p:sp>
-      <p:sp>
-        <p:nvSpPr>
-          <p:cNvPr id="10" name="Text 8"/>
-          <p:cNvSpPr/>
-          <p:nvPr/>
-        </p:nvSpPr>
-        <p:spPr>
-          <a:xfrm>
-            <a:off x="1143000" y="8239125"/>
-            <a:ext cx="4254033" cy="190500"/>
-          </a:xfrm>
-          <a:prstGeom prst="rect">
-            <a:avLst/>
-          </a:prstGeom>
-          <a:noFill/>
-          <a:ln/>
-        </p:spPr>
-        <p:txBody>
-          <a:bodyPr wrap="square" lIns="25400" tIns="25400" rIns="25400" bIns="25400" rtlCol="0" anchor="t">
-            <a:normAutofit fontScale="92500" lnSpcReduction="10000"/>
-          </a:bodyPr>
-          <a:lstStyle/>
-          <a:p>
-            <a:pPr marL="0" indent="0" algn="l">
-              <a:buNone/>
-            </a:pPr>
-            <a:r>
-              <a:rPr lang="en-US" sz="1050" kern="0" spc="315" dirty="0">
-                <a:solidFill>
-                  <a:srgbClr val="E5FF6E"/>
-                </a:solidFill>
-                <a:latin typeface="DM Sans 14pt" pitchFamily="2" charset="77"/>
-                <a:ea typeface="Arial" pitchFamily="34" charset="-122"/>
-                <a:cs typeface="Arial" pitchFamily="34" charset="-120"/>
-              </a:rPr>
-              <a:t>PREPARED FOR</a:t>
+              <a:t>Prepared for</a:t>
             </a:r>
             <a:endParaRPr lang="en-US" sz="1050" dirty="0">
-              <a:latin typeface="DM Sans 14pt" pitchFamily="2" charset="77"/>
+              <a:latin typeface="DM Sans"/>
             </a:endParaRPr>
           </a:p>
         </p:txBody>
@@ -1702,11 +1605,7 @@
               <a:gd name="adj" fmla="val 7043"/>
             </a:avLst>
           </a:prstGeom>
-          <a:solidFill>
-            <a:srgbClr val="FFFFFF">
-              <a:alpha val="15000"/>
-            </a:srgbClr>
-          </a:solidFill>
+          <a:noFill/>
           <a:ln/>
         </p:spPr>
         <p:txBody>
@@ -1718,7 +1617,7 @@
                 <a:solidFill>
                   <a:srgbClr val="FFFFFF"/>
                 </a:solidFill>
-                <a:latin typeface="DM Sans 14pt" pitchFamily="2" charset="77"/>
+                <a:latin typeface="DM Sans"/>
                 <a:ea typeface="Arial" pitchFamily="34" charset="-122"/>
                 <a:cs typeface="Arial" pitchFamily="34" charset="-120"/>
               </a:rPr>
@@ -1729,7 +1628,7 @@
                 <a:solidFill>
                   <a:srgbClr val="FFFFFF"/>
                 </a:solidFill>
-                <a:latin typeface="DM Sans 14pt" pitchFamily="2" charset="77"/>
+                <a:latin typeface="DM Sans"/>
                 <a:ea typeface="Arial" pitchFamily="34" charset="-122"/>
                 <a:cs typeface="Arial" pitchFamily="34" charset="-120"/>
               </a:rPr>
@@ -1740,14 +1639,14 @@
                 <a:solidFill>
                   <a:srgbClr val="FFFFFF"/>
                 </a:solidFill>
-                <a:latin typeface="DM Sans 14pt" pitchFamily="2" charset="77"/>
+                <a:latin typeface="DM Sans"/>
                 <a:ea typeface="Arial" pitchFamily="34" charset="-122"/>
                 <a:cs typeface="Arial" pitchFamily="34" charset="-120"/>
               </a:rPr>
               <a:t>}}</a:t>
             </a:r>
             <a:endParaRPr lang="en-US" sz="2800" dirty="0">
-              <a:latin typeface="DM Sans 14pt" pitchFamily="2" charset="77"/>
+              <a:latin typeface="DM Sans"/>
             </a:endParaRPr>
           </a:p>
         </p:txBody>
@@ -1779,20 +1678,20 @@
               <a:buNone/>
             </a:pPr>
             <a:r>
-              <a:rPr lang="en-US" sz="1350" kern="0" spc="270" dirty="0">
+              <a:rPr lang="en-US" sz="1350" kern="0" spc="0" dirty="0">
                 <a:solidFill>
                   <a:srgbClr val="FFFFFF">
                     <a:alpha val="75000"/>
                   </a:srgbClr>
                 </a:solidFill>
-                <a:latin typeface="DM Sans 14pt" pitchFamily="2" charset="77"/>
+                <a:latin typeface="DM Sans"/>
                 <a:ea typeface="Arial" pitchFamily="34" charset="-122"/>
                 <a:cs typeface="Arial" pitchFamily="34" charset="-120"/>
               </a:rPr>
-              <a:t>REPORTING PERIOD</a:t>
+              <a:t>Reporting period</a:t>
             </a:r>
             <a:endParaRPr lang="en-US" sz="1350" dirty="0">
-              <a:latin typeface="DM Sans 14pt" pitchFamily="2" charset="77"/>
+              <a:latin typeface="DM Sans"/>
             </a:endParaRPr>
           </a:p>
         </p:txBody>
@@ -1828,7 +1727,7 @@
                 <a:solidFill>
                   <a:schemeClr val="bg1"/>
                 </a:solidFill>
-                <a:latin typeface="DM Sans 14pt" pitchFamily="2" charset="77"/>
+                <a:latin typeface="DM Sans"/>
                 <a:ea typeface="Arial" pitchFamily="34" charset="-122"/>
                 <a:cs typeface="Arial" pitchFamily="34" charset="-120"/>
               </a:rPr>
@@ -1839,7 +1738,7 @@
                 <a:solidFill>
                   <a:schemeClr val="bg1"/>
                 </a:solidFill>
-                <a:latin typeface="DM Sans 14pt" pitchFamily="2" charset="77"/>
+                <a:latin typeface="DM Sans"/>
                 <a:ea typeface="Arial" pitchFamily="34" charset="-122"/>
                 <a:cs typeface="Arial" pitchFamily="34" charset="-120"/>
               </a:rPr>
@@ -1850,7 +1749,7 @@
                 <a:solidFill>
                   <a:schemeClr val="bg1"/>
                 </a:solidFill>
-                <a:latin typeface="DM Sans 14pt" pitchFamily="2" charset="77"/>
+                <a:latin typeface="DM Sans"/>
                 <a:ea typeface="Arial" pitchFamily="34" charset="-122"/>
                 <a:cs typeface="Arial" pitchFamily="34" charset="-120"/>
               </a:rPr>
@@ -1860,7 +1759,7 @@
               <a:solidFill>
                 <a:schemeClr val="bg1"/>
               </a:solidFill>
-              <a:latin typeface="DM Sans 14pt" pitchFamily="2" charset="77"/>
+              <a:latin typeface="DM Sans"/>
             </a:endParaRPr>
           </a:p>
         </p:txBody>
@@ -1915,7 +1814,7 @@
         </p:spPr>
         <p:txBody>
           <a:bodyPr wrap="square" lIns="25400" tIns="25400" rIns="25400" bIns="25400" rtlCol="0" anchor="t">
-            <a:normAutofit fontScale="92500" lnSpcReduction="20000"/>
+            <a:normAutofit fontScale="77500" lnSpcReduction="20000"/>
           </a:bodyPr>
           <a:lstStyle/>
           <a:p>
@@ -1926,20 +1825,68 @@
               <a:buNone/>
             </a:pPr>
             <a:r>
-              <a:rPr lang="en-US" sz="900" kern="0" spc="42" dirty="0">
-                <a:solidFill>
-                  <a:srgbClr val="643791"/>
-                </a:solidFill>
-                <a:latin typeface="Arial" pitchFamily="34" charset="0"/>
+              <a:rPr lang="en-US" sz="1000" kern="0" spc="42" dirty="0">
+                <a:solidFill>
+                  <a:srgbClr val="643791"/>
+                </a:solidFill>
+                <a:latin typeface="DM Sans"/>
                 <a:ea typeface="Arial" pitchFamily="34" charset="-122"/>
                 <a:cs typeface="Arial" pitchFamily="34" charset="-120"/>
               </a:rPr>
               <a:t>Go places. Go public.</a:t>
             </a:r>
-            <a:endParaRPr lang="en-US" sz="900" dirty="0"/>
-          </a:p>
-        </p:txBody>
-      </p:sp>
+            <a:endParaRPr lang="en-US" sz="1000" dirty="0"/>
+          </a:p>
+        </p:txBody>
+      </p:sp>
+      <p:pic>
+        <p:nvPicPr>
+          <p:cNvPr id="17" name="Picture 16" descr="jobs-go-public-logo-white.png"/>
+          <p:cNvPicPr>
+            <a:picLocks noChangeAspect="1"/>
+          </p:cNvPicPr>
+          <p:nvPr/>
+        </p:nvPicPr>
+        <p:blipFill>
+          <a:blip r:embed="rId3"/>
+          <a:stretch>
+            <a:fillRect/>
+          </a:stretch>
+        </p:blipFill>
+        <p:spPr>
+          <a:xfrm>
+            <a:off x="571500" y="476250"/>
+            <a:ext cx="1700000" cy="587234"/>
+          </a:xfrm>
+          <a:prstGeom prst="rect">
+            <a:avLst/>
+          </a:prstGeom>
+        </p:spPr>
+      </p:pic>
+      <p:pic>
+        <p:nvPicPr>
+          <p:cNvPr id="18" name="Picture 17" descr="Curved Rectangle Stack.png"/>
+          <p:cNvPicPr>
+            <a:picLocks noChangeAspect="1"/>
+          </p:cNvPicPr>
+          <p:nvPr/>
+        </p:nvPicPr>
+        <p:blipFill>
+          <a:blip r:embed="rId4"/>
+          <a:stretch>
+            <a:fillRect/>
+          </a:stretch>
+        </p:blipFill>
+        <p:spPr>
+          <a:xfrm>
+            <a:off x="14788000" y="3543500"/>
+            <a:ext cx="3200000" cy="3200000"/>
+          </a:xfrm>
+          <a:prstGeom prst="rect">
+            <a:avLst/>
+          </a:prstGeom>
+        </p:spPr>
+      </p:pic>
     </p:spTree>
   </p:cSld>
   <p:clrMapOvr>
@@ -1975,121 +1922,6 @@
       </p:grpSpPr>
       <p:sp>
         <p:nvSpPr>
-          <p:cNvPr id="2" name="Shape 0"/>
-          <p:cNvSpPr/>
-          <p:nvPr/>
-        </p:nvSpPr>
-        <p:spPr>
-          <a:xfrm>
-            <a:off x="609600" y="457200"/>
-            <a:ext cx="495300" cy="438150"/>
-          </a:xfrm>
-          <a:prstGeom prst="rect">
-            <a:avLst/>
-          </a:prstGeom>
-          <a:solidFill>
-            <a:srgbClr val="643791"/>
-          </a:solidFill>
-          <a:ln/>
-        </p:spPr>
-        <p:txBody>
-          <a:bodyPr/>
-          <a:lstStyle/>
-          <a:p>
-            <a:endParaRPr lang="en-GB">
-              <a:latin typeface="DM Sans 14pt" pitchFamily="2" charset="77"/>
-            </a:endParaRPr>
-          </a:p>
-        </p:txBody>
-      </p:sp>
-      <p:sp>
-        <p:nvSpPr>
-          <p:cNvPr id="3" name="Text 1"/>
-          <p:cNvSpPr/>
-          <p:nvPr/>
-        </p:nvSpPr>
-        <p:spPr>
-          <a:xfrm>
-            <a:off x="571500" y="476250"/>
-            <a:ext cx="495300" cy="457200"/>
-          </a:xfrm>
-          <a:prstGeom prst="rect">
-            <a:avLst/>
-          </a:prstGeom>
-          <a:noFill/>
-          <a:ln/>
-        </p:spPr>
-        <p:txBody>
-          <a:bodyPr wrap="square" lIns="25400" tIns="25400" rIns="25400" bIns="25400" rtlCol="0" anchor="ctr">
-            <a:normAutofit/>
-          </a:bodyPr>
-          <a:lstStyle/>
-          <a:p>
-            <a:pPr marL="0" indent="0" algn="ctr">
-              <a:buNone/>
-            </a:pPr>
-            <a:r>
-              <a:rPr lang="en-US" sz="1350" b="1" kern="0" spc="-27" dirty="0">
-                <a:solidFill>
-                  <a:srgbClr val="FFFFFF"/>
-                </a:solidFill>
-                <a:latin typeface="DM Sans 14pt" pitchFamily="2" charset="77"/>
-                <a:ea typeface="Arial" pitchFamily="34" charset="-122"/>
-                <a:cs typeface="Arial" pitchFamily="34" charset="-120"/>
-              </a:rPr>
-              <a:t>Go</a:t>
-            </a:r>
-            <a:endParaRPr lang="en-US" sz="1350" dirty="0">
-              <a:latin typeface="DM Sans 14pt" pitchFamily="2" charset="77"/>
-            </a:endParaRPr>
-          </a:p>
-        </p:txBody>
-      </p:sp>
-      <p:sp>
-        <p:nvSpPr>
-          <p:cNvPr id="4" name="Text 2"/>
-          <p:cNvSpPr/>
-          <p:nvPr/>
-        </p:nvSpPr>
-        <p:spPr>
-          <a:xfrm>
-            <a:off x="1200150" y="538163"/>
-            <a:ext cx="1561505" cy="314325"/>
-          </a:xfrm>
-          <a:prstGeom prst="rect">
-            <a:avLst/>
-          </a:prstGeom>
-          <a:noFill/>
-          <a:ln/>
-        </p:spPr>
-        <p:txBody>
-          <a:bodyPr wrap="square" lIns="25400" tIns="25400" rIns="25400" bIns="25400" rtlCol="0" anchor="t">
-            <a:normAutofit/>
-          </a:bodyPr>
-          <a:lstStyle/>
-          <a:p>
-            <a:pPr marL="0" indent="0" algn="l">
-              <a:buNone/>
-            </a:pPr>
-            <a:r>
-              <a:rPr lang="en-US" sz="1650" b="1" kern="0" spc="-16" dirty="0">
-                <a:solidFill>
-                  <a:srgbClr val="111111"/>
-                </a:solidFill>
-                <a:latin typeface="DM Sans 14pt" pitchFamily="2" charset="77"/>
-                <a:ea typeface="Arial" pitchFamily="34" charset="-122"/>
-                <a:cs typeface="Arial" pitchFamily="34" charset="-120"/>
-              </a:rPr>
-              <a:t>Jobs Go Public</a:t>
-            </a:r>
-            <a:endParaRPr lang="en-US" sz="1650" dirty="0">
-              <a:latin typeface="DM Sans 14pt" pitchFamily="2" charset="77"/>
-            </a:endParaRPr>
-          </a:p>
-        </p:txBody>
-      </p:sp>
-      <p:sp>
-        <p:nvSpPr>
           <p:cNvPr id="6" name="Text 4"/>
           <p:cNvSpPr/>
           <p:nvPr/>
@@ -2144,21 +1976,19 @@
         </p:nvSpPr>
         <p:spPr>
           <a:xfrm>
-            <a:off x="762000" y="1866901"/>
+            <a:off x="762000" y="1866899"/>
             <a:ext cx="8921750" cy="7481189"/>
           </a:xfrm>
           <a:prstGeom prst="roundRect">
             <a:avLst>
-              <a:gd name="adj" fmla="val 2332"/>
+              <a:gd name="adj" fmla="val 0"/>
             </a:avLst>
           </a:prstGeom>
           <a:solidFill>
-            <a:srgbClr val="E8E0F2"/>
+            <a:schemeClr val="bg1"/>
           </a:solidFill>
           <a:ln w="19050">
-            <a:solidFill>
-              <a:srgbClr val="643791"/>
-            </a:solidFill>
+            <a:noFill/>
             <a:prstDash val="dash"/>
           </a:ln>
         </p:spPr>
@@ -2180,23 +2010,19 @@
         </p:nvSpPr>
         <p:spPr>
           <a:xfrm>
-            <a:off x="868675" y="2297616"/>
-            <a:ext cx="8708400" cy="6940549"/>
+            <a:off x="868675" y="2302888"/>
+            <a:ext cx="8708400" cy="6937200"/>
           </a:xfrm>
           <a:prstGeom prst="roundRect">
             <a:avLst>
-              <a:gd name="adj" fmla="val 2570"/>
+              <a:gd name="adj" fmla="val 0"/>
             </a:avLst>
           </a:prstGeom>
           <a:solidFill>
             <a:srgbClr val="FFFFFF"/>
           </a:solidFill>
           <a:ln w="9525">
-            <a:solidFill>
-              <a:srgbClr val="000000">
-                <a:alpha val="10000"/>
-              </a:srgbClr>
-            </a:solidFill>
+            <a:noFill/>
             <a:prstDash val="solid"/>
           </a:ln>
         </p:spPr>
@@ -2238,51 +2064,6 @@
               <a:t>}}</a:t>
             </a:r>
             <a:endParaRPr lang="en-US" dirty="0">
-              <a:latin typeface="DM Sans 14pt" pitchFamily="2" charset="77"/>
-            </a:endParaRPr>
-          </a:p>
-        </p:txBody>
-      </p:sp>
-      <p:sp>
-        <p:nvSpPr>
-          <p:cNvPr id="38" name="Text 36"/>
-          <p:cNvSpPr/>
-          <p:nvPr/>
-        </p:nvSpPr>
-        <p:spPr>
-          <a:xfrm>
-            <a:off x="609600" y="9753600"/>
-            <a:ext cx="2373511" cy="190500"/>
-          </a:xfrm>
-          <a:prstGeom prst="rect">
-            <a:avLst/>
-          </a:prstGeom>
-          <a:noFill/>
-          <a:ln/>
-        </p:spPr>
-        <p:txBody>
-          <a:bodyPr wrap="square" lIns="25400" tIns="25400" rIns="25400" bIns="25400" rtlCol="0" anchor="t">
-            <a:normAutofit fontScale="85000" lnSpcReduction="10000"/>
-          </a:bodyPr>
-          <a:lstStyle/>
-          <a:p>
-            <a:pPr marL="0" indent="0" algn="l">
-              <a:buNone/>
-            </a:pPr>
-            <a:r>
-              <a:rPr lang="en-US" sz="1050" kern="0" spc="42" dirty="0">
-                <a:solidFill>
-                  <a:srgbClr val="111111">
-                    <a:alpha val="63000"/>
-                  </a:srgbClr>
-                </a:solidFill>
-                <a:latin typeface="DM Sans 14pt" pitchFamily="2" charset="77"/>
-                <a:ea typeface="Arial" pitchFamily="34" charset="-122"/>
-                <a:cs typeface="Arial" pitchFamily="34" charset="-120"/>
-              </a:rPr>
-              <a:t>{{client_name}} · Advertising Report</a:t>
-            </a:r>
-            <a:endParaRPr lang="en-US" sz="1050" dirty="0">
               <a:latin typeface="DM Sans 14pt" pitchFamily="2" charset="77"/>
             </a:endParaRPr>
           </a:p>
@@ -2364,7 +2145,7 @@
           <a:p>
             <a:pPr algn="ctr"/>
             <a:r>
-              <a:rPr lang="en-US" sz="1050" kern="0" spc="182" dirty="0">
+              <a:rPr lang="en-US" sz="1400" kern="0" spc="0" dirty="0">
                 <a:solidFill>
                   <a:srgbClr val="FFFFFF">
                     <a:alpha val="85000"/>
@@ -2374,9 +2155,9 @@
                 <a:ea typeface="Arial" pitchFamily="34" charset="-122"/>
                 <a:cs typeface="Arial" pitchFamily="34" charset="-120"/>
               </a:rPr>
-              <a:t>ROLES BENCHMARKED</a:t>
-            </a:r>
-            <a:endParaRPr lang="en-US" sz="1050" dirty="0">
+              <a:t>Roles benchmarked</a:t>
+            </a:r>
+            <a:endParaRPr lang="en-US" sz="1400" dirty="0">
               <a:latin typeface="DM Sans 14pt" pitchFamily="2" charset="77"/>
             </a:endParaRPr>
           </a:p>
@@ -2411,39 +2192,36 @@
           <a:p>
             <a:pPr algn="ctr"/>
             <a:r>
-              <a:rPr lang="en-US" sz="6800" b="1" kern="0" spc="-67" dirty="0">
-                <a:solidFill>
-                  <a:srgbClr val="FFFFFF"/>
-                </a:solidFill>
-                <a:latin typeface="DM Sans 14pt" pitchFamily="2" charset="77"/>
-                <a:ea typeface="Arial" pitchFamily="34" charset="-122"/>
-                <a:cs typeface="Arial" pitchFamily="34" charset="-120"/>
+              <a:rPr lang="en-GB" sz="8800" dirty="0">
+                <a:solidFill>
+                  <a:schemeClr val="bg1"/>
+                </a:solidFill>
+                <a:latin typeface="DM Sans 14pt" pitchFamily="2" charset="77"/>
               </a:rPr>
               <a:t>{{</a:t>
             </a:r>
             <a:r>
-              <a:rPr lang="en-US" sz="6800" b="1" kern="0" spc="-67" dirty="0" err="1">
-                <a:solidFill>
-                  <a:srgbClr val="FFFFFF"/>
-                </a:solidFill>
-                <a:latin typeface="DM Sans 14pt" pitchFamily="2" charset="77"/>
-                <a:ea typeface="Arial" pitchFamily="34" charset="-122"/>
-                <a:cs typeface="Arial" pitchFamily="34" charset="-120"/>
+              <a:rPr lang="en-GB" sz="8800" dirty="0" err="1">
+                <a:solidFill>
+                  <a:schemeClr val="bg1"/>
+                </a:solidFill>
+                <a:latin typeface="DM Sans 14pt" pitchFamily="2" charset="77"/>
               </a:rPr>
               <a:t>stat_total_jobs</a:t>
             </a:r>
             <a:r>
-              <a:rPr lang="en-US" sz="6800" b="1" kern="0" spc="-67" dirty="0">
-                <a:solidFill>
-                  <a:srgbClr val="FFFFFF"/>
-                </a:solidFill>
-                <a:latin typeface="DM Sans 14pt" pitchFamily="2" charset="77"/>
-                <a:ea typeface="Arial" pitchFamily="34" charset="-122"/>
-                <a:cs typeface="Arial" pitchFamily="34" charset="-120"/>
+              <a:rPr lang="en-GB" sz="8800" dirty="0">
+                <a:solidFill>
+                  <a:schemeClr val="bg1"/>
+                </a:solidFill>
+                <a:latin typeface="DM Sans 14pt" pitchFamily="2" charset="77"/>
               </a:rPr>
               <a:t>}}</a:t>
             </a:r>
-            <a:endParaRPr lang="en-US" sz="6800" b="1" dirty="0">
+            <a:endParaRPr lang="en-US" sz="8800" dirty="0">
+              <a:solidFill>
+                <a:schemeClr val="bg1"/>
+              </a:solidFill>
               <a:latin typeface="DM Sans 14pt" pitchFamily="2" charset="77"/>
             </a:endParaRPr>
           </a:p>
@@ -2474,7 +2252,7 @@
           <a:p>
             <a:pPr algn="ctr"/>
             <a:r>
-              <a:rPr lang="en-US" sz="1050" kern="0" spc="182" dirty="0">
+              <a:rPr lang="en-US" sz="1400" kern="0" spc="0" dirty="0">
                 <a:solidFill>
                   <a:srgbClr val="FFFFFF">
                     <a:alpha val="85000"/>
@@ -2484,9 +2262,9 @@
                 <a:ea typeface="Arial" pitchFamily="34" charset="-122"/>
                 <a:cs typeface="Arial" pitchFamily="34" charset="-120"/>
               </a:rPr>
-              <a:t>STRONGEST JOB CATEGORY</a:t>
-            </a:r>
-            <a:endParaRPr lang="en-US" sz="1050" dirty="0">
+              <a:t>Strongest job category</a:t>
+            </a:r>
+            <a:endParaRPr lang="en-US" sz="1400" dirty="0">
               <a:latin typeface="DM Sans 14pt" pitchFamily="2" charset="77"/>
             </a:endParaRPr>
           </a:p>
@@ -2517,41 +2295,45 @@
         </p:spPr>
         <p:txBody>
           <a:bodyPr lIns="0" rIns="0" anchor="ctr">
-            <a:normAutofit fontScale="92500" lnSpcReduction="10000"/>
+            <a:noAutofit/>
           </a:bodyPr>
           <a:lstStyle/>
           <a:p>
             <a:pPr algn="ctr"/>
             <a:r>
-              <a:rPr lang="en-US" sz="4000" b="1" kern="0" spc="-67" dirty="0">
-                <a:solidFill>
-                  <a:srgbClr val="FFFFFF"/>
-                </a:solidFill>
-                <a:latin typeface="DM Sans 14pt" pitchFamily="2" charset="77"/>
-                <a:cs typeface="Arial" pitchFamily="34" charset="-120"/>
+              <a:rPr lang="en-GB" sz="4000" dirty="0">
+                <a:solidFill>
+                  <a:schemeClr val="bg1"/>
+                </a:solidFill>
+                <a:latin typeface="DM Sans 14pt" pitchFamily="2" charset="77"/>
               </a:rPr>
               <a:t>{{</a:t>
             </a:r>
             <a:r>
-              <a:rPr lang="en-US" sz="4000" b="1" kern="0" spc="-67" dirty="0" err="1">
-                <a:solidFill>
-                  <a:srgbClr val="FFFFFF"/>
-                </a:solidFill>
-                <a:latin typeface="DM Sans 14pt" pitchFamily="2" charset="77"/>
-                <a:cs typeface="Arial" pitchFamily="34" charset="-120"/>
+              <a:rPr lang="en-GB" sz="4000" dirty="0" err="1">
+                <a:solidFill>
+                  <a:schemeClr val="bg1"/>
+                </a:solidFill>
+                <a:latin typeface="DM Sans 14pt" pitchFamily="2" charset="77"/>
               </a:rPr>
               <a:t>stat_top_category</a:t>
             </a:r>
             <a:r>
-              <a:rPr lang="en-US" sz="4000" b="1" kern="0" spc="-67" dirty="0">
-                <a:solidFill>
-                  <a:srgbClr val="FFFFFF"/>
-                </a:solidFill>
-                <a:latin typeface="DM Sans 14pt" pitchFamily="2" charset="77"/>
-                <a:cs typeface="Arial" pitchFamily="34" charset="-120"/>
+              <a:rPr lang="en-GB" sz="4000" dirty="0">
+                <a:solidFill>
+                  <a:schemeClr val="bg1"/>
+                </a:solidFill>
+                <a:latin typeface="DM Sans 14pt" pitchFamily="2" charset="77"/>
               </a:rPr>
               <a:t>}}</a:t>
             </a:r>
+            <a:endParaRPr lang="en-US" sz="4000" kern="0" spc="-67" dirty="0">
+              <a:solidFill>
+                <a:schemeClr val="bg1"/>
+              </a:solidFill>
+              <a:latin typeface="DM Sans 14pt" pitchFamily="2" charset="77"/>
+              <a:cs typeface="Arial" pitchFamily="34" charset="-120"/>
+            </a:endParaRPr>
           </a:p>
         </p:txBody>
       </p:sp>
@@ -2570,7 +2352,7 @@
             <a:avLst/>
           </a:prstGeom>
           <a:solidFill>
-            <a:srgbClr val="E5FF6E"/>
+            <a:srgbClr val="E6FF6E"/>
           </a:solidFill>
           <a:ln/>
         </p:spPr>
@@ -2580,21 +2362,17 @@
           <a:p>
             <a:pPr algn="ctr"/>
             <a:r>
-              <a:rPr lang="en-US" sz="1050" kern="0" spc="182" dirty="0">
-                <a:solidFill>
-                  <a:srgbClr val="240F45">
+              <a:rPr lang="en-US" sz="1400" kern="0" dirty="0">
+                <a:solidFill>
+                  <a:srgbClr val="757575">
                     <a:alpha val="85000"/>
                   </a:srgbClr>
                 </a:solidFill>
                 <a:latin typeface="DM Sans 14pt" pitchFamily="2" charset="77"/>
-                <a:ea typeface="Arial" pitchFamily="34" charset="-122"/>
-                <a:cs typeface="Arial" pitchFamily="34" charset="-120"/>
-              </a:rPr>
-              <a:t>IN THE TOP-RIGHT QUADRANT</a:t>
-            </a:r>
-            <a:endParaRPr lang="en-US" sz="1050" dirty="0">
-              <a:latin typeface="DM Sans 14pt" pitchFamily="2" charset="77"/>
-            </a:endParaRPr>
+                <a:cs typeface="Arial" pitchFamily="34" charset="-120"/>
+              </a:rPr>
+              <a:t>In the top-right quadrant</a:t>
+            </a:r>
           </a:p>
         </p:txBody>
       </p:sp>
@@ -2629,41 +2407,35 @@
           <a:p>
             <a:pPr algn="ctr"/>
             <a:r>
-              <a:rPr lang="en-US" sz="6800" b="1" kern="0" spc="-67" dirty="0">
-                <a:solidFill>
-                  <a:srgbClr val="757575"/>
-                </a:solidFill>
-                <a:latin typeface="DM Sans 14pt" pitchFamily="2" charset="77"/>
-                <a:ea typeface="Arial" pitchFamily="34" charset="-122"/>
-                <a:cs typeface="Arial" pitchFamily="34" charset="-120"/>
+              <a:rPr lang="en-GB" sz="8800" dirty="0">
+                <a:solidFill>
+                  <a:srgbClr val="643791"/>
+                </a:solidFill>
+                <a:latin typeface="DM Sans 14pt" pitchFamily="2" charset="77"/>
               </a:rPr>
               <a:t>{{</a:t>
             </a:r>
             <a:r>
-              <a:rPr lang="en-US" sz="6800" b="1" kern="0" spc="-67" dirty="0" err="1">
-                <a:solidFill>
-                  <a:srgbClr val="757575"/>
-                </a:solidFill>
-                <a:latin typeface="DM Sans 14pt" pitchFamily="2" charset="77"/>
-                <a:ea typeface="Arial" pitchFamily="34" charset="-122"/>
-                <a:cs typeface="Arial" pitchFamily="34" charset="-120"/>
+              <a:rPr lang="en-GB" sz="8800" dirty="0" err="1">
+                <a:solidFill>
+                  <a:srgbClr val="643791"/>
+                </a:solidFill>
+                <a:latin typeface="DM Sans 14pt" pitchFamily="2" charset="77"/>
               </a:rPr>
               <a:t>stat_top_quadrant_pct</a:t>
             </a:r>
             <a:r>
-              <a:rPr lang="en-US" sz="6800" b="1" kern="0" spc="-67" dirty="0">
-                <a:solidFill>
-                  <a:srgbClr val="757575"/>
-                </a:solidFill>
-                <a:latin typeface="DM Sans 14pt" pitchFamily="2" charset="77"/>
-                <a:ea typeface="Arial" pitchFamily="34" charset="-122"/>
-                <a:cs typeface="Arial" pitchFamily="34" charset="-120"/>
+              <a:rPr lang="en-GB" sz="8800" dirty="0">
+                <a:solidFill>
+                  <a:srgbClr val="643791"/>
+                </a:solidFill>
+                <a:latin typeface="DM Sans 14pt" pitchFamily="2" charset="77"/>
               </a:rPr>
               <a:t>}}</a:t>
             </a:r>
-            <a:endParaRPr lang="en-US" sz="6800" b="1" dirty="0">
+            <a:endParaRPr lang="en-US" sz="8800" dirty="0">
               <a:solidFill>
-                <a:srgbClr val="757575"/>
+                <a:srgbClr val="643791"/>
               </a:solidFill>
               <a:latin typeface="DM Sans 14pt" pitchFamily="2" charset="77"/>
             </a:endParaRPr>
@@ -2684,8 +2456,8 @@
         </p:nvSpPr>
         <p:spPr>
           <a:xfrm>
-            <a:off x="857249" y="1866900"/>
-            <a:ext cx="8009197" cy="431799"/>
+            <a:off x="762001" y="1866899"/>
+            <a:ext cx="8921750" cy="432000"/>
           </a:xfrm>
           <a:prstGeom prst="rect">
             <a:avLst/>
@@ -2715,6 +2487,7 @@
           <a:bodyPr lIns="0" tIns="0" rIns="0" bIns="0" rtlCol="0" anchor="ctr"/>
           <a:lstStyle/>
           <a:p>
+            <a:pPr algn="ctr"/>
             <a:r>
               <a:rPr lang="en-US" kern="0" spc="84" dirty="0">
                 <a:solidFill>
@@ -2731,167 +2504,6 @@
             <a:endParaRPr lang="en-US" dirty="0">
               <a:latin typeface="DM Sans 14pt" pitchFamily="2" charset="77"/>
             </a:endParaRPr>
-          </a:p>
-        </p:txBody>
-      </p:sp>
-      <p:sp>
-        <p:nvSpPr>
-          <p:cNvPr id="10" name="Footer Placeholder 1">
-            <a:extLst>
-              <a:ext uri="{FF2B5EF4-FFF2-40B4-BE49-F238E27FC236}">
-                <a16:creationId xmlns:a16="http://schemas.microsoft.com/office/drawing/2014/main" id="{9E9E4482-0345-AAE9-2155-E6821A53F22A}"/>
-              </a:ext>
-            </a:extLst>
-          </p:cNvPr>
-          <p:cNvSpPr txBox="1">
-            <a:spLocks/>
-          </p:cNvSpPr>
-          <p:nvPr/>
-        </p:nvSpPr>
-        <p:spPr>
-          <a:xfrm>
-            <a:off x="17233255" y="9753300"/>
-            <a:ext cx="522000" cy="190800"/>
-          </a:xfrm>
-          <a:prstGeom prst="rect">
-            <a:avLst/>
-          </a:prstGeom>
-        </p:spPr>
-        <p:txBody>
-          <a:bodyPr vert="horz" lIns="36000" tIns="36000" rIns="36000" bIns="36000" rtlCol="0" anchor="ctr"/>
-          <a:lstStyle>
-            <a:lvl1pPr marL="0" algn="l" defTabSz="914400" rtl="0" eaLnBrk="1" latinLnBrk="0" hangingPunct="1">
-              <a:defRPr sz="900" kern="1200">
-                <a:solidFill>
-                  <a:srgbClr val="E8E0F2"/>
-                </a:solidFill>
-                <a:latin typeface="DM Sans 14pt" pitchFamily="2" charset="77"/>
-                <a:ea typeface="+mn-ea"/>
-                <a:cs typeface="+mn-cs"/>
-              </a:defRPr>
-            </a:lvl1pPr>
-            <a:lvl2pPr marL="457200" algn="l" defTabSz="914400" rtl="0" eaLnBrk="1" latinLnBrk="0" hangingPunct="1">
-              <a:defRPr sz="1800" kern="1200">
-                <a:solidFill>
-                  <a:schemeClr val="tx1"/>
-                </a:solidFill>
-                <a:latin typeface="+mn-lt"/>
-                <a:ea typeface="+mn-ea"/>
-                <a:cs typeface="+mn-cs"/>
-              </a:defRPr>
-            </a:lvl2pPr>
-            <a:lvl3pPr marL="914400" algn="l" defTabSz="914400" rtl="0" eaLnBrk="1" latinLnBrk="0" hangingPunct="1">
-              <a:defRPr sz="1800" kern="1200">
-                <a:solidFill>
-                  <a:schemeClr val="tx1"/>
-                </a:solidFill>
-                <a:latin typeface="+mn-lt"/>
-                <a:ea typeface="+mn-ea"/>
-                <a:cs typeface="+mn-cs"/>
-              </a:defRPr>
-            </a:lvl3pPr>
-            <a:lvl4pPr marL="1371600" algn="l" defTabSz="914400" rtl="0" eaLnBrk="1" latinLnBrk="0" hangingPunct="1">
-              <a:defRPr sz="1800" kern="1200">
-                <a:solidFill>
-                  <a:schemeClr val="tx1"/>
-                </a:solidFill>
-                <a:latin typeface="+mn-lt"/>
-                <a:ea typeface="+mn-ea"/>
-                <a:cs typeface="+mn-cs"/>
-              </a:defRPr>
-            </a:lvl4pPr>
-            <a:lvl5pPr marL="1828800" algn="l" defTabSz="914400" rtl="0" eaLnBrk="1" latinLnBrk="0" hangingPunct="1">
-              <a:defRPr sz="1800" kern="1200">
-                <a:solidFill>
-                  <a:schemeClr val="tx1"/>
-                </a:solidFill>
-                <a:latin typeface="+mn-lt"/>
-                <a:ea typeface="+mn-ea"/>
-                <a:cs typeface="+mn-cs"/>
-              </a:defRPr>
-            </a:lvl5pPr>
-            <a:lvl6pPr marL="2286000" algn="l" defTabSz="914400" rtl="0" eaLnBrk="1" latinLnBrk="0" hangingPunct="1">
-              <a:defRPr sz="1800" kern="1200">
-                <a:solidFill>
-                  <a:schemeClr val="tx1"/>
-                </a:solidFill>
-                <a:latin typeface="+mn-lt"/>
-                <a:ea typeface="+mn-ea"/>
-                <a:cs typeface="+mn-cs"/>
-              </a:defRPr>
-            </a:lvl6pPr>
-            <a:lvl7pPr marL="2743200" algn="l" defTabSz="914400" rtl="0" eaLnBrk="1" latinLnBrk="0" hangingPunct="1">
-              <a:defRPr sz="1800" kern="1200">
-                <a:solidFill>
-                  <a:schemeClr val="tx1"/>
-                </a:solidFill>
-                <a:latin typeface="+mn-lt"/>
-                <a:ea typeface="+mn-ea"/>
-                <a:cs typeface="+mn-cs"/>
-              </a:defRPr>
-            </a:lvl7pPr>
-            <a:lvl8pPr marL="3200400" algn="l" defTabSz="914400" rtl="0" eaLnBrk="1" latinLnBrk="0" hangingPunct="1">
-              <a:defRPr sz="1800" kern="1200">
-                <a:solidFill>
-                  <a:schemeClr val="tx1"/>
-                </a:solidFill>
-                <a:latin typeface="+mn-lt"/>
-                <a:ea typeface="+mn-ea"/>
-                <a:cs typeface="+mn-cs"/>
-              </a:defRPr>
-            </a:lvl8pPr>
-            <a:lvl9pPr marL="3657600" algn="l" defTabSz="914400" rtl="0" eaLnBrk="1" latinLnBrk="0" hangingPunct="1">
-              <a:defRPr sz="1800" kern="1200">
-                <a:solidFill>
-                  <a:schemeClr val="tx1"/>
-                </a:solidFill>
-                <a:latin typeface="+mn-lt"/>
-                <a:ea typeface="+mn-ea"/>
-                <a:cs typeface="+mn-cs"/>
-              </a:defRPr>
-            </a:lvl9pPr>
-          </a:lstStyle>
-          <a:p>
-            <a:r>
-              <a:rPr lang="en-GB" dirty="0">
-                <a:solidFill>
-                  <a:srgbClr val="757575"/>
-                </a:solidFill>
-              </a:rPr>
-              <a:t>{{</a:t>
-            </a:r>
-            <a:r>
-              <a:rPr lang="en-GB" dirty="0" err="1">
-                <a:solidFill>
-                  <a:srgbClr val="757575"/>
-                </a:solidFill>
-              </a:rPr>
-              <a:t>slide_number</a:t>
-            </a:r>
-            <a:r>
-              <a:rPr lang="en-GB" dirty="0">
-                <a:solidFill>
-                  <a:srgbClr val="757575"/>
-                </a:solidFill>
-              </a:rPr>
-              <a:t>}} / {{</a:t>
-            </a:r>
-            <a:r>
-              <a:rPr lang="en-GB" dirty="0" err="1">
-                <a:solidFill>
-                  <a:srgbClr val="757575"/>
-                </a:solidFill>
-              </a:rPr>
-              <a:t>total_slides</a:t>
-            </a:r>
-            <a:r>
-              <a:rPr lang="en-GB" dirty="0">
-                <a:solidFill>
-                  <a:srgbClr val="757575"/>
-                </a:solidFill>
-              </a:rPr>
-              <a:t>}}</a:t>
-            </a:r>
           </a:p>
         </p:txBody>
       </p:sp>
@@ -2997,7 +2609,7 @@
               <a:buNone/>
             </a:pPr>
             <a:r>
-              <a:rPr lang="en-US" sz="2400" b="1" kern="0" spc="368" dirty="0">
+              <a:rPr lang="en-US" sz="2400" b="1" kern="0" spc="0" dirty="0">
                 <a:solidFill>
                   <a:srgbClr val="643791"/>
                 </a:solidFill>
@@ -3005,7 +2617,7 @@
                 <a:ea typeface="Arial" pitchFamily="34" charset="-122"/>
                 <a:cs typeface="Arial" pitchFamily="34" charset="-120"/>
               </a:rPr>
-              <a:t>COMMENTARY</a:t>
+              <a:t>Commentary</a:t>
             </a:r>
             <a:endParaRPr lang="en-US" sz="2400" b="1" dirty="0">
               <a:latin typeface="DM Sans 14pt" pitchFamily="2" charset="77"/>
@@ -3028,7 +2640,7 @@
         <p:spPr>
           <a:xfrm>
             <a:off x="12995755" y="3748249"/>
-            <a:ext cx="4701600" cy="5606765"/>
+            <a:ext cx="4701600" cy="5599841"/>
           </a:xfrm>
           <a:prstGeom prst="roundRect">
             <a:avLst>
@@ -3149,6 +2761,160 @@
           </a:p>
         </p:txBody>
       </p:sp>
+      <p:sp>
+        <p:nvSpPr>
+          <p:cNvPr id="3" name="TextBox 2">
+            <a:extLst>
+              <a:ext uri="{FF2B5EF4-FFF2-40B4-BE49-F238E27FC236}">
+                <a16:creationId xmlns:a16="http://schemas.microsoft.com/office/drawing/2014/main" id="{2A4A4577-4C53-6705-4B68-F996B9EE6A95}"/>
+              </a:ext>
+            </a:extLst>
+          </p:cNvPr>
+          <p:cNvSpPr txBox="1"/>
+          <p:nvPr/>
+        </p:nvSpPr>
+        <p:spPr>
+          <a:xfrm>
+            <a:off x="609600" y="9742289"/>
+            <a:ext cx="2300310" cy="153888"/>
+          </a:xfrm>
+          <a:prstGeom prst="rect">
+            <a:avLst/>
+          </a:prstGeom>
+          <a:noFill/>
+        </p:spPr>
+        <p:txBody>
+          <a:bodyPr wrap="none" lIns="0" tIns="0" rIns="0" bIns="0">
+            <a:spAutoFit/>
+          </a:bodyPr>
+          <a:lstStyle/>
+          <a:p>
+            <a:pPr algn="l"/>
+            <a:r>
+              <a:rPr sz="1000" dirty="0">
+                <a:solidFill>
+                  <a:srgbClr val="643791"/>
+                </a:solidFill>
+                <a:latin typeface="DM Sans 14pt" pitchFamily="2" charset="77"/>
+              </a:rPr>
+              <a:t>Jobs Go Public  ·  Go places. Go public.</a:t>
+            </a:r>
+          </a:p>
+        </p:txBody>
+      </p:sp>
+      <p:sp>
+        <p:nvSpPr>
+          <p:cNvPr id="4" name="TextBox 3">
+            <a:extLst>
+              <a:ext uri="{FF2B5EF4-FFF2-40B4-BE49-F238E27FC236}">
+                <a16:creationId xmlns:a16="http://schemas.microsoft.com/office/drawing/2014/main" id="{DF8BB8BA-CA79-BE3F-E126-94F404A4BA4B}"/>
+              </a:ext>
+            </a:extLst>
+          </p:cNvPr>
+          <p:cNvSpPr txBox="1"/>
+          <p:nvPr/>
+        </p:nvSpPr>
+        <p:spPr>
+          <a:xfrm>
+            <a:off x="15604114" y="9742289"/>
+            <a:ext cx="2074286" cy="153888"/>
+          </a:xfrm>
+          <a:prstGeom prst="rect">
+            <a:avLst/>
+          </a:prstGeom>
+          <a:noFill/>
+        </p:spPr>
+        <p:txBody>
+          <a:bodyPr wrap="none" lIns="0" tIns="0" rIns="0" bIns="0">
+            <a:spAutoFit/>
+          </a:bodyPr>
+          <a:lstStyle/>
+          <a:p>
+            <a:pPr algn="r"/>
+            <a:r>
+              <a:rPr sz="1000" dirty="0">
+                <a:solidFill>
+                  <a:srgbClr val="5B5067"/>
+                </a:solidFill>
+                <a:latin typeface="DM Sans 14pt" pitchFamily="2" charset="77"/>
+              </a:rPr>
+              <a:t>{{</a:t>
+            </a:r>
+            <a:r>
+              <a:rPr sz="1000" dirty="0" err="1">
+                <a:solidFill>
+                  <a:srgbClr val="5B5067"/>
+                </a:solidFill>
+                <a:latin typeface="DM Sans 14pt" pitchFamily="2" charset="77"/>
+              </a:rPr>
+              <a:t>slide_number</a:t>
+            </a:r>
+            <a:r>
+              <a:rPr sz="1000" dirty="0">
+                <a:solidFill>
+                  <a:srgbClr val="5B5067"/>
+                </a:solidFill>
+                <a:latin typeface="DM Sans 14pt" pitchFamily="2" charset="77"/>
+              </a:rPr>
+              <a:t>}} / {{</a:t>
+            </a:r>
+            <a:r>
+              <a:rPr sz="1000" dirty="0" err="1">
+                <a:solidFill>
+                  <a:srgbClr val="5B5067"/>
+                </a:solidFill>
+                <a:latin typeface="DM Sans 14pt" pitchFamily="2" charset="77"/>
+              </a:rPr>
+              <a:t>total_slides</a:t>
+            </a:r>
+            <a:r>
+              <a:rPr sz="1000" dirty="0">
+                <a:solidFill>
+                  <a:srgbClr val="5B5067"/>
+                </a:solidFill>
+                <a:latin typeface="DM Sans 14pt" pitchFamily="2" charset="77"/>
+              </a:rPr>
+              <a:t>}}</a:t>
+            </a:r>
+          </a:p>
+        </p:txBody>
+      </p:sp>
+      <p:pic>
+        <p:nvPicPr>
+          <p:cNvPr id="23" name="Graphic 22">
+            <a:extLst>
+              <a:ext uri="{FF2B5EF4-FFF2-40B4-BE49-F238E27FC236}">
+                <a16:creationId xmlns:a16="http://schemas.microsoft.com/office/drawing/2014/main" id="{FEB395B0-F86D-3691-236F-39E8C0919C43}"/>
+              </a:ext>
+            </a:extLst>
+          </p:cNvPr>
+          <p:cNvPicPr>
+            <a:picLocks noChangeAspect="1"/>
+          </p:cNvPicPr>
+          <p:nvPr/>
+        </p:nvPicPr>
+        <p:blipFill>
+          <a:blip>
+            <a:extLst>
+              <a:ext uri="{96DAC541-7B7A-43D3-8B79-37D633B846F1}">
+                <asvg:svgBlip xmlns:asvg="http://schemas.microsoft.com/office/drawing/2016/SVG/main" r:embed="rId3"/>
+              </a:ext>
+            </a:extLst>
+          </a:blip>
+          <a:stretch>
+            <a:fillRect/>
+          </a:stretch>
+        </p:blipFill>
+        <p:spPr>
+          <a:xfrm>
+            <a:off x="715526" y="636516"/>
+            <a:ext cx="1411947" cy="266701"/>
+          </a:xfrm>
+          <a:prstGeom prst="rect">
+            <a:avLst/>
+          </a:prstGeom>
+        </p:spPr>
+      </p:pic>
     </p:spTree>
   </p:cSld>
   <p:clrMapOvr>
@@ -3184,121 +2950,6 @@
       </p:grpSpPr>
       <p:sp>
         <p:nvSpPr>
-          <p:cNvPr id="2" name="Shape 0"/>
-          <p:cNvSpPr/>
-          <p:nvPr/>
-        </p:nvSpPr>
-        <p:spPr>
-          <a:xfrm>
-            <a:off x="609600" y="457200"/>
-            <a:ext cx="495300" cy="438150"/>
-          </a:xfrm>
-          <a:prstGeom prst="rect">
-            <a:avLst/>
-          </a:prstGeom>
-          <a:solidFill>
-            <a:srgbClr val="643791"/>
-          </a:solidFill>
-          <a:ln/>
-        </p:spPr>
-        <p:txBody>
-          <a:bodyPr/>
-          <a:lstStyle/>
-          <a:p>
-            <a:endParaRPr lang="en-GB">
-              <a:latin typeface="DM Sans 14pt" pitchFamily="2" charset="77"/>
-            </a:endParaRPr>
-          </a:p>
-        </p:txBody>
-      </p:sp>
-      <p:sp>
-        <p:nvSpPr>
-          <p:cNvPr id="3" name="Text 1"/>
-          <p:cNvSpPr/>
-          <p:nvPr/>
-        </p:nvSpPr>
-        <p:spPr>
-          <a:xfrm>
-            <a:off x="571500" y="476250"/>
-            <a:ext cx="495300" cy="457200"/>
-          </a:xfrm>
-          <a:prstGeom prst="rect">
-            <a:avLst/>
-          </a:prstGeom>
-          <a:noFill/>
-          <a:ln/>
-        </p:spPr>
-        <p:txBody>
-          <a:bodyPr wrap="square" lIns="25400" tIns="25400" rIns="25400" bIns="25400" rtlCol="0" anchor="ctr">
-            <a:normAutofit/>
-          </a:bodyPr>
-          <a:lstStyle/>
-          <a:p>
-            <a:pPr marL="0" indent="0" algn="ctr">
-              <a:buNone/>
-            </a:pPr>
-            <a:r>
-              <a:rPr lang="en-US" sz="1350" b="1" kern="0" spc="-27" dirty="0">
-                <a:solidFill>
-                  <a:srgbClr val="FFFFFF"/>
-                </a:solidFill>
-                <a:latin typeface="DM Sans 14pt" pitchFamily="2" charset="77"/>
-                <a:ea typeface="Arial" pitchFamily="34" charset="-122"/>
-                <a:cs typeface="Arial" pitchFamily="34" charset="-120"/>
-              </a:rPr>
-              <a:t>Go</a:t>
-            </a:r>
-            <a:endParaRPr lang="en-US" sz="1350" dirty="0">
-              <a:latin typeface="DM Sans 14pt" pitchFamily="2" charset="77"/>
-            </a:endParaRPr>
-          </a:p>
-        </p:txBody>
-      </p:sp>
-      <p:sp>
-        <p:nvSpPr>
-          <p:cNvPr id="4" name="Text 2"/>
-          <p:cNvSpPr/>
-          <p:nvPr/>
-        </p:nvSpPr>
-        <p:spPr>
-          <a:xfrm>
-            <a:off x="1200150" y="538163"/>
-            <a:ext cx="1561505" cy="314325"/>
-          </a:xfrm>
-          <a:prstGeom prst="rect">
-            <a:avLst/>
-          </a:prstGeom>
-          <a:noFill/>
-          <a:ln/>
-        </p:spPr>
-        <p:txBody>
-          <a:bodyPr wrap="square" lIns="25400" tIns="25400" rIns="25400" bIns="25400" rtlCol="0" anchor="t">
-            <a:normAutofit/>
-          </a:bodyPr>
-          <a:lstStyle/>
-          <a:p>
-            <a:pPr marL="0" indent="0" algn="l">
-              <a:buNone/>
-            </a:pPr>
-            <a:r>
-              <a:rPr lang="en-US" sz="1650" b="1" kern="0" spc="-16" dirty="0">
-                <a:solidFill>
-                  <a:srgbClr val="111111"/>
-                </a:solidFill>
-                <a:latin typeface="DM Sans 14pt" pitchFamily="2" charset="77"/>
-                <a:ea typeface="Arial" pitchFamily="34" charset="-122"/>
-                <a:cs typeface="Arial" pitchFamily="34" charset="-120"/>
-              </a:rPr>
-              <a:t>Jobs Go Public</a:t>
-            </a:r>
-            <a:endParaRPr lang="en-US" sz="1650" dirty="0">
-              <a:latin typeface="DM Sans 14pt" pitchFamily="2" charset="77"/>
-            </a:endParaRPr>
-          </a:p>
-        </p:txBody>
-      </p:sp>
-      <p:sp>
-        <p:nvSpPr>
           <p:cNvPr id="6" name="Text 4"/>
           <p:cNvSpPr/>
           <p:nvPr/>
@@ -3353,21 +3004,17 @@
         </p:nvSpPr>
         <p:spPr>
           <a:xfrm>
-            <a:off x="762000" y="2800350"/>
-            <a:ext cx="11945938" cy="6547740"/>
+            <a:off x="762000" y="1866900"/>
+            <a:ext cx="8921751" cy="7481190"/>
           </a:xfrm>
           <a:prstGeom prst="roundRect">
             <a:avLst>
-              <a:gd name="adj" fmla="val 2332"/>
+              <a:gd name="adj" fmla="val 0"/>
             </a:avLst>
           </a:prstGeom>
-          <a:solidFill>
-            <a:srgbClr val="E8E0F2"/>
-          </a:solidFill>
+          <a:noFill/>
           <a:ln w="19050">
-            <a:solidFill>
-              <a:srgbClr val="643791"/>
-            </a:solidFill>
+            <a:noFill/>
             <a:prstDash val="dash"/>
           </a:ln>
         </p:spPr>
@@ -3375,7 +3022,7 @@
           <a:bodyPr/>
           <a:lstStyle/>
           <a:p>
-            <a:endParaRPr lang="en-GB">
+            <a:endParaRPr lang="en-GB" dirty="0">
               <a:latin typeface="DM Sans 14pt" pitchFamily="2" charset="77"/>
             </a:endParaRPr>
           </a:p>
@@ -3389,23 +3036,17 @@
         </p:nvSpPr>
         <p:spPr>
           <a:xfrm>
-            <a:off x="864348" y="3227185"/>
-            <a:ext cx="11725200" cy="6015600"/>
+            <a:off x="872369" y="2298900"/>
+            <a:ext cx="8704706" cy="6943885"/>
           </a:xfrm>
           <a:prstGeom prst="roundRect">
             <a:avLst>
-              <a:gd name="adj" fmla="val 2614"/>
+              <a:gd name="adj" fmla="val 0"/>
             </a:avLst>
           </a:prstGeom>
-          <a:solidFill>
-            <a:srgbClr val="FFFFFF"/>
-          </a:solidFill>
+          <a:noFill/>
           <a:ln w="9525">
-            <a:solidFill>
-              <a:srgbClr val="000000">
-                <a:alpha val="10000"/>
-              </a:srgbClr>
-            </a:solidFill>
+            <a:noFill/>
             <a:prstDash val="solid"/>
           </a:ln>
         </p:spPr>
@@ -3414,7 +3055,7 @@
           <a:lstStyle/>
           <a:p>
             <a:r>
-              <a:rPr lang="en-US">
+              <a:rPr lang="en-US" dirty="0">
                 <a:latin typeface="DM Sans 14pt" pitchFamily="2" charset="77"/>
               </a:rPr>
               <a:t>{{</a:t>
@@ -3423,210 +3064,14 @@
               <a:rPr lang="en-US" dirty="0" err="1">
                 <a:latin typeface="DM Sans 14pt" pitchFamily="2" charset="77"/>
               </a:rPr>
-              <a:t>chart:benchmark</a:t>
-            </a:r>
-            <a:r>
-              <a:rPr lang="en-US" err="1">
-                <a:latin typeface="DM Sans 14pt" pitchFamily="2" charset="77"/>
-              </a:rPr>
-              <a:t>_</a:t>
-            </a:r>
-            <a:r>
-              <a:rPr lang="en-US">
-                <a:latin typeface="DM Sans 14pt" pitchFamily="2" charset="77"/>
-              </a:rPr>
-              <a:t>average}}</a:t>
-            </a:r>
-            <a:endParaRPr lang="en-US" dirty="0">
-              <a:latin typeface="DM Sans 14pt" pitchFamily="2" charset="77"/>
-            </a:endParaRPr>
-          </a:p>
-        </p:txBody>
-      </p:sp>
-      <p:sp>
-        <p:nvSpPr>
-          <p:cNvPr id="38" name="Text 36"/>
-          <p:cNvSpPr/>
-          <p:nvPr/>
-        </p:nvSpPr>
-        <p:spPr>
-          <a:xfrm>
-            <a:off x="609600" y="9753600"/>
-            <a:ext cx="2373511" cy="190500"/>
-          </a:xfrm>
-          <a:prstGeom prst="rect">
-            <a:avLst/>
-          </a:prstGeom>
-          <a:noFill/>
-          <a:ln/>
-        </p:spPr>
-        <p:txBody>
-          <a:bodyPr wrap="square" lIns="25400" tIns="25400" rIns="25400" bIns="25400" rtlCol="0" anchor="t">
-            <a:normAutofit fontScale="85000" lnSpcReduction="10000"/>
-          </a:bodyPr>
-          <a:lstStyle/>
-          <a:p>
-            <a:pPr marL="0" indent="0" algn="l">
-              <a:buNone/>
-            </a:pPr>
-            <a:r>
-              <a:rPr lang="en-US" sz="1050" kern="0" spc="42" dirty="0">
-                <a:solidFill>
-                  <a:srgbClr val="111111">
-                    <a:alpha val="63000"/>
-                  </a:srgbClr>
-                </a:solidFill>
-                <a:latin typeface="DM Sans 14pt" pitchFamily="2" charset="77"/>
-                <a:ea typeface="Arial" pitchFamily="34" charset="-122"/>
-                <a:cs typeface="Arial" pitchFamily="34" charset="-120"/>
-              </a:rPr>
-              <a:t>{{client_name}} · Advertising Report</a:t>
-            </a:r>
-            <a:endParaRPr lang="en-US" sz="1050" dirty="0">
-              <a:latin typeface="DM Sans 14pt" pitchFamily="2" charset="77"/>
-            </a:endParaRPr>
-          </a:p>
-        </p:txBody>
-      </p:sp>
-      <p:sp>
-        <p:nvSpPr>
-          <p:cNvPr id="8" name="Shape 6"/>
-          <p:cNvSpPr/>
-          <p:nvPr/>
-        </p:nvSpPr>
-        <p:spPr>
-          <a:xfrm>
-            <a:off x="761999" y="1866899"/>
-            <a:ext cx="2772000" cy="723600"/>
-          </a:xfrm>
-          <a:prstGeom prst="roundRect">
-            <a:avLst/>
-          </a:prstGeom>
-          <a:solidFill>
-            <a:srgbClr val="643791"/>
-          </a:solidFill>
-          <a:ln/>
-        </p:spPr>
-        <p:txBody>
-          <a:bodyPr/>
-          <a:lstStyle/>
-          <a:p>
-            <a:pPr algn="r"/>
-            <a:r>
-              <a:rPr lang="en-US" sz="1050" kern="0" spc="182" dirty="0">
-                <a:solidFill>
-                  <a:srgbClr val="FFFFFF">
-                    <a:alpha val="85000"/>
-                  </a:srgbClr>
-                </a:solidFill>
-                <a:latin typeface="DM Sans 14pt" pitchFamily="2" charset="77"/>
-                <a:ea typeface="Arial" pitchFamily="34" charset="-122"/>
-                <a:cs typeface="Arial" pitchFamily="34" charset="-120"/>
-              </a:rPr>
-              <a:t>BENCHMARK </a:t>
-            </a:r>
-          </a:p>
-          <a:p>
-            <a:pPr algn="r"/>
-            <a:r>
-              <a:rPr lang="en-US" sz="1050" kern="0" spc="182" dirty="0">
-                <a:solidFill>
-                  <a:srgbClr val="FFFFFF">
-                    <a:alpha val="85000"/>
-                  </a:srgbClr>
-                </a:solidFill>
-                <a:latin typeface="DM Sans 14pt" pitchFamily="2" charset="77"/>
-                <a:ea typeface="Arial" pitchFamily="34" charset="-122"/>
-                <a:cs typeface="Arial" pitchFamily="34" charset="-120"/>
-              </a:rPr>
-              <a:t>AVERAGE</a:t>
-            </a:r>
-          </a:p>
-          <a:p>
-            <a:pPr algn="r"/>
-            <a:r>
-              <a:rPr lang="en-US" sz="1050" kern="0" spc="182" dirty="0">
-                <a:solidFill>
-                  <a:srgbClr val="FFFFFF">
-                    <a:alpha val="85000"/>
-                  </a:srgbClr>
-                </a:solidFill>
-                <a:latin typeface="DM Sans 14pt" pitchFamily="2" charset="77"/>
-                <a:ea typeface="Arial" pitchFamily="34" charset="-122"/>
-                <a:cs typeface="Arial" pitchFamily="34" charset="-120"/>
-              </a:rPr>
-              <a:t> VIEWS</a:t>
-            </a:r>
-            <a:endParaRPr lang="en-US" sz="1050" dirty="0">
-              <a:latin typeface="DM Sans 14pt" pitchFamily="2" charset="77"/>
-            </a:endParaRPr>
-          </a:p>
-        </p:txBody>
-      </p:sp>
-      <p:sp>
-        <p:nvSpPr>
-          <p:cNvPr id="9" name="Shape 7"/>
-          <p:cNvSpPr/>
-          <p:nvPr/>
-        </p:nvSpPr>
-        <p:spPr>
-          <a:xfrm>
-            <a:off x="811592" y="1925687"/>
-            <a:ext cx="1407600" cy="604800"/>
-          </a:xfrm>
-          <a:prstGeom prst="roundRect">
-            <a:avLst>
-              <a:gd name="adj" fmla="val 17778"/>
-            </a:avLst>
-          </a:prstGeom>
-          <a:solidFill>
-            <a:srgbClr val="FFFFFF">
-              <a:alpha val="15000"/>
-            </a:srgbClr>
-          </a:solidFill>
-          <a:ln/>
-        </p:spPr>
-        <p:txBody>
-          <a:bodyPr lIns="36000" tIns="36000" rIns="36000" bIns="36000" anchor="ctr"/>
-          <a:lstStyle/>
-          <a:p>
-            <a:pPr algn="ctr"/>
-            <a:r>
-              <a:rPr lang="en-US" sz="2800" kern="0" spc="-67" dirty="0">
-                <a:solidFill>
-                  <a:srgbClr val="FFFFFF"/>
-                </a:solidFill>
-                <a:latin typeface="DM Sans 14pt" pitchFamily="2" charset="77"/>
-                <a:ea typeface="Arial" pitchFamily="34" charset="-122"/>
-                <a:cs typeface="Arial" pitchFamily="34" charset="-120"/>
-              </a:rPr>
-              <a:t>{{</a:t>
-            </a:r>
-            <a:r>
-              <a:rPr lang="en-US" sz="2800" kern="0" spc="-67" dirty="0" err="1">
-                <a:solidFill>
-                  <a:srgbClr val="FFFFFF"/>
-                </a:solidFill>
-                <a:latin typeface="DM Sans 14pt" pitchFamily="2" charset="77"/>
-                <a:ea typeface="Arial" pitchFamily="34" charset="-122"/>
-                <a:cs typeface="Arial" pitchFamily="34" charset="-120"/>
-              </a:rPr>
-              <a:t>stat_benchmark_average_views</a:t>
-            </a:r>
-            <a:r>
-              <a:rPr lang="en-US" sz="2800" kern="0" spc="-67" dirty="0">
-                <a:solidFill>
-                  <a:srgbClr val="FFFFFF"/>
-                </a:solidFill>
-                <a:latin typeface="DM Sans 14pt" pitchFamily="2" charset="77"/>
-                <a:ea typeface="Arial" pitchFamily="34" charset="-122"/>
-                <a:cs typeface="Arial" pitchFamily="34" charset="-120"/>
+              <a:t>chart:benchmark_average</a:t>
+            </a:r>
+            <a:r>
+              <a:rPr lang="en-US" dirty="0">
+                <a:latin typeface="DM Sans 14pt" pitchFamily="2" charset="77"/>
               </a:rPr>
               <a:t>}}</a:t>
             </a:r>
-            <a:endParaRPr lang="en-US" sz="2800" dirty="0">
-              <a:latin typeface="DM Sans 14pt" pitchFamily="2" charset="77"/>
-            </a:endParaRPr>
           </a:p>
         </p:txBody>
       </p:sp>
@@ -3681,482 +3126,6 @@
       </p:sp>
       <p:sp>
         <p:nvSpPr>
-          <p:cNvPr id="71" name="Text 26">
-            <a:extLst>
-              <a:ext uri="{FF2B5EF4-FFF2-40B4-BE49-F238E27FC236}">
-                <a16:creationId xmlns:a16="http://schemas.microsoft.com/office/drawing/2014/main" id="{85F60CBB-25A0-A776-C08E-574558953B87}"/>
-              </a:ext>
-            </a:extLst>
-          </p:cNvPr>
-          <p:cNvSpPr/>
-          <p:nvPr/>
-        </p:nvSpPr>
-        <p:spPr>
-          <a:xfrm>
-            <a:off x="857249" y="2934182"/>
-            <a:ext cx="4065789" cy="190500"/>
-          </a:xfrm>
-          <a:prstGeom prst="rect">
-            <a:avLst/>
-          </a:prstGeom>
-          <a:noFill/>
-          <a:ln/>
-        </p:spPr>
-        <p:txBody>
-          <a:bodyPr wrap="square" lIns="25400" tIns="25400" rIns="25400" bIns="25400" rtlCol="0" anchor="t">
-            <a:normAutofit fontScale="92500" lnSpcReduction="10000"/>
-          </a:bodyPr>
-          <a:lstStyle/>
-          <a:p>
-            <a:endParaRPr lang="en-US" sz="1100" dirty="0">
-              <a:latin typeface="DM Sans 14pt" pitchFamily="2" charset="77"/>
-            </a:endParaRPr>
-          </a:p>
-        </p:txBody>
-      </p:sp>
-      <p:sp>
-        <p:nvSpPr>
-          <p:cNvPr id="13" name="Shape 6">
-            <a:extLst>
-              <a:ext uri="{FF2B5EF4-FFF2-40B4-BE49-F238E27FC236}">
-                <a16:creationId xmlns:a16="http://schemas.microsoft.com/office/drawing/2014/main" id="{8C44538B-8BCE-A405-F239-6C4E08DB3913}"/>
-              </a:ext>
-            </a:extLst>
-          </p:cNvPr>
-          <p:cNvSpPr/>
-          <p:nvPr/>
-        </p:nvSpPr>
-        <p:spPr>
-          <a:xfrm>
-            <a:off x="3778939" y="1866899"/>
-            <a:ext cx="2772000" cy="723600"/>
-          </a:xfrm>
-          <a:prstGeom prst="roundRect">
-            <a:avLst/>
-          </a:prstGeom>
-          <a:solidFill>
-            <a:srgbClr val="E6FF6E"/>
-          </a:solidFill>
-          <a:ln/>
-        </p:spPr>
-        <p:txBody>
-          <a:bodyPr/>
-          <a:lstStyle/>
-          <a:p>
-            <a:pPr algn="r"/>
-            <a:r>
-              <a:rPr lang="en-US" sz="1050" kern="0" spc="182" dirty="0">
-                <a:latin typeface="DM Sans 14pt" pitchFamily="2" charset="77"/>
-                <a:ea typeface="Arial" pitchFamily="34" charset="-122"/>
-                <a:cs typeface="Arial" pitchFamily="34" charset="-120"/>
-              </a:rPr>
-              <a:t>YOUR JOBS – </a:t>
-            </a:r>
-          </a:p>
-          <a:p>
-            <a:pPr algn="r"/>
-            <a:r>
-              <a:rPr lang="en-US" sz="1050" kern="0" spc="182" dirty="0">
-                <a:latin typeface="DM Sans 14pt" pitchFamily="2" charset="77"/>
-                <a:ea typeface="Arial" pitchFamily="34" charset="-122"/>
-                <a:cs typeface="Arial" pitchFamily="34" charset="-120"/>
-              </a:rPr>
-              <a:t>AVERAGE</a:t>
-            </a:r>
-          </a:p>
-          <a:p>
-            <a:pPr algn="r"/>
-            <a:r>
-              <a:rPr lang="en-US" sz="1050" kern="0" spc="182" dirty="0">
-                <a:latin typeface="DM Sans 14pt" pitchFamily="2" charset="77"/>
-                <a:ea typeface="Arial" pitchFamily="34" charset="-122"/>
-                <a:cs typeface="Arial" pitchFamily="34" charset="-120"/>
-              </a:rPr>
-              <a:t>VIEWS</a:t>
-            </a:r>
-            <a:endParaRPr lang="en-US" sz="1050" dirty="0">
-              <a:latin typeface="DM Sans 14pt" pitchFamily="2" charset="77"/>
-            </a:endParaRPr>
-          </a:p>
-        </p:txBody>
-      </p:sp>
-      <p:sp>
-        <p:nvSpPr>
-          <p:cNvPr id="23" name="Shape 7">
-            <a:extLst>
-              <a:ext uri="{FF2B5EF4-FFF2-40B4-BE49-F238E27FC236}">
-                <a16:creationId xmlns:a16="http://schemas.microsoft.com/office/drawing/2014/main" id="{0EBED078-0815-5F85-26FB-DB9ABFCCCCB7}"/>
-              </a:ext>
-            </a:extLst>
-          </p:cNvPr>
-          <p:cNvSpPr/>
-          <p:nvPr/>
-        </p:nvSpPr>
-        <p:spPr>
-          <a:xfrm>
-            <a:off x="3828532" y="1925687"/>
-            <a:ext cx="1407600" cy="604800"/>
-          </a:xfrm>
-          <a:prstGeom prst="roundRect">
-            <a:avLst>
-              <a:gd name="adj" fmla="val 17778"/>
-            </a:avLst>
-          </a:prstGeom>
-          <a:solidFill>
-            <a:srgbClr val="D4EB66"/>
-          </a:solidFill>
-          <a:ln/>
-        </p:spPr>
-        <p:txBody>
-          <a:bodyPr lIns="36000" tIns="36000" rIns="36000" bIns="36000" anchor="ctr"/>
-          <a:lstStyle/>
-          <a:p>
-            <a:pPr algn="ctr">
-              <a:lnSpc>
-                <a:spcPct val="110000"/>
-              </a:lnSpc>
-            </a:pPr>
-            <a:r>
-              <a:rPr lang="en-US" sz="2800" kern="0" spc="-67" dirty="0">
-                <a:solidFill>
-                  <a:srgbClr val="757575"/>
-                </a:solidFill>
-                <a:latin typeface="DM Sans 14pt" pitchFamily="2" charset="77"/>
-                <a:ea typeface="Arial" pitchFamily="34" charset="-122"/>
-                <a:cs typeface="Arial" pitchFamily="34" charset="-120"/>
-              </a:rPr>
-              <a:t>{{</a:t>
-            </a:r>
-            <a:r>
-              <a:rPr lang="en-US" sz="2800" kern="0" spc="-67" dirty="0" err="1">
-                <a:solidFill>
-                  <a:srgbClr val="757575"/>
-                </a:solidFill>
-                <a:latin typeface="DM Sans 14pt" pitchFamily="2" charset="77"/>
-                <a:ea typeface="Arial" pitchFamily="34" charset="-122"/>
-                <a:cs typeface="Arial" pitchFamily="34" charset="-120"/>
-              </a:rPr>
-              <a:t>stat_your_jobs_average_views</a:t>
-            </a:r>
-            <a:r>
-              <a:rPr lang="en-US" sz="2800" kern="0" spc="-67" dirty="0">
-                <a:solidFill>
-                  <a:srgbClr val="757575"/>
-                </a:solidFill>
-                <a:latin typeface="DM Sans 14pt" pitchFamily="2" charset="77"/>
-                <a:ea typeface="Arial" pitchFamily="34" charset="-122"/>
-                <a:cs typeface="Arial" pitchFamily="34" charset="-120"/>
-              </a:rPr>
-              <a:t>}}</a:t>
-            </a:r>
-            <a:endParaRPr lang="en-US" sz="2800" dirty="0">
-              <a:solidFill>
-                <a:srgbClr val="757575"/>
-              </a:solidFill>
-              <a:latin typeface="DM Sans 14pt" pitchFamily="2" charset="77"/>
-            </a:endParaRPr>
-          </a:p>
-        </p:txBody>
-      </p:sp>
-      <p:sp>
-        <p:nvSpPr>
-          <p:cNvPr id="26" name="Shape 6">
-            <a:extLst>
-              <a:ext uri="{FF2B5EF4-FFF2-40B4-BE49-F238E27FC236}">
-                <a16:creationId xmlns:a16="http://schemas.microsoft.com/office/drawing/2014/main" id="{D1EB76D1-D1DC-624B-0A48-A56A3A39CD50}"/>
-              </a:ext>
-            </a:extLst>
-          </p:cNvPr>
-          <p:cNvSpPr/>
-          <p:nvPr/>
-        </p:nvSpPr>
-        <p:spPr>
-          <a:xfrm>
-            <a:off x="6736166" y="1866900"/>
-            <a:ext cx="2772000" cy="723600"/>
-          </a:xfrm>
-          <a:prstGeom prst="roundRect">
-            <a:avLst/>
-          </a:prstGeom>
-          <a:solidFill>
-            <a:srgbClr val="643791"/>
-          </a:solidFill>
-          <a:ln/>
-        </p:spPr>
-        <p:txBody>
-          <a:bodyPr/>
-          <a:lstStyle/>
-          <a:p>
-            <a:pPr algn="r"/>
-            <a:r>
-              <a:rPr lang="en-US" sz="1050" kern="0" spc="182" dirty="0">
-                <a:solidFill>
-                  <a:srgbClr val="FFFFFF">
-                    <a:alpha val="85000"/>
-                  </a:srgbClr>
-                </a:solidFill>
-                <a:latin typeface="DM Sans 14pt" pitchFamily="2" charset="77"/>
-                <a:ea typeface="Arial" pitchFamily="34" charset="-122"/>
-                <a:cs typeface="Arial" pitchFamily="34" charset="-120"/>
-              </a:rPr>
-              <a:t>BENCHMARK </a:t>
-            </a:r>
-          </a:p>
-          <a:p>
-            <a:pPr algn="r"/>
-            <a:r>
-              <a:rPr lang="en-US" sz="1050" kern="0" spc="182" dirty="0">
-                <a:solidFill>
-                  <a:srgbClr val="FFFFFF">
-                    <a:alpha val="85000"/>
-                  </a:srgbClr>
-                </a:solidFill>
-                <a:latin typeface="DM Sans 14pt" pitchFamily="2" charset="77"/>
-                <a:ea typeface="Arial" pitchFamily="34" charset="-122"/>
-                <a:cs typeface="Arial" pitchFamily="34" charset="-120"/>
-              </a:rPr>
-              <a:t>AVERAGE</a:t>
-            </a:r>
-          </a:p>
-          <a:p>
-            <a:pPr algn="r"/>
-            <a:r>
-              <a:rPr lang="en-US" sz="1050" kern="0" spc="182" dirty="0">
-                <a:solidFill>
-                  <a:srgbClr val="FFFFFF">
-                    <a:alpha val="85000"/>
-                  </a:srgbClr>
-                </a:solidFill>
-                <a:latin typeface="DM Sans 14pt" pitchFamily="2" charset="77"/>
-                <a:ea typeface="Arial" pitchFamily="34" charset="-122"/>
-                <a:cs typeface="Arial" pitchFamily="34" charset="-120"/>
-              </a:rPr>
-              <a:t> APPLIES</a:t>
-            </a:r>
-            <a:endParaRPr lang="en-US" sz="1050" dirty="0">
-              <a:latin typeface="DM Sans 14pt" pitchFamily="2" charset="77"/>
-            </a:endParaRPr>
-          </a:p>
-        </p:txBody>
-      </p:sp>
-      <p:sp>
-        <p:nvSpPr>
-          <p:cNvPr id="27" name="Shape 7">
-            <a:extLst>
-              <a:ext uri="{FF2B5EF4-FFF2-40B4-BE49-F238E27FC236}">
-                <a16:creationId xmlns:a16="http://schemas.microsoft.com/office/drawing/2014/main" id="{1F3CEC1A-B76C-2510-ACD2-F9BB079DEBEA}"/>
-              </a:ext>
-            </a:extLst>
-          </p:cNvPr>
-          <p:cNvSpPr/>
-          <p:nvPr/>
-        </p:nvSpPr>
-        <p:spPr>
-          <a:xfrm>
-            <a:off x="6785759" y="1925687"/>
-            <a:ext cx="1407600" cy="604800"/>
-          </a:xfrm>
-          <a:prstGeom prst="roundRect">
-            <a:avLst>
-              <a:gd name="adj" fmla="val 17778"/>
-            </a:avLst>
-          </a:prstGeom>
-          <a:solidFill>
-            <a:srgbClr val="FFFFFF">
-              <a:alpha val="15000"/>
-            </a:srgbClr>
-          </a:solidFill>
-          <a:ln/>
-        </p:spPr>
-        <p:txBody>
-          <a:bodyPr lIns="36000" tIns="36000" rIns="36000" bIns="36000" anchor="ctr"/>
-          <a:lstStyle/>
-          <a:p>
-            <a:pPr algn="ctr"/>
-            <a:r>
-              <a:rPr lang="en-US" sz="2800" kern="0" spc="-67" dirty="0">
-                <a:solidFill>
-                  <a:srgbClr val="FFFFFF"/>
-                </a:solidFill>
-                <a:latin typeface="DM Sans 14pt" pitchFamily="2" charset="77"/>
-                <a:ea typeface="Arial" pitchFamily="34" charset="-122"/>
-                <a:cs typeface="Arial" pitchFamily="34" charset="-120"/>
-              </a:rPr>
-              <a:t>{{</a:t>
-            </a:r>
-            <a:r>
-              <a:rPr lang="en-US" sz="2800" kern="0" spc="-67" dirty="0" err="1">
-                <a:solidFill>
-                  <a:srgbClr val="FFFFFF"/>
-                </a:solidFill>
-                <a:latin typeface="DM Sans 14pt" pitchFamily="2" charset="77"/>
-                <a:ea typeface="Arial" pitchFamily="34" charset="-122"/>
-                <a:cs typeface="Arial" pitchFamily="34" charset="-120"/>
-              </a:rPr>
-              <a:t>stat_benchmark_average_applies</a:t>
-            </a:r>
-            <a:r>
-              <a:rPr lang="en-US" sz="2800" kern="0" spc="-67" dirty="0">
-                <a:solidFill>
-                  <a:srgbClr val="FFFFFF"/>
-                </a:solidFill>
-                <a:latin typeface="DM Sans 14pt" pitchFamily="2" charset="77"/>
-                <a:ea typeface="Arial" pitchFamily="34" charset="-122"/>
-                <a:cs typeface="Arial" pitchFamily="34" charset="-120"/>
-              </a:rPr>
-              <a:t>}}</a:t>
-            </a:r>
-            <a:endParaRPr lang="en-US" sz="2800" dirty="0">
-              <a:latin typeface="DM Sans 14pt" pitchFamily="2" charset="77"/>
-            </a:endParaRPr>
-          </a:p>
-        </p:txBody>
-      </p:sp>
-      <p:sp>
-        <p:nvSpPr>
-          <p:cNvPr id="30" name="Shape 6">
-            <a:extLst>
-              <a:ext uri="{FF2B5EF4-FFF2-40B4-BE49-F238E27FC236}">
-                <a16:creationId xmlns:a16="http://schemas.microsoft.com/office/drawing/2014/main" id="{57A19399-4232-DBD4-372D-5800DB9229C0}"/>
-              </a:ext>
-            </a:extLst>
-          </p:cNvPr>
-          <p:cNvSpPr/>
-          <p:nvPr/>
-        </p:nvSpPr>
-        <p:spPr>
-          <a:xfrm>
-            <a:off x="9750531" y="1866900"/>
-            <a:ext cx="2772000" cy="723600"/>
-          </a:xfrm>
-          <a:prstGeom prst="roundRect">
-            <a:avLst/>
-          </a:prstGeom>
-          <a:solidFill>
-            <a:srgbClr val="E6FF6E"/>
-          </a:solidFill>
-          <a:ln/>
-        </p:spPr>
-        <p:txBody>
-          <a:bodyPr/>
-          <a:lstStyle/>
-          <a:p>
-            <a:pPr algn="r"/>
-            <a:r>
-              <a:rPr lang="en-US" sz="1050" kern="0" spc="182" dirty="0">
-                <a:latin typeface="DM Sans 14pt" pitchFamily="2" charset="77"/>
-                <a:ea typeface="Arial" pitchFamily="34" charset="-122"/>
-                <a:cs typeface="Arial" pitchFamily="34" charset="-120"/>
-              </a:rPr>
-              <a:t>YOUR JOBS – </a:t>
-            </a:r>
-          </a:p>
-          <a:p>
-            <a:pPr algn="r"/>
-            <a:r>
-              <a:rPr lang="en-US" sz="1050" kern="0" spc="182" dirty="0">
-                <a:latin typeface="DM Sans 14pt" pitchFamily="2" charset="77"/>
-                <a:ea typeface="Arial" pitchFamily="34" charset="-122"/>
-                <a:cs typeface="Arial" pitchFamily="34" charset="-120"/>
-              </a:rPr>
-              <a:t>AVERAGE</a:t>
-            </a:r>
-          </a:p>
-          <a:p>
-            <a:pPr algn="r"/>
-            <a:r>
-              <a:rPr lang="en-US" sz="1050" kern="0" spc="182" dirty="0">
-                <a:latin typeface="DM Sans 14pt" pitchFamily="2" charset="77"/>
-                <a:cs typeface="Arial" pitchFamily="34" charset="-120"/>
-              </a:rPr>
-              <a:t>APPLIES</a:t>
-            </a:r>
-            <a:endParaRPr lang="en-US" sz="1050" dirty="0">
-              <a:latin typeface="DM Sans 14pt" pitchFamily="2" charset="77"/>
-            </a:endParaRPr>
-          </a:p>
-        </p:txBody>
-      </p:sp>
-      <p:sp>
-        <p:nvSpPr>
-          <p:cNvPr id="31" name="Shape 7">
-            <a:extLst>
-              <a:ext uri="{FF2B5EF4-FFF2-40B4-BE49-F238E27FC236}">
-                <a16:creationId xmlns:a16="http://schemas.microsoft.com/office/drawing/2014/main" id="{2CB93A45-F9B5-B969-F066-7828CDAC37F3}"/>
-              </a:ext>
-            </a:extLst>
-          </p:cNvPr>
-          <p:cNvSpPr/>
-          <p:nvPr/>
-        </p:nvSpPr>
-        <p:spPr>
-          <a:xfrm>
-            <a:off x="9800124" y="1925687"/>
-            <a:ext cx="1407600" cy="604800"/>
-          </a:xfrm>
-          <a:prstGeom prst="roundRect">
-            <a:avLst>
-              <a:gd name="adj" fmla="val 17778"/>
-            </a:avLst>
-          </a:prstGeom>
-          <a:solidFill>
-            <a:srgbClr val="D4EB66"/>
-          </a:solidFill>
-          <a:ln/>
-        </p:spPr>
-        <p:txBody>
-          <a:bodyPr lIns="36000" tIns="36000" rIns="36000" bIns="36000" anchor="ctr"/>
-          <a:lstStyle/>
-          <a:p>
-            <a:pPr algn="ctr">
-              <a:lnSpc>
-                <a:spcPct val="110000"/>
-              </a:lnSpc>
-            </a:pPr>
-            <a:r>
-              <a:rPr lang="en-US" sz="2800" kern="0" spc="-67" dirty="0">
-                <a:solidFill>
-                  <a:srgbClr val="757575"/>
-                </a:solidFill>
-                <a:latin typeface="DM Sans 14pt" pitchFamily="2" charset="77"/>
-                <a:ea typeface="Arial" pitchFamily="34" charset="-122"/>
-                <a:cs typeface="Arial" pitchFamily="34" charset="-120"/>
-              </a:rPr>
-              <a:t>{{</a:t>
-            </a:r>
-            <a:r>
-              <a:rPr lang="en-US" sz="2800" kern="0" spc="-67" dirty="0" err="1">
-                <a:solidFill>
-                  <a:srgbClr val="757575"/>
-                </a:solidFill>
-                <a:latin typeface="DM Sans 14pt" pitchFamily="2" charset="77"/>
-                <a:ea typeface="Arial" pitchFamily="34" charset="-122"/>
-                <a:cs typeface="Arial" pitchFamily="34" charset="-120"/>
-              </a:rPr>
-              <a:t>stat_your_jobs_average_applies</a:t>
-            </a:r>
-            <a:r>
-              <a:rPr lang="en-US" sz="2800" kern="0" spc="-67" dirty="0">
-                <a:solidFill>
-                  <a:srgbClr val="757575"/>
-                </a:solidFill>
-                <a:latin typeface="DM Sans 14pt" pitchFamily="2" charset="77"/>
-                <a:ea typeface="Arial" pitchFamily="34" charset="-122"/>
-                <a:cs typeface="Arial" pitchFamily="34" charset="-120"/>
-              </a:rPr>
-              <a:t>}}</a:t>
-            </a:r>
-            <a:endParaRPr lang="en-US" sz="2800" dirty="0">
-              <a:solidFill>
-                <a:srgbClr val="757575"/>
-              </a:solidFill>
-              <a:latin typeface="DM Sans 14pt" pitchFamily="2" charset="77"/>
-            </a:endParaRPr>
-          </a:p>
-        </p:txBody>
-      </p:sp>
-      <p:sp>
-        <p:nvSpPr>
           <p:cNvPr id="32" name="Rectangle 31">
             <a:extLst>
               <a:ext uri="{FF2B5EF4-FFF2-40B4-BE49-F238E27FC236}">
@@ -4169,8 +3138,8 @@
         </p:nvSpPr>
         <p:spPr>
           <a:xfrm>
-            <a:off x="888847" y="2800350"/>
-            <a:ext cx="8009197" cy="428400"/>
+            <a:off x="761999" y="1866900"/>
+            <a:ext cx="8921751" cy="432000"/>
           </a:xfrm>
           <a:prstGeom prst="rect">
             <a:avLst/>
@@ -4200,6 +3169,7 @@
           <a:bodyPr lIns="0" tIns="0" rIns="0" bIns="0" rtlCol="0" anchor="ctr"/>
           <a:lstStyle/>
           <a:p>
+            <a:pPr algn="ctr"/>
             <a:r>
               <a:rPr lang="en-US" kern="0" spc="84" dirty="0">
                 <a:solidFill>
@@ -4216,167 +3186,6 @@
             <a:endParaRPr lang="en-US" dirty="0">
               <a:latin typeface="DM Sans 14pt" pitchFamily="2" charset="77"/>
             </a:endParaRPr>
-          </a:p>
-        </p:txBody>
-      </p:sp>
-      <p:sp>
-        <p:nvSpPr>
-          <p:cNvPr id="5" name="Footer Placeholder 1">
-            <a:extLst>
-              <a:ext uri="{FF2B5EF4-FFF2-40B4-BE49-F238E27FC236}">
-                <a16:creationId xmlns:a16="http://schemas.microsoft.com/office/drawing/2014/main" id="{D6275BDE-DD84-855F-5788-EDDFB4BE3224}"/>
-              </a:ext>
-            </a:extLst>
-          </p:cNvPr>
-          <p:cNvSpPr txBox="1">
-            <a:spLocks/>
-          </p:cNvSpPr>
-          <p:nvPr/>
-        </p:nvSpPr>
-        <p:spPr>
-          <a:xfrm>
-            <a:off x="17233255" y="9753300"/>
-            <a:ext cx="522000" cy="190800"/>
-          </a:xfrm>
-          <a:prstGeom prst="rect">
-            <a:avLst/>
-          </a:prstGeom>
-        </p:spPr>
-        <p:txBody>
-          <a:bodyPr vert="horz" lIns="36000" tIns="36000" rIns="36000" bIns="36000" rtlCol="0" anchor="ctr"/>
-          <a:lstStyle>
-            <a:lvl1pPr marL="0" algn="l" defTabSz="914400" rtl="0" eaLnBrk="1" latinLnBrk="0" hangingPunct="1">
-              <a:defRPr sz="900" kern="1200">
-                <a:solidFill>
-                  <a:srgbClr val="E8E0F2"/>
-                </a:solidFill>
-                <a:latin typeface="DM Sans 14pt" pitchFamily="2" charset="77"/>
-                <a:ea typeface="+mn-ea"/>
-                <a:cs typeface="+mn-cs"/>
-              </a:defRPr>
-            </a:lvl1pPr>
-            <a:lvl2pPr marL="457200" algn="l" defTabSz="914400" rtl="0" eaLnBrk="1" latinLnBrk="0" hangingPunct="1">
-              <a:defRPr sz="1800" kern="1200">
-                <a:solidFill>
-                  <a:schemeClr val="tx1"/>
-                </a:solidFill>
-                <a:latin typeface="+mn-lt"/>
-                <a:ea typeface="+mn-ea"/>
-                <a:cs typeface="+mn-cs"/>
-              </a:defRPr>
-            </a:lvl2pPr>
-            <a:lvl3pPr marL="914400" algn="l" defTabSz="914400" rtl="0" eaLnBrk="1" latinLnBrk="0" hangingPunct="1">
-              <a:defRPr sz="1800" kern="1200">
-                <a:solidFill>
-                  <a:schemeClr val="tx1"/>
-                </a:solidFill>
-                <a:latin typeface="+mn-lt"/>
-                <a:ea typeface="+mn-ea"/>
-                <a:cs typeface="+mn-cs"/>
-              </a:defRPr>
-            </a:lvl3pPr>
-            <a:lvl4pPr marL="1371600" algn="l" defTabSz="914400" rtl="0" eaLnBrk="1" latinLnBrk="0" hangingPunct="1">
-              <a:defRPr sz="1800" kern="1200">
-                <a:solidFill>
-                  <a:schemeClr val="tx1"/>
-                </a:solidFill>
-                <a:latin typeface="+mn-lt"/>
-                <a:ea typeface="+mn-ea"/>
-                <a:cs typeface="+mn-cs"/>
-              </a:defRPr>
-            </a:lvl4pPr>
-            <a:lvl5pPr marL="1828800" algn="l" defTabSz="914400" rtl="0" eaLnBrk="1" latinLnBrk="0" hangingPunct="1">
-              <a:defRPr sz="1800" kern="1200">
-                <a:solidFill>
-                  <a:schemeClr val="tx1"/>
-                </a:solidFill>
-                <a:latin typeface="+mn-lt"/>
-                <a:ea typeface="+mn-ea"/>
-                <a:cs typeface="+mn-cs"/>
-              </a:defRPr>
-            </a:lvl5pPr>
-            <a:lvl6pPr marL="2286000" algn="l" defTabSz="914400" rtl="0" eaLnBrk="1" latinLnBrk="0" hangingPunct="1">
-              <a:defRPr sz="1800" kern="1200">
-                <a:solidFill>
-                  <a:schemeClr val="tx1"/>
-                </a:solidFill>
-                <a:latin typeface="+mn-lt"/>
-                <a:ea typeface="+mn-ea"/>
-                <a:cs typeface="+mn-cs"/>
-              </a:defRPr>
-            </a:lvl6pPr>
-            <a:lvl7pPr marL="2743200" algn="l" defTabSz="914400" rtl="0" eaLnBrk="1" latinLnBrk="0" hangingPunct="1">
-              <a:defRPr sz="1800" kern="1200">
-                <a:solidFill>
-                  <a:schemeClr val="tx1"/>
-                </a:solidFill>
-                <a:latin typeface="+mn-lt"/>
-                <a:ea typeface="+mn-ea"/>
-                <a:cs typeface="+mn-cs"/>
-              </a:defRPr>
-            </a:lvl7pPr>
-            <a:lvl8pPr marL="3200400" algn="l" defTabSz="914400" rtl="0" eaLnBrk="1" latinLnBrk="0" hangingPunct="1">
-              <a:defRPr sz="1800" kern="1200">
-                <a:solidFill>
-                  <a:schemeClr val="tx1"/>
-                </a:solidFill>
-                <a:latin typeface="+mn-lt"/>
-                <a:ea typeface="+mn-ea"/>
-                <a:cs typeface="+mn-cs"/>
-              </a:defRPr>
-            </a:lvl8pPr>
-            <a:lvl9pPr marL="3657600" algn="l" defTabSz="914400" rtl="0" eaLnBrk="1" latinLnBrk="0" hangingPunct="1">
-              <a:defRPr sz="1800" kern="1200">
-                <a:solidFill>
-                  <a:schemeClr val="tx1"/>
-                </a:solidFill>
-                <a:latin typeface="+mn-lt"/>
-                <a:ea typeface="+mn-ea"/>
-                <a:cs typeface="+mn-cs"/>
-              </a:defRPr>
-            </a:lvl9pPr>
-          </a:lstStyle>
-          <a:p>
-            <a:r>
-              <a:rPr lang="en-GB" dirty="0">
-                <a:solidFill>
-                  <a:srgbClr val="757575"/>
-                </a:solidFill>
-              </a:rPr>
-              <a:t>{{</a:t>
-            </a:r>
-            <a:r>
-              <a:rPr lang="en-GB" dirty="0" err="1">
-                <a:solidFill>
-                  <a:srgbClr val="757575"/>
-                </a:solidFill>
-              </a:rPr>
-              <a:t>slide_number</a:t>
-            </a:r>
-            <a:r>
-              <a:rPr lang="en-GB" dirty="0">
-                <a:solidFill>
-                  <a:srgbClr val="757575"/>
-                </a:solidFill>
-              </a:rPr>
-              <a:t>}} / {{</a:t>
-            </a:r>
-            <a:r>
-              <a:rPr lang="en-GB" dirty="0" err="1">
-                <a:solidFill>
-                  <a:srgbClr val="757575"/>
-                </a:solidFill>
-              </a:rPr>
-              <a:t>total_slides</a:t>
-            </a:r>
-            <a:r>
-              <a:rPr lang="en-GB" dirty="0">
-                <a:solidFill>
-                  <a:srgbClr val="757575"/>
-                </a:solidFill>
-              </a:rPr>
-              <a:t>}}</a:t>
-            </a:r>
           </a:p>
         </p:txBody>
       </p:sp>
@@ -4413,18 +3222,12 @@
           <a:bodyPr/>
           <a:lstStyle/>
           <a:p>
-            <a:pPr>
-              <a:lnSpc>
-                <a:spcPct val="110000"/>
-              </a:lnSpc>
-            </a:pPr>
             <a:r>
               <a:rPr lang="en-GB" sz="1400" dirty="0">
                 <a:solidFill>
                   <a:srgbClr val="643791"/>
                 </a:solidFill>
                 <a:latin typeface="DM Sans 14pt" pitchFamily="2" charset="77"/>
-                <a:cs typeface="Arial" pitchFamily="34" charset="-120"/>
               </a:rPr>
               <a:t>{{</a:t>
             </a:r>
@@ -4434,27 +3237,15 @@
                   <a:srgbClr val="643791"/>
                 </a:solidFill>
                 <a:latin typeface="DM Sans 14pt" pitchFamily="2" charset="77"/>
-                <a:cs typeface="Arial" pitchFamily="34" charset="-120"/>
-              </a:rPr>
-              <a:t>chart_explainer_benchmark_</a:t>
-            </a:r>
-            <a:r>
-              <a:rPr lang="en-GB" sz="1400" err="1">
-                <a:solidFill>
-                  <a:srgbClr val="643791"/>
-                </a:solidFill>
-                <a:latin typeface="DM Sans 14pt" pitchFamily="2" charset="77"/>
-                <a:cs typeface="Arial" pitchFamily="34" charset="-120"/>
-              </a:rPr>
-              <a:t>average</a:t>
-            </a:r>
-            <a:r>
-              <a:rPr lang="en-GB" sz="1400">
-                <a:solidFill>
-                  <a:srgbClr val="643791"/>
-                </a:solidFill>
-                <a:latin typeface="DM Sans 14pt" pitchFamily="2" charset="77"/>
-                <a:cs typeface="Arial" pitchFamily="34" charset="-120"/>
+              </a:rPr>
+              <a:t>chart_explainer_benchmark_average</a:t>
+            </a:r>
+            <a:r>
+              <a:rPr lang="en-GB" sz="1400" dirty="0">
+                <a:solidFill>
+                  <a:srgbClr val="643791"/>
+                </a:solidFill>
+                <a:latin typeface="DM Sans 14pt" pitchFamily="2" charset="77"/>
               </a:rPr>
               <a:t>}}</a:t>
             </a:r>
@@ -4463,7 +3254,6 @@
                 <a:srgbClr val="643791"/>
               </a:solidFill>
               <a:latin typeface="DM Sans 14pt" pitchFamily="2" charset="77"/>
-              <a:cs typeface="Arial" pitchFamily="34" charset="-120"/>
             </a:endParaRPr>
           </a:p>
         </p:txBody>
@@ -4501,7 +3291,7 @@
               <a:buNone/>
             </a:pPr>
             <a:r>
-              <a:rPr lang="en-US" sz="2400" b="1" kern="0" spc="368" dirty="0">
+              <a:rPr lang="en-US" sz="2400" b="1" kern="0" spc="0" dirty="0">
                 <a:solidFill>
                   <a:srgbClr val="643791"/>
                 </a:solidFill>
@@ -4509,7 +3299,7 @@
                 <a:ea typeface="Arial" pitchFamily="34" charset="-122"/>
                 <a:cs typeface="Arial" pitchFamily="34" charset="-120"/>
               </a:rPr>
-              <a:t>COMMENTARY</a:t>
+              <a:t>Commentary</a:t>
             </a:r>
             <a:endParaRPr lang="en-US" sz="2400" b="1" dirty="0">
               <a:latin typeface="DM Sans 14pt" pitchFamily="2" charset="77"/>
@@ -4532,7 +3322,7 @@
         <p:spPr>
           <a:xfrm>
             <a:off x="12995755" y="3748249"/>
-            <a:ext cx="4701600" cy="5606765"/>
+            <a:ext cx="4701600" cy="5599841"/>
           </a:xfrm>
           <a:prstGeom prst="roundRect">
             <a:avLst>
@@ -4676,6 +3466,659 @@
               </a:rPr>
               <a:t>}}</a:t>
             </a:r>
+          </a:p>
+        </p:txBody>
+      </p:sp>
+      <p:sp>
+        <p:nvSpPr>
+          <p:cNvPr id="74" name="TextBox 73"/>
+          <p:cNvSpPr txBox="1"/>
+          <p:nvPr/>
+        </p:nvSpPr>
+        <p:spPr>
+          <a:xfrm>
+            <a:off x="15604114" y="9742289"/>
+            <a:ext cx="2074286" cy="153888"/>
+          </a:xfrm>
+          <a:prstGeom prst="rect">
+            <a:avLst/>
+          </a:prstGeom>
+          <a:noFill/>
+        </p:spPr>
+        <p:txBody>
+          <a:bodyPr wrap="none" lIns="0" tIns="0" rIns="0" bIns="0">
+            <a:spAutoFit/>
+          </a:bodyPr>
+          <a:lstStyle/>
+          <a:p>
+            <a:pPr algn="r"/>
+            <a:r>
+              <a:rPr sz="1000" dirty="0">
+                <a:solidFill>
+                  <a:srgbClr val="5B5067"/>
+                </a:solidFill>
+                <a:latin typeface="DM Sans 14pt" pitchFamily="2" charset="77"/>
+              </a:rPr>
+              <a:t>{{</a:t>
+            </a:r>
+            <a:r>
+              <a:rPr sz="1000" dirty="0" err="1">
+                <a:solidFill>
+                  <a:srgbClr val="5B5067"/>
+                </a:solidFill>
+                <a:latin typeface="DM Sans 14pt" pitchFamily="2" charset="77"/>
+              </a:rPr>
+              <a:t>slide_number</a:t>
+            </a:r>
+            <a:r>
+              <a:rPr sz="1000" dirty="0">
+                <a:solidFill>
+                  <a:srgbClr val="5B5067"/>
+                </a:solidFill>
+                <a:latin typeface="DM Sans 14pt" pitchFamily="2" charset="77"/>
+              </a:rPr>
+              <a:t>}} / {{</a:t>
+            </a:r>
+            <a:r>
+              <a:rPr sz="1000" dirty="0" err="1">
+                <a:solidFill>
+                  <a:srgbClr val="5B5067"/>
+                </a:solidFill>
+                <a:latin typeface="DM Sans 14pt" pitchFamily="2" charset="77"/>
+              </a:rPr>
+              <a:t>total_slides</a:t>
+            </a:r>
+            <a:r>
+              <a:rPr sz="1000" dirty="0">
+                <a:solidFill>
+                  <a:srgbClr val="5B5067"/>
+                </a:solidFill>
+                <a:latin typeface="DM Sans 14pt" pitchFamily="2" charset="77"/>
+              </a:rPr>
+              <a:t>}}</a:t>
+            </a:r>
+          </a:p>
+        </p:txBody>
+      </p:sp>
+      <p:sp>
+        <p:nvSpPr>
+          <p:cNvPr id="3" name="TextBox 2">
+            <a:extLst>
+              <a:ext uri="{FF2B5EF4-FFF2-40B4-BE49-F238E27FC236}">
+                <a16:creationId xmlns:a16="http://schemas.microsoft.com/office/drawing/2014/main" id="{98D26A05-56B1-1E40-4C20-7797AFF371B3}"/>
+              </a:ext>
+            </a:extLst>
+          </p:cNvPr>
+          <p:cNvSpPr txBox="1"/>
+          <p:nvPr/>
+        </p:nvSpPr>
+        <p:spPr>
+          <a:xfrm>
+            <a:off x="609600" y="9742289"/>
+            <a:ext cx="2300310" cy="153888"/>
+          </a:xfrm>
+          <a:prstGeom prst="rect">
+            <a:avLst/>
+          </a:prstGeom>
+          <a:noFill/>
+        </p:spPr>
+        <p:txBody>
+          <a:bodyPr wrap="none" lIns="0" tIns="0" rIns="0" bIns="0">
+            <a:spAutoFit/>
+          </a:bodyPr>
+          <a:lstStyle/>
+          <a:p>
+            <a:pPr algn="l"/>
+            <a:r>
+              <a:rPr sz="1000" dirty="0">
+                <a:solidFill>
+                  <a:srgbClr val="643791"/>
+                </a:solidFill>
+                <a:latin typeface="DM Sans 14pt" pitchFamily="2" charset="77"/>
+              </a:rPr>
+              <a:t>Jobs Go Public  ·  Go place</a:t>
+            </a:r>
+            <a:r>
+              <a:rPr lang="en-GB" sz="1000" dirty="0">
+                <a:solidFill>
+                  <a:srgbClr val="643791"/>
+                </a:solidFill>
+                <a:latin typeface="DM Sans 14pt" pitchFamily="2" charset="77"/>
+              </a:rPr>
+              <a:t>s</a:t>
+            </a:r>
+            <a:r>
+              <a:rPr sz="1000" dirty="0">
+                <a:solidFill>
+                  <a:srgbClr val="643791"/>
+                </a:solidFill>
+                <a:latin typeface="DM Sans 14pt" pitchFamily="2" charset="77"/>
+              </a:rPr>
+              <a:t>. Go public.</a:t>
+            </a:r>
+          </a:p>
+        </p:txBody>
+      </p:sp>
+      <p:pic>
+        <p:nvPicPr>
+          <p:cNvPr id="4" name="Graphic 3">
+            <a:extLst>
+              <a:ext uri="{FF2B5EF4-FFF2-40B4-BE49-F238E27FC236}">
+                <a16:creationId xmlns:a16="http://schemas.microsoft.com/office/drawing/2014/main" id="{87367A59-E4C0-6E79-392B-EA18397EE940}"/>
+              </a:ext>
+            </a:extLst>
+          </p:cNvPr>
+          <p:cNvPicPr>
+            <a:picLocks noChangeAspect="1"/>
+          </p:cNvPicPr>
+          <p:nvPr/>
+        </p:nvPicPr>
+        <p:blipFill>
+          <a:blip>
+            <a:extLst>
+              <a:ext uri="{96DAC541-7B7A-43D3-8B79-37D633B846F1}">
+                <asvg:svgBlip xmlns:asvg="http://schemas.microsoft.com/office/drawing/2016/SVG/main" r:embed="rId3"/>
+              </a:ext>
+            </a:extLst>
+          </a:blip>
+          <a:stretch>
+            <a:fillRect/>
+          </a:stretch>
+        </p:blipFill>
+        <p:spPr>
+          <a:xfrm>
+            <a:off x="715526" y="636516"/>
+            <a:ext cx="1411947" cy="266701"/>
+          </a:xfrm>
+          <a:prstGeom prst="rect">
+            <a:avLst/>
+          </a:prstGeom>
+        </p:spPr>
+      </p:pic>
+      <p:sp>
+        <p:nvSpPr>
+          <p:cNvPr id="14" name="Shape 6">
+            <a:extLst>
+              <a:ext uri="{FF2B5EF4-FFF2-40B4-BE49-F238E27FC236}">
+                <a16:creationId xmlns:a16="http://schemas.microsoft.com/office/drawing/2014/main" id="{9FA43DA0-B414-38F1-4CE9-6D661B993C8B}"/>
+              </a:ext>
+            </a:extLst>
+          </p:cNvPr>
+          <p:cNvSpPr/>
+          <p:nvPr/>
+        </p:nvSpPr>
+        <p:spPr>
+          <a:xfrm>
+            <a:off x="9986861" y="1866899"/>
+            <a:ext cx="2721077" cy="1754747"/>
+          </a:xfrm>
+          <a:prstGeom prst="roundRect">
+            <a:avLst/>
+          </a:prstGeom>
+          <a:solidFill>
+            <a:srgbClr val="643791"/>
+          </a:solidFill>
+          <a:ln/>
+        </p:spPr>
+        <p:txBody>
+          <a:bodyPr lIns="0" tIns="0" rIns="0" bIns="0" anchor="b"/>
+          <a:lstStyle/>
+          <a:p>
+            <a:pPr algn="ctr"/>
+            <a:r>
+              <a:rPr lang="en-US" sz="1400" kern="0" dirty="0">
+                <a:solidFill>
+                  <a:srgbClr val="FFFFFF">
+                    <a:alpha val="85000"/>
+                  </a:srgbClr>
+                </a:solidFill>
+                <a:latin typeface="DM Sans 14pt" pitchFamily="2" charset="77"/>
+                <a:ea typeface="Arial" pitchFamily="34" charset="-122"/>
+                <a:cs typeface="Arial" pitchFamily="34" charset="-120"/>
+              </a:rPr>
+              <a:t>Benchmark –  Average views</a:t>
+            </a:r>
+            <a:endParaRPr lang="en-US" sz="1400" dirty="0">
+              <a:latin typeface="DM Sans 14pt" pitchFamily="2" charset="77"/>
+            </a:endParaRPr>
+          </a:p>
+        </p:txBody>
+      </p:sp>
+      <p:sp>
+        <p:nvSpPr>
+          <p:cNvPr id="16" name="Shape 15">
+            <a:extLst>
+              <a:ext uri="{FF2B5EF4-FFF2-40B4-BE49-F238E27FC236}">
+                <a16:creationId xmlns:a16="http://schemas.microsoft.com/office/drawing/2014/main" id="{A8CF4D16-A6FF-2367-2401-031747E1F13F}"/>
+              </a:ext>
+            </a:extLst>
+          </p:cNvPr>
+          <p:cNvSpPr/>
+          <p:nvPr/>
+        </p:nvSpPr>
+        <p:spPr>
+          <a:xfrm>
+            <a:off x="9986861" y="5684528"/>
+            <a:ext cx="2721077" cy="1754747"/>
+          </a:xfrm>
+          <a:prstGeom prst="roundRect">
+            <a:avLst/>
+          </a:prstGeom>
+          <a:solidFill>
+            <a:srgbClr val="643791"/>
+          </a:solidFill>
+          <a:ln/>
+        </p:spPr>
+        <p:txBody>
+          <a:bodyPr lIns="0" tIns="0" rIns="0" bIns="0" anchor="b"/>
+          <a:lstStyle/>
+          <a:p>
+            <a:pPr algn="r"/>
+            <a:r>
+              <a:rPr lang="en-US" sz="1400" kern="0" dirty="0">
+                <a:solidFill>
+                  <a:srgbClr val="FFFFFF">
+                    <a:alpha val="85000"/>
+                  </a:srgbClr>
+                </a:solidFill>
+                <a:latin typeface="DM Sans 14pt" pitchFamily="2" charset="77"/>
+                <a:ea typeface="Arial" pitchFamily="34" charset="-122"/>
+                <a:cs typeface="Arial" pitchFamily="34" charset="-120"/>
+              </a:rPr>
+              <a:t>Benchmark –  Average applies</a:t>
+            </a:r>
+            <a:endParaRPr lang="en-US" sz="1400" dirty="0">
+              <a:latin typeface="DM Sans 14pt" pitchFamily="2" charset="77"/>
+            </a:endParaRPr>
+          </a:p>
+        </p:txBody>
+      </p:sp>
+      <p:sp>
+        <p:nvSpPr>
+          <p:cNvPr id="17" name="Shape 16">
+            <a:extLst>
+              <a:ext uri="{FF2B5EF4-FFF2-40B4-BE49-F238E27FC236}">
+                <a16:creationId xmlns:a16="http://schemas.microsoft.com/office/drawing/2014/main" id="{46A9BEAE-E101-E098-3FB1-BA3AC018BF46}"/>
+              </a:ext>
+            </a:extLst>
+          </p:cNvPr>
+          <p:cNvSpPr/>
+          <p:nvPr/>
+        </p:nvSpPr>
+        <p:spPr>
+          <a:xfrm>
+            <a:off x="10094599" y="5755147"/>
+            <a:ext cx="2505600" cy="1309404"/>
+          </a:xfrm>
+          <a:prstGeom prst="roundRect">
+            <a:avLst>
+              <a:gd name="adj" fmla="val 17778"/>
+            </a:avLst>
+          </a:prstGeom>
+          <a:solidFill>
+            <a:srgbClr val="FFFFFF">
+              <a:alpha val="15000"/>
+            </a:srgbClr>
+          </a:solidFill>
+          <a:ln/>
+        </p:spPr>
+        <p:txBody>
+          <a:bodyPr lIns="36000" tIns="36000" rIns="36000" bIns="36000" anchor="ctr"/>
+          <a:lstStyle/>
+          <a:p>
+            <a:pPr algn="ctr"/>
+            <a:r>
+              <a:rPr lang="en-GB" sz="8800" dirty="0">
+                <a:solidFill>
+                  <a:schemeClr val="bg1"/>
+                </a:solidFill>
+                <a:latin typeface="DM Sans 14pt" pitchFamily="2" charset="77"/>
+              </a:rPr>
+              <a:t>{{</a:t>
+            </a:r>
+            <a:r>
+              <a:rPr lang="en-GB" sz="8800" dirty="0" err="1">
+                <a:solidFill>
+                  <a:schemeClr val="bg1"/>
+                </a:solidFill>
+                <a:latin typeface="DM Sans 14pt" pitchFamily="2" charset="77"/>
+              </a:rPr>
+              <a:t>stat_benchmark_average_applies</a:t>
+            </a:r>
+            <a:r>
+              <a:rPr lang="en-GB" sz="8800" dirty="0">
+                <a:solidFill>
+                  <a:schemeClr val="bg1"/>
+                </a:solidFill>
+                <a:latin typeface="DM Sans 14pt" pitchFamily="2" charset="77"/>
+              </a:rPr>
+              <a:t>}}</a:t>
+            </a:r>
+            <a:endParaRPr lang="en-US" sz="8800" dirty="0">
+              <a:solidFill>
+                <a:schemeClr val="bg1"/>
+              </a:solidFill>
+              <a:latin typeface="DM Sans 14pt" pitchFamily="2" charset="77"/>
+            </a:endParaRPr>
+          </a:p>
+        </p:txBody>
+      </p:sp>
+      <p:sp>
+        <p:nvSpPr>
+          <p:cNvPr id="18" name="Shape 10">
+            <a:extLst>
+              <a:ext uri="{FF2B5EF4-FFF2-40B4-BE49-F238E27FC236}">
+                <a16:creationId xmlns:a16="http://schemas.microsoft.com/office/drawing/2014/main" id="{76F76170-6850-6C9D-2D95-EA0FEBBFF531}"/>
+              </a:ext>
+            </a:extLst>
+          </p:cNvPr>
+          <p:cNvSpPr/>
+          <p:nvPr/>
+        </p:nvSpPr>
+        <p:spPr>
+          <a:xfrm>
+            <a:off x="9986861" y="3775714"/>
+            <a:ext cx="2721077" cy="1754747"/>
+          </a:xfrm>
+          <a:prstGeom prst="roundRect">
+            <a:avLst/>
+          </a:prstGeom>
+          <a:solidFill>
+            <a:srgbClr val="E6FF6E"/>
+          </a:solidFill>
+          <a:ln/>
+        </p:spPr>
+        <p:txBody>
+          <a:bodyPr lIns="0" tIns="0" rIns="0" bIns="0" anchor="b"/>
+          <a:lstStyle/>
+          <a:p>
+            <a:pPr algn="ctr"/>
+            <a:r>
+              <a:rPr lang="en-US" sz="1400" kern="0" dirty="0">
+                <a:solidFill>
+                  <a:srgbClr val="757575">
+                    <a:alpha val="85000"/>
+                  </a:srgbClr>
+                </a:solidFill>
+                <a:latin typeface="DM Sans 14pt" pitchFamily="2" charset="77"/>
+                <a:cs typeface="Arial" pitchFamily="34" charset="-120"/>
+              </a:rPr>
+              <a:t>Your jobs – Average views</a:t>
+            </a:r>
+          </a:p>
+        </p:txBody>
+      </p:sp>
+      <p:sp>
+        <p:nvSpPr>
+          <p:cNvPr id="19" name="Shape 10">
+            <a:extLst>
+              <a:ext uri="{FF2B5EF4-FFF2-40B4-BE49-F238E27FC236}">
+                <a16:creationId xmlns:a16="http://schemas.microsoft.com/office/drawing/2014/main" id="{619E8967-3D8D-E917-506B-3929DBD035E4}"/>
+              </a:ext>
+            </a:extLst>
+          </p:cNvPr>
+          <p:cNvSpPr/>
+          <p:nvPr/>
+        </p:nvSpPr>
+        <p:spPr>
+          <a:xfrm>
+            <a:off x="10094599" y="3856207"/>
+            <a:ext cx="2505600" cy="1309404"/>
+          </a:xfrm>
+          <a:prstGeom prst="roundRect">
+            <a:avLst/>
+          </a:prstGeom>
+          <a:solidFill>
+            <a:srgbClr val="F1F3E2"/>
+          </a:solidFill>
+          <a:ln/>
+        </p:spPr>
+        <p:txBody>
+          <a:bodyPr lIns="36000" tIns="36000" rIns="36000" bIns="36000" anchor="ctr"/>
+          <a:lstStyle/>
+          <a:p>
+            <a:pPr algn="ctr">
+              <a:lnSpc>
+                <a:spcPct val="110000"/>
+              </a:lnSpc>
+            </a:pPr>
+            <a:r>
+              <a:rPr lang="en-GB" sz="8800" dirty="0">
+                <a:solidFill>
+                  <a:srgbClr val="757575"/>
+                </a:solidFill>
+                <a:latin typeface="DM Sans 14pt" pitchFamily="2" charset="77"/>
+              </a:rPr>
+              <a:t>{{</a:t>
+            </a:r>
+            <a:r>
+              <a:rPr lang="en-GB" sz="8800" dirty="0" err="1">
+                <a:solidFill>
+                  <a:srgbClr val="757575"/>
+                </a:solidFill>
+                <a:latin typeface="DM Sans 14pt" pitchFamily="2" charset="77"/>
+              </a:rPr>
+              <a:t>stat_your_jobs_average_views</a:t>
+            </a:r>
+            <a:r>
+              <a:rPr lang="en-GB" sz="8800" dirty="0">
+                <a:solidFill>
+                  <a:srgbClr val="757575"/>
+                </a:solidFill>
+                <a:latin typeface="DM Sans 14pt" pitchFamily="2" charset="77"/>
+              </a:rPr>
+              <a:t>}}</a:t>
+            </a:r>
+            <a:endParaRPr lang="en-US" sz="8800" dirty="0">
+              <a:solidFill>
+                <a:srgbClr val="757575"/>
+              </a:solidFill>
+              <a:latin typeface="DM Sans 14pt" pitchFamily="2" charset="77"/>
+            </a:endParaRPr>
+          </a:p>
+        </p:txBody>
+      </p:sp>
+      <p:sp>
+        <p:nvSpPr>
+          <p:cNvPr id="20" name="Shape 15">
+            <a:extLst>
+              <a:ext uri="{FF2B5EF4-FFF2-40B4-BE49-F238E27FC236}">
+                <a16:creationId xmlns:a16="http://schemas.microsoft.com/office/drawing/2014/main" id="{5F67A4E1-7BA0-7EDD-FBC8-2B43BB687619}"/>
+              </a:ext>
+            </a:extLst>
+          </p:cNvPr>
+          <p:cNvSpPr/>
+          <p:nvPr/>
+        </p:nvSpPr>
+        <p:spPr>
+          <a:xfrm>
+            <a:off x="9986861" y="7593343"/>
+            <a:ext cx="2721077" cy="1754747"/>
+          </a:xfrm>
+          <a:prstGeom prst="roundRect">
+            <a:avLst/>
+          </a:prstGeom>
+          <a:solidFill>
+            <a:srgbClr val="E6FF6E"/>
+          </a:solidFill>
+          <a:ln/>
+        </p:spPr>
+        <p:txBody>
+          <a:bodyPr lIns="0" tIns="0" rIns="0" bIns="0" anchor="b"/>
+          <a:lstStyle/>
+          <a:p>
+            <a:pPr algn="ctr"/>
+            <a:r>
+              <a:rPr lang="en-US" sz="1400" kern="0" dirty="0">
+                <a:solidFill>
+                  <a:srgbClr val="757575">
+                    <a:alpha val="85000"/>
+                  </a:srgbClr>
+                </a:solidFill>
+                <a:latin typeface="DM Sans 14pt" pitchFamily="2" charset="77"/>
+                <a:cs typeface="Arial" pitchFamily="34" charset="-120"/>
+              </a:rPr>
+              <a:t>Your jobs </a:t>
+            </a:r>
+            <a:r>
+              <a:rPr lang="en-US" sz="1400" kern="0">
+                <a:solidFill>
+                  <a:srgbClr val="757575">
+                    <a:alpha val="85000"/>
+                  </a:srgbClr>
+                </a:solidFill>
+                <a:latin typeface="DM Sans 14pt" pitchFamily="2" charset="77"/>
+                <a:cs typeface="Arial" pitchFamily="34" charset="-120"/>
+              </a:rPr>
+              <a:t>– Average applies</a:t>
+            </a:r>
+            <a:endParaRPr lang="en-US" sz="1400" kern="0" dirty="0">
+              <a:solidFill>
+                <a:srgbClr val="757575">
+                  <a:alpha val="85000"/>
+                </a:srgbClr>
+              </a:solidFill>
+              <a:latin typeface="DM Sans 14pt" pitchFamily="2" charset="77"/>
+              <a:cs typeface="Arial" pitchFamily="34" charset="-120"/>
+            </a:endParaRPr>
+          </a:p>
+        </p:txBody>
+      </p:sp>
+      <p:sp>
+        <p:nvSpPr>
+          <p:cNvPr id="21" name="Shape 16">
+            <a:extLst>
+              <a:ext uri="{FF2B5EF4-FFF2-40B4-BE49-F238E27FC236}">
+                <a16:creationId xmlns:a16="http://schemas.microsoft.com/office/drawing/2014/main" id="{47CA4C39-A2E0-9A7D-97DB-BEB99AD1C4ED}"/>
+              </a:ext>
+            </a:extLst>
+          </p:cNvPr>
+          <p:cNvSpPr/>
+          <p:nvPr/>
+        </p:nvSpPr>
+        <p:spPr>
+          <a:xfrm>
+            <a:off x="10094599" y="7663962"/>
+            <a:ext cx="2505600" cy="1309404"/>
+          </a:xfrm>
+          <a:prstGeom prst="roundRect">
+            <a:avLst>
+              <a:gd name="adj" fmla="val 17778"/>
+            </a:avLst>
+          </a:prstGeom>
+          <a:solidFill>
+            <a:srgbClr val="F1F3E2"/>
+          </a:solidFill>
+          <a:ln/>
+        </p:spPr>
+        <p:txBody>
+          <a:bodyPr lIns="36000" tIns="36000" rIns="36000" bIns="36000" anchor="ctr"/>
+          <a:lstStyle/>
+          <a:p>
+            <a:pPr algn="ctr"/>
+            <a:r>
+              <a:rPr lang="en-GB" sz="8800" dirty="0">
+                <a:solidFill>
+                  <a:srgbClr val="757575"/>
+                </a:solidFill>
+                <a:latin typeface="DM Sans 14pt" pitchFamily="2" charset="77"/>
+              </a:rPr>
+              <a:t>{{</a:t>
+            </a:r>
+            <a:r>
+              <a:rPr lang="en-GB" sz="8800" dirty="0" err="1">
+                <a:solidFill>
+                  <a:srgbClr val="757575"/>
+                </a:solidFill>
+                <a:latin typeface="DM Sans 14pt" pitchFamily="2" charset="77"/>
+              </a:rPr>
+              <a:t>stat_your_jobs_average_applies</a:t>
+            </a:r>
+            <a:r>
+              <a:rPr lang="en-GB" sz="8800" dirty="0">
+                <a:solidFill>
+                  <a:srgbClr val="757575"/>
+                </a:solidFill>
+                <a:latin typeface="DM Sans 14pt" pitchFamily="2" charset="77"/>
+              </a:rPr>
+              <a:t>}}</a:t>
+            </a:r>
+            <a:endParaRPr lang="en-US" sz="8800" dirty="0">
+              <a:solidFill>
+                <a:srgbClr val="757575"/>
+              </a:solidFill>
+              <a:latin typeface="DM Sans 14pt" pitchFamily="2" charset="77"/>
+            </a:endParaRPr>
+          </a:p>
+        </p:txBody>
+      </p:sp>
+      <p:sp>
+        <p:nvSpPr>
+          <p:cNvPr id="15" name="Shape 7">
+            <a:extLst>
+              <a:ext uri="{FF2B5EF4-FFF2-40B4-BE49-F238E27FC236}">
+                <a16:creationId xmlns:a16="http://schemas.microsoft.com/office/drawing/2014/main" id="{A5E010EB-9A37-DA51-17F0-40372B658C15}"/>
+              </a:ext>
+            </a:extLst>
+          </p:cNvPr>
+          <p:cNvSpPr/>
+          <p:nvPr/>
+        </p:nvSpPr>
+        <p:spPr>
+          <a:xfrm>
+            <a:off x="10094599" y="1949980"/>
+            <a:ext cx="2505600" cy="1309404"/>
+          </a:xfrm>
+          <a:prstGeom prst="roundRect">
+            <a:avLst>
+              <a:gd name="adj" fmla="val 17778"/>
+            </a:avLst>
+          </a:prstGeom>
+          <a:solidFill>
+            <a:srgbClr val="FFFFFF">
+              <a:alpha val="15000"/>
+            </a:srgbClr>
+          </a:solidFill>
+          <a:ln/>
+        </p:spPr>
+        <p:txBody>
+          <a:bodyPr lIns="36000" tIns="36000" rIns="36000" bIns="36000" anchor="ctr"/>
+          <a:lstStyle/>
+          <a:p>
+            <a:pPr algn="ctr"/>
+            <a:r>
+              <a:rPr lang="en-GB" sz="8800" dirty="0">
+                <a:solidFill>
+                  <a:schemeClr val="bg1"/>
+                </a:solidFill>
+                <a:latin typeface="DM Sans 14pt" pitchFamily="2" charset="77"/>
+              </a:rPr>
+              <a:t>{{</a:t>
+            </a:r>
+            <a:r>
+              <a:rPr lang="en-GB" sz="8800" dirty="0" err="1">
+                <a:solidFill>
+                  <a:schemeClr val="bg1"/>
+                </a:solidFill>
+                <a:latin typeface="DM Sans 14pt" pitchFamily="2" charset="77"/>
+              </a:rPr>
+              <a:t>stat_benchmark_average_views</a:t>
+            </a:r>
+            <a:r>
+              <a:rPr lang="en-GB" sz="8800" dirty="0">
+                <a:solidFill>
+                  <a:schemeClr val="bg1"/>
+                </a:solidFill>
+                <a:latin typeface="DM Sans 14pt" pitchFamily="2" charset="77"/>
+              </a:rPr>
+              <a:t>}}</a:t>
+            </a:r>
+            <a:endParaRPr lang="en-US" sz="8800" dirty="0">
+              <a:solidFill>
+                <a:schemeClr val="bg1"/>
+              </a:solidFill>
+              <a:latin typeface="DM Sans 14pt" pitchFamily="2" charset="77"/>
+            </a:endParaRPr>
           </a:p>
         </p:txBody>
       </p:sp>
@@ -4714,121 +4157,6 @@
       </p:grpSpPr>
       <p:sp>
         <p:nvSpPr>
-          <p:cNvPr id="2" name="Shape 0"/>
-          <p:cNvSpPr/>
-          <p:nvPr/>
-        </p:nvSpPr>
-        <p:spPr>
-          <a:xfrm>
-            <a:off x="609600" y="457200"/>
-            <a:ext cx="495300" cy="438150"/>
-          </a:xfrm>
-          <a:prstGeom prst="rect">
-            <a:avLst/>
-          </a:prstGeom>
-          <a:solidFill>
-            <a:srgbClr val="643791"/>
-          </a:solidFill>
-          <a:ln/>
-        </p:spPr>
-        <p:txBody>
-          <a:bodyPr/>
-          <a:lstStyle/>
-          <a:p>
-            <a:endParaRPr lang="en-GB">
-              <a:latin typeface="DM Sans 14pt" pitchFamily="2" charset="77"/>
-            </a:endParaRPr>
-          </a:p>
-        </p:txBody>
-      </p:sp>
-      <p:sp>
-        <p:nvSpPr>
-          <p:cNvPr id="3" name="Text 1"/>
-          <p:cNvSpPr/>
-          <p:nvPr/>
-        </p:nvSpPr>
-        <p:spPr>
-          <a:xfrm>
-            <a:off x="571500" y="476250"/>
-            <a:ext cx="495300" cy="457200"/>
-          </a:xfrm>
-          <a:prstGeom prst="rect">
-            <a:avLst/>
-          </a:prstGeom>
-          <a:noFill/>
-          <a:ln/>
-        </p:spPr>
-        <p:txBody>
-          <a:bodyPr wrap="square" lIns="25400" tIns="25400" rIns="25400" bIns="25400" rtlCol="0" anchor="ctr">
-            <a:normAutofit/>
-          </a:bodyPr>
-          <a:lstStyle/>
-          <a:p>
-            <a:pPr marL="0" indent="0" algn="ctr">
-              <a:buNone/>
-            </a:pPr>
-            <a:r>
-              <a:rPr lang="en-US" sz="1350" b="1" kern="0" spc="-27" dirty="0">
-                <a:solidFill>
-                  <a:srgbClr val="FFFFFF"/>
-                </a:solidFill>
-                <a:latin typeface="DM Sans 14pt" pitchFamily="2" charset="77"/>
-                <a:ea typeface="Arial" pitchFamily="34" charset="-122"/>
-                <a:cs typeface="Arial" pitchFamily="34" charset="-120"/>
-              </a:rPr>
-              <a:t>Go</a:t>
-            </a:r>
-            <a:endParaRPr lang="en-US" sz="1350" dirty="0">
-              <a:latin typeface="DM Sans 14pt" pitchFamily="2" charset="77"/>
-            </a:endParaRPr>
-          </a:p>
-        </p:txBody>
-      </p:sp>
-      <p:sp>
-        <p:nvSpPr>
-          <p:cNvPr id="4" name="Text 2"/>
-          <p:cNvSpPr/>
-          <p:nvPr/>
-        </p:nvSpPr>
-        <p:spPr>
-          <a:xfrm>
-            <a:off x="1200150" y="538163"/>
-            <a:ext cx="1561505" cy="314325"/>
-          </a:xfrm>
-          <a:prstGeom prst="rect">
-            <a:avLst/>
-          </a:prstGeom>
-          <a:noFill/>
-          <a:ln/>
-        </p:spPr>
-        <p:txBody>
-          <a:bodyPr wrap="square" lIns="25400" tIns="25400" rIns="25400" bIns="25400" rtlCol="0" anchor="t">
-            <a:normAutofit/>
-          </a:bodyPr>
-          <a:lstStyle/>
-          <a:p>
-            <a:pPr marL="0" indent="0" algn="l">
-              <a:buNone/>
-            </a:pPr>
-            <a:r>
-              <a:rPr lang="en-US" sz="1650" b="1" kern="0" spc="-16" dirty="0">
-                <a:solidFill>
-                  <a:srgbClr val="111111"/>
-                </a:solidFill>
-                <a:latin typeface="DM Sans 14pt" pitchFamily="2" charset="77"/>
-                <a:ea typeface="Arial" pitchFamily="34" charset="-122"/>
-                <a:cs typeface="Arial" pitchFamily="34" charset="-120"/>
-              </a:rPr>
-              <a:t>Jobs Go Public</a:t>
-            </a:r>
-            <a:endParaRPr lang="en-US" sz="1650" dirty="0">
-              <a:latin typeface="DM Sans 14pt" pitchFamily="2" charset="77"/>
-            </a:endParaRPr>
-          </a:p>
-        </p:txBody>
-      </p:sp>
-      <p:sp>
-        <p:nvSpPr>
           <p:cNvPr id="6" name="Text 4"/>
           <p:cNvSpPr/>
           <p:nvPr/>
@@ -4884,20 +4212,16 @@
         <p:spPr>
           <a:xfrm>
             <a:off x="762000" y="1866900"/>
-            <a:ext cx="11945938" cy="7481190"/>
+            <a:ext cx="11944800" cy="7481190"/>
           </a:xfrm>
           <a:prstGeom prst="roundRect">
             <a:avLst>
-              <a:gd name="adj" fmla="val 2331"/>
+              <a:gd name="adj" fmla="val 0"/>
             </a:avLst>
           </a:prstGeom>
-          <a:solidFill>
-            <a:srgbClr val="E8E0F2"/>
-          </a:solidFill>
+          <a:noFill/>
           <a:ln w="19050">
-            <a:solidFill>
-              <a:srgbClr val="643791"/>
-            </a:solidFill>
+            <a:noFill/>
             <a:prstDash val="dash"/>
           </a:ln>
         </p:spPr>
@@ -4919,23 +4243,17 @@
         </p:nvSpPr>
         <p:spPr>
           <a:xfrm>
-            <a:off x="864348" y="2297615"/>
+            <a:off x="871800" y="2301215"/>
             <a:ext cx="11725200" cy="6940550"/>
           </a:xfrm>
           <a:prstGeom prst="roundRect">
             <a:avLst>
-              <a:gd name="adj" fmla="val 2521"/>
+              <a:gd name="adj" fmla="val 0"/>
             </a:avLst>
           </a:prstGeom>
-          <a:solidFill>
-            <a:srgbClr val="FFFFFF"/>
-          </a:solidFill>
+          <a:noFill/>
           <a:ln w="9525">
-            <a:solidFill>
-              <a:srgbClr val="000000">
-                <a:alpha val="10000"/>
-              </a:srgbClr>
-            </a:solidFill>
+            <a:noFill/>
             <a:prstDash val="solid"/>
           </a:ln>
         </p:spPr>
@@ -4977,83 +4295,6 @@
               <a:t>}}</a:t>
             </a:r>
             <a:endParaRPr lang="en-US" dirty="0">
-              <a:latin typeface="DM Sans 14pt" pitchFamily="2" charset="77"/>
-            </a:endParaRPr>
-          </a:p>
-        </p:txBody>
-      </p:sp>
-      <p:sp>
-        <p:nvSpPr>
-          <p:cNvPr id="27" name="Text 25"/>
-          <p:cNvSpPr/>
-          <p:nvPr/>
-        </p:nvSpPr>
-        <p:spPr>
-          <a:xfrm>
-            <a:off x="4893357" y="1902227"/>
-            <a:ext cx="3931965" cy="190500"/>
-          </a:xfrm>
-          <a:prstGeom prst="rect">
-            <a:avLst/>
-          </a:prstGeom>
-          <a:noFill/>
-          <a:ln/>
-        </p:spPr>
-        <p:txBody>
-          <a:bodyPr wrap="square" lIns="25400" tIns="25400" rIns="25400" bIns="25400" rtlCol="0" anchor="t">
-            <a:normAutofit fontScale="92500" lnSpcReduction="10000"/>
-          </a:bodyPr>
-          <a:lstStyle/>
-          <a:p>
-            <a:pPr marL="0" indent="0" algn="ctr">
-              <a:buNone/>
-            </a:pPr>
-            <a:endParaRPr lang="en-US" sz="1050" dirty="0">
-              <a:latin typeface="DM Sans 14pt" pitchFamily="2" charset="77"/>
-            </a:endParaRPr>
-          </a:p>
-        </p:txBody>
-      </p:sp>
-      <p:sp>
-        <p:nvSpPr>
-          <p:cNvPr id="35" name="Text 33"/>
-          <p:cNvSpPr/>
-          <p:nvPr/>
-        </p:nvSpPr>
-        <p:spPr>
-          <a:xfrm>
-            <a:off x="609600" y="9753600"/>
-            <a:ext cx="2373511" cy="190500"/>
-          </a:xfrm>
-          <a:prstGeom prst="rect">
-            <a:avLst/>
-          </a:prstGeom>
-          <a:noFill/>
-          <a:ln/>
-        </p:spPr>
-        <p:txBody>
-          <a:bodyPr wrap="square" lIns="25400" tIns="25400" rIns="25400" bIns="25400" rtlCol="0" anchor="t">
-            <a:normAutofit fontScale="85000" lnSpcReduction="10000"/>
-          </a:bodyPr>
-          <a:lstStyle/>
-          <a:p>
-            <a:pPr marL="0" indent="0" algn="l">
-              <a:buNone/>
-            </a:pPr>
-            <a:r>
-              <a:rPr lang="en-US" sz="1050" kern="0" spc="42" dirty="0">
-                <a:solidFill>
-                  <a:srgbClr val="111111">
-                    <a:alpha val="63000"/>
-                  </a:srgbClr>
-                </a:solidFill>
-                <a:latin typeface="DM Sans 14pt" pitchFamily="2" charset="77"/>
-                <a:ea typeface="Arial" pitchFamily="34" charset="-122"/>
-                <a:cs typeface="Arial" pitchFamily="34" charset="-120"/>
-              </a:rPr>
-              <a:t>{{client_name}} · Advertising Report</a:t>
-            </a:r>
-            <a:endParaRPr lang="en-US" sz="1050" dirty="0">
               <a:latin typeface="DM Sans 14pt" pitchFamily="2" charset="77"/>
             </a:endParaRPr>
           </a:p>
@@ -5122,8 +4363,8 @@
         </p:nvSpPr>
         <p:spPr>
           <a:xfrm>
-            <a:off x="872369" y="1866900"/>
-            <a:ext cx="8009197" cy="428400"/>
+            <a:off x="762000" y="1866900"/>
+            <a:ext cx="11944800" cy="432000"/>
           </a:xfrm>
           <a:prstGeom prst="rect">
             <a:avLst/>
@@ -5153,6 +4394,7 @@
           <a:bodyPr lIns="0" tIns="0" rIns="0" bIns="0" rtlCol="0" anchor="ctr"/>
           <a:lstStyle/>
           <a:p>
+            <a:pPr algn="ctr"/>
             <a:r>
               <a:rPr lang="en-US" kern="0" spc="84" dirty="0">
                 <a:solidFill>
@@ -5169,167 +4411,6 @@
             <a:endParaRPr lang="en-US" dirty="0">
               <a:latin typeface="DM Sans 14pt" pitchFamily="2" charset="77"/>
             </a:endParaRPr>
-          </a:p>
-        </p:txBody>
-      </p:sp>
-      <p:sp>
-        <p:nvSpPr>
-          <p:cNvPr id="8" name="Footer Placeholder 1">
-            <a:extLst>
-              <a:ext uri="{FF2B5EF4-FFF2-40B4-BE49-F238E27FC236}">
-                <a16:creationId xmlns:a16="http://schemas.microsoft.com/office/drawing/2014/main" id="{9C15951F-B6DE-38FF-7696-8351EB1A8602}"/>
-              </a:ext>
-            </a:extLst>
-          </p:cNvPr>
-          <p:cNvSpPr txBox="1">
-            <a:spLocks/>
-          </p:cNvSpPr>
-          <p:nvPr/>
-        </p:nvSpPr>
-        <p:spPr>
-          <a:xfrm>
-            <a:off x="17233255" y="9753300"/>
-            <a:ext cx="522000" cy="190800"/>
-          </a:xfrm>
-          <a:prstGeom prst="rect">
-            <a:avLst/>
-          </a:prstGeom>
-        </p:spPr>
-        <p:txBody>
-          <a:bodyPr vert="horz" lIns="36000" tIns="36000" rIns="36000" bIns="36000" rtlCol="0" anchor="ctr"/>
-          <a:lstStyle>
-            <a:lvl1pPr marL="0" algn="l" defTabSz="914400" rtl="0" eaLnBrk="1" latinLnBrk="0" hangingPunct="1">
-              <a:defRPr sz="900" kern="1200">
-                <a:solidFill>
-                  <a:srgbClr val="E8E0F2"/>
-                </a:solidFill>
-                <a:latin typeface="DM Sans 14pt" pitchFamily="2" charset="77"/>
-                <a:ea typeface="+mn-ea"/>
-                <a:cs typeface="+mn-cs"/>
-              </a:defRPr>
-            </a:lvl1pPr>
-            <a:lvl2pPr marL="457200" algn="l" defTabSz="914400" rtl="0" eaLnBrk="1" latinLnBrk="0" hangingPunct="1">
-              <a:defRPr sz="1800" kern="1200">
-                <a:solidFill>
-                  <a:schemeClr val="tx1"/>
-                </a:solidFill>
-                <a:latin typeface="+mn-lt"/>
-                <a:ea typeface="+mn-ea"/>
-                <a:cs typeface="+mn-cs"/>
-              </a:defRPr>
-            </a:lvl2pPr>
-            <a:lvl3pPr marL="914400" algn="l" defTabSz="914400" rtl="0" eaLnBrk="1" latinLnBrk="0" hangingPunct="1">
-              <a:defRPr sz="1800" kern="1200">
-                <a:solidFill>
-                  <a:schemeClr val="tx1"/>
-                </a:solidFill>
-                <a:latin typeface="+mn-lt"/>
-                <a:ea typeface="+mn-ea"/>
-                <a:cs typeface="+mn-cs"/>
-              </a:defRPr>
-            </a:lvl3pPr>
-            <a:lvl4pPr marL="1371600" algn="l" defTabSz="914400" rtl="0" eaLnBrk="1" latinLnBrk="0" hangingPunct="1">
-              <a:defRPr sz="1800" kern="1200">
-                <a:solidFill>
-                  <a:schemeClr val="tx1"/>
-                </a:solidFill>
-                <a:latin typeface="+mn-lt"/>
-                <a:ea typeface="+mn-ea"/>
-                <a:cs typeface="+mn-cs"/>
-              </a:defRPr>
-            </a:lvl4pPr>
-            <a:lvl5pPr marL="1828800" algn="l" defTabSz="914400" rtl="0" eaLnBrk="1" latinLnBrk="0" hangingPunct="1">
-              <a:defRPr sz="1800" kern="1200">
-                <a:solidFill>
-                  <a:schemeClr val="tx1"/>
-                </a:solidFill>
-                <a:latin typeface="+mn-lt"/>
-                <a:ea typeface="+mn-ea"/>
-                <a:cs typeface="+mn-cs"/>
-              </a:defRPr>
-            </a:lvl5pPr>
-            <a:lvl6pPr marL="2286000" algn="l" defTabSz="914400" rtl="0" eaLnBrk="1" latinLnBrk="0" hangingPunct="1">
-              <a:defRPr sz="1800" kern="1200">
-                <a:solidFill>
-                  <a:schemeClr val="tx1"/>
-                </a:solidFill>
-                <a:latin typeface="+mn-lt"/>
-                <a:ea typeface="+mn-ea"/>
-                <a:cs typeface="+mn-cs"/>
-              </a:defRPr>
-            </a:lvl6pPr>
-            <a:lvl7pPr marL="2743200" algn="l" defTabSz="914400" rtl="0" eaLnBrk="1" latinLnBrk="0" hangingPunct="1">
-              <a:defRPr sz="1800" kern="1200">
-                <a:solidFill>
-                  <a:schemeClr val="tx1"/>
-                </a:solidFill>
-                <a:latin typeface="+mn-lt"/>
-                <a:ea typeface="+mn-ea"/>
-                <a:cs typeface="+mn-cs"/>
-              </a:defRPr>
-            </a:lvl7pPr>
-            <a:lvl8pPr marL="3200400" algn="l" defTabSz="914400" rtl="0" eaLnBrk="1" latinLnBrk="0" hangingPunct="1">
-              <a:defRPr sz="1800" kern="1200">
-                <a:solidFill>
-                  <a:schemeClr val="tx1"/>
-                </a:solidFill>
-                <a:latin typeface="+mn-lt"/>
-                <a:ea typeface="+mn-ea"/>
-                <a:cs typeface="+mn-cs"/>
-              </a:defRPr>
-            </a:lvl8pPr>
-            <a:lvl9pPr marL="3657600" algn="l" defTabSz="914400" rtl="0" eaLnBrk="1" latinLnBrk="0" hangingPunct="1">
-              <a:defRPr sz="1800" kern="1200">
-                <a:solidFill>
-                  <a:schemeClr val="tx1"/>
-                </a:solidFill>
-                <a:latin typeface="+mn-lt"/>
-                <a:ea typeface="+mn-ea"/>
-                <a:cs typeface="+mn-cs"/>
-              </a:defRPr>
-            </a:lvl9pPr>
-          </a:lstStyle>
-          <a:p>
-            <a:r>
-              <a:rPr lang="en-GB" dirty="0">
-                <a:solidFill>
-                  <a:srgbClr val="757575"/>
-                </a:solidFill>
-              </a:rPr>
-              <a:t>{{</a:t>
-            </a:r>
-            <a:r>
-              <a:rPr lang="en-GB" dirty="0" err="1">
-                <a:solidFill>
-                  <a:srgbClr val="757575"/>
-                </a:solidFill>
-              </a:rPr>
-              <a:t>slide_number</a:t>
-            </a:r>
-            <a:r>
-              <a:rPr lang="en-GB" dirty="0">
-                <a:solidFill>
-                  <a:srgbClr val="757575"/>
-                </a:solidFill>
-              </a:rPr>
-              <a:t>}} / {{</a:t>
-            </a:r>
-            <a:r>
-              <a:rPr lang="en-GB" dirty="0" err="1">
-                <a:solidFill>
-                  <a:srgbClr val="757575"/>
-                </a:solidFill>
-              </a:rPr>
-              <a:t>total_slides</a:t>
-            </a:r>
-            <a:r>
-              <a:rPr lang="en-GB" dirty="0">
-                <a:solidFill>
-                  <a:srgbClr val="757575"/>
-                </a:solidFill>
-              </a:rPr>
-              <a:t>}}</a:t>
-            </a:r>
           </a:p>
         </p:txBody>
       </p:sp>
@@ -5431,7 +4512,7 @@
               <a:buNone/>
             </a:pPr>
             <a:r>
-              <a:rPr lang="en-US" sz="2400" b="1" kern="0" spc="368" dirty="0">
+              <a:rPr lang="en-US" sz="2400" b="1" kern="0" spc="0" dirty="0">
                 <a:solidFill>
                   <a:srgbClr val="643791"/>
                 </a:solidFill>
@@ -5439,7 +4520,7 @@
                 <a:ea typeface="Arial" pitchFamily="34" charset="-122"/>
                 <a:cs typeface="Arial" pitchFamily="34" charset="-120"/>
               </a:rPr>
-              <a:t>COMMENTARY</a:t>
+              <a:t>Commentary</a:t>
             </a:r>
             <a:endParaRPr lang="en-US" sz="2400" b="1" dirty="0">
               <a:latin typeface="DM Sans 14pt" pitchFamily="2" charset="77"/>
@@ -5481,7 +4562,7 @@
           <a:lstStyle/>
           <a:p>
             <a:r>
-              <a:rPr lang="en-US" sz="1400">
+              <a:rPr lang="en-US" sz="1400" dirty="0">
                 <a:solidFill>
                   <a:srgbClr val="643791"/>
                 </a:solidFill>
@@ -5498,28 +4579,20 @@
                 <a:latin typeface="DM Sans 14pt" pitchFamily="2" charset="77"/>
                 <a:cs typeface="Arial" pitchFamily="34" charset="-120"/>
               </a:rPr>
-              <a:t>commentary</a:t>
-            </a:r>
-            <a:r>
-              <a:rPr lang="en-US" sz="1400" err="1">
-                <a:solidFill>
-                  <a:srgbClr val="643791"/>
-                </a:solidFill>
-                <a:latin typeface="DM Sans 14pt" pitchFamily="2" charset="77"/>
-                <a:cs typeface="Arial" pitchFamily="34" charset="-120"/>
-              </a:rPr>
-              <a:t>_</a:t>
-            </a:r>
-            <a:r>
-              <a:rPr lang="en-US" sz="1400">
-                <a:solidFill>
-                  <a:srgbClr val="643791"/>
-                </a:solidFill>
-                <a:latin typeface="DM Sans 14pt" pitchFamily="2" charset="77"/>
-                <a:cs typeface="Arial" pitchFamily="34" charset="-120"/>
-              </a:rPr>
-              <a:t>postings_intro}}</a:t>
-            </a:r>
+              <a:t>commentary_postings_intro</a:t>
+            </a:r>
+            <a:r>
+              <a:rPr lang="en-US" sz="1400" dirty="0">
+                <a:solidFill>
+                  <a:srgbClr val="643791"/>
+                </a:solidFill>
+                <a:latin typeface="DM Sans 14pt" pitchFamily="2" charset="77"/>
+                <a:cs typeface="Arial" pitchFamily="34" charset="-120"/>
+              </a:rPr>
+              <a:t>}}</a:t>
+            </a:r>
+          </a:p>
+          <a:p>
             <a:endParaRPr lang="en-US" sz="1400" dirty="0">
               <a:solidFill>
                 <a:srgbClr val="643791"/>
@@ -5529,6 +4602,18 @@
             </a:endParaRPr>
           </a:p>
           <a:p>
+            <a:r>
+              <a:rPr lang="en-US" sz="1400" dirty="0">
+                <a:solidFill>
+                  <a:srgbClr val="643791"/>
+                </a:solidFill>
+                <a:latin typeface="DM Sans 14pt" pitchFamily="2" charset="77"/>
+                <a:cs typeface="Arial" pitchFamily="34" charset="-120"/>
+              </a:rPr>
+              <a:t>{{commentary_postings_point_1}}</a:t>
+            </a:r>
+          </a:p>
+          <a:p>
             <a:endParaRPr lang="en-US" sz="1400" dirty="0">
               <a:solidFill>
                 <a:srgbClr val="643791"/>
@@ -5546,18 +4631,10 @@
                 <a:latin typeface="DM Sans 14pt" pitchFamily="2" charset="77"/>
                 <a:cs typeface="Arial" pitchFamily="34" charset="-120"/>
               </a:rPr>
-              <a:t>{{commentary_postings_</a:t>
-            </a:r>
-            <a:r>
-              <a:rPr lang="en-US" sz="1400">
-                <a:solidFill>
-                  <a:srgbClr val="643791"/>
-                </a:solidFill>
-                <a:latin typeface="DM Sans 14pt" pitchFamily="2" charset="77"/>
-                <a:cs typeface="Arial" pitchFamily="34" charset="-120"/>
-              </a:rPr>
-              <a:t>point_1}}</a:t>
-            </a:r>
+              <a:t>{{commentary_postings_point_2}}</a:t>
+            </a:r>
+          </a:p>
+          <a:p>
             <a:endParaRPr lang="en-US" sz="1400" dirty="0">
               <a:solidFill>
                 <a:srgbClr val="643791"/>
@@ -5567,15 +4644,6 @@
             </a:endParaRPr>
           </a:p>
           <a:p>
-            <a:endParaRPr lang="en-US" sz="1400" dirty="0">
-              <a:solidFill>
-                <a:srgbClr val="643791"/>
-              </a:solidFill>
-              <a:latin typeface="DM Sans 14pt" pitchFamily="2" charset="77"/>
-              <a:cs typeface="Arial" pitchFamily="34" charset="-120"/>
-            </a:endParaRPr>
-          </a:p>
-          <a:p>
             <a:r>
               <a:rPr lang="en-US" sz="1400" dirty="0">
                 <a:solidFill>
@@ -5584,63 +4652,180 @@
                 <a:latin typeface="DM Sans 14pt" pitchFamily="2" charset="77"/>
                 <a:cs typeface="Arial" pitchFamily="34" charset="-120"/>
               </a:rPr>
-              <a:t>{{commentary_postings_</a:t>
-            </a:r>
-            <a:r>
-              <a:rPr lang="en-US" sz="1400">
-                <a:solidFill>
-                  <a:srgbClr val="643791"/>
-                </a:solidFill>
-                <a:latin typeface="DM Sans 14pt" pitchFamily="2" charset="77"/>
-                <a:cs typeface="Arial" pitchFamily="34" charset="-120"/>
-              </a:rPr>
-              <a:t>point_2}}</a:t>
-            </a:r>
-            <a:endParaRPr lang="en-US" sz="1400" dirty="0">
-              <a:solidFill>
-                <a:srgbClr val="643791"/>
-              </a:solidFill>
-              <a:latin typeface="DM Sans 14pt" pitchFamily="2" charset="77"/>
-              <a:cs typeface="Arial" pitchFamily="34" charset="-120"/>
-            </a:endParaRPr>
-          </a:p>
-          <a:p>
-            <a:endParaRPr lang="en-US" sz="1400" dirty="0">
-              <a:solidFill>
-                <a:srgbClr val="643791"/>
-              </a:solidFill>
-              <a:latin typeface="DM Sans 14pt" pitchFamily="2" charset="77"/>
-              <a:cs typeface="Arial" pitchFamily="34" charset="-120"/>
-            </a:endParaRPr>
-          </a:p>
-          <a:p>
-            <a:r>
-              <a:rPr lang="en-US" sz="1400" dirty="0">
-                <a:solidFill>
-                  <a:srgbClr val="643791"/>
-                </a:solidFill>
-                <a:latin typeface="DM Sans 14pt" pitchFamily="2" charset="77"/>
-                <a:cs typeface="Arial" pitchFamily="34" charset="-120"/>
-              </a:rPr>
-              <a:t>{{commentary</a:t>
-            </a:r>
-            <a:r>
-              <a:rPr lang="en-US" sz="1400">
-                <a:solidFill>
-                  <a:srgbClr val="643791"/>
-                </a:solidFill>
-                <a:latin typeface="DM Sans 14pt" pitchFamily="2" charset="77"/>
-                <a:cs typeface="Arial" pitchFamily="34" charset="-120"/>
-              </a:rPr>
-              <a:t>_postings_point_3}}</a:t>
-            </a:r>
-            <a:endParaRPr lang="en-US" sz="1400" dirty="0">
-              <a:solidFill>
-                <a:srgbClr val="643791"/>
-              </a:solidFill>
-              <a:latin typeface="DM Sans 14pt" pitchFamily="2" charset="77"/>
-              <a:cs typeface="Arial" pitchFamily="34" charset="-120"/>
-            </a:endParaRPr>
+              <a:t>{{commentary_postings_point_3}}</a:t>
+            </a:r>
+          </a:p>
+        </p:txBody>
+      </p:sp>
+      <p:pic>
+        <p:nvPicPr>
+          <p:cNvPr id="3" name="Graphic 2">
+            <a:extLst>
+              <a:ext uri="{FF2B5EF4-FFF2-40B4-BE49-F238E27FC236}">
+                <a16:creationId xmlns:a16="http://schemas.microsoft.com/office/drawing/2014/main" id="{6DDED1F8-ADDB-C3A7-B6B0-7E6F41C156CE}"/>
+              </a:ext>
+            </a:extLst>
+          </p:cNvPr>
+          <p:cNvPicPr>
+            <a:picLocks noChangeAspect="1"/>
+          </p:cNvPicPr>
+          <p:nvPr/>
+        </p:nvPicPr>
+        <p:blipFill>
+          <a:blip>
+            <a:extLst>
+              <a:ext uri="{96DAC541-7B7A-43D3-8B79-37D633B846F1}">
+                <asvg:svgBlip xmlns:asvg="http://schemas.microsoft.com/office/drawing/2016/SVG/main" r:embed="rId3"/>
+              </a:ext>
+            </a:extLst>
+          </a:blip>
+          <a:stretch>
+            <a:fillRect/>
+          </a:stretch>
+        </p:blipFill>
+        <p:spPr>
+          <a:xfrm>
+            <a:off x="715526" y="636516"/>
+            <a:ext cx="1411947" cy="266701"/>
+          </a:xfrm>
+          <a:prstGeom prst="rect">
+            <a:avLst/>
+          </a:prstGeom>
+        </p:spPr>
+      </p:pic>
+      <p:sp>
+        <p:nvSpPr>
+          <p:cNvPr id="4" name="TextBox 3">
+            <a:extLst>
+              <a:ext uri="{FF2B5EF4-FFF2-40B4-BE49-F238E27FC236}">
+                <a16:creationId xmlns:a16="http://schemas.microsoft.com/office/drawing/2014/main" id="{1110F800-702E-5EBB-2722-059D6ACF7D0B}"/>
+              </a:ext>
+            </a:extLst>
+          </p:cNvPr>
+          <p:cNvSpPr txBox="1"/>
+          <p:nvPr/>
+        </p:nvSpPr>
+        <p:spPr>
+          <a:xfrm>
+            <a:off x="15604114" y="9742289"/>
+            <a:ext cx="2074286" cy="153888"/>
+          </a:xfrm>
+          <a:prstGeom prst="rect">
+            <a:avLst/>
+          </a:prstGeom>
+          <a:noFill/>
+        </p:spPr>
+        <p:txBody>
+          <a:bodyPr wrap="none" lIns="0" tIns="0" rIns="0" bIns="0">
+            <a:spAutoFit/>
+          </a:bodyPr>
+          <a:lstStyle/>
+          <a:p>
+            <a:pPr algn="r"/>
+            <a:r>
+              <a:rPr sz="1000" dirty="0">
+                <a:solidFill>
+                  <a:srgbClr val="5B5067"/>
+                </a:solidFill>
+                <a:latin typeface="DM Sans 14pt" pitchFamily="2" charset="77"/>
+              </a:rPr>
+              <a:t>{{</a:t>
+            </a:r>
+            <a:r>
+              <a:rPr sz="1000" dirty="0" err="1">
+                <a:solidFill>
+                  <a:srgbClr val="5B5067"/>
+                </a:solidFill>
+                <a:latin typeface="DM Sans 14pt" pitchFamily="2" charset="77"/>
+              </a:rPr>
+              <a:t>slide_number</a:t>
+            </a:r>
+            <a:r>
+              <a:rPr sz="1000" dirty="0">
+                <a:solidFill>
+                  <a:srgbClr val="5B5067"/>
+                </a:solidFill>
+                <a:latin typeface="DM Sans 14pt" pitchFamily="2" charset="77"/>
+              </a:rPr>
+              <a:t>}} / {{</a:t>
+            </a:r>
+            <a:r>
+              <a:rPr sz="1000" dirty="0" err="1">
+                <a:solidFill>
+                  <a:srgbClr val="5B5067"/>
+                </a:solidFill>
+                <a:latin typeface="DM Sans 14pt" pitchFamily="2" charset="77"/>
+              </a:rPr>
+              <a:t>total_slides</a:t>
+            </a:r>
+            <a:r>
+              <a:rPr sz="1000" dirty="0">
+                <a:solidFill>
+                  <a:srgbClr val="5B5067"/>
+                </a:solidFill>
+                <a:latin typeface="DM Sans 14pt" pitchFamily="2" charset="77"/>
+              </a:rPr>
+              <a:t>}}</a:t>
+            </a:r>
+          </a:p>
+        </p:txBody>
+      </p:sp>
+      <p:sp>
+        <p:nvSpPr>
+          <p:cNvPr id="7" name="TextBox 6">
+            <a:extLst>
+              <a:ext uri="{FF2B5EF4-FFF2-40B4-BE49-F238E27FC236}">
+                <a16:creationId xmlns:a16="http://schemas.microsoft.com/office/drawing/2014/main" id="{B2E3C38D-6457-CDD9-F9B4-08174E27D65F}"/>
+              </a:ext>
+            </a:extLst>
+          </p:cNvPr>
+          <p:cNvSpPr txBox="1"/>
+          <p:nvPr/>
+        </p:nvSpPr>
+        <p:spPr>
+          <a:xfrm>
+            <a:off x="609600" y="9742289"/>
+            <a:ext cx="2300310" cy="153888"/>
+          </a:xfrm>
+          <a:prstGeom prst="rect">
+            <a:avLst/>
+          </a:prstGeom>
+          <a:noFill/>
+        </p:spPr>
+        <p:txBody>
+          <a:bodyPr wrap="none" lIns="0" tIns="0" rIns="0" bIns="0">
+            <a:spAutoFit/>
+          </a:bodyPr>
+          <a:lstStyle/>
+          <a:p>
+            <a:pPr algn="l"/>
+            <a:r>
+              <a:rPr sz="1000" dirty="0">
+                <a:solidFill>
+                  <a:srgbClr val="643791"/>
+                </a:solidFill>
+                <a:latin typeface="DM Sans 14pt" pitchFamily="2" charset="77"/>
+              </a:rPr>
+              <a:t>Jobs Go Public  ·  Go place</a:t>
+            </a:r>
+            <a:r>
+              <a:rPr lang="en-GB" sz="1000" dirty="0">
+                <a:solidFill>
+                  <a:srgbClr val="643791"/>
+                </a:solidFill>
+                <a:latin typeface="DM Sans 14pt" pitchFamily="2" charset="77"/>
+              </a:rPr>
+              <a:t>s</a:t>
+            </a:r>
+            <a:r>
+              <a:rPr sz="1000" dirty="0">
+                <a:solidFill>
+                  <a:srgbClr val="643791"/>
+                </a:solidFill>
+                <a:latin typeface="DM Sans 14pt" pitchFamily="2" charset="77"/>
+              </a:rPr>
+              <a:t>. Go public.</a:t>
+            </a:r>
           </a:p>
         </p:txBody>
       </p:sp>
@@ -5691,7 +4876,7 @@
         </p:nvSpPr>
         <p:spPr>
           <a:xfrm>
-            <a:off x="3898198" y="2799557"/>
+            <a:off x="3901954" y="2799557"/>
             <a:ext cx="8805984" cy="6547741"/>
           </a:xfrm>
           <a:prstGeom prst="roundRect">
@@ -5700,12 +4885,10 @@
             </a:avLst>
           </a:prstGeom>
           <a:solidFill>
-            <a:srgbClr val="E8E0F2"/>
+            <a:schemeClr val="bg1"/>
           </a:solidFill>
           <a:ln w="19050">
-            <a:solidFill>
-              <a:srgbClr val="643791"/>
-            </a:solidFill>
+            <a:noFill/>
             <a:prstDash val="dash"/>
           </a:ln>
         </p:spPr>
@@ -5714,121 +4897,6 @@
           <a:lstStyle/>
           <a:p>
             <a:endParaRPr lang="en-GB">
-              <a:latin typeface="DM Sans 14pt" pitchFamily="2" charset="77"/>
-            </a:endParaRPr>
-          </a:p>
-        </p:txBody>
-      </p:sp>
-      <p:sp>
-        <p:nvSpPr>
-          <p:cNvPr id="2" name="Shape 0"/>
-          <p:cNvSpPr/>
-          <p:nvPr/>
-        </p:nvSpPr>
-        <p:spPr>
-          <a:xfrm>
-            <a:off x="609600" y="457200"/>
-            <a:ext cx="495300" cy="438150"/>
-          </a:xfrm>
-          <a:prstGeom prst="rect">
-            <a:avLst/>
-          </a:prstGeom>
-          <a:solidFill>
-            <a:srgbClr val="643791"/>
-          </a:solidFill>
-          <a:ln/>
-        </p:spPr>
-        <p:txBody>
-          <a:bodyPr/>
-          <a:lstStyle/>
-          <a:p>
-            <a:endParaRPr lang="en-GB">
-              <a:latin typeface="DM Sans 14pt" pitchFamily="2" charset="77"/>
-            </a:endParaRPr>
-          </a:p>
-        </p:txBody>
-      </p:sp>
-      <p:sp>
-        <p:nvSpPr>
-          <p:cNvPr id="3" name="Text 1"/>
-          <p:cNvSpPr/>
-          <p:nvPr/>
-        </p:nvSpPr>
-        <p:spPr>
-          <a:xfrm>
-            <a:off x="571500" y="476250"/>
-            <a:ext cx="495300" cy="457200"/>
-          </a:xfrm>
-          <a:prstGeom prst="rect">
-            <a:avLst/>
-          </a:prstGeom>
-          <a:noFill/>
-          <a:ln/>
-        </p:spPr>
-        <p:txBody>
-          <a:bodyPr wrap="square" lIns="25400" tIns="25400" rIns="25400" bIns="25400" rtlCol="0" anchor="ctr">
-            <a:normAutofit/>
-          </a:bodyPr>
-          <a:lstStyle/>
-          <a:p>
-            <a:pPr marL="0" indent="0" algn="ctr">
-              <a:buNone/>
-            </a:pPr>
-            <a:r>
-              <a:rPr lang="en-US" sz="1350" b="1" kern="0" spc="-27" dirty="0">
-                <a:solidFill>
-                  <a:srgbClr val="FFFFFF"/>
-                </a:solidFill>
-                <a:latin typeface="DM Sans 14pt" pitchFamily="2" charset="77"/>
-                <a:ea typeface="Arial" pitchFamily="34" charset="-122"/>
-                <a:cs typeface="Arial" pitchFamily="34" charset="-120"/>
-              </a:rPr>
-              <a:t>Go</a:t>
-            </a:r>
-            <a:endParaRPr lang="en-US" sz="1350" dirty="0">
-              <a:latin typeface="DM Sans 14pt" pitchFamily="2" charset="77"/>
-            </a:endParaRPr>
-          </a:p>
-        </p:txBody>
-      </p:sp>
-      <p:sp>
-        <p:nvSpPr>
-          <p:cNvPr id="4" name="Text 2"/>
-          <p:cNvSpPr/>
-          <p:nvPr/>
-        </p:nvSpPr>
-        <p:spPr>
-          <a:xfrm>
-            <a:off x="1200150" y="538163"/>
-            <a:ext cx="1561505" cy="314325"/>
-          </a:xfrm>
-          <a:prstGeom prst="rect">
-            <a:avLst/>
-          </a:prstGeom>
-          <a:noFill/>
-          <a:ln/>
-        </p:spPr>
-        <p:txBody>
-          <a:bodyPr wrap="square" lIns="25400" tIns="25400" rIns="25400" bIns="25400" rtlCol="0" anchor="t">
-            <a:normAutofit/>
-          </a:bodyPr>
-          <a:lstStyle/>
-          <a:p>
-            <a:pPr marL="0" indent="0" algn="l">
-              <a:buNone/>
-            </a:pPr>
-            <a:r>
-              <a:rPr lang="en-US" sz="1650" b="1" kern="0" spc="-16" dirty="0">
-                <a:solidFill>
-                  <a:srgbClr val="111111"/>
-                </a:solidFill>
-                <a:latin typeface="DM Sans 14pt" pitchFamily="2" charset="77"/>
-                <a:ea typeface="Arial" pitchFamily="34" charset="-122"/>
-                <a:cs typeface="Arial" pitchFamily="34" charset="-120"/>
-              </a:rPr>
-              <a:t>Jobs Go Public</a:t>
-            </a:r>
-            <a:endParaRPr lang="en-US" sz="1650" dirty="0">
               <a:latin typeface="DM Sans 14pt" pitchFamily="2" charset="77"/>
             </a:endParaRPr>
           </a:p>
@@ -5899,12 +4967,10 @@
             </a:avLst>
           </a:prstGeom>
           <a:solidFill>
-            <a:srgbClr val="E8E0F2"/>
+            <a:schemeClr val="bg1"/>
           </a:solidFill>
           <a:ln w="19050">
-            <a:solidFill>
-              <a:srgbClr val="643791"/>
-            </a:solidFill>
+            <a:noFill/>
             <a:prstDash val="dash"/>
           </a:ln>
         </p:spPr>
@@ -5931,18 +4997,14 @@
           </a:xfrm>
           <a:prstGeom prst="roundRect">
             <a:avLst>
-              <a:gd name="adj" fmla="val 5356"/>
+              <a:gd name="adj" fmla="val 0"/>
             </a:avLst>
           </a:prstGeom>
           <a:solidFill>
             <a:srgbClr val="FFFFFF"/>
           </a:solidFill>
           <a:ln w="9525">
-            <a:solidFill>
-              <a:srgbClr val="000000">
-                <a:alpha val="10000"/>
-              </a:srgbClr>
-            </a:solidFill>
+            <a:noFill/>
             <a:prstDash val="solid"/>
           </a:ln>
         </p:spPr>
@@ -5984,51 +5046,6 @@
               <a:t>}}</a:t>
             </a:r>
             <a:endParaRPr lang="en-US" dirty="0">
-              <a:latin typeface="DM Sans 14pt" pitchFamily="2" charset="77"/>
-            </a:endParaRPr>
-          </a:p>
-        </p:txBody>
-      </p:sp>
-      <p:sp>
-        <p:nvSpPr>
-          <p:cNvPr id="38" name="Text 36"/>
-          <p:cNvSpPr/>
-          <p:nvPr/>
-        </p:nvSpPr>
-        <p:spPr>
-          <a:xfrm>
-            <a:off x="609600" y="9753600"/>
-            <a:ext cx="2373511" cy="190500"/>
-          </a:xfrm>
-          <a:prstGeom prst="rect">
-            <a:avLst/>
-          </a:prstGeom>
-          <a:noFill/>
-          <a:ln/>
-        </p:spPr>
-        <p:txBody>
-          <a:bodyPr wrap="square" lIns="25400" tIns="25400" rIns="25400" bIns="25400" rtlCol="0" anchor="t">
-            <a:normAutofit fontScale="85000" lnSpcReduction="10000"/>
-          </a:bodyPr>
-          <a:lstStyle/>
-          <a:p>
-            <a:pPr marL="0" indent="0" algn="l">
-              <a:buNone/>
-            </a:pPr>
-            <a:r>
-              <a:rPr lang="en-US" sz="1050" kern="0" spc="42" dirty="0">
-                <a:solidFill>
-                  <a:srgbClr val="111111">
-                    <a:alpha val="63000"/>
-                  </a:srgbClr>
-                </a:solidFill>
-                <a:latin typeface="DM Sans 14pt" pitchFamily="2" charset="77"/>
-                <a:ea typeface="Arial" pitchFamily="34" charset="-122"/>
-                <a:cs typeface="Arial" pitchFamily="34" charset="-120"/>
-              </a:rPr>
-              <a:t>{{client_name}} · Advertising Report</a:t>
-            </a:r>
-            <a:endParaRPr lang="en-US" sz="1050" dirty="0">
               <a:latin typeface="DM Sans 14pt" pitchFamily="2" charset="77"/>
             </a:endParaRPr>
           </a:p>
@@ -6048,23 +5065,19 @@
         </p:nvSpPr>
         <p:spPr>
           <a:xfrm>
-            <a:off x="4006390" y="3227184"/>
+            <a:off x="4010146" y="3227184"/>
             <a:ext cx="8589600" cy="6013812"/>
           </a:xfrm>
           <a:prstGeom prst="roundRect">
             <a:avLst>
-              <a:gd name="adj" fmla="val 2486"/>
+              <a:gd name="adj" fmla="val 0"/>
             </a:avLst>
           </a:prstGeom>
           <a:solidFill>
             <a:srgbClr val="FFFFFF"/>
           </a:solidFill>
           <a:ln w="9525">
-            <a:solidFill>
-              <a:srgbClr val="000000">
-                <a:alpha val="10000"/>
-              </a:srgbClr>
-            </a:solidFill>
+            <a:noFill/>
             <a:prstDash val="solid"/>
           </a:ln>
         </p:spPr>
@@ -6174,8 +5187,8 @@
         </p:nvSpPr>
         <p:spPr>
           <a:xfrm>
-            <a:off x="761999" y="1866900"/>
-            <a:ext cx="2772000" cy="723600"/>
+            <a:off x="761998" y="1866900"/>
+            <a:ext cx="2919600" cy="723600"/>
           </a:xfrm>
           <a:prstGeom prst="roundRect">
             <a:avLst/>
@@ -6191,53 +5204,47 @@
           <a:p>
             <a:pPr algn="r"/>
             <a:r>
-              <a:rPr lang="en-US" sz="1050" kern="0" spc="182" dirty="0">
+              <a:rPr lang="en-US" sz="1200" kern="0" dirty="0">
                 <a:solidFill>
                   <a:srgbClr val="FFFFFF">
                     <a:alpha val="85000"/>
                   </a:srgbClr>
                 </a:solidFill>
                 <a:latin typeface="DM Sans 14pt" pitchFamily="2" charset="77"/>
-                <a:ea typeface="Arial" pitchFamily="34" charset="-122"/>
-                <a:cs typeface="Arial" pitchFamily="34" charset="-120"/>
-              </a:rPr>
-              <a:t>JOBS </a:t>
+                <a:cs typeface="Arial" pitchFamily="34" charset="-120"/>
+              </a:rPr>
+              <a:t>Jobs </a:t>
             </a:r>
           </a:p>
           <a:p>
             <a:pPr algn="r"/>
             <a:r>
-              <a:rPr lang="en-US" sz="1050" kern="0" spc="182" dirty="0">
+              <a:rPr lang="en-US" sz="1200" kern="0" dirty="0">
                 <a:solidFill>
                   <a:srgbClr val="FFFFFF">
                     <a:alpha val="85000"/>
                   </a:srgbClr>
                 </a:solidFill>
                 <a:latin typeface="DM Sans 14pt" pitchFamily="2" charset="77"/>
-                <a:ea typeface="Arial" pitchFamily="34" charset="-122"/>
-                <a:cs typeface="Arial" pitchFamily="34" charset="-120"/>
-              </a:rPr>
-              <a:t>ADVERTISED </a:t>
+                <a:cs typeface="Arial" pitchFamily="34" charset="-120"/>
+              </a:rPr>
+              <a:t>advertised </a:t>
             </a:r>
           </a:p>
           <a:p>
             <a:pPr algn="r"/>
             <a:r>
-              <a:rPr lang="en-US" sz="1050" kern="0" spc="182" dirty="0">
+              <a:rPr lang="en-US" sz="1200" kern="0" dirty="0">
                 <a:solidFill>
                   <a:srgbClr val="FFFFFF">
                     <a:alpha val="85000"/>
                   </a:srgbClr>
                 </a:solidFill>
                 <a:latin typeface="DM Sans 14pt" pitchFamily="2" charset="77"/>
-                <a:ea typeface="Arial" pitchFamily="34" charset="-122"/>
-                <a:cs typeface="Arial" pitchFamily="34" charset="-120"/>
-              </a:rPr>
-              <a:t>THIS PERIOD</a:t>
-            </a:r>
-            <a:endParaRPr lang="en-US" sz="1050" dirty="0">
-              <a:latin typeface="DM Sans 14pt" pitchFamily="2" charset="77"/>
-            </a:endParaRPr>
+                <a:cs typeface="Arial" pitchFamily="34" charset="-120"/>
+              </a:rPr>
+              <a:t>this  period</a:t>
+            </a:r>
           </a:p>
         </p:txBody>
       </p:sp>
@@ -6256,7 +5263,7 @@
         <p:spPr>
           <a:xfrm>
             <a:off x="811592" y="1925993"/>
-            <a:ext cx="1407600" cy="604800"/>
+            <a:ext cx="1728000" cy="604800"/>
           </a:xfrm>
           <a:prstGeom prst="roundRect">
             <a:avLst>
@@ -6276,39 +5283,36 @@
           <a:p>
             <a:pPr algn="ctr"/>
             <a:r>
-              <a:rPr lang="en-US" sz="2800" kern="0" spc="-67" dirty="0">
-                <a:solidFill>
-                  <a:srgbClr val="FFFFFF"/>
-                </a:solidFill>
-                <a:latin typeface="DM Sans 14pt" pitchFamily="2" charset="77"/>
-                <a:ea typeface="Arial" pitchFamily="34" charset="-122"/>
-                <a:cs typeface="Arial" pitchFamily="34" charset="-120"/>
+              <a:rPr lang="en-GB" sz="3600" dirty="0">
+                <a:solidFill>
+                  <a:schemeClr val="bg1"/>
+                </a:solidFill>
+                <a:latin typeface="DM Sans 14pt" pitchFamily="2" charset="77"/>
               </a:rPr>
               <a:t>{{</a:t>
             </a:r>
             <a:r>
-              <a:rPr lang="en-US" sz="2800" kern="0" spc="-67" dirty="0" err="1">
-                <a:solidFill>
-                  <a:srgbClr val="FFFFFF"/>
-                </a:solidFill>
-                <a:latin typeface="DM Sans 14pt" pitchFamily="2" charset="77"/>
-                <a:ea typeface="Arial" pitchFamily="34" charset="-122"/>
-                <a:cs typeface="Arial" pitchFamily="34" charset="-120"/>
+              <a:rPr lang="en-GB" sz="3600" dirty="0" err="1">
+                <a:solidFill>
+                  <a:schemeClr val="bg1"/>
+                </a:solidFill>
+                <a:latin typeface="DM Sans 14pt" pitchFamily="2" charset="77"/>
               </a:rPr>
               <a:t>stat_total_jobs</a:t>
             </a:r>
             <a:r>
-              <a:rPr lang="en-US" sz="2800" kern="0" spc="-67" dirty="0">
-                <a:solidFill>
-                  <a:srgbClr val="FFFFFF"/>
-                </a:solidFill>
-                <a:latin typeface="DM Sans 14pt" pitchFamily="2" charset="77"/>
-                <a:ea typeface="Arial" pitchFamily="34" charset="-122"/>
-                <a:cs typeface="Arial" pitchFamily="34" charset="-120"/>
+              <a:rPr lang="en-GB" sz="3600" dirty="0">
+                <a:solidFill>
+                  <a:schemeClr val="bg1"/>
+                </a:solidFill>
+                <a:latin typeface="DM Sans 14pt" pitchFamily="2" charset="77"/>
               </a:rPr>
               <a:t>}}</a:t>
             </a:r>
-            <a:endParaRPr lang="en-US" sz="2800" dirty="0">
+            <a:endParaRPr lang="en-US" sz="3600" dirty="0">
+              <a:solidFill>
+                <a:schemeClr val="bg1"/>
+              </a:solidFill>
               <a:latin typeface="DM Sans 14pt" pitchFamily="2" charset="77"/>
             </a:endParaRPr>
           </a:p>
@@ -6328,8 +5332,8 @@
         </p:nvSpPr>
         <p:spPr>
           <a:xfrm>
-            <a:off x="3778939" y="1866900"/>
-            <a:ext cx="2772000" cy="723600"/>
+            <a:off x="3770778" y="1866900"/>
+            <a:ext cx="2919600" cy="723600"/>
           </a:xfrm>
           <a:prstGeom prst="roundRect">
             <a:avLst/>
@@ -6345,31 +5349,32 @@
           <a:p>
             <a:pPr algn="r"/>
             <a:r>
-              <a:rPr lang="en-US" sz="1050" kern="0" spc="182" dirty="0">
-                <a:latin typeface="DM Sans 14pt" pitchFamily="2" charset="77"/>
-                <a:ea typeface="Arial" pitchFamily="34" charset="-122"/>
-                <a:cs typeface="Arial" pitchFamily="34" charset="-120"/>
-              </a:rPr>
-              <a:t>COST PER </a:t>
-            </a:r>
-            <a:br>
-              <a:rPr lang="en-US" sz="1050" kern="0" spc="182" dirty="0">
-                <a:latin typeface="DM Sans 14pt" pitchFamily="2" charset="77"/>
-                <a:ea typeface="Arial" pitchFamily="34" charset="-122"/>
-                <a:cs typeface="Arial" pitchFamily="34" charset="-120"/>
-              </a:rPr>
-            </a:br>
-            <a:r>
-              <a:rPr lang="en-US" sz="1050" kern="0" spc="182" dirty="0">
-                <a:latin typeface="DM Sans 14pt" pitchFamily="2" charset="77"/>
-                <a:ea typeface="Arial" pitchFamily="34" charset="-122"/>
-                <a:cs typeface="Arial" pitchFamily="34" charset="-120"/>
-              </a:rPr>
-              <a:t>JOB</a:t>
-            </a:r>
-            <a:endParaRPr lang="en-US" sz="1050" dirty="0">
-              <a:latin typeface="DM Sans 14pt" pitchFamily="2" charset="77"/>
-            </a:endParaRPr>
+              <a:rPr lang="en-US" sz="1200" kern="0" dirty="0">
+                <a:solidFill>
+                  <a:srgbClr val="757575">
+                    <a:alpha val="85000"/>
+                  </a:srgbClr>
+                </a:solidFill>
+                <a:latin typeface="DM Sans 14pt" pitchFamily="2" charset="77"/>
+                <a:cs typeface="Arial" pitchFamily="34" charset="-120"/>
+              </a:rPr>
+              <a:t>Cost per </a:t>
+            </a:r>
+          </a:p>
+          <a:p>
+            <a:pPr algn="r"/>
+            <a:r>
+              <a:rPr lang="en-US" sz="1200" kern="0" dirty="0">
+                <a:solidFill>
+                  <a:srgbClr val="757575">
+                    <a:alpha val="85000"/>
+                  </a:srgbClr>
+                </a:solidFill>
+                <a:latin typeface="DM Sans 14pt" pitchFamily="2" charset="77"/>
+                <a:cs typeface="Arial" pitchFamily="34" charset="-120"/>
+              </a:rPr>
+              <a:t>job</a:t>
+            </a:r>
           </a:p>
         </p:txBody>
       </p:sp>
@@ -6387,8 +5392,8 @@
         </p:nvSpPr>
         <p:spPr>
           <a:xfrm>
-            <a:off x="3828532" y="1925993"/>
-            <a:ext cx="1407600" cy="604800"/>
+            <a:off x="3820371" y="1925993"/>
+            <a:ext cx="1728000" cy="604800"/>
           </a:xfrm>
           <a:prstGeom prst="roundRect">
             <a:avLst>
@@ -6410,7 +5415,7 @@
               </a:lnSpc>
             </a:pPr>
             <a:r>
-              <a:rPr lang="en-GB" sz="2800" dirty="0">
+              <a:rPr lang="en-GB" sz="3600" dirty="0">
                 <a:solidFill>
                   <a:srgbClr val="757575"/>
                 </a:solidFill>
@@ -6419,7 +5424,7 @@
               <a:t>{{</a:t>
             </a:r>
             <a:r>
-              <a:rPr lang="en-GB" sz="2800" dirty="0" err="1">
+              <a:rPr lang="en-GB" sz="3600" dirty="0" err="1">
                 <a:solidFill>
                   <a:srgbClr val="757575"/>
                 </a:solidFill>
@@ -6428,7 +5433,7 @@
               <a:t>stat_cost_per_job</a:t>
             </a:r>
             <a:r>
-              <a:rPr lang="en-GB" sz="2800" dirty="0">
+              <a:rPr lang="en-GB" sz="3600" dirty="0">
                 <a:solidFill>
                   <a:srgbClr val="757575"/>
                 </a:solidFill>
@@ -6436,7 +5441,7 @@
               </a:rPr>
               <a:t>}}</a:t>
             </a:r>
-            <a:endParaRPr lang="en-US" sz="2800" dirty="0">
+            <a:endParaRPr lang="en-US" sz="3600" dirty="0">
               <a:solidFill>
                 <a:srgbClr val="757575"/>
               </a:solidFill>
@@ -6459,8 +5464,8 @@
         </p:nvSpPr>
         <p:spPr>
           <a:xfrm>
-            <a:off x="6736166" y="1866900"/>
-            <a:ext cx="2772000" cy="723600"/>
+            <a:off x="6779558" y="1866900"/>
+            <a:ext cx="2919600" cy="723600"/>
           </a:xfrm>
           <a:prstGeom prst="roundRect">
             <a:avLst/>
@@ -6476,45 +5481,40 @@
           <a:p>
             <a:pPr algn="r"/>
             <a:r>
-              <a:rPr lang="en-US" sz="1050" kern="0" spc="182" dirty="0">
+              <a:rPr lang="en-US" sz="1200" kern="0" dirty="0">
                 <a:solidFill>
                   <a:srgbClr val="FFFFFF">
                     <a:alpha val="85000"/>
                   </a:srgbClr>
                 </a:solidFill>
                 <a:latin typeface="DM Sans 14pt" pitchFamily="2" charset="77"/>
-                <a:ea typeface="Arial" pitchFamily="34" charset="-122"/>
-                <a:cs typeface="Arial" pitchFamily="34" charset="-120"/>
-              </a:rPr>
-              <a:t>COST PER </a:t>
-            </a:r>
-            <a:br>
-              <a:rPr lang="en-US" sz="1050" kern="0" spc="182" dirty="0">
+                <a:cs typeface="Arial" pitchFamily="34" charset="-120"/>
+              </a:rPr>
+              <a:t>Cost per </a:t>
+            </a:r>
+          </a:p>
+          <a:p>
+            <a:pPr algn="r"/>
+            <a:r>
+              <a:rPr lang="en-US" sz="1200" kern="0">
                 <a:solidFill>
                   <a:srgbClr val="FFFFFF">
                     <a:alpha val="85000"/>
                   </a:srgbClr>
                 </a:solidFill>
                 <a:latin typeface="DM Sans 14pt" pitchFamily="2" charset="77"/>
-                <a:ea typeface="Arial" pitchFamily="34" charset="-122"/>
-                <a:cs typeface="Arial" pitchFamily="34" charset="-120"/>
-              </a:rPr>
-            </a:br>
-            <a:r>
-              <a:rPr lang="en-US" sz="1050" kern="0" spc="182" dirty="0">
-                <a:solidFill>
-                  <a:srgbClr val="FFFFFF">
-                    <a:alpha val="85000"/>
-                  </a:srgbClr>
-                </a:solidFill>
-                <a:latin typeface="DM Sans 14pt" pitchFamily="2" charset="77"/>
-                <a:ea typeface="Arial" pitchFamily="34" charset="-122"/>
-                <a:cs typeface="Arial" pitchFamily="34" charset="-120"/>
-              </a:rPr>
-              <a:t>VIEW</a:t>
-            </a:r>
-            <a:endParaRPr lang="en-US" sz="1050" dirty="0">
+                <a:cs typeface="Arial" pitchFamily="34" charset="-120"/>
+              </a:rPr>
+              <a:t>view</a:t>
+            </a:r>
+            <a:endParaRPr lang="en-US" sz="1200" kern="0" dirty="0">
+              <a:solidFill>
+                <a:srgbClr val="FFFFFF">
+                  <a:alpha val="85000"/>
+                </a:srgbClr>
+              </a:solidFill>
               <a:latin typeface="DM Sans 14pt" pitchFamily="2" charset="77"/>
+              <a:cs typeface="Arial" pitchFamily="34" charset="-120"/>
             </a:endParaRPr>
           </a:p>
         </p:txBody>
@@ -6533,8 +5533,8 @@
         </p:nvSpPr>
         <p:spPr>
           <a:xfrm>
-            <a:off x="6785759" y="1925993"/>
-            <a:ext cx="1407600" cy="604800"/>
+            <a:off x="6829151" y="1925993"/>
+            <a:ext cx="1728000" cy="604800"/>
           </a:xfrm>
           <a:prstGeom prst="roundRect">
             <a:avLst>
@@ -6554,7 +5554,7 @@
           <a:p>
             <a:pPr algn="ctr"/>
             <a:r>
-              <a:rPr lang="en-GB" sz="2800" dirty="0">
+              <a:rPr lang="en-GB" sz="3600" dirty="0">
                 <a:solidFill>
                   <a:schemeClr val="bg1"/>
                 </a:solidFill>
@@ -6563,7 +5563,7 @@
               <a:t>{{</a:t>
             </a:r>
             <a:r>
-              <a:rPr lang="en-GB" sz="2800" dirty="0" err="1">
+              <a:rPr lang="en-GB" sz="3600" dirty="0" err="1">
                 <a:solidFill>
                   <a:schemeClr val="bg1"/>
                 </a:solidFill>
@@ -6572,7 +5572,7 @@
               <a:t>stat_cost_per_view</a:t>
             </a:r>
             <a:r>
-              <a:rPr lang="en-GB" sz="2800" dirty="0">
+              <a:rPr lang="en-GB" sz="3600" dirty="0">
                 <a:solidFill>
                   <a:schemeClr val="bg1"/>
                 </a:solidFill>
@@ -6580,7 +5580,7 @@
               </a:rPr>
               <a:t>}}</a:t>
             </a:r>
-            <a:endParaRPr lang="en-US" sz="2800" dirty="0">
+            <a:endParaRPr lang="en-US" sz="3600" dirty="0">
               <a:solidFill>
                 <a:schemeClr val="bg1"/>
               </a:solidFill>
@@ -6603,8 +5603,8 @@
         </p:nvSpPr>
         <p:spPr>
           <a:xfrm>
-            <a:off x="9750531" y="1866900"/>
-            <a:ext cx="2772000" cy="723600"/>
+            <a:off x="9788338" y="1866900"/>
+            <a:ext cx="2919600" cy="723600"/>
           </a:xfrm>
           <a:prstGeom prst="roundRect">
             <a:avLst/>
@@ -6620,31 +5620,32 @@
           <a:p>
             <a:pPr algn="r"/>
             <a:r>
-              <a:rPr lang="en-US" sz="1050" kern="0" spc="182" dirty="0">
-                <a:latin typeface="DM Sans 14pt" pitchFamily="2" charset="77"/>
-                <a:ea typeface="Arial" pitchFamily="34" charset="-122"/>
-                <a:cs typeface="Arial" pitchFamily="34" charset="-120"/>
-              </a:rPr>
-              <a:t>COST PER</a:t>
-            </a:r>
-            <a:br>
-              <a:rPr lang="en-US" sz="1050" kern="0" spc="182" dirty="0">
-                <a:latin typeface="DM Sans 14pt" pitchFamily="2" charset="77"/>
-                <a:ea typeface="Arial" pitchFamily="34" charset="-122"/>
-                <a:cs typeface="Arial" pitchFamily="34" charset="-120"/>
-              </a:rPr>
-            </a:br>
-            <a:r>
-              <a:rPr lang="en-US" sz="1050" kern="0" spc="182" dirty="0">
-                <a:latin typeface="DM Sans 14pt" pitchFamily="2" charset="77"/>
-                <a:ea typeface="Arial" pitchFamily="34" charset="-122"/>
-                <a:cs typeface="Arial" pitchFamily="34" charset="-120"/>
-              </a:rPr>
-              <a:t>APPLY</a:t>
-            </a:r>
-            <a:endParaRPr lang="en-US" sz="1050" dirty="0">
-              <a:latin typeface="DM Sans 14pt" pitchFamily="2" charset="77"/>
-            </a:endParaRPr>
+              <a:rPr lang="en-US" sz="1200" kern="0" dirty="0">
+                <a:solidFill>
+                  <a:srgbClr val="757575">
+                    <a:alpha val="85000"/>
+                  </a:srgbClr>
+                </a:solidFill>
+                <a:latin typeface="DM Sans 14pt" pitchFamily="2" charset="77"/>
+                <a:cs typeface="Arial" pitchFamily="34" charset="-120"/>
+              </a:rPr>
+              <a:t>Cost per </a:t>
+            </a:r>
+          </a:p>
+          <a:p>
+            <a:pPr algn="r"/>
+            <a:r>
+              <a:rPr lang="en-US" sz="1200" kern="0" dirty="0">
+                <a:solidFill>
+                  <a:srgbClr val="757575">
+                    <a:alpha val="85000"/>
+                  </a:srgbClr>
+                </a:solidFill>
+                <a:latin typeface="DM Sans 14pt" pitchFamily="2" charset="77"/>
+                <a:cs typeface="Arial" pitchFamily="34" charset="-120"/>
+              </a:rPr>
+              <a:t>apply</a:t>
+            </a:r>
           </a:p>
         </p:txBody>
       </p:sp>
@@ -6662,8 +5663,8 @@
         </p:nvSpPr>
         <p:spPr>
           <a:xfrm>
-            <a:off x="9800124" y="1925993"/>
-            <a:ext cx="1407600" cy="604800"/>
+            <a:off x="9837931" y="1925993"/>
+            <a:ext cx="1728000" cy="604800"/>
           </a:xfrm>
           <a:prstGeom prst="roundRect">
             <a:avLst>
@@ -6685,7 +5686,7 @@
               </a:lnSpc>
             </a:pPr>
             <a:r>
-              <a:rPr lang="en-GB" sz="2800" dirty="0">
+              <a:rPr lang="en-GB" sz="3600" dirty="0">
                 <a:solidFill>
                   <a:srgbClr val="757575"/>
                 </a:solidFill>
@@ -6694,7 +5695,7 @@
               <a:t>{{</a:t>
             </a:r>
             <a:r>
-              <a:rPr lang="en-GB" sz="2800" dirty="0" err="1">
+              <a:rPr lang="en-GB" sz="3600" dirty="0" err="1">
                 <a:solidFill>
                   <a:srgbClr val="757575"/>
                 </a:solidFill>
@@ -6703,7 +5704,7 @@
               <a:t>stat_cost_per_apply</a:t>
             </a:r>
             <a:r>
-              <a:rPr lang="en-GB" sz="2800" dirty="0">
+              <a:rPr lang="en-GB" sz="3600" dirty="0">
                 <a:solidFill>
                   <a:srgbClr val="757575"/>
                 </a:solidFill>
@@ -6711,48 +5712,10 @@
               </a:rPr>
               <a:t>}}</a:t>
             </a:r>
-            <a:endParaRPr lang="en-US" sz="2800" dirty="0">
+            <a:endParaRPr lang="en-US" sz="3600" dirty="0">
               <a:solidFill>
                 <a:srgbClr val="757575"/>
               </a:solidFill>
-              <a:latin typeface="DM Sans 14pt" pitchFamily="2" charset="77"/>
-            </a:endParaRPr>
-          </a:p>
-        </p:txBody>
-      </p:sp>
-      <p:sp>
-        <p:nvSpPr>
-          <p:cNvPr id="67" name="Text 25">
-            <a:extLst>
-              <a:ext uri="{FF2B5EF4-FFF2-40B4-BE49-F238E27FC236}">
-                <a16:creationId xmlns:a16="http://schemas.microsoft.com/office/drawing/2014/main" id="{1AA2F224-0D2A-A56F-924F-6668AFA3EC30}"/>
-              </a:ext>
-            </a:extLst>
-          </p:cNvPr>
-          <p:cNvSpPr/>
-          <p:nvPr/>
-        </p:nvSpPr>
-        <p:spPr>
-          <a:xfrm>
-            <a:off x="7854759" y="3004118"/>
-            <a:ext cx="3931965" cy="190500"/>
-          </a:xfrm>
-          <a:prstGeom prst="rect">
-            <a:avLst/>
-          </a:prstGeom>
-          <a:noFill/>
-          <a:ln/>
-        </p:spPr>
-        <p:txBody>
-          <a:bodyPr wrap="square" lIns="25400" tIns="25400" rIns="25400" bIns="25400" rtlCol="0" anchor="t">
-            <a:normAutofit fontScale="92500" lnSpcReduction="10000"/>
-          </a:bodyPr>
-          <a:lstStyle/>
-          <a:p>
-            <a:pPr marL="0" indent="0" algn="ctr">
-              <a:buNone/>
-            </a:pPr>
-            <a:endParaRPr lang="en-US" sz="1050" dirty="0">
               <a:latin typeface="DM Sans 14pt" pitchFamily="2" charset="77"/>
             </a:endParaRPr>
           </a:p>
@@ -6772,8 +5735,8 @@
         </p:nvSpPr>
         <p:spPr>
           <a:xfrm>
-            <a:off x="869082" y="2799557"/>
-            <a:ext cx="2607165" cy="428400"/>
+            <a:off x="761999" y="2799557"/>
+            <a:ext cx="3036566" cy="432000"/>
           </a:xfrm>
           <a:prstGeom prst="rect">
             <a:avLst/>
@@ -6803,6 +5766,7 @@
           <a:bodyPr lIns="0" tIns="0" rIns="0" bIns="0" rtlCol="0" anchor="ctr"/>
           <a:lstStyle/>
           <a:p>
+            <a:pPr algn="ctr"/>
             <a:r>
               <a:rPr lang="en-US" kern="0" spc="84" dirty="0">
                 <a:solidFill>
@@ -6836,8 +5800,8 @@
         </p:nvSpPr>
         <p:spPr>
           <a:xfrm>
-            <a:off x="3987536" y="2799557"/>
-            <a:ext cx="8581674" cy="428400"/>
+            <a:off x="3901953" y="2799557"/>
+            <a:ext cx="8805985" cy="432000"/>
           </a:xfrm>
           <a:prstGeom prst="rect">
             <a:avLst/>
@@ -6867,6 +5831,7 @@
           <a:bodyPr lIns="0" tIns="0" rIns="0" bIns="0" rtlCol="0" anchor="ctr"/>
           <a:lstStyle/>
           <a:p>
+            <a:pPr algn="ctr"/>
             <a:r>
               <a:rPr lang="en-US" kern="0" spc="84" dirty="0">
                 <a:solidFill>
@@ -6883,167 +5848,6 @@
             <a:endParaRPr lang="en-US" dirty="0">
               <a:latin typeface="DM Sans 14pt" pitchFamily="2" charset="77"/>
             </a:endParaRPr>
-          </a:p>
-        </p:txBody>
-      </p:sp>
-      <p:sp>
-        <p:nvSpPr>
-          <p:cNvPr id="5" name="Footer Placeholder 1">
-            <a:extLst>
-              <a:ext uri="{FF2B5EF4-FFF2-40B4-BE49-F238E27FC236}">
-                <a16:creationId xmlns:a16="http://schemas.microsoft.com/office/drawing/2014/main" id="{C3F894CF-003B-DB6C-ECEC-0DCC355C033A}"/>
-              </a:ext>
-            </a:extLst>
-          </p:cNvPr>
-          <p:cNvSpPr txBox="1">
-            <a:spLocks/>
-          </p:cNvSpPr>
-          <p:nvPr/>
-        </p:nvSpPr>
-        <p:spPr>
-          <a:xfrm>
-            <a:off x="17233255" y="9753300"/>
-            <a:ext cx="522000" cy="190800"/>
-          </a:xfrm>
-          <a:prstGeom prst="rect">
-            <a:avLst/>
-          </a:prstGeom>
-        </p:spPr>
-        <p:txBody>
-          <a:bodyPr vert="horz" lIns="36000" tIns="36000" rIns="36000" bIns="36000" rtlCol="0" anchor="ctr"/>
-          <a:lstStyle>
-            <a:lvl1pPr marL="0" algn="l" defTabSz="914400" rtl="0" eaLnBrk="1" latinLnBrk="0" hangingPunct="1">
-              <a:defRPr sz="900" kern="1200">
-                <a:solidFill>
-                  <a:srgbClr val="E8E0F2"/>
-                </a:solidFill>
-                <a:latin typeface="DM Sans 14pt" pitchFamily="2" charset="77"/>
-                <a:ea typeface="+mn-ea"/>
-                <a:cs typeface="+mn-cs"/>
-              </a:defRPr>
-            </a:lvl1pPr>
-            <a:lvl2pPr marL="457200" algn="l" defTabSz="914400" rtl="0" eaLnBrk="1" latinLnBrk="0" hangingPunct="1">
-              <a:defRPr sz="1800" kern="1200">
-                <a:solidFill>
-                  <a:schemeClr val="tx1"/>
-                </a:solidFill>
-                <a:latin typeface="+mn-lt"/>
-                <a:ea typeface="+mn-ea"/>
-                <a:cs typeface="+mn-cs"/>
-              </a:defRPr>
-            </a:lvl2pPr>
-            <a:lvl3pPr marL="914400" algn="l" defTabSz="914400" rtl="0" eaLnBrk="1" latinLnBrk="0" hangingPunct="1">
-              <a:defRPr sz="1800" kern="1200">
-                <a:solidFill>
-                  <a:schemeClr val="tx1"/>
-                </a:solidFill>
-                <a:latin typeface="+mn-lt"/>
-                <a:ea typeface="+mn-ea"/>
-                <a:cs typeface="+mn-cs"/>
-              </a:defRPr>
-            </a:lvl3pPr>
-            <a:lvl4pPr marL="1371600" algn="l" defTabSz="914400" rtl="0" eaLnBrk="1" latinLnBrk="0" hangingPunct="1">
-              <a:defRPr sz="1800" kern="1200">
-                <a:solidFill>
-                  <a:schemeClr val="tx1"/>
-                </a:solidFill>
-                <a:latin typeface="+mn-lt"/>
-                <a:ea typeface="+mn-ea"/>
-                <a:cs typeface="+mn-cs"/>
-              </a:defRPr>
-            </a:lvl4pPr>
-            <a:lvl5pPr marL="1828800" algn="l" defTabSz="914400" rtl="0" eaLnBrk="1" latinLnBrk="0" hangingPunct="1">
-              <a:defRPr sz="1800" kern="1200">
-                <a:solidFill>
-                  <a:schemeClr val="tx1"/>
-                </a:solidFill>
-                <a:latin typeface="+mn-lt"/>
-                <a:ea typeface="+mn-ea"/>
-                <a:cs typeface="+mn-cs"/>
-              </a:defRPr>
-            </a:lvl5pPr>
-            <a:lvl6pPr marL="2286000" algn="l" defTabSz="914400" rtl="0" eaLnBrk="1" latinLnBrk="0" hangingPunct="1">
-              <a:defRPr sz="1800" kern="1200">
-                <a:solidFill>
-                  <a:schemeClr val="tx1"/>
-                </a:solidFill>
-                <a:latin typeface="+mn-lt"/>
-                <a:ea typeface="+mn-ea"/>
-                <a:cs typeface="+mn-cs"/>
-              </a:defRPr>
-            </a:lvl6pPr>
-            <a:lvl7pPr marL="2743200" algn="l" defTabSz="914400" rtl="0" eaLnBrk="1" latinLnBrk="0" hangingPunct="1">
-              <a:defRPr sz="1800" kern="1200">
-                <a:solidFill>
-                  <a:schemeClr val="tx1"/>
-                </a:solidFill>
-                <a:latin typeface="+mn-lt"/>
-                <a:ea typeface="+mn-ea"/>
-                <a:cs typeface="+mn-cs"/>
-              </a:defRPr>
-            </a:lvl7pPr>
-            <a:lvl8pPr marL="3200400" algn="l" defTabSz="914400" rtl="0" eaLnBrk="1" latinLnBrk="0" hangingPunct="1">
-              <a:defRPr sz="1800" kern="1200">
-                <a:solidFill>
-                  <a:schemeClr val="tx1"/>
-                </a:solidFill>
-                <a:latin typeface="+mn-lt"/>
-                <a:ea typeface="+mn-ea"/>
-                <a:cs typeface="+mn-cs"/>
-              </a:defRPr>
-            </a:lvl8pPr>
-            <a:lvl9pPr marL="3657600" algn="l" defTabSz="914400" rtl="0" eaLnBrk="1" latinLnBrk="0" hangingPunct="1">
-              <a:defRPr sz="1800" kern="1200">
-                <a:solidFill>
-                  <a:schemeClr val="tx1"/>
-                </a:solidFill>
-                <a:latin typeface="+mn-lt"/>
-                <a:ea typeface="+mn-ea"/>
-                <a:cs typeface="+mn-cs"/>
-              </a:defRPr>
-            </a:lvl9pPr>
-          </a:lstStyle>
-          <a:p>
-            <a:r>
-              <a:rPr lang="en-GB" dirty="0">
-                <a:solidFill>
-                  <a:srgbClr val="757575"/>
-                </a:solidFill>
-              </a:rPr>
-              <a:t>{{</a:t>
-            </a:r>
-            <a:r>
-              <a:rPr lang="en-GB" dirty="0" err="1">
-                <a:solidFill>
-                  <a:srgbClr val="757575"/>
-                </a:solidFill>
-              </a:rPr>
-              <a:t>slide_number</a:t>
-            </a:r>
-            <a:r>
-              <a:rPr lang="en-GB" dirty="0">
-                <a:solidFill>
-                  <a:srgbClr val="757575"/>
-                </a:solidFill>
-              </a:rPr>
-              <a:t>}} / {{</a:t>
-            </a:r>
-            <a:r>
-              <a:rPr lang="en-GB" dirty="0" err="1">
-                <a:solidFill>
-                  <a:srgbClr val="757575"/>
-                </a:solidFill>
-              </a:rPr>
-              <a:t>total_slides</a:t>
-            </a:r>
-            <a:r>
-              <a:rPr lang="en-GB" dirty="0">
-                <a:solidFill>
-                  <a:srgbClr val="757575"/>
-                </a:solidFill>
-              </a:rPr>
-              <a:t>}}</a:t>
-            </a:r>
           </a:p>
         </p:txBody>
       </p:sp>
@@ -7206,7 +6010,7 @@
               <a:buNone/>
             </a:pPr>
             <a:r>
-              <a:rPr lang="en-US" sz="2400" b="1" kern="0" spc="368" dirty="0">
+              <a:rPr lang="en-US" sz="2400" b="1" kern="0" spc="0" dirty="0">
                 <a:solidFill>
                   <a:srgbClr val="643791"/>
                 </a:solidFill>
@@ -7214,7 +6018,7 @@
                 <a:ea typeface="Arial" pitchFamily="34" charset="-122"/>
                 <a:cs typeface="Arial" pitchFamily="34" charset="-120"/>
               </a:rPr>
-              <a:t>COMMENTARY</a:t>
+              <a:t>Commentary</a:t>
             </a:r>
             <a:endParaRPr lang="en-US" sz="2400" b="1" dirty="0">
               <a:latin typeface="DM Sans 14pt" pitchFamily="2" charset="77"/>
@@ -7378,6 +6182,178 @@
               <a:latin typeface="DM Sans 14pt" pitchFamily="2" charset="77"/>
               <a:cs typeface="Arial" pitchFamily="34" charset="-120"/>
             </a:endParaRPr>
+          </a:p>
+        </p:txBody>
+      </p:sp>
+      <p:pic>
+        <p:nvPicPr>
+          <p:cNvPr id="3" name="Graphic 2">
+            <a:extLst>
+              <a:ext uri="{FF2B5EF4-FFF2-40B4-BE49-F238E27FC236}">
+                <a16:creationId xmlns:a16="http://schemas.microsoft.com/office/drawing/2014/main" id="{89C31F49-82F1-13A6-2D4E-A73F128E2896}"/>
+              </a:ext>
+            </a:extLst>
+          </p:cNvPr>
+          <p:cNvPicPr>
+            <a:picLocks noChangeAspect="1"/>
+          </p:cNvPicPr>
+          <p:nvPr/>
+        </p:nvPicPr>
+        <p:blipFill>
+          <a:blip>
+            <a:extLst>
+              <a:ext uri="{96DAC541-7B7A-43D3-8B79-37D633B846F1}">
+                <asvg:svgBlip xmlns:asvg="http://schemas.microsoft.com/office/drawing/2016/SVG/main" r:embed="rId3"/>
+              </a:ext>
+            </a:extLst>
+          </a:blip>
+          <a:stretch>
+            <a:fillRect/>
+          </a:stretch>
+        </p:blipFill>
+        <p:spPr>
+          <a:xfrm>
+            <a:off x="715526" y="636516"/>
+            <a:ext cx="1411947" cy="266701"/>
+          </a:xfrm>
+          <a:prstGeom prst="rect">
+            <a:avLst/>
+          </a:prstGeom>
+        </p:spPr>
+      </p:pic>
+      <p:sp>
+        <p:nvSpPr>
+          <p:cNvPr id="4" name="TextBox 3">
+            <a:extLst>
+              <a:ext uri="{FF2B5EF4-FFF2-40B4-BE49-F238E27FC236}">
+                <a16:creationId xmlns:a16="http://schemas.microsoft.com/office/drawing/2014/main" id="{A9CF0908-0E0D-387D-747C-8239416C7B8C}"/>
+              </a:ext>
+            </a:extLst>
+          </p:cNvPr>
+          <p:cNvSpPr txBox="1"/>
+          <p:nvPr/>
+        </p:nvSpPr>
+        <p:spPr>
+          <a:xfrm>
+            <a:off x="15604114" y="9742289"/>
+            <a:ext cx="2074286" cy="153888"/>
+          </a:xfrm>
+          <a:prstGeom prst="rect">
+            <a:avLst/>
+          </a:prstGeom>
+          <a:noFill/>
+        </p:spPr>
+        <p:txBody>
+          <a:bodyPr wrap="none" lIns="0" tIns="0" rIns="0" bIns="0">
+            <a:spAutoFit/>
+          </a:bodyPr>
+          <a:lstStyle/>
+          <a:p>
+            <a:pPr algn="r"/>
+            <a:r>
+              <a:rPr sz="1000" dirty="0">
+                <a:solidFill>
+                  <a:srgbClr val="5B5067"/>
+                </a:solidFill>
+                <a:latin typeface="DM Sans 14pt" pitchFamily="2" charset="77"/>
+              </a:rPr>
+              <a:t>{{</a:t>
+            </a:r>
+            <a:r>
+              <a:rPr sz="1000" dirty="0" err="1">
+                <a:solidFill>
+                  <a:srgbClr val="5B5067"/>
+                </a:solidFill>
+                <a:latin typeface="DM Sans 14pt" pitchFamily="2" charset="77"/>
+              </a:rPr>
+              <a:t>slide_number</a:t>
+            </a:r>
+            <a:r>
+              <a:rPr sz="1000" dirty="0">
+                <a:solidFill>
+                  <a:srgbClr val="5B5067"/>
+                </a:solidFill>
+                <a:latin typeface="DM Sans 14pt" pitchFamily="2" charset="77"/>
+              </a:rPr>
+              <a:t>}} / {{</a:t>
+            </a:r>
+            <a:r>
+              <a:rPr sz="1000" dirty="0" err="1">
+                <a:solidFill>
+                  <a:srgbClr val="5B5067"/>
+                </a:solidFill>
+                <a:latin typeface="DM Sans 14pt" pitchFamily="2" charset="77"/>
+              </a:rPr>
+              <a:t>total_slides</a:t>
+            </a:r>
+            <a:r>
+              <a:rPr sz="1000" dirty="0">
+                <a:solidFill>
+                  <a:srgbClr val="5B5067"/>
+                </a:solidFill>
+                <a:latin typeface="DM Sans 14pt" pitchFamily="2" charset="77"/>
+              </a:rPr>
+              <a:t>}}</a:t>
+            </a:r>
+          </a:p>
+        </p:txBody>
+      </p:sp>
+      <p:sp>
+        <p:nvSpPr>
+          <p:cNvPr id="10" name="TextBox 9">
+            <a:extLst>
+              <a:ext uri="{FF2B5EF4-FFF2-40B4-BE49-F238E27FC236}">
+                <a16:creationId xmlns:a16="http://schemas.microsoft.com/office/drawing/2014/main" id="{50866856-4D79-928A-C6B5-60751858D914}"/>
+              </a:ext>
+            </a:extLst>
+          </p:cNvPr>
+          <p:cNvSpPr txBox="1"/>
+          <p:nvPr/>
+        </p:nvSpPr>
+        <p:spPr>
+          <a:xfrm>
+            <a:off x="609600" y="9742289"/>
+            <a:ext cx="2300310" cy="153888"/>
+          </a:xfrm>
+          <a:prstGeom prst="rect">
+            <a:avLst/>
+          </a:prstGeom>
+          <a:noFill/>
+        </p:spPr>
+        <p:txBody>
+          <a:bodyPr wrap="none" lIns="0" tIns="0" rIns="0" bIns="0">
+            <a:spAutoFit/>
+          </a:bodyPr>
+          <a:lstStyle/>
+          <a:p>
+            <a:pPr algn="l"/>
+            <a:r>
+              <a:rPr sz="1000" dirty="0">
+                <a:solidFill>
+                  <a:srgbClr val="643791"/>
+                </a:solidFill>
+                <a:latin typeface="DM Sans 14pt" pitchFamily="2" charset="77"/>
+              </a:rPr>
+              <a:t>Jobs Go Public  ·  Go place</a:t>
+            </a:r>
+            <a:r>
+              <a:rPr lang="en-GB" sz="1000" dirty="0">
+                <a:solidFill>
+                  <a:srgbClr val="643791"/>
+                </a:solidFill>
+                <a:latin typeface="DM Sans 14pt" pitchFamily="2" charset="77"/>
+              </a:rPr>
+              <a:t>s</a:t>
+            </a:r>
+            <a:r>
+              <a:rPr sz="1000" dirty="0">
+                <a:solidFill>
+                  <a:srgbClr val="643791"/>
+                </a:solidFill>
+                <a:latin typeface="DM Sans 14pt" pitchFamily="2" charset="77"/>
+              </a:rPr>
+              <a:t>. Go public.</a:t>
+            </a:r>
           </a:p>
         </p:txBody>
       </p:sp>
@@ -7416,121 +6392,6 @@
       </p:grpSpPr>
       <p:sp>
         <p:nvSpPr>
-          <p:cNvPr id="2" name="Shape 0"/>
-          <p:cNvSpPr/>
-          <p:nvPr/>
-        </p:nvSpPr>
-        <p:spPr>
-          <a:xfrm>
-            <a:off x="609600" y="457200"/>
-            <a:ext cx="495300" cy="438150"/>
-          </a:xfrm>
-          <a:prstGeom prst="rect">
-            <a:avLst/>
-          </a:prstGeom>
-          <a:solidFill>
-            <a:srgbClr val="643791"/>
-          </a:solidFill>
-          <a:ln/>
-        </p:spPr>
-        <p:txBody>
-          <a:bodyPr/>
-          <a:lstStyle/>
-          <a:p>
-            <a:endParaRPr lang="en-GB">
-              <a:latin typeface="DM Sans 14pt" pitchFamily="2" charset="77"/>
-            </a:endParaRPr>
-          </a:p>
-        </p:txBody>
-      </p:sp>
-      <p:sp>
-        <p:nvSpPr>
-          <p:cNvPr id="3" name="Text 1"/>
-          <p:cNvSpPr/>
-          <p:nvPr/>
-        </p:nvSpPr>
-        <p:spPr>
-          <a:xfrm>
-            <a:off x="571500" y="476250"/>
-            <a:ext cx="495300" cy="457200"/>
-          </a:xfrm>
-          <a:prstGeom prst="rect">
-            <a:avLst/>
-          </a:prstGeom>
-          <a:noFill/>
-          <a:ln/>
-        </p:spPr>
-        <p:txBody>
-          <a:bodyPr wrap="square" lIns="25400" tIns="25400" rIns="25400" bIns="25400" rtlCol="0" anchor="ctr">
-            <a:normAutofit/>
-          </a:bodyPr>
-          <a:lstStyle/>
-          <a:p>
-            <a:pPr marL="0" indent="0" algn="ctr">
-              <a:buNone/>
-            </a:pPr>
-            <a:r>
-              <a:rPr lang="en-US" sz="1350" b="1" kern="0" spc="-27" dirty="0">
-                <a:solidFill>
-                  <a:srgbClr val="FFFFFF"/>
-                </a:solidFill>
-                <a:latin typeface="DM Sans 14pt" pitchFamily="2" charset="77"/>
-                <a:ea typeface="Arial" pitchFamily="34" charset="-122"/>
-                <a:cs typeface="Arial" pitchFamily="34" charset="-120"/>
-              </a:rPr>
-              <a:t>Go</a:t>
-            </a:r>
-            <a:endParaRPr lang="en-US" sz="1350" dirty="0">
-              <a:latin typeface="DM Sans 14pt" pitchFamily="2" charset="77"/>
-            </a:endParaRPr>
-          </a:p>
-        </p:txBody>
-      </p:sp>
-      <p:sp>
-        <p:nvSpPr>
-          <p:cNvPr id="4" name="Text 2"/>
-          <p:cNvSpPr/>
-          <p:nvPr/>
-        </p:nvSpPr>
-        <p:spPr>
-          <a:xfrm>
-            <a:off x="1200150" y="538163"/>
-            <a:ext cx="1561505" cy="314325"/>
-          </a:xfrm>
-          <a:prstGeom prst="rect">
-            <a:avLst/>
-          </a:prstGeom>
-          <a:noFill/>
-          <a:ln/>
-        </p:spPr>
-        <p:txBody>
-          <a:bodyPr wrap="square" lIns="25400" tIns="25400" rIns="25400" bIns="25400" rtlCol="0" anchor="t">
-            <a:normAutofit/>
-          </a:bodyPr>
-          <a:lstStyle/>
-          <a:p>
-            <a:pPr marL="0" indent="0" algn="l">
-              <a:buNone/>
-            </a:pPr>
-            <a:r>
-              <a:rPr lang="en-US" sz="1650" b="1" kern="0" spc="-16" dirty="0">
-                <a:solidFill>
-                  <a:srgbClr val="111111"/>
-                </a:solidFill>
-                <a:latin typeface="DM Sans 14pt" pitchFamily="2" charset="77"/>
-                <a:ea typeface="Arial" pitchFamily="34" charset="-122"/>
-                <a:cs typeface="Arial" pitchFamily="34" charset="-120"/>
-              </a:rPr>
-              <a:t>Jobs Go Public</a:t>
-            </a:r>
-            <a:endParaRPr lang="en-US" sz="1650" dirty="0">
-              <a:latin typeface="DM Sans 14pt" pitchFamily="2" charset="77"/>
-            </a:endParaRPr>
-          </a:p>
-        </p:txBody>
-      </p:sp>
-      <p:sp>
-        <p:nvSpPr>
           <p:cNvPr id="6" name="Text 4"/>
           <p:cNvSpPr/>
           <p:nvPr/>
@@ -7604,51 +6465,6 @@
               <a:buNone/>
             </a:pPr>
             <a:endParaRPr lang="en-US" sz="1650" dirty="0">
-              <a:latin typeface="DM Sans 14pt" pitchFamily="2" charset="77"/>
-            </a:endParaRPr>
-          </a:p>
-        </p:txBody>
-      </p:sp>
-      <p:sp>
-        <p:nvSpPr>
-          <p:cNvPr id="38" name="Text 36"/>
-          <p:cNvSpPr/>
-          <p:nvPr/>
-        </p:nvSpPr>
-        <p:spPr>
-          <a:xfrm>
-            <a:off x="609600" y="9753600"/>
-            <a:ext cx="2373511" cy="190500"/>
-          </a:xfrm>
-          <a:prstGeom prst="rect">
-            <a:avLst/>
-          </a:prstGeom>
-          <a:noFill/>
-          <a:ln/>
-        </p:spPr>
-        <p:txBody>
-          <a:bodyPr wrap="square" lIns="25400" tIns="25400" rIns="25400" bIns="25400" rtlCol="0" anchor="t">
-            <a:normAutofit fontScale="85000" lnSpcReduction="10000"/>
-          </a:bodyPr>
-          <a:lstStyle/>
-          <a:p>
-            <a:pPr marL="0" indent="0" algn="l">
-              <a:buNone/>
-            </a:pPr>
-            <a:r>
-              <a:rPr lang="en-US" sz="1050" kern="0" spc="42" dirty="0">
-                <a:solidFill>
-                  <a:srgbClr val="111111">
-                    <a:alpha val="63000"/>
-                  </a:srgbClr>
-                </a:solidFill>
-                <a:latin typeface="DM Sans 14pt" pitchFamily="2" charset="77"/>
-                <a:ea typeface="Arial" pitchFamily="34" charset="-122"/>
-                <a:cs typeface="Arial" pitchFamily="34" charset="-120"/>
-              </a:rPr>
-              <a:t>{{client_name}} · Advertising Report</a:t>
-            </a:r>
-            <a:endParaRPr lang="en-US" sz="1050" dirty="0">
               <a:latin typeface="DM Sans 14pt" pitchFamily="2" charset="77"/>
             </a:endParaRPr>
           </a:p>
@@ -7705,44 +6521,6 @@
       </p:sp>
       <p:sp>
         <p:nvSpPr>
-          <p:cNvPr id="10" name="Text 25">
-            <a:extLst>
-              <a:ext uri="{FF2B5EF4-FFF2-40B4-BE49-F238E27FC236}">
-                <a16:creationId xmlns:a16="http://schemas.microsoft.com/office/drawing/2014/main" id="{6A8E8859-631F-EEF0-0FE0-BED6654904E5}"/>
-              </a:ext>
-            </a:extLst>
-          </p:cNvPr>
-          <p:cNvSpPr/>
-          <p:nvPr/>
-        </p:nvSpPr>
-        <p:spPr>
-          <a:xfrm>
-            <a:off x="4893357" y="4881636"/>
-            <a:ext cx="3931965" cy="190500"/>
-          </a:xfrm>
-          <a:prstGeom prst="rect">
-            <a:avLst/>
-          </a:prstGeom>
-          <a:noFill/>
-          <a:ln/>
-        </p:spPr>
-        <p:txBody>
-          <a:bodyPr wrap="square" lIns="25400" tIns="25400" rIns="25400" bIns="25400" rtlCol="0" anchor="t">
-            <a:normAutofit fontScale="92500" lnSpcReduction="10000"/>
-          </a:bodyPr>
-          <a:lstStyle/>
-          <a:p>
-            <a:pPr marL="0" indent="0" algn="ctr">
-              <a:buNone/>
-            </a:pPr>
-            <a:endParaRPr lang="en-US" sz="1050" dirty="0">
-              <a:latin typeface="DM Sans 14pt" pitchFamily="2" charset="77"/>
-            </a:endParaRPr>
-          </a:p>
-        </p:txBody>
-      </p:sp>
-      <p:sp>
-        <p:nvSpPr>
           <p:cNvPr id="13" name="Shape 19">
             <a:extLst>
               <a:ext uri="{FF2B5EF4-FFF2-40B4-BE49-F238E27FC236}">
@@ -7763,13 +6541,9 @@
               <a:gd name="adj" fmla="val 2331"/>
             </a:avLst>
           </a:prstGeom>
-          <a:solidFill>
-            <a:srgbClr val="E8E0F2"/>
-          </a:solidFill>
+          <a:noFill/>
           <a:ln w="19050">
-            <a:solidFill>
-              <a:srgbClr val="643791"/>
-            </a:solidFill>
+            <a:noFill/>
             <a:prstDash val="dash"/>
           </a:ln>
         </p:spPr>
@@ -7797,23 +6571,17 @@
         </p:nvSpPr>
         <p:spPr>
           <a:xfrm>
-            <a:off x="868675" y="2292129"/>
-            <a:ext cx="11725200" cy="6951522"/>
+            <a:off x="868674" y="2292129"/>
+            <a:ext cx="11727315" cy="6951522"/>
           </a:xfrm>
           <a:prstGeom prst="roundRect">
             <a:avLst>
-              <a:gd name="adj" fmla="val 2451"/>
+              <a:gd name="adj" fmla="val 0"/>
             </a:avLst>
           </a:prstGeom>
-          <a:solidFill>
-            <a:srgbClr val="FFFFFF"/>
-          </a:solidFill>
+          <a:noFill/>
           <a:ln w="9525">
-            <a:solidFill>
-              <a:srgbClr val="000000">
-                <a:alpha val="10000"/>
-              </a:srgbClr>
-            </a:solidFill>
+            <a:noFill/>
             <a:prstDash val="solid"/>
           </a:ln>
         </p:spPr>
@@ -7828,7 +6596,6 @@
                 </a:solidFill>
                 <a:latin typeface="DM Sans 14pt" pitchFamily="2" charset="77"/>
                 <a:ea typeface="monospace" pitchFamily="34" charset="-122"/>
-                <a:cs typeface="monospace" pitchFamily="34" charset="-120"/>
               </a:rPr>
               <a:t>{{</a:t>
             </a:r>
@@ -7839,7 +6606,6 @@
                 </a:solidFill>
                 <a:latin typeface="DM Sans 14pt" pitchFamily="2" charset="77"/>
                 <a:ea typeface="monospace" pitchFamily="34" charset="-122"/>
-                <a:cs typeface="monospace" pitchFamily="34" charset="-120"/>
               </a:rPr>
               <a:t>chart:media_performance</a:t>
             </a:r>
@@ -7850,13 +6616,9 @@
                 </a:solidFill>
                 <a:latin typeface="DM Sans 14pt" pitchFamily="2" charset="77"/>
                 <a:ea typeface="monospace" pitchFamily="34" charset="-122"/>
-                <a:cs typeface="monospace" pitchFamily="34" charset="-120"/>
               </a:rPr>
               <a:t>}}</a:t>
             </a:r>
-            <a:endParaRPr lang="en-US" dirty="0">
-              <a:latin typeface="DM Sans 14pt" pitchFamily="2" charset="77"/>
-            </a:endParaRPr>
           </a:p>
         </p:txBody>
       </p:sp>
@@ -7874,8 +6636,8 @@
         </p:nvSpPr>
         <p:spPr>
           <a:xfrm>
-            <a:off x="868675" y="1866899"/>
-            <a:ext cx="8009197" cy="428400"/>
+            <a:off x="762000" y="1866899"/>
+            <a:ext cx="11945938" cy="432000"/>
           </a:xfrm>
           <a:prstGeom prst="rect">
             <a:avLst/>
@@ -7905,6 +6667,7 @@
           <a:bodyPr lIns="0" tIns="0" rIns="0" bIns="0" rtlCol="0" anchor="ctr"/>
           <a:lstStyle/>
           <a:p>
+            <a:pPr algn="ctr"/>
             <a:r>
               <a:rPr lang="en-US" kern="0" spc="84" dirty="0">
                 <a:solidFill>
@@ -7921,167 +6684,6 @@
             <a:endParaRPr lang="en-US" dirty="0">
               <a:latin typeface="DM Sans 14pt" pitchFamily="2" charset="77"/>
             </a:endParaRPr>
-          </a:p>
-        </p:txBody>
-      </p:sp>
-      <p:sp>
-        <p:nvSpPr>
-          <p:cNvPr id="5" name="Footer Placeholder 1">
-            <a:extLst>
-              <a:ext uri="{FF2B5EF4-FFF2-40B4-BE49-F238E27FC236}">
-                <a16:creationId xmlns:a16="http://schemas.microsoft.com/office/drawing/2014/main" id="{27963530-69B1-9150-8D58-0676ABDF185C}"/>
-              </a:ext>
-            </a:extLst>
-          </p:cNvPr>
-          <p:cNvSpPr txBox="1">
-            <a:spLocks/>
-          </p:cNvSpPr>
-          <p:nvPr/>
-        </p:nvSpPr>
-        <p:spPr>
-          <a:xfrm>
-            <a:off x="17233255" y="9753300"/>
-            <a:ext cx="522000" cy="190800"/>
-          </a:xfrm>
-          <a:prstGeom prst="rect">
-            <a:avLst/>
-          </a:prstGeom>
-        </p:spPr>
-        <p:txBody>
-          <a:bodyPr vert="horz" lIns="36000" tIns="36000" rIns="36000" bIns="36000" rtlCol="0" anchor="ctr"/>
-          <a:lstStyle>
-            <a:lvl1pPr marL="0" algn="l" defTabSz="914400" rtl="0" eaLnBrk="1" latinLnBrk="0" hangingPunct="1">
-              <a:defRPr sz="900" kern="1200">
-                <a:solidFill>
-                  <a:srgbClr val="E8E0F2"/>
-                </a:solidFill>
-                <a:latin typeface="DM Sans 14pt" pitchFamily="2" charset="77"/>
-                <a:ea typeface="+mn-ea"/>
-                <a:cs typeface="+mn-cs"/>
-              </a:defRPr>
-            </a:lvl1pPr>
-            <a:lvl2pPr marL="457200" algn="l" defTabSz="914400" rtl="0" eaLnBrk="1" latinLnBrk="0" hangingPunct="1">
-              <a:defRPr sz="1800" kern="1200">
-                <a:solidFill>
-                  <a:schemeClr val="tx1"/>
-                </a:solidFill>
-                <a:latin typeface="+mn-lt"/>
-                <a:ea typeface="+mn-ea"/>
-                <a:cs typeface="+mn-cs"/>
-              </a:defRPr>
-            </a:lvl2pPr>
-            <a:lvl3pPr marL="914400" algn="l" defTabSz="914400" rtl="0" eaLnBrk="1" latinLnBrk="0" hangingPunct="1">
-              <a:defRPr sz="1800" kern="1200">
-                <a:solidFill>
-                  <a:schemeClr val="tx1"/>
-                </a:solidFill>
-                <a:latin typeface="+mn-lt"/>
-                <a:ea typeface="+mn-ea"/>
-                <a:cs typeface="+mn-cs"/>
-              </a:defRPr>
-            </a:lvl3pPr>
-            <a:lvl4pPr marL="1371600" algn="l" defTabSz="914400" rtl="0" eaLnBrk="1" latinLnBrk="0" hangingPunct="1">
-              <a:defRPr sz="1800" kern="1200">
-                <a:solidFill>
-                  <a:schemeClr val="tx1"/>
-                </a:solidFill>
-                <a:latin typeface="+mn-lt"/>
-                <a:ea typeface="+mn-ea"/>
-                <a:cs typeface="+mn-cs"/>
-              </a:defRPr>
-            </a:lvl4pPr>
-            <a:lvl5pPr marL="1828800" algn="l" defTabSz="914400" rtl="0" eaLnBrk="1" latinLnBrk="0" hangingPunct="1">
-              <a:defRPr sz="1800" kern="1200">
-                <a:solidFill>
-                  <a:schemeClr val="tx1"/>
-                </a:solidFill>
-                <a:latin typeface="+mn-lt"/>
-                <a:ea typeface="+mn-ea"/>
-                <a:cs typeface="+mn-cs"/>
-              </a:defRPr>
-            </a:lvl5pPr>
-            <a:lvl6pPr marL="2286000" algn="l" defTabSz="914400" rtl="0" eaLnBrk="1" latinLnBrk="0" hangingPunct="1">
-              <a:defRPr sz="1800" kern="1200">
-                <a:solidFill>
-                  <a:schemeClr val="tx1"/>
-                </a:solidFill>
-                <a:latin typeface="+mn-lt"/>
-                <a:ea typeface="+mn-ea"/>
-                <a:cs typeface="+mn-cs"/>
-              </a:defRPr>
-            </a:lvl6pPr>
-            <a:lvl7pPr marL="2743200" algn="l" defTabSz="914400" rtl="0" eaLnBrk="1" latinLnBrk="0" hangingPunct="1">
-              <a:defRPr sz="1800" kern="1200">
-                <a:solidFill>
-                  <a:schemeClr val="tx1"/>
-                </a:solidFill>
-                <a:latin typeface="+mn-lt"/>
-                <a:ea typeface="+mn-ea"/>
-                <a:cs typeface="+mn-cs"/>
-              </a:defRPr>
-            </a:lvl7pPr>
-            <a:lvl8pPr marL="3200400" algn="l" defTabSz="914400" rtl="0" eaLnBrk="1" latinLnBrk="0" hangingPunct="1">
-              <a:defRPr sz="1800" kern="1200">
-                <a:solidFill>
-                  <a:schemeClr val="tx1"/>
-                </a:solidFill>
-                <a:latin typeface="+mn-lt"/>
-                <a:ea typeface="+mn-ea"/>
-                <a:cs typeface="+mn-cs"/>
-              </a:defRPr>
-            </a:lvl8pPr>
-            <a:lvl9pPr marL="3657600" algn="l" defTabSz="914400" rtl="0" eaLnBrk="1" latinLnBrk="0" hangingPunct="1">
-              <a:defRPr sz="1800" kern="1200">
-                <a:solidFill>
-                  <a:schemeClr val="tx1"/>
-                </a:solidFill>
-                <a:latin typeface="+mn-lt"/>
-                <a:ea typeface="+mn-ea"/>
-                <a:cs typeface="+mn-cs"/>
-              </a:defRPr>
-            </a:lvl9pPr>
-          </a:lstStyle>
-          <a:p>
-            <a:r>
-              <a:rPr lang="en-GB" dirty="0">
-                <a:solidFill>
-                  <a:srgbClr val="757575"/>
-                </a:solidFill>
-              </a:rPr>
-              <a:t>{{</a:t>
-            </a:r>
-            <a:r>
-              <a:rPr lang="en-GB" dirty="0" err="1">
-                <a:solidFill>
-                  <a:srgbClr val="757575"/>
-                </a:solidFill>
-              </a:rPr>
-              <a:t>slide_number</a:t>
-            </a:r>
-            <a:r>
-              <a:rPr lang="en-GB" dirty="0">
-                <a:solidFill>
-                  <a:srgbClr val="757575"/>
-                </a:solidFill>
-              </a:rPr>
-              <a:t>}} / {{</a:t>
-            </a:r>
-            <a:r>
-              <a:rPr lang="en-GB" dirty="0" err="1">
-                <a:solidFill>
-                  <a:srgbClr val="757575"/>
-                </a:solidFill>
-              </a:rPr>
-              <a:t>total_slides</a:t>
-            </a:r>
-            <a:r>
-              <a:rPr lang="en-GB" dirty="0">
-                <a:solidFill>
-                  <a:srgbClr val="757575"/>
-                </a:solidFill>
-              </a:rPr>
-              <a:t>}}</a:t>
-            </a:r>
           </a:p>
         </p:txBody>
       </p:sp>
@@ -8181,7 +6783,7 @@
               <a:buNone/>
             </a:pPr>
             <a:r>
-              <a:rPr lang="en-US" sz="2400" b="1" kern="0" spc="368" dirty="0">
+              <a:rPr lang="en-US" sz="2400" b="1" kern="0" spc="0" dirty="0">
                 <a:solidFill>
                   <a:srgbClr val="643791"/>
                 </a:solidFill>
@@ -8189,7 +6791,7 @@
                 <a:ea typeface="Arial" pitchFamily="34" charset="-122"/>
                 <a:cs typeface="Arial" pitchFamily="34" charset="-120"/>
               </a:rPr>
-              <a:t>COMMENTARY</a:t>
+              <a:t>Commentary</a:t>
             </a:r>
             <a:endParaRPr lang="en-US" sz="2400" b="1" dirty="0">
               <a:latin typeface="DM Sans 14pt" pitchFamily="2" charset="77"/>
@@ -8411,6 +7013,178 @@
               <a:latin typeface="DM Sans 14pt" pitchFamily="2" charset="77"/>
               <a:cs typeface="Arial" pitchFamily="34" charset="-120"/>
             </a:endParaRPr>
+          </a:p>
+        </p:txBody>
+      </p:sp>
+      <p:pic>
+        <p:nvPicPr>
+          <p:cNvPr id="3" name="Graphic 2">
+            <a:extLst>
+              <a:ext uri="{FF2B5EF4-FFF2-40B4-BE49-F238E27FC236}">
+                <a16:creationId xmlns:a16="http://schemas.microsoft.com/office/drawing/2014/main" id="{BA3FDBDA-115A-7530-8F64-C5DB8568FE10}"/>
+              </a:ext>
+            </a:extLst>
+          </p:cNvPr>
+          <p:cNvPicPr>
+            <a:picLocks noChangeAspect="1"/>
+          </p:cNvPicPr>
+          <p:nvPr/>
+        </p:nvPicPr>
+        <p:blipFill>
+          <a:blip>
+            <a:extLst>
+              <a:ext uri="{96DAC541-7B7A-43D3-8B79-37D633B846F1}">
+                <asvg:svgBlip xmlns:asvg="http://schemas.microsoft.com/office/drawing/2016/SVG/main" r:embed="rId3"/>
+              </a:ext>
+            </a:extLst>
+          </a:blip>
+          <a:stretch>
+            <a:fillRect/>
+          </a:stretch>
+        </p:blipFill>
+        <p:spPr>
+          <a:xfrm>
+            <a:off x="715526" y="636516"/>
+            <a:ext cx="1411947" cy="266701"/>
+          </a:xfrm>
+          <a:prstGeom prst="rect">
+            <a:avLst/>
+          </a:prstGeom>
+        </p:spPr>
+      </p:pic>
+      <p:sp>
+        <p:nvSpPr>
+          <p:cNvPr id="4" name="TextBox 3">
+            <a:extLst>
+              <a:ext uri="{FF2B5EF4-FFF2-40B4-BE49-F238E27FC236}">
+                <a16:creationId xmlns:a16="http://schemas.microsoft.com/office/drawing/2014/main" id="{7C26E165-E00F-870D-BB38-47E21D4E15CC}"/>
+              </a:ext>
+            </a:extLst>
+          </p:cNvPr>
+          <p:cNvSpPr txBox="1"/>
+          <p:nvPr/>
+        </p:nvSpPr>
+        <p:spPr>
+          <a:xfrm>
+            <a:off x="15604114" y="9742289"/>
+            <a:ext cx="2074286" cy="153888"/>
+          </a:xfrm>
+          <a:prstGeom prst="rect">
+            <a:avLst/>
+          </a:prstGeom>
+          <a:noFill/>
+        </p:spPr>
+        <p:txBody>
+          <a:bodyPr wrap="none" lIns="0" tIns="0" rIns="0" bIns="0">
+            <a:spAutoFit/>
+          </a:bodyPr>
+          <a:lstStyle/>
+          <a:p>
+            <a:pPr algn="r"/>
+            <a:r>
+              <a:rPr sz="1000" dirty="0">
+                <a:solidFill>
+                  <a:srgbClr val="5B5067"/>
+                </a:solidFill>
+                <a:latin typeface="DM Sans 14pt" pitchFamily="2" charset="77"/>
+              </a:rPr>
+              <a:t>{{</a:t>
+            </a:r>
+            <a:r>
+              <a:rPr sz="1000" dirty="0" err="1">
+                <a:solidFill>
+                  <a:srgbClr val="5B5067"/>
+                </a:solidFill>
+                <a:latin typeface="DM Sans 14pt" pitchFamily="2" charset="77"/>
+              </a:rPr>
+              <a:t>slide_number</a:t>
+            </a:r>
+            <a:r>
+              <a:rPr sz="1000" dirty="0">
+                <a:solidFill>
+                  <a:srgbClr val="5B5067"/>
+                </a:solidFill>
+                <a:latin typeface="DM Sans 14pt" pitchFamily="2" charset="77"/>
+              </a:rPr>
+              <a:t>}} / {{</a:t>
+            </a:r>
+            <a:r>
+              <a:rPr sz="1000" dirty="0" err="1">
+                <a:solidFill>
+                  <a:srgbClr val="5B5067"/>
+                </a:solidFill>
+                <a:latin typeface="DM Sans 14pt" pitchFamily="2" charset="77"/>
+              </a:rPr>
+              <a:t>total_slides</a:t>
+            </a:r>
+            <a:r>
+              <a:rPr sz="1000" dirty="0">
+                <a:solidFill>
+                  <a:srgbClr val="5B5067"/>
+                </a:solidFill>
+                <a:latin typeface="DM Sans 14pt" pitchFamily="2" charset="77"/>
+              </a:rPr>
+              <a:t>}}</a:t>
+            </a:r>
+          </a:p>
+        </p:txBody>
+      </p:sp>
+      <p:sp>
+        <p:nvSpPr>
+          <p:cNvPr id="7" name="TextBox 6">
+            <a:extLst>
+              <a:ext uri="{FF2B5EF4-FFF2-40B4-BE49-F238E27FC236}">
+                <a16:creationId xmlns:a16="http://schemas.microsoft.com/office/drawing/2014/main" id="{CA670D26-8BA5-21C4-1A59-27143FDA37AC}"/>
+              </a:ext>
+            </a:extLst>
+          </p:cNvPr>
+          <p:cNvSpPr txBox="1"/>
+          <p:nvPr/>
+        </p:nvSpPr>
+        <p:spPr>
+          <a:xfrm>
+            <a:off x="609600" y="9742289"/>
+            <a:ext cx="2300310" cy="153888"/>
+          </a:xfrm>
+          <a:prstGeom prst="rect">
+            <a:avLst/>
+          </a:prstGeom>
+          <a:noFill/>
+        </p:spPr>
+        <p:txBody>
+          <a:bodyPr wrap="none" lIns="0" tIns="0" rIns="0" bIns="0">
+            <a:spAutoFit/>
+          </a:bodyPr>
+          <a:lstStyle/>
+          <a:p>
+            <a:pPr algn="l"/>
+            <a:r>
+              <a:rPr sz="1000" dirty="0">
+                <a:solidFill>
+                  <a:srgbClr val="643791"/>
+                </a:solidFill>
+                <a:latin typeface="DM Sans 14pt" pitchFamily="2" charset="77"/>
+              </a:rPr>
+              <a:t>Jobs Go Public  ·  Go place</a:t>
+            </a:r>
+            <a:r>
+              <a:rPr lang="en-GB" sz="1000" dirty="0">
+                <a:solidFill>
+                  <a:srgbClr val="643791"/>
+                </a:solidFill>
+                <a:latin typeface="DM Sans 14pt" pitchFamily="2" charset="77"/>
+              </a:rPr>
+              <a:t>s</a:t>
+            </a:r>
+            <a:r>
+              <a:rPr sz="1000" dirty="0">
+                <a:solidFill>
+                  <a:srgbClr val="643791"/>
+                </a:solidFill>
+                <a:latin typeface="DM Sans 14pt" pitchFamily="2" charset="77"/>
+              </a:rPr>
+              <a:t>. Go public.</a:t>
+            </a:r>
           </a:p>
         </p:txBody>
       </p:sp>
@@ -8425,6 +7199,14 @@
 <file path=ppt/slides/slide7.xml><?xml version="1.0" encoding="utf-8"?>
 <p:sld xmlns:a="http://schemas.openxmlformats.org/drawingml/2006/main" xmlns:r="http://schemas.openxmlformats.org/officeDocument/2006/relationships" xmlns:p="http://schemas.openxmlformats.org/presentationml/2006/main">
   <p:cSld>
+    <p:bg>
+      <p:bgPr>
+        <a:solidFill>
+          <a:srgbClr val="F1F3E2"/>
+        </a:solidFill>
+        <a:effectLst/>
+      </p:bgPr>
+    </p:bg>
     <p:spTree>
       <p:nvGrpSpPr>
         <p:cNvPr id="1" name="">
@@ -8447,139 +7229,6 @@
       </p:grpSpPr>
       <p:sp>
         <p:nvSpPr>
-          <p:cNvPr id="2" name="Shape 0">
-            <a:extLst>
-              <a:ext uri="{FF2B5EF4-FFF2-40B4-BE49-F238E27FC236}">
-                <a16:creationId xmlns:a16="http://schemas.microsoft.com/office/drawing/2014/main" id="{6769438C-534F-3653-4C67-806313405A08}"/>
-              </a:ext>
-            </a:extLst>
-          </p:cNvPr>
-          <p:cNvSpPr/>
-          <p:nvPr/>
-        </p:nvSpPr>
-        <p:spPr>
-          <a:xfrm>
-            <a:off x="609600" y="457200"/>
-            <a:ext cx="495300" cy="438150"/>
-          </a:xfrm>
-          <a:prstGeom prst="rect">
-            <a:avLst/>
-          </a:prstGeom>
-          <a:solidFill>
-            <a:srgbClr val="643791"/>
-          </a:solidFill>
-          <a:ln/>
-        </p:spPr>
-        <p:txBody>
-          <a:bodyPr/>
-          <a:lstStyle/>
-          <a:p>
-            <a:endParaRPr lang="en-GB">
-              <a:latin typeface="DM Sans 14pt" pitchFamily="2" charset="77"/>
-            </a:endParaRPr>
-          </a:p>
-        </p:txBody>
-      </p:sp>
-      <p:sp>
-        <p:nvSpPr>
-          <p:cNvPr id="3" name="Text 1">
-            <a:extLst>
-              <a:ext uri="{FF2B5EF4-FFF2-40B4-BE49-F238E27FC236}">
-                <a16:creationId xmlns:a16="http://schemas.microsoft.com/office/drawing/2014/main" id="{6F9E9FF0-CF8C-FC6B-F503-578F1A2C9E69}"/>
-              </a:ext>
-            </a:extLst>
-          </p:cNvPr>
-          <p:cNvSpPr/>
-          <p:nvPr/>
-        </p:nvSpPr>
-        <p:spPr>
-          <a:xfrm>
-            <a:off x="571500" y="476250"/>
-            <a:ext cx="495300" cy="457200"/>
-          </a:xfrm>
-          <a:prstGeom prst="rect">
-            <a:avLst/>
-          </a:prstGeom>
-          <a:noFill/>
-          <a:ln/>
-        </p:spPr>
-        <p:txBody>
-          <a:bodyPr wrap="square" lIns="25400" tIns="25400" rIns="25400" bIns="25400" rtlCol="0" anchor="ctr">
-            <a:normAutofit/>
-          </a:bodyPr>
-          <a:lstStyle/>
-          <a:p>
-            <a:pPr marL="0" indent="0" algn="ctr">
-              <a:buNone/>
-            </a:pPr>
-            <a:r>
-              <a:rPr lang="en-US" sz="1350" b="1" kern="0" spc="-27" dirty="0">
-                <a:solidFill>
-                  <a:srgbClr val="FFFFFF"/>
-                </a:solidFill>
-                <a:latin typeface="DM Sans 14pt" pitchFamily="2" charset="77"/>
-                <a:ea typeface="Arial" pitchFamily="34" charset="-122"/>
-                <a:cs typeface="Arial" pitchFamily="34" charset="-120"/>
-              </a:rPr>
-              <a:t>Go</a:t>
-            </a:r>
-            <a:endParaRPr lang="en-US" sz="1350" dirty="0">
-              <a:latin typeface="DM Sans 14pt" pitchFamily="2" charset="77"/>
-            </a:endParaRPr>
-          </a:p>
-        </p:txBody>
-      </p:sp>
-      <p:sp>
-        <p:nvSpPr>
-          <p:cNvPr id="4" name="Text 2">
-            <a:extLst>
-              <a:ext uri="{FF2B5EF4-FFF2-40B4-BE49-F238E27FC236}">
-                <a16:creationId xmlns:a16="http://schemas.microsoft.com/office/drawing/2014/main" id="{9A54BD05-0BEA-5C3A-B2A1-EBA393BDE115}"/>
-              </a:ext>
-            </a:extLst>
-          </p:cNvPr>
-          <p:cNvSpPr/>
-          <p:nvPr/>
-        </p:nvSpPr>
-        <p:spPr>
-          <a:xfrm>
-            <a:off x="1200150" y="538163"/>
-            <a:ext cx="1561505" cy="314325"/>
-          </a:xfrm>
-          <a:prstGeom prst="rect">
-            <a:avLst/>
-          </a:prstGeom>
-          <a:noFill/>
-          <a:ln/>
-        </p:spPr>
-        <p:txBody>
-          <a:bodyPr wrap="square" lIns="25400" tIns="25400" rIns="25400" bIns="25400" rtlCol="0" anchor="t">
-            <a:normAutofit/>
-          </a:bodyPr>
-          <a:lstStyle/>
-          <a:p>
-            <a:pPr marL="0" indent="0" algn="l">
-              <a:buNone/>
-            </a:pPr>
-            <a:r>
-              <a:rPr lang="en-US" sz="1650" b="1" kern="0" spc="-16" dirty="0">
-                <a:solidFill>
-                  <a:srgbClr val="111111"/>
-                </a:solidFill>
-                <a:latin typeface="DM Sans 14pt" pitchFamily="2" charset="77"/>
-                <a:ea typeface="Arial" pitchFamily="34" charset="-122"/>
-                <a:cs typeface="Arial" pitchFamily="34" charset="-120"/>
-              </a:rPr>
-              <a:t>Jobs Go Public</a:t>
-            </a:r>
-            <a:endParaRPr lang="en-US" sz="1650" dirty="0">
-              <a:latin typeface="DM Sans 14pt" pitchFamily="2" charset="77"/>
-            </a:endParaRPr>
-          </a:p>
-        </p:txBody>
-      </p:sp>
-      <p:sp>
-        <p:nvSpPr>
           <p:cNvPr id="6" name="Text 4">
             <a:extLst>
               <a:ext uri="{FF2B5EF4-FFF2-40B4-BE49-F238E27FC236}">
@@ -8672,57 +7321,6 @@
       </p:sp>
       <p:sp>
         <p:nvSpPr>
-          <p:cNvPr id="38" name="Text 36">
-            <a:extLst>
-              <a:ext uri="{FF2B5EF4-FFF2-40B4-BE49-F238E27FC236}">
-                <a16:creationId xmlns:a16="http://schemas.microsoft.com/office/drawing/2014/main" id="{D64166D0-A6F5-DBA5-F270-F86FC33A0F32}"/>
-              </a:ext>
-            </a:extLst>
-          </p:cNvPr>
-          <p:cNvSpPr/>
-          <p:nvPr/>
-        </p:nvSpPr>
-        <p:spPr>
-          <a:xfrm>
-            <a:off x="609600" y="9753600"/>
-            <a:ext cx="2373511" cy="190500"/>
-          </a:xfrm>
-          <a:prstGeom prst="rect">
-            <a:avLst/>
-          </a:prstGeom>
-          <a:noFill/>
-          <a:ln/>
-        </p:spPr>
-        <p:txBody>
-          <a:bodyPr wrap="square" lIns="25400" tIns="25400" rIns="25400" bIns="25400" rtlCol="0" anchor="t">
-            <a:normAutofit fontScale="85000" lnSpcReduction="10000"/>
-          </a:bodyPr>
-          <a:lstStyle/>
-          <a:p>
-            <a:pPr marL="0" indent="0" algn="l">
-              <a:buNone/>
-            </a:pPr>
-            <a:r>
-              <a:rPr lang="en-US" sz="1050" kern="0" spc="42" dirty="0">
-                <a:solidFill>
-                  <a:srgbClr val="111111">
-                    <a:alpha val="63000"/>
-                  </a:srgbClr>
-                </a:solidFill>
-                <a:latin typeface="DM Sans 14pt" pitchFamily="2" charset="77"/>
-                <a:ea typeface="Arial" pitchFamily="34" charset="-122"/>
-                <a:cs typeface="Arial" pitchFamily="34" charset="-120"/>
-              </a:rPr>
-              <a:t>{{client_name}} · Advertising Report</a:t>
-            </a:r>
-            <a:endParaRPr lang="en-US" sz="1050" dirty="0">
-              <a:latin typeface="DM Sans 14pt" pitchFamily="2" charset="77"/>
-            </a:endParaRPr>
-          </a:p>
-        </p:txBody>
-      </p:sp>
-      <p:sp>
-        <p:nvSpPr>
           <p:cNvPr id="46" name="Text 3">
             <a:extLst>
               <a:ext uri="{FF2B5EF4-FFF2-40B4-BE49-F238E27FC236}">
@@ -8772,44 +7370,6 @@
       </p:sp>
       <p:sp>
         <p:nvSpPr>
-          <p:cNvPr id="10" name="Text 25">
-            <a:extLst>
-              <a:ext uri="{FF2B5EF4-FFF2-40B4-BE49-F238E27FC236}">
-                <a16:creationId xmlns:a16="http://schemas.microsoft.com/office/drawing/2014/main" id="{A60EF022-AFCA-1D43-00F7-23502A73BD1F}"/>
-              </a:ext>
-            </a:extLst>
-          </p:cNvPr>
-          <p:cNvSpPr/>
-          <p:nvPr/>
-        </p:nvSpPr>
-        <p:spPr>
-          <a:xfrm>
-            <a:off x="4893357" y="4881636"/>
-            <a:ext cx="3931965" cy="190500"/>
-          </a:xfrm>
-          <a:prstGeom prst="rect">
-            <a:avLst/>
-          </a:prstGeom>
-          <a:noFill/>
-          <a:ln/>
-        </p:spPr>
-        <p:txBody>
-          <a:bodyPr wrap="square" lIns="25400" tIns="25400" rIns="25400" bIns="25400" rtlCol="0" anchor="t">
-            <a:normAutofit fontScale="92500" lnSpcReduction="10000"/>
-          </a:bodyPr>
-          <a:lstStyle/>
-          <a:p>
-            <a:pPr marL="0" indent="0" algn="ctr">
-              <a:buNone/>
-            </a:pPr>
-            <a:endParaRPr lang="en-US" sz="1050" dirty="0">
-              <a:latin typeface="DM Sans 14pt" pitchFamily="2" charset="77"/>
-            </a:endParaRPr>
-          </a:p>
-        </p:txBody>
-      </p:sp>
-      <p:sp>
-        <p:nvSpPr>
           <p:cNvPr id="13" name="Shape 19">
             <a:extLst>
               <a:ext uri="{FF2B5EF4-FFF2-40B4-BE49-F238E27FC236}">
@@ -8830,13 +7390,9 @@
               <a:gd name="adj" fmla="val 2331"/>
             </a:avLst>
           </a:prstGeom>
-          <a:solidFill>
-            <a:srgbClr val="E8E0F2"/>
-          </a:solidFill>
+          <a:noFill/>
           <a:ln w="19050">
-            <a:solidFill>
-              <a:srgbClr val="643791"/>
-            </a:solidFill>
+            <a:noFill/>
             <a:prstDash val="dash"/>
           </a:ln>
         </p:spPr>
@@ -8865,22 +7421,16 @@
         <p:spPr>
           <a:xfrm>
             <a:off x="868675" y="2292129"/>
-            <a:ext cx="11725200" cy="6951522"/>
+            <a:ext cx="11727314" cy="6951522"/>
           </a:xfrm>
           <a:prstGeom prst="roundRect">
             <a:avLst>
-              <a:gd name="adj" fmla="val 2451"/>
+              <a:gd name="adj" fmla="val 0"/>
             </a:avLst>
           </a:prstGeom>
-          <a:solidFill>
-            <a:srgbClr val="FFFFFF"/>
-          </a:solidFill>
+          <a:noFill/>
           <a:ln w="9525">
-            <a:solidFill>
-              <a:srgbClr val="000000">
-                <a:alpha val="10000"/>
-              </a:srgbClr>
-            </a:solidFill>
+            <a:noFill/>
             <a:prstDash val="solid"/>
           </a:ln>
         </p:spPr>
@@ -8895,7 +7445,6 @@
                 </a:solidFill>
                 <a:latin typeface="DM Sans 14pt" pitchFamily="2" charset="77"/>
                 <a:ea typeface="monospace" pitchFamily="34" charset="-122"/>
-                <a:cs typeface="monospace" pitchFamily="34" charset="-120"/>
               </a:rPr>
               <a:t>{{</a:t>
             </a:r>
@@ -8906,7 +7455,6 @@
                 </a:solidFill>
                 <a:latin typeface="DM Sans 14pt" pitchFamily="2" charset="77"/>
                 <a:ea typeface="monospace" pitchFamily="34" charset="-122"/>
-                <a:cs typeface="monospace" pitchFamily="34" charset="-120"/>
               </a:rPr>
               <a:t>chart:salary_by_occupation</a:t>
             </a:r>
@@ -8917,13 +7465,9 @@
                 </a:solidFill>
                 <a:latin typeface="DM Sans 14pt" pitchFamily="2" charset="77"/>
                 <a:ea typeface="monospace" pitchFamily="34" charset="-122"/>
-                <a:cs typeface="monospace" pitchFamily="34" charset="-120"/>
               </a:rPr>
               <a:t>}}</a:t>
             </a:r>
-            <a:endParaRPr lang="en-US" dirty="0">
-              <a:latin typeface="DM Sans 14pt" pitchFamily="2" charset="77"/>
-            </a:endParaRPr>
           </a:p>
         </p:txBody>
       </p:sp>
@@ -8941,8 +7485,8 @@
         </p:nvSpPr>
         <p:spPr>
           <a:xfrm>
-            <a:off x="868675" y="1866899"/>
-            <a:ext cx="8009197" cy="428400"/>
+            <a:off x="762001" y="1866899"/>
+            <a:ext cx="11945938" cy="432000"/>
           </a:xfrm>
           <a:prstGeom prst="rect">
             <a:avLst/>
@@ -8972,6 +7516,7 @@
           <a:bodyPr lIns="0" tIns="0" rIns="0" bIns="0" rtlCol="0" anchor="ctr"/>
           <a:lstStyle/>
           <a:p>
+            <a:pPr algn="ctr"/>
             <a:r>
               <a:rPr lang="en-US" kern="0" spc="84" dirty="0">
                 <a:solidFill>
@@ -8988,238 +7533,6 @@
             <a:endParaRPr lang="en-US" dirty="0">
               <a:latin typeface="DM Sans 14pt" pitchFamily="2" charset="77"/>
             </a:endParaRPr>
-          </a:p>
-        </p:txBody>
-      </p:sp>
-      <p:sp>
-        <p:nvSpPr>
-          <p:cNvPr id="5" name="Footer Placeholder 1">
-            <a:extLst>
-              <a:ext uri="{FF2B5EF4-FFF2-40B4-BE49-F238E27FC236}">
-                <a16:creationId xmlns:a16="http://schemas.microsoft.com/office/drawing/2014/main" id="{0011CFF4-EA6B-87CF-5D66-EFA3703E982E}"/>
-              </a:ext>
-            </a:extLst>
-          </p:cNvPr>
-          <p:cNvSpPr txBox="1">
-            <a:spLocks/>
-          </p:cNvSpPr>
-          <p:nvPr/>
-        </p:nvSpPr>
-        <p:spPr>
-          <a:xfrm>
-            <a:off x="17233255" y="9753300"/>
-            <a:ext cx="522000" cy="190800"/>
-          </a:xfrm>
-          <a:prstGeom prst="rect">
-            <a:avLst/>
-          </a:prstGeom>
-        </p:spPr>
-        <p:txBody>
-          <a:bodyPr vert="horz" lIns="36000" tIns="36000" rIns="36000" bIns="36000" rtlCol="0" anchor="ctr"/>
-          <a:lstStyle>
-            <a:lvl1pPr marL="0" algn="l" defTabSz="914400" rtl="0" eaLnBrk="1" latinLnBrk="0" hangingPunct="1">
-              <a:defRPr sz="900" kern="1200">
-                <a:solidFill>
-                  <a:srgbClr val="E8E0F2"/>
-                </a:solidFill>
-                <a:latin typeface="DM Sans 14pt" pitchFamily="2" charset="77"/>
-                <a:ea typeface="+mn-ea"/>
-                <a:cs typeface="+mn-cs"/>
-              </a:defRPr>
-            </a:lvl1pPr>
-            <a:lvl2pPr marL="457200" algn="l" defTabSz="914400" rtl="0" eaLnBrk="1" latinLnBrk="0" hangingPunct="1">
-              <a:defRPr sz="1800" kern="1200">
-                <a:solidFill>
-                  <a:schemeClr val="tx1"/>
-                </a:solidFill>
-                <a:latin typeface="+mn-lt"/>
-                <a:ea typeface="+mn-ea"/>
-                <a:cs typeface="+mn-cs"/>
-              </a:defRPr>
-            </a:lvl2pPr>
-            <a:lvl3pPr marL="914400" algn="l" defTabSz="914400" rtl="0" eaLnBrk="1" latinLnBrk="0" hangingPunct="1">
-              <a:defRPr sz="1800" kern="1200">
-                <a:solidFill>
-                  <a:schemeClr val="tx1"/>
-                </a:solidFill>
-                <a:latin typeface="+mn-lt"/>
-                <a:ea typeface="+mn-ea"/>
-                <a:cs typeface="+mn-cs"/>
-              </a:defRPr>
-            </a:lvl3pPr>
-            <a:lvl4pPr marL="1371600" algn="l" defTabSz="914400" rtl="0" eaLnBrk="1" latinLnBrk="0" hangingPunct="1">
-              <a:defRPr sz="1800" kern="1200">
-                <a:solidFill>
-                  <a:schemeClr val="tx1"/>
-                </a:solidFill>
-                <a:latin typeface="+mn-lt"/>
-                <a:ea typeface="+mn-ea"/>
-                <a:cs typeface="+mn-cs"/>
-              </a:defRPr>
-            </a:lvl4pPr>
-            <a:lvl5pPr marL="1828800" algn="l" defTabSz="914400" rtl="0" eaLnBrk="1" latinLnBrk="0" hangingPunct="1">
-              <a:defRPr sz="1800" kern="1200">
-                <a:solidFill>
-                  <a:schemeClr val="tx1"/>
-                </a:solidFill>
-                <a:latin typeface="+mn-lt"/>
-                <a:ea typeface="+mn-ea"/>
-                <a:cs typeface="+mn-cs"/>
-              </a:defRPr>
-            </a:lvl5pPr>
-            <a:lvl6pPr marL="2286000" algn="l" defTabSz="914400" rtl="0" eaLnBrk="1" latinLnBrk="0" hangingPunct="1">
-              <a:defRPr sz="1800" kern="1200">
-                <a:solidFill>
-                  <a:schemeClr val="tx1"/>
-                </a:solidFill>
-                <a:latin typeface="+mn-lt"/>
-                <a:ea typeface="+mn-ea"/>
-                <a:cs typeface="+mn-cs"/>
-              </a:defRPr>
-            </a:lvl6pPr>
-            <a:lvl7pPr marL="2743200" algn="l" defTabSz="914400" rtl="0" eaLnBrk="1" latinLnBrk="0" hangingPunct="1">
-              <a:defRPr sz="1800" kern="1200">
-                <a:solidFill>
-                  <a:schemeClr val="tx1"/>
-                </a:solidFill>
-                <a:latin typeface="+mn-lt"/>
-                <a:ea typeface="+mn-ea"/>
-                <a:cs typeface="+mn-cs"/>
-              </a:defRPr>
-            </a:lvl7pPr>
-            <a:lvl8pPr marL="3200400" algn="l" defTabSz="914400" rtl="0" eaLnBrk="1" latinLnBrk="0" hangingPunct="1">
-              <a:defRPr sz="1800" kern="1200">
-                <a:solidFill>
-                  <a:schemeClr val="tx1"/>
-                </a:solidFill>
-                <a:latin typeface="+mn-lt"/>
-                <a:ea typeface="+mn-ea"/>
-                <a:cs typeface="+mn-cs"/>
-              </a:defRPr>
-            </a:lvl8pPr>
-            <a:lvl9pPr marL="3657600" algn="l" defTabSz="914400" rtl="0" eaLnBrk="1" latinLnBrk="0" hangingPunct="1">
-              <a:defRPr sz="1800" kern="1200">
-                <a:solidFill>
-                  <a:schemeClr val="tx1"/>
-                </a:solidFill>
-                <a:latin typeface="+mn-lt"/>
-                <a:ea typeface="+mn-ea"/>
-                <a:cs typeface="+mn-cs"/>
-              </a:defRPr>
-            </a:lvl9pPr>
-          </a:lstStyle>
-          <a:p>
-            <a:r>
-              <a:rPr lang="en-GB" dirty="0">
-                <a:solidFill>
-                  <a:srgbClr val="757575"/>
-                </a:solidFill>
-              </a:rPr>
-              <a:t>{{</a:t>
-            </a:r>
-            <a:r>
-              <a:rPr lang="en-GB" dirty="0" err="1">
-                <a:solidFill>
-                  <a:srgbClr val="757575"/>
-                </a:solidFill>
-              </a:rPr>
-              <a:t>slide_number</a:t>
-            </a:r>
-            <a:r>
-              <a:rPr lang="en-GB" dirty="0">
-                <a:solidFill>
-                  <a:srgbClr val="757575"/>
-                </a:solidFill>
-              </a:rPr>
-              <a:t>}} / {{</a:t>
-            </a:r>
-            <a:r>
-              <a:rPr lang="en-GB" dirty="0" err="1">
-                <a:solidFill>
-                  <a:srgbClr val="757575"/>
-                </a:solidFill>
-              </a:rPr>
-              <a:t>total_slides</a:t>
-            </a:r>
-            <a:r>
-              <a:rPr lang="en-GB" dirty="0">
-                <a:solidFill>
-                  <a:srgbClr val="757575"/>
-                </a:solidFill>
-              </a:rPr>
-              <a:t>}}</a:t>
-            </a:r>
-          </a:p>
-        </p:txBody>
-      </p:sp>
-      <p:sp>
-        <p:nvSpPr>
-          <p:cNvPr id="8" name="Shape 28">
-            <a:extLst>
-              <a:ext uri="{FF2B5EF4-FFF2-40B4-BE49-F238E27FC236}">
-                <a16:creationId xmlns:a16="http://schemas.microsoft.com/office/drawing/2014/main" id="{5D19BA13-C8A8-47B4-D449-BB8BDE721A67}"/>
-              </a:ext>
-            </a:extLst>
-          </p:cNvPr>
-          <p:cNvSpPr/>
-          <p:nvPr/>
-        </p:nvSpPr>
-        <p:spPr>
-          <a:xfrm>
-            <a:off x="12995755" y="1866899"/>
-            <a:ext cx="4701600" cy="1188000"/>
-          </a:xfrm>
-          <a:prstGeom prst="roundRect">
-            <a:avLst>
-              <a:gd name="adj" fmla="val 6000"/>
-            </a:avLst>
-          </a:prstGeom>
-          <a:solidFill>
-            <a:srgbClr val="643791">
-              <a:alpha val="8000"/>
-            </a:srgbClr>
-          </a:solidFill>
-          <a:ln/>
-        </p:spPr>
-        <p:txBody>
-          <a:bodyPr/>
-          <a:lstStyle/>
-          <a:p>
-            <a:pPr>
-              <a:lnSpc>
-                <a:spcPct val="110000"/>
-              </a:lnSpc>
-            </a:pPr>
-            <a:r>
-              <a:rPr lang="en-GB" sz="1400" dirty="0">
-                <a:solidFill>
-                  <a:srgbClr val="643791"/>
-                </a:solidFill>
-                <a:latin typeface="DM Sans 14pt" pitchFamily="2" charset="77"/>
-                <a:cs typeface="Arial" pitchFamily="34" charset="-120"/>
-              </a:rPr>
-              <a:t>{{</a:t>
-            </a:r>
-            <a:r>
-              <a:rPr lang="en-GB" sz="1400" dirty="0" err="1">
-                <a:solidFill>
-                  <a:srgbClr val="643791"/>
-                </a:solidFill>
-                <a:latin typeface="DM Sans 14pt" pitchFamily="2" charset="77"/>
-                <a:cs typeface="Arial" pitchFamily="34" charset="-120"/>
-              </a:rPr>
-              <a:t>chart_explainer_salary_by_occupation</a:t>
-            </a:r>
-            <a:r>
-              <a:rPr lang="en-GB" sz="1400" dirty="0">
-                <a:solidFill>
-                  <a:srgbClr val="643791"/>
-                </a:solidFill>
-                <a:latin typeface="DM Sans 14pt" pitchFamily="2" charset="77"/>
-                <a:cs typeface="Arial" pitchFamily="34" charset="-120"/>
-              </a:rPr>
-              <a:t>}}</a:t>
-            </a:r>
           </a:p>
         </p:txBody>
       </p:sp>
@@ -9256,7 +7569,7 @@
               <a:buNone/>
             </a:pPr>
             <a:r>
-              <a:rPr lang="en-US" sz="2400" b="1" kern="0" spc="368" dirty="0">
+              <a:rPr lang="en-US" sz="2400" b="1" kern="0" spc="0" dirty="0">
                 <a:solidFill>
                   <a:srgbClr val="643791"/>
                 </a:solidFill>
@@ -9264,7 +7577,7 @@
                 <a:ea typeface="Arial" pitchFamily="34" charset="-122"/>
                 <a:cs typeface="Arial" pitchFamily="34" charset="-120"/>
               </a:rPr>
-              <a:t>COMMENTARY</a:t>
+              <a:t>Commentary</a:t>
             </a:r>
             <a:endParaRPr lang="en-US" sz="2400" b="1" dirty="0">
               <a:latin typeface="DM Sans 14pt" pitchFamily="2" charset="77"/>
@@ -9556,6 +7869,241 @@
               <a:latin typeface="DM Sans 14pt" pitchFamily="2" charset="77"/>
               <a:cs typeface="Arial" pitchFamily="34" charset="-120"/>
             </a:endParaRPr>
+          </a:p>
+        </p:txBody>
+      </p:sp>
+      <p:pic>
+        <p:nvPicPr>
+          <p:cNvPr id="3" name="Graphic 2">
+            <a:extLst>
+              <a:ext uri="{FF2B5EF4-FFF2-40B4-BE49-F238E27FC236}">
+                <a16:creationId xmlns:a16="http://schemas.microsoft.com/office/drawing/2014/main" id="{D778C7FD-1E3C-944F-E0A7-B2458789086C}"/>
+              </a:ext>
+            </a:extLst>
+          </p:cNvPr>
+          <p:cNvPicPr>
+            <a:picLocks noChangeAspect="1"/>
+          </p:cNvPicPr>
+          <p:nvPr/>
+        </p:nvPicPr>
+        <p:blipFill>
+          <a:blip>
+            <a:extLst>
+              <a:ext uri="{96DAC541-7B7A-43D3-8B79-37D633B846F1}">
+                <asvg:svgBlip xmlns:asvg="http://schemas.microsoft.com/office/drawing/2016/SVG/main" r:embed="rId3"/>
+              </a:ext>
+            </a:extLst>
+          </a:blip>
+          <a:stretch>
+            <a:fillRect/>
+          </a:stretch>
+        </p:blipFill>
+        <p:spPr>
+          <a:xfrm>
+            <a:off x="715526" y="636516"/>
+            <a:ext cx="1411947" cy="266701"/>
+          </a:xfrm>
+          <a:prstGeom prst="rect">
+            <a:avLst/>
+          </a:prstGeom>
+        </p:spPr>
+      </p:pic>
+      <p:sp>
+        <p:nvSpPr>
+          <p:cNvPr id="4" name="TextBox 3">
+            <a:extLst>
+              <a:ext uri="{FF2B5EF4-FFF2-40B4-BE49-F238E27FC236}">
+                <a16:creationId xmlns:a16="http://schemas.microsoft.com/office/drawing/2014/main" id="{88015491-0A5D-58E5-39FF-A4F677A5A14B}"/>
+              </a:ext>
+            </a:extLst>
+          </p:cNvPr>
+          <p:cNvSpPr txBox="1"/>
+          <p:nvPr/>
+        </p:nvSpPr>
+        <p:spPr>
+          <a:xfrm>
+            <a:off x="15604114" y="9742289"/>
+            <a:ext cx="2074286" cy="153888"/>
+          </a:xfrm>
+          <a:prstGeom prst="rect">
+            <a:avLst/>
+          </a:prstGeom>
+          <a:noFill/>
+        </p:spPr>
+        <p:txBody>
+          <a:bodyPr wrap="none" lIns="0" tIns="0" rIns="0" bIns="0">
+            <a:spAutoFit/>
+          </a:bodyPr>
+          <a:lstStyle/>
+          <a:p>
+            <a:pPr algn="r"/>
+            <a:r>
+              <a:rPr sz="1000" dirty="0">
+                <a:solidFill>
+                  <a:srgbClr val="5B5067"/>
+                </a:solidFill>
+                <a:latin typeface="DM Sans 14pt" pitchFamily="2" charset="77"/>
+              </a:rPr>
+              <a:t>{{</a:t>
+            </a:r>
+            <a:r>
+              <a:rPr sz="1000" dirty="0" err="1">
+                <a:solidFill>
+                  <a:srgbClr val="5B5067"/>
+                </a:solidFill>
+                <a:latin typeface="DM Sans 14pt" pitchFamily="2" charset="77"/>
+              </a:rPr>
+              <a:t>slide_number</a:t>
+            </a:r>
+            <a:r>
+              <a:rPr sz="1000" dirty="0">
+                <a:solidFill>
+                  <a:srgbClr val="5B5067"/>
+                </a:solidFill>
+                <a:latin typeface="DM Sans 14pt" pitchFamily="2" charset="77"/>
+              </a:rPr>
+              <a:t>}} / {{</a:t>
+            </a:r>
+            <a:r>
+              <a:rPr sz="1000" dirty="0" err="1">
+                <a:solidFill>
+                  <a:srgbClr val="5B5067"/>
+                </a:solidFill>
+                <a:latin typeface="DM Sans 14pt" pitchFamily="2" charset="77"/>
+              </a:rPr>
+              <a:t>total_slides</a:t>
+            </a:r>
+            <a:r>
+              <a:rPr sz="1000" dirty="0">
+                <a:solidFill>
+                  <a:srgbClr val="5B5067"/>
+                </a:solidFill>
+                <a:latin typeface="DM Sans 14pt" pitchFamily="2" charset="77"/>
+              </a:rPr>
+              <a:t>}}</a:t>
+            </a:r>
+          </a:p>
+        </p:txBody>
+      </p:sp>
+      <p:sp>
+        <p:nvSpPr>
+          <p:cNvPr id="7" name="TextBox 6">
+            <a:extLst>
+              <a:ext uri="{FF2B5EF4-FFF2-40B4-BE49-F238E27FC236}">
+                <a16:creationId xmlns:a16="http://schemas.microsoft.com/office/drawing/2014/main" id="{B6248B02-72B6-C207-06BB-460FC373AAD1}"/>
+              </a:ext>
+            </a:extLst>
+          </p:cNvPr>
+          <p:cNvSpPr txBox="1"/>
+          <p:nvPr/>
+        </p:nvSpPr>
+        <p:spPr>
+          <a:xfrm>
+            <a:off x="609600" y="9742289"/>
+            <a:ext cx="2300310" cy="153888"/>
+          </a:xfrm>
+          <a:prstGeom prst="rect">
+            <a:avLst/>
+          </a:prstGeom>
+          <a:noFill/>
+        </p:spPr>
+        <p:txBody>
+          <a:bodyPr wrap="none" lIns="0" tIns="0" rIns="0" bIns="0">
+            <a:spAutoFit/>
+          </a:bodyPr>
+          <a:lstStyle/>
+          <a:p>
+            <a:pPr algn="l"/>
+            <a:r>
+              <a:rPr sz="1000" dirty="0">
+                <a:solidFill>
+                  <a:srgbClr val="643791"/>
+                </a:solidFill>
+                <a:latin typeface="DM Sans 14pt" pitchFamily="2" charset="77"/>
+              </a:rPr>
+              <a:t>Jobs Go Public  ·  Go place</a:t>
+            </a:r>
+            <a:r>
+              <a:rPr lang="en-GB" sz="1000" dirty="0">
+                <a:solidFill>
+                  <a:srgbClr val="643791"/>
+                </a:solidFill>
+                <a:latin typeface="DM Sans 14pt" pitchFamily="2" charset="77"/>
+              </a:rPr>
+              <a:t>s</a:t>
+            </a:r>
+            <a:r>
+              <a:rPr sz="1000" dirty="0">
+                <a:solidFill>
+                  <a:srgbClr val="643791"/>
+                </a:solidFill>
+                <a:latin typeface="DM Sans 14pt" pitchFamily="2" charset="77"/>
+              </a:rPr>
+              <a:t>. Go public.</a:t>
+            </a:r>
+          </a:p>
+        </p:txBody>
+      </p:sp>
+      <p:sp>
+        <p:nvSpPr>
+          <p:cNvPr id="18" name="Shape 28">
+            <a:extLst>
+              <a:ext uri="{FF2B5EF4-FFF2-40B4-BE49-F238E27FC236}">
+                <a16:creationId xmlns:a16="http://schemas.microsoft.com/office/drawing/2014/main" id="{89503F25-6B7E-4BFC-DCC1-692D95994A47}"/>
+              </a:ext>
+            </a:extLst>
+          </p:cNvPr>
+          <p:cNvSpPr/>
+          <p:nvPr/>
+        </p:nvSpPr>
+        <p:spPr>
+          <a:xfrm>
+            <a:off x="12995755" y="1866899"/>
+            <a:ext cx="4701600" cy="1188000"/>
+          </a:xfrm>
+          <a:prstGeom prst="roundRect">
+            <a:avLst>
+              <a:gd name="adj" fmla="val 6000"/>
+            </a:avLst>
+          </a:prstGeom>
+          <a:solidFill>
+            <a:srgbClr val="643791">
+              <a:alpha val="8000"/>
+            </a:srgbClr>
+          </a:solidFill>
+          <a:ln/>
+        </p:spPr>
+        <p:txBody>
+          <a:bodyPr/>
+          <a:lstStyle/>
+          <a:p>
+            <a:r>
+              <a:rPr lang="en-GB" sz="1400" dirty="0">
+                <a:solidFill>
+                  <a:srgbClr val="643791"/>
+                </a:solidFill>
+                <a:latin typeface="DM Sans 14pt" pitchFamily="2" charset="77"/>
+              </a:rPr>
+              <a:t>{{</a:t>
+            </a:r>
+            <a:r>
+              <a:rPr lang="en-GB" sz="1400" dirty="0" err="1">
+                <a:solidFill>
+                  <a:srgbClr val="643791"/>
+                </a:solidFill>
+                <a:latin typeface="DM Sans 14pt" pitchFamily="2" charset="77"/>
+              </a:rPr>
+              <a:t>chart_explainer_salary_by_occupation</a:t>
+            </a:r>
+            <a:r>
+              <a:rPr lang="en-GB" sz="1400" dirty="0">
+                <a:solidFill>
+                  <a:srgbClr val="643791"/>
+                </a:solidFill>
+                <a:latin typeface="DM Sans 14pt" pitchFamily="2" charset="77"/>
+              </a:rPr>
+              <a:t>}}</a:t>
+            </a:r>
           </a:p>
         </p:txBody>
       </p:sp>
@@ -9599,96 +8147,24 @@
       </p:grpSpPr>
       <p:sp>
         <p:nvSpPr>
-          <p:cNvPr id="2" name="Shape 0"/>
-          <p:cNvSpPr/>
-          <p:nvPr/>
-        </p:nvSpPr>
-        <p:spPr>
-          <a:xfrm>
-            <a:off x="609600" y="457200"/>
-            <a:ext cx="495300" cy="438150"/>
+          <p:cNvPr id="5" name="Text 3"/>
+          <p:cNvSpPr/>
+          <p:nvPr/>
+        </p:nvSpPr>
+        <p:spPr>
+          <a:xfrm>
+            <a:off x="762000" y="1143000"/>
+            <a:ext cx="16482060" cy="209550"/>
           </a:xfrm>
           <a:prstGeom prst="rect">
             <a:avLst/>
           </a:prstGeom>
-          <a:solidFill>
-            <a:srgbClr val="FFFFFF"/>
-          </a:solidFill>
-          <a:ln/>
-        </p:spPr>
-        <p:txBody>
-          <a:bodyPr/>
-          <a:lstStyle/>
-          <a:p>
-            <a:endParaRPr lang="en-GB">
-              <a:latin typeface="DM Sans 14pt" pitchFamily="2" charset="77"/>
-            </a:endParaRPr>
-          </a:p>
-        </p:txBody>
-      </p:sp>
-      <p:sp>
-        <p:nvSpPr>
-          <p:cNvPr id="3" name="Text 1"/>
-          <p:cNvSpPr/>
-          <p:nvPr/>
-        </p:nvSpPr>
-        <p:spPr>
-          <a:xfrm>
-            <a:off x="571500" y="476250"/>
-            <a:ext cx="495300" cy="457200"/>
-          </a:xfrm>
-          <a:prstGeom prst="rect">
-            <a:avLst/>
-          </a:prstGeom>
           <a:noFill/>
           <a:ln/>
         </p:spPr>
         <p:txBody>
-          <a:bodyPr wrap="square" lIns="25400" tIns="25400" rIns="25400" bIns="25400" rtlCol="0" anchor="ctr">
-            <a:normAutofit/>
-          </a:bodyPr>
-          <a:lstStyle/>
-          <a:p>
-            <a:pPr marL="0" indent="0" algn="ctr">
-              <a:buNone/>
-            </a:pPr>
-            <a:r>
-              <a:rPr lang="en-US" sz="1350" b="1" kern="0" spc="-27" dirty="0">
-                <a:solidFill>
-                  <a:srgbClr val="643791"/>
-                </a:solidFill>
-                <a:latin typeface="DM Sans 14pt" pitchFamily="2" charset="77"/>
-                <a:ea typeface="Arial" pitchFamily="34" charset="-122"/>
-                <a:cs typeface="Arial" pitchFamily="34" charset="-120"/>
-              </a:rPr>
-              <a:t>Go</a:t>
-            </a:r>
-            <a:endParaRPr lang="en-US" sz="1350" dirty="0">
-              <a:latin typeface="DM Sans 14pt" pitchFamily="2" charset="77"/>
-            </a:endParaRPr>
-          </a:p>
-        </p:txBody>
-      </p:sp>
-      <p:sp>
-        <p:nvSpPr>
-          <p:cNvPr id="4" name="Text 2"/>
-          <p:cNvSpPr/>
-          <p:nvPr/>
-        </p:nvSpPr>
-        <p:spPr>
-          <a:xfrm>
-            <a:off x="1200150" y="538163"/>
-            <a:ext cx="1561505" cy="314325"/>
-          </a:xfrm>
-          <a:prstGeom prst="rect">
-            <a:avLst/>
-          </a:prstGeom>
-          <a:noFill/>
-          <a:ln/>
-        </p:spPr>
-        <p:txBody>
           <a:bodyPr wrap="square" lIns="25400" tIns="25400" rIns="25400" bIns="25400" rtlCol="0" anchor="t">
-            <a:normAutofit/>
+            <a:normAutofit fontScale="92500" lnSpcReduction="10000"/>
           </a:bodyPr>
           <a:lstStyle/>
           <a:p>
@@ -9696,32 +8172,32 @@
               <a:buNone/>
             </a:pPr>
             <a:r>
-              <a:rPr lang="en-US" sz="1650" b="1" kern="0" spc="-16" dirty="0">
-                <a:solidFill>
-                  <a:srgbClr val="FFFFFF"/>
-                </a:solidFill>
-                <a:latin typeface="DM Sans 14pt" pitchFamily="2" charset="77"/>
+              <a:rPr lang="en-US" sz="1200" kern="0" spc="0" dirty="0">
+                <a:solidFill>
+                  <a:srgbClr val="E5FF6E"/>
+                </a:solidFill>
+                <a:latin typeface="DM Sans"/>
                 <a:ea typeface="Arial" pitchFamily="34" charset="-122"/>
                 <a:cs typeface="Arial" pitchFamily="34" charset="-120"/>
               </a:rPr>
-              <a:t>Jobs Go Public</a:t>
-            </a:r>
-            <a:endParaRPr lang="en-US" sz="1650" dirty="0">
-              <a:latin typeface="DM Sans 14pt" pitchFamily="2" charset="77"/>
-            </a:endParaRPr>
-          </a:p>
-        </p:txBody>
-      </p:sp>
-      <p:sp>
-        <p:nvSpPr>
-          <p:cNvPr id="5" name="Text 3"/>
-          <p:cNvSpPr/>
-          <p:nvPr/>
-        </p:nvSpPr>
-        <p:spPr>
-          <a:xfrm>
-            <a:off x="762000" y="1143000"/>
-            <a:ext cx="16482060" cy="209550"/>
+              <a:t>Get in touch</a:t>
+            </a:r>
+            <a:endParaRPr lang="en-US" sz="1200" dirty="0">
+              <a:latin typeface="DM Sans"/>
+            </a:endParaRPr>
+          </a:p>
+        </p:txBody>
+      </p:sp>
+      <p:sp>
+        <p:nvSpPr>
+          <p:cNvPr id="6" name="Text 4"/>
+          <p:cNvSpPr/>
+          <p:nvPr/>
+        </p:nvSpPr>
+        <p:spPr>
+          <a:xfrm>
+            <a:off x="762000" y="1695450"/>
+            <a:ext cx="13735050" cy="3124200"/>
           </a:xfrm>
           <a:prstGeom prst="rect">
             <a:avLst/>
@@ -9731,50 +8207,7 @@
         </p:spPr>
         <p:txBody>
           <a:bodyPr wrap="square" lIns="25400" tIns="25400" rIns="25400" bIns="25400" rtlCol="0" anchor="t">
-            <a:normAutofit fontScale="92500" lnSpcReduction="10000"/>
-          </a:bodyPr>
-          <a:lstStyle/>
-          <a:p>
-            <a:pPr marL="0" indent="0" algn="l">
-              <a:buNone/>
-            </a:pPr>
-            <a:r>
-              <a:rPr lang="en-US" sz="1200" kern="0" spc="360" dirty="0">
-                <a:solidFill>
-                  <a:srgbClr val="E5FF6E"/>
-                </a:solidFill>
-                <a:latin typeface="DM Sans 14pt" pitchFamily="2" charset="77"/>
-                <a:ea typeface="Arial" pitchFamily="34" charset="-122"/>
-                <a:cs typeface="Arial" pitchFamily="34" charset="-120"/>
-              </a:rPr>
-              <a:t>GET IN TOUCH</a:t>
-            </a:r>
-            <a:endParaRPr lang="en-US" sz="1200" dirty="0">
-              <a:latin typeface="DM Sans 14pt" pitchFamily="2" charset="77"/>
-            </a:endParaRPr>
-          </a:p>
-        </p:txBody>
-      </p:sp>
-      <p:sp>
-        <p:nvSpPr>
-          <p:cNvPr id="6" name="Text 4"/>
-          <p:cNvSpPr/>
-          <p:nvPr/>
-        </p:nvSpPr>
-        <p:spPr>
-          <a:xfrm>
-            <a:off x="762000" y="1695450"/>
-            <a:ext cx="13735050" cy="3124200"/>
-          </a:xfrm>
-          <a:prstGeom prst="rect">
-            <a:avLst/>
-          </a:prstGeom>
-          <a:noFill/>
-          <a:ln/>
-        </p:spPr>
-        <p:txBody>
-          <a:bodyPr wrap="square" lIns="25400" tIns="25400" rIns="25400" bIns="25400" rtlCol="0" anchor="t">
-            <a:normAutofit fontScale="92500" lnSpcReduction="20000"/>
+            <a:normAutofit/>
           </a:bodyPr>
           <a:lstStyle/>
           <a:p>
@@ -9789,7 +8222,7 @@
                 <a:solidFill>
                   <a:srgbClr val="FFFFFF"/>
                 </a:solidFill>
-                <a:latin typeface="DM Sans 14pt" pitchFamily="2" charset="77"/>
+                <a:latin typeface="DM Sans"/>
                 <a:ea typeface="Arial" pitchFamily="34" charset="-122"/>
                 <a:cs typeface="Arial" pitchFamily="34" charset="-120"/>
               </a:rPr>
@@ -9800,14 +8233,14 @@
                 <a:solidFill>
                   <a:srgbClr val="E5FF6E"/>
                 </a:solidFill>
-                <a:latin typeface="DM Sans 14pt" pitchFamily="2" charset="77"/>
+                <a:latin typeface="DM Sans"/>
                 <a:ea typeface="Arial" pitchFamily="34" charset="-122"/>
                 <a:cs typeface="Arial" pitchFamily="34" charset="-120"/>
               </a:rPr>
               <a:t>what's next</a:t>
             </a:r>
             <a:endParaRPr lang="en-US" sz="13500" dirty="0">
-              <a:latin typeface="DM Sans 14pt" pitchFamily="2" charset="77"/>
+              <a:latin typeface="DM Sans"/>
             </a:endParaRPr>
           </a:p>
         </p:txBody>
@@ -9839,18 +8272,18 @@
               <a:buNone/>
             </a:pPr>
             <a:r>
-              <a:rPr lang="en-US" sz="1200" kern="0" spc="360" dirty="0">
+              <a:rPr lang="en-US" sz="1200" kern="0" spc="0" dirty="0">
                 <a:solidFill>
                   <a:srgbClr val="E5FF6E"/>
                 </a:solidFill>
-                <a:latin typeface="DM Sans 14pt" pitchFamily="2" charset="77"/>
+                <a:latin typeface="DM Sans"/>
                 <a:ea typeface="Arial" pitchFamily="34" charset="-122"/>
                 <a:cs typeface="Arial" pitchFamily="34" charset="-120"/>
               </a:rPr>
-              <a:t>GO PLACES. GO PUBLIC.</a:t>
+              <a:t>Go places. Go public.</a:t>
             </a:r>
             <a:endParaRPr lang="en-US" sz="1200" dirty="0">
-              <a:latin typeface="DM Sans 14pt" pitchFamily="2" charset="77"/>
+              <a:latin typeface="DM Sans"/>
             </a:endParaRPr>
           </a:p>
         </p:txBody>
@@ -9892,59 +8325,7 @@
               <a:solidFill>
                 <a:srgbClr val="F1F3E2"/>
               </a:solidFill>
-              <a:latin typeface="DM Sans 14pt" pitchFamily="2" charset="77"/>
-            </a:endParaRPr>
-          </a:p>
-        </p:txBody>
-      </p:sp>
-      <p:sp>
-        <p:nvSpPr>
-          <p:cNvPr id="27" name="Text 6">
-            <a:extLst>
-              <a:ext uri="{FF2B5EF4-FFF2-40B4-BE49-F238E27FC236}">
-                <a16:creationId xmlns:a16="http://schemas.microsoft.com/office/drawing/2014/main" id="{6E0D9A79-C9BA-D4A1-A9E2-D9484A4D7511}"/>
-              </a:ext>
-            </a:extLst>
-          </p:cNvPr>
-          <p:cNvSpPr/>
-          <p:nvPr/>
-        </p:nvSpPr>
-        <p:spPr>
-          <a:xfrm>
-            <a:off x="1031999" y="7591200"/>
-            <a:ext cx="6125495" cy="180975"/>
-          </a:xfrm>
-          <a:prstGeom prst="rect">
-            <a:avLst/>
-          </a:prstGeom>
-          <a:noFill/>
-          <a:ln/>
-        </p:spPr>
-        <p:txBody>
-          <a:bodyPr wrap="square" lIns="25400" tIns="25400" rIns="25400" bIns="25400" rtlCol="0" anchor="t">
-            <a:normAutofit fontScale="92500" lnSpcReduction="10000"/>
-          </a:bodyPr>
-          <a:lstStyle/>
-          <a:p>
-            <a:pPr marL="0" indent="0" algn="l">
-              <a:buNone/>
-            </a:pPr>
-            <a:r>
-              <a:rPr lang="en-US" sz="975" kern="0" spc="293" dirty="0">
-                <a:solidFill>
-                  <a:srgbClr val="F1F3E2"/>
-                </a:solidFill>
-                <a:latin typeface="DM Sans 14pt" pitchFamily="2" charset="77"/>
-                <a:ea typeface="Arial" pitchFamily="34" charset="-122"/>
-                <a:cs typeface="Arial" pitchFamily="34" charset="-120"/>
-              </a:rPr>
-              <a:t>YOUR ACCOUNT TEAM</a:t>
-            </a:r>
-            <a:endParaRPr lang="en-US" sz="975" dirty="0">
-              <a:solidFill>
-                <a:srgbClr val="F1F3E2"/>
-              </a:solidFill>
-              <a:latin typeface="DM Sans 14pt" pitchFamily="2" charset="77"/>
+              <a:latin typeface="DM Sans"/>
             </a:endParaRPr>
           </a:p>
         </p:txBody>
@@ -9985,7 +8366,7 @@
                 <a:solidFill>
                   <a:srgbClr val="F1F3E2"/>
                 </a:solidFill>
-                <a:latin typeface="DM Sans 14pt" pitchFamily="2" charset="77"/>
+                <a:latin typeface="DM Sans"/>
                 <a:ea typeface="Arial" pitchFamily="34" charset="-122"/>
                 <a:cs typeface="Arial" pitchFamily="34" charset="-120"/>
               </a:rPr>
@@ -9996,7 +8377,7 @@
                 <a:solidFill>
                   <a:srgbClr val="F1F3E2"/>
                 </a:solidFill>
-                <a:latin typeface="DM Sans 14pt" pitchFamily="2" charset="77"/>
+                <a:latin typeface="DM Sans"/>
                 <a:ea typeface="Arial" pitchFamily="34" charset="-122"/>
                 <a:cs typeface="Arial" pitchFamily="34" charset="-120"/>
               </a:rPr>
@@ -10007,7 +8388,7 @@
                 <a:solidFill>
                   <a:srgbClr val="F1F3E2"/>
                 </a:solidFill>
-                <a:latin typeface="DM Sans 14pt" pitchFamily="2" charset="77"/>
+                <a:latin typeface="DM Sans"/>
                 <a:ea typeface="Arial" pitchFamily="34" charset="-122"/>
                 <a:cs typeface="Arial" pitchFamily="34" charset="-120"/>
               </a:rPr>
@@ -10017,7 +8398,7 @@
               <a:solidFill>
                 <a:srgbClr val="F1F3E2"/>
               </a:solidFill>
-              <a:latin typeface="DM Sans 14pt" pitchFamily="2" charset="77"/>
+              <a:latin typeface="DM Sans"/>
             </a:endParaRPr>
           </a:p>
         </p:txBody>
@@ -10058,7 +8439,7 @@
                 <a:solidFill>
                   <a:srgbClr val="F1F3E2"/>
                 </a:solidFill>
-                <a:latin typeface="DM Sans 14pt" pitchFamily="2" charset="77"/>
+                <a:latin typeface="DM Sans"/>
                 <a:ea typeface="Arial" pitchFamily="34" charset="-122"/>
                 <a:cs typeface="Arial" pitchFamily="34" charset="-120"/>
               </a:rPr>
@@ -10069,7 +8450,7 @@
                 <a:solidFill>
                   <a:srgbClr val="F1F3E2"/>
                 </a:solidFill>
-                <a:latin typeface="DM Sans 14pt" pitchFamily="2" charset="77"/>
+                <a:latin typeface="DM Sans"/>
                 <a:ea typeface="Arial" pitchFamily="34" charset="-122"/>
                 <a:cs typeface="Arial" pitchFamily="34" charset="-120"/>
               </a:rPr>
@@ -10080,7 +8461,7 @@
                 <a:solidFill>
                   <a:srgbClr val="F1F3E2"/>
                 </a:solidFill>
-                <a:latin typeface="DM Sans 14pt" pitchFamily="2" charset="77"/>
+                <a:latin typeface="DM Sans"/>
                 <a:ea typeface="Arial" pitchFamily="34" charset="-122"/>
                 <a:cs typeface="Arial" pitchFamily="34" charset="-120"/>
               </a:rPr>
@@ -10090,59 +8471,7 @@
               <a:solidFill>
                 <a:srgbClr val="F1F3E2"/>
               </a:solidFill>
-              <a:latin typeface="DM Sans 14pt" pitchFamily="2" charset="77"/>
-            </a:endParaRPr>
-          </a:p>
-        </p:txBody>
-      </p:sp>
-      <p:sp>
-        <p:nvSpPr>
-          <p:cNvPr id="30" name="Text 11">
-            <a:extLst>
-              <a:ext uri="{FF2B5EF4-FFF2-40B4-BE49-F238E27FC236}">
-                <a16:creationId xmlns:a16="http://schemas.microsoft.com/office/drawing/2014/main" id="{DF82FE61-23A2-8A05-D965-69E389ACB73F}"/>
-              </a:ext>
-            </a:extLst>
-          </p:cNvPr>
-          <p:cNvSpPr/>
-          <p:nvPr/>
-        </p:nvSpPr>
-        <p:spPr>
-          <a:xfrm>
-            <a:off x="7607822" y="8045963"/>
-            <a:ext cx="647700" cy="171450"/>
-          </a:xfrm>
-          <a:prstGeom prst="rect">
-            <a:avLst/>
-          </a:prstGeom>
-          <a:noFill/>
-          <a:ln/>
-        </p:spPr>
-        <p:txBody>
-          <a:bodyPr wrap="square" lIns="25400" tIns="25400" rIns="25400" bIns="25400" rtlCol="0" anchor="t">
-            <a:normAutofit fontScale="92500" lnSpcReduction="10000"/>
-          </a:bodyPr>
-          <a:lstStyle/>
-          <a:p>
-            <a:pPr marL="0" indent="0" algn="l">
-              <a:buNone/>
-            </a:pPr>
-            <a:r>
-              <a:rPr lang="en-US" sz="900" kern="0" spc="225" dirty="0">
-                <a:solidFill>
-                  <a:srgbClr val="F1F3E2"/>
-                </a:solidFill>
-                <a:latin typeface="DM Sans 14pt" pitchFamily="2" charset="77"/>
-                <a:ea typeface="Arial" pitchFamily="34" charset="-122"/>
-                <a:cs typeface="Arial" pitchFamily="34" charset="-120"/>
-              </a:rPr>
-              <a:t>EMAIL</a:t>
-            </a:r>
-            <a:endParaRPr lang="en-US" sz="900" dirty="0">
-              <a:solidFill>
-                <a:srgbClr val="F1F3E2"/>
-              </a:solidFill>
-              <a:latin typeface="DM Sans 14pt" pitchFamily="2" charset="77"/>
+              <a:latin typeface="DM Sans"/>
             </a:endParaRPr>
           </a:p>
         </p:txBody>
@@ -10161,7 +8490,7 @@
         </p:nvSpPr>
         <p:spPr>
           <a:xfrm>
-            <a:off x="8220183" y="7862183"/>
+            <a:off x="8220183" y="7861688"/>
             <a:ext cx="6120000" cy="540000"/>
           </a:xfrm>
           <a:prstGeom prst="roundRect">
@@ -10183,7 +8512,7 @@
                 <a:solidFill>
                   <a:srgbClr val="F1F3E2"/>
                 </a:solidFill>
-                <a:latin typeface="DM Sans 14pt" pitchFamily="2" charset="77"/>
+                <a:latin typeface="DM Sans"/>
                 <a:ea typeface="Arial" pitchFamily="34" charset="-122"/>
                 <a:cs typeface="Arial" pitchFamily="34" charset="-120"/>
               </a:rPr>
@@ -10194,7 +8523,7 @@
                 <a:solidFill>
                   <a:srgbClr val="F1F3E2"/>
                 </a:solidFill>
-                <a:latin typeface="DM Sans 14pt" pitchFamily="2" charset="77"/>
+                <a:latin typeface="DM Sans"/>
                 <a:ea typeface="Arial" pitchFamily="34" charset="-122"/>
                 <a:cs typeface="Arial" pitchFamily="34" charset="-120"/>
               </a:rPr>
@@ -10205,7 +8534,7 @@
                 <a:solidFill>
                   <a:srgbClr val="F1F3E2"/>
                 </a:solidFill>
-                <a:latin typeface="DM Sans 14pt" pitchFamily="2" charset="77"/>
+                <a:latin typeface="DM Sans"/>
                 <a:ea typeface="Arial" pitchFamily="34" charset="-122"/>
                 <a:cs typeface="Arial" pitchFamily="34" charset="-120"/>
               </a:rPr>
@@ -10215,59 +8544,7 @@
               <a:solidFill>
                 <a:srgbClr val="F1F3E2"/>
               </a:solidFill>
-              <a:latin typeface="DM Sans 14pt" pitchFamily="2" charset="77"/>
-            </a:endParaRPr>
-          </a:p>
-        </p:txBody>
-      </p:sp>
-      <p:sp>
-        <p:nvSpPr>
-          <p:cNvPr id="32" name="Text 14">
-            <a:extLst>
-              <a:ext uri="{FF2B5EF4-FFF2-40B4-BE49-F238E27FC236}">
-                <a16:creationId xmlns:a16="http://schemas.microsoft.com/office/drawing/2014/main" id="{30E88130-83D4-640A-3309-33A70E1C6934}"/>
-              </a:ext>
-            </a:extLst>
-          </p:cNvPr>
-          <p:cNvSpPr/>
-          <p:nvPr/>
-        </p:nvSpPr>
-        <p:spPr>
-          <a:xfrm>
-            <a:off x="7607822" y="8675475"/>
-            <a:ext cx="647700" cy="171450"/>
-          </a:xfrm>
-          <a:prstGeom prst="rect">
-            <a:avLst/>
-          </a:prstGeom>
-          <a:noFill/>
-          <a:ln/>
-        </p:spPr>
-        <p:txBody>
-          <a:bodyPr wrap="square" lIns="25400" tIns="25400" rIns="25400" bIns="25400" rtlCol="0" anchor="t">
-            <a:normAutofit fontScale="92500" lnSpcReduction="10000"/>
-          </a:bodyPr>
-          <a:lstStyle/>
-          <a:p>
-            <a:pPr marL="0" indent="0" algn="l">
-              <a:buNone/>
-            </a:pPr>
-            <a:r>
-              <a:rPr lang="en-US" sz="900" kern="0" spc="225" dirty="0">
-                <a:solidFill>
-                  <a:srgbClr val="F1F3E2"/>
-                </a:solidFill>
-                <a:latin typeface="DM Sans 14pt" pitchFamily="2" charset="77"/>
-                <a:ea typeface="Arial" pitchFamily="34" charset="-122"/>
-                <a:cs typeface="Arial" pitchFamily="34" charset="-120"/>
-              </a:rPr>
-              <a:t>PHONE</a:t>
-            </a:r>
-            <a:endParaRPr lang="en-US" sz="900" dirty="0">
-              <a:solidFill>
-                <a:srgbClr val="F1F3E2"/>
-              </a:solidFill>
-              <a:latin typeface="DM Sans 14pt" pitchFamily="2" charset="77"/>
+              <a:latin typeface="DM Sans"/>
             </a:endParaRPr>
           </a:p>
         </p:txBody>
@@ -10308,7 +8585,7 @@
                 <a:solidFill>
                   <a:srgbClr val="F1F3E2"/>
                 </a:solidFill>
-                <a:latin typeface="DM Sans 14pt" pitchFamily="2" charset="77"/>
+                <a:latin typeface="DM Sans"/>
                 <a:ea typeface="Arial" pitchFamily="34" charset="-122"/>
                 <a:cs typeface="Arial" pitchFamily="34" charset="-120"/>
               </a:rPr>
@@ -10319,7 +8596,7 @@
                 <a:solidFill>
                   <a:srgbClr val="F1F3E2"/>
                 </a:solidFill>
-                <a:latin typeface="DM Sans 14pt" pitchFamily="2" charset="77"/>
+                <a:latin typeface="DM Sans"/>
                 <a:ea typeface="Arial" pitchFamily="34" charset="-122"/>
                 <a:cs typeface="Arial" pitchFamily="34" charset="-120"/>
               </a:rPr>
@@ -10330,7 +8607,7 @@
                 <a:solidFill>
                   <a:srgbClr val="F1F3E2"/>
                 </a:solidFill>
-                <a:latin typeface="DM Sans 14pt" pitchFamily="2" charset="77"/>
+                <a:latin typeface="DM Sans"/>
                 <a:ea typeface="Arial" pitchFamily="34" charset="-122"/>
                 <a:cs typeface="Arial" pitchFamily="34" charset="-120"/>
               </a:rPr>
@@ -10340,7 +8617,178 @@
               <a:solidFill>
                 <a:srgbClr val="F1F3E2"/>
               </a:solidFill>
-              <a:latin typeface="DM Sans 14pt" pitchFamily="2" charset="77"/>
+              <a:latin typeface="DM Sans"/>
+            </a:endParaRPr>
+          </a:p>
+        </p:txBody>
+      </p:sp>
+      <p:pic>
+        <p:nvPicPr>
+          <p:cNvPr id="34" name="Picture 33" descr="jobs-go-public-logo-white.png"/>
+          <p:cNvPicPr>
+            <a:picLocks noChangeAspect="1"/>
+          </p:cNvPicPr>
+          <p:nvPr/>
+        </p:nvPicPr>
+        <p:blipFill>
+          <a:blip r:embed="rId3"/>
+          <a:stretch>
+            <a:fillRect/>
+          </a:stretch>
+        </p:blipFill>
+        <p:spPr>
+          <a:xfrm>
+            <a:off x="571500" y="476250"/>
+            <a:ext cx="1700000" cy="587234"/>
+          </a:xfrm>
+          <a:prstGeom prst="rect">
+            <a:avLst/>
+          </a:prstGeom>
+        </p:spPr>
+      </p:pic>
+      <p:sp>
+        <p:nvSpPr>
+          <p:cNvPr id="3" name="Shape 7">
+            <a:extLst>
+              <a:ext uri="{FF2B5EF4-FFF2-40B4-BE49-F238E27FC236}">
+                <a16:creationId xmlns:a16="http://schemas.microsoft.com/office/drawing/2014/main" id="{59F2F35D-90C9-FD32-A7AB-1710DFE8287C}"/>
+              </a:ext>
+            </a:extLst>
+          </p:cNvPr>
+          <p:cNvSpPr/>
+          <p:nvPr/>
+        </p:nvSpPr>
+        <p:spPr>
+          <a:xfrm>
+            <a:off x="1031997" y="7588575"/>
+            <a:ext cx="6125497" cy="183600"/>
+          </a:xfrm>
+          <a:prstGeom prst="roundRect">
+            <a:avLst>
+              <a:gd name="adj" fmla="val 15242"/>
+            </a:avLst>
+          </a:prstGeom>
+          <a:noFill/>
+          <a:ln/>
+        </p:spPr>
+        <p:txBody>
+          <a:bodyPr lIns="0" tIns="0" rIns="0" bIns="0" anchor="ctr"/>
+          <a:lstStyle/>
+          <a:p>
+            <a:r>
+              <a:rPr lang="en-US" sz="1200" kern="0" spc="-72" dirty="0">
+                <a:solidFill>
+                  <a:srgbClr val="F1F3E2"/>
+                </a:solidFill>
+                <a:latin typeface="DM Sans"/>
+                <a:ea typeface="Arial" pitchFamily="34" charset="-122"/>
+                <a:cs typeface="Arial" pitchFamily="34" charset="-120"/>
+              </a:rPr>
+              <a:t>Your account team</a:t>
+            </a:r>
+            <a:endParaRPr lang="en-US" sz="1200" dirty="0">
+              <a:solidFill>
+                <a:srgbClr val="F1F3E2"/>
+              </a:solidFill>
+              <a:latin typeface="DM Sans"/>
+            </a:endParaRPr>
+          </a:p>
+        </p:txBody>
+      </p:sp>
+      <p:sp>
+        <p:nvSpPr>
+          <p:cNvPr id="9" name="Shape 7">
+            <a:extLst>
+              <a:ext uri="{FF2B5EF4-FFF2-40B4-BE49-F238E27FC236}">
+                <a16:creationId xmlns:a16="http://schemas.microsoft.com/office/drawing/2014/main" id="{C070D7FB-E231-B2B0-5E68-612A62C6F270}"/>
+              </a:ext>
+            </a:extLst>
+          </p:cNvPr>
+          <p:cNvSpPr/>
+          <p:nvPr/>
+        </p:nvSpPr>
+        <p:spPr>
+          <a:xfrm>
+            <a:off x="7607822" y="8669400"/>
+            <a:ext cx="648000" cy="183600"/>
+          </a:xfrm>
+          <a:prstGeom prst="roundRect">
+            <a:avLst>
+              <a:gd name="adj" fmla="val 15242"/>
+            </a:avLst>
+          </a:prstGeom>
+          <a:noFill/>
+          <a:ln/>
+        </p:spPr>
+        <p:txBody>
+          <a:bodyPr lIns="0" tIns="0" rIns="0" bIns="0" anchor="ctr"/>
+          <a:lstStyle/>
+          <a:p>
+            <a:r>
+              <a:rPr lang="en-US" sz="1050" kern="0" spc="-72" dirty="0">
+                <a:solidFill>
+                  <a:srgbClr val="F1F3E2"/>
+                </a:solidFill>
+                <a:latin typeface="DM Sans"/>
+                <a:ea typeface="Arial" pitchFamily="34" charset="-122"/>
+                <a:cs typeface="Arial" pitchFamily="34" charset="-120"/>
+              </a:rPr>
+              <a:t>Phone</a:t>
+            </a:r>
+            <a:endParaRPr lang="en-US" sz="1050" dirty="0">
+              <a:solidFill>
+                <a:srgbClr val="F1F3E2"/>
+              </a:solidFill>
+              <a:latin typeface="DM Sans"/>
+            </a:endParaRPr>
+          </a:p>
+        </p:txBody>
+      </p:sp>
+      <p:sp>
+        <p:nvSpPr>
+          <p:cNvPr id="10" name="Shape 7">
+            <a:extLst>
+              <a:ext uri="{FF2B5EF4-FFF2-40B4-BE49-F238E27FC236}">
+                <a16:creationId xmlns:a16="http://schemas.microsoft.com/office/drawing/2014/main" id="{4D5ACD12-4E39-87BB-2919-FD6CB79325C6}"/>
+              </a:ext>
+            </a:extLst>
+          </p:cNvPr>
+          <p:cNvSpPr/>
+          <p:nvPr/>
+        </p:nvSpPr>
+        <p:spPr>
+          <a:xfrm>
+            <a:off x="7629525" y="8039888"/>
+            <a:ext cx="648000" cy="183600"/>
+          </a:xfrm>
+          <a:prstGeom prst="roundRect">
+            <a:avLst>
+              <a:gd name="adj" fmla="val 15242"/>
+            </a:avLst>
+          </a:prstGeom>
+          <a:noFill/>
+          <a:ln/>
+        </p:spPr>
+        <p:txBody>
+          <a:bodyPr lIns="0" tIns="0" rIns="0" bIns="0" anchor="ctr"/>
+          <a:lstStyle/>
+          <a:p>
+            <a:r>
+              <a:rPr lang="en-US" sz="1050" kern="0" spc="-72" dirty="0">
+                <a:solidFill>
+                  <a:srgbClr val="F1F3E2"/>
+                </a:solidFill>
+                <a:latin typeface="DM Sans"/>
+                <a:ea typeface="Arial" pitchFamily="34" charset="-122"/>
+                <a:cs typeface="Arial" pitchFamily="34" charset="-120"/>
+              </a:rPr>
+              <a:t>Email</a:t>
+            </a:r>
+            <a:endParaRPr lang="en-US" sz="1050" dirty="0">
+              <a:solidFill>
+                <a:srgbClr val="F1F3E2"/>
+              </a:solidFill>
+              <a:latin typeface="DM Sans"/>
             </a:endParaRPr>
           </a:p>
         </p:txBody>
@@ -10396,7 +8844,7 @@
     </a:clrScheme>
     <a:fontScheme name="Office">
       <a:majorFont>
-        <a:latin typeface="Calibri Light" panose="020F0302020204030204"/>
+        <a:latin typeface="DM Sans" panose="020F0302020204030204"/>
         <a:ea typeface=""/>
         <a:cs typeface=""/>
         <a:font script="Jpan" typeface="游ゴシック Light"/>
@@ -10448,7 +8896,7 @@
         <a:font script="Tfng" typeface="Ebrima"/>
       </a:majorFont>
       <a:minorFont>
-        <a:latin typeface="Calibri" panose="020F0502020204030204"/>
+        <a:latin typeface="DM Sans" panose="020F0502020204030204"/>
         <a:ea typeface=""/>
         <a:cs typeface=""/>
         <a:font script="Jpan" typeface="游ゴシック"/>

--- a/Renewals.pptx
+++ b/Renewals.pptx
@@ -2301,7 +2301,7 @@
           <a:p>
             <a:pPr algn="ctr"/>
             <a:r>
-              <a:rPr lang="en-GB" sz="4000" dirty="0">
+              <a:rPr lang="en-GB" sz="2800" dirty="0">
                 <a:solidFill>
                   <a:schemeClr val="bg1"/>
                 </a:solidFill>
@@ -2310,7 +2310,7 @@
               <a:t>{{</a:t>
             </a:r>
             <a:r>
-              <a:rPr lang="en-GB" sz="4000" dirty="0" err="1">
+              <a:rPr lang="en-GB" sz="2800" dirty="0" err="1">
                 <a:solidFill>
                   <a:schemeClr val="bg1"/>
                 </a:solidFill>
@@ -2319,7 +2319,7 @@
               <a:t>stat_top_category</a:t>
             </a:r>
             <a:r>
-              <a:rPr lang="en-GB" sz="4000" dirty="0">
+              <a:rPr lang="en-GB" sz="2800" dirty="0">
                 <a:solidFill>
                   <a:schemeClr val="bg1"/>
                 </a:solidFill>
@@ -2327,7 +2327,7 @@
               </a:rPr>
               <a:t>}}</a:t>
             </a:r>
-            <a:endParaRPr lang="en-US" sz="4000" kern="0" spc="-67" dirty="0">
+            <a:endParaRPr lang="en-US" sz="2800" kern="0" spc="-67" dirty="0">
               <a:solidFill>
                 <a:schemeClr val="bg1"/>
               </a:solidFill>
@@ -5283,7 +5283,7 @@
           <a:p>
             <a:pPr algn="ctr"/>
             <a:r>
-              <a:rPr lang="en-GB" sz="3600" dirty="0">
+              <a:rPr lang="en-GB" sz="3000" dirty="0">
                 <a:solidFill>
                   <a:schemeClr val="bg1"/>
                 </a:solidFill>
@@ -5292,7 +5292,7 @@
               <a:t>{{</a:t>
             </a:r>
             <a:r>
-              <a:rPr lang="en-GB" sz="3600" dirty="0" err="1">
+              <a:rPr lang="en-GB" sz="3000" dirty="0" err="1">
                 <a:solidFill>
                   <a:schemeClr val="bg1"/>
                 </a:solidFill>
@@ -5301,7 +5301,7 @@
               <a:t>stat_total_jobs</a:t>
             </a:r>
             <a:r>
-              <a:rPr lang="en-GB" sz="3600" dirty="0">
+              <a:rPr lang="en-GB" sz="3000" dirty="0">
                 <a:solidFill>
                   <a:schemeClr val="bg1"/>
                 </a:solidFill>
@@ -5309,7 +5309,7 @@
               </a:rPr>
               <a:t>}}</a:t>
             </a:r>
-            <a:endParaRPr lang="en-US" sz="3600" dirty="0">
+            <a:endParaRPr lang="en-US" sz="3000" dirty="0">
               <a:solidFill>
                 <a:schemeClr val="bg1"/>
               </a:solidFill>
@@ -5415,7 +5415,7 @@
               </a:lnSpc>
             </a:pPr>
             <a:r>
-              <a:rPr lang="en-GB" sz="3600" dirty="0">
+              <a:rPr lang="en-GB" sz="3000" dirty="0">
                 <a:solidFill>
                   <a:srgbClr val="757575"/>
                 </a:solidFill>
@@ -5424,7 +5424,7 @@
               <a:t>{{</a:t>
             </a:r>
             <a:r>
-              <a:rPr lang="en-GB" sz="3600" dirty="0" err="1">
+              <a:rPr lang="en-GB" sz="3000" dirty="0" err="1">
                 <a:solidFill>
                   <a:srgbClr val="757575"/>
                 </a:solidFill>
@@ -5433,7 +5433,7 @@
               <a:t>stat_cost_per_job</a:t>
             </a:r>
             <a:r>
-              <a:rPr lang="en-GB" sz="3600" dirty="0">
+              <a:rPr lang="en-GB" sz="3000" dirty="0">
                 <a:solidFill>
                   <a:srgbClr val="757575"/>
                 </a:solidFill>
@@ -5441,7 +5441,7 @@
               </a:rPr>
               <a:t>}}</a:t>
             </a:r>
-            <a:endParaRPr lang="en-US" sz="3600" dirty="0">
+            <a:endParaRPr lang="en-US" sz="3000" dirty="0">
               <a:solidFill>
                 <a:srgbClr val="757575"/>
               </a:solidFill>
@@ -5554,7 +5554,7 @@
           <a:p>
             <a:pPr algn="ctr"/>
             <a:r>
-              <a:rPr lang="en-GB" sz="3600" dirty="0">
+              <a:rPr lang="en-GB" sz="3000" dirty="0">
                 <a:solidFill>
                   <a:schemeClr val="bg1"/>
                 </a:solidFill>
@@ -5563,7 +5563,7 @@
               <a:t>{{</a:t>
             </a:r>
             <a:r>
-              <a:rPr lang="en-GB" sz="3600" dirty="0" err="1">
+              <a:rPr lang="en-GB" sz="3000" dirty="0" err="1">
                 <a:solidFill>
                   <a:schemeClr val="bg1"/>
                 </a:solidFill>
@@ -5572,7 +5572,7 @@
               <a:t>stat_cost_per_view</a:t>
             </a:r>
             <a:r>
-              <a:rPr lang="en-GB" sz="3600" dirty="0">
+              <a:rPr lang="en-GB" sz="3000" dirty="0">
                 <a:solidFill>
                   <a:schemeClr val="bg1"/>
                 </a:solidFill>
@@ -5580,7 +5580,7 @@
               </a:rPr>
               <a:t>}}</a:t>
             </a:r>
-            <a:endParaRPr lang="en-US" sz="3600" dirty="0">
+            <a:endParaRPr lang="en-US" sz="3000" dirty="0">
               <a:solidFill>
                 <a:schemeClr val="bg1"/>
               </a:solidFill>
@@ -5686,7 +5686,7 @@
               </a:lnSpc>
             </a:pPr>
             <a:r>
-              <a:rPr lang="en-GB" sz="3600" dirty="0">
+              <a:rPr lang="en-GB" sz="3000" dirty="0">
                 <a:solidFill>
                   <a:srgbClr val="757575"/>
                 </a:solidFill>
@@ -5695,7 +5695,7 @@
               <a:t>{{</a:t>
             </a:r>
             <a:r>
-              <a:rPr lang="en-GB" sz="3600" dirty="0" err="1">
+              <a:rPr lang="en-GB" sz="3000" dirty="0" err="1">
                 <a:solidFill>
                   <a:srgbClr val="757575"/>
                 </a:solidFill>
@@ -5704,7 +5704,7 @@
               <a:t>stat_cost_per_apply</a:t>
             </a:r>
             <a:r>
-              <a:rPr lang="en-GB" sz="3600" dirty="0">
+              <a:rPr lang="en-GB" sz="3000" dirty="0">
                 <a:solidFill>
                   <a:srgbClr val="757575"/>
                 </a:solidFill>
@@ -5712,7 +5712,7 @@
               </a:rPr>
               <a:t>}}</a:t>
             </a:r>
-            <a:endParaRPr lang="en-US" sz="3600" dirty="0">
+            <a:endParaRPr lang="en-US" sz="3000" dirty="0">
               <a:solidFill>
                 <a:srgbClr val="757575"/>
               </a:solidFill>
